--- a/slides/T320_Classificação (Parte IV).pptx
+++ b/slides/T320_Classificação (Parte IV).pptx
@@ -300,7 +300,7 @@
           <a:p>
             <a:fld id="{144F1436-6906-4D93-B7A2-786C327BFA14}" type="datetimeFigureOut">
               <a:rPr lang="nl-BE" smtClean="0"/>
-              <a:t>20/09/2025</a:t>
+              <a:t>20/03/2026</a:t>
             </a:fld>
             <a:endParaRPr lang="nl-BE"/>
           </a:p>
@@ -366,7 +366,7 @@
           <a:p>
             <a:fld id="{F7E56D9B-79AD-444A-AFED-DEC23408F8B4}" type="slidenum">
               <a:rPr lang="nl-BE" smtClean="0"/>
-              <a:t>‹nº›</a:t>
+              <a:t>‹#›</a:t>
             </a:fld>
             <a:endParaRPr lang="nl-BE"/>
           </a:p>
@@ -465,7 +465,7 @@
           <a:p>
             <a:fld id="{AA8CD09E-2914-4F47-B6C1-51B2C31814C9}" type="datetimeFigureOut">
               <a:rPr lang="pt-BR" smtClean="0"/>
-              <a:t>20/09/2025</a:t>
+              <a:t>20/03/2026</a:t>
             </a:fld>
             <a:endParaRPr lang="pt-BR"/>
           </a:p>
@@ -623,7 +623,7 @@
           <a:p>
             <a:fld id="{6FC8D850-966F-45A6-8DE7-15B891E7D40D}" type="slidenum">
               <a:rPr lang="pt-BR" smtClean="0"/>
-              <a:t>‹nº›</a:t>
+              <a:t>‹#›</a:t>
             </a:fld>
             <a:endParaRPr lang="pt-BR"/>
           </a:p>
@@ -5291,18 +5291,6 @@
               </a:rPr>
               <a:t>Classificação de documentos por tópicos</a:t>
             </a:r>
-            <a:r>
-              <a:rPr lang="pt-BR" sz="1200" b="0" i="0" kern="1200" dirty="0">
-                <a:solidFill>
-                  <a:schemeClr val="tx1"/>
-                </a:solidFill>
-                <a:effectLst/>
-                <a:latin typeface="+mn-lt"/>
-                <a:ea typeface="+mn-ea"/>
-                <a:cs typeface="+mn-cs"/>
-              </a:rPr>
-              <a:t/>
-            </a:r>
             <a:br>
               <a:rPr lang="pt-BR" sz="1200" b="0" i="0" kern="1200" dirty="0">
                 <a:solidFill>
@@ -5340,18 +5328,6 @@
               </a:rPr>
               <a:t>Reconhecimento de objetos em imagens</a:t>
             </a:r>
-            <a:r>
-              <a:rPr lang="pt-BR" sz="1200" b="0" i="0" kern="1200" dirty="0">
-                <a:solidFill>
-                  <a:schemeClr val="tx1"/>
-                </a:solidFill>
-                <a:effectLst/>
-                <a:latin typeface="+mn-lt"/>
-                <a:ea typeface="+mn-ea"/>
-                <a:cs typeface="+mn-cs"/>
-              </a:rPr>
-              <a:t/>
-            </a:r>
             <a:br>
               <a:rPr lang="pt-BR" sz="1200" b="0" i="0" kern="1200" dirty="0">
                 <a:solidFill>
@@ -5389,18 +5365,6 @@
               </a:rPr>
               <a:t>Sistema de recomendação de filmes por gêneros</a:t>
             </a:r>
-            <a:r>
-              <a:rPr lang="pt-BR" sz="1200" b="0" i="0" kern="1200" dirty="0">
-                <a:solidFill>
-                  <a:schemeClr val="tx1"/>
-                </a:solidFill>
-                <a:effectLst/>
-                <a:latin typeface="+mn-lt"/>
-                <a:ea typeface="+mn-ea"/>
-                <a:cs typeface="+mn-cs"/>
-              </a:rPr>
-              <a:t/>
-            </a:r>
             <a:br>
               <a:rPr lang="pt-BR" sz="1200" b="0" i="0" kern="1200" dirty="0">
                 <a:solidFill>
@@ -5438,18 +5402,6 @@
               </a:rPr>
               <a:t>Diagnóstico médico</a:t>
             </a:r>
-            <a:r>
-              <a:rPr lang="pt-BR" sz="1200" b="0" i="0" kern="1200" dirty="0">
-                <a:solidFill>
-                  <a:schemeClr val="tx1"/>
-                </a:solidFill>
-                <a:effectLst/>
-                <a:latin typeface="+mn-lt"/>
-                <a:ea typeface="+mn-ea"/>
-                <a:cs typeface="+mn-cs"/>
-              </a:rPr>
-              <a:t/>
-            </a:r>
             <a:br>
               <a:rPr lang="pt-BR" sz="1200" b="0" i="0" kern="1200" dirty="0">
                 <a:solidFill>
@@ -5487,18 +5439,6 @@
               </a:rPr>
               <a:t>Análise de sentimentos em texto</a:t>
             </a:r>
-            <a:r>
-              <a:rPr lang="pt-BR" sz="1200" b="0" i="0" kern="1200" dirty="0">
-                <a:solidFill>
-                  <a:schemeClr val="tx1"/>
-                </a:solidFill>
-                <a:effectLst/>
-                <a:latin typeface="+mn-lt"/>
-                <a:ea typeface="+mn-ea"/>
-                <a:cs typeface="+mn-cs"/>
-              </a:rPr>
-              <a:t/>
-            </a:r>
             <a:br>
               <a:rPr lang="pt-BR" sz="1200" b="0" i="0" kern="1200" dirty="0">
                 <a:solidFill>
@@ -5548,18 +5488,6 @@
               </a:rPr>
               <a:t> em produtos de e-commerce</a:t>
             </a:r>
-            <a:r>
-              <a:rPr lang="pt-BR" sz="1200" b="0" i="0" kern="1200" dirty="0">
-                <a:solidFill>
-                  <a:schemeClr val="tx1"/>
-                </a:solidFill>
-                <a:effectLst/>
-                <a:latin typeface="+mn-lt"/>
-                <a:ea typeface="+mn-ea"/>
-                <a:cs typeface="+mn-cs"/>
-              </a:rPr>
-              <a:t/>
-            </a:r>
             <a:br>
               <a:rPr lang="pt-BR" sz="1200" b="0" i="0" kern="1200" dirty="0">
                 <a:solidFill>
@@ -5621,18 +5549,6 @@
               </a:rPr>
               <a:t>Classificação de músicas por gênero</a:t>
             </a:r>
-            <a:r>
-              <a:rPr lang="pt-BR" sz="1200" b="0" i="0" kern="1200" dirty="0">
-                <a:solidFill>
-                  <a:schemeClr val="tx1"/>
-                </a:solidFill>
-                <a:effectLst/>
-                <a:latin typeface="+mn-lt"/>
-                <a:ea typeface="+mn-ea"/>
-                <a:cs typeface="+mn-cs"/>
-              </a:rPr>
-              <a:t/>
-            </a:r>
             <a:br>
               <a:rPr lang="pt-BR" sz="1200" b="0" i="0" kern="1200" dirty="0">
                 <a:solidFill>
@@ -5658,17 +5574,9 @@
             </a:r>
           </a:p>
           <a:p>
-            <a:r>
-              <a:rPr lang="pt-BR" dirty="0"/>
-              <a:t/>
-            </a:r>
             <a:br>
               <a:rPr lang="pt-BR" dirty="0"/>
             </a:br>
-            <a:r>
-              <a:rPr lang="pt-BR" dirty="0"/>
-              <a:t/>
-            </a:r>
             <a:br>
               <a:rPr lang="pt-BR" dirty="0"/>
             </a:br>
@@ -6144,7 +6052,7 @@
           <p:cNvPr id="2" name="Título 1">
             <a:extLst>
               <a:ext uri="{FF2B5EF4-FFF2-40B4-BE49-F238E27FC236}">
-                <a16:creationId xmlns="" xmlns:a16="http://schemas.microsoft.com/office/drawing/2014/main" id="{1DB9B4FF-B06E-403C-A326-BDC64D8FF94E}"/>
+                <a16:creationId xmlns:a16="http://schemas.microsoft.com/office/drawing/2014/main" id="{1DB9B4FF-B06E-403C-A326-BDC64D8FF94E}"/>
               </a:ext>
             </a:extLst>
           </p:cNvPr>
@@ -6181,7 +6089,7 @@
           <p:cNvPr id="3" name="Subtítulo 2">
             <a:extLst>
               <a:ext uri="{FF2B5EF4-FFF2-40B4-BE49-F238E27FC236}">
-                <a16:creationId xmlns="" xmlns:a16="http://schemas.microsoft.com/office/drawing/2014/main" id="{247BDFCE-746E-45BF-A319-4733D58D1632}"/>
+                <a16:creationId xmlns:a16="http://schemas.microsoft.com/office/drawing/2014/main" id="{247BDFCE-746E-45BF-A319-4733D58D1632}"/>
               </a:ext>
             </a:extLst>
           </p:cNvPr>
@@ -6251,7 +6159,7 @@
           <p:cNvPr id="4" name="Espaço Reservado para Data 3">
             <a:extLst>
               <a:ext uri="{FF2B5EF4-FFF2-40B4-BE49-F238E27FC236}">
-                <a16:creationId xmlns="" xmlns:a16="http://schemas.microsoft.com/office/drawing/2014/main" id="{9EDE2778-5372-4104-B96D-968184DA8288}"/>
+                <a16:creationId xmlns:a16="http://schemas.microsoft.com/office/drawing/2014/main" id="{9EDE2778-5372-4104-B96D-968184DA8288}"/>
               </a:ext>
             </a:extLst>
           </p:cNvPr>
@@ -6269,7 +6177,7 @@
           <a:p>
             <a:fld id="{63289F7E-B80B-496E-81B4-D396C37C9454}" type="datetimeFigureOut">
               <a:rPr lang="pt-BR" smtClean="0"/>
-              <a:t>20/09/2025</a:t>
+              <a:t>20/03/2026</a:t>
             </a:fld>
             <a:endParaRPr lang="pt-BR"/>
           </a:p>
@@ -6280,7 +6188,7 @@
           <p:cNvPr id="5" name="Espaço Reservado para Rodapé 4">
             <a:extLst>
               <a:ext uri="{FF2B5EF4-FFF2-40B4-BE49-F238E27FC236}">
-                <a16:creationId xmlns="" xmlns:a16="http://schemas.microsoft.com/office/drawing/2014/main" id="{C1DD0F41-C861-4051-988D-3024A37A4B93}"/>
+                <a16:creationId xmlns:a16="http://schemas.microsoft.com/office/drawing/2014/main" id="{C1DD0F41-C861-4051-988D-3024A37A4B93}"/>
               </a:ext>
             </a:extLst>
           </p:cNvPr>
@@ -6305,7 +6213,7 @@
           <p:cNvPr id="6" name="Espaço Reservado para Número de Slide 5">
             <a:extLst>
               <a:ext uri="{FF2B5EF4-FFF2-40B4-BE49-F238E27FC236}">
-                <a16:creationId xmlns="" xmlns:a16="http://schemas.microsoft.com/office/drawing/2014/main" id="{07E5967E-D980-431A-A5DB-3F0C5030A81E}"/>
+                <a16:creationId xmlns:a16="http://schemas.microsoft.com/office/drawing/2014/main" id="{07E5967E-D980-431A-A5DB-3F0C5030A81E}"/>
               </a:ext>
             </a:extLst>
           </p:cNvPr>
@@ -6323,7 +6231,7 @@
           <a:p>
             <a:fld id="{1A7E88B7-70CE-4035-AE73-13FA6FB985D4}" type="slidenum">
               <a:rPr lang="pt-BR" smtClean="0"/>
-              <a:t>‹nº›</a:t>
+              <a:t>‹#›</a:t>
             </a:fld>
             <a:endParaRPr lang="pt-BR"/>
           </a:p>
@@ -6364,7 +6272,7 @@
           <p:cNvPr id="2" name="Título 1">
             <a:extLst>
               <a:ext uri="{FF2B5EF4-FFF2-40B4-BE49-F238E27FC236}">
-                <a16:creationId xmlns="" xmlns:a16="http://schemas.microsoft.com/office/drawing/2014/main" id="{9036C49F-3E68-4175-81BA-3C3FEE44308A}"/>
+                <a16:creationId xmlns:a16="http://schemas.microsoft.com/office/drawing/2014/main" id="{9036C49F-3E68-4175-81BA-3C3FEE44308A}"/>
               </a:ext>
             </a:extLst>
           </p:cNvPr>
@@ -6392,7 +6300,7 @@
           <p:cNvPr id="3" name="Espaço Reservado para Texto Vertical 2">
             <a:extLst>
               <a:ext uri="{FF2B5EF4-FFF2-40B4-BE49-F238E27FC236}">
-                <a16:creationId xmlns="" xmlns:a16="http://schemas.microsoft.com/office/drawing/2014/main" id="{426FA736-3DD3-4D4E-B57B-BBE1D8F7D424}"/>
+                <a16:creationId xmlns:a16="http://schemas.microsoft.com/office/drawing/2014/main" id="{426FA736-3DD3-4D4E-B57B-BBE1D8F7D424}"/>
               </a:ext>
             </a:extLst>
           </p:cNvPr>
@@ -6449,7 +6357,7 @@
           <p:cNvPr id="4" name="Espaço Reservado para Data 3">
             <a:extLst>
               <a:ext uri="{FF2B5EF4-FFF2-40B4-BE49-F238E27FC236}">
-                <a16:creationId xmlns="" xmlns:a16="http://schemas.microsoft.com/office/drawing/2014/main" id="{99E8855C-D8FD-48F6-B14E-861E0DE4D915}"/>
+                <a16:creationId xmlns:a16="http://schemas.microsoft.com/office/drawing/2014/main" id="{99E8855C-D8FD-48F6-B14E-861E0DE4D915}"/>
               </a:ext>
             </a:extLst>
           </p:cNvPr>
@@ -6467,7 +6375,7 @@
           <a:p>
             <a:fld id="{63289F7E-B80B-496E-81B4-D396C37C9454}" type="datetimeFigureOut">
               <a:rPr lang="pt-BR" smtClean="0"/>
-              <a:t>20/09/2025</a:t>
+              <a:t>20/03/2026</a:t>
             </a:fld>
             <a:endParaRPr lang="pt-BR"/>
           </a:p>
@@ -6478,7 +6386,7 @@
           <p:cNvPr id="5" name="Espaço Reservado para Rodapé 4">
             <a:extLst>
               <a:ext uri="{FF2B5EF4-FFF2-40B4-BE49-F238E27FC236}">
-                <a16:creationId xmlns="" xmlns:a16="http://schemas.microsoft.com/office/drawing/2014/main" id="{97C0BB88-2F21-42A5-ACFF-83DA47F2D340}"/>
+                <a16:creationId xmlns:a16="http://schemas.microsoft.com/office/drawing/2014/main" id="{97C0BB88-2F21-42A5-ACFF-83DA47F2D340}"/>
               </a:ext>
             </a:extLst>
           </p:cNvPr>
@@ -6503,7 +6411,7 @@
           <p:cNvPr id="6" name="Espaço Reservado para Número de Slide 5">
             <a:extLst>
               <a:ext uri="{FF2B5EF4-FFF2-40B4-BE49-F238E27FC236}">
-                <a16:creationId xmlns="" xmlns:a16="http://schemas.microsoft.com/office/drawing/2014/main" id="{6CB462B3-1F22-4C05-B4B8-7A279FB7D5E9}"/>
+                <a16:creationId xmlns:a16="http://schemas.microsoft.com/office/drawing/2014/main" id="{6CB462B3-1F22-4C05-B4B8-7A279FB7D5E9}"/>
               </a:ext>
             </a:extLst>
           </p:cNvPr>
@@ -6521,7 +6429,7 @@
           <a:p>
             <a:fld id="{1A7E88B7-70CE-4035-AE73-13FA6FB985D4}" type="slidenum">
               <a:rPr lang="pt-BR" smtClean="0"/>
-              <a:t>‹nº›</a:t>
+              <a:t>‹#›</a:t>
             </a:fld>
             <a:endParaRPr lang="pt-BR"/>
           </a:p>
@@ -6562,7 +6470,7 @@
           <p:cNvPr id="2" name="Título Vertical 1">
             <a:extLst>
               <a:ext uri="{FF2B5EF4-FFF2-40B4-BE49-F238E27FC236}">
-                <a16:creationId xmlns="" xmlns:a16="http://schemas.microsoft.com/office/drawing/2014/main" id="{EAEAB728-701C-4207-A9D5-23FF45C60502}"/>
+                <a16:creationId xmlns:a16="http://schemas.microsoft.com/office/drawing/2014/main" id="{EAEAB728-701C-4207-A9D5-23FF45C60502}"/>
               </a:ext>
             </a:extLst>
           </p:cNvPr>
@@ -6595,7 +6503,7 @@
           <p:cNvPr id="3" name="Espaço Reservado para Texto Vertical 2">
             <a:extLst>
               <a:ext uri="{FF2B5EF4-FFF2-40B4-BE49-F238E27FC236}">
-                <a16:creationId xmlns="" xmlns:a16="http://schemas.microsoft.com/office/drawing/2014/main" id="{BA8C8CCF-7823-480A-9A19-0F664DD17E3B}"/>
+                <a16:creationId xmlns:a16="http://schemas.microsoft.com/office/drawing/2014/main" id="{BA8C8CCF-7823-480A-9A19-0F664DD17E3B}"/>
               </a:ext>
             </a:extLst>
           </p:cNvPr>
@@ -6657,7 +6565,7 @@
           <p:cNvPr id="4" name="Espaço Reservado para Data 3">
             <a:extLst>
               <a:ext uri="{FF2B5EF4-FFF2-40B4-BE49-F238E27FC236}">
-                <a16:creationId xmlns="" xmlns:a16="http://schemas.microsoft.com/office/drawing/2014/main" id="{721D5734-7B1F-425D-942F-6EB73344027C}"/>
+                <a16:creationId xmlns:a16="http://schemas.microsoft.com/office/drawing/2014/main" id="{721D5734-7B1F-425D-942F-6EB73344027C}"/>
               </a:ext>
             </a:extLst>
           </p:cNvPr>
@@ -6675,7 +6583,7 @@
           <a:p>
             <a:fld id="{63289F7E-B80B-496E-81B4-D396C37C9454}" type="datetimeFigureOut">
               <a:rPr lang="pt-BR" smtClean="0"/>
-              <a:t>20/09/2025</a:t>
+              <a:t>20/03/2026</a:t>
             </a:fld>
             <a:endParaRPr lang="pt-BR"/>
           </a:p>
@@ -6686,7 +6594,7 @@
           <p:cNvPr id="5" name="Espaço Reservado para Rodapé 4">
             <a:extLst>
               <a:ext uri="{FF2B5EF4-FFF2-40B4-BE49-F238E27FC236}">
-                <a16:creationId xmlns="" xmlns:a16="http://schemas.microsoft.com/office/drawing/2014/main" id="{1E1AAEAC-F08D-45FE-89EC-B1B349A868C9}"/>
+                <a16:creationId xmlns:a16="http://schemas.microsoft.com/office/drawing/2014/main" id="{1E1AAEAC-F08D-45FE-89EC-B1B349A868C9}"/>
               </a:ext>
             </a:extLst>
           </p:cNvPr>
@@ -6711,7 +6619,7 @@
           <p:cNvPr id="6" name="Espaço Reservado para Número de Slide 5">
             <a:extLst>
               <a:ext uri="{FF2B5EF4-FFF2-40B4-BE49-F238E27FC236}">
-                <a16:creationId xmlns="" xmlns:a16="http://schemas.microsoft.com/office/drawing/2014/main" id="{BAA44493-9911-47B2-87A6-C2141A972BC8}"/>
+                <a16:creationId xmlns:a16="http://schemas.microsoft.com/office/drawing/2014/main" id="{BAA44493-9911-47B2-87A6-C2141A972BC8}"/>
               </a:ext>
             </a:extLst>
           </p:cNvPr>
@@ -6729,7 +6637,7 @@
           <a:p>
             <a:fld id="{1A7E88B7-70CE-4035-AE73-13FA6FB985D4}" type="slidenum">
               <a:rPr lang="pt-BR" smtClean="0"/>
-              <a:t>‹nº›</a:t>
+              <a:t>‹#›</a:t>
             </a:fld>
             <a:endParaRPr lang="pt-BR"/>
           </a:p>
@@ -6770,7 +6678,7 @@
           <p:cNvPr id="2" name="Título 1">
             <a:extLst>
               <a:ext uri="{FF2B5EF4-FFF2-40B4-BE49-F238E27FC236}">
-                <a16:creationId xmlns="" xmlns:a16="http://schemas.microsoft.com/office/drawing/2014/main" id="{71BD44A5-8F21-4626-A01D-48A1C874B1D5}"/>
+                <a16:creationId xmlns:a16="http://schemas.microsoft.com/office/drawing/2014/main" id="{71BD44A5-8F21-4626-A01D-48A1C874B1D5}"/>
               </a:ext>
             </a:extLst>
           </p:cNvPr>
@@ -6798,7 +6706,7 @@
           <p:cNvPr id="3" name="Espaço Reservado para Conteúdo 2">
             <a:extLst>
               <a:ext uri="{FF2B5EF4-FFF2-40B4-BE49-F238E27FC236}">
-                <a16:creationId xmlns="" xmlns:a16="http://schemas.microsoft.com/office/drawing/2014/main" id="{B79E8085-65A9-48AA-951D-71D978BFF4ED}"/>
+                <a16:creationId xmlns:a16="http://schemas.microsoft.com/office/drawing/2014/main" id="{B79E8085-65A9-48AA-951D-71D978BFF4ED}"/>
               </a:ext>
             </a:extLst>
           </p:cNvPr>
@@ -6855,7 +6763,7 @@
           <p:cNvPr id="4" name="Espaço Reservado para Data 3">
             <a:extLst>
               <a:ext uri="{FF2B5EF4-FFF2-40B4-BE49-F238E27FC236}">
-                <a16:creationId xmlns="" xmlns:a16="http://schemas.microsoft.com/office/drawing/2014/main" id="{F05BE1AF-51EA-425D-B188-DE7BD675009F}"/>
+                <a16:creationId xmlns:a16="http://schemas.microsoft.com/office/drawing/2014/main" id="{F05BE1AF-51EA-425D-B188-DE7BD675009F}"/>
               </a:ext>
             </a:extLst>
           </p:cNvPr>
@@ -6873,7 +6781,7 @@
           <a:p>
             <a:fld id="{63289F7E-B80B-496E-81B4-D396C37C9454}" type="datetimeFigureOut">
               <a:rPr lang="pt-BR" smtClean="0"/>
-              <a:t>20/09/2025</a:t>
+              <a:t>20/03/2026</a:t>
             </a:fld>
             <a:endParaRPr lang="pt-BR"/>
           </a:p>
@@ -6884,7 +6792,7 @@
           <p:cNvPr id="5" name="Espaço Reservado para Rodapé 4">
             <a:extLst>
               <a:ext uri="{FF2B5EF4-FFF2-40B4-BE49-F238E27FC236}">
-                <a16:creationId xmlns="" xmlns:a16="http://schemas.microsoft.com/office/drawing/2014/main" id="{121BE632-29CF-4CB9-B365-C9EF38F89BE6}"/>
+                <a16:creationId xmlns:a16="http://schemas.microsoft.com/office/drawing/2014/main" id="{121BE632-29CF-4CB9-B365-C9EF38F89BE6}"/>
               </a:ext>
             </a:extLst>
           </p:cNvPr>
@@ -6909,7 +6817,7 @@
           <p:cNvPr id="6" name="Espaço Reservado para Número de Slide 5">
             <a:extLst>
               <a:ext uri="{FF2B5EF4-FFF2-40B4-BE49-F238E27FC236}">
-                <a16:creationId xmlns="" xmlns:a16="http://schemas.microsoft.com/office/drawing/2014/main" id="{60CF3DD1-9AEC-4A57-B461-4E4DD86FAC18}"/>
+                <a16:creationId xmlns:a16="http://schemas.microsoft.com/office/drawing/2014/main" id="{60CF3DD1-9AEC-4A57-B461-4E4DD86FAC18}"/>
               </a:ext>
             </a:extLst>
           </p:cNvPr>
@@ -6927,7 +6835,7 @@
           <a:p>
             <a:fld id="{1A7E88B7-70CE-4035-AE73-13FA6FB985D4}" type="slidenum">
               <a:rPr lang="pt-BR" smtClean="0"/>
-              <a:t>‹nº›</a:t>
+              <a:t>‹#›</a:t>
             </a:fld>
             <a:endParaRPr lang="pt-BR"/>
           </a:p>
@@ -6968,7 +6876,7 @@
           <p:cNvPr id="2" name="Título 1">
             <a:extLst>
               <a:ext uri="{FF2B5EF4-FFF2-40B4-BE49-F238E27FC236}">
-                <a16:creationId xmlns="" xmlns:a16="http://schemas.microsoft.com/office/drawing/2014/main" id="{34AB2FF0-A4D7-4E28-991D-FF26140D5988}"/>
+                <a16:creationId xmlns:a16="http://schemas.microsoft.com/office/drawing/2014/main" id="{34AB2FF0-A4D7-4E28-991D-FF26140D5988}"/>
               </a:ext>
             </a:extLst>
           </p:cNvPr>
@@ -7005,7 +6913,7 @@
           <p:cNvPr id="3" name="Espaço Reservado para Texto 2">
             <a:extLst>
               <a:ext uri="{FF2B5EF4-FFF2-40B4-BE49-F238E27FC236}">
-                <a16:creationId xmlns="" xmlns:a16="http://schemas.microsoft.com/office/drawing/2014/main" id="{E2AC45B0-4145-40DB-8E61-105461170604}"/>
+                <a16:creationId xmlns:a16="http://schemas.microsoft.com/office/drawing/2014/main" id="{E2AC45B0-4145-40DB-8E61-105461170604}"/>
               </a:ext>
             </a:extLst>
           </p:cNvPr>
@@ -7130,7 +7038,7 @@
           <p:cNvPr id="4" name="Espaço Reservado para Data 3">
             <a:extLst>
               <a:ext uri="{FF2B5EF4-FFF2-40B4-BE49-F238E27FC236}">
-                <a16:creationId xmlns="" xmlns:a16="http://schemas.microsoft.com/office/drawing/2014/main" id="{50F1D3FB-740A-4EBA-A309-2CE71D12ECFB}"/>
+                <a16:creationId xmlns:a16="http://schemas.microsoft.com/office/drawing/2014/main" id="{50F1D3FB-740A-4EBA-A309-2CE71D12ECFB}"/>
               </a:ext>
             </a:extLst>
           </p:cNvPr>
@@ -7148,7 +7056,7 @@
           <a:p>
             <a:fld id="{63289F7E-B80B-496E-81B4-D396C37C9454}" type="datetimeFigureOut">
               <a:rPr lang="pt-BR" smtClean="0"/>
-              <a:t>20/09/2025</a:t>
+              <a:t>20/03/2026</a:t>
             </a:fld>
             <a:endParaRPr lang="pt-BR"/>
           </a:p>
@@ -7159,7 +7067,7 @@
           <p:cNvPr id="5" name="Espaço Reservado para Rodapé 4">
             <a:extLst>
               <a:ext uri="{FF2B5EF4-FFF2-40B4-BE49-F238E27FC236}">
-                <a16:creationId xmlns="" xmlns:a16="http://schemas.microsoft.com/office/drawing/2014/main" id="{BDCAB18F-8715-4465-A940-F9C193A2ACE9}"/>
+                <a16:creationId xmlns:a16="http://schemas.microsoft.com/office/drawing/2014/main" id="{BDCAB18F-8715-4465-A940-F9C193A2ACE9}"/>
               </a:ext>
             </a:extLst>
           </p:cNvPr>
@@ -7184,7 +7092,7 @@
           <p:cNvPr id="6" name="Espaço Reservado para Número de Slide 5">
             <a:extLst>
               <a:ext uri="{FF2B5EF4-FFF2-40B4-BE49-F238E27FC236}">
-                <a16:creationId xmlns="" xmlns:a16="http://schemas.microsoft.com/office/drawing/2014/main" id="{353466C6-8248-429F-8056-FF040BF509EB}"/>
+                <a16:creationId xmlns:a16="http://schemas.microsoft.com/office/drawing/2014/main" id="{353466C6-8248-429F-8056-FF040BF509EB}"/>
               </a:ext>
             </a:extLst>
           </p:cNvPr>
@@ -7202,7 +7110,7 @@
           <a:p>
             <a:fld id="{1A7E88B7-70CE-4035-AE73-13FA6FB985D4}" type="slidenum">
               <a:rPr lang="pt-BR" smtClean="0"/>
-              <a:t>‹nº›</a:t>
+              <a:t>‹#›</a:t>
             </a:fld>
             <a:endParaRPr lang="pt-BR"/>
           </a:p>
@@ -7243,7 +7151,7 @@
           <p:cNvPr id="2" name="Título 1">
             <a:extLst>
               <a:ext uri="{FF2B5EF4-FFF2-40B4-BE49-F238E27FC236}">
-                <a16:creationId xmlns="" xmlns:a16="http://schemas.microsoft.com/office/drawing/2014/main" id="{BC7BB9F0-F14B-4A91-B2B7-35BC47FE4DE7}"/>
+                <a16:creationId xmlns:a16="http://schemas.microsoft.com/office/drawing/2014/main" id="{BC7BB9F0-F14B-4A91-B2B7-35BC47FE4DE7}"/>
               </a:ext>
             </a:extLst>
           </p:cNvPr>
@@ -7271,7 +7179,7 @@
           <p:cNvPr id="3" name="Espaço Reservado para Conteúdo 2">
             <a:extLst>
               <a:ext uri="{FF2B5EF4-FFF2-40B4-BE49-F238E27FC236}">
-                <a16:creationId xmlns="" xmlns:a16="http://schemas.microsoft.com/office/drawing/2014/main" id="{EC1FC1C4-73DA-47A6-8496-B0B457F7D39A}"/>
+                <a16:creationId xmlns:a16="http://schemas.microsoft.com/office/drawing/2014/main" id="{EC1FC1C4-73DA-47A6-8496-B0B457F7D39A}"/>
               </a:ext>
             </a:extLst>
           </p:cNvPr>
@@ -7333,7 +7241,7 @@
           <p:cNvPr id="4" name="Espaço Reservado para Conteúdo 3">
             <a:extLst>
               <a:ext uri="{FF2B5EF4-FFF2-40B4-BE49-F238E27FC236}">
-                <a16:creationId xmlns="" xmlns:a16="http://schemas.microsoft.com/office/drawing/2014/main" id="{E92F06A8-A449-4D92-9912-76873E529B38}"/>
+                <a16:creationId xmlns:a16="http://schemas.microsoft.com/office/drawing/2014/main" id="{E92F06A8-A449-4D92-9912-76873E529B38}"/>
               </a:ext>
             </a:extLst>
           </p:cNvPr>
@@ -7395,7 +7303,7 @@
           <p:cNvPr id="5" name="Espaço Reservado para Data 4">
             <a:extLst>
               <a:ext uri="{FF2B5EF4-FFF2-40B4-BE49-F238E27FC236}">
-                <a16:creationId xmlns="" xmlns:a16="http://schemas.microsoft.com/office/drawing/2014/main" id="{938070A4-BC2F-4D55-BD8D-DEAF11BB9EE9}"/>
+                <a16:creationId xmlns:a16="http://schemas.microsoft.com/office/drawing/2014/main" id="{938070A4-BC2F-4D55-BD8D-DEAF11BB9EE9}"/>
               </a:ext>
             </a:extLst>
           </p:cNvPr>
@@ -7413,7 +7321,7 @@
           <a:p>
             <a:fld id="{63289F7E-B80B-496E-81B4-D396C37C9454}" type="datetimeFigureOut">
               <a:rPr lang="pt-BR" smtClean="0"/>
-              <a:t>20/09/2025</a:t>
+              <a:t>20/03/2026</a:t>
             </a:fld>
             <a:endParaRPr lang="pt-BR"/>
           </a:p>
@@ -7424,7 +7332,7 @@
           <p:cNvPr id="6" name="Espaço Reservado para Rodapé 5">
             <a:extLst>
               <a:ext uri="{FF2B5EF4-FFF2-40B4-BE49-F238E27FC236}">
-                <a16:creationId xmlns="" xmlns:a16="http://schemas.microsoft.com/office/drawing/2014/main" id="{45CC2DB8-844A-465F-BA9A-7734C80C7F43}"/>
+                <a16:creationId xmlns:a16="http://schemas.microsoft.com/office/drawing/2014/main" id="{45CC2DB8-844A-465F-BA9A-7734C80C7F43}"/>
               </a:ext>
             </a:extLst>
           </p:cNvPr>
@@ -7449,7 +7357,7 @@
           <p:cNvPr id="7" name="Espaço Reservado para Número de Slide 6">
             <a:extLst>
               <a:ext uri="{FF2B5EF4-FFF2-40B4-BE49-F238E27FC236}">
-                <a16:creationId xmlns="" xmlns:a16="http://schemas.microsoft.com/office/drawing/2014/main" id="{4CC606A8-097B-4040-94E0-CD8C88280D8F}"/>
+                <a16:creationId xmlns:a16="http://schemas.microsoft.com/office/drawing/2014/main" id="{4CC606A8-097B-4040-94E0-CD8C88280D8F}"/>
               </a:ext>
             </a:extLst>
           </p:cNvPr>
@@ -7467,7 +7375,7 @@
           <a:p>
             <a:fld id="{1A7E88B7-70CE-4035-AE73-13FA6FB985D4}" type="slidenum">
               <a:rPr lang="pt-BR" smtClean="0"/>
-              <a:t>‹nº›</a:t>
+              <a:t>‹#›</a:t>
             </a:fld>
             <a:endParaRPr lang="pt-BR"/>
           </a:p>
@@ -7508,7 +7416,7 @@
           <p:cNvPr id="2" name="Título 1">
             <a:extLst>
               <a:ext uri="{FF2B5EF4-FFF2-40B4-BE49-F238E27FC236}">
-                <a16:creationId xmlns="" xmlns:a16="http://schemas.microsoft.com/office/drawing/2014/main" id="{76D66686-0143-4CB6-8C09-BA326F1E7ACA}"/>
+                <a16:creationId xmlns:a16="http://schemas.microsoft.com/office/drawing/2014/main" id="{76D66686-0143-4CB6-8C09-BA326F1E7ACA}"/>
               </a:ext>
             </a:extLst>
           </p:cNvPr>
@@ -7541,7 +7449,7 @@
           <p:cNvPr id="3" name="Espaço Reservado para Texto 2">
             <a:extLst>
               <a:ext uri="{FF2B5EF4-FFF2-40B4-BE49-F238E27FC236}">
-                <a16:creationId xmlns="" xmlns:a16="http://schemas.microsoft.com/office/drawing/2014/main" id="{0227AB85-F59E-4BCE-B846-4FA0992C2F23}"/>
+                <a16:creationId xmlns:a16="http://schemas.microsoft.com/office/drawing/2014/main" id="{0227AB85-F59E-4BCE-B846-4FA0992C2F23}"/>
               </a:ext>
             </a:extLst>
           </p:cNvPr>
@@ -7612,7 +7520,7 @@
           <p:cNvPr id="4" name="Espaço Reservado para Conteúdo 3">
             <a:extLst>
               <a:ext uri="{FF2B5EF4-FFF2-40B4-BE49-F238E27FC236}">
-                <a16:creationId xmlns="" xmlns:a16="http://schemas.microsoft.com/office/drawing/2014/main" id="{3373456C-7319-4D0A-827D-D29F6B083F5D}"/>
+                <a16:creationId xmlns:a16="http://schemas.microsoft.com/office/drawing/2014/main" id="{3373456C-7319-4D0A-827D-D29F6B083F5D}"/>
               </a:ext>
             </a:extLst>
           </p:cNvPr>
@@ -7674,7 +7582,7 @@
           <p:cNvPr id="5" name="Espaço Reservado para Texto 4">
             <a:extLst>
               <a:ext uri="{FF2B5EF4-FFF2-40B4-BE49-F238E27FC236}">
-                <a16:creationId xmlns="" xmlns:a16="http://schemas.microsoft.com/office/drawing/2014/main" id="{4CD109D0-2E83-4262-8029-A871CEC47406}"/>
+                <a16:creationId xmlns:a16="http://schemas.microsoft.com/office/drawing/2014/main" id="{4CD109D0-2E83-4262-8029-A871CEC47406}"/>
               </a:ext>
             </a:extLst>
           </p:cNvPr>
@@ -7745,7 +7653,7 @@
           <p:cNvPr id="6" name="Espaço Reservado para Conteúdo 5">
             <a:extLst>
               <a:ext uri="{FF2B5EF4-FFF2-40B4-BE49-F238E27FC236}">
-                <a16:creationId xmlns="" xmlns:a16="http://schemas.microsoft.com/office/drawing/2014/main" id="{AD706E3A-CFBB-4A6C-A65F-D0360A9E74FE}"/>
+                <a16:creationId xmlns:a16="http://schemas.microsoft.com/office/drawing/2014/main" id="{AD706E3A-CFBB-4A6C-A65F-D0360A9E74FE}"/>
               </a:ext>
             </a:extLst>
           </p:cNvPr>
@@ -7807,7 +7715,7 @@
           <p:cNvPr id="7" name="Espaço Reservado para Data 6">
             <a:extLst>
               <a:ext uri="{FF2B5EF4-FFF2-40B4-BE49-F238E27FC236}">
-                <a16:creationId xmlns="" xmlns:a16="http://schemas.microsoft.com/office/drawing/2014/main" id="{4172C0E5-5AF0-4805-BB51-443733CD2BD5}"/>
+                <a16:creationId xmlns:a16="http://schemas.microsoft.com/office/drawing/2014/main" id="{4172C0E5-5AF0-4805-BB51-443733CD2BD5}"/>
               </a:ext>
             </a:extLst>
           </p:cNvPr>
@@ -7825,7 +7733,7 @@
           <a:p>
             <a:fld id="{63289F7E-B80B-496E-81B4-D396C37C9454}" type="datetimeFigureOut">
               <a:rPr lang="pt-BR" smtClean="0"/>
-              <a:t>20/09/2025</a:t>
+              <a:t>20/03/2026</a:t>
             </a:fld>
             <a:endParaRPr lang="pt-BR"/>
           </a:p>
@@ -7836,7 +7744,7 @@
           <p:cNvPr id="8" name="Espaço Reservado para Rodapé 7">
             <a:extLst>
               <a:ext uri="{FF2B5EF4-FFF2-40B4-BE49-F238E27FC236}">
-                <a16:creationId xmlns="" xmlns:a16="http://schemas.microsoft.com/office/drawing/2014/main" id="{0E801648-156F-497E-99CF-797DF48051E1}"/>
+                <a16:creationId xmlns:a16="http://schemas.microsoft.com/office/drawing/2014/main" id="{0E801648-156F-497E-99CF-797DF48051E1}"/>
               </a:ext>
             </a:extLst>
           </p:cNvPr>
@@ -7861,7 +7769,7 @@
           <p:cNvPr id="9" name="Espaço Reservado para Número de Slide 8">
             <a:extLst>
               <a:ext uri="{FF2B5EF4-FFF2-40B4-BE49-F238E27FC236}">
-                <a16:creationId xmlns="" xmlns:a16="http://schemas.microsoft.com/office/drawing/2014/main" id="{EEE23D32-80E7-4796-A137-66BF842E4B53}"/>
+                <a16:creationId xmlns:a16="http://schemas.microsoft.com/office/drawing/2014/main" id="{EEE23D32-80E7-4796-A137-66BF842E4B53}"/>
               </a:ext>
             </a:extLst>
           </p:cNvPr>
@@ -7879,7 +7787,7 @@
           <a:p>
             <a:fld id="{1A7E88B7-70CE-4035-AE73-13FA6FB985D4}" type="slidenum">
               <a:rPr lang="pt-BR" smtClean="0"/>
-              <a:t>‹nº›</a:t>
+              <a:t>‹#›</a:t>
             </a:fld>
             <a:endParaRPr lang="pt-BR"/>
           </a:p>
@@ -7920,7 +7828,7 @@
           <p:cNvPr id="2" name="Título 1">
             <a:extLst>
               <a:ext uri="{FF2B5EF4-FFF2-40B4-BE49-F238E27FC236}">
-                <a16:creationId xmlns="" xmlns:a16="http://schemas.microsoft.com/office/drawing/2014/main" id="{2BCE2379-C78F-47E1-8CFC-B846E7AF148D}"/>
+                <a16:creationId xmlns:a16="http://schemas.microsoft.com/office/drawing/2014/main" id="{2BCE2379-C78F-47E1-8CFC-B846E7AF148D}"/>
               </a:ext>
             </a:extLst>
           </p:cNvPr>
@@ -7948,7 +7856,7 @@
           <p:cNvPr id="3" name="Espaço Reservado para Data 2">
             <a:extLst>
               <a:ext uri="{FF2B5EF4-FFF2-40B4-BE49-F238E27FC236}">
-                <a16:creationId xmlns="" xmlns:a16="http://schemas.microsoft.com/office/drawing/2014/main" id="{342600A9-7F92-4E22-9D94-E4717252A817}"/>
+                <a16:creationId xmlns:a16="http://schemas.microsoft.com/office/drawing/2014/main" id="{342600A9-7F92-4E22-9D94-E4717252A817}"/>
               </a:ext>
             </a:extLst>
           </p:cNvPr>
@@ -7966,7 +7874,7 @@
           <a:p>
             <a:fld id="{63289F7E-B80B-496E-81B4-D396C37C9454}" type="datetimeFigureOut">
               <a:rPr lang="pt-BR" smtClean="0"/>
-              <a:t>20/09/2025</a:t>
+              <a:t>20/03/2026</a:t>
             </a:fld>
             <a:endParaRPr lang="pt-BR"/>
           </a:p>
@@ -7977,7 +7885,7 @@
           <p:cNvPr id="4" name="Espaço Reservado para Rodapé 3">
             <a:extLst>
               <a:ext uri="{FF2B5EF4-FFF2-40B4-BE49-F238E27FC236}">
-                <a16:creationId xmlns="" xmlns:a16="http://schemas.microsoft.com/office/drawing/2014/main" id="{192E6BED-F546-40CC-A2DF-99CBA853654E}"/>
+                <a16:creationId xmlns:a16="http://schemas.microsoft.com/office/drawing/2014/main" id="{192E6BED-F546-40CC-A2DF-99CBA853654E}"/>
               </a:ext>
             </a:extLst>
           </p:cNvPr>
@@ -8002,7 +7910,7 @@
           <p:cNvPr id="5" name="Espaço Reservado para Número de Slide 4">
             <a:extLst>
               <a:ext uri="{FF2B5EF4-FFF2-40B4-BE49-F238E27FC236}">
-                <a16:creationId xmlns="" xmlns:a16="http://schemas.microsoft.com/office/drawing/2014/main" id="{6091CC40-A8C4-4063-80EB-CC5099621678}"/>
+                <a16:creationId xmlns:a16="http://schemas.microsoft.com/office/drawing/2014/main" id="{6091CC40-A8C4-4063-80EB-CC5099621678}"/>
               </a:ext>
             </a:extLst>
           </p:cNvPr>
@@ -8020,7 +7928,7 @@
           <a:p>
             <a:fld id="{1A7E88B7-70CE-4035-AE73-13FA6FB985D4}" type="slidenum">
               <a:rPr lang="pt-BR" smtClean="0"/>
-              <a:t>‹nº›</a:t>
+              <a:t>‹#›</a:t>
             </a:fld>
             <a:endParaRPr lang="pt-BR"/>
           </a:p>
@@ -8061,7 +7969,7 @@
           <p:cNvPr id="2" name="Espaço Reservado para Data 1">
             <a:extLst>
               <a:ext uri="{FF2B5EF4-FFF2-40B4-BE49-F238E27FC236}">
-                <a16:creationId xmlns="" xmlns:a16="http://schemas.microsoft.com/office/drawing/2014/main" id="{DD19515C-212C-4EAE-84A3-8FF4BC844F1B}"/>
+                <a16:creationId xmlns:a16="http://schemas.microsoft.com/office/drawing/2014/main" id="{DD19515C-212C-4EAE-84A3-8FF4BC844F1B}"/>
               </a:ext>
             </a:extLst>
           </p:cNvPr>
@@ -8079,7 +7987,7 @@
           <a:p>
             <a:fld id="{63289F7E-B80B-496E-81B4-D396C37C9454}" type="datetimeFigureOut">
               <a:rPr lang="pt-BR" smtClean="0"/>
-              <a:t>20/09/2025</a:t>
+              <a:t>20/03/2026</a:t>
             </a:fld>
             <a:endParaRPr lang="pt-BR"/>
           </a:p>
@@ -8090,7 +7998,7 @@
           <p:cNvPr id="3" name="Espaço Reservado para Rodapé 2">
             <a:extLst>
               <a:ext uri="{FF2B5EF4-FFF2-40B4-BE49-F238E27FC236}">
-                <a16:creationId xmlns="" xmlns:a16="http://schemas.microsoft.com/office/drawing/2014/main" id="{94D3D120-B3E8-4C96-861D-7A4F12F49B3A}"/>
+                <a16:creationId xmlns:a16="http://schemas.microsoft.com/office/drawing/2014/main" id="{94D3D120-B3E8-4C96-861D-7A4F12F49B3A}"/>
               </a:ext>
             </a:extLst>
           </p:cNvPr>
@@ -8115,7 +8023,7 @@
           <p:cNvPr id="4" name="Espaço Reservado para Número de Slide 3">
             <a:extLst>
               <a:ext uri="{FF2B5EF4-FFF2-40B4-BE49-F238E27FC236}">
-                <a16:creationId xmlns="" xmlns:a16="http://schemas.microsoft.com/office/drawing/2014/main" id="{42E49B68-FA1B-468B-9F17-D5C09243D454}"/>
+                <a16:creationId xmlns:a16="http://schemas.microsoft.com/office/drawing/2014/main" id="{42E49B68-FA1B-468B-9F17-D5C09243D454}"/>
               </a:ext>
             </a:extLst>
           </p:cNvPr>
@@ -8133,7 +8041,7 @@
           <a:p>
             <a:fld id="{1A7E88B7-70CE-4035-AE73-13FA6FB985D4}" type="slidenum">
               <a:rPr lang="pt-BR" smtClean="0"/>
-              <a:t>‹nº›</a:t>
+              <a:t>‹#›</a:t>
             </a:fld>
             <a:endParaRPr lang="pt-BR"/>
           </a:p>
@@ -8174,7 +8082,7 @@
           <p:cNvPr id="2" name="Título 1">
             <a:extLst>
               <a:ext uri="{FF2B5EF4-FFF2-40B4-BE49-F238E27FC236}">
-                <a16:creationId xmlns="" xmlns:a16="http://schemas.microsoft.com/office/drawing/2014/main" id="{1C17BCBE-A897-4319-85EC-D87909C24980}"/>
+                <a16:creationId xmlns:a16="http://schemas.microsoft.com/office/drawing/2014/main" id="{1C17BCBE-A897-4319-85EC-D87909C24980}"/>
               </a:ext>
             </a:extLst>
           </p:cNvPr>
@@ -8211,7 +8119,7 @@
           <p:cNvPr id="3" name="Espaço Reservado para Conteúdo 2">
             <a:extLst>
               <a:ext uri="{FF2B5EF4-FFF2-40B4-BE49-F238E27FC236}">
-                <a16:creationId xmlns="" xmlns:a16="http://schemas.microsoft.com/office/drawing/2014/main" id="{4226F885-0204-4913-868B-4B8B82576F17}"/>
+                <a16:creationId xmlns:a16="http://schemas.microsoft.com/office/drawing/2014/main" id="{4226F885-0204-4913-868B-4B8B82576F17}"/>
               </a:ext>
             </a:extLst>
           </p:cNvPr>
@@ -8301,7 +8209,7 @@
           <p:cNvPr id="4" name="Espaço Reservado para Texto 3">
             <a:extLst>
               <a:ext uri="{FF2B5EF4-FFF2-40B4-BE49-F238E27FC236}">
-                <a16:creationId xmlns="" xmlns:a16="http://schemas.microsoft.com/office/drawing/2014/main" id="{00F9F784-A858-441B-8AB5-697098141751}"/>
+                <a16:creationId xmlns:a16="http://schemas.microsoft.com/office/drawing/2014/main" id="{00F9F784-A858-441B-8AB5-697098141751}"/>
               </a:ext>
             </a:extLst>
           </p:cNvPr>
@@ -8372,7 +8280,7 @@
           <p:cNvPr id="5" name="Espaço Reservado para Data 4">
             <a:extLst>
               <a:ext uri="{FF2B5EF4-FFF2-40B4-BE49-F238E27FC236}">
-                <a16:creationId xmlns="" xmlns:a16="http://schemas.microsoft.com/office/drawing/2014/main" id="{A4DC363A-5000-472E-8B17-02E7DCB8840A}"/>
+                <a16:creationId xmlns:a16="http://schemas.microsoft.com/office/drawing/2014/main" id="{A4DC363A-5000-472E-8B17-02E7DCB8840A}"/>
               </a:ext>
             </a:extLst>
           </p:cNvPr>
@@ -8390,7 +8298,7 @@
           <a:p>
             <a:fld id="{63289F7E-B80B-496E-81B4-D396C37C9454}" type="datetimeFigureOut">
               <a:rPr lang="pt-BR" smtClean="0"/>
-              <a:t>20/09/2025</a:t>
+              <a:t>20/03/2026</a:t>
             </a:fld>
             <a:endParaRPr lang="pt-BR"/>
           </a:p>
@@ -8401,7 +8309,7 @@
           <p:cNvPr id="6" name="Espaço Reservado para Rodapé 5">
             <a:extLst>
               <a:ext uri="{FF2B5EF4-FFF2-40B4-BE49-F238E27FC236}">
-                <a16:creationId xmlns="" xmlns:a16="http://schemas.microsoft.com/office/drawing/2014/main" id="{5548425D-2C21-4C56-BAD4-662978775C28}"/>
+                <a16:creationId xmlns:a16="http://schemas.microsoft.com/office/drawing/2014/main" id="{5548425D-2C21-4C56-BAD4-662978775C28}"/>
               </a:ext>
             </a:extLst>
           </p:cNvPr>
@@ -8426,7 +8334,7 @@
           <p:cNvPr id="7" name="Espaço Reservado para Número de Slide 6">
             <a:extLst>
               <a:ext uri="{FF2B5EF4-FFF2-40B4-BE49-F238E27FC236}">
-                <a16:creationId xmlns="" xmlns:a16="http://schemas.microsoft.com/office/drawing/2014/main" id="{C63E9726-E64C-42B2-AE8A-8C235A956B48}"/>
+                <a16:creationId xmlns:a16="http://schemas.microsoft.com/office/drawing/2014/main" id="{C63E9726-E64C-42B2-AE8A-8C235A956B48}"/>
               </a:ext>
             </a:extLst>
           </p:cNvPr>
@@ -8444,7 +8352,7 @@
           <a:p>
             <a:fld id="{1A7E88B7-70CE-4035-AE73-13FA6FB985D4}" type="slidenum">
               <a:rPr lang="pt-BR" smtClean="0"/>
-              <a:t>‹nº›</a:t>
+              <a:t>‹#›</a:t>
             </a:fld>
             <a:endParaRPr lang="pt-BR"/>
           </a:p>
@@ -8485,7 +8393,7 @@
           <p:cNvPr id="2" name="Título 1">
             <a:extLst>
               <a:ext uri="{FF2B5EF4-FFF2-40B4-BE49-F238E27FC236}">
-                <a16:creationId xmlns="" xmlns:a16="http://schemas.microsoft.com/office/drawing/2014/main" id="{11086A78-3E74-450C-96A6-CA8AC37AF772}"/>
+                <a16:creationId xmlns:a16="http://schemas.microsoft.com/office/drawing/2014/main" id="{11086A78-3E74-450C-96A6-CA8AC37AF772}"/>
               </a:ext>
             </a:extLst>
           </p:cNvPr>
@@ -8522,7 +8430,7 @@
           <p:cNvPr id="3" name="Espaço Reservado para Imagem 2">
             <a:extLst>
               <a:ext uri="{FF2B5EF4-FFF2-40B4-BE49-F238E27FC236}">
-                <a16:creationId xmlns="" xmlns:a16="http://schemas.microsoft.com/office/drawing/2014/main" id="{5F5B7312-975A-4DBC-9B2F-3652ADA006FD}"/>
+                <a16:creationId xmlns:a16="http://schemas.microsoft.com/office/drawing/2014/main" id="{5F5B7312-975A-4DBC-9B2F-3652ADA006FD}"/>
               </a:ext>
             </a:extLst>
           </p:cNvPr>
@@ -8589,7 +8497,7 @@
           <p:cNvPr id="4" name="Espaço Reservado para Texto 3">
             <a:extLst>
               <a:ext uri="{FF2B5EF4-FFF2-40B4-BE49-F238E27FC236}">
-                <a16:creationId xmlns="" xmlns:a16="http://schemas.microsoft.com/office/drawing/2014/main" id="{AAF805F5-1DFF-41C6-944C-7D79FE0D0963}"/>
+                <a16:creationId xmlns:a16="http://schemas.microsoft.com/office/drawing/2014/main" id="{AAF805F5-1DFF-41C6-944C-7D79FE0D0963}"/>
               </a:ext>
             </a:extLst>
           </p:cNvPr>
@@ -8660,7 +8568,7 @@
           <p:cNvPr id="5" name="Espaço Reservado para Data 4">
             <a:extLst>
               <a:ext uri="{FF2B5EF4-FFF2-40B4-BE49-F238E27FC236}">
-                <a16:creationId xmlns="" xmlns:a16="http://schemas.microsoft.com/office/drawing/2014/main" id="{02113D81-8665-4516-BD81-C6A1F254EECD}"/>
+                <a16:creationId xmlns:a16="http://schemas.microsoft.com/office/drawing/2014/main" id="{02113D81-8665-4516-BD81-C6A1F254EECD}"/>
               </a:ext>
             </a:extLst>
           </p:cNvPr>
@@ -8678,7 +8586,7 @@
           <a:p>
             <a:fld id="{63289F7E-B80B-496E-81B4-D396C37C9454}" type="datetimeFigureOut">
               <a:rPr lang="pt-BR" smtClean="0"/>
-              <a:t>20/09/2025</a:t>
+              <a:t>20/03/2026</a:t>
             </a:fld>
             <a:endParaRPr lang="pt-BR"/>
           </a:p>
@@ -8689,7 +8597,7 @@
           <p:cNvPr id="6" name="Espaço Reservado para Rodapé 5">
             <a:extLst>
               <a:ext uri="{FF2B5EF4-FFF2-40B4-BE49-F238E27FC236}">
-                <a16:creationId xmlns="" xmlns:a16="http://schemas.microsoft.com/office/drawing/2014/main" id="{2B00C88B-FF32-40AA-A187-727D96FD7862}"/>
+                <a16:creationId xmlns:a16="http://schemas.microsoft.com/office/drawing/2014/main" id="{2B00C88B-FF32-40AA-A187-727D96FD7862}"/>
               </a:ext>
             </a:extLst>
           </p:cNvPr>
@@ -8714,7 +8622,7 @@
           <p:cNvPr id="7" name="Espaço Reservado para Número de Slide 6">
             <a:extLst>
               <a:ext uri="{FF2B5EF4-FFF2-40B4-BE49-F238E27FC236}">
-                <a16:creationId xmlns="" xmlns:a16="http://schemas.microsoft.com/office/drawing/2014/main" id="{A04D1A2D-69F7-4B8F-A730-BC26DC340BA6}"/>
+                <a16:creationId xmlns:a16="http://schemas.microsoft.com/office/drawing/2014/main" id="{A04D1A2D-69F7-4B8F-A730-BC26DC340BA6}"/>
               </a:ext>
             </a:extLst>
           </p:cNvPr>
@@ -8732,7 +8640,7 @@
           <a:p>
             <a:fld id="{1A7E88B7-70CE-4035-AE73-13FA6FB985D4}" type="slidenum">
               <a:rPr lang="pt-BR" smtClean="0"/>
-              <a:t>‹nº›</a:t>
+              <a:t>‹#›</a:t>
             </a:fld>
             <a:endParaRPr lang="pt-BR"/>
           </a:p>
@@ -8778,7 +8686,7 @@
           <p:cNvPr id="2" name="Espaço Reservado para Título 1">
             <a:extLst>
               <a:ext uri="{FF2B5EF4-FFF2-40B4-BE49-F238E27FC236}">
-                <a16:creationId xmlns="" xmlns:a16="http://schemas.microsoft.com/office/drawing/2014/main" id="{E69A0273-1966-4A1B-9370-4C1CE5036371}"/>
+                <a16:creationId xmlns:a16="http://schemas.microsoft.com/office/drawing/2014/main" id="{E69A0273-1966-4A1B-9370-4C1CE5036371}"/>
               </a:ext>
             </a:extLst>
           </p:cNvPr>
@@ -8816,7 +8724,7 @@
           <p:cNvPr id="3" name="Espaço Reservado para Texto 2">
             <a:extLst>
               <a:ext uri="{FF2B5EF4-FFF2-40B4-BE49-F238E27FC236}">
-                <a16:creationId xmlns="" xmlns:a16="http://schemas.microsoft.com/office/drawing/2014/main" id="{3B9CF87A-0448-49A7-AB25-EBC1D56A40EF}"/>
+                <a16:creationId xmlns:a16="http://schemas.microsoft.com/office/drawing/2014/main" id="{3B9CF87A-0448-49A7-AB25-EBC1D56A40EF}"/>
               </a:ext>
             </a:extLst>
           </p:cNvPr>
@@ -8883,7 +8791,7 @@
           <p:cNvPr id="4" name="Espaço Reservado para Data 3">
             <a:extLst>
               <a:ext uri="{FF2B5EF4-FFF2-40B4-BE49-F238E27FC236}">
-                <a16:creationId xmlns="" xmlns:a16="http://schemas.microsoft.com/office/drawing/2014/main" id="{2EF7B1F2-BB5A-44D0-816D-16AD2C71430E}"/>
+                <a16:creationId xmlns:a16="http://schemas.microsoft.com/office/drawing/2014/main" id="{2EF7B1F2-BB5A-44D0-816D-16AD2C71430E}"/>
               </a:ext>
             </a:extLst>
           </p:cNvPr>
@@ -8919,7 +8827,7 @@
           <a:p>
             <a:fld id="{63289F7E-B80B-496E-81B4-D396C37C9454}" type="datetimeFigureOut">
               <a:rPr lang="pt-BR" smtClean="0"/>
-              <a:t>20/09/2025</a:t>
+              <a:t>20/03/2026</a:t>
             </a:fld>
             <a:endParaRPr lang="pt-BR"/>
           </a:p>
@@ -8930,7 +8838,7 @@
           <p:cNvPr id="5" name="Espaço Reservado para Rodapé 4">
             <a:extLst>
               <a:ext uri="{FF2B5EF4-FFF2-40B4-BE49-F238E27FC236}">
-                <a16:creationId xmlns="" xmlns:a16="http://schemas.microsoft.com/office/drawing/2014/main" id="{C703F94C-2CC8-4DAA-BC35-14FC3E841DCD}"/>
+                <a16:creationId xmlns:a16="http://schemas.microsoft.com/office/drawing/2014/main" id="{C703F94C-2CC8-4DAA-BC35-14FC3E841DCD}"/>
               </a:ext>
             </a:extLst>
           </p:cNvPr>
@@ -8973,7 +8881,7 @@
           <p:cNvPr id="6" name="Espaço Reservado para Número de Slide 5">
             <a:extLst>
               <a:ext uri="{FF2B5EF4-FFF2-40B4-BE49-F238E27FC236}">
-                <a16:creationId xmlns="" xmlns:a16="http://schemas.microsoft.com/office/drawing/2014/main" id="{64051336-7048-457A-8B61-D94291D71648}"/>
+                <a16:creationId xmlns:a16="http://schemas.microsoft.com/office/drawing/2014/main" id="{64051336-7048-457A-8B61-D94291D71648}"/>
               </a:ext>
             </a:extLst>
           </p:cNvPr>
@@ -9009,7 +8917,7 @@
           <a:p>
             <a:fld id="{1A7E88B7-70CE-4035-AE73-13FA6FB985D4}" type="slidenum">
               <a:rPr lang="pt-BR" smtClean="0"/>
-              <a:t>‹nº›</a:t>
+              <a:t>‹#›</a:t>
             </a:fld>
             <a:endParaRPr lang="pt-BR"/>
           </a:p>
@@ -9341,7 +9249,7 @@
           <p:cNvPr id="2" name="Título 1">
             <a:extLst>
               <a:ext uri="{FF2B5EF4-FFF2-40B4-BE49-F238E27FC236}">
-                <a16:creationId xmlns="" xmlns:a16="http://schemas.microsoft.com/office/drawing/2014/main" id="{32666AC8-2E17-4DB4-B0F5-60C640CCFD2E}"/>
+                <a16:creationId xmlns:a16="http://schemas.microsoft.com/office/drawing/2014/main" id="{32666AC8-2E17-4DB4-B0F5-60C640CCFD2E}"/>
               </a:ext>
             </a:extLst>
           </p:cNvPr>
@@ -9368,10 +9276,6 @@
               <a:rPr lang="pt-BR" sz="5400" dirty="0"/>
               <a:t>T320 - Introdução ao Aprendizado de Máquina II:</a:t>
             </a:r>
-            <a:r>
-              <a:rPr lang="pt-BR" dirty="0"/>
-              <a:t/>
-            </a:r>
             <a:br>
               <a:rPr lang="pt-BR" dirty="0"/>
             </a:br>
@@ -9387,7 +9291,7 @@
           <p:cNvPr id="4" name="CaixaDeTexto 3">
             <a:extLst>
               <a:ext uri="{FF2B5EF4-FFF2-40B4-BE49-F238E27FC236}">
-                <a16:creationId xmlns="" xmlns:a16="http://schemas.microsoft.com/office/drawing/2014/main" id="{430EB894-B7D4-434C-9D1A-A14094D9BEEC}"/>
+                <a16:creationId xmlns:a16="http://schemas.microsoft.com/office/drawing/2014/main" id="{430EB894-B7D4-434C-9D1A-A14094D9BEEC}"/>
               </a:ext>
             </a:extLst>
           </p:cNvPr>
@@ -9428,7 +9332,7 @@
           <p:cNvPr id="1026" name="Picture 2" descr="Logo">
             <a:extLst>
               <a:ext uri="{FF2B5EF4-FFF2-40B4-BE49-F238E27FC236}">
-                <a16:creationId xmlns="" xmlns:a16="http://schemas.microsoft.com/office/drawing/2014/main" id="{3F2642E0-4F6A-4196-8F58-E77D36E9A33F}"/>
+                <a16:creationId xmlns:a16="http://schemas.microsoft.com/office/drawing/2014/main" id="{3F2642E0-4F6A-4196-8F58-E77D36E9A33F}"/>
               </a:ext>
             </a:extLst>
           </p:cNvPr>
@@ -9473,7 +9377,7 @@
           <p:cNvPr id="5122" name="Picture 2" descr="Image result for machine learning">
             <a:extLst>
               <a:ext uri="{FF2B5EF4-FFF2-40B4-BE49-F238E27FC236}">
-                <a16:creationId xmlns="" xmlns:a16="http://schemas.microsoft.com/office/drawing/2014/main" id="{810CE0A2-4102-44A6-A370-175E7896CDCB}"/>
+                <a16:creationId xmlns:a16="http://schemas.microsoft.com/office/drawing/2014/main" id="{810CE0A2-4102-44A6-A370-175E7896CDCB}"/>
               </a:ext>
             </a:extLst>
           </p:cNvPr>
@@ -10921,7 +10825,7 @@
           <p:cNvPr id="13" name="CaixaDeTexto 12">
             <a:extLst>
               <a:ext uri="{FF2B5EF4-FFF2-40B4-BE49-F238E27FC236}">
-                <a16:creationId xmlns="" xmlns:a16="http://schemas.microsoft.com/office/drawing/2014/main" id="{9989FE69-01F8-8C6A-4EA0-DA1C9792B919}"/>
+                <a16:creationId xmlns:a16="http://schemas.microsoft.com/office/drawing/2014/main" id="{9989FE69-01F8-8C6A-4EA0-DA1C9792B919}"/>
               </a:ext>
             </a:extLst>
           </p:cNvPr>
@@ -10996,7 +10900,7 @@
           <p:cNvPr id="2" name="Título 1">
             <a:extLst>
               <a:ext uri="{FF2B5EF4-FFF2-40B4-BE49-F238E27FC236}">
-                <a16:creationId xmlns="" xmlns:a16="http://schemas.microsoft.com/office/drawing/2014/main" id="{B022D379-CAA0-9DC9-CDBD-6E0EBE1BFF31}"/>
+                <a16:creationId xmlns:a16="http://schemas.microsoft.com/office/drawing/2014/main" id="{B022D379-CAA0-9DC9-CDBD-6E0EBE1BFF31}"/>
               </a:ext>
             </a:extLst>
           </p:cNvPr>
@@ -11026,7 +10930,7 @@
               <p:cNvPr id="3" name="Espaço Reservado para Conteúdo 2">
                 <a:extLst>
                   <a:ext uri="{FF2B5EF4-FFF2-40B4-BE49-F238E27FC236}">
-                    <a16:creationId xmlns="" xmlns:a16="http://schemas.microsoft.com/office/drawing/2014/main" id="{B68F0D74-8673-A432-A1D7-BDEF7725851A}"/>
+                    <a16:creationId xmlns:a16="http://schemas.microsoft.com/office/drawing/2014/main" id="{B68F0D74-8673-A432-A1D7-BDEF7725851A}"/>
                   </a:ext>
                 </a:extLst>
               </p:cNvPr>
@@ -11303,7 +11207,7 @@
           <p:cNvPr id="2" name="Título 1">
             <a:extLst>
               <a:ext uri="{FF2B5EF4-FFF2-40B4-BE49-F238E27FC236}">
-                <a16:creationId xmlns="" xmlns:a16="http://schemas.microsoft.com/office/drawing/2014/main" id="{519F0958-530D-D942-BA01-15C1583DD1E6}"/>
+                <a16:creationId xmlns:a16="http://schemas.microsoft.com/office/drawing/2014/main" id="{519F0958-530D-D942-BA01-15C1583DD1E6}"/>
               </a:ext>
             </a:extLst>
           </p:cNvPr>
@@ -11333,7 +11237,7 @@
               <p:cNvPr id="3" name="Espaço Reservado para Conteúdo 2">
                 <a:extLst>
                   <a:ext uri="{FF2B5EF4-FFF2-40B4-BE49-F238E27FC236}">
-                    <a16:creationId xmlns="" xmlns:a16="http://schemas.microsoft.com/office/drawing/2014/main" id="{21416F72-28FB-E27C-D129-16A944A87C67}"/>
+                    <a16:creationId xmlns:a16="http://schemas.microsoft.com/office/drawing/2014/main" id="{21416F72-28FB-E27C-D129-16A944A87C67}"/>
                   </a:ext>
                 </a:extLst>
               </p:cNvPr>
@@ -11719,7 +11623,7 @@
           <p:cNvPr id="2" name="Título 1">
             <a:extLst>
               <a:ext uri="{FF2B5EF4-FFF2-40B4-BE49-F238E27FC236}">
-                <a16:creationId xmlns="" xmlns:a16="http://schemas.microsoft.com/office/drawing/2014/main" id="{DCD47F25-5DD1-794E-8733-BFD771A2DE49}"/>
+                <a16:creationId xmlns:a16="http://schemas.microsoft.com/office/drawing/2014/main" id="{DCD47F25-5DD1-794E-8733-BFD771A2DE49}"/>
               </a:ext>
             </a:extLst>
           </p:cNvPr>
@@ -11749,7 +11653,7 @@
               <p:cNvPr id="3" name="Espaço Reservado para Conteúdo 2">
                 <a:extLst>
                   <a:ext uri="{FF2B5EF4-FFF2-40B4-BE49-F238E27FC236}">
-                    <a16:creationId xmlns="" xmlns:a16="http://schemas.microsoft.com/office/drawing/2014/main" id="{D79BB7DC-99E7-8958-EC77-566B7E3C2BBB}"/>
+                    <a16:creationId xmlns:a16="http://schemas.microsoft.com/office/drawing/2014/main" id="{D79BB7DC-99E7-8958-EC77-566B7E3C2BBB}"/>
                   </a:ext>
                 </a:extLst>
               </p:cNvPr>
@@ -13252,7 +13156,7 @@
           <p:cNvPr id="4" name="Rectangle 11">
             <a:extLst>
               <a:ext uri="{FF2B5EF4-FFF2-40B4-BE49-F238E27FC236}">
-                <a16:creationId xmlns="" xmlns:a16="http://schemas.microsoft.com/office/drawing/2014/main" id="{66F09A24-9061-8EA4-420D-13EC84B7C649}"/>
+                <a16:creationId xmlns:a16="http://schemas.microsoft.com/office/drawing/2014/main" id="{66F09A24-9061-8EA4-420D-13EC84B7C649}"/>
               </a:ext>
             </a:extLst>
           </p:cNvPr>
@@ -13334,7 +13238,7 @@
           <p:cNvPr id="2" name="Título 1">
             <a:extLst>
               <a:ext uri="{FF2B5EF4-FFF2-40B4-BE49-F238E27FC236}">
-                <a16:creationId xmlns="" xmlns:a16="http://schemas.microsoft.com/office/drawing/2014/main" id="{028A152F-93D8-11FA-9B7A-B62AE5BB6486}"/>
+                <a16:creationId xmlns:a16="http://schemas.microsoft.com/office/drawing/2014/main" id="{028A152F-93D8-11FA-9B7A-B62AE5BB6486}"/>
               </a:ext>
             </a:extLst>
           </p:cNvPr>
@@ -13364,7 +13268,7 @@
               <p:cNvPr id="3" name="Espaço Reservado para Conteúdo 2">
                 <a:extLst>
                   <a:ext uri="{FF2B5EF4-FFF2-40B4-BE49-F238E27FC236}">
-                    <a16:creationId xmlns="" xmlns:a16="http://schemas.microsoft.com/office/drawing/2014/main" id="{B3535727-BB24-BB15-5C03-3DA9A3F9A09A}"/>
+                    <a16:creationId xmlns:a16="http://schemas.microsoft.com/office/drawing/2014/main" id="{B3535727-BB24-BB15-5C03-3DA9A3F9A09A}"/>
                   </a:ext>
                 </a:extLst>
               </p:cNvPr>
@@ -14160,7 +14064,7 @@
           <p:cNvPr id="2" name="Título 1">
             <a:extLst>
               <a:ext uri="{FF2B5EF4-FFF2-40B4-BE49-F238E27FC236}">
-                <a16:creationId xmlns="" xmlns:a16="http://schemas.microsoft.com/office/drawing/2014/main" id="{AAEBCFD6-83A6-222F-09EA-9F68DDF7B617}"/>
+                <a16:creationId xmlns:a16="http://schemas.microsoft.com/office/drawing/2014/main" id="{AAEBCFD6-83A6-222F-09EA-9F68DDF7B617}"/>
               </a:ext>
             </a:extLst>
           </p:cNvPr>
@@ -14190,7 +14094,7 @@
               <p:cNvPr id="3" name="Espaço Reservado para Conteúdo 2">
                 <a:extLst>
                   <a:ext uri="{FF2B5EF4-FFF2-40B4-BE49-F238E27FC236}">
-                    <a16:creationId xmlns="" xmlns:a16="http://schemas.microsoft.com/office/drawing/2014/main" id="{133AC492-69A5-87DD-C4AF-2FEA6B38E4C8}"/>
+                    <a16:creationId xmlns:a16="http://schemas.microsoft.com/office/drawing/2014/main" id="{133AC492-69A5-87DD-C4AF-2FEA6B38E4C8}"/>
                   </a:ext>
                 </a:extLst>
               </p:cNvPr>
@@ -14819,15 +14723,7 @@
                 </a14:m>
                 <a:r>
                   <a:rPr lang="pt-BR" dirty="0"/>
-                  <a:t>, de cada </a:t>
-                </a:r>
-                <a:r>
-                  <a:rPr lang="pt-BR" dirty="0" smtClean="0"/>
-                  <a:t>uma </a:t>
-                </a:r>
-                <a:r>
-                  <a:rPr lang="pt-BR" dirty="0"/>
-                  <a:t>das </a:t>
+                  <a:t>, de cada uma das </a:t>
                 </a:r>
                 <a14:m>
                   <m:oMath xmlns:m="http://schemas.openxmlformats.org/officeDocument/2006/math">
@@ -14924,7 +14820,7 @@
               <p:cNvPr id="4" name="TextBox 3">
                 <a:extLst>
                   <a:ext uri="{FF2B5EF4-FFF2-40B4-BE49-F238E27FC236}">
-                    <a16:creationId xmlns="" xmlns:a16="http://schemas.microsoft.com/office/drawing/2014/main" id="{430AF08B-1D1C-CB3B-78DF-2FB94BE83C39}"/>
+                    <a16:creationId xmlns:a16="http://schemas.microsoft.com/office/drawing/2014/main" id="{430AF08B-1D1C-CB3B-78DF-2FB94BE83C39}"/>
                   </a:ext>
                 </a:extLst>
               </p:cNvPr>
@@ -15064,7 +14960,7 @@
           <p:cNvPr id="5" name="Straight Arrow Connector 4">
             <a:extLst>
               <a:ext uri="{FF2B5EF4-FFF2-40B4-BE49-F238E27FC236}">
-                <a16:creationId xmlns="" xmlns:a16="http://schemas.microsoft.com/office/drawing/2014/main" id="{7ADFCDFC-42ED-2E95-5F43-DF8574CF6A71}"/>
+                <a16:creationId xmlns:a16="http://schemas.microsoft.com/office/drawing/2014/main" id="{7ADFCDFC-42ED-2E95-5F43-DF8574CF6A71}"/>
               </a:ext>
             </a:extLst>
           </p:cNvPr>
@@ -15138,7 +15034,7 @@
           <p:cNvPr id="2" name="Título 1">
             <a:extLst>
               <a:ext uri="{FF2B5EF4-FFF2-40B4-BE49-F238E27FC236}">
-                <a16:creationId xmlns="" xmlns:a16="http://schemas.microsoft.com/office/drawing/2014/main" id="{9ACEE090-DD33-6575-4FA7-70E4DD8E6119}"/>
+                <a16:creationId xmlns:a16="http://schemas.microsoft.com/office/drawing/2014/main" id="{9ACEE090-DD33-6575-4FA7-70E4DD8E6119}"/>
               </a:ext>
             </a:extLst>
           </p:cNvPr>
@@ -15168,7 +15064,7 @@
               <p:cNvPr id="3" name="Espaço Reservado para Conteúdo 2">
                 <a:extLst>
                   <a:ext uri="{FF2B5EF4-FFF2-40B4-BE49-F238E27FC236}">
-                    <a16:creationId xmlns="" xmlns:a16="http://schemas.microsoft.com/office/drawing/2014/main" id="{59835C31-F047-4C77-EE04-457C9679811A}"/>
+                    <a16:creationId xmlns:a16="http://schemas.microsoft.com/office/drawing/2014/main" id="{59835C31-F047-4C77-EE04-457C9679811A}"/>
                   </a:ext>
                 </a:extLst>
               </p:cNvPr>
@@ -16602,7 +16498,7 @@
           <p:cNvPr id="2" name="Título 1">
             <a:extLst>
               <a:ext uri="{FF2B5EF4-FFF2-40B4-BE49-F238E27FC236}">
-                <a16:creationId xmlns="" xmlns:a16="http://schemas.microsoft.com/office/drawing/2014/main" id="{E4598F11-6F65-0753-89FE-F5ABED77B46A}"/>
+                <a16:creationId xmlns:a16="http://schemas.microsoft.com/office/drawing/2014/main" id="{E4598F11-6F65-0753-89FE-F5ABED77B46A}"/>
               </a:ext>
             </a:extLst>
           </p:cNvPr>
@@ -16632,7 +16528,7 @@
               <p:cNvPr id="3" name="Espaço Reservado para Conteúdo 2">
                 <a:extLst>
                   <a:ext uri="{FF2B5EF4-FFF2-40B4-BE49-F238E27FC236}">
-                    <a16:creationId xmlns="" xmlns:a16="http://schemas.microsoft.com/office/drawing/2014/main" id="{FEF4E6DC-E916-D97A-4D18-D469285C4F2C}"/>
+                    <a16:creationId xmlns:a16="http://schemas.microsoft.com/office/drawing/2014/main" id="{FEF4E6DC-E916-D97A-4D18-D469285C4F2C}"/>
                   </a:ext>
                 </a:extLst>
               </p:cNvPr>
@@ -17153,7 +17049,7 @@
           <p:cNvPr id="2" name="Título 1">
             <a:extLst>
               <a:ext uri="{FF2B5EF4-FFF2-40B4-BE49-F238E27FC236}">
-                <a16:creationId xmlns="" xmlns:a16="http://schemas.microsoft.com/office/drawing/2014/main" id="{D5807923-28D2-8150-E304-526DA460D220}"/>
+                <a16:creationId xmlns:a16="http://schemas.microsoft.com/office/drawing/2014/main" id="{D5807923-28D2-8150-E304-526DA460D220}"/>
               </a:ext>
             </a:extLst>
           </p:cNvPr>
@@ -17183,7 +17079,7 @@
               <p:cNvPr id="3" name="Espaço Reservado para Conteúdo 2">
                 <a:extLst>
                   <a:ext uri="{FF2B5EF4-FFF2-40B4-BE49-F238E27FC236}">
-                    <a16:creationId xmlns="" xmlns:a16="http://schemas.microsoft.com/office/drawing/2014/main" id="{FFACD180-C529-EB91-BD2D-B5F491B1E35C}"/>
+                    <a16:creationId xmlns:a16="http://schemas.microsoft.com/office/drawing/2014/main" id="{FFACD180-C529-EB91-BD2D-B5F491B1E35C}"/>
                   </a:ext>
                 </a:extLst>
               </p:cNvPr>
@@ -17221,7 +17117,7 @@
                   <a:t> e </a:t>
                 </a:r>
                 <a:r>
-                  <a:rPr lang="pt-BR" b="1" i="1" dirty="0" smtClean="0">
+                  <a:rPr lang="pt-BR" b="1" i="1" dirty="0">
                     <a:solidFill>
                       <a:srgbClr val="00B050"/>
                     </a:solidFill>
@@ -17230,30 +17126,13 @@
                 </a:r>
                 <a:r>
                   <a:rPr lang="pt-BR" dirty="0"/>
-                  <a:t>.</a:t>
-                </a:r>
-                <a:r>
-                  <a:rPr lang="pt-BR" dirty="0" smtClean="0"/>
-                  <a:t> </a:t>
-                </a:r>
-                <a:endParaRPr lang="pt-BR" dirty="0"/>
+                  <a:t>. </a:t>
+                </a:r>
               </a:p>
               <a:p>
                 <a:r>
                   <a:rPr lang="pt-BR" dirty="0"/>
-                  <a:t>P</a:t>
-                </a:r>
-                <a:r>
-                  <a:rPr lang="pt-BR" dirty="0" smtClean="0"/>
-                  <a:t>ortanto,</a:t>
-                </a:r>
-                <a:r>
-                  <a:rPr lang="pt-BR" b="1" i="1" dirty="0" smtClean="0">
-                    <a:solidFill>
-                      <a:srgbClr val="00B050"/>
-                    </a:solidFill>
-                  </a:rPr>
-                  <a:t> </a:t>
+                  <a:t>Portanto,</a:t>
                 </a:r>
                 <a:r>
                   <a:rPr lang="pt-BR" b="1" i="1" dirty="0">
@@ -17261,23 +17140,7 @@
                       <a:srgbClr val="00B050"/>
                     </a:solidFill>
                   </a:rPr>
-                  <a:t>o algoritmo do gradiente </a:t>
-                </a:r>
-                <a:r>
-                  <a:rPr lang="pt-BR" b="1" i="1" dirty="0" smtClean="0">
-                    <a:solidFill>
-                      <a:srgbClr val="00B050"/>
-                    </a:solidFill>
-                  </a:rPr>
-                  <a:t>descendente (qualquer versão) pode ser usado para encontrar </a:t>
-                </a:r>
-                <a:r>
-                  <a:rPr lang="pt-BR" b="1" i="1" dirty="0">
-                    <a:solidFill>
-                      <a:srgbClr val="00B050"/>
-                    </a:solidFill>
-                  </a:rPr>
-                  <a:t>o mínimo global</a:t>
+                  <a:t> o algoritmo do gradiente descendente (qualquer versão) pode ser usado para encontrar o mínimo global</a:t>
                 </a:r>
                 <a:r>
                   <a:rPr lang="pt-BR" dirty="0"/>
@@ -17401,7 +17264,7 @@
           <p:cNvPr id="1026" name="Picture 2">
             <a:extLst>
               <a:ext uri="{FF2B5EF4-FFF2-40B4-BE49-F238E27FC236}">
-                <a16:creationId xmlns="" xmlns:a16="http://schemas.microsoft.com/office/drawing/2014/main" id="{6FC2BDE8-91E0-6379-9BA3-76511C6153D5}"/>
+                <a16:creationId xmlns:a16="http://schemas.microsoft.com/office/drawing/2014/main" id="{6FC2BDE8-91E0-6379-9BA3-76511C6153D5}"/>
               </a:ext>
             </a:extLst>
           </p:cNvPr>
@@ -17446,7 +17309,7 @@
           <p:cNvPr id="5" name="Picture 2">
             <a:extLst>
               <a:ext uri="{FF2B5EF4-FFF2-40B4-BE49-F238E27FC236}">
-                <a16:creationId xmlns="" xmlns:a16="http://schemas.microsoft.com/office/drawing/2014/main" id="{2771BE1F-7B74-36A4-AA69-9171B025A4B6}"/>
+                <a16:creationId xmlns:a16="http://schemas.microsoft.com/office/drawing/2014/main" id="{2771BE1F-7B74-36A4-AA69-9171B025A4B6}"/>
               </a:ext>
             </a:extLst>
           </p:cNvPr>
@@ -17521,7 +17384,7 @@
           <p:cNvPr id="2" name="Título 1">
             <a:extLst>
               <a:ext uri="{FF2B5EF4-FFF2-40B4-BE49-F238E27FC236}">
-                <a16:creationId xmlns="" xmlns:a16="http://schemas.microsoft.com/office/drawing/2014/main" id="{5D929962-9BFC-4174-AB35-CC23FA013168}"/>
+                <a16:creationId xmlns:a16="http://schemas.microsoft.com/office/drawing/2014/main" id="{5D929962-9BFC-4174-AB35-CC23FA013168}"/>
               </a:ext>
             </a:extLst>
           </p:cNvPr>
@@ -17551,7 +17414,7 @@
               <p:cNvPr id="3" name="Espaço Reservado para Conteúdo 2">
                 <a:extLst>
                   <a:ext uri="{FF2B5EF4-FFF2-40B4-BE49-F238E27FC236}">
-                    <a16:creationId xmlns="" xmlns:a16="http://schemas.microsoft.com/office/drawing/2014/main" id="{1D38055D-E355-F780-9CA0-0337EA0BE4FD}"/>
+                    <a16:creationId xmlns:a16="http://schemas.microsoft.com/office/drawing/2014/main" id="{1D38055D-E355-F780-9CA0-0337EA0BE4FD}"/>
                   </a:ext>
                 </a:extLst>
               </p:cNvPr>
@@ -18724,7 +18587,7 @@
           <p:cNvPr id="4" name="TextBox 3">
             <a:extLst>
               <a:ext uri="{FF2B5EF4-FFF2-40B4-BE49-F238E27FC236}">
-                <a16:creationId xmlns="" xmlns:a16="http://schemas.microsoft.com/office/drawing/2014/main" id="{39A1F0A7-6FE4-5915-6E73-B4358D34F953}"/>
+                <a16:creationId xmlns:a16="http://schemas.microsoft.com/office/drawing/2014/main" id="{39A1F0A7-6FE4-5915-6E73-B4358D34F953}"/>
               </a:ext>
             </a:extLst>
           </p:cNvPr>
@@ -18760,7 +18623,7 @@
           <p:cNvPr id="5" name="Straight Arrow Connector 5">
             <a:extLst>
               <a:ext uri="{FF2B5EF4-FFF2-40B4-BE49-F238E27FC236}">
-                <a16:creationId xmlns="" xmlns:a16="http://schemas.microsoft.com/office/drawing/2014/main" id="{C9B616E8-B74F-0DC6-87F9-63CCB1AB4FE1}"/>
+                <a16:creationId xmlns:a16="http://schemas.microsoft.com/office/drawing/2014/main" id="{C9B616E8-B74F-0DC6-87F9-63CCB1AB4FE1}"/>
               </a:ext>
             </a:extLst>
           </p:cNvPr>
@@ -18875,91 +18738,21 @@
           <a:p>
             <a:r>
               <a:rPr lang="pt-BR" dirty="0"/>
-              <a:t>Anteriormente, aprendemos uma nova </a:t>
+              <a:t>Anteriormente, aprendemos como o </a:t>
             </a:r>
             <a:r>
               <a:rPr lang="pt-BR" b="1" i="1" dirty="0"/>
-              <a:t>função de limiar</a:t>
+              <a:t>regressor logístico</a:t>
             </a:r>
             <a:r>
               <a:rPr lang="pt-BR" dirty="0"/>
-              <a:t>, chamada de </a:t>
-            </a:r>
-            <a:r>
-              <a:rPr lang="pt-BR" b="1" i="1" dirty="0"/>
-              <a:t>função logística</a:t>
-            </a:r>
+              <a:t> funciona e pode ser usado em problemas de classificação binária, após a discretização do valor de saída.</a:t>
+            </a:r>
+          </a:p>
+          <a:p>
             <a:r>
               <a:rPr lang="pt-BR" dirty="0"/>
-              <a:t>, com a qual foi possível encontrar uma solução para o problema de classificação usando o algoritmo do </a:t>
-            </a:r>
-            <a:r>
-              <a:rPr lang="pt-BR" b="1" i="1" dirty="0"/>
-              <a:t>gradiente descendente</a:t>
-            </a:r>
-            <a:r>
-              <a:rPr lang="pt-BR" dirty="0"/>
-              <a:t>.</a:t>
-            </a:r>
-          </a:p>
-          <a:p>
-            <a:r>
-              <a:rPr lang="pt-BR" dirty="0"/>
-              <a:t>Classificadores que utilizam a </a:t>
-            </a:r>
-            <a:r>
-              <a:rPr lang="pt-BR" b="1" i="1" dirty="0"/>
-              <a:t>função logística </a:t>
-            </a:r>
-            <a:r>
-              <a:rPr lang="pt-BR" dirty="0"/>
-              <a:t>como</a:t>
-            </a:r>
-            <a:r>
-              <a:rPr lang="pt-BR" b="1" i="1" dirty="0"/>
-              <a:t> função de limiar </a:t>
-            </a:r>
-            <a:r>
-              <a:rPr lang="pt-BR" dirty="0"/>
-              <a:t>são</a:t>
-            </a:r>
-            <a:r>
-              <a:rPr lang="pt-BR" b="1" i="1" dirty="0"/>
-              <a:t> </a:t>
-            </a:r>
-            <a:r>
-              <a:rPr lang="pt-BR" dirty="0"/>
-              <a:t>conhecidos como </a:t>
-            </a:r>
-            <a:r>
-              <a:rPr lang="pt-BR" b="1" i="1" dirty="0"/>
-              <a:t>regressores logísticos</a:t>
-            </a:r>
-            <a:r>
-              <a:rPr lang="pt-BR" dirty="0"/>
-              <a:t> e são utilizados em problemas de </a:t>
-            </a:r>
-            <a:r>
-              <a:rPr lang="pt-BR" b="1" i="1" dirty="0"/>
-              <a:t>classificação binária</a:t>
-            </a:r>
-            <a:r>
-              <a:rPr lang="pt-BR" dirty="0"/>
-              <a:t>, ou seja, problemas com apenas 2 classes, após a discretização do valor de saída.</a:t>
-            </a:r>
-          </a:p>
-          <a:p>
-            <a:r>
-              <a:rPr lang="pt-BR" dirty="0"/>
-              <a:t>Na sequência, veremos como lidar com problemas de classificação que envolvem mais de 2 classes, também chamados de </a:t>
-            </a:r>
-            <a:r>
-              <a:rPr lang="pt-BR" b="1" i="1" dirty="0"/>
-              <a:t>classificação multi-classes</a:t>
-            </a:r>
-            <a:r>
-              <a:rPr lang="pt-BR" dirty="0"/>
-              <a:t>.</a:t>
+              <a:t>Na sequência, veremos como lidar com problemas de classificação que envolvem mais de 2 classes.</a:t>
             </a:r>
           </a:p>
         </p:txBody>
@@ -18999,7 +18792,7 @@
           <p:cNvPr id="2" name="Título 1">
             <a:extLst>
               <a:ext uri="{FF2B5EF4-FFF2-40B4-BE49-F238E27FC236}">
-                <a16:creationId xmlns="" xmlns:a16="http://schemas.microsoft.com/office/drawing/2014/main" id="{01D0947A-594D-A8D5-95F3-38EB04C6BDB6}"/>
+                <a16:creationId xmlns:a16="http://schemas.microsoft.com/office/drawing/2014/main" id="{01D0947A-594D-A8D5-95F3-38EB04C6BDB6}"/>
               </a:ext>
             </a:extLst>
           </p:cNvPr>
@@ -19022,14 +18815,14 @@
           </a:p>
         </p:txBody>
       </p:sp>
-      <mc:AlternateContent xmlns:mc="http://schemas.openxmlformats.org/markup-compatibility/2006">
-        <mc:Choice xmlns:a14="http://schemas.microsoft.com/office/drawing/2010/main" Requires="a14">
+      <mc:AlternateContent xmlns:mc="http://schemas.openxmlformats.org/markup-compatibility/2006" xmlns:a14="http://schemas.microsoft.com/office/drawing/2010/main">
+        <mc:Choice Requires="a14">
           <p:sp>
             <p:nvSpPr>
               <p:cNvPr id="3" name="Espaço Reservado para Conteúdo 2">
                 <a:extLst>
                   <a:ext uri="{FF2B5EF4-FFF2-40B4-BE49-F238E27FC236}">
-                    <a16:creationId xmlns="" xmlns:a16="http://schemas.microsoft.com/office/drawing/2014/main" id="{DDBA288E-BBB8-E157-840C-AA685AD7D65C}"/>
+                    <a16:creationId xmlns:a16="http://schemas.microsoft.com/office/drawing/2014/main" id="{DDBA288E-BBB8-E157-840C-AA685AD7D65C}"/>
                   </a:ext>
                 </a:extLst>
               </p:cNvPr>
@@ -19338,15 +19131,7 @@
               <a:p>
                 <a:r>
                   <a:rPr lang="pt-BR" dirty="0"/>
-                  <a:t>O vetor gradiente pode ser reescrito </a:t>
-                </a:r>
-                <a:r>
-                  <a:rPr lang="pt-BR" dirty="0" smtClean="0"/>
-                  <a:t>levando-se </a:t>
-                </a:r>
-                <a:r>
-                  <a:rPr lang="pt-BR" dirty="0"/>
-                  <a:t>em consideração todos os </a:t>
+                  <a:t>O vetor gradiente pode ser reescrito levando-se em consideração todos os </a:t>
                 </a:r>
                 <a14:m>
                   <m:oMath xmlns:m="http://schemas.openxmlformats.org/officeDocument/2006/math">
@@ -19611,12 +19396,8 @@
                   </m:oMath>
                 </a14:m>
                 <a:r>
-                  <a:rPr lang="pt-BR" dirty="0" smtClean="0"/>
-                  <a:t> são </a:t>
-                </a:r>
-                <a:r>
-                  <a:rPr lang="pt-BR" dirty="0"/>
-                  <a:t>matrizes com dimensão </a:t>
+                  <a:rPr lang="pt-BR" dirty="0"/>
+                  <a:t> são matrizes com dimensão </a:t>
                 </a:r>
                 <a14:m>
                   <m:oMath xmlns:m="http://schemas.openxmlformats.org/officeDocument/2006/math">
@@ -19806,7 +19587,7 @@
             </p:txBody>
           </p:sp>
         </mc:Choice>
-        <mc:Fallback>
+        <mc:Fallback xmlns="">
           <p:sp>
             <p:nvSpPr>
               <p:cNvPr id="3" name="Espaço Reservado para Conteúdo 2">
@@ -19885,7 +19666,7 @@
           <p:cNvPr id="2" name="Título 1">
             <a:extLst>
               <a:ext uri="{FF2B5EF4-FFF2-40B4-BE49-F238E27FC236}">
-                <a16:creationId xmlns="" xmlns:a16="http://schemas.microsoft.com/office/drawing/2014/main" id="{01D0947A-594D-A8D5-95F3-38EB04C6BDB6}"/>
+                <a16:creationId xmlns:a16="http://schemas.microsoft.com/office/drawing/2014/main" id="{01D0947A-594D-A8D5-95F3-38EB04C6BDB6}"/>
               </a:ext>
             </a:extLst>
           </p:cNvPr>
@@ -19908,14 +19689,14 @@
           </a:p>
         </p:txBody>
       </p:sp>
-      <mc:AlternateContent xmlns:mc="http://schemas.openxmlformats.org/markup-compatibility/2006">
-        <mc:Choice xmlns:a14="http://schemas.microsoft.com/office/drawing/2010/main" Requires="a14">
+      <mc:AlternateContent xmlns:mc="http://schemas.openxmlformats.org/markup-compatibility/2006" xmlns:a14="http://schemas.microsoft.com/office/drawing/2010/main">
+        <mc:Choice Requires="a14">
           <p:sp>
             <p:nvSpPr>
               <p:cNvPr id="3" name="Espaço Reservado para Conteúdo 2">
                 <a:extLst>
                   <a:ext uri="{FF2B5EF4-FFF2-40B4-BE49-F238E27FC236}">
-                    <a16:creationId xmlns="" xmlns:a16="http://schemas.microsoft.com/office/drawing/2014/main" id="{DDBA288E-BBB8-E157-840C-AA685AD7D65C}"/>
+                    <a16:creationId xmlns:a16="http://schemas.microsoft.com/office/drawing/2014/main" id="{DDBA288E-BBB8-E157-840C-AA685AD7D65C}"/>
                   </a:ext>
                 </a:extLst>
               </p:cNvPr>
@@ -20161,11 +19942,7 @@
               <a:p>
                 <a:r>
                   <a:rPr lang="pt-BR" dirty="0"/>
-                  <a:t>Entretanto, como vimos antes, </a:t>
-                </a:r>
-                <a:r>
-                  <a:rPr lang="pt-BR" dirty="0" smtClean="0"/>
-                  <a:t>essa </a:t>
+                  <a:t>Entretanto, como vimos antes, essa </a:t>
                 </a:r>
                 <a:r>
                   <a:rPr lang="pt-BR" b="1" i="1" dirty="0">
@@ -20291,7 +20068,7 @@
             </p:txBody>
           </p:sp>
         </mc:Choice>
-        <mc:Fallback>
+        <mc:Fallback xmlns="">
           <p:sp>
             <p:nvSpPr>
               <p:cNvPr id="3" name="Espaço Reservado para Conteúdo 2">
@@ -20370,7 +20147,7 @@
           <p:cNvPr id="2" name="Título 1">
             <a:extLst>
               <a:ext uri="{FF2B5EF4-FFF2-40B4-BE49-F238E27FC236}">
-                <a16:creationId xmlns="" xmlns:a16="http://schemas.microsoft.com/office/drawing/2014/main" id="{4A7289C7-E211-F0FB-5D03-01DCF930ACAE}"/>
+                <a16:creationId xmlns:a16="http://schemas.microsoft.com/office/drawing/2014/main" id="{4A7289C7-E211-F0FB-5D03-01DCF930ACAE}"/>
               </a:ext>
             </a:extLst>
           </p:cNvPr>
@@ -20393,14 +20170,14 @@
           </a:p>
         </p:txBody>
       </p:sp>
-      <mc:AlternateContent xmlns:mc="http://schemas.openxmlformats.org/markup-compatibility/2006">
-        <mc:Choice xmlns:a14="http://schemas.microsoft.com/office/drawing/2010/main" Requires="a14">
+      <mc:AlternateContent xmlns:mc="http://schemas.openxmlformats.org/markup-compatibility/2006" xmlns:a14="http://schemas.microsoft.com/office/drawing/2010/main">
+        <mc:Choice Requires="a14">
           <p:sp>
             <p:nvSpPr>
               <p:cNvPr id="3" name="Espaço Reservado para Conteúdo 2">
                 <a:extLst>
                   <a:ext uri="{FF2B5EF4-FFF2-40B4-BE49-F238E27FC236}">
-                    <a16:creationId xmlns="" xmlns:a16="http://schemas.microsoft.com/office/drawing/2014/main" id="{89224D24-6597-F88C-6310-B2A8EEA5142E}"/>
+                    <a16:creationId xmlns:a16="http://schemas.microsoft.com/office/drawing/2014/main" id="{89224D24-6597-F88C-6310-B2A8EEA5142E}"/>
                   </a:ext>
                 </a:extLst>
               </p:cNvPr>
@@ -20554,13 +20331,8 @@
                 </a:r>
                 <a:r>
                   <a:rPr lang="pt-BR" dirty="0"/>
-                  <a:t> função hipótese sempre será um valor dentro do intervalo [0, 1</a:t>
-                </a:r>
-                <a:r>
-                  <a:rPr lang="pt-BR" dirty="0" smtClean="0"/>
-                  <a:t>],</a:t>
-                </a:r>
-                <a:endParaRPr lang="pt-BR" dirty="0"/>
+                  <a:t> função hipótese sempre será um valor dentro do intervalo [0, 1],</a:t>
+                </a:r>
               </a:p>
               <a:p>
                 <a:pPr lvl="1">
@@ -21234,15 +21006,7 @@
                 </a:pPr>
                 <a:r>
                   <a:rPr lang="pt-BR" dirty="0"/>
-                  <a:t>que contém todas as saídas do regressor </a:t>
-                </a:r>
-                <a:r>
-                  <a:rPr lang="pt-BR" dirty="0" smtClean="0"/>
-                  <a:t>softmax, </a:t>
-                </a:r>
-                <a:r>
-                  <a:rPr lang="pt-BR" dirty="0"/>
-                  <a:t>atenda os requisitos de uma </a:t>
+                  <a:t>que contém todas as saídas do regressor softmax, atenda os requisitos de uma </a:t>
                 </a:r>
                 <a:r>
                   <a:rPr lang="pt-BR" b="1" i="1" dirty="0"/>
@@ -21253,7 +21017,7 @@
             </p:txBody>
           </p:sp>
         </mc:Choice>
-        <mc:Fallback>
+        <mc:Fallback xmlns="">
           <p:sp>
             <p:nvSpPr>
               <p:cNvPr id="3" name="Espaço Reservado para Conteúdo 2">
@@ -21332,7 +21096,7 @@
           <p:cNvPr id="2" name="Título 1">
             <a:extLst>
               <a:ext uri="{FF2B5EF4-FFF2-40B4-BE49-F238E27FC236}">
-                <a16:creationId xmlns="" xmlns:a16="http://schemas.microsoft.com/office/drawing/2014/main" id="{E0F1FD81-6095-2AF0-8691-34E55B8A93B5}"/>
+                <a16:creationId xmlns:a16="http://schemas.microsoft.com/office/drawing/2014/main" id="{E0F1FD81-6095-2AF0-8691-34E55B8A93B5}"/>
               </a:ext>
             </a:extLst>
           </p:cNvPr>
@@ -21355,14 +21119,14 @@
           </a:p>
         </p:txBody>
       </p:sp>
-      <mc:AlternateContent xmlns:mc="http://schemas.openxmlformats.org/markup-compatibility/2006">
-        <mc:Choice xmlns:a14="http://schemas.microsoft.com/office/drawing/2010/main" Requires="a14">
+      <mc:AlternateContent xmlns:mc="http://schemas.openxmlformats.org/markup-compatibility/2006" xmlns:a14="http://schemas.microsoft.com/office/drawing/2010/main">
+        <mc:Choice Requires="a14">
           <p:sp>
             <p:nvSpPr>
               <p:cNvPr id="3" name="Espaço Reservado para Conteúdo 2">
                 <a:extLst>
                   <a:ext uri="{FF2B5EF4-FFF2-40B4-BE49-F238E27FC236}">
-                    <a16:creationId xmlns="" xmlns:a16="http://schemas.microsoft.com/office/drawing/2014/main" id="{BB734B24-DA50-860B-5D55-C33F6F451B6F}"/>
+                    <a16:creationId xmlns:a16="http://schemas.microsoft.com/office/drawing/2014/main" id="{BB734B24-DA50-860B-5D55-C33F6F451B6F}"/>
                   </a:ext>
                 </a:extLst>
               </p:cNvPr>
@@ -22665,24 +22429,7 @@
                       <a:schemeClr val="tx1"/>
                     </a:solidFill>
                   </a:rPr>
-                  <a:t> </a:t>
-                </a:r>
-                <a:r>
-                  <a:rPr lang="pt-BR" dirty="0" smtClean="0">
-                    <a:solidFill>
-                      <a:schemeClr val="tx1"/>
-                    </a:solidFill>
-                  </a:rPr>
-                  <a:t>faz com que </a:t>
-                </a:r>
-                <a:r>
-                  <a:rPr lang="pt-BR" b="0" i="0" dirty="0" smtClean="0">
-                    <a:solidFill>
-                      <a:schemeClr val="tx1"/>
-                    </a:solidFill>
-                    <a:effectLst/>
-                  </a:rPr>
-                  <a:t>as </a:t>
+                  <a:t> faz com que </a:t>
                 </a:r>
                 <a:r>
                   <a:rPr lang="pt-BR" b="0" i="0" dirty="0">
@@ -22691,7 +22438,7 @@
                     </a:solidFill>
                     <a:effectLst/>
                   </a:rPr>
-                  <a:t>saídas do modelo sejam </a:t>
+                  <a:t>as saídas do modelo sejam </a:t>
                 </a:r>
                 <a:r>
                   <a:rPr lang="pt-BR" b="1" i="1" dirty="0">
@@ -22712,22 +22459,13 @@
                   <a:t>e </a:t>
                 </a:r>
                 <a:r>
-                  <a:rPr lang="pt-BR" b="1" i="1" dirty="0" smtClean="0">
-                    <a:solidFill>
-                      <a:srgbClr val="00B050"/>
-                    </a:solidFill>
-                    <a:effectLst/>
-                  </a:rPr>
-                  <a:t>garante </a:t>
-                </a:r>
-                <a:r>
                   <a:rPr lang="pt-BR" b="1" i="1" dirty="0">
                     <a:solidFill>
                       <a:srgbClr val="00B050"/>
                     </a:solidFill>
                     <a:effectLst/>
                   </a:rPr>
-                  <a:t>um treinamento estável</a:t>
+                  <a:t>garante um treinamento estável</a:t>
                 </a:r>
                 <a:r>
                   <a:rPr lang="pt-BR" b="0" i="0" dirty="0">
@@ -22744,7 +22482,7 @@
             </p:txBody>
           </p:sp>
         </mc:Choice>
-        <mc:Fallback>
+        <mc:Fallback xmlns="">
           <p:sp>
             <p:nvSpPr>
               <p:cNvPr id="3" name="Espaço Reservado para Conteúdo 2">
@@ -22798,13 +22536,6 @@
   <p:clrMapOvr>
     <a:masterClrMapping/>
   </p:clrMapOvr>
-  <p:timing>
-    <p:tnLst>
-      <p:par>
-        <p:cTn id="1" dur="indefinite" restart="never" nodeType="tmRoot"/>
-      </p:par>
-    </p:tnLst>
-  </p:timing>
 </p:sld>
 </file>
 
@@ -22830,7 +22561,7 @@
           <p:cNvPr id="2" name="Título 1">
             <a:extLst>
               <a:ext uri="{FF2B5EF4-FFF2-40B4-BE49-F238E27FC236}">
-                <a16:creationId xmlns="" xmlns:a16="http://schemas.microsoft.com/office/drawing/2014/main" id="{FC175046-E9DF-FCC8-C62B-B00332089713}"/>
+                <a16:creationId xmlns:a16="http://schemas.microsoft.com/office/drawing/2014/main" id="{FC175046-E9DF-FCC8-C62B-B00332089713}"/>
               </a:ext>
             </a:extLst>
           </p:cNvPr>
@@ -22853,14 +22584,14 @@
           </a:p>
         </p:txBody>
       </p:sp>
-      <mc:AlternateContent xmlns:mc="http://schemas.openxmlformats.org/markup-compatibility/2006">
-        <mc:Choice xmlns:a14="http://schemas.microsoft.com/office/drawing/2010/main" Requires="a14">
+      <mc:AlternateContent xmlns:mc="http://schemas.openxmlformats.org/markup-compatibility/2006" xmlns:a14="http://schemas.microsoft.com/office/drawing/2010/main">
+        <mc:Choice Requires="a14">
           <p:sp>
             <p:nvSpPr>
               <p:cNvPr id="3" name="Espaço Reservado para Conteúdo 2">
                 <a:extLst>
                   <a:ext uri="{FF2B5EF4-FFF2-40B4-BE49-F238E27FC236}">
-                    <a16:creationId xmlns="" xmlns:a16="http://schemas.microsoft.com/office/drawing/2014/main" id="{24721BB7-DBA3-D8BF-7F98-ED91BD59DAEC}"/>
+                    <a16:creationId xmlns:a16="http://schemas.microsoft.com/office/drawing/2014/main" id="{24721BB7-DBA3-D8BF-7F98-ED91BD59DAEC}"/>
                   </a:ext>
                 </a:extLst>
               </p:cNvPr>
@@ -22984,16 +22715,8 @@
               </a:p>
               <a:p>
                 <a:r>
-                  <a:rPr lang="pt-BR" dirty="0" smtClean="0"/>
-                  <a:t>Em resumo, a</a:t>
-                </a:r>
-                <a:r>
-                  <a:rPr lang="pt-BR" dirty="0" smtClean="0"/>
-                  <a:t> </a:t>
-                </a:r>
-                <a:r>
-                  <a:rPr lang="pt-BR" dirty="0"/>
-                  <a:t>ideia por trás da </a:t>
+                  <a:rPr lang="pt-BR" dirty="0"/>
+                  <a:t>Em resumo, a ideia por trás da </a:t>
                 </a:r>
                 <a:r>
                   <a:rPr lang="pt-BR" b="1" i="1" dirty="0"/>
@@ -23289,7 +23012,7 @@
             </p:txBody>
           </p:sp>
         </mc:Choice>
-        <mc:Fallback>
+        <mc:Fallback xmlns="">
           <p:sp>
             <p:nvSpPr>
               <p:cNvPr id="3" name="Espaço Reservado para Conteúdo 2">
@@ -23338,7 +23061,7 @@
           <p:cNvPr id="5" name="Rectangle 2">
             <a:extLst>
               <a:ext uri="{FF2B5EF4-FFF2-40B4-BE49-F238E27FC236}">
-                <a16:creationId xmlns="" xmlns:a16="http://schemas.microsoft.com/office/drawing/2014/main" id="{0357C04D-3666-45D0-A263-597819F48D09}"/>
+                <a16:creationId xmlns:a16="http://schemas.microsoft.com/office/drawing/2014/main" id="{0357C04D-3666-45D0-A263-597819F48D09}"/>
               </a:ext>
             </a:extLst>
           </p:cNvPr>
@@ -23381,7 +23104,7 @@
           <p:cNvPr id="6" name="Imagem 5">
             <a:extLst>
               <a:ext uri="{FF2B5EF4-FFF2-40B4-BE49-F238E27FC236}">
-                <a16:creationId xmlns="" xmlns:a16="http://schemas.microsoft.com/office/drawing/2014/main" id="{FF78CF76-EB26-3FAE-0391-E452288FA28E}"/>
+                <a16:creationId xmlns:a16="http://schemas.microsoft.com/office/drawing/2014/main" id="{FF78CF76-EB26-3FAE-0391-E452288FA28E}"/>
               </a:ext>
             </a:extLst>
           </p:cNvPr>
@@ -23422,13 +23145,6 @@
   <p:clrMapOvr>
     <a:masterClrMapping/>
   </p:clrMapOvr>
-  <p:timing>
-    <p:tnLst>
-      <p:par>
-        <p:cTn id="1" dur="indefinite" restart="never" nodeType="tmRoot"/>
-      </p:par>
-    </p:tnLst>
-  </p:timing>
 </p:sld>
 </file>
 
@@ -23584,13 +23300,6 @@
   <p:clrMapOvr>
     <a:masterClrMapping/>
   </p:clrMapOvr>
-  <p:timing>
-    <p:tnLst>
-      <p:par>
-        <p:cTn id="1" dur="indefinite" restart="never" nodeType="tmRoot"/>
-      </p:par>
-    </p:tnLst>
-  </p:timing>
 </p:sld>
 </file>
 
@@ -23616,7 +23325,7 @@
           <p:cNvPr id="4" name="Título 1">
             <a:extLst>
               <a:ext uri="{FF2B5EF4-FFF2-40B4-BE49-F238E27FC236}">
-                <a16:creationId xmlns="" xmlns:a16="http://schemas.microsoft.com/office/drawing/2014/main" id="{32666AC8-2E17-4DB4-B0F5-60C640CCFD2E}"/>
+                <a16:creationId xmlns:a16="http://schemas.microsoft.com/office/drawing/2014/main" id="{32666AC8-2E17-4DB4-B0F5-60C640CCFD2E}"/>
               </a:ext>
             </a:extLst>
           </p:cNvPr>
@@ -23677,13 +23386,6 @@
   <p:clrMapOvr>
     <a:masterClrMapping/>
   </p:clrMapOvr>
-  <p:timing>
-    <p:tnLst>
-      <p:par>
-        <p:cTn id="1" dur="indefinite" restart="never" nodeType="tmRoot"/>
-      </p:par>
-    </p:tnLst>
-  </p:timing>
 </p:sld>
 </file>
 
@@ -23726,8 +23428,8 @@
           </a:p>
         </p:txBody>
       </p:sp>
-      <mc:AlternateContent xmlns:mc="http://schemas.openxmlformats.org/markup-compatibility/2006" xmlns:a14="http://schemas.microsoft.com/office/drawing/2010/main">
-        <mc:Choice Requires="a14">
+      <mc:AlternateContent xmlns:mc="http://schemas.openxmlformats.org/markup-compatibility/2006">
+        <mc:Choice xmlns:a14="http://schemas.microsoft.com/office/drawing/2010/main" Requires="a14">
           <p:sp>
             <p:nvSpPr>
               <p:cNvPr id="3" name="Content Placeholder 2"/>
@@ -23746,27 +23448,13 @@
             </p:spPr>
             <p:txBody>
               <a:bodyPr>
-                <a:normAutofit lnSpcReduction="10000"/>
+                <a:normAutofit/>
               </a:bodyPr>
               <a:lstStyle/>
               <a:p>
                 <a:r>
                   <a:rPr lang="pt-BR" dirty="0"/>
-                  <a:t>Até agora, nós vimos como classificar utilizando a </a:t>
-                </a:r>
-                <a:r>
-                  <a:rPr lang="pt-BR" b="1" i="1" dirty="0"/>
-                  <a:t>regressão logística</a:t>
-                </a:r>
-                <a:r>
-                  <a:rPr lang="pt-BR" dirty="0"/>
-                  <a:t>.</a:t>
-                </a:r>
-              </a:p>
-              <a:p>
-                <a:r>
-                  <a:rPr lang="pt-BR" dirty="0"/>
-                  <a:t>Nesse caso, os dados pertencem a apenas 2 classes (i.e., </a:t>
+                  <a:t>Até agora, vimos problemas com 2 classes (i.e., </a:t>
                 </a:r>
                 <a14:m>
                   <m:oMath xmlns:m="http://schemas.openxmlformats.org/officeDocument/2006/math">
@@ -23868,7 +23556,7 @@
             </p:txBody>
           </p:sp>
         </mc:Choice>
-        <mc:Fallback xmlns="">
+        <mc:Fallback>
           <p:sp>
             <p:nvSpPr>
               <p:cNvPr id="3" name="Content Placeholder 2"/>
@@ -23884,10 +23572,10 @@
                 <a:off x="5638800" y="1784680"/>
                 <a:ext cx="6357730" cy="5073320"/>
               </a:xfrm>
-              <a:blipFill rotWithShape="0">
+              <a:blipFill>
                 <a:blip r:embed="rId2"/>
                 <a:stretch>
-                  <a:fillRect l="-1726" t="-2764"/>
+                  <a:fillRect l="-1726" t="-2043"/>
                 </a:stretch>
               </a:blipFill>
             </p:spPr>
@@ -23896,7 +23584,7 @@
               <a:lstStyle/>
               <a:p>
                 <a:r>
-                  <a:rPr lang="pt-BR">
+                  <a:rPr lang="en-US">
                     <a:noFill/>
                   </a:rPr>
                   <a:t> </a:t>
@@ -23911,7 +23599,7 @@
           <p:cNvPr id="4" name="Picture 2" descr="Ana Barros (@anathinker) | Twitter">
             <a:extLst>
               <a:ext uri="{FF2B5EF4-FFF2-40B4-BE49-F238E27FC236}">
-                <a16:creationId xmlns="" xmlns:a16="http://schemas.microsoft.com/office/drawing/2014/main" id="{AF3F0044-4F7D-98F6-34C1-8351487DFDAA}"/>
+                <a16:creationId xmlns:a16="http://schemas.microsoft.com/office/drawing/2014/main" id="{AF3F0044-4F7D-98F6-34C1-8351487DFDAA}"/>
               </a:ext>
             </a:extLst>
           </p:cNvPr>
@@ -23958,7 +23646,7 @@
           <p:cNvPr id="5" name="Picture 6" descr="Analyzing Text Classification Techniques on Youtube Data">
             <a:extLst>
               <a:ext uri="{FF2B5EF4-FFF2-40B4-BE49-F238E27FC236}">
-                <a16:creationId xmlns="" xmlns:a16="http://schemas.microsoft.com/office/drawing/2014/main" id="{0E6041F8-AB14-54C0-C790-0288A3AC8FBA}"/>
+                <a16:creationId xmlns:a16="http://schemas.microsoft.com/office/drawing/2014/main" id="{0E6041F8-AB14-54C0-C790-0288A3AC8FBA}"/>
               </a:ext>
             </a:extLst>
           </p:cNvPr>
@@ -24003,7 +23691,7 @@
           <p:cNvPr id="6" name="Picture 2" descr="Sentiment Fig 1">
             <a:extLst>
               <a:ext uri="{FF2B5EF4-FFF2-40B4-BE49-F238E27FC236}">
-                <a16:creationId xmlns="" xmlns:a16="http://schemas.microsoft.com/office/drawing/2014/main" id="{1E7CC96F-55AB-1482-92F6-240F8E2E0D1E}"/>
+                <a16:creationId xmlns:a16="http://schemas.microsoft.com/office/drawing/2014/main" id="{1E7CC96F-55AB-1482-92F6-240F8E2E0D1E}"/>
               </a:ext>
             </a:extLst>
           </p:cNvPr>
@@ -24097,8 +23785,8 @@
           </a:p>
         </p:txBody>
       </p:sp>
-      <mc:AlternateContent xmlns:mc="http://schemas.openxmlformats.org/markup-compatibility/2006" xmlns:a14="http://schemas.microsoft.com/office/drawing/2010/main">
-        <mc:Choice Requires="a14">
+      <mc:AlternateContent xmlns:mc="http://schemas.openxmlformats.org/markup-compatibility/2006">
+        <mc:Choice xmlns:a14="http://schemas.microsoft.com/office/drawing/2010/main" Requires="a14">
           <p:sp>
             <p:nvSpPr>
               <p:cNvPr id="3" name="Content Placeholder 2"/>
@@ -24157,7 +23845,7 @@
                       <a:srgbClr val="00B050"/>
                     </a:solidFill>
                   </a:rPr>
-                  <a:t>multi-classes</a:t>
+                  <a:t>multiclasses</a:t>
                 </a:r>
                 <a:r>
                   <a:rPr lang="pt-BR" dirty="0"/>
@@ -24167,15 +23855,19 @@
               <a:p>
                 <a:r>
                   <a:rPr lang="pt-BR" dirty="0"/>
-                  <a:t>Existem algumas abordagens para a </a:t>
+                  <a:t>Algumas abordagens para a </a:t>
                 </a:r>
                 <a:r>
                   <a:rPr lang="pt-BR" b="1" i="1" dirty="0"/>
-                  <a:t>classificação multi-classe</a:t>
-                </a:r>
-                <a:r>
-                  <a:rPr lang="pt-BR" dirty="0"/>
-                  <a:t>:</a:t>
+                  <a:t>classificação </a:t>
+                </a:r>
+                <a:r>
+                  <a:rPr lang="pt-BR" b="1" i="1" dirty="0" err="1"/>
+                  <a:t>multiclasse</a:t>
+                </a:r>
+                <a:r>
+                  <a:rPr lang="pt-BR" dirty="0"/>
+                  <a:t> são:</a:t>
                 </a:r>
               </a:p>
               <a:p>
@@ -24211,7 +23903,7 @@
               <a:p>
                 <a:r>
                   <a:rPr lang="pt-BR" dirty="0"/>
-                  <a:t>As duas primeiras são usadas com </a:t>
+                  <a:t>As duas primeiras usam </a:t>
                 </a:r>
                 <a:r>
                   <a:rPr lang="pt-BR" b="1" i="1" dirty="0"/>
@@ -24241,13 +23933,21 @@
                 </a:r>
                 <a:r>
                   <a:rPr lang="pt-BR" dirty="0"/>
-                  <a:t>para problemas multi-classe.</a:t>
+                  <a:t>para problemas </a:t>
+                </a:r>
+                <a:r>
+                  <a:rPr lang="pt-BR" dirty="0" err="1"/>
+                  <a:t>multiclasse</a:t>
+                </a:r>
+                <a:r>
+                  <a:rPr lang="pt-BR" dirty="0"/>
+                  <a:t>.</a:t>
                 </a:r>
               </a:p>
             </p:txBody>
           </p:sp>
         </mc:Choice>
-        <mc:Fallback xmlns="">
+        <mc:Fallback>
           <p:sp>
             <p:nvSpPr>
               <p:cNvPr id="3" name="Content Placeholder 2"/>
@@ -24263,10 +23963,10 @@
                 <a:off x="5697415" y="1784680"/>
                 <a:ext cx="6375969" cy="5073320"/>
               </a:xfrm>
-              <a:blipFill rotWithShape="0">
+              <a:blipFill>
                 <a:blip r:embed="rId2"/>
                 <a:stretch>
-                  <a:fillRect l="-1721" t="-2764" b="-1322"/>
+                  <a:fillRect l="-1721" t="-2764" r="-2103"/>
                 </a:stretch>
               </a:blipFill>
             </p:spPr>
@@ -24275,7 +23975,7 @@
               <a:lstStyle/>
               <a:p>
                 <a:r>
-                  <a:rPr lang="pt-BR">
+                  <a:rPr lang="en-US">
                     <a:noFill/>
                   </a:rPr>
                   <a:t> </a:t>
@@ -24290,7 +23990,7 @@
           <p:cNvPr id="7" name="Picture 2" descr="Ana Barros (@anathinker) | Twitter">
             <a:extLst>
               <a:ext uri="{FF2B5EF4-FFF2-40B4-BE49-F238E27FC236}">
-                <a16:creationId xmlns="" xmlns:a16="http://schemas.microsoft.com/office/drawing/2014/main" id="{A2D479C7-0684-420F-2CCD-64C3DB79FDAB}"/>
+                <a16:creationId xmlns:a16="http://schemas.microsoft.com/office/drawing/2014/main" id="{A2D479C7-0684-420F-2CCD-64C3DB79FDAB}"/>
               </a:ext>
             </a:extLst>
           </p:cNvPr>
@@ -24337,7 +24037,7 @@
           <p:cNvPr id="8" name="Picture 6" descr="Analyzing Text Classification Techniques on Youtube Data">
             <a:extLst>
               <a:ext uri="{FF2B5EF4-FFF2-40B4-BE49-F238E27FC236}">
-                <a16:creationId xmlns="" xmlns:a16="http://schemas.microsoft.com/office/drawing/2014/main" id="{A59F8A2C-ACDF-09C7-B528-9064CEF3B848}"/>
+                <a16:creationId xmlns:a16="http://schemas.microsoft.com/office/drawing/2014/main" id="{A59F8A2C-ACDF-09C7-B528-9064CEF3B848}"/>
               </a:ext>
             </a:extLst>
           </p:cNvPr>
@@ -24382,7 +24082,7 @@
           <p:cNvPr id="9" name="Picture 2" descr="Sentiment Fig 1">
             <a:extLst>
               <a:ext uri="{FF2B5EF4-FFF2-40B4-BE49-F238E27FC236}">
-                <a16:creationId xmlns="" xmlns:a16="http://schemas.microsoft.com/office/drawing/2014/main" id="{E178FF16-CC3F-C34B-6C8B-874BC4FA61A4}"/>
+                <a16:creationId xmlns:a16="http://schemas.microsoft.com/office/drawing/2014/main" id="{E178FF16-CC3F-C34B-6C8B-874BC4FA61A4}"/>
               </a:ext>
             </a:extLst>
           </p:cNvPr>
@@ -24459,7 +24159,7 @@
           <p:cNvPr id="2" name="Título 1">
             <a:extLst>
               <a:ext uri="{FF2B5EF4-FFF2-40B4-BE49-F238E27FC236}">
-                <a16:creationId xmlns="" xmlns:a16="http://schemas.microsoft.com/office/drawing/2014/main" id="{95206997-C98C-FF52-62A1-725EEA7A8A7E}"/>
+                <a16:creationId xmlns:a16="http://schemas.microsoft.com/office/drawing/2014/main" id="{95206997-C98C-FF52-62A1-725EEA7A8A7E}"/>
               </a:ext>
             </a:extLst>
           </p:cNvPr>
@@ -24482,14 +24182,14 @@
           </a:p>
         </p:txBody>
       </p:sp>
-      <mc:AlternateContent xmlns:mc="http://schemas.openxmlformats.org/markup-compatibility/2006" xmlns:a14="http://schemas.microsoft.com/office/drawing/2010/main">
-        <mc:Choice Requires="a14">
+      <mc:AlternateContent xmlns:mc="http://schemas.openxmlformats.org/markup-compatibility/2006">
+        <mc:Choice xmlns:a14="http://schemas.microsoft.com/office/drawing/2010/main" Requires="a14">
           <p:sp>
             <p:nvSpPr>
               <p:cNvPr id="3" name="Espaço Reservado para Conteúdo 2">
                 <a:extLst>
                   <a:ext uri="{FF2B5EF4-FFF2-40B4-BE49-F238E27FC236}">
-                    <a16:creationId xmlns="" xmlns:a16="http://schemas.microsoft.com/office/drawing/2014/main" id="{50B99F56-FF18-D044-7799-0502D4F6A5FB}"/>
+                    <a16:creationId xmlns:a16="http://schemas.microsoft.com/office/drawing/2014/main" id="{50B99F56-FF18-D044-7799-0502D4F6A5FB}"/>
                   </a:ext>
                 </a:extLst>
               </p:cNvPr>
@@ -24540,7 +24240,7 @@
                 </a:r>
                 <a:r>
                   <a:rPr lang="pt-BR" dirty="0"/>
-                  <a:t> para cada classe </a:t>
+                  <a:t> por classe </a:t>
                 </a:r>
                 <a14:m>
                   <m:oMath xmlns:m="http://schemas.openxmlformats.org/officeDocument/2006/math">
@@ -24884,7 +24584,7 @@
               <a:p>
                 <a:r>
                   <a:rPr lang="pt-BR" dirty="0"/>
-                  <a:t>Nesta abordagem, cada um dos </a:t>
+                  <a:t>Cada um dos </a:t>
                 </a:r>
                 <a14:m>
                   <m:oMath xmlns:m="http://schemas.openxmlformats.org/officeDocument/2006/math">
@@ -24987,13 +24687,13 @@
             </p:txBody>
           </p:sp>
         </mc:Choice>
-        <mc:Fallback xmlns="">
+        <mc:Fallback>
           <p:sp>
             <p:nvSpPr>
               <p:cNvPr id="3" name="Espaço Reservado para Conteúdo 2">
                 <a:extLst>
                   <a:ext uri="{FF2B5EF4-FFF2-40B4-BE49-F238E27FC236}">
-                    <a16:creationId xmlns:a16="http://schemas.microsoft.com/office/drawing/2014/main" xmlns:a14="http://schemas.microsoft.com/office/drawing/2010/main" xmlns="" id="{50B99F56-FF18-D044-7799-0502D4F6A5FB}"/>
+                    <a16:creationId xmlns:a16="http://schemas.microsoft.com/office/drawing/2014/main" id="{50B99F56-FF18-D044-7799-0502D4F6A5FB}"/>
                   </a:ext>
                 </a:extLst>
               </p:cNvPr>
@@ -25009,10 +24709,10 @@
                 <a:off x="838200" y="1825624"/>
                 <a:ext cx="11198087" cy="5032375"/>
               </a:xfrm>
-              <a:blipFill rotWithShape="0">
+              <a:blipFill>
                 <a:blip r:embed="rId3"/>
                 <a:stretch>
-                  <a:fillRect l="-980" t="-1937" r="-54"/>
+                  <a:fillRect l="-980" t="-1937"/>
                 </a:stretch>
               </a:blipFill>
             </p:spPr>
@@ -25021,7 +24721,7 @@
               <a:lstStyle/>
               <a:p>
                 <a:r>
-                  <a:rPr lang="pt-BR">
+                  <a:rPr lang="en-US">
                     <a:noFill/>
                   </a:rPr>
                   <a:t> </a:t>
@@ -25066,7 +24766,7 @@
           <p:cNvPr id="2" name="Título 1">
             <a:extLst>
               <a:ext uri="{FF2B5EF4-FFF2-40B4-BE49-F238E27FC236}">
-                <a16:creationId xmlns="" xmlns:a16="http://schemas.microsoft.com/office/drawing/2014/main" id="{40D4148F-5E93-6FF0-6B66-AC9E3B82640A}"/>
+                <a16:creationId xmlns:a16="http://schemas.microsoft.com/office/drawing/2014/main" id="{40D4148F-5E93-6FF0-6B66-AC9E3B82640A}"/>
               </a:ext>
             </a:extLst>
           </p:cNvPr>
@@ -25096,7 +24796,7 @@
               <p:cNvPr id="3" name="Espaço Reservado para Conteúdo 2">
                 <a:extLst>
                   <a:ext uri="{FF2B5EF4-FFF2-40B4-BE49-F238E27FC236}">
-                    <a16:creationId xmlns="" xmlns:a16="http://schemas.microsoft.com/office/drawing/2014/main" id="{A4787C4F-F235-6888-5AFF-2CB1361FF6FD}"/>
+                    <a16:creationId xmlns:a16="http://schemas.microsoft.com/office/drawing/2014/main" id="{A4787C4F-F235-6888-5AFF-2CB1361FF6FD}"/>
                   </a:ext>
                 </a:extLst>
               </p:cNvPr>
@@ -26845,7 +26545,7 @@
           <p:cNvPr id="21" name="Mais 7">
             <a:extLst>
               <a:ext uri="{FF2B5EF4-FFF2-40B4-BE49-F238E27FC236}">
-                <a16:creationId xmlns="" xmlns:a16="http://schemas.microsoft.com/office/drawing/2014/main" id="{7B31CAF2-5F3C-E55A-EC75-167BCE74F1F7}"/>
+                <a16:creationId xmlns:a16="http://schemas.microsoft.com/office/drawing/2014/main" id="{7B31CAF2-5F3C-E55A-EC75-167BCE74F1F7}"/>
               </a:ext>
             </a:extLst>
           </p:cNvPr>
@@ -26929,7 +26629,7 @@
           <p:cNvPr id="2" name="Título 1">
             <a:extLst>
               <a:ext uri="{FF2B5EF4-FFF2-40B4-BE49-F238E27FC236}">
-                <a16:creationId xmlns="" xmlns:a16="http://schemas.microsoft.com/office/drawing/2014/main" id="{F625D040-A3FE-41E3-3BD0-3C0548CFEAD3}"/>
+                <a16:creationId xmlns:a16="http://schemas.microsoft.com/office/drawing/2014/main" id="{F625D040-A3FE-41E3-3BD0-3C0548CFEAD3}"/>
               </a:ext>
             </a:extLst>
           </p:cNvPr>
@@ -26959,7 +26659,7 @@
               <p:cNvPr id="3" name="Espaço Reservado para Conteúdo 2">
                 <a:extLst>
                   <a:ext uri="{FF2B5EF4-FFF2-40B4-BE49-F238E27FC236}">
-                    <a16:creationId xmlns="" xmlns:a16="http://schemas.microsoft.com/office/drawing/2014/main" id="{3BAFA38F-B924-7049-765D-660ED8C4845B}"/>
+                    <a16:creationId xmlns:a16="http://schemas.microsoft.com/office/drawing/2014/main" id="{3BAFA38F-B924-7049-765D-660ED8C4845B}"/>
                   </a:ext>
                 </a:extLst>
               </p:cNvPr>
@@ -27722,7 +27422,7 @@
           <p:cNvPr id="2" name="Título 1">
             <a:extLst>
               <a:ext uri="{FF2B5EF4-FFF2-40B4-BE49-F238E27FC236}">
-                <a16:creationId xmlns="" xmlns:a16="http://schemas.microsoft.com/office/drawing/2014/main" id="{685EDE22-7739-3353-3DBC-8480197DC616}"/>
+                <a16:creationId xmlns:a16="http://schemas.microsoft.com/office/drawing/2014/main" id="{685EDE22-7739-3353-3DBC-8480197DC616}"/>
               </a:ext>
             </a:extLst>
           </p:cNvPr>
@@ -27752,7 +27452,7 @@
               <p:cNvPr id="3" name="Espaço Reservado para Conteúdo 2">
                 <a:extLst>
                   <a:ext uri="{FF2B5EF4-FFF2-40B4-BE49-F238E27FC236}">
-                    <a16:creationId xmlns="" xmlns:a16="http://schemas.microsoft.com/office/drawing/2014/main" id="{2145CEE8-2FB2-6EEA-841B-CC93323A97A6}"/>
+                    <a16:creationId xmlns:a16="http://schemas.microsoft.com/office/drawing/2014/main" id="{2145CEE8-2FB2-6EEA-841B-CC93323A97A6}"/>
                   </a:ext>
                 </a:extLst>
               </p:cNvPr>

--- a/slides/T320_Classificação (Parte IV).pptx
+++ b/slides/T320_Classificação (Parte IV).pptx
@@ -366,7 +366,7 @@
           <a:p>
             <a:fld id="{F7E56D9B-79AD-444A-AFED-DEC23408F8B4}" type="slidenum">
               <a:rPr lang="nl-BE" smtClean="0"/>
-              <a:t>‹#›</a:t>
+              <a:t>‹nº›</a:t>
             </a:fld>
             <a:endParaRPr lang="nl-BE"/>
           </a:p>
@@ -623,7 +623,7 @@
           <a:p>
             <a:fld id="{6FC8D850-966F-45A6-8DE7-15B891E7D40D}" type="slidenum">
               <a:rPr lang="pt-BR" smtClean="0"/>
-              <a:t>‹#›</a:t>
+              <a:t>‹nº›</a:t>
             </a:fld>
             <a:endParaRPr lang="pt-BR"/>
           </a:p>
@@ -862,15 +862,7 @@
           <a:p>
             <a:r>
               <a:rPr lang="pt-BR" dirty="0"/>
-              <a:t>O classificador Softmax prevê/prediz apenas uma classe de cada vez (ou seja, ele é </a:t>
-            </a:r>
-            <a:r>
-              <a:rPr lang="pt-BR" dirty="0" err="1"/>
-              <a:t>multiclasse</a:t>
-            </a:r>
-            <a:r>
-              <a:rPr lang="pt-BR" dirty="0"/>
-              <a:t>, e não </a:t>
+              <a:t>O classificador Softmax prevê/prediz apenas uma classe de cada vez (ou seja, ele é multiclasse, e não </a:t>
             </a:r>
             <a:r>
               <a:rPr lang="pt-BR" dirty="0" err="1"/>
@@ -1045,15 +1037,7 @@
           <a:p>
             <a:r>
               <a:rPr lang="pt-BR" dirty="0"/>
-              <a:t>O classificador Softmax prevê/prediz apenas uma classe de cada vez (ou seja, ele é </a:t>
-            </a:r>
-            <a:r>
-              <a:rPr lang="pt-BR" dirty="0" err="1"/>
-              <a:t>multiclasse</a:t>
-            </a:r>
-            <a:r>
-              <a:rPr lang="pt-BR" dirty="0"/>
-              <a:t>, e não </a:t>
+              <a:t>O classificador Softmax prevê/prediz apenas uma classe de cada vez (ou seja, ele é multiclasse, e não </a:t>
             </a:r>
             <a:r>
               <a:rPr lang="pt-BR" dirty="0" err="1"/>
@@ -1179,15 +1163,7 @@
           <a:p>
             <a:r>
               <a:rPr lang="pt-BR" dirty="0"/>
-              <a:t>O classificador Softmax prevê/prediz apenas uma classe de cada vez (ou seja, ele é </a:t>
-            </a:r>
-            <a:r>
-              <a:rPr lang="pt-BR" dirty="0" err="1"/>
-              <a:t>multiclasse</a:t>
-            </a:r>
-            <a:r>
-              <a:rPr lang="pt-BR" dirty="0"/>
-              <a:t>, e não </a:t>
+              <a:t>O classificador Softmax prevê/prediz apenas uma classe de cada vez (ou seja, ele é multiclasse, e não </a:t>
             </a:r>
             <a:r>
               <a:rPr lang="pt-BR" dirty="0" err="1"/>
@@ -1313,15 +1289,7 @@
           <a:p>
             <a:r>
               <a:rPr lang="pt-BR" dirty="0"/>
-              <a:t>O classificador Softmax prevê/prediz apenas uma classe de cada vez (ou seja, ele é </a:t>
-            </a:r>
-            <a:r>
-              <a:rPr lang="pt-BR" dirty="0" err="1"/>
-              <a:t>multiclasse</a:t>
-            </a:r>
-            <a:r>
-              <a:rPr lang="pt-BR" dirty="0"/>
-              <a:t>, e não </a:t>
+              <a:t>O classificador Softmax prevê/prediz apenas uma classe de cada vez (ou seja, ele é multiclasse, e não </a:t>
             </a:r>
             <a:r>
               <a:rPr lang="pt-BR" dirty="0" err="1"/>
@@ -3064,27 +3032,7 @@
                 <a:effectLst/>
                 <a:latin typeface="Söhne"/>
               </a:rPr>
-              <a:t> O regressor softmax é comumente usado em problemas de classificação </a:t>
-            </a:r>
-            <a:r>
-              <a:rPr lang="pt-BR" b="0" i="0" dirty="0" err="1">
-                <a:solidFill>
-                  <a:srgbClr val="374151"/>
-                </a:solidFill>
-                <a:effectLst/>
-                <a:latin typeface="Söhne"/>
-              </a:rPr>
-              <a:t>multiclasse</a:t>
-            </a:r>
-            <a:r>
-              <a:rPr lang="pt-BR" b="0" i="0" dirty="0">
-                <a:solidFill>
-                  <a:srgbClr val="374151"/>
-                </a:solidFill>
-                <a:effectLst/>
-                <a:latin typeface="Söhne"/>
-              </a:rPr>
-              <a:t>, onde você deseja atribuir uma probabilidade para cada classe possível. Normalizando as combinações de atributos em probabilidades, você obtém uma interpretação probabilística direta dos resultados. Isso significa que as saídas do regressor representam a probabilidade de pertencer a cada classe.</a:t>
+              <a:t> O regressor softmax é comumente usado em problemas de classificação multiclasse, onde você deseja atribuir uma probabilidade para cada classe possível. Normalizando as combinações de atributos em probabilidades, você obtém uma interpretação probabilística direta dos resultados. Isso significa que as saídas do regressor representam a probabilidade de pertencer a cada classe.</a:t>
             </a:r>
           </a:p>
           <a:p>
@@ -4752,8 +4700,8 @@
               <a:t>Exemplo: </a:t>
             </a:r>
             <a:r>
-              <a:rPr lang="pt-BR" dirty="0" err="1"/>
-              <a:t>ClassificationOfFourClassesWithOvAandOvO.ip</a:t>
+              <a:rPr lang="pt-BR" dirty="0" smtClean="0"/>
+              <a:t>https://colab.research.google.com/github/zz4fap/t320_aprendizado_de_maquina/blob/main/notebooks/classificação/ClassificationOfFourClassesWithOvAandOvO_SciKitLearn.ipynb</a:t>
             </a:r>
             <a:endParaRPr lang="pt-BR" dirty="0"/>
           </a:p>
@@ -4956,15 +4904,7 @@
           <a:p>
             <a:r>
               <a:rPr lang="pt-BR" dirty="0"/>
-              <a:t>O classificador Softmax prevê/prediz apenas uma classe de cada vez (ou seja, ele é </a:t>
-            </a:r>
-            <a:r>
-              <a:rPr lang="pt-BR" dirty="0" err="1"/>
-              <a:t>multiclasse</a:t>
-            </a:r>
-            <a:r>
-              <a:rPr lang="pt-BR" dirty="0"/>
-              <a:t>, e não </a:t>
+              <a:t>O classificador Softmax prevê/prediz apenas uma classe de cada vez (ou seja, ele é multiclasse, e não </a:t>
             </a:r>
             <a:r>
               <a:rPr lang="pt-BR" dirty="0" err="1"/>
@@ -5291,6 +5231,18 @@
               </a:rPr>
               <a:t>Classificação de documentos por tópicos</a:t>
             </a:r>
+            <a:r>
+              <a:rPr lang="pt-BR" sz="1200" b="0" i="0" kern="1200" dirty="0">
+                <a:solidFill>
+                  <a:schemeClr val="tx1"/>
+                </a:solidFill>
+                <a:effectLst/>
+                <a:latin typeface="+mn-lt"/>
+                <a:ea typeface="+mn-ea"/>
+                <a:cs typeface="+mn-cs"/>
+              </a:rPr>
+              <a:t/>
+            </a:r>
             <a:br>
               <a:rPr lang="pt-BR" sz="1200" b="0" i="0" kern="1200" dirty="0">
                 <a:solidFill>
@@ -5328,6 +5280,18 @@
               </a:rPr>
               <a:t>Reconhecimento de objetos em imagens</a:t>
             </a:r>
+            <a:r>
+              <a:rPr lang="pt-BR" sz="1200" b="0" i="0" kern="1200" dirty="0">
+                <a:solidFill>
+                  <a:schemeClr val="tx1"/>
+                </a:solidFill>
+                <a:effectLst/>
+                <a:latin typeface="+mn-lt"/>
+                <a:ea typeface="+mn-ea"/>
+                <a:cs typeface="+mn-cs"/>
+              </a:rPr>
+              <a:t/>
+            </a:r>
             <a:br>
               <a:rPr lang="pt-BR" sz="1200" b="0" i="0" kern="1200" dirty="0">
                 <a:solidFill>
@@ -5365,6 +5329,18 @@
               </a:rPr>
               <a:t>Sistema de recomendação de filmes por gêneros</a:t>
             </a:r>
+            <a:r>
+              <a:rPr lang="pt-BR" sz="1200" b="0" i="0" kern="1200" dirty="0">
+                <a:solidFill>
+                  <a:schemeClr val="tx1"/>
+                </a:solidFill>
+                <a:effectLst/>
+                <a:latin typeface="+mn-lt"/>
+                <a:ea typeface="+mn-ea"/>
+                <a:cs typeface="+mn-cs"/>
+              </a:rPr>
+              <a:t/>
+            </a:r>
             <a:br>
               <a:rPr lang="pt-BR" sz="1200" b="0" i="0" kern="1200" dirty="0">
                 <a:solidFill>
@@ -5402,6 +5378,18 @@
               </a:rPr>
               <a:t>Diagnóstico médico</a:t>
             </a:r>
+            <a:r>
+              <a:rPr lang="pt-BR" sz="1200" b="0" i="0" kern="1200" dirty="0">
+                <a:solidFill>
+                  <a:schemeClr val="tx1"/>
+                </a:solidFill>
+                <a:effectLst/>
+                <a:latin typeface="+mn-lt"/>
+                <a:ea typeface="+mn-ea"/>
+                <a:cs typeface="+mn-cs"/>
+              </a:rPr>
+              <a:t/>
+            </a:r>
             <a:br>
               <a:rPr lang="pt-BR" sz="1200" b="0" i="0" kern="1200" dirty="0">
                 <a:solidFill>
@@ -5439,6 +5427,18 @@
               </a:rPr>
               <a:t>Análise de sentimentos em texto</a:t>
             </a:r>
+            <a:r>
+              <a:rPr lang="pt-BR" sz="1200" b="0" i="0" kern="1200" dirty="0">
+                <a:solidFill>
+                  <a:schemeClr val="tx1"/>
+                </a:solidFill>
+                <a:effectLst/>
+                <a:latin typeface="+mn-lt"/>
+                <a:ea typeface="+mn-ea"/>
+                <a:cs typeface="+mn-cs"/>
+              </a:rPr>
+              <a:t/>
+            </a:r>
             <a:br>
               <a:rPr lang="pt-BR" sz="1200" b="0" i="0" kern="1200" dirty="0">
                 <a:solidFill>
@@ -5488,6 +5488,18 @@
               </a:rPr>
               <a:t> em produtos de e-commerce</a:t>
             </a:r>
+            <a:r>
+              <a:rPr lang="pt-BR" sz="1200" b="0" i="0" kern="1200" dirty="0">
+                <a:solidFill>
+                  <a:schemeClr val="tx1"/>
+                </a:solidFill>
+                <a:effectLst/>
+                <a:latin typeface="+mn-lt"/>
+                <a:ea typeface="+mn-ea"/>
+                <a:cs typeface="+mn-cs"/>
+              </a:rPr>
+              <a:t/>
+            </a:r>
             <a:br>
               <a:rPr lang="pt-BR" sz="1200" b="0" i="0" kern="1200" dirty="0">
                 <a:solidFill>
@@ -5549,6 +5561,18 @@
               </a:rPr>
               <a:t>Classificação de músicas por gênero</a:t>
             </a:r>
+            <a:r>
+              <a:rPr lang="pt-BR" sz="1200" b="0" i="0" kern="1200" dirty="0">
+                <a:solidFill>
+                  <a:schemeClr val="tx1"/>
+                </a:solidFill>
+                <a:effectLst/>
+                <a:latin typeface="+mn-lt"/>
+                <a:ea typeface="+mn-ea"/>
+                <a:cs typeface="+mn-cs"/>
+              </a:rPr>
+              <a:t/>
+            </a:r>
             <a:br>
               <a:rPr lang="pt-BR" sz="1200" b="0" i="0" kern="1200" dirty="0">
                 <a:solidFill>
@@ -5574,23 +5598,23 @@
             </a:r>
           </a:p>
           <a:p>
+            <a:r>
+              <a:rPr lang="pt-BR" dirty="0"/>
+              <a:t/>
+            </a:r>
             <a:br>
               <a:rPr lang="pt-BR" dirty="0"/>
             </a:br>
+            <a:r>
+              <a:rPr lang="pt-BR" dirty="0"/>
+              <a:t/>
+            </a:r>
             <a:br>
               <a:rPr lang="pt-BR" dirty="0"/>
             </a:br>
             <a:r>
               <a:rPr lang="pt-BR" dirty="0"/>
-              <a:t>O classificador Softmax prevê/prediz apenas uma classe de cada vez (ou seja, ele é </a:t>
-            </a:r>
-            <a:r>
-              <a:rPr lang="pt-BR" dirty="0" err="1"/>
-              <a:t>multiclasse</a:t>
-            </a:r>
-            <a:r>
-              <a:rPr lang="pt-BR" dirty="0"/>
-              <a:t>, e não </a:t>
+              <a:t>O classificador Softmax prevê/prediz apenas uma classe de cada vez (ou seja, ele é multiclasse, e não </a:t>
             </a:r>
             <a:r>
               <a:rPr lang="pt-BR" dirty="0" err="1"/>
@@ -5893,15 +5917,7 @@
           <a:p>
             <a:r>
               <a:rPr lang="pt-BR" dirty="0"/>
-              <a:t>O classificador Softmax prevê/prediz apenas uma classe de cada vez (ou seja, ele é </a:t>
-            </a:r>
-            <a:r>
-              <a:rPr lang="pt-BR" dirty="0" err="1"/>
-              <a:t>multiclasse</a:t>
-            </a:r>
-            <a:r>
-              <a:rPr lang="pt-BR" dirty="0"/>
-              <a:t>, e não </a:t>
+              <a:t>O classificador Softmax prevê/prediz apenas uma classe de cada vez (ou seja, ele é multiclasse, e não </a:t>
             </a:r>
             <a:r>
               <a:rPr lang="pt-BR" dirty="0" err="1"/>
@@ -6052,7 +6068,7 @@
           <p:cNvPr id="2" name="Título 1">
             <a:extLst>
               <a:ext uri="{FF2B5EF4-FFF2-40B4-BE49-F238E27FC236}">
-                <a16:creationId xmlns:a16="http://schemas.microsoft.com/office/drawing/2014/main" id="{1DB9B4FF-B06E-403C-A326-BDC64D8FF94E}"/>
+                <a16:creationId xmlns:a16="http://schemas.microsoft.com/office/drawing/2014/main" xmlns="" id="{1DB9B4FF-B06E-403C-A326-BDC64D8FF94E}"/>
               </a:ext>
             </a:extLst>
           </p:cNvPr>
@@ -6089,7 +6105,7 @@
           <p:cNvPr id="3" name="Subtítulo 2">
             <a:extLst>
               <a:ext uri="{FF2B5EF4-FFF2-40B4-BE49-F238E27FC236}">
-                <a16:creationId xmlns:a16="http://schemas.microsoft.com/office/drawing/2014/main" id="{247BDFCE-746E-45BF-A319-4733D58D1632}"/>
+                <a16:creationId xmlns:a16="http://schemas.microsoft.com/office/drawing/2014/main" xmlns="" id="{247BDFCE-746E-45BF-A319-4733D58D1632}"/>
               </a:ext>
             </a:extLst>
           </p:cNvPr>
@@ -6159,7 +6175,7 @@
           <p:cNvPr id="4" name="Espaço Reservado para Data 3">
             <a:extLst>
               <a:ext uri="{FF2B5EF4-FFF2-40B4-BE49-F238E27FC236}">
-                <a16:creationId xmlns:a16="http://schemas.microsoft.com/office/drawing/2014/main" id="{9EDE2778-5372-4104-B96D-968184DA8288}"/>
+                <a16:creationId xmlns:a16="http://schemas.microsoft.com/office/drawing/2014/main" xmlns="" id="{9EDE2778-5372-4104-B96D-968184DA8288}"/>
               </a:ext>
             </a:extLst>
           </p:cNvPr>
@@ -6188,7 +6204,7 @@
           <p:cNvPr id="5" name="Espaço Reservado para Rodapé 4">
             <a:extLst>
               <a:ext uri="{FF2B5EF4-FFF2-40B4-BE49-F238E27FC236}">
-                <a16:creationId xmlns:a16="http://schemas.microsoft.com/office/drawing/2014/main" id="{C1DD0F41-C861-4051-988D-3024A37A4B93}"/>
+                <a16:creationId xmlns:a16="http://schemas.microsoft.com/office/drawing/2014/main" xmlns="" id="{C1DD0F41-C861-4051-988D-3024A37A4B93}"/>
               </a:ext>
             </a:extLst>
           </p:cNvPr>
@@ -6213,7 +6229,7 @@
           <p:cNvPr id="6" name="Espaço Reservado para Número de Slide 5">
             <a:extLst>
               <a:ext uri="{FF2B5EF4-FFF2-40B4-BE49-F238E27FC236}">
-                <a16:creationId xmlns:a16="http://schemas.microsoft.com/office/drawing/2014/main" id="{07E5967E-D980-431A-A5DB-3F0C5030A81E}"/>
+                <a16:creationId xmlns:a16="http://schemas.microsoft.com/office/drawing/2014/main" xmlns="" id="{07E5967E-D980-431A-A5DB-3F0C5030A81E}"/>
               </a:ext>
             </a:extLst>
           </p:cNvPr>
@@ -6231,7 +6247,7 @@
           <a:p>
             <a:fld id="{1A7E88B7-70CE-4035-AE73-13FA6FB985D4}" type="slidenum">
               <a:rPr lang="pt-BR" smtClean="0"/>
-              <a:t>‹#›</a:t>
+              <a:t>‹nº›</a:t>
             </a:fld>
             <a:endParaRPr lang="pt-BR"/>
           </a:p>
@@ -6272,7 +6288,7 @@
           <p:cNvPr id="2" name="Título 1">
             <a:extLst>
               <a:ext uri="{FF2B5EF4-FFF2-40B4-BE49-F238E27FC236}">
-                <a16:creationId xmlns:a16="http://schemas.microsoft.com/office/drawing/2014/main" id="{9036C49F-3E68-4175-81BA-3C3FEE44308A}"/>
+                <a16:creationId xmlns:a16="http://schemas.microsoft.com/office/drawing/2014/main" xmlns="" id="{9036C49F-3E68-4175-81BA-3C3FEE44308A}"/>
               </a:ext>
             </a:extLst>
           </p:cNvPr>
@@ -6300,7 +6316,7 @@
           <p:cNvPr id="3" name="Espaço Reservado para Texto Vertical 2">
             <a:extLst>
               <a:ext uri="{FF2B5EF4-FFF2-40B4-BE49-F238E27FC236}">
-                <a16:creationId xmlns:a16="http://schemas.microsoft.com/office/drawing/2014/main" id="{426FA736-3DD3-4D4E-B57B-BBE1D8F7D424}"/>
+                <a16:creationId xmlns:a16="http://schemas.microsoft.com/office/drawing/2014/main" xmlns="" id="{426FA736-3DD3-4D4E-B57B-BBE1D8F7D424}"/>
               </a:ext>
             </a:extLst>
           </p:cNvPr>
@@ -6357,7 +6373,7 @@
           <p:cNvPr id="4" name="Espaço Reservado para Data 3">
             <a:extLst>
               <a:ext uri="{FF2B5EF4-FFF2-40B4-BE49-F238E27FC236}">
-                <a16:creationId xmlns:a16="http://schemas.microsoft.com/office/drawing/2014/main" id="{99E8855C-D8FD-48F6-B14E-861E0DE4D915}"/>
+                <a16:creationId xmlns:a16="http://schemas.microsoft.com/office/drawing/2014/main" xmlns="" id="{99E8855C-D8FD-48F6-B14E-861E0DE4D915}"/>
               </a:ext>
             </a:extLst>
           </p:cNvPr>
@@ -6386,7 +6402,7 @@
           <p:cNvPr id="5" name="Espaço Reservado para Rodapé 4">
             <a:extLst>
               <a:ext uri="{FF2B5EF4-FFF2-40B4-BE49-F238E27FC236}">
-                <a16:creationId xmlns:a16="http://schemas.microsoft.com/office/drawing/2014/main" id="{97C0BB88-2F21-42A5-ACFF-83DA47F2D340}"/>
+                <a16:creationId xmlns:a16="http://schemas.microsoft.com/office/drawing/2014/main" xmlns="" id="{97C0BB88-2F21-42A5-ACFF-83DA47F2D340}"/>
               </a:ext>
             </a:extLst>
           </p:cNvPr>
@@ -6411,7 +6427,7 @@
           <p:cNvPr id="6" name="Espaço Reservado para Número de Slide 5">
             <a:extLst>
               <a:ext uri="{FF2B5EF4-FFF2-40B4-BE49-F238E27FC236}">
-                <a16:creationId xmlns:a16="http://schemas.microsoft.com/office/drawing/2014/main" id="{6CB462B3-1F22-4C05-B4B8-7A279FB7D5E9}"/>
+                <a16:creationId xmlns:a16="http://schemas.microsoft.com/office/drawing/2014/main" xmlns="" id="{6CB462B3-1F22-4C05-B4B8-7A279FB7D5E9}"/>
               </a:ext>
             </a:extLst>
           </p:cNvPr>
@@ -6429,7 +6445,7 @@
           <a:p>
             <a:fld id="{1A7E88B7-70CE-4035-AE73-13FA6FB985D4}" type="slidenum">
               <a:rPr lang="pt-BR" smtClean="0"/>
-              <a:t>‹#›</a:t>
+              <a:t>‹nº›</a:t>
             </a:fld>
             <a:endParaRPr lang="pt-BR"/>
           </a:p>
@@ -6470,7 +6486,7 @@
           <p:cNvPr id="2" name="Título Vertical 1">
             <a:extLst>
               <a:ext uri="{FF2B5EF4-FFF2-40B4-BE49-F238E27FC236}">
-                <a16:creationId xmlns:a16="http://schemas.microsoft.com/office/drawing/2014/main" id="{EAEAB728-701C-4207-A9D5-23FF45C60502}"/>
+                <a16:creationId xmlns:a16="http://schemas.microsoft.com/office/drawing/2014/main" xmlns="" id="{EAEAB728-701C-4207-A9D5-23FF45C60502}"/>
               </a:ext>
             </a:extLst>
           </p:cNvPr>
@@ -6503,7 +6519,7 @@
           <p:cNvPr id="3" name="Espaço Reservado para Texto Vertical 2">
             <a:extLst>
               <a:ext uri="{FF2B5EF4-FFF2-40B4-BE49-F238E27FC236}">
-                <a16:creationId xmlns:a16="http://schemas.microsoft.com/office/drawing/2014/main" id="{BA8C8CCF-7823-480A-9A19-0F664DD17E3B}"/>
+                <a16:creationId xmlns:a16="http://schemas.microsoft.com/office/drawing/2014/main" xmlns="" id="{BA8C8CCF-7823-480A-9A19-0F664DD17E3B}"/>
               </a:ext>
             </a:extLst>
           </p:cNvPr>
@@ -6565,7 +6581,7 @@
           <p:cNvPr id="4" name="Espaço Reservado para Data 3">
             <a:extLst>
               <a:ext uri="{FF2B5EF4-FFF2-40B4-BE49-F238E27FC236}">
-                <a16:creationId xmlns:a16="http://schemas.microsoft.com/office/drawing/2014/main" id="{721D5734-7B1F-425D-942F-6EB73344027C}"/>
+                <a16:creationId xmlns:a16="http://schemas.microsoft.com/office/drawing/2014/main" xmlns="" id="{721D5734-7B1F-425D-942F-6EB73344027C}"/>
               </a:ext>
             </a:extLst>
           </p:cNvPr>
@@ -6594,7 +6610,7 @@
           <p:cNvPr id="5" name="Espaço Reservado para Rodapé 4">
             <a:extLst>
               <a:ext uri="{FF2B5EF4-FFF2-40B4-BE49-F238E27FC236}">
-                <a16:creationId xmlns:a16="http://schemas.microsoft.com/office/drawing/2014/main" id="{1E1AAEAC-F08D-45FE-89EC-B1B349A868C9}"/>
+                <a16:creationId xmlns:a16="http://schemas.microsoft.com/office/drawing/2014/main" xmlns="" id="{1E1AAEAC-F08D-45FE-89EC-B1B349A868C9}"/>
               </a:ext>
             </a:extLst>
           </p:cNvPr>
@@ -6619,7 +6635,7 @@
           <p:cNvPr id="6" name="Espaço Reservado para Número de Slide 5">
             <a:extLst>
               <a:ext uri="{FF2B5EF4-FFF2-40B4-BE49-F238E27FC236}">
-                <a16:creationId xmlns:a16="http://schemas.microsoft.com/office/drawing/2014/main" id="{BAA44493-9911-47B2-87A6-C2141A972BC8}"/>
+                <a16:creationId xmlns:a16="http://schemas.microsoft.com/office/drawing/2014/main" xmlns="" id="{BAA44493-9911-47B2-87A6-C2141A972BC8}"/>
               </a:ext>
             </a:extLst>
           </p:cNvPr>
@@ -6637,7 +6653,7 @@
           <a:p>
             <a:fld id="{1A7E88B7-70CE-4035-AE73-13FA6FB985D4}" type="slidenum">
               <a:rPr lang="pt-BR" smtClean="0"/>
-              <a:t>‹#›</a:t>
+              <a:t>‹nº›</a:t>
             </a:fld>
             <a:endParaRPr lang="pt-BR"/>
           </a:p>
@@ -6678,7 +6694,7 @@
           <p:cNvPr id="2" name="Título 1">
             <a:extLst>
               <a:ext uri="{FF2B5EF4-FFF2-40B4-BE49-F238E27FC236}">
-                <a16:creationId xmlns:a16="http://schemas.microsoft.com/office/drawing/2014/main" id="{71BD44A5-8F21-4626-A01D-48A1C874B1D5}"/>
+                <a16:creationId xmlns:a16="http://schemas.microsoft.com/office/drawing/2014/main" xmlns="" id="{71BD44A5-8F21-4626-A01D-48A1C874B1D5}"/>
               </a:ext>
             </a:extLst>
           </p:cNvPr>
@@ -6706,7 +6722,7 @@
           <p:cNvPr id="3" name="Espaço Reservado para Conteúdo 2">
             <a:extLst>
               <a:ext uri="{FF2B5EF4-FFF2-40B4-BE49-F238E27FC236}">
-                <a16:creationId xmlns:a16="http://schemas.microsoft.com/office/drawing/2014/main" id="{B79E8085-65A9-48AA-951D-71D978BFF4ED}"/>
+                <a16:creationId xmlns:a16="http://schemas.microsoft.com/office/drawing/2014/main" xmlns="" id="{B79E8085-65A9-48AA-951D-71D978BFF4ED}"/>
               </a:ext>
             </a:extLst>
           </p:cNvPr>
@@ -6763,7 +6779,7 @@
           <p:cNvPr id="4" name="Espaço Reservado para Data 3">
             <a:extLst>
               <a:ext uri="{FF2B5EF4-FFF2-40B4-BE49-F238E27FC236}">
-                <a16:creationId xmlns:a16="http://schemas.microsoft.com/office/drawing/2014/main" id="{F05BE1AF-51EA-425D-B188-DE7BD675009F}"/>
+                <a16:creationId xmlns:a16="http://schemas.microsoft.com/office/drawing/2014/main" xmlns="" id="{F05BE1AF-51EA-425D-B188-DE7BD675009F}"/>
               </a:ext>
             </a:extLst>
           </p:cNvPr>
@@ -6792,7 +6808,7 @@
           <p:cNvPr id="5" name="Espaço Reservado para Rodapé 4">
             <a:extLst>
               <a:ext uri="{FF2B5EF4-FFF2-40B4-BE49-F238E27FC236}">
-                <a16:creationId xmlns:a16="http://schemas.microsoft.com/office/drawing/2014/main" id="{121BE632-29CF-4CB9-B365-C9EF38F89BE6}"/>
+                <a16:creationId xmlns:a16="http://schemas.microsoft.com/office/drawing/2014/main" xmlns="" id="{121BE632-29CF-4CB9-B365-C9EF38F89BE6}"/>
               </a:ext>
             </a:extLst>
           </p:cNvPr>
@@ -6817,7 +6833,7 @@
           <p:cNvPr id="6" name="Espaço Reservado para Número de Slide 5">
             <a:extLst>
               <a:ext uri="{FF2B5EF4-FFF2-40B4-BE49-F238E27FC236}">
-                <a16:creationId xmlns:a16="http://schemas.microsoft.com/office/drawing/2014/main" id="{60CF3DD1-9AEC-4A57-B461-4E4DD86FAC18}"/>
+                <a16:creationId xmlns:a16="http://schemas.microsoft.com/office/drawing/2014/main" xmlns="" id="{60CF3DD1-9AEC-4A57-B461-4E4DD86FAC18}"/>
               </a:ext>
             </a:extLst>
           </p:cNvPr>
@@ -6835,7 +6851,7 @@
           <a:p>
             <a:fld id="{1A7E88B7-70CE-4035-AE73-13FA6FB985D4}" type="slidenum">
               <a:rPr lang="pt-BR" smtClean="0"/>
-              <a:t>‹#›</a:t>
+              <a:t>‹nº›</a:t>
             </a:fld>
             <a:endParaRPr lang="pt-BR"/>
           </a:p>
@@ -6876,7 +6892,7 @@
           <p:cNvPr id="2" name="Título 1">
             <a:extLst>
               <a:ext uri="{FF2B5EF4-FFF2-40B4-BE49-F238E27FC236}">
-                <a16:creationId xmlns:a16="http://schemas.microsoft.com/office/drawing/2014/main" id="{34AB2FF0-A4D7-4E28-991D-FF26140D5988}"/>
+                <a16:creationId xmlns:a16="http://schemas.microsoft.com/office/drawing/2014/main" xmlns="" id="{34AB2FF0-A4D7-4E28-991D-FF26140D5988}"/>
               </a:ext>
             </a:extLst>
           </p:cNvPr>
@@ -6913,7 +6929,7 @@
           <p:cNvPr id="3" name="Espaço Reservado para Texto 2">
             <a:extLst>
               <a:ext uri="{FF2B5EF4-FFF2-40B4-BE49-F238E27FC236}">
-                <a16:creationId xmlns:a16="http://schemas.microsoft.com/office/drawing/2014/main" id="{E2AC45B0-4145-40DB-8E61-105461170604}"/>
+                <a16:creationId xmlns:a16="http://schemas.microsoft.com/office/drawing/2014/main" xmlns="" id="{E2AC45B0-4145-40DB-8E61-105461170604}"/>
               </a:ext>
             </a:extLst>
           </p:cNvPr>
@@ -7038,7 +7054,7 @@
           <p:cNvPr id="4" name="Espaço Reservado para Data 3">
             <a:extLst>
               <a:ext uri="{FF2B5EF4-FFF2-40B4-BE49-F238E27FC236}">
-                <a16:creationId xmlns:a16="http://schemas.microsoft.com/office/drawing/2014/main" id="{50F1D3FB-740A-4EBA-A309-2CE71D12ECFB}"/>
+                <a16:creationId xmlns:a16="http://schemas.microsoft.com/office/drawing/2014/main" xmlns="" id="{50F1D3FB-740A-4EBA-A309-2CE71D12ECFB}"/>
               </a:ext>
             </a:extLst>
           </p:cNvPr>
@@ -7067,7 +7083,7 @@
           <p:cNvPr id="5" name="Espaço Reservado para Rodapé 4">
             <a:extLst>
               <a:ext uri="{FF2B5EF4-FFF2-40B4-BE49-F238E27FC236}">
-                <a16:creationId xmlns:a16="http://schemas.microsoft.com/office/drawing/2014/main" id="{BDCAB18F-8715-4465-A940-F9C193A2ACE9}"/>
+                <a16:creationId xmlns:a16="http://schemas.microsoft.com/office/drawing/2014/main" xmlns="" id="{BDCAB18F-8715-4465-A940-F9C193A2ACE9}"/>
               </a:ext>
             </a:extLst>
           </p:cNvPr>
@@ -7092,7 +7108,7 @@
           <p:cNvPr id="6" name="Espaço Reservado para Número de Slide 5">
             <a:extLst>
               <a:ext uri="{FF2B5EF4-FFF2-40B4-BE49-F238E27FC236}">
-                <a16:creationId xmlns:a16="http://schemas.microsoft.com/office/drawing/2014/main" id="{353466C6-8248-429F-8056-FF040BF509EB}"/>
+                <a16:creationId xmlns:a16="http://schemas.microsoft.com/office/drawing/2014/main" xmlns="" id="{353466C6-8248-429F-8056-FF040BF509EB}"/>
               </a:ext>
             </a:extLst>
           </p:cNvPr>
@@ -7110,7 +7126,7 @@
           <a:p>
             <a:fld id="{1A7E88B7-70CE-4035-AE73-13FA6FB985D4}" type="slidenum">
               <a:rPr lang="pt-BR" smtClean="0"/>
-              <a:t>‹#›</a:t>
+              <a:t>‹nº›</a:t>
             </a:fld>
             <a:endParaRPr lang="pt-BR"/>
           </a:p>
@@ -7151,7 +7167,7 @@
           <p:cNvPr id="2" name="Título 1">
             <a:extLst>
               <a:ext uri="{FF2B5EF4-FFF2-40B4-BE49-F238E27FC236}">
-                <a16:creationId xmlns:a16="http://schemas.microsoft.com/office/drawing/2014/main" id="{BC7BB9F0-F14B-4A91-B2B7-35BC47FE4DE7}"/>
+                <a16:creationId xmlns:a16="http://schemas.microsoft.com/office/drawing/2014/main" xmlns="" id="{BC7BB9F0-F14B-4A91-B2B7-35BC47FE4DE7}"/>
               </a:ext>
             </a:extLst>
           </p:cNvPr>
@@ -7179,7 +7195,7 @@
           <p:cNvPr id="3" name="Espaço Reservado para Conteúdo 2">
             <a:extLst>
               <a:ext uri="{FF2B5EF4-FFF2-40B4-BE49-F238E27FC236}">
-                <a16:creationId xmlns:a16="http://schemas.microsoft.com/office/drawing/2014/main" id="{EC1FC1C4-73DA-47A6-8496-B0B457F7D39A}"/>
+                <a16:creationId xmlns:a16="http://schemas.microsoft.com/office/drawing/2014/main" xmlns="" id="{EC1FC1C4-73DA-47A6-8496-B0B457F7D39A}"/>
               </a:ext>
             </a:extLst>
           </p:cNvPr>
@@ -7241,7 +7257,7 @@
           <p:cNvPr id="4" name="Espaço Reservado para Conteúdo 3">
             <a:extLst>
               <a:ext uri="{FF2B5EF4-FFF2-40B4-BE49-F238E27FC236}">
-                <a16:creationId xmlns:a16="http://schemas.microsoft.com/office/drawing/2014/main" id="{E92F06A8-A449-4D92-9912-76873E529B38}"/>
+                <a16:creationId xmlns:a16="http://schemas.microsoft.com/office/drawing/2014/main" xmlns="" id="{E92F06A8-A449-4D92-9912-76873E529B38}"/>
               </a:ext>
             </a:extLst>
           </p:cNvPr>
@@ -7303,7 +7319,7 @@
           <p:cNvPr id="5" name="Espaço Reservado para Data 4">
             <a:extLst>
               <a:ext uri="{FF2B5EF4-FFF2-40B4-BE49-F238E27FC236}">
-                <a16:creationId xmlns:a16="http://schemas.microsoft.com/office/drawing/2014/main" id="{938070A4-BC2F-4D55-BD8D-DEAF11BB9EE9}"/>
+                <a16:creationId xmlns:a16="http://schemas.microsoft.com/office/drawing/2014/main" xmlns="" id="{938070A4-BC2F-4D55-BD8D-DEAF11BB9EE9}"/>
               </a:ext>
             </a:extLst>
           </p:cNvPr>
@@ -7332,7 +7348,7 @@
           <p:cNvPr id="6" name="Espaço Reservado para Rodapé 5">
             <a:extLst>
               <a:ext uri="{FF2B5EF4-FFF2-40B4-BE49-F238E27FC236}">
-                <a16:creationId xmlns:a16="http://schemas.microsoft.com/office/drawing/2014/main" id="{45CC2DB8-844A-465F-BA9A-7734C80C7F43}"/>
+                <a16:creationId xmlns:a16="http://schemas.microsoft.com/office/drawing/2014/main" xmlns="" id="{45CC2DB8-844A-465F-BA9A-7734C80C7F43}"/>
               </a:ext>
             </a:extLst>
           </p:cNvPr>
@@ -7357,7 +7373,7 @@
           <p:cNvPr id="7" name="Espaço Reservado para Número de Slide 6">
             <a:extLst>
               <a:ext uri="{FF2B5EF4-FFF2-40B4-BE49-F238E27FC236}">
-                <a16:creationId xmlns:a16="http://schemas.microsoft.com/office/drawing/2014/main" id="{4CC606A8-097B-4040-94E0-CD8C88280D8F}"/>
+                <a16:creationId xmlns:a16="http://schemas.microsoft.com/office/drawing/2014/main" xmlns="" id="{4CC606A8-097B-4040-94E0-CD8C88280D8F}"/>
               </a:ext>
             </a:extLst>
           </p:cNvPr>
@@ -7375,7 +7391,7 @@
           <a:p>
             <a:fld id="{1A7E88B7-70CE-4035-AE73-13FA6FB985D4}" type="slidenum">
               <a:rPr lang="pt-BR" smtClean="0"/>
-              <a:t>‹#›</a:t>
+              <a:t>‹nº›</a:t>
             </a:fld>
             <a:endParaRPr lang="pt-BR"/>
           </a:p>
@@ -7416,7 +7432,7 @@
           <p:cNvPr id="2" name="Título 1">
             <a:extLst>
               <a:ext uri="{FF2B5EF4-FFF2-40B4-BE49-F238E27FC236}">
-                <a16:creationId xmlns:a16="http://schemas.microsoft.com/office/drawing/2014/main" id="{76D66686-0143-4CB6-8C09-BA326F1E7ACA}"/>
+                <a16:creationId xmlns:a16="http://schemas.microsoft.com/office/drawing/2014/main" xmlns="" id="{76D66686-0143-4CB6-8C09-BA326F1E7ACA}"/>
               </a:ext>
             </a:extLst>
           </p:cNvPr>
@@ -7449,7 +7465,7 @@
           <p:cNvPr id="3" name="Espaço Reservado para Texto 2">
             <a:extLst>
               <a:ext uri="{FF2B5EF4-FFF2-40B4-BE49-F238E27FC236}">
-                <a16:creationId xmlns:a16="http://schemas.microsoft.com/office/drawing/2014/main" id="{0227AB85-F59E-4BCE-B846-4FA0992C2F23}"/>
+                <a16:creationId xmlns:a16="http://schemas.microsoft.com/office/drawing/2014/main" xmlns="" id="{0227AB85-F59E-4BCE-B846-4FA0992C2F23}"/>
               </a:ext>
             </a:extLst>
           </p:cNvPr>
@@ -7520,7 +7536,7 @@
           <p:cNvPr id="4" name="Espaço Reservado para Conteúdo 3">
             <a:extLst>
               <a:ext uri="{FF2B5EF4-FFF2-40B4-BE49-F238E27FC236}">
-                <a16:creationId xmlns:a16="http://schemas.microsoft.com/office/drawing/2014/main" id="{3373456C-7319-4D0A-827D-D29F6B083F5D}"/>
+                <a16:creationId xmlns:a16="http://schemas.microsoft.com/office/drawing/2014/main" xmlns="" id="{3373456C-7319-4D0A-827D-D29F6B083F5D}"/>
               </a:ext>
             </a:extLst>
           </p:cNvPr>
@@ -7582,7 +7598,7 @@
           <p:cNvPr id="5" name="Espaço Reservado para Texto 4">
             <a:extLst>
               <a:ext uri="{FF2B5EF4-FFF2-40B4-BE49-F238E27FC236}">
-                <a16:creationId xmlns:a16="http://schemas.microsoft.com/office/drawing/2014/main" id="{4CD109D0-2E83-4262-8029-A871CEC47406}"/>
+                <a16:creationId xmlns:a16="http://schemas.microsoft.com/office/drawing/2014/main" xmlns="" id="{4CD109D0-2E83-4262-8029-A871CEC47406}"/>
               </a:ext>
             </a:extLst>
           </p:cNvPr>
@@ -7653,7 +7669,7 @@
           <p:cNvPr id="6" name="Espaço Reservado para Conteúdo 5">
             <a:extLst>
               <a:ext uri="{FF2B5EF4-FFF2-40B4-BE49-F238E27FC236}">
-                <a16:creationId xmlns:a16="http://schemas.microsoft.com/office/drawing/2014/main" id="{AD706E3A-CFBB-4A6C-A65F-D0360A9E74FE}"/>
+                <a16:creationId xmlns:a16="http://schemas.microsoft.com/office/drawing/2014/main" xmlns="" id="{AD706E3A-CFBB-4A6C-A65F-D0360A9E74FE}"/>
               </a:ext>
             </a:extLst>
           </p:cNvPr>
@@ -7715,7 +7731,7 @@
           <p:cNvPr id="7" name="Espaço Reservado para Data 6">
             <a:extLst>
               <a:ext uri="{FF2B5EF4-FFF2-40B4-BE49-F238E27FC236}">
-                <a16:creationId xmlns:a16="http://schemas.microsoft.com/office/drawing/2014/main" id="{4172C0E5-5AF0-4805-BB51-443733CD2BD5}"/>
+                <a16:creationId xmlns:a16="http://schemas.microsoft.com/office/drawing/2014/main" xmlns="" id="{4172C0E5-5AF0-4805-BB51-443733CD2BD5}"/>
               </a:ext>
             </a:extLst>
           </p:cNvPr>
@@ -7744,7 +7760,7 @@
           <p:cNvPr id="8" name="Espaço Reservado para Rodapé 7">
             <a:extLst>
               <a:ext uri="{FF2B5EF4-FFF2-40B4-BE49-F238E27FC236}">
-                <a16:creationId xmlns:a16="http://schemas.microsoft.com/office/drawing/2014/main" id="{0E801648-156F-497E-99CF-797DF48051E1}"/>
+                <a16:creationId xmlns:a16="http://schemas.microsoft.com/office/drawing/2014/main" xmlns="" id="{0E801648-156F-497E-99CF-797DF48051E1}"/>
               </a:ext>
             </a:extLst>
           </p:cNvPr>
@@ -7769,7 +7785,7 @@
           <p:cNvPr id="9" name="Espaço Reservado para Número de Slide 8">
             <a:extLst>
               <a:ext uri="{FF2B5EF4-FFF2-40B4-BE49-F238E27FC236}">
-                <a16:creationId xmlns:a16="http://schemas.microsoft.com/office/drawing/2014/main" id="{EEE23D32-80E7-4796-A137-66BF842E4B53}"/>
+                <a16:creationId xmlns:a16="http://schemas.microsoft.com/office/drawing/2014/main" xmlns="" id="{EEE23D32-80E7-4796-A137-66BF842E4B53}"/>
               </a:ext>
             </a:extLst>
           </p:cNvPr>
@@ -7787,7 +7803,7 @@
           <a:p>
             <a:fld id="{1A7E88B7-70CE-4035-AE73-13FA6FB985D4}" type="slidenum">
               <a:rPr lang="pt-BR" smtClean="0"/>
-              <a:t>‹#›</a:t>
+              <a:t>‹nº›</a:t>
             </a:fld>
             <a:endParaRPr lang="pt-BR"/>
           </a:p>
@@ -7828,7 +7844,7 @@
           <p:cNvPr id="2" name="Título 1">
             <a:extLst>
               <a:ext uri="{FF2B5EF4-FFF2-40B4-BE49-F238E27FC236}">
-                <a16:creationId xmlns:a16="http://schemas.microsoft.com/office/drawing/2014/main" id="{2BCE2379-C78F-47E1-8CFC-B846E7AF148D}"/>
+                <a16:creationId xmlns:a16="http://schemas.microsoft.com/office/drawing/2014/main" xmlns="" id="{2BCE2379-C78F-47E1-8CFC-B846E7AF148D}"/>
               </a:ext>
             </a:extLst>
           </p:cNvPr>
@@ -7856,7 +7872,7 @@
           <p:cNvPr id="3" name="Espaço Reservado para Data 2">
             <a:extLst>
               <a:ext uri="{FF2B5EF4-FFF2-40B4-BE49-F238E27FC236}">
-                <a16:creationId xmlns:a16="http://schemas.microsoft.com/office/drawing/2014/main" id="{342600A9-7F92-4E22-9D94-E4717252A817}"/>
+                <a16:creationId xmlns:a16="http://schemas.microsoft.com/office/drawing/2014/main" xmlns="" id="{342600A9-7F92-4E22-9D94-E4717252A817}"/>
               </a:ext>
             </a:extLst>
           </p:cNvPr>
@@ -7885,7 +7901,7 @@
           <p:cNvPr id="4" name="Espaço Reservado para Rodapé 3">
             <a:extLst>
               <a:ext uri="{FF2B5EF4-FFF2-40B4-BE49-F238E27FC236}">
-                <a16:creationId xmlns:a16="http://schemas.microsoft.com/office/drawing/2014/main" id="{192E6BED-F546-40CC-A2DF-99CBA853654E}"/>
+                <a16:creationId xmlns:a16="http://schemas.microsoft.com/office/drawing/2014/main" xmlns="" id="{192E6BED-F546-40CC-A2DF-99CBA853654E}"/>
               </a:ext>
             </a:extLst>
           </p:cNvPr>
@@ -7910,7 +7926,7 @@
           <p:cNvPr id="5" name="Espaço Reservado para Número de Slide 4">
             <a:extLst>
               <a:ext uri="{FF2B5EF4-FFF2-40B4-BE49-F238E27FC236}">
-                <a16:creationId xmlns:a16="http://schemas.microsoft.com/office/drawing/2014/main" id="{6091CC40-A8C4-4063-80EB-CC5099621678}"/>
+                <a16:creationId xmlns:a16="http://schemas.microsoft.com/office/drawing/2014/main" xmlns="" id="{6091CC40-A8C4-4063-80EB-CC5099621678}"/>
               </a:ext>
             </a:extLst>
           </p:cNvPr>
@@ -7928,7 +7944,7 @@
           <a:p>
             <a:fld id="{1A7E88B7-70CE-4035-AE73-13FA6FB985D4}" type="slidenum">
               <a:rPr lang="pt-BR" smtClean="0"/>
-              <a:t>‹#›</a:t>
+              <a:t>‹nº›</a:t>
             </a:fld>
             <a:endParaRPr lang="pt-BR"/>
           </a:p>
@@ -7969,7 +7985,7 @@
           <p:cNvPr id="2" name="Espaço Reservado para Data 1">
             <a:extLst>
               <a:ext uri="{FF2B5EF4-FFF2-40B4-BE49-F238E27FC236}">
-                <a16:creationId xmlns:a16="http://schemas.microsoft.com/office/drawing/2014/main" id="{DD19515C-212C-4EAE-84A3-8FF4BC844F1B}"/>
+                <a16:creationId xmlns:a16="http://schemas.microsoft.com/office/drawing/2014/main" xmlns="" id="{DD19515C-212C-4EAE-84A3-8FF4BC844F1B}"/>
               </a:ext>
             </a:extLst>
           </p:cNvPr>
@@ -7998,7 +8014,7 @@
           <p:cNvPr id="3" name="Espaço Reservado para Rodapé 2">
             <a:extLst>
               <a:ext uri="{FF2B5EF4-FFF2-40B4-BE49-F238E27FC236}">
-                <a16:creationId xmlns:a16="http://schemas.microsoft.com/office/drawing/2014/main" id="{94D3D120-B3E8-4C96-861D-7A4F12F49B3A}"/>
+                <a16:creationId xmlns:a16="http://schemas.microsoft.com/office/drawing/2014/main" xmlns="" id="{94D3D120-B3E8-4C96-861D-7A4F12F49B3A}"/>
               </a:ext>
             </a:extLst>
           </p:cNvPr>
@@ -8023,7 +8039,7 @@
           <p:cNvPr id="4" name="Espaço Reservado para Número de Slide 3">
             <a:extLst>
               <a:ext uri="{FF2B5EF4-FFF2-40B4-BE49-F238E27FC236}">
-                <a16:creationId xmlns:a16="http://schemas.microsoft.com/office/drawing/2014/main" id="{42E49B68-FA1B-468B-9F17-D5C09243D454}"/>
+                <a16:creationId xmlns:a16="http://schemas.microsoft.com/office/drawing/2014/main" xmlns="" id="{42E49B68-FA1B-468B-9F17-D5C09243D454}"/>
               </a:ext>
             </a:extLst>
           </p:cNvPr>
@@ -8041,7 +8057,7 @@
           <a:p>
             <a:fld id="{1A7E88B7-70CE-4035-AE73-13FA6FB985D4}" type="slidenum">
               <a:rPr lang="pt-BR" smtClean="0"/>
-              <a:t>‹#›</a:t>
+              <a:t>‹nº›</a:t>
             </a:fld>
             <a:endParaRPr lang="pt-BR"/>
           </a:p>
@@ -8082,7 +8098,7 @@
           <p:cNvPr id="2" name="Título 1">
             <a:extLst>
               <a:ext uri="{FF2B5EF4-FFF2-40B4-BE49-F238E27FC236}">
-                <a16:creationId xmlns:a16="http://schemas.microsoft.com/office/drawing/2014/main" id="{1C17BCBE-A897-4319-85EC-D87909C24980}"/>
+                <a16:creationId xmlns:a16="http://schemas.microsoft.com/office/drawing/2014/main" xmlns="" id="{1C17BCBE-A897-4319-85EC-D87909C24980}"/>
               </a:ext>
             </a:extLst>
           </p:cNvPr>
@@ -8119,7 +8135,7 @@
           <p:cNvPr id="3" name="Espaço Reservado para Conteúdo 2">
             <a:extLst>
               <a:ext uri="{FF2B5EF4-FFF2-40B4-BE49-F238E27FC236}">
-                <a16:creationId xmlns:a16="http://schemas.microsoft.com/office/drawing/2014/main" id="{4226F885-0204-4913-868B-4B8B82576F17}"/>
+                <a16:creationId xmlns:a16="http://schemas.microsoft.com/office/drawing/2014/main" xmlns="" id="{4226F885-0204-4913-868B-4B8B82576F17}"/>
               </a:ext>
             </a:extLst>
           </p:cNvPr>
@@ -8209,7 +8225,7 @@
           <p:cNvPr id="4" name="Espaço Reservado para Texto 3">
             <a:extLst>
               <a:ext uri="{FF2B5EF4-FFF2-40B4-BE49-F238E27FC236}">
-                <a16:creationId xmlns:a16="http://schemas.microsoft.com/office/drawing/2014/main" id="{00F9F784-A858-441B-8AB5-697098141751}"/>
+                <a16:creationId xmlns:a16="http://schemas.microsoft.com/office/drawing/2014/main" xmlns="" id="{00F9F784-A858-441B-8AB5-697098141751}"/>
               </a:ext>
             </a:extLst>
           </p:cNvPr>
@@ -8280,7 +8296,7 @@
           <p:cNvPr id="5" name="Espaço Reservado para Data 4">
             <a:extLst>
               <a:ext uri="{FF2B5EF4-FFF2-40B4-BE49-F238E27FC236}">
-                <a16:creationId xmlns:a16="http://schemas.microsoft.com/office/drawing/2014/main" id="{A4DC363A-5000-472E-8B17-02E7DCB8840A}"/>
+                <a16:creationId xmlns:a16="http://schemas.microsoft.com/office/drawing/2014/main" xmlns="" id="{A4DC363A-5000-472E-8B17-02E7DCB8840A}"/>
               </a:ext>
             </a:extLst>
           </p:cNvPr>
@@ -8309,7 +8325,7 @@
           <p:cNvPr id="6" name="Espaço Reservado para Rodapé 5">
             <a:extLst>
               <a:ext uri="{FF2B5EF4-FFF2-40B4-BE49-F238E27FC236}">
-                <a16:creationId xmlns:a16="http://schemas.microsoft.com/office/drawing/2014/main" id="{5548425D-2C21-4C56-BAD4-662978775C28}"/>
+                <a16:creationId xmlns:a16="http://schemas.microsoft.com/office/drawing/2014/main" xmlns="" id="{5548425D-2C21-4C56-BAD4-662978775C28}"/>
               </a:ext>
             </a:extLst>
           </p:cNvPr>
@@ -8334,7 +8350,7 @@
           <p:cNvPr id="7" name="Espaço Reservado para Número de Slide 6">
             <a:extLst>
               <a:ext uri="{FF2B5EF4-FFF2-40B4-BE49-F238E27FC236}">
-                <a16:creationId xmlns:a16="http://schemas.microsoft.com/office/drawing/2014/main" id="{C63E9726-E64C-42B2-AE8A-8C235A956B48}"/>
+                <a16:creationId xmlns:a16="http://schemas.microsoft.com/office/drawing/2014/main" xmlns="" id="{C63E9726-E64C-42B2-AE8A-8C235A956B48}"/>
               </a:ext>
             </a:extLst>
           </p:cNvPr>
@@ -8352,7 +8368,7 @@
           <a:p>
             <a:fld id="{1A7E88B7-70CE-4035-AE73-13FA6FB985D4}" type="slidenum">
               <a:rPr lang="pt-BR" smtClean="0"/>
-              <a:t>‹#›</a:t>
+              <a:t>‹nº›</a:t>
             </a:fld>
             <a:endParaRPr lang="pt-BR"/>
           </a:p>
@@ -8393,7 +8409,7 @@
           <p:cNvPr id="2" name="Título 1">
             <a:extLst>
               <a:ext uri="{FF2B5EF4-FFF2-40B4-BE49-F238E27FC236}">
-                <a16:creationId xmlns:a16="http://schemas.microsoft.com/office/drawing/2014/main" id="{11086A78-3E74-450C-96A6-CA8AC37AF772}"/>
+                <a16:creationId xmlns:a16="http://schemas.microsoft.com/office/drawing/2014/main" xmlns="" id="{11086A78-3E74-450C-96A6-CA8AC37AF772}"/>
               </a:ext>
             </a:extLst>
           </p:cNvPr>
@@ -8430,7 +8446,7 @@
           <p:cNvPr id="3" name="Espaço Reservado para Imagem 2">
             <a:extLst>
               <a:ext uri="{FF2B5EF4-FFF2-40B4-BE49-F238E27FC236}">
-                <a16:creationId xmlns:a16="http://schemas.microsoft.com/office/drawing/2014/main" id="{5F5B7312-975A-4DBC-9B2F-3652ADA006FD}"/>
+                <a16:creationId xmlns:a16="http://schemas.microsoft.com/office/drawing/2014/main" xmlns="" id="{5F5B7312-975A-4DBC-9B2F-3652ADA006FD}"/>
               </a:ext>
             </a:extLst>
           </p:cNvPr>
@@ -8497,7 +8513,7 @@
           <p:cNvPr id="4" name="Espaço Reservado para Texto 3">
             <a:extLst>
               <a:ext uri="{FF2B5EF4-FFF2-40B4-BE49-F238E27FC236}">
-                <a16:creationId xmlns:a16="http://schemas.microsoft.com/office/drawing/2014/main" id="{AAF805F5-1DFF-41C6-944C-7D79FE0D0963}"/>
+                <a16:creationId xmlns:a16="http://schemas.microsoft.com/office/drawing/2014/main" xmlns="" id="{AAF805F5-1DFF-41C6-944C-7D79FE0D0963}"/>
               </a:ext>
             </a:extLst>
           </p:cNvPr>
@@ -8568,7 +8584,7 @@
           <p:cNvPr id="5" name="Espaço Reservado para Data 4">
             <a:extLst>
               <a:ext uri="{FF2B5EF4-FFF2-40B4-BE49-F238E27FC236}">
-                <a16:creationId xmlns:a16="http://schemas.microsoft.com/office/drawing/2014/main" id="{02113D81-8665-4516-BD81-C6A1F254EECD}"/>
+                <a16:creationId xmlns:a16="http://schemas.microsoft.com/office/drawing/2014/main" xmlns="" id="{02113D81-8665-4516-BD81-C6A1F254EECD}"/>
               </a:ext>
             </a:extLst>
           </p:cNvPr>
@@ -8597,7 +8613,7 @@
           <p:cNvPr id="6" name="Espaço Reservado para Rodapé 5">
             <a:extLst>
               <a:ext uri="{FF2B5EF4-FFF2-40B4-BE49-F238E27FC236}">
-                <a16:creationId xmlns:a16="http://schemas.microsoft.com/office/drawing/2014/main" id="{2B00C88B-FF32-40AA-A187-727D96FD7862}"/>
+                <a16:creationId xmlns:a16="http://schemas.microsoft.com/office/drawing/2014/main" xmlns="" id="{2B00C88B-FF32-40AA-A187-727D96FD7862}"/>
               </a:ext>
             </a:extLst>
           </p:cNvPr>
@@ -8622,7 +8638,7 @@
           <p:cNvPr id="7" name="Espaço Reservado para Número de Slide 6">
             <a:extLst>
               <a:ext uri="{FF2B5EF4-FFF2-40B4-BE49-F238E27FC236}">
-                <a16:creationId xmlns:a16="http://schemas.microsoft.com/office/drawing/2014/main" id="{A04D1A2D-69F7-4B8F-A730-BC26DC340BA6}"/>
+                <a16:creationId xmlns:a16="http://schemas.microsoft.com/office/drawing/2014/main" xmlns="" id="{A04D1A2D-69F7-4B8F-A730-BC26DC340BA6}"/>
               </a:ext>
             </a:extLst>
           </p:cNvPr>
@@ -8640,7 +8656,7 @@
           <a:p>
             <a:fld id="{1A7E88B7-70CE-4035-AE73-13FA6FB985D4}" type="slidenum">
               <a:rPr lang="pt-BR" smtClean="0"/>
-              <a:t>‹#›</a:t>
+              <a:t>‹nº›</a:t>
             </a:fld>
             <a:endParaRPr lang="pt-BR"/>
           </a:p>
@@ -8686,7 +8702,7 @@
           <p:cNvPr id="2" name="Espaço Reservado para Título 1">
             <a:extLst>
               <a:ext uri="{FF2B5EF4-FFF2-40B4-BE49-F238E27FC236}">
-                <a16:creationId xmlns:a16="http://schemas.microsoft.com/office/drawing/2014/main" id="{E69A0273-1966-4A1B-9370-4C1CE5036371}"/>
+                <a16:creationId xmlns:a16="http://schemas.microsoft.com/office/drawing/2014/main" xmlns="" id="{E69A0273-1966-4A1B-9370-4C1CE5036371}"/>
               </a:ext>
             </a:extLst>
           </p:cNvPr>
@@ -8724,7 +8740,7 @@
           <p:cNvPr id="3" name="Espaço Reservado para Texto 2">
             <a:extLst>
               <a:ext uri="{FF2B5EF4-FFF2-40B4-BE49-F238E27FC236}">
-                <a16:creationId xmlns:a16="http://schemas.microsoft.com/office/drawing/2014/main" id="{3B9CF87A-0448-49A7-AB25-EBC1D56A40EF}"/>
+                <a16:creationId xmlns:a16="http://schemas.microsoft.com/office/drawing/2014/main" xmlns="" id="{3B9CF87A-0448-49A7-AB25-EBC1D56A40EF}"/>
               </a:ext>
             </a:extLst>
           </p:cNvPr>
@@ -8791,7 +8807,7 @@
           <p:cNvPr id="4" name="Espaço Reservado para Data 3">
             <a:extLst>
               <a:ext uri="{FF2B5EF4-FFF2-40B4-BE49-F238E27FC236}">
-                <a16:creationId xmlns:a16="http://schemas.microsoft.com/office/drawing/2014/main" id="{2EF7B1F2-BB5A-44D0-816D-16AD2C71430E}"/>
+                <a16:creationId xmlns:a16="http://schemas.microsoft.com/office/drawing/2014/main" xmlns="" id="{2EF7B1F2-BB5A-44D0-816D-16AD2C71430E}"/>
               </a:ext>
             </a:extLst>
           </p:cNvPr>
@@ -8838,7 +8854,7 @@
           <p:cNvPr id="5" name="Espaço Reservado para Rodapé 4">
             <a:extLst>
               <a:ext uri="{FF2B5EF4-FFF2-40B4-BE49-F238E27FC236}">
-                <a16:creationId xmlns:a16="http://schemas.microsoft.com/office/drawing/2014/main" id="{C703F94C-2CC8-4DAA-BC35-14FC3E841DCD}"/>
+                <a16:creationId xmlns:a16="http://schemas.microsoft.com/office/drawing/2014/main" xmlns="" id="{C703F94C-2CC8-4DAA-BC35-14FC3E841DCD}"/>
               </a:ext>
             </a:extLst>
           </p:cNvPr>
@@ -8881,7 +8897,7 @@
           <p:cNvPr id="6" name="Espaço Reservado para Número de Slide 5">
             <a:extLst>
               <a:ext uri="{FF2B5EF4-FFF2-40B4-BE49-F238E27FC236}">
-                <a16:creationId xmlns:a16="http://schemas.microsoft.com/office/drawing/2014/main" id="{64051336-7048-457A-8B61-D94291D71648}"/>
+                <a16:creationId xmlns:a16="http://schemas.microsoft.com/office/drawing/2014/main" xmlns="" id="{64051336-7048-457A-8B61-D94291D71648}"/>
               </a:ext>
             </a:extLst>
           </p:cNvPr>
@@ -8917,7 +8933,7 @@
           <a:p>
             <a:fld id="{1A7E88B7-70CE-4035-AE73-13FA6FB985D4}" type="slidenum">
               <a:rPr lang="pt-BR" smtClean="0"/>
-              <a:t>‹#›</a:t>
+              <a:t>‹nº›</a:t>
             </a:fld>
             <a:endParaRPr lang="pt-BR"/>
           </a:p>
@@ -9249,7 +9265,7 @@
           <p:cNvPr id="2" name="Título 1">
             <a:extLst>
               <a:ext uri="{FF2B5EF4-FFF2-40B4-BE49-F238E27FC236}">
-                <a16:creationId xmlns:a16="http://schemas.microsoft.com/office/drawing/2014/main" id="{32666AC8-2E17-4DB4-B0F5-60C640CCFD2E}"/>
+                <a16:creationId xmlns:a16="http://schemas.microsoft.com/office/drawing/2014/main" xmlns="" id="{32666AC8-2E17-4DB4-B0F5-60C640CCFD2E}"/>
               </a:ext>
             </a:extLst>
           </p:cNvPr>
@@ -9276,6 +9292,10 @@
               <a:rPr lang="pt-BR" sz="5400" dirty="0"/>
               <a:t>T320 - Introdução ao Aprendizado de Máquina II:</a:t>
             </a:r>
+            <a:r>
+              <a:rPr lang="pt-BR" dirty="0"/>
+              <a:t/>
+            </a:r>
             <a:br>
               <a:rPr lang="pt-BR" dirty="0"/>
             </a:br>
@@ -9291,7 +9311,7 @@
           <p:cNvPr id="4" name="CaixaDeTexto 3">
             <a:extLst>
               <a:ext uri="{FF2B5EF4-FFF2-40B4-BE49-F238E27FC236}">
-                <a16:creationId xmlns:a16="http://schemas.microsoft.com/office/drawing/2014/main" id="{430EB894-B7D4-434C-9D1A-A14094D9BEEC}"/>
+                <a16:creationId xmlns:a16="http://schemas.microsoft.com/office/drawing/2014/main" xmlns="" id="{430EB894-B7D4-434C-9D1A-A14094D9BEEC}"/>
               </a:ext>
             </a:extLst>
           </p:cNvPr>
@@ -9332,7 +9352,7 @@
           <p:cNvPr id="1026" name="Picture 2" descr="Logo">
             <a:extLst>
               <a:ext uri="{FF2B5EF4-FFF2-40B4-BE49-F238E27FC236}">
-                <a16:creationId xmlns:a16="http://schemas.microsoft.com/office/drawing/2014/main" id="{3F2642E0-4F6A-4196-8F58-E77D36E9A33F}"/>
+                <a16:creationId xmlns:a16="http://schemas.microsoft.com/office/drawing/2014/main" xmlns="" id="{3F2642E0-4F6A-4196-8F58-E77D36E9A33F}"/>
               </a:ext>
             </a:extLst>
           </p:cNvPr>
@@ -9377,7 +9397,7 @@
           <p:cNvPr id="5122" name="Picture 2" descr="Image result for machine learning">
             <a:extLst>
               <a:ext uri="{FF2B5EF4-FFF2-40B4-BE49-F238E27FC236}">
-                <a16:creationId xmlns:a16="http://schemas.microsoft.com/office/drawing/2014/main" id="{810CE0A2-4102-44A6-A370-175E7896CDCB}"/>
+                <a16:creationId xmlns:a16="http://schemas.microsoft.com/office/drawing/2014/main" xmlns="" id="{810CE0A2-4102-44A6-A370-175E7896CDCB}"/>
               </a:ext>
             </a:extLst>
           </p:cNvPr>
@@ -9499,50 +9519,6 @@
           </a:prstGeom>
         </p:spPr>
       </p:pic>
-      <p:sp>
-        <p:nvSpPr>
-          <p:cNvPr id="4" name="Rectangle 3"/>
-          <p:cNvSpPr/>
-          <p:nvPr/>
-        </p:nvSpPr>
-        <p:spPr>
-          <a:xfrm>
-            <a:off x="0" y="6528913"/>
-            <a:ext cx="5447325" cy="307777"/>
-          </a:xfrm>
-          <a:prstGeom prst="rect">
-            <a:avLst/>
-          </a:prstGeom>
-        </p:spPr>
-        <p:txBody>
-          <a:bodyPr wrap="none">
-            <a:spAutoFit/>
-          </a:bodyPr>
-          <a:lstStyle/>
-          <a:p>
-            <a:r>
-              <a:rPr lang="pt-BR" sz="1400" dirty="0">
-                <a:solidFill>
-                  <a:srgbClr val="00B0F0"/>
-                </a:solidFill>
-                <a:hlinkClick r:id="rId4"/>
-              </a:rPr>
-              <a:t>Exemplo: </a:t>
-            </a:r>
-            <a:r>
-              <a:rPr lang="pt-BR" sz="1400" dirty="0" err="1">
-                <a:hlinkClick r:id="rId4"/>
-              </a:rPr>
-              <a:t>ClassificationOfFourClassesWithOvAandOvO-SciKitLearn.ipynb</a:t>
-            </a:r>
-            <a:endParaRPr lang="pt-BR" sz="1400" dirty="0">
-              <a:solidFill>
-                <a:srgbClr val="00B0F0"/>
-              </a:solidFill>
-            </a:endParaRPr>
-          </a:p>
-        </p:txBody>
-      </p:sp>
       <mc:AlternateContent xmlns:mc="http://schemas.openxmlformats.org/markup-compatibility/2006" xmlns:a14="http://schemas.microsoft.com/office/drawing/2010/main">
         <mc:Choice Requires="a14">
           <p:sp>
@@ -10825,7 +10801,7 @@
           <p:cNvPr id="13" name="CaixaDeTexto 12">
             <a:extLst>
               <a:ext uri="{FF2B5EF4-FFF2-40B4-BE49-F238E27FC236}">
-                <a16:creationId xmlns:a16="http://schemas.microsoft.com/office/drawing/2014/main" id="{9989FE69-01F8-8C6A-4EA0-DA1C9792B919}"/>
+                <a16:creationId xmlns:a16="http://schemas.microsoft.com/office/drawing/2014/main" xmlns="" id="{9989FE69-01F8-8C6A-4EA0-DA1C9792B919}"/>
               </a:ext>
             </a:extLst>
           </p:cNvPr>
@@ -10875,6 +10851,13 @@
   <p:clrMapOvr>
     <a:masterClrMapping/>
   </p:clrMapOvr>
+  <p:timing>
+    <p:tnLst>
+      <p:par>
+        <p:cTn id="1" dur="indefinite" restart="never" nodeType="tmRoot"/>
+      </p:par>
+    </p:tnLst>
+  </p:timing>
 </p:sld>
 </file>
 
@@ -10900,7 +10883,7 @@
           <p:cNvPr id="2" name="Título 1">
             <a:extLst>
               <a:ext uri="{FF2B5EF4-FFF2-40B4-BE49-F238E27FC236}">
-                <a16:creationId xmlns:a16="http://schemas.microsoft.com/office/drawing/2014/main" id="{B022D379-CAA0-9DC9-CDBD-6E0EBE1BFF31}"/>
+                <a16:creationId xmlns:a16="http://schemas.microsoft.com/office/drawing/2014/main" xmlns="" id="{B022D379-CAA0-9DC9-CDBD-6E0EBE1BFF31}"/>
               </a:ext>
             </a:extLst>
           </p:cNvPr>
@@ -10930,7 +10913,7 @@
               <p:cNvPr id="3" name="Espaço Reservado para Conteúdo 2">
                 <a:extLst>
                   <a:ext uri="{FF2B5EF4-FFF2-40B4-BE49-F238E27FC236}">
-                    <a16:creationId xmlns:a16="http://schemas.microsoft.com/office/drawing/2014/main" id="{B68F0D74-8673-A432-A1D7-BDEF7725851A}"/>
+                    <a16:creationId xmlns:a16="http://schemas.microsoft.com/office/drawing/2014/main" xmlns="" id="{B68F0D74-8673-A432-A1D7-BDEF7725851A}"/>
                   </a:ext>
                 </a:extLst>
               </p:cNvPr>
@@ -11182,6 +11165,13 @@
   <p:clrMapOvr>
     <a:masterClrMapping/>
   </p:clrMapOvr>
+  <p:timing>
+    <p:tnLst>
+      <p:par>
+        <p:cTn id="1" dur="indefinite" restart="never" nodeType="tmRoot"/>
+      </p:par>
+    </p:tnLst>
+  </p:timing>
 </p:sld>
 </file>
 
@@ -11207,7 +11197,7 @@
           <p:cNvPr id="2" name="Título 1">
             <a:extLst>
               <a:ext uri="{FF2B5EF4-FFF2-40B4-BE49-F238E27FC236}">
-                <a16:creationId xmlns:a16="http://schemas.microsoft.com/office/drawing/2014/main" id="{519F0958-530D-D942-BA01-15C1583DD1E6}"/>
+                <a16:creationId xmlns:a16="http://schemas.microsoft.com/office/drawing/2014/main" xmlns="" id="{519F0958-530D-D942-BA01-15C1583DD1E6}"/>
               </a:ext>
             </a:extLst>
           </p:cNvPr>
@@ -11237,7 +11227,7 @@
               <p:cNvPr id="3" name="Espaço Reservado para Conteúdo 2">
                 <a:extLst>
                   <a:ext uri="{FF2B5EF4-FFF2-40B4-BE49-F238E27FC236}">
-                    <a16:creationId xmlns:a16="http://schemas.microsoft.com/office/drawing/2014/main" id="{21416F72-28FB-E27C-D129-16A944A87C67}"/>
+                    <a16:creationId xmlns:a16="http://schemas.microsoft.com/office/drawing/2014/main" xmlns="" id="{21416F72-28FB-E27C-D129-16A944A87C67}"/>
                   </a:ext>
                 </a:extLst>
               </p:cNvPr>
@@ -11623,7 +11613,7 @@
           <p:cNvPr id="2" name="Título 1">
             <a:extLst>
               <a:ext uri="{FF2B5EF4-FFF2-40B4-BE49-F238E27FC236}">
-                <a16:creationId xmlns:a16="http://schemas.microsoft.com/office/drawing/2014/main" id="{DCD47F25-5DD1-794E-8733-BFD771A2DE49}"/>
+                <a16:creationId xmlns:a16="http://schemas.microsoft.com/office/drawing/2014/main" xmlns="" id="{DCD47F25-5DD1-794E-8733-BFD771A2DE49}"/>
               </a:ext>
             </a:extLst>
           </p:cNvPr>
@@ -11653,7 +11643,7 @@
               <p:cNvPr id="3" name="Espaço Reservado para Conteúdo 2">
                 <a:extLst>
                   <a:ext uri="{FF2B5EF4-FFF2-40B4-BE49-F238E27FC236}">
-                    <a16:creationId xmlns:a16="http://schemas.microsoft.com/office/drawing/2014/main" id="{D79BB7DC-99E7-8958-EC77-566B7E3C2BBB}"/>
+                    <a16:creationId xmlns:a16="http://schemas.microsoft.com/office/drawing/2014/main" xmlns="" id="{D79BB7DC-99E7-8958-EC77-566B7E3C2BBB}"/>
                   </a:ext>
                 </a:extLst>
               </p:cNvPr>
@@ -13156,7 +13146,7 @@
           <p:cNvPr id="4" name="Rectangle 11">
             <a:extLst>
               <a:ext uri="{FF2B5EF4-FFF2-40B4-BE49-F238E27FC236}">
-                <a16:creationId xmlns:a16="http://schemas.microsoft.com/office/drawing/2014/main" id="{66F09A24-9061-8EA4-420D-13EC84B7C649}"/>
+                <a16:creationId xmlns:a16="http://schemas.microsoft.com/office/drawing/2014/main" xmlns="" id="{66F09A24-9061-8EA4-420D-13EC84B7C649}"/>
               </a:ext>
             </a:extLst>
           </p:cNvPr>
@@ -13238,7 +13228,7 @@
           <p:cNvPr id="2" name="Título 1">
             <a:extLst>
               <a:ext uri="{FF2B5EF4-FFF2-40B4-BE49-F238E27FC236}">
-                <a16:creationId xmlns:a16="http://schemas.microsoft.com/office/drawing/2014/main" id="{028A152F-93D8-11FA-9B7A-B62AE5BB6486}"/>
+                <a16:creationId xmlns:a16="http://schemas.microsoft.com/office/drawing/2014/main" xmlns="" id="{028A152F-93D8-11FA-9B7A-B62AE5BB6486}"/>
               </a:ext>
             </a:extLst>
           </p:cNvPr>
@@ -13268,7 +13258,7 @@
               <p:cNvPr id="3" name="Espaço Reservado para Conteúdo 2">
                 <a:extLst>
                   <a:ext uri="{FF2B5EF4-FFF2-40B4-BE49-F238E27FC236}">
-                    <a16:creationId xmlns:a16="http://schemas.microsoft.com/office/drawing/2014/main" id="{B3535727-BB24-BB15-5C03-3DA9A3F9A09A}"/>
+                    <a16:creationId xmlns:a16="http://schemas.microsoft.com/office/drawing/2014/main" xmlns="" id="{B3535727-BB24-BB15-5C03-3DA9A3F9A09A}"/>
                   </a:ext>
                 </a:extLst>
               </p:cNvPr>
@@ -14064,7 +14054,7 @@
           <p:cNvPr id="2" name="Título 1">
             <a:extLst>
               <a:ext uri="{FF2B5EF4-FFF2-40B4-BE49-F238E27FC236}">
-                <a16:creationId xmlns:a16="http://schemas.microsoft.com/office/drawing/2014/main" id="{AAEBCFD6-83A6-222F-09EA-9F68DDF7B617}"/>
+                <a16:creationId xmlns:a16="http://schemas.microsoft.com/office/drawing/2014/main" xmlns="" id="{AAEBCFD6-83A6-222F-09EA-9F68DDF7B617}"/>
               </a:ext>
             </a:extLst>
           </p:cNvPr>
@@ -14094,7 +14084,7 @@
               <p:cNvPr id="3" name="Espaço Reservado para Conteúdo 2">
                 <a:extLst>
                   <a:ext uri="{FF2B5EF4-FFF2-40B4-BE49-F238E27FC236}">
-                    <a16:creationId xmlns:a16="http://schemas.microsoft.com/office/drawing/2014/main" id="{133AC492-69A5-87DD-C4AF-2FEA6B38E4C8}"/>
+                    <a16:creationId xmlns:a16="http://schemas.microsoft.com/office/drawing/2014/main" xmlns="" id="{133AC492-69A5-87DD-C4AF-2FEA6B38E4C8}"/>
                   </a:ext>
                 </a:extLst>
               </p:cNvPr>
@@ -14820,7 +14810,7 @@
               <p:cNvPr id="4" name="TextBox 3">
                 <a:extLst>
                   <a:ext uri="{FF2B5EF4-FFF2-40B4-BE49-F238E27FC236}">
-                    <a16:creationId xmlns:a16="http://schemas.microsoft.com/office/drawing/2014/main" id="{430AF08B-1D1C-CB3B-78DF-2FB94BE83C39}"/>
+                    <a16:creationId xmlns:a16="http://schemas.microsoft.com/office/drawing/2014/main" xmlns="" id="{430AF08B-1D1C-CB3B-78DF-2FB94BE83C39}"/>
                   </a:ext>
                 </a:extLst>
               </p:cNvPr>
@@ -14960,7 +14950,7 @@
           <p:cNvPr id="5" name="Straight Arrow Connector 4">
             <a:extLst>
               <a:ext uri="{FF2B5EF4-FFF2-40B4-BE49-F238E27FC236}">
-                <a16:creationId xmlns:a16="http://schemas.microsoft.com/office/drawing/2014/main" id="{7ADFCDFC-42ED-2E95-5F43-DF8574CF6A71}"/>
+                <a16:creationId xmlns:a16="http://schemas.microsoft.com/office/drawing/2014/main" xmlns="" id="{7ADFCDFC-42ED-2E95-5F43-DF8574CF6A71}"/>
               </a:ext>
             </a:extLst>
           </p:cNvPr>
@@ -15034,7 +15024,7 @@
           <p:cNvPr id="2" name="Título 1">
             <a:extLst>
               <a:ext uri="{FF2B5EF4-FFF2-40B4-BE49-F238E27FC236}">
-                <a16:creationId xmlns:a16="http://schemas.microsoft.com/office/drawing/2014/main" id="{9ACEE090-DD33-6575-4FA7-70E4DD8E6119}"/>
+                <a16:creationId xmlns:a16="http://schemas.microsoft.com/office/drawing/2014/main" xmlns="" id="{9ACEE090-DD33-6575-4FA7-70E4DD8E6119}"/>
               </a:ext>
             </a:extLst>
           </p:cNvPr>
@@ -15064,7 +15054,7 @@
               <p:cNvPr id="3" name="Espaço Reservado para Conteúdo 2">
                 <a:extLst>
                   <a:ext uri="{FF2B5EF4-FFF2-40B4-BE49-F238E27FC236}">
-                    <a16:creationId xmlns:a16="http://schemas.microsoft.com/office/drawing/2014/main" id="{59835C31-F047-4C77-EE04-457C9679811A}"/>
+                    <a16:creationId xmlns:a16="http://schemas.microsoft.com/office/drawing/2014/main" xmlns="" id="{59835C31-F047-4C77-EE04-457C9679811A}"/>
                   </a:ext>
                 </a:extLst>
               </p:cNvPr>
@@ -16498,7 +16488,7 @@
           <p:cNvPr id="2" name="Título 1">
             <a:extLst>
               <a:ext uri="{FF2B5EF4-FFF2-40B4-BE49-F238E27FC236}">
-                <a16:creationId xmlns:a16="http://schemas.microsoft.com/office/drawing/2014/main" id="{E4598F11-6F65-0753-89FE-F5ABED77B46A}"/>
+                <a16:creationId xmlns:a16="http://schemas.microsoft.com/office/drawing/2014/main" xmlns="" id="{E4598F11-6F65-0753-89FE-F5ABED77B46A}"/>
               </a:ext>
             </a:extLst>
           </p:cNvPr>
@@ -16528,7 +16518,7 @@
               <p:cNvPr id="3" name="Espaço Reservado para Conteúdo 2">
                 <a:extLst>
                   <a:ext uri="{FF2B5EF4-FFF2-40B4-BE49-F238E27FC236}">
-                    <a16:creationId xmlns:a16="http://schemas.microsoft.com/office/drawing/2014/main" id="{FEF4E6DC-E916-D97A-4D18-D469285C4F2C}"/>
+                    <a16:creationId xmlns:a16="http://schemas.microsoft.com/office/drawing/2014/main" xmlns="" id="{FEF4E6DC-E916-D97A-4D18-D469285C4F2C}"/>
                   </a:ext>
                 </a:extLst>
               </p:cNvPr>
@@ -17049,7 +17039,7 @@
           <p:cNvPr id="2" name="Título 1">
             <a:extLst>
               <a:ext uri="{FF2B5EF4-FFF2-40B4-BE49-F238E27FC236}">
-                <a16:creationId xmlns:a16="http://schemas.microsoft.com/office/drawing/2014/main" id="{D5807923-28D2-8150-E304-526DA460D220}"/>
+                <a16:creationId xmlns:a16="http://schemas.microsoft.com/office/drawing/2014/main" xmlns="" id="{D5807923-28D2-8150-E304-526DA460D220}"/>
               </a:ext>
             </a:extLst>
           </p:cNvPr>
@@ -17079,7 +17069,7 @@
               <p:cNvPr id="3" name="Espaço Reservado para Conteúdo 2">
                 <a:extLst>
                   <a:ext uri="{FF2B5EF4-FFF2-40B4-BE49-F238E27FC236}">
-                    <a16:creationId xmlns:a16="http://schemas.microsoft.com/office/drawing/2014/main" id="{FFACD180-C529-EB91-BD2D-B5F491B1E35C}"/>
+                    <a16:creationId xmlns:a16="http://schemas.microsoft.com/office/drawing/2014/main" xmlns="" id="{FFACD180-C529-EB91-BD2D-B5F491B1E35C}"/>
                   </a:ext>
                 </a:extLst>
               </p:cNvPr>
@@ -17264,7 +17254,7 @@
           <p:cNvPr id="1026" name="Picture 2">
             <a:extLst>
               <a:ext uri="{FF2B5EF4-FFF2-40B4-BE49-F238E27FC236}">
-                <a16:creationId xmlns:a16="http://schemas.microsoft.com/office/drawing/2014/main" id="{6FC2BDE8-91E0-6379-9BA3-76511C6153D5}"/>
+                <a16:creationId xmlns:a16="http://schemas.microsoft.com/office/drawing/2014/main" xmlns="" id="{6FC2BDE8-91E0-6379-9BA3-76511C6153D5}"/>
               </a:ext>
             </a:extLst>
           </p:cNvPr>
@@ -17309,7 +17299,7 @@
           <p:cNvPr id="5" name="Picture 2">
             <a:extLst>
               <a:ext uri="{FF2B5EF4-FFF2-40B4-BE49-F238E27FC236}">
-                <a16:creationId xmlns:a16="http://schemas.microsoft.com/office/drawing/2014/main" id="{2771BE1F-7B74-36A4-AA69-9171B025A4B6}"/>
+                <a16:creationId xmlns:a16="http://schemas.microsoft.com/office/drawing/2014/main" xmlns="" id="{2771BE1F-7B74-36A4-AA69-9171B025A4B6}"/>
               </a:ext>
             </a:extLst>
           </p:cNvPr>
@@ -17384,7 +17374,7 @@
           <p:cNvPr id="2" name="Título 1">
             <a:extLst>
               <a:ext uri="{FF2B5EF4-FFF2-40B4-BE49-F238E27FC236}">
-                <a16:creationId xmlns:a16="http://schemas.microsoft.com/office/drawing/2014/main" id="{5D929962-9BFC-4174-AB35-CC23FA013168}"/>
+                <a16:creationId xmlns:a16="http://schemas.microsoft.com/office/drawing/2014/main" xmlns="" id="{5D929962-9BFC-4174-AB35-CC23FA013168}"/>
               </a:ext>
             </a:extLst>
           </p:cNvPr>
@@ -17414,7 +17404,7 @@
               <p:cNvPr id="3" name="Espaço Reservado para Conteúdo 2">
                 <a:extLst>
                   <a:ext uri="{FF2B5EF4-FFF2-40B4-BE49-F238E27FC236}">
-                    <a16:creationId xmlns:a16="http://schemas.microsoft.com/office/drawing/2014/main" id="{1D38055D-E355-F780-9CA0-0337EA0BE4FD}"/>
+                    <a16:creationId xmlns:a16="http://schemas.microsoft.com/office/drawing/2014/main" xmlns="" id="{1D38055D-E355-F780-9CA0-0337EA0BE4FD}"/>
                   </a:ext>
                 </a:extLst>
               </p:cNvPr>
@@ -18587,7 +18577,7 @@
           <p:cNvPr id="4" name="TextBox 3">
             <a:extLst>
               <a:ext uri="{FF2B5EF4-FFF2-40B4-BE49-F238E27FC236}">
-                <a16:creationId xmlns:a16="http://schemas.microsoft.com/office/drawing/2014/main" id="{39A1F0A7-6FE4-5915-6E73-B4358D34F953}"/>
+                <a16:creationId xmlns:a16="http://schemas.microsoft.com/office/drawing/2014/main" xmlns="" id="{39A1F0A7-6FE4-5915-6E73-B4358D34F953}"/>
               </a:ext>
             </a:extLst>
           </p:cNvPr>
@@ -18623,7 +18613,7 @@
           <p:cNvPr id="5" name="Straight Arrow Connector 5">
             <a:extLst>
               <a:ext uri="{FF2B5EF4-FFF2-40B4-BE49-F238E27FC236}">
-                <a16:creationId xmlns:a16="http://schemas.microsoft.com/office/drawing/2014/main" id="{C9B616E8-B74F-0DC6-87F9-63CCB1AB4FE1}"/>
+                <a16:creationId xmlns:a16="http://schemas.microsoft.com/office/drawing/2014/main" xmlns="" id="{C9B616E8-B74F-0DC6-87F9-63CCB1AB4FE1}"/>
               </a:ext>
             </a:extLst>
           </p:cNvPr>
@@ -18792,7 +18782,7 @@
           <p:cNvPr id="2" name="Título 1">
             <a:extLst>
               <a:ext uri="{FF2B5EF4-FFF2-40B4-BE49-F238E27FC236}">
-                <a16:creationId xmlns:a16="http://schemas.microsoft.com/office/drawing/2014/main" id="{01D0947A-594D-A8D5-95F3-38EB04C6BDB6}"/>
+                <a16:creationId xmlns:a16="http://schemas.microsoft.com/office/drawing/2014/main" xmlns="" id="{01D0947A-594D-A8D5-95F3-38EB04C6BDB6}"/>
               </a:ext>
             </a:extLst>
           </p:cNvPr>
@@ -18822,7 +18812,7 @@
               <p:cNvPr id="3" name="Espaço Reservado para Conteúdo 2">
                 <a:extLst>
                   <a:ext uri="{FF2B5EF4-FFF2-40B4-BE49-F238E27FC236}">
-                    <a16:creationId xmlns:a16="http://schemas.microsoft.com/office/drawing/2014/main" id="{DDBA288E-BBB8-E157-840C-AA685AD7D65C}"/>
+                    <a16:creationId xmlns:a16="http://schemas.microsoft.com/office/drawing/2014/main" xmlns="" id="{DDBA288E-BBB8-E157-840C-AA685AD7D65C}"/>
                   </a:ext>
                 </a:extLst>
               </p:cNvPr>
@@ -19666,7 +19656,7 @@
           <p:cNvPr id="2" name="Título 1">
             <a:extLst>
               <a:ext uri="{FF2B5EF4-FFF2-40B4-BE49-F238E27FC236}">
-                <a16:creationId xmlns:a16="http://schemas.microsoft.com/office/drawing/2014/main" id="{01D0947A-594D-A8D5-95F3-38EB04C6BDB6}"/>
+                <a16:creationId xmlns:a16="http://schemas.microsoft.com/office/drawing/2014/main" xmlns="" id="{01D0947A-594D-A8D5-95F3-38EB04C6BDB6}"/>
               </a:ext>
             </a:extLst>
           </p:cNvPr>
@@ -19696,7 +19686,7 @@
               <p:cNvPr id="3" name="Espaço Reservado para Conteúdo 2">
                 <a:extLst>
                   <a:ext uri="{FF2B5EF4-FFF2-40B4-BE49-F238E27FC236}">
-                    <a16:creationId xmlns:a16="http://schemas.microsoft.com/office/drawing/2014/main" id="{DDBA288E-BBB8-E157-840C-AA685AD7D65C}"/>
+                    <a16:creationId xmlns:a16="http://schemas.microsoft.com/office/drawing/2014/main" xmlns="" id="{DDBA288E-BBB8-E157-840C-AA685AD7D65C}"/>
                   </a:ext>
                 </a:extLst>
               </p:cNvPr>
@@ -20147,7 +20137,7 @@
           <p:cNvPr id="2" name="Título 1">
             <a:extLst>
               <a:ext uri="{FF2B5EF4-FFF2-40B4-BE49-F238E27FC236}">
-                <a16:creationId xmlns:a16="http://schemas.microsoft.com/office/drawing/2014/main" id="{4A7289C7-E211-F0FB-5D03-01DCF930ACAE}"/>
+                <a16:creationId xmlns:a16="http://schemas.microsoft.com/office/drawing/2014/main" xmlns="" id="{4A7289C7-E211-F0FB-5D03-01DCF930ACAE}"/>
               </a:ext>
             </a:extLst>
           </p:cNvPr>
@@ -20177,7 +20167,7 @@
               <p:cNvPr id="3" name="Espaço Reservado para Conteúdo 2">
                 <a:extLst>
                   <a:ext uri="{FF2B5EF4-FFF2-40B4-BE49-F238E27FC236}">
-                    <a16:creationId xmlns:a16="http://schemas.microsoft.com/office/drawing/2014/main" id="{89224D24-6597-F88C-6310-B2A8EEA5142E}"/>
+                    <a16:creationId xmlns:a16="http://schemas.microsoft.com/office/drawing/2014/main" xmlns="" id="{89224D24-6597-F88C-6310-B2A8EEA5142E}"/>
                   </a:ext>
                 </a:extLst>
               </p:cNvPr>
@@ -21096,7 +21086,7 @@
           <p:cNvPr id="2" name="Título 1">
             <a:extLst>
               <a:ext uri="{FF2B5EF4-FFF2-40B4-BE49-F238E27FC236}">
-                <a16:creationId xmlns:a16="http://schemas.microsoft.com/office/drawing/2014/main" id="{E0F1FD81-6095-2AF0-8691-34E55B8A93B5}"/>
+                <a16:creationId xmlns:a16="http://schemas.microsoft.com/office/drawing/2014/main" xmlns="" id="{E0F1FD81-6095-2AF0-8691-34E55B8A93B5}"/>
               </a:ext>
             </a:extLst>
           </p:cNvPr>
@@ -21126,7 +21116,7 @@
               <p:cNvPr id="3" name="Espaço Reservado para Conteúdo 2">
                 <a:extLst>
                   <a:ext uri="{FF2B5EF4-FFF2-40B4-BE49-F238E27FC236}">
-                    <a16:creationId xmlns:a16="http://schemas.microsoft.com/office/drawing/2014/main" id="{BB734B24-DA50-860B-5D55-C33F6F451B6F}"/>
+                    <a16:creationId xmlns:a16="http://schemas.microsoft.com/office/drawing/2014/main" xmlns="" id="{BB734B24-DA50-860B-5D55-C33F6F451B6F}"/>
                   </a:ext>
                 </a:extLst>
               </p:cNvPr>
@@ -22561,7 +22551,7 @@
           <p:cNvPr id="2" name="Título 1">
             <a:extLst>
               <a:ext uri="{FF2B5EF4-FFF2-40B4-BE49-F238E27FC236}">
-                <a16:creationId xmlns:a16="http://schemas.microsoft.com/office/drawing/2014/main" id="{FC175046-E9DF-FCC8-C62B-B00332089713}"/>
+                <a16:creationId xmlns:a16="http://schemas.microsoft.com/office/drawing/2014/main" xmlns="" id="{FC175046-E9DF-FCC8-C62B-B00332089713}"/>
               </a:ext>
             </a:extLst>
           </p:cNvPr>
@@ -22591,7 +22581,7 @@
               <p:cNvPr id="3" name="Espaço Reservado para Conteúdo 2">
                 <a:extLst>
                   <a:ext uri="{FF2B5EF4-FFF2-40B4-BE49-F238E27FC236}">
-                    <a16:creationId xmlns:a16="http://schemas.microsoft.com/office/drawing/2014/main" id="{24721BB7-DBA3-D8BF-7F98-ED91BD59DAEC}"/>
+                    <a16:creationId xmlns:a16="http://schemas.microsoft.com/office/drawing/2014/main" xmlns="" id="{24721BB7-DBA3-D8BF-7F98-ED91BD59DAEC}"/>
                   </a:ext>
                 </a:extLst>
               </p:cNvPr>
@@ -23061,7 +23051,7 @@
           <p:cNvPr id="5" name="Rectangle 2">
             <a:extLst>
               <a:ext uri="{FF2B5EF4-FFF2-40B4-BE49-F238E27FC236}">
-                <a16:creationId xmlns:a16="http://schemas.microsoft.com/office/drawing/2014/main" id="{0357C04D-3666-45D0-A263-597819F48D09}"/>
+                <a16:creationId xmlns:a16="http://schemas.microsoft.com/office/drawing/2014/main" xmlns="" id="{0357C04D-3666-45D0-A263-597819F48D09}"/>
               </a:ext>
             </a:extLst>
           </p:cNvPr>
@@ -23104,7 +23094,7 @@
           <p:cNvPr id="6" name="Imagem 5">
             <a:extLst>
               <a:ext uri="{FF2B5EF4-FFF2-40B4-BE49-F238E27FC236}">
-                <a16:creationId xmlns:a16="http://schemas.microsoft.com/office/drawing/2014/main" id="{FF78CF76-EB26-3FAE-0391-E452288FA28E}"/>
+                <a16:creationId xmlns:a16="http://schemas.microsoft.com/office/drawing/2014/main" xmlns="" id="{FF78CF76-EB26-3FAE-0391-E452288FA28E}"/>
               </a:ext>
             </a:extLst>
           </p:cNvPr>
@@ -23325,7 +23315,7 @@
           <p:cNvPr id="4" name="Título 1">
             <a:extLst>
               <a:ext uri="{FF2B5EF4-FFF2-40B4-BE49-F238E27FC236}">
-                <a16:creationId xmlns:a16="http://schemas.microsoft.com/office/drawing/2014/main" id="{32666AC8-2E17-4DB4-B0F5-60C640CCFD2E}"/>
+                <a16:creationId xmlns:a16="http://schemas.microsoft.com/office/drawing/2014/main" xmlns="" id="{32666AC8-2E17-4DB4-B0F5-60C640CCFD2E}"/>
               </a:ext>
             </a:extLst>
           </p:cNvPr>
@@ -23428,8 +23418,8 @@
           </a:p>
         </p:txBody>
       </p:sp>
-      <mc:AlternateContent xmlns:mc="http://schemas.openxmlformats.org/markup-compatibility/2006">
-        <mc:Choice xmlns:a14="http://schemas.microsoft.com/office/drawing/2010/main" Requires="a14">
+      <mc:AlternateContent xmlns:mc="http://schemas.openxmlformats.org/markup-compatibility/2006" xmlns:a14="http://schemas.microsoft.com/office/drawing/2010/main">
+        <mc:Choice Requires="a14">
           <p:sp>
             <p:nvSpPr>
               <p:cNvPr id="3" name="Content Placeholder 2"/>
@@ -23556,7 +23546,7 @@
             </p:txBody>
           </p:sp>
         </mc:Choice>
-        <mc:Fallback>
+        <mc:Fallback xmlns="">
           <p:sp>
             <p:nvSpPr>
               <p:cNvPr id="3" name="Content Placeholder 2"/>
@@ -23599,7 +23589,7 @@
           <p:cNvPr id="4" name="Picture 2" descr="Ana Barros (@anathinker) | Twitter">
             <a:extLst>
               <a:ext uri="{FF2B5EF4-FFF2-40B4-BE49-F238E27FC236}">
-                <a16:creationId xmlns:a16="http://schemas.microsoft.com/office/drawing/2014/main" id="{AF3F0044-4F7D-98F6-34C1-8351487DFDAA}"/>
+                <a16:creationId xmlns:a16="http://schemas.microsoft.com/office/drawing/2014/main" xmlns="" id="{AF3F0044-4F7D-98F6-34C1-8351487DFDAA}"/>
               </a:ext>
             </a:extLst>
           </p:cNvPr>
@@ -23646,7 +23636,7 @@
           <p:cNvPr id="5" name="Picture 6" descr="Analyzing Text Classification Techniques on Youtube Data">
             <a:extLst>
               <a:ext uri="{FF2B5EF4-FFF2-40B4-BE49-F238E27FC236}">
-                <a16:creationId xmlns:a16="http://schemas.microsoft.com/office/drawing/2014/main" id="{0E6041F8-AB14-54C0-C790-0288A3AC8FBA}"/>
+                <a16:creationId xmlns:a16="http://schemas.microsoft.com/office/drawing/2014/main" xmlns="" id="{0E6041F8-AB14-54C0-C790-0288A3AC8FBA}"/>
               </a:ext>
             </a:extLst>
           </p:cNvPr>
@@ -23691,7 +23681,7 @@
           <p:cNvPr id="6" name="Picture 2" descr="Sentiment Fig 1">
             <a:extLst>
               <a:ext uri="{FF2B5EF4-FFF2-40B4-BE49-F238E27FC236}">
-                <a16:creationId xmlns:a16="http://schemas.microsoft.com/office/drawing/2014/main" id="{1E7CC96F-55AB-1482-92F6-240F8E2E0D1E}"/>
+                <a16:creationId xmlns:a16="http://schemas.microsoft.com/office/drawing/2014/main" xmlns="" id="{1E7CC96F-55AB-1482-92F6-240F8E2E0D1E}"/>
               </a:ext>
             </a:extLst>
           </p:cNvPr>
@@ -23785,8 +23775,8 @@
           </a:p>
         </p:txBody>
       </p:sp>
-      <mc:AlternateContent xmlns:mc="http://schemas.openxmlformats.org/markup-compatibility/2006">
-        <mc:Choice xmlns:a14="http://schemas.microsoft.com/office/drawing/2010/main" Requires="a14">
+      <mc:AlternateContent xmlns:mc="http://schemas.openxmlformats.org/markup-compatibility/2006" xmlns:a14="http://schemas.microsoft.com/office/drawing/2010/main">
+        <mc:Choice Requires="a14">
           <p:sp>
             <p:nvSpPr>
               <p:cNvPr id="3" name="Content Placeholder 2"/>
@@ -23859,11 +23849,7 @@
                 </a:r>
                 <a:r>
                   <a:rPr lang="pt-BR" b="1" i="1" dirty="0"/>
-                  <a:t>classificação </a:t>
-                </a:r>
-                <a:r>
-                  <a:rPr lang="pt-BR" b="1" i="1" dirty="0" err="1"/>
-                  <a:t>multiclasse</a:t>
+                  <a:t>classificação multiclasse</a:t>
                 </a:r>
                 <a:r>
                   <a:rPr lang="pt-BR" dirty="0"/>
@@ -23933,21 +23919,13 @@
                 </a:r>
                 <a:r>
                   <a:rPr lang="pt-BR" dirty="0"/>
-                  <a:t>para problemas </a:t>
-                </a:r>
-                <a:r>
-                  <a:rPr lang="pt-BR" dirty="0" err="1"/>
-                  <a:t>multiclasse</a:t>
-                </a:r>
-                <a:r>
-                  <a:rPr lang="pt-BR" dirty="0"/>
-                  <a:t>.</a:t>
+                  <a:t>para problemas multiclasse.</a:t>
                 </a:r>
               </a:p>
             </p:txBody>
           </p:sp>
         </mc:Choice>
-        <mc:Fallback>
+        <mc:Fallback xmlns="">
           <p:sp>
             <p:nvSpPr>
               <p:cNvPr id="3" name="Content Placeholder 2"/>
@@ -23990,7 +23968,7 @@
           <p:cNvPr id="7" name="Picture 2" descr="Ana Barros (@anathinker) | Twitter">
             <a:extLst>
               <a:ext uri="{FF2B5EF4-FFF2-40B4-BE49-F238E27FC236}">
-                <a16:creationId xmlns:a16="http://schemas.microsoft.com/office/drawing/2014/main" id="{A2D479C7-0684-420F-2CCD-64C3DB79FDAB}"/>
+                <a16:creationId xmlns:a16="http://schemas.microsoft.com/office/drawing/2014/main" xmlns="" id="{A2D479C7-0684-420F-2CCD-64C3DB79FDAB}"/>
               </a:ext>
             </a:extLst>
           </p:cNvPr>
@@ -24037,7 +24015,7 @@
           <p:cNvPr id="8" name="Picture 6" descr="Analyzing Text Classification Techniques on Youtube Data">
             <a:extLst>
               <a:ext uri="{FF2B5EF4-FFF2-40B4-BE49-F238E27FC236}">
-                <a16:creationId xmlns:a16="http://schemas.microsoft.com/office/drawing/2014/main" id="{A59F8A2C-ACDF-09C7-B528-9064CEF3B848}"/>
+                <a16:creationId xmlns:a16="http://schemas.microsoft.com/office/drawing/2014/main" xmlns="" id="{A59F8A2C-ACDF-09C7-B528-9064CEF3B848}"/>
               </a:ext>
             </a:extLst>
           </p:cNvPr>
@@ -24082,7 +24060,7 @@
           <p:cNvPr id="9" name="Picture 2" descr="Sentiment Fig 1">
             <a:extLst>
               <a:ext uri="{FF2B5EF4-FFF2-40B4-BE49-F238E27FC236}">
-                <a16:creationId xmlns:a16="http://schemas.microsoft.com/office/drawing/2014/main" id="{E178FF16-CC3F-C34B-6C8B-874BC4FA61A4}"/>
+                <a16:creationId xmlns:a16="http://schemas.microsoft.com/office/drawing/2014/main" xmlns="" id="{E178FF16-CC3F-C34B-6C8B-874BC4FA61A4}"/>
               </a:ext>
             </a:extLst>
           </p:cNvPr>
@@ -24159,7 +24137,7 @@
           <p:cNvPr id="2" name="Título 1">
             <a:extLst>
               <a:ext uri="{FF2B5EF4-FFF2-40B4-BE49-F238E27FC236}">
-                <a16:creationId xmlns:a16="http://schemas.microsoft.com/office/drawing/2014/main" id="{95206997-C98C-FF52-62A1-725EEA7A8A7E}"/>
+                <a16:creationId xmlns:a16="http://schemas.microsoft.com/office/drawing/2014/main" xmlns="" id="{95206997-C98C-FF52-62A1-725EEA7A8A7E}"/>
               </a:ext>
             </a:extLst>
           </p:cNvPr>
@@ -24189,7 +24167,7 @@
               <p:cNvPr id="3" name="Espaço Reservado para Conteúdo 2">
                 <a:extLst>
                   <a:ext uri="{FF2B5EF4-FFF2-40B4-BE49-F238E27FC236}">
-                    <a16:creationId xmlns:a16="http://schemas.microsoft.com/office/drawing/2014/main" id="{50B99F56-FF18-D044-7799-0502D4F6A5FB}"/>
+                    <a16:creationId xmlns:a16="http://schemas.microsoft.com/office/drawing/2014/main" xmlns="" id="{50B99F56-FF18-D044-7799-0502D4F6A5FB}"/>
                   </a:ext>
                 </a:extLst>
               </p:cNvPr>
@@ -24203,7 +24181,7 @@
             <p:spPr>
               <a:xfrm>
                 <a:off x="838200" y="1825624"/>
-                <a:ext cx="11198087" cy="5032375"/>
+                <a:ext cx="11353800" cy="5032375"/>
               </a:xfrm>
             </p:spPr>
             <p:txBody>
@@ -24240,7 +24218,15 @@
                 </a:r>
                 <a:r>
                   <a:rPr lang="pt-BR" dirty="0"/>
-                  <a:t> por classe </a:t>
+                  <a:t> </a:t>
+                </a:r>
+                <a:r>
+                  <a:rPr lang="pt-BR" b="1" dirty="0">
+                    <a:solidFill>
+                      <a:schemeClr val="accent2"/>
+                    </a:solidFill>
+                  </a:rPr>
+                  <a:t>por classe </a:t>
                 </a:r>
                 <a14:m>
                   <m:oMath xmlns:m="http://schemas.openxmlformats.org/officeDocument/2006/math">
@@ -24693,7 +24679,7 @@
               <p:cNvPr id="3" name="Espaço Reservado para Conteúdo 2">
                 <a:extLst>
                   <a:ext uri="{FF2B5EF4-FFF2-40B4-BE49-F238E27FC236}">
-                    <a16:creationId xmlns:a16="http://schemas.microsoft.com/office/drawing/2014/main" id="{50B99F56-FF18-D044-7799-0502D4F6A5FB}"/>
+                    <a16:creationId xmlns:a16="http://schemas.microsoft.com/office/drawing/2014/main" xmlns:a14="http://schemas.microsoft.com/office/drawing/2010/main" xmlns="" id="{50B99F56-FF18-D044-7799-0502D4F6A5FB}"/>
                   </a:ext>
                 </a:extLst>
               </p:cNvPr>
@@ -24707,12 +24693,12 @@
             <p:spPr>
               <a:xfrm>
                 <a:off x="838200" y="1825624"/>
-                <a:ext cx="11198087" cy="5032375"/>
+                <a:ext cx="11353800" cy="5032375"/>
               </a:xfrm>
-              <a:blipFill>
+              <a:blipFill rotWithShape="0">
                 <a:blip r:embed="rId3"/>
                 <a:stretch>
-                  <a:fillRect l="-980" t="-1937"/>
+                  <a:fillRect l="-967" t="-1937" r="-537"/>
                 </a:stretch>
               </a:blipFill>
             </p:spPr>
@@ -24721,7 +24707,7 @@
               <a:lstStyle/>
               <a:p>
                 <a:r>
-                  <a:rPr lang="en-US">
+                  <a:rPr lang="pt-BR">
                     <a:noFill/>
                   </a:rPr>
                   <a:t> </a:t>
@@ -24766,7 +24752,7 @@
           <p:cNvPr id="2" name="Título 1">
             <a:extLst>
               <a:ext uri="{FF2B5EF4-FFF2-40B4-BE49-F238E27FC236}">
-                <a16:creationId xmlns:a16="http://schemas.microsoft.com/office/drawing/2014/main" id="{40D4148F-5E93-6FF0-6B66-AC9E3B82640A}"/>
+                <a16:creationId xmlns:a16="http://schemas.microsoft.com/office/drawing/2014/main" xmlns="" id="{40D4148F-5E93-6FF0-6B66-AC9E3B82640A}"/>
               </a:ext>
             </a:extLst>
           </p:cNvPr>
@@ -24789,14 +24775,14 @@
           </a:p>
         </p:txBody>
       </p:sp>
-      <mc:AlternateContent xmlns:mc="http://schemas.openxmlformats.org/markup-compatibility/2006" xmlns:a14="http://schemas.microsoft.com/office/drawing/2010/main">
-        <mc:Choice Requires="a14">
+      <mc:AlternateContent xmlns:mc="http://schemas.openxmlformats.org/markup-compatibility/2006">
+        <mc:Choice xmlns:a14="http://schemas.microsoft.com/office/drawing/2010/main" Requires="a14">
           <p:sp>
             <p:nvSpPr>
               <p:cNvPr id="3" name="Espaço Reservado para Conteúdo 2">
                 <a:extLst>
                   <a:ext uri="{FF2B5EF4-FFF2-40B4-BE49-F238E27FC236}">
-                    <a16:creationId xmlns:a16="http://schemas.microsoft.com/office/drawing/2014/main" id="{A4787C4F-F235-6888-5AFF-2CB1361FF6FD}"/>
+                    <a16:creationId xmlns:a16="http://schemas.microsoft.com/office/drawing/2014/main" xmlns="" id="{A4787C4F-F235-6888-5AFF-2CB1361FF6FD}"/>
                   </a:ext>
                 </a:extLst>
               </p:cNvPr>
@@ -24810,7 +24796,7 @@
             <p:spPr>
               <a:xfrm>
                 <a:off x="838199" y="1825625"/>
-                <a:ext cx="11247121" cy="5032375"/>
+                <a:ext cx="11353801" cy="5032375"/>
               </a:xfrm>
             </p:spPr>
             <p:txBody>
@@ -24873,7 +24859,23 @@
                 </a:r>
                 <a:r>
                   <a:rPr lang="pt-BR" dirty="0"/>
-                  <a:t> classe, ou à classe negativa caso o exemplo pertença a qualquer uma das outras </a:t>
+                  <a:t> </a:t>
+                </a:r>
+                <a:r>
+                  <a:rPr lang="pt-BR" dirty="0" smtClean="0"/>
+                  <a:t>classe ou </a:t>
+                </a:r>
+                <a:r>
+                  <a:rPr lang="pt-BR" dirty="0" smtClean="0"/>
+                  <a:t>indicar a</a:t>
+                </a:r>
+                <a:r>
+                  <a:rPr lang="pt-BR" dirty="0" smtClean="0"/>
+                  <a:t> </a:t>
+                </a:r>
+                <a:r>
+                  <a:rPr lang="pt-BR" dirty="0"/>
+                  <a:t>classe negativa caso o exemplo pertença a qualquer uma das outras </a:t>
                 </a:r>
                 <a14:m>
                   <m:oMath xmlns:m="http://schemas.openxmlformats.org/officeDocument/2006/math">
@@ -25316,13 +25318,13 @@
             </p:txBody>
           </p:sp>
         </mc:Choice>
-        <mc:Fallback xmlns="">
+        <mc:Fallback>
           <p:sp>
             <p:nvSpPr>
               <p:cNvPr id="3" name="Espaço Reservado para Conteúdo 2">
                 <a:extLst>
                   <a:ext uri="{FF2B5EF4-FFF2-40B4-BE49-F238E27FC236}">
-                    <a16:creationId xmlns="" xmlns:a16="http://schemas.microsoft.com/office/drawing/2014/main" xmlns:a14="http://schemas.microsoft.com/office/drawing/2010/main" id="{A4787C4F-F235-6888-5AFF-2CB1361FF6FD}"/>
+                    <a16:creationId xmlns:a16="http://schemas.microsoft.com/office/drawing/2014/main" xmlns:a14="http://schemas.microsoft.com/office/drawing/2010/main" xmlns="" id="{A4787C4F-F235-6888-5AFF-2CB1361FF6FD}"/>
                   </a:ext>
                 </a:extLst>
               </p:cNvPr>
@@ -25336,12 +25338,12 @@
             <p:spPr>
               <a:xfrm>
                 <a:off x="838199" y="1825625"/>
-                <a:ext cx="11247121" cy="5032375"/>
+                <a:ext cx="11353801" cy="5032375"/>
               </a:xfrm>
               <a:blipFill rotWithShape="0">
                 <a:blip r:embed="rId3"/>
                 <a:stretch>
-                  <a:fillRect l="-921" t="-1937" r="-921"/>
+                  <a:fillRect l="-913" t="-1937"/>
                 </a:stretch>
               </a:blipFill>
             </p:spPr>
@@ -26545,7 +26547,7 @@
           <p:cNvPr id="21" name="Mais 7">
             <a:extLst>
               <a:ext uri="{FF2B5EF4-FFF2-40B4-BE49-F238E27FC236}">
-                <a16:creationId xmlns:a16="http://schemas.microsoft.com/office/drawing/2014/main" id="{7B31CAF2-5F3C-E55A-EC75-167BCE74F1F7}"/>
+                <a16:creationId xmlns:a16="http://schemas.microsoft.com/office/drawing/2014/main" xmlns="" id="{7B31CAF2-5F3C-E55A-EC75-167BCE74F1F7}"/>
               </a:ext>
             </a:extLst>
           </p:cNvPr>
@@ -26629,7 +26631,7 @@
           <p:cNvPr id="2" name="Título 1">
             <a:extLst>
               <a:ext uri="{FF2B5EF4-FFF2-40B4-BE49-F238E27FC236}">
-                <a16:creationId xmlns:a16="http://schemas.microsoft.com/office/drawing/2014/main" id="{F625D040-A3FE-41E3-3BD0-3C0548CFEAD3}"/>
+                <a16:creationId xmlns:a16="http://schemas.microsoft.com/office/drawing/2014/main" xmlns="" id="{F625D040-A3FE-41E3-3BD0-3C0548CFEAD3}"/>
               </a:ext>
             </a:extLst>
           </p:cNvPr>
@@ -26652,14 +26654,14 @@
           </a:p>
         </p:txBody>
       </p:sp>
-      <mc:AlternateContent xmlns:mc="http://schemas.openxmlformats.org/markup-compatibility/2006" xmlns:a14="http://schemas.microsoft.com/office/drawing/2010/main">
-        <mc:Choice Requires="a14">
+      <mc:AlternateContent xmlns:mc="http://schemas.openxmlformats.org/markup-compatibility/2006">
+        <mc:Choice xmlns:a14="http://schemas.microsoft.com/office/drawing/2010/main" Requires="a14">
           <p:sp>
             <p:nvSpPr>
               <p:cNvPr id="3" name="Espaço Reservado para Conteúdo 2">
                 <a:extLst>
                   <a:ext uri="{FF2B5EF4-FFF2-40B4-BE49-F238E27FC236}">
-                    <a16:creationId xmlns:a16="http://schemas.microsoft.com/office/drawing/2014/main" id="{3BAFA38F-B924-7049-765D-660ED8C4845B}"/>
+                    <a16:creationId xmlns:a16="http://schemas.microsoft.com/office/drawing/2014/main" xmlns="" id="{3BAFA38F-B924-7049-765D-660ED8C4845B}"/>
                   </a:ext>
                 </a:extLst>
               </p:cNvPr>
@@ -26673,16 +26675,60 @@
             <p:spPr>
               <a:xfrm>
                 <a:off x="838200" y="1825625"/>
-                <a:ext cx="11025554" cy="5032376"/>
+                <a:ext cx="11353800" cy="5032376"/>
               </a:xfrm>
             </p:spPr>
             <p:txBody>
-              <a:bodyPr/>
+              <a:bodyPr>
+                <a:normAutofit/>
+              </a:bodyPr>
               <a:lstStyle/>
               <a:p>
                 <a:r>
                   <a:rPr lang="pt-BR" dirty="0"/>
-                  <a:t>Nesta abordagem, treina-se </a:t>
+                  <a:t>Nesta abordagem, </a:t>
+                </a:r>
+                <a:r>
+                  <a:rPr lang="pt-BR" dirty="0" smtClean="0"/>
+                  <a:t>treina-se um classificador binário para </a:t>
+                </a:r>
+                <a:r>
+                  <a:rPr lang="pt-BR" b="1" dirty="0" smtClean="0">
+                    <a:solidFill>
+                      <a:schemeClr val="accent2"/>
+                    </a:solidFill>
+                  </a:rPr>
+                  <a:t>cada um dos possíveis </a:t>
+                </a:r>
+                <a:r>
+                  <a:rPr lang="pt-BR" b="1" dirty="0" smtClean="0">
+                    <a:solidFill>
+                      <a:srgbClr val="7030A0"/>
+                    </a:solidFill>
+                  </a:rPr>
+                  <a:t>pares</a:t>
+                </a:r>
+                <a:r>
+                  <a:rPr lang="pt-BR" b="1" dirty="0" smtClean="0">
+                    <a:solidFill>
+                      <a:schemeClr val="accent2"/>
+                    </a:solidFill>
+                  </a:rPr>
+                  <a:t> de classes (sem repetição)</a:t>
+                </a:r>
+                <a:r>
+                  <a:rPr lang="pt-BR" dirty="0" smtClean="0"/>
+                  <a:t>.</a:t>
+                </a:r>
+              </a:p>
+              <a:p>
+                <a:r>
+                  <a:rPr lang="pt-BR" dirty="0" smtClean="0"/>
+                  <a:t>Ao todo, t</a:t>
+                </a:r>
+                <a:r>
+                  <a:rPr lang="pt-BR" dirty="0" smtClean="0"/>
+                  <a:t>reina-se </a:t>
                 </a:r>
                 <a14:m>
                   <m:oMath xmlns:m="http://schemas.openxmlformats.org/officeDocument/2006/math">
@@ -26726,55 +26772,17 @@
                 </a:r>
               </a:p>
               <a:p>
-                <a:r>
-                  <a:rPr lang="pt-BR" dirty="0"/>
-                  <a:t>Cada </a:t>
-                </a:r>
-                <a:r>
-                  <a:rPr lang="pt-BR" b="1" i="1" dirty="0"/>
-                  <a:t>classificador</a:t>
-                </a:r>
-                <a:r>
-                  <a:rPr lang="pt-BR" dirty="0"/>
-                  <a:t> é treinado para classificar os exemplos pertencentes a </a:t>
-                </a:r>
-                <a:r>
-                  <a:rPr lang="pt-BR" b="1" i="1" dirty="0">
-                    <a:solidFill>
-                      <a:srgbClr val="00B050"/>
-                    </a:solidFill>
-                  </a:rPr>
-                  <a:t>cada um dos possíveis </a:t>
-                </a:r>
-                <a:r>
-                  <a:rPr lang="pt-BR" b="1" i="1" dirty="0">
-                    <a:solidFill>
-                      <a:srgbClr val="7030A0"/>
-                    </a:solidFill>
-                  </a:rPr>
-                  <a:t>pares</a:t>
-                </a:r>
-                <a:r>
-                  <a:rPr lang="pt-BR" b="1" i="1" dirty="0">
-                    <a:solidFill>
-                      <a:srgbClr val="00B050"/>
-                    </a:solidFill>
-                  </a:rPr>
-                  <a:t> de classes</a:t>
-                </a:r>
-                <a:r>
-                  <a:rPr lang="pt-BR" dirty="0"/>
-                  <a:t>.</a:t>
-                </a:r>
-              </a:p>
-              <a:p>
                 <a:pPr lvl="1">
                   <a:buFont typeface="Wingdings" panose="05000000000000000000" pitchFamily="2" charset="2"/>
                   <a:buChar char="§"/>
                 </a:pPr>
                 <a:r>
-                  <a:rPr lang="pt-BR" dirty="0"/>
-                  <a:t>Por exemplo, se </a:t>
+                  <a:rPr lang="pt-BR" dirty="0" smtClean="0"/>
+                  <a:t>Por </a:t>
+                </a:r>
+                <a:r>
+                  <a:rPr lang="pt-BR" dirty="0"/>
+                  <a:t>exemplo, se </a:t>
                 </a:r>
                 <a14:m>
                   <m:oMath xmlns:m="http://schemas.openxmlformats.org/officeDocument/2006/math">
@@ -27343,13 +27351,13 @@
             </p:txBody>
           </p:sp>
         </mc:Choice>
-        <mc:Fallback xmlns="">
+        <mc:Fallback>
           <p:sp>
             <p:nvSpPr>
               <p:cNvPr id="3" name="Espaço Reservado para Conteúdo 2">
                 <a:extLst>
                   <a:ext uri="{FF2B5EF4-FFF2-40B4-BE49-F238E27FC236}">
-                    <a16:creationId xmlns:a16="http://schemas.microsoft.com/office/drawing/2014/main" id="{3BAFA38F-B924-7049-765D-660ED8C4845B}"/>
+                    <a16:creationId xmlns:a16="http://schemas.microsoft.com/office/drawing/2014/main" xmlns:a14="http://schemas.microsoft.com/office/drawing/2010/main" xmlns="" id="{3BAFA38F-B924-7049-765D-660ED8C4845B}"/>
                   </a:ext>
                 </a:extLst>
               </p:cNvPr>
@@ -27363,12 +27371,12 @@
             <p:spPr>
               <a:xfrm>
                 <a:off x="838200" y="1825625"/>
-                <a:ext cx="11025554" cy="5032376"/>
+                <a:ext cx="11353800" cy="5032376"/>
               </a:xfrm>
-              <a:blipFill>
+              <a:blipFill rotWithShape="0">
                 <a:blip r:embed="rId3"/>
                 <a:stretch>
-                  <a:fillRect l="-996" t="-1937" r="-1881"/>
+                  <a:fillRect l="-967" t="-1937" r="-1289"/>
                 </a:stretch>
               </a:blipFill>
             </p:spPr>
@@ -27422,7 +27430,7 @@
           <p:cNvPr id="2" name="Título 1">
             <a:extLst>
               <a:ext uri="{FF2B5EF4-FFF2-40B4-BE49-F238E27FC236}">
-                <a16:creationId xmlns:a16="http://schemas.microsoft.com/office/drawing/2014/main" id="{685EDE22-7739-3353-3DBC-8480197DC616}"/>
+                <a16:creationId xmlns:a16="http://schemas.microsoft.com/office/drawing/2014/main" xmlns="" id="{685EDE22-7739-3353-3DBC-8480197DC616}"/>
               </a:ext>
             </a:extLst>
           </p:cNvPr>
@@ -27445,14 +27453,14 @@
           </a:p>
         </p:txBody>
       </p:sp>
-      <mc:AlternateContent xmlns:mc="http://schemas.openxmlformats.org/markup-compatibility/2006" xmlns:a14="http://schemas.microsoft.com/office/drawing/2010/main">
-        <mc:Choice Requires="a14">
+      <mc:AlternateContent xmlns:mc="http://schemas.openxmlformats.org/markup-compatibility/2006">
+        <mc:Choice xmlns:a14="http://schemas.microsoft.com/office/drawing/2010/main" Requires="a14">
           <p:sp>
             <p:nvSpPr>
               <p:cNvPr id="3" name="Espaço Reservado para Conteúdo 2">
                 <a:extLst>
                   <a:ext uri="{FF2B5EF4-FFF2-40B4-BE49-F238E27FC236}">
-                    <a16:creationId xmlns:a16="http://schemas.microsoft.com/office/drawing/2014/main" id="{2145CEE8-2FB2-6EEA-841B-CC93323A97A6}"/>
+                    <a16:creationId xmlns:a16="http://schemas.microsoft.com/office/drawing/2014/main" xmlns="" id="{2145CEE8-2FB2-6EEA-841B-CC93323A97A6}"/>
                   </a:ext>
                 </a:extLst>
               </p:cNvPr>
@@ -27466,7 +27474,7 @@
             <p:spPr>
               <a:xfrm>
                 <a:off x="838199" y="1825624"/>
-                <a:ext cx="11037277" cy="5032376"/>
+                <a:ext cx="11353801" cy="5032376"/>
               </a:xfrm>
             </p:spPr>
             <p:txBody>
@@ -27495,7 +27503,23 @@
                 </a:r>
                 <a:r>
                   <a:rPr lang="pt-BR" dirty="0"/>
-                  <a:t>é que cada classificador precisa ser </a:t>
+                  <a:t>é que cada classificador </a:t>
+                </a:r>
+                <a:r>
+                  <a:rPr lang="pt-BR" dirty="0" smtClean="0"/>
+                  <a:t>binário</a:t>
+                </a:r>
+                <a:r>
+                  <a:rPr lang="pt-BR" b="1" i="1" dirty="0" smtClean="0"/>
+                  <a:t> </a:t>
+                </a:r>
+                <a:r>
+                  <a:rPr lang="pt-BR" dirty="0" smtClean="0"/>
+                  <a:t>precisa </a:t>
+                </a:r>
+                <a:r>
+                  <a:rPr lang="pt-BR" dirty="0"/>
+                  <a:t>ser </a:t>
                 </a:r>
                 <a:r>
                   <a:rPr lang="pt-BR" b="1" i="1" dirty="0">
@@ -27533,7 +27557,23 @@
                       <a:srgbClr val="00B050"/>
                     </a:solidFill>
                   </a:rPr>
-                  <a:t>tempo de treinamento de cada classificador também é menor</a:t>
+                  <a:t>tempo de treinamento de cada classificador </a:t>
+                </a:r>
+                <a:r>
+                  <a:rPr lang="pt-BR" b="1" i="1" dirty="0" smtClean="0">
+                    <a:solidFill>
+                      <a:srgbClr val="00B050"/>
+                    </a:solidFill>
+                  </a:rPr>
+                  <a:t>também </a:t>
+                </a:r>
+                <a:r>
+                  <a:rPr lang="pt-BR" b="1" i="1" dirty="0">
+                    <a:solidFill>
+                      <a:srgbClr val="00B050"/>
+                    </a:solidFill>
+                  </a:rPr>
+                  <a:t>é menor</a:t>
                 </a:r>
                 <a:r>
                   <a:rPr lang="pt-BR" dirty="0"/>
@@ -27555,7 +27595,68 @@
                 </a:r>
                 <a:r>
                   <a:rPr lang="pt-BR" dirty="0"/>
-                  <a:t> é que, por exemplo, se </a:t>
+                  <a:t> é que, </a:t>
+                </a:r>
+                <a:r>
+                  <a:rPr lang="pt-BR" dirty="0" smtClean="0"/>
+                  <a:t>quanto maior o número de classes </a:t>
+                </a:r>
+                <a14:m>
+                  <m:oMath xmlns:m="http://schemas.openxmlformats.org/officeDocument/2006/math">
+                    <m:r>
+                      <a:rPr lang="pt-BR" i="1">
+                        <a:latin typeface="Cambria Math" panose="02040503050406030204" pitchFamily="18" charset="0"/>
+                      </a:rPr>
+                      <m:t>𝑄</m:t>
+                    </m:r>
+                  </m:oMath>
+                </a14:m>
+                <a:r>
+                  <a:rPr lang="pt-BR" dirty="0" smtClean="0"/>
+                  <a:t>, </a:t>
+                </a:r>
+                <a:r>
+                  <a:rPr lang="pt-BR" dirty="0"/>
+                  <a:t>maior </a:t>
+                </a:r>
+                <a:r>
+                  <a:rPr lang="pt-BR" dirty="0" smtClean="0"/>
+                  <a:t>pode ser o </a:t>
+                </a:r>
+                <a:r>
+                  <a:rPr lang="pt-BR" b="1" i="1" dirty="0">
+                    <a:solidFill>
+                      <a:srgbClr val="FF0000"/>
+                    </a:solidFill>
+                  </a:rPr>
+                  <a:t>tempo total de </a:t>
+                </a:r>
+                <a:r>
+                  <a:rPr lang="pt-BR" b="1" i="1" dirty="0" smtClean="0">
+                    <a:solidFill>
+                      <a:srgbClr val="FF0000"/>
+                    </a:solidFill>
+                  </a:rPr>
+                  <a:t>treinamento</a:t>
+                </a:r>
+                <a:r>
+                  <a:rPr lang="pt-BR" dirty="0" smtClean="0"/>
+                  <a:t>.</a:t>
+                </a:r>
+                <a:endParaRPr lang="pt-BR" dirty="0"/>
+              </a:p>
+              <a:p>
+                <a:pPr lvl="1">
+                  <a:buFont typeface="Wingdings" panose="05000000000000000000" pitchFamily="2" charset="2"/>
+                  <a:buChar char="§"/>
+                </a:pPr>
+                <a:r>
+                  <a:rPr lang="pt-BR" dirty="0" smtClean="0"/>
+                  <a:t>Por </a:t>
+                </a:r>
+                <a:r>
+                  <a:rPr lang="pt-BR" dirty="0"/>
+                  <a:t>exemplo, se </a:t>
                 </a:r>
                 <a14:m>
                   <m:oMath xmlns:m="http://schemas.openxmlformats.org/officeDocument/2006/math">
@@ -27575,37 +27676,24 @@
                 </a14:m>
                 <a:r>
                   <a:rPr lang="pt-BR" dirty="0"/>
-                  <a:t>, temos que treinar 45 classificadores.</a:t>
-                </a:r>
-              </a:p>
-              <a:p>
-                <a:r>
-                  <a:rPr lang="pt-BR" dirty="0"/>
-                  <a:t>Consequentemente, o </a:t>
-                </a:r>
-                <a:r>
-                  <a:rPr lang="pt-BR" b="1" i="1" dirty="0">
-                    <a:solidFill>
-                      <a:srgbClr val="FF0000"/>
-                    </a:solidFill>
-                  </a:rPr>
-                  <a:t>tempo total de treinamento pode ser alto</a:t>
-                </a:r>
-                <a:r>
-                  <a:rPr lang="pt-BR" dirty="0"/>
+                  <a:t>, temos que treinar 45 classificadores</a:t>
+                </a:r>
+                <a:r>
+                  <a:rPr lang="pt-BR" dirty="0" smtClean="0"/>
                   <a:t>.</a:t>
                 </a:r>
+                <a:endParaRPr lang="pt-BR" dirty="0"/>
               </a:p>
             </p:txBody>
           </p:sp>
         </mc:Choice>
-        <mc:Fallback xmlns="">
+        <mc:Fallback>
           <p:sp>
             <p:nvSpPr>
               <p:cNvPr id="3" name="Espaço Reservado para Conteúdo 2">
                 <a:extLst>
                   <a:ext uri="{FF2B5EF4-FFF2-40B4-BE49-F238E27FC236}">
-                    <a16:creationId xmlns:a16="http://schemas.microsoft.com/office/drawing/2014/main" id="{2145CEE8-2FB2-6EEA-841B-CC93323A97A6}"/>
+                    <a16:creationId xmlns:a16="http://schemas.microsoft.com/office/drawing/2014/main" xmlns:a14="http://schemas.microsoft.com/office/drawing/2010/main" xmlns="" id="{2145CEE8-2FB2-6EEA-841B-CC93323A97A6}"/>
                   </a:ext>
                 </a:extLst>
               </p:cNvPr>
@@ -27619,12 +27707,12 @@
             <p:spPr>
               <a:xfrm>
                 <a:off x="838199" y="1825624"/>
-                <a:ext cx="11037277" cy="5032376"/>
+                <a:ext cx="11353801" cy="5032376"/>
               </a:xfrm>
-              <a:blipFill>
+              <a:blipFill rotWithShape="0">
                 <a:blip r:embed="rId3"/>
                 <a:stretch>
-                  <a:fillRect l="-939" t="-1937"/>
+                  <a:fillRect l="-913" t="-1937"/>
                 </a:stretch>
               </a:blipFill>
             </p:spPr>
@@ -27653,6 +27741,13 @@
   <p:clrMapOvr>
     <a:masterClrMapping/>
   </p:clrMapOvr>
+  <p:timing>
+    <p:tnLst>
+      <p:par>
+        <p:cTn id="1" dur="indefinite" restart="never" nodeType="tmRoot"/>
+      </p:par>
+    </p:tnLst>
+  </p:timing>
 </p:sld>
 </file>
 

--- a/slides/T320_Classificação (Parte IV).pptx
+++ b/slides/T320_Classificação (Parte IV).pptx
@@ -302,7 +302,7 @@
           <a:p>
             <a:fld id="{144F1436-6906-4D93-B7A2-786C327BFA14}" type="datetimeFigureOut">
               <a:rPr lang="nl-BE" smtClean="0"/>
-              <a:t>20/03/2026</a:t>
+              <a:t>21/03/2026</a:t>
             </a:fld>
             <a:endParaRPr lang="nl-BE"/>
           </a:p>
@@ -467,7 +467,7 @@
           <a:p>
             <a:fld id="{AA8CD09E-2914-4F47-B6C1-51B2C31814C9}" type="datetimeFigureOut">
               <a:rPr lang="pt-BR" smtClean="0"/>
-              <a:t>20/03/2026</a:t>
+              <a:t>21/03/2026</a:t>
             </a:fld>
             <a:endParaRPr lang="pt-BR"/>
           </a:p>
@@ -6419,7 +6419,7 @@
           <p:cNvPr id="2" name="Título 1">
             <a:extLst>
               <a:ext uri="{FF2B5EF4-FFF2-40B4-BE49-F238E27FC236}">
-                <a16:creationId xmlns="" xmlns:a16="http://schemas.microsoft.com/office/drawing/2014/main" id="{1DB9B4FF-B06E-403C-A326-BDC64D8FF94E}"/>
+                <a16:creationId xmlns:a16="http://schemas.microsoft.com/office/drawing/2014/main" xmlns="" id="{1DB9B4FF-B06E-403C-A326-BDC64D8FF94E}"/>
               </a:ext>
             </a:extLst>
           </p:cNvPr>
@@ -6456,7 +6456,7 @@
           <p:cNvPr id="3" name="Subtítulo 2">
             <a:extLst>
               <a:ext uri="{FF2B5EF4-FFF2-40B4-BE49-F238E27FC236}">
-                <a16:creationId xmlns="" xmlns:a16="http://schemas.microsoft.com/office/drawing/2014/main" id="{247BDFCE-746E-45BF-A319-4733D58D1632}"/>
+                <a16:creationId xmlns:a16="http://schemas.microsoft.com/office/drawing/2014/main" xmlns="" id="{247BDFCE-746E-45BF-A319-4733D58D1632}"/>
               </a:ext>
             </a:extLst>
           </p:cNvPr>
@@ -6526,7 +6526,7 @@
           <p:cNvPr id="4" name="Espaço Reservado para Data 3">
             <a:extLst>
               <a:ext uri="{FF2B5EF4-FFF2-40B4-BE49-F238E27FC236}">
-                <a16:creationId xmlns="" xmlns:a16="http://schemas.microsoft.com/office/drawing/2014/main" id="{9EDE2778-5372-4104-B96D-968184DA8288}"/>
+                <a16:creationId xmlns:a16="http://schemas.microsoft.com/office/drawing/2014/main" xmlns="" id="{9EDE2778-5372-4104-B96D-968184DA8288}"/>
               </a:ext>
             </a:extLst>
           </p:cNvPr>
@@ -6544,7 +6544,7 @@
           <a:p>
             <a:fld id="{63289F7E-B80B-496E-81B4-D396C37C9454}" type="datetimeFigureOut">
               <a:rPr lang="pt-BR" smtClean="0"/>
-              <a:t>20/03/2026</a:t>
+              <a:t>21/03/2026</a:t>
             </a:fld>
             <a:endParaRPr lang="pt-BR"/>
           </a:p>
@@ -6555,7 +6555,7 @@
           <p:cNvPr id="5" name="Espaço Reservado para Rodapé 4">
             <a:extLst>
               <a:ext uri="{FF2B5EF4-FFF2-40B4-BE49-F238E27FC236}">
-                <a16:creationId xmlns="" xmlns:a16="http://schemas.microsoft.com/office/drawing/2014/main" id="{C1DD0F41-C861-4051-988D-3024A37A4B93}"/>
+                <a16:creationId xmlns:a16="http://schemas.microsoft.com/office/drawing/2014/main" xmlns="" id="{C1DD0F41-C861-4051-988D-3024A37A4B93}"/>
               </a:ext>
             </a:extLst>
           </p:cNvPr>
@@ -6580,7 +6580,7 @@
           <p:cNvPr id="6" name="Espaço Reservado para Número de Slide 5">
             <a:extLst>
               <a:ext uri="{FF2B5EF4-FFF2-40B4-BE49-F238E27FC236}">
-                <a16:creationId xmlns="" xmlns:a16="http://schemas.microsoft.com/office/drawing/2014/main" id="{07E5967E-D980-431A-A5DB-3F0C5030A81E}"/>
+                <a16:creationId xmlns:a16="http://schemas.microsoft.com/office/drawing/2014/main" xmlns="" id="{07E5967E-D980-431A-A5DB-3F0C5030A81E}"/>
               </a:ext>
             </a:extLst>
           </p:cNvPr>
@@ -6639,7 +6639,7 @@
           <p:cNvPr id="2" name="Título 1">
             <a:extLst>
               <a:ext uri="{FF2B5EF4-FFF2-40B4-BE49-F238E27FC236}">
-                <a16:creationId xmlns="" xmlns:a16="http://schemas.microsoft.com/office/drawing/2014/main" id="{9036C49F-3E68-4175-81BA-3C3FEE44308A}"/>
+                <a16:creationId xmlns:a16="http://schemas.microsoft.com/office/drawing/2014/main" xmlns="" id="{9036C49F-3E68-4175-81BA-3C3FEE44308A}"/>
               </a:ext>
             </a:extLst>
           </p:cNvPr>
@@ -6667,7 +6667,7 @@
           <p:cNvPr id="3" name="Espaço Reservado para Texto Vertical 2">
             <a:extLst>
               <a:ext uri="{FF2B5EF4-FFF2-40B4-BE49-F238E27FC236}">
-                <a16:creationId xmlns="" xmlns:a16="http://schemas.microsoft.com/office/drawing/2014/main" id="{426FA736-3DD3-4D4E-B57B-BBE1D8F7D424}"/>
+                <a16:creationId xmlns:a16="http://schemas.microsoft.com/office/drawing/2014/main" xmlns="" id="{426FA736-3DD3-4D4E-B57B-BBE1D8F7D424}"/>
               </a:ext>
             </a:extLst>
           </p:cNvPr>
@@ -6724,7 +6724,7 @@
           <p:cNvPr id="4" name="Espaço Reservado para Data 3">
             <a:extLst>
               <a:ext uri="{FF2B5EF4-FFF2-40B4-BE49-F238E27FC236}">
-                <a16:creationId xmlns="" xmlns:a16="http://schemas.microsoft.com/office/drawing/2014/main" id="{99E8855C-D8FD-48F6-B14E-861E0DE4D915}"/>
+                <a16:creationId xmlns:a16="http://schemas.microsoft.com/office/drawing/2014/main" xmlns="" id="{99E8855C-D8FD-48F6-B14E-861E0DE4D915}"/>
               </a:ext>
             </a:extLst>
           </p:cNvPr>
@@ -6742,7 +6742,7 @@
           <a:p>
             <a:fld id="{63289F7E-B80B-496E-81B4-D396C37C9454}" type="datetimeFigureOut">
               <a:rPr lang="pt-BR" smtClean="0"/>
-              <a:t>20/03/2026</a:t>
+              <a:t>21/03/2026</a:t>
             </a:fld>
             <a:endParaRPr lang="pt-BR"/>
           </a:p>
@@ -6753,7 +6753,7 @@
           <p:cNvPr id="5" name="Espaço Reservado para Rodapé 4">
             <a:extLst>
               <a:ext uri="{FF2B5EF4-FFF2-40B4-BE49-F238E27FC236}">
-                <a16:creationId xmlns="" xmlns:a16="http://schemas.microsoft.com/office/drawing/2014/main" id="{97C0BB88-2F21-42A5-ACFF-83DA47F2D340}"/>
+                <a16:creationId xmlns:a16="http://schemas.microsoft.com/office/drawing/2014/main" xmlns="" id="{97C0BB88-2F21-42A5-ACFF-83DA47F2D340}"/>
               </a:ext>
             </a:extLst>
           </p:cNvPr>
@@ -6778,7 +6778,7 @@
           <p:cNvPr id="6" name="Espaço Reservado para Número de Slide 5">
             <a:extLst>
               <a:ext uri="{FF2B5EF4-FFF2-40B4-BE49-F238E27FC236}">
-                <a16:creationId xmlns="" xmlns:a16="http://schemas.microsoft.com/office/drawing/2014/main" id="{6CB462B3-1F22-4C05-B4B8-7A279FB7D5E9}"/>
+                <a16:creationId xmlns:a16="http://schemas.microsoft.com/office/drawing/2014/main" xmlns="" id="{6CB462B3-1F22-4C05-B4B8-7A279FB7D5E9}"/>
               </a:ext>
             </a:extLst>
           </p:cNvPr>
@@ -6837,7 +6837,7 @@
           <p:cNvPr id="2" name="Título Vertical 1">
             <a:extLst>
               <a:ext uri="{FF2B5EF4-FFF2-40B4-BE49-F238E27FC236}">
-                <a16:creationId xmlns="" xmlns:a16="http://schemas.microsoft.com/office/drawing/2014/main" id="{EAEAB728-701C-4207-A9D5-23FF45C60502}"/>
+                <a16:creationId xmlns:a16="http://schemas.microsoft.com/office/drawing/2014/main" xmlns="" id="{EAEAB728-701C-4207-A9D5-23FF45C60502}"/>
               </a:ext>
             </a:extLst>
           </p:cNvPr>
@@ -6870,7 +6870,7 @@
           <p:cNvPr id="3" name="Espaço Reservado para Texto Vertical 2">
             <a:extLst>
               <a:ext uri="{FF2B5EF4-FFF2-40B4-BE49-F238E27FC236}">
-                <a16:creationId xmlns="" xmlns:a16="http://schemas.microsoft.com/office/drawing/2014/main" id="{BA8C8CCF-7823-480A-9A19-0F664DD17E3B}"/>
+                <a16:creationId xmlns:a16="http://schemas.microsoft.com/office/drawing/2014/main" xmlns="" id="{BA8C8CCF-7823-480A-9A19-0F664DD17E3B}"/>
               </a:ext>
             </a:extLst>
           </p:cNvPr>
@@ -6932,7 +6932,7 @@
           <p:cNvPr id="4" name="Espaço Reservado para Data 3">
             <a:extLst>
               <a:ext uri="{FF2B5EF4-FFF2-40B4-BE49-F238E27FC236}">
-                <a16:creationId xmlns="" xmlns:a16="http://schemas.microsoft.com/office/drawing/2014/main" id="{721D5734-7B1F-425D-942F-6EB73344027C}"/>
+                <a16:creationId xmlns:a16="http://schemas.microsoft.com/office/drawing/2014/main" xmlns="" id="{721D5734-7B1F-425D-942F-6EB73344027C}"/>
               </a:ext>
             </a:extLst>
           </p:cNvPr>
@@ -6950,7 +6950,7 @@
           <a:p>
             <a:fld id="{63289F7E-B80B-496E-81B4-D396C37C9454}" type="datetimeFigureOut">
               <a:rPr lang="pt-BR" smtClean="0"/>
-              <a:t>20/03/2026</a:t>
+              <a:t>21/03/2026</a:t>
             </a:fld>
             <a:endParaRPr lang="pt-BR"/>
           </a:p>
@@ -6961,7 +6961,7 @@
           <p:cNvPr id="5" name="Espaço Reservado para Rodapé 4">
             <a:extLst>
               <a:ext uri="{FF2B5EF4-FFF2-40B4-BE49-F238E27FC236}">
-                <a16:creationId xmlns="" xmlns:a16="http://schemas.microsoft.com/office/drawing/2014/main" id="{1E1AAEAC-F08D-45FE-89EC-B1B349A868C9}"/>
+                <a16:creationId xmlns:a16="http://schemas.microsoft.com/office/drawing/2014/main" xmlns="" id="{1E1AAEAC-F08D-45FE-89EC-B1B349A868C9}"/>
               </a:ext>
             </a:extLst>
           </p:cNvPr>
@@ -6986,7 +6986,7 @@
           <p:cNvPr id="6" name="Espaço Reservado para Número de Slide 5">
             <a:extLst>
               <a:ext uri="{FF2B5EF4-FFF2-40B4-BE49-F238E27FC236}">
-                <a16:creationId xmlns="" xmlns:a16="http://schemas.microsoft.com/office/drawing/2014/main" id="{BAA44493-9911-47B2-87A6-C2141A972BC8}"/>
+                <a16:creationId xmlns:a16="http://schemas.microsoft.com/office/drawing/2014/main" xmlns="" id="{BAA44493-9911-47B2-87A6-C2141A972BC8}"/>
               </a:ext>
             </a:extLst>
           </p:cNvPr>
@@ -7045,7 +7045,7 @@
           <p:cNvPr id="2" name="Título 1">
             <a:extLst>
               <a:ext uri="{FF2B5EF4-FFF2-40B4-BE49-F238E27FC236}">
-                <a16:creationId xmlns="" xmlns:a16="http://schemas.microsoft.com/office/drawing/2014/main" id="{71BD44A5-8F21-4626-A01D-48A1C874B1D5}"/>
+                <a16:creationId xmlns:a16="http://schemas.microsoft.com/office/drawing/2014/main" xmlns="" id="{71BD44A5-8F21-4626-A01D-48A1C874B1D5}"/>
               </a:ext>
             </a:extLst>
           </p:cNvPr>
@@ -7073,7 +7073,7 @@
           <p:cNvPr id="3" name="Espaço Reservado para Conteúdo 2">
             <a:extLst>
               <a:ext uri="{FF2B5EF4-FFF2-40B4-BE49-F238E27FC236}">
-                <a16:creationId xmlns="" xmlns:a16="http://schemas.microsoft.com/office/drawing/2014/main" id="{B79E8085-65A9-48AA-951D-71D978BFF4ED}"/>
+                <a16:creationId xmlns:a16="http://schemas.microsoft.com/office/drawing/2014/main" xmlns="" id="{B79E8085-65A9-48AA-951D-71D978BFF4ED}"/>
               </a:ext>
             </a:extLst>
           </p:cNvPr>
@@ -7130,7 +7130,7 @@
           <p:cNvPr id="4" name="Espaço Reservado para Data 3">
             <a:extLst>
               <a:ext uri="{FF2B5EF4-FFF2-40B4-BE49-F238E27FC236}">
-                <a16:creationId xmlns="" xmlns:a16="http://schemas.microsoft.com/office/drawing/2014/main" id="{F05BE1AF-51EA-425D-B188-DE7BD675009F}"/>
+                <a16:creationId xmlns:a16="http://schemas.microsoft.com/office/drawing/2014/main" xmlns="" id="{F05BE1AF-51EA-425D-B188-DE7BD675009F}"/>
               </a:ext>
             </a:extLst>
           </p:cNvPr>
@@ -7148,7 +7148,7 @@
           <a:p>
             <a:fld id="{63289F7E-B80B-496E-81B4-D396C37C9454}" type="datetimeFigureOut">
               <a:rPr lang="pt-BR" smtClean="0"/>
-              <a:t>20/03/2026</a:t>
+              <a:t>21/03/2026</a:t>
             </a:fld>
             <a:endParaRPr lang="pt-BR"/>
           </a:p>
@@ -7159,7 +7159,7 @@
           <p:cNvPr id="5" name="Espaço Reservado para Rodapé 4">
             <a:extLst>
               <a:ext uri="{FF2B5EF4-FFF2-40B4-BE49-F238E27FC236}">
-                <a16:creationId xmlns="" xmlns:a16="http://schemas.microsoft.com/office/drawing/2014/main" id="{121BE632-29CF-4CB9-B365-C9EF38F89BE6}"/>
+                <a16:creationId xmlns:a16="http://schemas.microsoft.com/office/drawing/2014/main" xmlns="" id="{121BE632-29CF-4CB9-B365-C9EF38F89BE6}"/>
               </a:ext>
             </a:extLst>
           </p:cNvPr>
@@ -7184,7 +7184,7 @@
           <p:cNvPr id="6" name="Espaço Reservado para Número de Slide 5">
             <a:extLst>
               <a:ext uri="{FF2B5EF4-FFF2-40B4-BE49-F238E27FC236}">
-                <a16:creationId xmlns="" xmlns:a16="http://schemas.microsoft.com/office/drawing/2014/main" id="{60CF3DD1-9AEC-4A57-B461-4E4DD86FAC18}"/>
+                <a16:creationId xmlns:a16="http://schemas.microsoft.com/office/drawing/2014/main" xmlns="" id="{60CF3DD1-9AEC-4A57-B461-4E4DD86FAC18}"/>
               </a:ext>
             </a:extLst>
           </p:cNvPr>
@@ -7243,7 +7243,7 @@
           <p:cNvPr id="2" name="Título 1">
             <a:extLst>
               <a:ext uri="{FF2B5EF4-FFF2-40B4-BE49-F238E27FC236}">
-                <a16:creationId xmlns="" xmlns:a16="http://schemas.microsoft.com/office/drawing/2014/main" id="{34AB2FF0-A4D7-4E28-991D-FF26140D5988}"/>
+                <a16:creationId xmlns:a16="http://schemas.microsoft.com/office/drawing/2014/main" xmlns="" id="{34AB2FF0-A4D7-4E28-991D-FF26140D5988}"/>
               </a:ext>
             </a:extLst>
           </p:cNvPr>
@@ -7280,7 +7280,7 @@
           <p:cNvPr id="3" name="Espaço Reservado para Texto 2">
             <a:extLst>
               <a:ext uri="{FF2B5EF4-FFF2-40B4-BE49-F238E27FC236}">
-                <a16:creationId xmlns="" xmlns:a16="http://schemas.microsoft.com/office/drawing/2014/main" id="{E2AC45B0-4145-40DB-8E61-105461170604}"/>
+                <a16:creationId xmlns:a16="http://schemas.microsoft.com/office/drawing/2014/main" xmlns="" id="{E2AC45B0-4145-40DB-8E61-105461170604}"/>
               </a:ext>
             </a:extLst>
           </p:cNvPr>
@@ -7405,7 +7405,7 @@
           <p:cNvPr id="4" name="Espaço Reservado para Data 3">
             <a:extLst>
               <a:ext uri="{FF2B5EF4-FFF2-40B4-BE49-F238E27FC236}">
-                <a16:creationId xmlns="" xmlns:a16="http://schemas.microsoft.com/office/drawing/2014/main" id="{50F1D3FB-740A-4EBA-A309-2CE71D12ECFB}"/>
+                <a16:creationId xmlns:a16="http://schemas.microsoft.com/office/drawing/2014/main" xmlns="" id="{50F1D3FB-740A-4EBA-A309-2CE71D12ECFB}"/>
               </a:ext>
             </a:extLst>
           </p:cNvPr>
@@ -7423,7 +7423,7 @@
           <a:p>
             <a:fld id="{63289F7E-B80B-496E-81B4-D396C37C9454}" type="datetimeFigureOut">
               <a:rPr lang="pt-BR" smtClean="0"/>
-              <a:t>20/03/2026</a:t>
+              <a:t>21/03/2026</a:t>
             </a:fld>
             <a:endParaRPr lang="pt-BR"/>
           </a:p>
@@ -7434,7 +7434,7 @@
           <p:cNvPr id="5" name="Espaço Reservado para Rodapé 4">
             <a:extLst>
               <a:ext uri="{FF2B5EF4-FFF2-40B4-BE49-F238E27FC236}">
-                <a16:creationId xmlns="" xmlns:a16="http://schemas.microsoft.com/office/drawing/2014/main" id="{BDCAB18F-8715-4465-A940-F9C193A2ACE9}"/>
+                <a16:creationId xmlns:a16="http://schemas.microsoft.com/office/drawing/2014/main" xmlns="" id="{BDCAB18F-8715-4465-A940-F9C193A2ACE9}"/>
               </a:ext>
             </a:extLst>
           </p:cNvPr>
@@ -7459,7 +7459,7 @@
           <p:cNvPr id="6" name="Espaço Reservado para Número de Slide 5">
             <a:extLst>
               <a:ext uri="{FF2B5EF4-FFF2-40B4-BE49-F238E27FC236}">
-                <a16:creationId xmlns="" xmlns:a16="http://schemas.microsoft.com/office/drawing/2014/main" id="{353466C6-8248-429F-8056-FF040BF509EB}"/>
+                <a16:creationId xmlns:a16="http://schemas.microsoft.com/office/drawing/2014/main" xmlns="" id="{353466C6-8248-429F-8056-FF040BF509EB}"/>
               </a:ext>
             </a:extLst>
           </p:cNvPr>
@@ -7518,7 +7518,7 @@
           <p:cNvPr id="2" name="Título 1">
             <a:extLst>
               <a:ext uri="{FF2B5EF4-FFF2-40B4-BE49-F238E27FC236}">
-                <a16:creationId xmlns="" xmlns:a16="http://schemas.microsoft.com/office/drawing/2014/main" id="{BC7BB9F0-F14B-4A91-B2B7-35BC47FE4DE7}"/>
+                <a16:creationId xmlns:a16="http://schemas.microsoft.com/office/drawing/2014/main" xmlns="" id="{BC7BB9F0-F14B-4A91-B2B7-35BC47FE4DE7}"/>
               </a:ext>
             </a:extLst>
           </p:cNvPr>
@@ -7546,7 +7546,7 @@
           <p:cNvPr id="3" name="Espaço Reservado para Conteúdo 2">
             <a:extLst>
               <a:ext uri="{FF2B5EF4-FFF2-40B4-BE49-F238E27FC236}">
-                <a16:creationId xmlns="" xmlns:a16="http://schemas.microsoft.com/office/drawing/2014/main" id="{EC1FC1C4-73DA-47A6-8496-B0B457F7D39A}"/>
+                <a16:creationId xmlns:a16="http://schemas.microsoft.com/office/drawing/2014/main" xmlns="" id="{EC1FC1C4-73DA-47A6-8496-B0B457F7D39A}"/>
               </a:ext>
             </a:extLst>
           </p:cNvPr>
@@ -7608,7 +7608,7 @@
           <p:cNvPr id="4" name="Espaço Reservado para Conteúdo 3">
             <a:extLst>
               <a:ext uri="{FF2B5EF4-FFF2-40B4-BE49-F238E27FC236}">
-                <a16:creationId xmlns="" xmlns:a16="http://schemas.microsoft.com/office/drawing/2014/main" id="{E92F06A8-A449-4D92-9912-76873E529B38}"/>
+                <a16:creationId xmlns:a16="http://schemas.microsoft.com/office/drawing/2014/main" xmlns="" id="{E92F06A8-A449-4D92-9912-76873E529B38}"/>
               </a:ext>
             </a:extLst>
           </p:cNvPr>
@@ -7670,7 +7670,7 @@
           <p:cNvPr id="5" name="Espaço Reservado para Data 4">
             <a:extLst>
               <a:ext uri="{FF2B5EF4-FFF2-40B4-BE49-F238E27FC236}">
-                <a16:creationId xmlns="" xmlns:a16="http://schemas.microsoft.com/office/drawing/2014/main" id="{938070A4-BC2F-4D55-BD8D-DEAF11BB9EE9}"/>
+                <a16:creationId xmlns:a16="http://schemas.microsoft.com/office/drawing/2014/main" xmlns="" id="{938070A4-BC2F-4D55-BD8D-DEAF11BB9EE9}"/>
               </a:ext>
             </a:extLst>
           </p:cNvPr>
@@ -7688,7 +7688,7 @@
           <a:p>
             <a:fld id="{63289F7E-B80B-496E-81B4-D396C37C9454}" type="datetimeFigureOut">
               <a:rPr lang="pt-BR" smtClean="0"/>
-              <a:t>20/03/2026</a:t>
+              <a:t>21/03/2026</a:t>
             </a:fld>
             <a:endParaRPr lang="pt-BR"/>
           </a:p>
@@ -7699,7 +7699,7 @@
           <p:cNvPr id="6" name="Espaço Reservado para Rodapé 5">
             <a:extLst>
               <a:ext uri="{FF2B5EF4-FFF2-40B4-BE49-F238E27FC236}">
-                <a16:creationId xmlns="" xmlns:a16="http://schemas.microsoft.com/office/drawing/2014/main" id="{45CC2DB8-844A-465F-BA9A-7734C80C7F43}"/>
+                <a16:creationId xmlns:a16="http://schemas.microsoft.com/office/drawing/2014/main" xmlns="" id="{45CC2DB8-844A-465F-BA9A-7734C80C7F43}"/>
               </a:ext>
             </a:extLst>
           </p:cNvPr>
@@ -7724,7 +7724,7 @@
           <p:cNvPr id="7" name="Espaço Reservado para Número de Slide 6">
             <a:extLst>
               <a:ext uri="{FF2B5EF4-FFF2-40B4-BE49-F238E27FC236}">
-                <a16:creationId xmlns="" xmlns:a16="http://schemas.microsoft.com/office/drawing/2014/main" id="{4CC606A8-097B-4040-94E0-CD8C88280D8F}"/>
+                <a16:creationId xmlns:a16="http://schemas.microsoft.com/office/drawing/2014/main" xmlns="" id="{4CC606A8-097B-4040-94E0-CD8C88280D8F}"/>
               </a:ext>
             </a:extLst>
           </p:cNvPr>
@@ -7783,7 +7783,7 @@
           <p:cNvPr id="2" name="Título 1">
             <a:extLst>
               <a:ext uri="{FF2B5EF4-FFF2-40B4-BE49-F238E27FC236}">
-                <a16:creationId xmlns="" xmlns:a16="http://schemas.microsoft.com/office/drawing/2014/main" id="{76D66686-0143-4CB6-8C09-BA326F1E7ACA}"/>
+                <a16:creationId xmlns:a16="http://schemas.microsoft.com/office/drawing/2014/main" xmlns="" id="{76D66686-0143-4CB6-8C09-BA326F1E7ACA}"/>
               </a:ext>
             </a:extLst>
           </p:cNvPr>
@@ -7816,7 +7816,7 @@
           <p:cNvPr id="3" name="Espaço Reservado para Texto 2">
             <a:extLst>
               <a:ext uri="{FF2B5EF4-FFF2-40B4-BE49-F238E27FC236}">
-                <a16:creationId xmlns="" xmlns:a16="http://schemas.microsoft.com/office/drawing/2014/main" id="{0227AB85-F59E-4BCE-B846-4FA0992C2F23}"/>
+                <a16:creationId xmlns:a16="http://schemas.microsoft.com/office/drawing/2014/main" xmlns="" id="{0227AB85-F59E-4BCE-B846-4FA0992C2F23}"/>
               </a:ext>
             </a:extLst>
           </p:cNvPr>
@@ -7887,7 +7887,7 @@
           <p:cNvPr id="4" name="Espaço Reservado para Conteúdo 3">
             <a:extLst>
               <a:ext uri="{FF2B5EF4-FFF2-40B4-BE49-F238E27FC236}">
-                <a16:creationId xmlns="" xmlns:a16="http://schemas.microsoft.com/office/drawing/2014/main" id="{3373456C-7319-4D0A-827D-D29F6B083F5D}"/>
+                <a16:creationId xmlns:a16="http://schemas.microsoft.com/office/drawing/2014/main" xmlns="" id="{3373456C-7319-4D0A-827D-D29F6B083F5D}"/>
               </a:ext>
             </a:extLst>
           </p:cNvPr>
@@ -7949,7 +7949,7 @@
           <p:cNvPr id="5" name="Espaço Reservado para Texto 4">
             <a:extLst>
               <a:ext uri="{FF2B5EF4-FFF2-40B4-BE49-F238E27FC236}">
-                <a16:creationId xmlns="" xmlns:a16="http://schemas.microsoft.com/office/drawing/2014/main" id="{4CD109D0-2E83-4262-8029-A871CEC47406}"/>
+                <a16:creationId xmlns:a16="http://schemas.microsoft.com/office/drawing/2014/main" xmlns="" id="{4CD109D0-2E83-4262-8029-A871CEC47406}"/>
               </a:ext>
             </a:extLst>
           </p:cNvPr>
@@ -8020,7 +8020,7 @@
           <p:cNvPr id="6" name="Espaço Reservado para Conteúdo 5">
             <a:extLst>
               <a:ext uri="{FF2B5EF4-FFF2-40B4-BE49-F238E27FC236}">
-                <a16:creationId xmlns="" xmlns:a16="http://schemas.microsoft.com/office/drawing/2014/main" id="{AD706E3A-CFBB-4A6C-A65F-D0360A9E74FE}"/>
+                <a16:creationId xmlns:a16="http://schemas.microsoft.com/office/drawing/2014/main" xmlns="" id="{AD706E3A-CFBB-4A6C-A65F-D0360A9E74FE}"/>
               </a:ext>
             </a:extLst>
           </p:cNvPr>
@@ -8082,7 +8082,7 @@
           <p:cNvPr id="7" name="Espaço Reservado para Data 6">
             <a:extLst>
               <a:ext uri="{FF2B5EF4-FFF2-40B4-BE49-F238E27FC236}">
-                <a16:creationId xmlns="" xmlns:a16="http://schemas.microsoft.com/office/drawing/2014/main" id="{4172C0E5-5AF0-4805-BB51-443733CD2BD5}"/>
+                <a16:creationId xmlns:a16="http://schemas.microsoft.com/office/drawing/2014/main" xmlns="" id="{4172C0E5-5AF0-4805-BB51-443733CD2BD5}"/>
               </a:ext>
             </a:extLst>
           </p:cNvPr>
@@ -8100,7 +8100,7 @@
           <a:p>
             <a:fld id="{63289F7E-B80B-496E-81B4-D396C37C9454}" type="datetimeFigureOut">
               <a:rPr lang="pt-BR" smtClean="0"/>
-              <a:t>20/03/2026</a:t>
+              <a:t>21/03/2026</a:t>
             </a:fld>
             <a:endParaRPr lang="pt-BR"/>
           </a:p>
@@ -8111,7 +8111,7 @@
           <p:cNvPr id="8" name="Espaço Reservado para Rodapé 7">
             <a:extLst>
               <a:ext uri="{FF2B5EF4-FFF2-40B4-BE49-F238E27FC236}">
-                <a16:creationId xmlns="" xmlns:a16="http://schemas.microsoft.com/office/drawing/2014/main" id="{0E801648-156F-497E-99CF-797DF48051E1}"/>
+                <a16:creationId xmlns:a16="http://schemas.microsoft.com/office/drawing/2014/main" xmlns="" id="{0E801648-156F-497E-99CF-797DF48051E1}"/>
               </a:ext>
             </a:extLst>
           </p:cNvPr>
@@ -8136,7 +8136,7 @@
           <p:cNvPr id="9" name="Espaço Reservado para Número de Slide 8">
             <a:extLst>
               <a:ext uri="{FF2B5EF4-FFF2-40B4-BE49-F238E27FC236}">
-                <a16:creationId xmlns="" xmlns:a16="http://schemas.microsoft.com/office/drawing/2014/main" id="{EEE23D32-80E7-4796-A137-66BF842E4B53}"/>
+                <a16:creationId xmlns:a16="http://schemas.microsoft.com/office/drawing/2014/main" xmlns="" id="{EEE23D32-80E7-4796-A137-66BF842E4B53}"/>
               </a:ext>
             </a:extLst>
           </p:cNvPr>
@@ -8195,7 +8195,7 @@
           <p:cNvPr id="2" name="Título 1">
             <a:extLst>
               <a:ext uri="{FF2B5EF4-FFF2-40B4-BE49-F238E27FC236}">
-                <a16:creationId xmlns="" xmlns:a16="http://schemas.microsoft.com/office/drawing/2014/main" id="{2BCE2379-C78F-47E1-8CFC-B846E7AF148D}"/>
+                <a16:creationId xmlns:a16="http://schemas.microsoft.com/office/drawing/2014/main" xmlns="" id="{2BCE2379-C78F-47E1-8CFC-B846E7AF148D}"/>
               </a:ext>
             </a:extLst>
           </p:cNvPr>
@@ -8223,7 +8223,7 @@
           <p:cNvPr id="3" name="Espaço Reservado para Data 2">
             <a:extLst>
               <a:ext uri="{FF2B5EF4-FFF2-40B4-BE49-F238E27FC236}">
-                <a16:creationId xmlns="" xmlns:a16="http://schemas.microsoft.com/office/drawing/2014/main" id="{342600A9-7F92-4E22-9D94-E4717252A817}"/>
+                <a16:creationId xmlns:a16="http://schemas.microsoft.com/office/drawing/2014/main" xmlns="" id="{342600A9-7F92-4E22-9D94-E4717252A817}"/>
               </a:ext>
             </a:extLst>
           </p:cNvPr>
@@ -8241,7 +8241,7 @@
           <a:p>
             <a:fld id="{63289F7E-B80B-496E-81B4-D396C37C9454}" type="datetimeFigureOut">
               <a:rPr lang="pt-BR" smtClean="0"/>
-              <a:t>20/03/2026</a:t>
+              <a:t>21/03/2026</a:t>
             </a:fld>
             <a:endParaRPr lang="pt-BR"/>
           </a:p>
@@ -8252,7 +8252,7 @@
           <p:cNvPr id="4" name="Espaço Reservado para Rodapé 3">
             <a:extLst>
               <a:ext uri="{FF2B5EF4-FFF2-40B4-BE49-F238E27FC236}">
-                <a16:creationId xmlns="" xmlns:a16="http://schemas.microsoft.com/office/drawing/2014/main" id="{192E6BED-F546-40CC-A2DF-99CBA853654E}"/>
+                <a16:creationId xmlns:a16="http://schemas.microsoft.com/office/drawing/2014/main" xmlns="" id="{192E6BED-F546-40CC-A2DF-99CBA853654E}"/>
               </a:ext>
             </a:extLst>
           </p:cNvPr>
@@ -8277,7 +8277,7 @@
           <p:cNvPr id="5" name="Espaço Reservado para Número de Slide 4">
             <a:extLst>
               <a:ext uri="{FF2B5EF4-FFF2-40B4-BE49-F238E27FC236}">
-                <a16:creationId xmlns="" xmlns:a16="http://schemas.microsoft.com/office/drawing/2014/main" id="{6091CC40-A8C4-4063-80EB-CC5099621678}"/>
+                <a16:creationId xmlns:a16="http://schemas.microsoft.com/office/drawing/2014/main" xmlns="" id="{6091CC40-A8C4-4063-80EB-CC5099621678}"/>
               </a:ext>
             </a:extLst>
           </p:cNvPr>
@@ -8336,7 +8336,7 @@
           <p:cNvPr id="2" name="Espaço Reservado para Data 1">
             <a:extLst>
               <a:ext uri="{FF2B5EF4-FFF2-40B4-BE49-F238E27FC236}">
-                <a16:creationId xmlns="" xmlns:a16="http://schemas.microsoft.com/office/drawing/2014/main" id="{DD19515C-212C-4EAE-84A3-8FF4BC844F1B}"/>
+                <a16:creationId xmlns:a16="http://schemas.microsoft.com/office/drawing/2014/main" xmlns="" id="{DD19515C-212C-4EAE-84A3-8FF4BC844F1B}"/>
               </a:ext>
             </a:extLst>
           </p:cNvPr>
@@ -8354,7 +8354,7 @@
           <a:p>
             <a:fld id="{63289F7E-B80B-496E-81B4-D396C37C9454}" type="datetimeFigureOut">
               <a:rPr lang="pt-BR" smtClean="0"/>
-              <a:t>20/03/2026</a:t>
+              <a:t>21/03/2026</a:t>
             </a:fld>
             <a:endParaRPr lang="pt-BR"/>
           </a:p>
@@ -8365,7 +8365,7 @@
           <p:cNvPr id="3" name="Espaço Reservado para Rodapé 2">
             <a:extLst>
               <a:ext uri="{FF2B5EF4-FFF2-40B4-BE49-F238E27FC236}">
-                <a16:creationId xmlns="" xmlns:a16="http://schemas.microsoft.com/office/drawing/2014/main" id="{94D3D120-B3E8-4C96-861D-7A4F12F49B3A}"/>
+                <a16:creationId xmlns:a16="http://schemas.microsoft.com/office/drawing/2014/main" xmlns="" id="{94D3D120-B3E8-4C96-861D-7A4F12F49B3A}"/>
               </a:ext>
             </a:extLst>
           </p:cNvPr>
@@ -8390,7 +8390,7 @@
           <p:cNvPr id="4" name="Espaço Reservado para Número de Slide 3">
             <a:extLst>
               <a:ext uri="{FF2B5EF4-FFF2-40B4-BE49-F238E27FC236}">
-                <a16:creationId xmlns="" xmlns:a16="http://schemas.microsoft.com/office/drawing/2014/main" id="{42E49B68-FA1B-468B-9F17-D5C09243D454}"/>
+                <a16:creationId xmlns:a16="http://schemas.microsoft.com/office/drawing/2014/main" xmlns="" id="{42E49B68-FA1B-468B-9F17-D5C09243D454}"/>
               </a:ext>
             </a:extLst>
           </p:cNvPr>
@@ -8449,7 +8449,7 @@
           <p:cNvPr id="2" name="Título 1">
             <a:extLst>
               <a:ext uri="{FF2B5EF4-FFF2-40B4-BE49-F238E27FC236}">
-                <a16:creationId xmlns="" xmlns:a16="http://schemas.microsoft.com/office/drawing/2014/main" id="{1C17BCBE-A897-4319-85EC-D87909C24980}"/>
+                <a16:creationId xmlns:a16="http://schemas.microsoft.com/office/drawing/2014/main" xmlns="" id="{1C17BCBE-A897-4319-85EC-D87909C24980}"/>
               </a:ext>
             </a:extLst>
           </p:cNvPr>
@@ -8486,7 +8486,7 @@
           <p:cNvPr id="3" name="Espaço Reservado para Conteúdo 2">
             <a:extLst>
               <a:ext uri="{FF2B5EF4-FFF2-40B4-BE49-F238E27FC236}">
-                <a16:creationId xmlns="" xmlns:a16="http://schemas.microsoft.com/office/drawing/2014/main" id="{4226F885-0204-4913-868B-4B8B82576F17}"/>
+                <a16:creationId xmlns:a16="http://schemas.microsoft.com/office/drawing/2014/main" xmlns="" id="{4226F885-0204-4913-868B-4B8B82576F17}"/>
               </a:ext>
             </a:extLst>
           </p:cNvPr>
@@ -8576,7 +8576,7 @@
           <p:cNvPr id="4" name="Espaço Reservado para Texto 3">
             <a:extLst>
               <a:ext uri="{FF2B5EF4-FFF2-40B4-BE49-F238E27FC236}">
-                <a16:creationId xmlns="" xmlns:a16="http://schemas.microsoft.com/office/drawing/2014/main" id="{00F9F784-A858-441B-8AB5-697098141751}"/>
+                <a16:creationId xmlns:a16="http://schemas.microsoft.com/office/drawing/2014/main" xmlns="" id="{00F9F784-A858-441B-8AB5-697098141751}"/>
               </a:ext>
             </a:extLst>
           </p:cNvPr>
@@ -8647,7 +8647,7 @@
           <p:cNvPr id="5" name="Espaço Reservado para Data 4">
             <a:extLst>
               <a:ext uri="{FF2B5EF4-FFF2-40B4-BE49-F238E27FC236}">
-                <a16:creationId xmlns="" xmlns:a16="http://schemas.microsoft.com/office/drawing/2014/main" id="{A4DC363A-5000-472E-8B17-02E7DCB8840A}"/>
+                <a16:creationId xmlns:a16="http://schemas.microsoft.com/office/drawing/2014/main" xmlns="" id="{A4DC363A-5000-472E-8B17-02E7DCB8840A}"/>
               </a:ext>
             </a:extLst>
           </p:cNvPr>
@@ -8665,7 +8665,7 @@
           <a:p>
             <a:fld id="{63289F7E-B80B-496E-81B4-D396C37C9454}" type="datetimeFigureOut">
               <a:rPr lang="pt-BR" smtClean="0"/>
-              <a:t>20/03/2026</a:t>
+              <a:t>21/03/2026</a:t>
             </a:fld>
             <a:endParaRPr lang="pt-BR"/>
           </a:p>
@@ -8676,7 +8676,7 @@
           <p:cNvPr id="6" name="Espaço Reservado para Rodapé 5">
             <a:extLst>
               <a:ext uri="{FF2B5EF4-FFF2-40B4-BE49-F238E27FC236}">
-                <a16:creationId xmlns="" xmlns:a16="http://schemas.microsoft.com/office/drawing/2014/main" id="{5548425D-2C21-4C56-BAD4-662978775C28}"/>
+                <a16:creationId xmlns:a16="http://schemas.microsoft.com/office/drawing/2014/main" xmlns="" id="{5548425D-2C21-4C56-BAD4-662978775C28}"/>
               </a:ext>
             </a:extLst>
           </p:cNvPr>
@@ -8701,7 +8701,7 @@
           <p:cNvPr id="7" name="Espaço Reservado para Número de Slide 6">
             <a:extLst>
               <a:ext uri="{FF2B5EF4-FFF2-40B4-BE49-F238E27FC236}">
-                <a16:creationId xmlns="" xmlns:a16="http://schemas.microsoft.com/office/drawing/2014/main" id="{C63E9726-E64C-42B2-AE8A-8C235A956B48}"/>
+                <a16:creationId xmlns:a16="http://schemas.microsoft.com/office/drawing/2014/main" xmlns="" id="{C63E9726-E64C-42B2-AE8A-8C235A956B48}"/>
               </a:ext>
             </a:extLst>
           </p:cNvPr>
@@ -8760,7 +8760,7 @@
           <p:cNvPr id="2" name="Título 1">
             <a:extLst>
               <a:ext uri="{FF2B5EF4-FFF2-40B4-BE49-F238E27FC236}">
-                <a16:creationId xmlns="" xmlns:a16="http://schemas.microsoft.com/office/drawing/2014/main" id="{11086A78-3E74-450C-96A6-CA8AC37AF772}"/>
+                <a16:creationId xmlns:a16="http://schemas.microsoft.com/office/drawing/2014/main" xmlns="" id="{11086A78-3E74-450C-96A6-CA8AC37AF772}"/>
               </a:ext>
             </a:extLst>
           </p:cNvPr>
@@ -8797,7 +8797,7 @@
           <p:cNvPr id="3" name="Espaço Reservado para Imagem 2">
             <a:extLst>
               <a:ext uri="{FF2B5EF4-FFF2-40B4-BE49-F238E27FC236}">
-                <a16:creationId xmlns="" xmlns:a16="http://schemas.microsoft.com/office/drawing/2014/main" id="{5F5B7312-975A-4DBC-9B2F-3652ADA006FD}"/>
+                <a16:creationId xmlns:a16="http://schemas.microsoft.com/office/drawing/2014/main" xmlns="" id="{5F5B7312-975A-4DBC-9B2F-3652ADA006FD}"/>
               </a:ext>
             </a:extLst>
           </p:cNvPr>
@@ -8864,7 +8864,7 @@
           <p:cNvPr id="4" name="Espaço Reservado para Texto 3">
             <a:extLst>
               <a:ext uri="{FF2B5EF4-FFF2-40B4-BE49-F238E27FC236}">
-                <a16:creationId xmlns="" xmlns:a16="http://schemas.microsoft.com/office/drawing/2014/main" id="{AAF805F5-1DFF-41C6-944C-7D79FE0D0963}"/>
+                <a16:creationId xmlns:a16="http://schemas.microsoft.com/office/drawing/2014/main" xmlns="" id="{AAF805F5-1DFF-41C6-944C-7D79FE0D0963}"/>
               </a:ext>
             </a:extLst>
           </p:cNvPr>
@@ -8935,7 +8935,7 @@
           <p:cNvPr id="5" name="Espaço Reservado para Data 4">
             <a:extLst>
               <a:ext uri="{FF2B5EF4-FFF2-40B4-BE49-F238E27FC236}">
-                <a16:creationId xmlns="" xmlns:a16="http://schemas.microsoft.com/office/drawing/2014/main" id="{02113D81-8665-4516-BD81-C6A1F254EECD}"/>
+                <a16:creationId xmlns:a16="http://schemas.microsoft.com/office/drawing/2014/main" xmlns="" id="{02113D81-8665-4516-BD81-C6A1F254EECD}"/>
               </a:ext>
             </a:extLst>
           </p:cNvPr>
@@ -8953,7 +8953,7 @@
           <a:p>
             <a:fld id="{63289F7E-B80B-496E-81B4-D396C37C9454}" type="datetimeFigureOut">
               <a:rPr lang="pt-BR" smtClean="0"/>
-              <a:t>20/03/2026</a:t>
+              <a:t>21/03/2026</a:t>
             </a:fld>
             <a:endParaRPr lang="pt-BR"/>
           </a:p>
@@ -8964,7 +8964,7 @@
           <p:cNvPr id="6" name="Espaço Reservado para Rodapé 5">
             <a:extLst>
               <a:ext uri="{FF2B5EF4-FFF2-40B4-BE49-F238E27FC236}">
-                <a16:creationId xmlns="" xmlns:a16="http://schemas.microsoft.com/office/drawing/2014/main" id="{2B00C88B-FF32-40AA-A187-727D96FD7862}"/>
+                <a16:creationId xmlns:a16="http://schemas.microsoft.com/office/drawing/2014/main" xmlns="" id="{2B00C88B-FF32-40AA-A187-727D96FD7862}"/>
               </a:ext>
             </a:extLst>
           </p:cNvPr>
@@ -8989,7 +8989,7 @@
           <p:cNvPr id="7" name="Espaço Reservado para Número de Slide 6">
             <a:extLst>
               <a:ext uri="{FF2B5EF4-FFF2-40B4-BE49-F238E27FC236}">
-                <a16:creationId xmlns="" xmlns:a16="http://schemas.microsoft.com/office/drawing/2014/main" id="{A04D1A2D-69F7-4B8F-A730-BC26DC340BA6}"/>
+                <a16:creationId xmlns:a16="http://schemas.microsoft.com/office/drawing/2014/main" xmlns="" id="{A04D1A2D-69F7-4B8F-A730-BC26DC340BA6}"/>
               </a:ext>
             </a:extLst>
           </p:cNvPr>
@@ -9053,7 +9053,7 @@
           <p:cNvPr id="2" name="Espaço Reservado para Título 1">
             <a:extLst>
               <a:ext uri="{FF2B5EF4-FFF2-40B4-BE49-F238E27FC236}">
-                <a16:creationId xmlns="" xmlns:a16="http://schemas.microsoft.com/office/drawing/2014/main" id="{E69A0273-1966-4A1B-9370-4C1CE5036371}"/>
+                <a16:creationId xmlns:a16="http://schemas.microsoft.com/office/drawing/2014/main" xmlns="" id="{E69A0273-1966-4A1B-9370-4C1CE5036371}"/>
               </a:ext>
             </a:extLst>
           </p:cNvPr>
@@ -9091,7 +9091,7 @@
           <p:cNvPr id="3" name="Espaço Reservado para Texto 2">
             <a:extLst>
               <a:ext uri="{FF2B5EF4-FFF2-40B4-BE49-F238E27FC236}">
-                <a16:creationId xmlns="" xmlns:a16="http://schemas.microsoft.com/office/drawing/2014/main" id="{3B9CF87A-0448-49A7-AB25-EBC1D56A40EF}"/>
+                <a16:creationId xmlns:a16="http://schemas.microsoft.com/office/drawing/2014/main" xmlns="" id="{3B9CF87A-0448-49A7-AB25-EBC1D56A40EF}"/>
               </a:ext>
             </a:extLst>
           </p:cNvPr>
@@ -9158,7 +9158,7 @@
           <p:cNvPr id="4" name="Espaço Reservado para Data 3">
             <a:extLst>
               <a:ext uri="{FF2B5EF4-FFF2-40B4-BE49-F238E27FC236}">
-                <a16:creationId xmlns="" xmlns:a16="http://schemas.microsoft.com/office/drawing/2014/main" id="{2EF7B1F2-BB5A-44D0-816D-16AD2C71430E}"/>
+                <a16:creationId xmlns:a16="http://schemas.microsoft.com/office/drawing/2014/main" xmlns="" id="{2EF7B1F2-BB5A-44D0-816D-16AD2C71430E}"/>
               </a:ext>
             </a:extLst>
           </p:cNvPr>
@@ -9194,7 +9194,7 @@
           <a:p>
             <a:fld id="{63289F7E-B80B-496E-81B4-D396C37C9454}" type="datetimeFigureOut">
               <a:rPr lang="pt-BR" smtClean="0"/>
-              <a:t>20/03/2026</a:t>
+              <a:t>21/03/2026</a:t>
             </a:fld>
             <a:endParaRPr lang="pt-BR"/>
           </a:p>
@@ -9205,7 +9205,7 @@
           <p:cNvPr id="5" name="Espaço Reservado para Rodapé 4">
             <a:extLst>
               <a:ext uri="{FF2B5EF4-FFF2-40B4-BE49-F238E27FC236}">
-                <a16:creationId xmlns="" xmlns:a16="http://schemas.microsoft.com/office/drawing/2014/main" id="{C703F94C-2CC8-4DAA-BC35-14FC3E841DCD}"/>
+                <a16:creationId xmlns:a16="http://schemas.microsoft.com/office/drawing/2014/main" xmlns="" id="{C703F94C-2CC8-4DAA-BC35-14FC3E841DCD}"/>
               </a:ext>
             </a:extLst>
           </p:cNvPr>
@@ -9248,7 +9248,7 @@
           <p:cNvPr id="6" name="Espaço Reservado para Número de Slide 5">
             <a:extLst>
               <a:ext uri="{FF2B5EF4-FFF2-40B4-BE49-F238E27FC236}">
-                <a16:creationId xmlns="" xmlns:a16="http://schemas.microsoft.com/office/drawing/2014/main" id="{64051336-7048-457A-8B61-D94291D71648}"/>
+                <a16:creationId xmlns:a16="http://schemas.microsoft.com/office/drawing/2014/main" xmlns="" id="{64051336-7048-457A-8B61-D94291D71648}"/>
               </a:ext>
             </a:extLst>
           </p:cNvPr>
@@ -9616,7 +9616,7 @@
           <p:cNvPr id="2" name="Título 1">
             <a:extLst>
               <a:ext uri="{FF2B5EF4-FFF2-40B4-BE49-F238E27FC236}">
-                <a16:creationId xmlns="" xmlns:a16="http://schemas.microsoft.com/office/drawing/2014/main" id="{32666AC8-2E17-4DB4-B0F5-60C640CCFD2E}"/>
+                <a16:creationId xmlns:a16="http://schemas.microsoft.com/office/drawing/2014/main" xmlns="" id="{32666AC8-2E17-4DB4-B0F5-60C640CCFD2E}"/>
               </a:ext>
             </a:extLst>
           </p:cNvPr>
@@ -9662,7 +9662,7 @@
           <p:cNvPr id="4" name="CaixaDeTexto 3">
             <a:extLst>
               <a:ext uri="{FF2B5EF4-FFF2-40B4-BE49-F238E27FC236}">
-                <a16:creationId xmlns="" xmlns:a16="http://schemas.microsoft.com/office/drawing/2014/main" id="{430EB894-B7D4-434C-9D1A-A14094D9BEEC}"/>
+                <a16:creationId xmlns:a16="http://schemas.microsoft.com/office/drawing/2014/main" xmlns="" id="{430EB894-B7D4-434C-9D1A-A14094D9BEEC}"/>
               </a:ext>
             </a:extLst>
           </p:cNvPr>
@@ -9703,7 +9703,7 @@
           <p:cNvPr id="1026" name="Picture 2" descr="Logo">
             <a:extLst>
               <a:ext uri="{FF2B5EF4-FFF2-40B4-BE49-F238E27FC236}">
-                <a16:creationId xmlns="" xmlns:a16="http://schemas.microsoft.com/office/drawing/2014/main" id="{3F2642E0-4F6A-4196-8F58-E77D36E9A33F}"/>
+                <a16:creationId xmlns:a16="http://schemas.microsoft.com/office/drawing/2014/main" xmlns="" id="{3F2642E0-4F6A-4196-8F58-E77D36E9A33F}"/>
               </a:ext>
             </a:extLst>
           </p:cNvPr>
@@ -9748,7 +9748,7 @@
           <p:cNvPr id="5122" name="Picture 2" descr="Image result for machine learning">
             <a:extLst>
               <a:ext uri="{FF2B5EF4-FFF2-40B4-BE49-F238E27FC236}">
-                <a16:creationId xmlns="" xmlns:a16="http://schemas.microsoft.com/office/drawing/2014/main" id="{810CE0A2-4102-44A6-A370-175E7896CDCB}"/>
+                <a16:creationId xmlns:a16="http://schemas.microsoft.com/office/drawing/2014/main" xmlns="" id="{810CE0A2-4102-44A6-A370-175E7896CDCB}"/>
               </a:ext>
             </a:extLst>
           </p:cNvPr>
@@ -11152,7 +11152,7 @@
           <p:cNvPr id="13" name="CaixaDeTexto 12">
             <a:extLst>
               <a:ext uri="{FF2B5EF4-FFF2-40B4-BE49-F238E27FC236}">
-                <a16:creationId xmlns="" xmlns:a16="http://schemas.microsoft.com/office/drawing/2014/main" id="{9989FE69-01F8-8C6A-4EA0-DA1C9792B919}"/>
+                <a16:creationId xmlns:a16="http://schemas.microsoft.com/office/drawing/2014/main" xmlns="" id="{9989FE69-01F8-8C6A-4EA0-DA1C9792B919}"/>
               </a:ext>
             </a:extLst>
           </p:cNvPr>
@@ -11234,7 +11234,7 @@
           <p:cNvPr id="2" name="Título 1">
             <a:extLst>
               <a:ext uri="{FF2B5EF4-FFF2-40B4-BE49-F238E27FC236}">
-                <a16:creationId xmlns:a16="http://schemas.microsoft.com/office/drawing/2014/main" xmlns="" id="{B022D379-CAA0-9DC9-CDBD-6E0EBE1BFF31}"/>
+                <a16:creationId xmlns="" xmlns:a16="http://schemas.microsoft.com/office/drawing/2014/main" id="{B022D379-CAA0-9DC9-CDBD-6E0EBE1BFF31}"/>
               </a:ext>
             </a:extLst>
           </p:cNvPr>
@@ -11261,14 +11261,14 @@
           </a:p>
         </p:txBody>
       </p:sp>
-      <mc:AlternateContent xmlns:mc="http://schemas.openxmlformats.org/markup-compatibility/2006">
-        <mc:Choice xmlns:a14="http://schemas.microsoft.com/office/drawing/2010/main" Requires="a14">
+      <mc:AlternateContent xmlns:mc="http://schemas.openxmlformats.org/markup-compatibility/2006" xmlns:a14="http://schemas.microsoft.com/office/drawing/2010/main">
+        <mc:Choice Requires="a14">
           <p:sp>
             <p:nvSpPr>
               <p:cNvPr id="3" name="Espaço Reservado para Conteúdo 2">
                 <a:extLst>
                   <a:ext uri="{FF2B5EF4-FFF2-40B4-BE49-F238E27FC236}">
-                    <a16:creationId xmlns:a16="http://schemas.microsoft.com/office/drawing/2014/main" xmlns="" id="{B68F0D74-8673-A432-A1D7-BDEF7725851A}"/>
+                    <a16:creationId xmlns="" xmlns:a16="http://schemas.microsoft.com/office/drawing/2014/main" id="{B68F0D74-8673-A432-A1D7-BDEF7725851A}"/>
                   </a:ext>
                 </a:extLst>
               </p:cNvPr>
@@ -11476,7 +11476,7 @@
             </p:txBody>
           </p:sp>
         </mc:Choice>
-        <mc:Fallback>
+        <mc:Fallback xmlns="">
           <p:sp>
             <p:nvSpPr>
               <p:cNvPr id="3" name="Espaço Reservado para Conteúdo 2">
@@ -11555,7 +11555,7 @@
           <p:cNvPr id="2" name="Título 1">
             <a:extLst>
               <a:ext uri="{FF2B5EF4-FFF2-40B4-BE49-F238E27FC236}">
-                <a16:creationId xmlns:a16="http://schemas.microsoft.com/office/drawing/2014/main" xmlns="" id="{519F0958-530D-D942-BA01-15C1583DD1E6}"/>
+                <a16:creationId xmlns="" xmlns:a16="http://schemas.microsoft.com/office/drawing/2014/main" id="{519F0958-530D-D942-BA01-15C1583DD1E6}"/>
               </a:ext>
             </a:extLst>
           </p:cNvPr>
@@ -11582,14 +11582,14 @@
           </a:p>
         </p:txBody>
       </p:sp>
-      <mc:AlternateContent xmlns:mc="http://schemas.openxmlformats.org/markup-compatibility/2006" xmlns:a14="http://schemas.microsoft.com/office/drawing/2010/main">
-        <mc:Choice Requires="a14">
+      <mc:AlternateContent xmlns:mc="http://schemas.openxmlformats.org/markup-compatibility/2006">
+        <mc:Choice xmlns:a14="http://schemas.microsoft.com/office/drawing/2010/main" Requires="a14">
           <p:sp>
             <p:nvSpPr>
               <p:cNvPr id="3" name="Espaço Reservado para Conteúdo 2">
                 <a:extLst>
                   <a:ext uri="{FF2B5EF4-FFF2-40B4-BE49-F238E27FC236}">
-                    <a16:creationId xmlns:a16="http://schemas.microsoft.com/office/drawing/2014/main" xmlns="" id="{21416F72-28FB-E27C-D129-16A944A87C67}"/>
+                    <a16:creationId xmlns="" xmlns:a16="http://schemas.microsoft.com/office/drawing/2014/main" id="{21416F72-28FB-E27C-D129-16A944A87C67}"/>
                   </a:ext>
                 </a:extLst>
               </p:cNvPr>
@@ -11603,7 +11603,7 @@
             <p:spPr>
               <a:xfrm>
                 <a:off x="838199" y="1825624"/>
-                <a:ext cx="11132127" cy="5032375"/>
+                <a:ext cx="11353801" cy="5032375"/>
               </a:xfrm>
             </p:spPr>
             <p:txBody>
@@ -11677,8 +11677,24 @@
                   <a:buChar char="§"/>
                 </a:pPr>
                 <a:r>
-                  <a:rPr lang="pt-BR" dirty="0"/>
-                  <a:t>Já notícias, músicas e imagens, por exemplo, podem pertencer a várias ou conter várias classes ao mesmo tempo.</a:t>
+                  <a:rPr lang="pt-BR" dirty="0" smtClean="0"/>
+                  <a:t>Por exemplo,</a:t>
+                </a:r>
+                <a:r>
+                  <a:rPr lang="pt-BR" dirty="0" smtClean="0"/>
+                  <a:t> </a:t>
+                </a:r>
+                <a:r>
+                  <a:rPr lang="pt-BR" dirty="0"/>
+                  <a:t>notícias, músicas e imagens, por exemplo, podem pertencer a </a:t>
+                </a:r>
+                <a:r>
+                  <a:rPr lang="pt-BR" dirty="0" smtClean="0"/>
+                  <a:t>várias classes </a:t>
+                </a:r>
+                <a:r>
+                  <a:rPr lang="pt-BR" dirty="0"/>
+                  <a:t>ao mesmo tempo.</a:t>
                 </a:r>
               </a:p>
               <a:p>
@@ -11971,13 +11987,13 @@
             </p:txBody>
           </p:sp>
         </mc:Choice>
-        <mc:Fallback xmlns="">
+        <mc:Fallback>
           <p:sp>
             <p:nvSpPr>
               <p:cNvPr id="3" name="Espaço Reservado para Conteúdo 2">
                 <a:extLst>
                   <a:ext uri="{FF2B5EF4-FFF2-40B4-BE49-F238E27FC236}">
-                    <a16:creationId xmlns:a16="http://schemas.microsoft.com/office/drawing/2014/main" id="{21416F72-28FB-E27C-D129-16A944A87C67}"/>
+                    <a16:creationId xmlns="" xmlns:a16="http://schemas.microsoft.com/office/drawing/2014/main" xmlns:a14="http://schemas.microsoft.com/office/drawing/2010/main" id="{21416F72-28FB-E27C-D129-16A944A87C67}"/>
                   </a:ext>
                 </a:extLst>
               </p:cNvPr>
@@ -11991,12 +12007,12 @@
             <p:spPr>
               <a:xfrm>
                 <a:off x="838199" y="1825624"/>
-                <a:ext cx="11132127" cy="5032375"/>
+                <a:ext cx="11353801" cy="5032375"/>
               </a:xfrm>
-              <a:blipFill>
+              <a:blipFill rotWithShape="0">
                 <a:blip r:embed="rId3"/>
                 <a:stretch>
-                  <a:fillRect l="-930" t="-1937" r="-876"/>
+                  <a:fillRect l="-913" t="-1937"/>
                 </a:stretch>
               </a:blipFill>
             </p:spPr>
@@ -12005,7 +12021,7 @@
               <a:lstStyle/>
               <a:p>
                 <a:r>
-                  <a:rPr lang="en-US">
+                  <a:rPr lang="pt-BR">
                     <a:noFill/>
                   </a:rPr>
                   <a:t> </a:t>
@@ -12050,7 +12066,7 @@
           <p:cNvPr id="2" name="Título 1">
             <a:extLst>
               <a:ext uri="{FF2B5EF4-FFF2-40B4-BE49-F238E27FC236}">
-                <a16:creationId xmlns:a16="http://schemas.microsoft.com/office/drawing/2014/main" xmlns="" id="{DCD47F25-5DD1-794E-8733-BFD771A2DE49}"/>
+                <a16:creationId xmlns="" xmlns:a16="http://schemas.microsoft.com/office/drawing/2014/main" id="{DCD47F25-5DD1-794E-8733-BFD771A2DE49}"/>
               </a:ext>
             </a:extLst>
           </p:cNvPr>
@@ -12084,7 +12100,7 @@
               <p:cNvPr id="3" name="Espaço Reservado para Conteúdo 2">
                 <a:extLst>
                   <a:ext uri="{FF2B5EF4-FFF2-40B4-BE49-F238E27FC236}">
-                    <a16:creationId xmlns:a16="http://schemas.microsoft.com/office/drawing/2014/main" xmlns="" id="{D79BB7DC-99E7-8958-EC77-566B7E3C2BBB}"/>
+                    <a16:creationId xmlns="" xmlns:a16="http://schemas.microsoft.com/office/drawing/2014/main" id="{D79BB7DC-99E7-8958-EC77-566B7E3C2BBB}"/>
                   </a:ext>
                 </a:extLst>
               </p:cNvPr>
@@ -13423,7 +13439,7 @@
           <p:cNvPr id="2" name="Título 1">
             <a:extLst>
               <a:ext uri="{FF2B5EF4-FFF2-40B4-BE49-F238E27FC236}">
-                <a16:creationId xmlns:a16="http://schemas.microsoft.com/office/drawing/2014/main" xmlns="" id="{52E3438D-F516-F1D3-A02F-51857586D07A}"/>
+                <a16:creationId xmlns="" xmlns:a16="http://schemas.microsoft.com/office/drawing/2014/main" id="{52E3438D-F516-F1D3-A02F-51857586D07A}"/>
               </a:ext>
             </a:extLst>
           </p:cNvPr>
@@ -13450,14 +13466,14 @@
           </a:p>
         </p:txBody>
       </p:sp>
-      <mc:AlternateContent xmlns:mc="http://schemas.openxmlformats.org/markup-compatibility/2006" xmlns:a14="http://schemas.microsoft.com/office/drawing/2010/main">
-        <mc:Choice Requires="a14">
+      <mc:AlternateContent xmlns:mc="http://schemas.openxmlformats.org/markup-compatibility/2006">
+        <mc:Choice xmlns:a14="http://schemas.microsoft.com/office/drawing/2010/main" Requires="a14">
           <p:sp>
             <p:nvSpPr>
               <p:cNvPr id="3" name="Espaço Reservado para Conteúdo 2">
                 <a:extLst>
                   <a:ext uri="{FF2B5EF4-FFF2-40B4-BE49-F238E27FC236}">
-                    <a16:creationId xmlns:a16="http://schemas.microsoft.com/office/drawing/2014/main" xmlns="" id="{BCAAD57B-65A0-9DAD-79FC-2AE2692EB84B}"/>
+                    <a16:creationId xmlns="" xmlns:a16="http://schemas.microsoft.com/office/drawing/2014/main" id="{BCAAD57B-65A0-9DAD-79FC-2AE2692EB84B}"/>
                   </a:ext>
                 </a:extLst>
               </p:cNvPr>
@@ -13481,44 +13497,48 @@
               <a:lstStyle/>
               <a:p>
                 <a:r>
-                  <a:rPr lang="pt-BR" b="0" dirty="0">
+                  <a:rPr lang="pt-BR" b="0" dirty="0" smtClean="0">
                     <a:effectLst/>
                   </a:rPr>
-                  <a:t>Ela transforma um </a:t>
-                </a:r>
-                <a:r>
-                  <a:rPr lang="pt-BR" b="1" dirty="0">
+                  <a:t>Ela transforma os </a:t>
+                </a:r>
+                <a:r>
+                  <a:rPr lang="pt-BR" b="1" dirty="0" smtClean="0">
                     <a:solidFill>
                       <a:srgbClr val="00B050"/>
                     </a:solidFill>
                     <a:effectLst/>
                   </a:rPr>
-                  <a:t>vetor </a:t>
-                </a:r>
-                <a:r>
-                  <a:rPr lang="pt-BR" b="1" dirty="0">
+                  <a:t>valores</a:t>
+                </a:r>
+                <a:r>
+                  <a:rPr lang="pt-BR" b="1" dirty="0" smtClean="0">
                     <a:solidFill>
                       <a:srgbClr val="00B050"/>
                     </a:solidFill>
                   </a:rPr>
-                  <a:t>com</a:t>
-                </a:r>
-                <a:r>
-                  <a:rPr lang="pt-BR" b="1" dirty="0">
-                    <a:solidFill>
-                      <a:srgbClr val="00B050"/>
-                    </a:solidFill>
-                    <a:effectLst/>
-                  </a:rPr>
-                  <a:t> valores</a:t>
-                </a:r>
-                <a:r>
-                  <a:rPr lang="pt-BR" b="1" dirty="0">
+                  <a:t> das </a:t>
+                </a:r>
+                <a14:m>
+                  <m:oMath xmlns:m="http://schemas.openxmlformats.org/officeDocument/2006/math">
+                    <m:r>
+                      <a:rPr lang="pt-BR" b="1" i="1" smtClean="0">
+                        <a:solidFill>
+                          <a:srgbClr val="00B050"/>
+                        </a:solidFill>
+                        <a:latin typeface="Cambria Math" panose="02040503050406030204" pitchFamily="18" charset="0"/>
+                      </a:rPr>
+                      <m:t>𝑸</m:t>
+                    </m:r>
+                  </m:oMath>
+                </a14:m>
+                <a:r>
+                  <a:rPr lang="pt-BR" b="1" dirty="0" smtClean="0">
                     <a:solidFill>
                       <a:srgbClr val="00B050"/>
                     </a:solidFill>
                   </a:rPr>
-                  <a:t> de </a:t>
+                  <a:t> </a:t>
                 </a:r>
                 <a:r>
                   <a:rPr lang="pt-BR" b="1" dirty="0">
@@ -14114,13 +14134,13 @@
             </p:txBody>
           </p:sp>
         </mc:Choice>
-        <mc:Fallback xmlns="">
+        <mc:Fallback>
           <p:sp>
             <p:nvSpPr>
               <p:cNvPr id="3" name="Espaço Reservado para Conteúdo 2">
                 <a:extLst>
                   <a:ext uri="{FF2B5EF4-FFF2-40B4-BE49-F238E27FC236}">
-                    <a16:creationId xmlns:a16="http://schemas.microsoft.com/office/drawing/2014/main" id="{BCAAD57B-65A0-9DAD-79FC-2AE2692EB84B}"/>
+                    <a16:creationId xmlns="" xmlns:a16="http://schemas.microsoft.com/office/drawing/2014/main" xmlns:a14="http://schemas.microsoft.com/office/drawing/2010/main" id="{BCAAD57B-65A0-9DAD-79FC-2AE2692EB84B}"/>
                   </a:ext>
                 </a:extLst>
               </p:cNvPr>
@@ -14136,7 +14156,7 @@
                 <a:off x="838200" y="1825624"/>
                 <a:ext cx="11232473" cy="5032375"/>
               </a:xfrm>
-              <a:blipFill>
+              <a:blipFill rotWithShape="0">
                 <a:blip r:embed="rId3"/>
                 <a:stretch>
                   <a:fillRect l="-977" t="-1937" r="-1140"/>
@@ -14148,7 +14168,7 @@
               <a:lstStyle/>
               <a:p>
                 <a:r>
-                  <a:rPr lang="en-US">
+                  <a:rPr lang="pt-BR">
                     <a:noFill/>
                   </a:rPr>
                   <a:t> </a:t>
@@ -14163,7 +14183,7 @@
           <p:cNvPr id="5" name="Rectangle 11">
             <a:extLst>
               <a:ext uri="{FF2B5EF4-FFF2-40B4-BE49-F238E27FC236}">
-                <a16:creationId xmlns:a16="http://schemas.microsoft.com/office/drawing/2014/main" xmlns="" id="{D1D7E603-A964-1188-9D09-B0C1E18592FA}"/>
+                <a16:creationId xmlns="" xmlns:a16="http://schemas.microsoft.com/office/drawing/2014/main" id="{D1D7E603-A964-1188-9D09-B0C1E18592FA}"/>
               </a:ext>
             </a:extLst>
           </p:cNvPr>
@@ -14245,7 +14265,7 @@
           <p:cNvPr id="2" name="Título 1">
             <a:extLst>
               <a:ext uri="{FF2B5EF4-FFF2-40B4-BE49-F238E27FC236}">
-                <a16:creationId xmlns:a16="http://schemas.microsoft.com/office/drawing/2014/main" xmlns="" id="{99DAA83A-B143-94BB-B48B-41A7423070CE}"/>
+                <a16:creationId xmlns="" xmlns:a16="http://schemas.microsoft.com/office/drawing/2014/main" id="{99DAA83A-B143-94BB-B48B-41A7423070CE}"/>
               </a:ext>
             </a:extLst>
           </p:cNvPr>
@@ -14280,7 +14300,7 @@
               <p:cNvPr id="3" name="Espaço Reservado para Conteúdo 2">
                 <a:extLst>
                   <a:ext uri="{FF2B5EF4-FFF2-40B4-BE49-F238E27FC236}">
-                    <a16:creationId xmlns:a16="http://schemas.microsoft.com/office/drawing/2014/main" xmlns="" id="{32DF54A1-52F5-C48C-7CD4-D6E451DF19D8}"/>
+                    <a16:creationId xmlns="" xmlns:a16="http://schemas.microsoft.com/office/drawing/2014/main" id="{32DF54A1-52F5-C48C-7CD4-D6E451DF19D8}"/>
                   </a:ext>
                 </a:extLst>
               </p:cNvPr>
@@ -14588,7 +14608,7 @@
           <p:cNvPr id="6" name="Imagem 5">
             <a:extLst>
               <a:ext uri="{FF2B5EF4-FFF2-40B4-BE49-F238E27FC236}">
-                <a16:creationId xmlns:a16="http://schemas.microsoft.com/office/drawing/2014/main" xmlns="" id="{ED5D1F5D-F195-0452-50D4-07E9F2B1C49D}"/>
+                <a16:creationId xmlns="" xmlns:a16="http://schemas.microsoft.com/office/drawing/2014/main" id="{ED5D1F5D-F195-0452-50D4-07E9F2B1C49D}"/>
               </a:ext>
             </a:extLst>
           </p:cNvPr>
@@ -14624,7 +14644,7 @@
           <p:cNvPr id="8" name="CaixaDeTexto 7">
             <a:extLst>
               <a:ext uri="{FF2B5EF4-FFF2-40B4-BE49-F238E27FC236}">
-                <a16:creationId xmlns:a16="http://schemas.microsoft.com/office/drawing/2014/main" xmlns="" id="{0DC5673F-9B77-2E9E-8317-E71CA8896FE0}"/>
+                <a16:creationId xmlns="" xmlns:a16="http://schemas.microsoft.com/office/drawing/2014/main" id="{0DC5673F-9B77-2E9E-8317-E71CA8896FE0}"/>
               </a:ext>
             </a:extLst>
           </p:cNvPr>
@@ -14676,7 +14696,7 @@
               <p:cNvPr id="4" name="CaixaDeTexto 3">
                 <a:extLst>
                   <a:ext uri="{FF2B5EF4-FFF2-40B4-BE49-F238E27FC236}">
-                    <a16:creationId xmlns:a16="http://schemas.microsoft.com/office/drawing/2014/main" xmlns="" id="{CBD55F82-56D5-32C8-C5AB-AF99477FBAAC}"/>
+                    <a16:creationId xmlns="" xmlns:a16="http://schemas.microsoft.com/office/drawing/2014/main" id="{CBD55F82-56D5-32C8-C5AB-AF99477FBAAC}"/>
                   </a:ext>
                 </a:extLst>
               </p:cNvPr>
@@ -14803,7 +14823,7 @@
           <p:cNvPr id="2" name="Título 1">
             <a:extLst>
               <a:ext uri="{FF2B5EF4-FFF2-40B4-BE49-F238E27FC236}">
-                <a16:creationId xmlns:a16="http://schemas.microsoft.com/office/drawing/2014/main" xmlns="" id="{99DAA83A-B143-94BB-B48B-41A7423070CE}"/>
+                <a16:creationId xmlns="" xmlns:a16="http://schemas.microsoft.com/office/drawing/2014/main" id="{99DAA83A-B143-94BB-B48B-41A7423070CE}"/>
               </a:ext>
             </a:extLst>
           </p:cNvPr>
@@ -14831,14 +14851,14 @@
           </a:p>
         </p:txBody>
       </p:sp>
-      <mc:AlternateContent xmlns:mc="http://schemas.openxmlformats.org/markup-compatibility/2006" xmlns:a14="http://schemas.microsoft.com/office/drawing/2010/main">
-        <mc:Choice Requires="a14">
+      <mc:AlternateContent xmlns:mc="http://schemas.openxmlformats.org/markup-compatibility/2006">
+        <mc:Choice xmlns:a14="http://schemas.microsoft.com/office/drawing/2010/main" Requires="a14">
           <p:sp>
             <p:nvSpPr>
               <p:cNvPr id="3" name="Espaço Reservado para Conteúdo 2">
                 <a:extLst>
                   <a:ext uri="{FF2B5EF4-FFF2-40B4-BE49-F238E27FC236}">
-                    <a16:creationId xmlns:a16="http://schemas.microsoft.com/office/drawing/2014/main" xmlns="" id="{32DF54A1-52F5-C48C-7CD4-D6E451DF19D8}"/>
+                    <a16:creationId xmlns="" xmlns:a16="http://schemas.microsoft.com/office/drawing/2014/main" id="{32DF54A1-52F5-C48C-7CD4-D6E451DF19D8}"/>
                   </a:ext>
                 </a:extLst>
               </p:cNvPr>
@@ -14874,7 +14894,25 @@
                     </a:solidFill>
                     <a:effectLst/>
                   </a:rPr>
-                  <a:t>garante que as saídas estejam no intervalo entre 0 e 1, e a soma de todas as saídas seja igual a 1</a:t>
+                  <a:t>garante que as saídas estejam no intervalo entre 0 e </a:t>
+                </a:r>
+                <a:r>
+                  <a:rPr lang="pt-BR" b="1" dirty="0" smtClean="0">
+                    <a:solidFill>
+                      <a:srgbClr val="00B050"/>
+                    </a:solidFill>
+                    <a:effectLst/>
+                  </a:rPr>
+                  <a:t>1 </a:t>
+                </a:r>
+                <a:r>
+                  <a:rPr lang="pt-BR" b="1" dirty="0">
+                    <a:solidFill>
+                      <a:srgbClr val="00B050"/>
+                    </a:solidFill>
+                    <a:effectLst/>
+                  </a:rPr>
+                  <a:t>e a soma de todas as saídas seja igual a 1</a:t>
                 </a:r>
                 <a:r>
                   <a:rPr lang="pt-BR" b="0" dirty="0">
@@ -15492,13 +15530,13 @@
             </p:txBody>
           </p:sp>
         </mc:Choice>
-        <mc:Fallback xmlns="">
+        <mc:Fallback>
           <p:sp>
             <p:nvSpPr>
               <p:cNvPr id="3" name="Espaço Reservado para Conteúdo 2">
                 <a:extLst>
                   <a:ext uri="{FF2B5EF4-FFF2-40B4-BE49-F238E27FC236}">
-                    <a16:creationId xmlns:a16="http://schemas.microsoft.com/office/drawing/2014/main" id="{32DF54A1-52F5-C48C-7CD4-D6E451DF19D8}"/>
+                    <a16:creationId xmlns="" xmlns:a16="http://schemas.microsoft.com/office/drawing/2014/main" xmlns:a14="http://schemas.microsoft.com/office/drawing/2010/main" id="{32DF54A1-52F5-C48C-7CD4-D6E451DF19D8}"/>
                   </a:ext>
                 </a:extLst>
               </p:cNvPr>
@@ -15514,7 +15552,7 @@
                 <a:off x="838200" y="1825624"/>
                 <a:ext cx="11225981" cy="5032375"/>
               </a:xfrm>
-              <a:blipFill>
+              <a:blipFill rotWithShape="0">
                 <a:blip r:embed="rId3"/>
                 <a:stretch>
                   <a:fillRect l="-978" t="-1937"/>
@@ -15526,7 +15564,7 @@
               <a:lstStyle/>
               <a:p>
                 <a:r>
-                  <a:rPr lang="en-US">
+                  <a:rPr lang="pt-BR">
                     <a:noFill/>
                   </a:rPr>
                   <a:t> </a:t>
@@ -15541,7 +15579,7 @@
           <p:cNvPr id="6" name="Imagem 5">
             <a:extLst>
               <a:ext uri="{FF2B5EF4-FFF2-40B4-BE49-F238E27FC236}">
-                <a16:creationId xmlns:a16="http://schemas.microsoft.com/office/drawing/2014/main" xmlns="" id="{ED5D1F5D-F195-0452-50D4-07E9F2B1C49D}"/>
+                <a16:creationId xmlns="" xmlns:a16="http://schemas.microsoft.com/office/drawing/2014/main" id="{ED5D1F5D-F195-0452-50D4-07E9F2B1C49D}"/>
               </a:ext>
             </a:extLst>
           </p:cNvPr>
@@ -15579,7 +15617,7 @@
               <p:cNvPr id="4" name="CaixaDeTexto 3">
                 <a:extLst>
                   <a:ext uri="{FF2B5EF4-FFF2-40B4-BE49-F238E27FC236}">
-                    <a16:creationId xmlns:a16="http://schemas.microsoft.com/office/drawing/2014/main" xmlns="" id="{2B7728A0-505D-9DAE-23EC-8172E2EEEFA9}"/>
+                    <a16:creationId xmlns="" xmlns:a16="http://schemas.microsoft.com/office/drawing/2014/main" id="{2B7728A0-505D-9DAE-23EC-8172E2EEEFA9}"/>
                   </a:ext>
                 </a:extLst>
               </p:cNvPr>
@@ -15706,7 +15744,7 @@
           <p:cNvPr id="2" name="Título 1">
             <a:extLst>
               <a:ext uri="{FF2B5EF4-FFF2-40B4-BE49-F238E27FC236}">
-                <a16:creationId xmlns:a16="http://schemas.microsoft.com/office/drawing/2014/main" xmlns="" id="{028A152F-93D8-11FA-9B7A-B62AE5BB6486}"/>
+                <a16:creationId xmlns="" xmlns:a16="http://schemas.microsoft.com/office/drawing/2014/main" id="{028A152F-93D8-11FA-9B7A-B62AE5BB6486}"/>
               </a:ext>
             </a:extLst>
           </p:cNvPr>
@@ -15740,7 +15778,7 @@
               <p:cNvPr id="3" name="Espaço Reservado para Conteúdo 2">
                 <a:extLst>
                   <a:ext uri="{FF2B5EF4-FFF2-40B4-BE49-F238E27FC236}">
-                    <a16:creationId xmlns:a16="http://schemas.microsoft.com/office/drawing/2014/main" xmlns="" id="{B3535727-BB24-BB15-5C03-3DA9A3F9A09A}"/>
+                    <a16:creationId xmlns="" xmlns:a16="http://schemas.microsoft.com/office/drawing/2014/main" id="{B3535727-BB24-BB15-5C03-3DA9A3F9A09A}"/>
                   </a:ext>
                 </a:extLst>
               </p:cNvPr>
@@ -15918,7 +15956,7 @@
           <p:cNvPr id="4" name="Imagem 5">
             <a:extLst>
               <a:ext uri="{FF2B5EF4-FFF2-40B4-BE49-F238E27FC236}">
-                <a16:creationId xmlns:a16="http://schemas.microsoft.com/office/drawing/2014/main" xmlns="" id="{42A1713D-06B5-FB35-8488-833F7CAB7166}"/>
+                <a16:creationId xmlns="" xmlns:a16="http://schemas.microsoft.com/office/drawing/2014/main" id="{42A1713D-06B5-FB35-8488-833F7CAB7166}"/>
               </a:ext>
             </a:extLst>
           </p:cNvPr>
@@ -15984,7 +16022,7 @@
           <p:cNvPr id="2" name="Title 1">
             <a:extLst>
               <a:ext uri="{FF2B5EF4-FFF2-40B4-BE49-F238E27FC236}">
-                <a16:creationId xmlns:a16="http://schemas.microsoft.com/office/drawing/2014/main" xmlns="" id="{2DB9D242-5419-0FFB-7863-B3BB3BD80869}"/>
+                <a16:creationId xmlns="" xmlns:a16="http://schemas.microsoft.com/office/drawing/2014/main" id="{2DB9D242-5419-0FFB-7863-B3BB3BD80869}"/>
               </a:ext>
             </a:extLst>
           </p:cNvPr>
@@ -16008,14 +16046,14 @@
           </a:p>
         </p:txBody>
       </p:sp>
-      <mc:AlternateContent xmlns:mc="http://schemas.openxmlformats.org/markup-compatibility/2006" xmlns:a14="http://schemas.microsoft.com/office/drawing/2010/main">
-        <mc:Choice Requires="a14">
+      <mc:AlternateContent xmlns:mc="http://schemas.openxmlformats.org/markup-compatibility/2006">
+        <mc:Choice xmlns:a14="http://schemas.microsoft.com/office/drawing/2010/main" Requires="a14">
           <p:sp>
             <p:nvSpPr>
               <p:cNvPr id="3" name="Content Placeholder 2">
                 <a:extLst>
                   <a:ext uri="{FF2B5EF4-FFF2-40B4-BE49-F238E27FC236}">
-                    <a16:creationId xmlns:a16="http://schemas.microsoft.com/office/drawing/2014/main" xmlns="" id="{34B1DEA3-BAAD-D90C-CD9D-99A5A24F4544}"/>
+                    <a16:creationId xmlns="" xmlns:a16="http://schemas.microsoft.com/office/drawing/2014/main" id="{34B1DEA3-BAAD-D90C-CD9D-99A5A24F4544}"/>
                   </a:ext>
                 </a:extLst>
               </p:cNvPr>
@@ -16066,7 +16104,19 @@
               <a:p>
                 <a:r>
                   <a:rPr lang="pt-BR" dirty="0"/>
-                  <a:t>Usamos a generalização da função da entropia cruzada, chamada de </a:t>
+                  <a:t>Usamos a </a:t>
+                </a:r>
+                <a:r>
+                  <a:rPr lang="pt-BR" b="1" dirty="0">
+                    <a:solidFill>
+                      <a:schemeClr val="accent2"/>
+                    </a:solidFill>
+                  </a:rPr>
+                  <a:t>generalização da função da entropia cruzada</a:t>
+                </a:r>
+                <a:r>
+                  <a:rPr lang="pt-BR" dirty="0"/>
+                  <a:t>, chamada de </a:t>
                 </a:r>
                 <a:r>
                   <a:rPr lang="pt-BR" b="1" dirty="0"/>
@@ -16701,8 +16751,16 @@
                   <a:buChar char="§"/>
                 </a:pPr>
                 <a:r>
-                  <a:rPr lang="pt-BR" dirty="0"/>
-                  <a:t>O erro tende a 0 quando </a:t>
+                  <a:rPr lang="pt-BR" b="1" dirty="0" smtClean="0"/>
+                  <a:t>OBS</a:t>
+                </a:r>
+                <a:r>
+                  <a:rPr lang="pt-BR" dirty="0" smtClean="0"/>
+                  <a:t>.: O </a:t>
+                </a:r>
+                <a:r>
+                  <a:rPr lang="pt-BR" dirty="0"/>
+                  <a:t>erro tende a 0 quando </a:t>
                 </a:r>
                 <a14:m>
                   <m:oMath xmlns:m="http://schemas.openxmlformats.org/officeDocument/2006/math">
@@ -16784,13 +16842,13 @@
             </p:txBody>
           </p:sp>
         </mc:Choice>
-        <mc:Fallback xmlns="">
+        <mc:Fallback>
           <p:sp>
             <p:nvSpPr>
               <p:cNvPr id="3" name="Content Placeholder 2">
                 <a:extLst>
                   <a:ext uri="{FF2B5EF4-FFF2-40B4-BE49-F238E27FC236}">
-                    <a16:creationId xmlns:a16="http://schemas.microsoft.com/office/drawing/2014/main" id="{34B1DEA3-BAAD-D90C-CD9D-99A5A24F4544}"/>
+                    <a16:creationId xmlns="" xmlns:a16="http://schemas.microsoft.com/office/drawing/2014/main" xmlns:a14="http://schemas.microsoft.com/office/drawing/2010/main" id="{34B1DEA3-BAAD-D90C-CD9D-99A5A24F4544}"/>
                   </a:ext>
                 </a:extLst>
               </p:cNvPr>
@@ -16806,10 +16864,10 @@
                 <a:off x="838199" y="1825624"/>
                 <a:ext cx="11353801" cy="5032375"/>
               </a:xfrm>
-              <a:blipFill>
+              <a:blipFill rotWithShape="0">
                 <a:blip r:embed="rId2"/>
                 <a:stretch>
-                  <a:fillRect l="-1074" t="-1937" r="-590" b="-2179"/>
+                  <a:fillRect l="-1074" t="-1937" r="-376" b="-2179"/>
                 </a:stretch>
               </a:blipFill>
             </p:spPr>
@@ -16818,7 +16876,7 @@
               <a:lstStyle/>
               <a:p>
                 <a:r>
-                  <a:rPr lang="en-US">
+                  <a:rPr lang="pt-BR">
                     <a:noFill/>
                   </a:rPr>
                   <a:t> </a:t>
@@ -16863,7 +16921,7 @@
           <p:cNvPr id="2" name="Title 1">
             <a:extLst>
               <a:ext uri="{FF2B5EF4-FFF2-40B4-BE49-F238E27FC236}">
-                <a16:creationId xmlns:a16="http://schemas.microsoft.com/office/drawing/2014/main" xmlns="" id="{997538D5-DC01-EC48-38D2-99D754F1BB92}"/>
+                <a16:creationId xmlns="" xmlns:a16="http://schemas.microsoft.com/office/drawing/2014/main" id="{997538D5-DC01-EC48-38D2-99D754F1BB92}"/>
               </a:ext>
             </a:extLst>
           </p:cNvPr>
@@ -16887,14 +16945,14 @@
           </a:p>
         </p:txBody>
       </p:sp>
-      <mc:AlternateContent xmlns:mc="http://schemas.openxmlformats.org/markup-compatibility/2006" xmlns:a14="http://schemas.microsoft.com/office/drawing/2010/main">
-        <mc:Choice Requires="a14">
+      <mc:AlternateContent xmlns:mc="http://schemas.openxmlformats.org/markup-compatibility/2006">
+        <mc:Choice xmlns:a14="http://schemas.microsoft.com/office/drawing/2010/main" Requires="a14">
           <p:sp>
             <p:nvSpPr>
               <p:cNvPr id="3" name="Content Placeholder 2">
                 <a:extLst>
                   <a:ext uri="{FF2B5EF4-FFF2-40B4-BE49-F238E27FC236}">
-                    <a16:creationId xmlns:a16="http://schemas.microsoft.com/office/drawing/2014/main" xmlns="" id="{17D7928D-3A32-7330-5FDC-756155EF2F3D}"/>
+                    <a16:creationId xmlns="" xmlns:a16="http://schemas.microsoft.com/office/drawing/2014/main" id="{17D7928D-3A32-7330-5FDC-756155EF2F3D}"/>
                   </a:ext>
                 </a:extLst>
               </p:cNvPr>
@@ -17285,8 +17343,16 @@
               </a:p>
               <a:p>
                 <a:r>
-                  <a:rPr lang="pt-BR" dirty="0"/>
-                  <a:t>A função mede a </a:t>
+                  <a:rPr lang="pt-BR" dirty="0" smtClean="0"/>
+                  <a:t>Essa</a:t>
+                </a:r>
+                <a:r>
+                  <a:rPr lang="pt-BR" dirty="0" smtClean="0"/>
+                  <a:t> </a:t>
+                </a:r>
+                <a:r>
+                  <a:rPr lang="pt-BR" dirty="0"/>
+                  <a:t>função mede a </a:t>
                 </a:r>
                 <a:r>
                   <a:rPr lang="pt-BR" b="1" dirty="0">
@@ -17318,13 +17384,13 @@
             </p:txBody>
           </p:sp>
         </mc:Choice>
-        <mc:Fallback xmlns="">
+        <mc:Fallback>
           <p:sp>
             <p:nvSpPr>
               <p:cNvPr id="3" name="Content Placeholder 2">
                 <a:extLst>
                   <a:ext uri="{FF2B5EF4-FFF2-40B4-BE49-F238E27FC236}">
-                    <a16:creationId xmlns:a16="http://schemas.microsoft.com/office/drawing/2014/main" id="{17D7928D-3A32-7330-5FDC-756155EF2F3D}"/>
+                    <a16:creationId xmlns="" xmlns:a16="http://schemas.microsoft.com/office/drawing/2014/main" xmlns:a14="http://schemas.microsoft.com/office/drawing/2010/main" id="{17D7928D-3A32-7330-5FDC-756155EF2F3D}"/>
                   </a:ext>
                 </a:extLst>
               </p:cNvPr>
@@ -17336,7 +17402,7 @@
               </p:nvPr>
             </p:nvSpPr>
             <p:spPr>
-              <a:blipFill>
+              <a:blipFill rotWithShape="0">
                 <a:blip r:embed="rId2"/>
                 <a:stretch>
                   <a:fillRect l="-1043" r="-58"/>
@@ -17348,7 +17414,7 @@
               <a:lstStyle/>
               <a:p>
                 <a:r>
-                  <a:rPr lang="en-US">
+                  <a:rPr lang="pt-BR">
                     <a:noFill/>
                   </a:rPr>
                   <a:t> </a:t>
@@ -17488,7 +17554,7 @@
           <p:cNvPr id="2" name="Título 1">
             <a:extLst>
               <a:ext uri="{FF2B5EF4-FFF2-40B4-BE49-F238E27FC236}">
-                <a16:creationId xmlns:a16="http://schemas.microsoft.com/office/drawing/2014/main" xmlns="" id="{1FE7CD05-66F2-8967-6154-CCED38E0F987}"/>
+                <a16:creationId xmlns="" xmlns:a16="http://schemas.microsoft.com/office/drawing/2014/main" id="{1FE7CD05-66F2-8967-6154-CCED38E0F987}"/>
               </a:ext>
             </a:extLst>
           </p:cNvPr>
@@ -17518,7 +17584,7 @@
               <p:cNvPr id="3" name="Espaço Reservado para Conteúdo 2">
                 <a:extLst>
                   <a:ext uri="{FF2B5EF4-FFF2-40B4-BE49-F238E27FC236}">
-                    <a16:creationId xmlns:a16="http://schemas.microsoft.com/office/drawing/2014/main" xmlns="" id="{21A86630-5D79-AD4B-79FC-6C8373E8DB39}"/>
+                    <a16:creationId xmlns="" xmlns:a16="http://schemas.microsoft.com/office/drawing/2014/main" id="{21A86630-5D79-AD4B-79FC-6C8373E8DB39}"/>
                   </a:ext>
                 </a:extLst>
               </p:cNvPr>
@@ -18503,7 +18569,7 @@
           <p:cNvPr id="2" name="Título 1">
             <a:extLst>
               <a:ext uri="{FF2B5EF4-FFF2-40B4-BE49-F238E27FC236}">
-                <a16:creationId xmlns:a16="http://schemas.microsoft.com/office/drawing/2014/main" xmlns="" id="{E4598F11-6F65-0753-89FE-F5ABED77B46A}"/>
+                <a16:creationId xmlns="" xmlns:a16="http://schemas.microsoft.com/office/drawing/2014/main" id="{E4598F11-6F65-0753-89FE-F5ABED77B46A}"/>
               </a:ext>
             </a:extLst>
           </p:cNvPr>
@@ -18534,7 +18600,7 @@
               <p:cNvPr id="3" name="Espaço Reservado para Conteúdo 2">
                 <a:extLst>
                   <a:ext uri="{FF2B5EF4-FFF2-40B4-BE49-F238E27FC236}">
-                    <a16:creationId xmlns:a16="http://schemas.microsoft.com/office/drawing/2014/main" xmlns="" id="{FEF4E6DC-E916-D97A-4D18-D469285C4F2C}"/>
+                    <a16:creationId xmlns="" xmlns:a16="http://schemas.microsoft.com/office/drawing/2014/main" id="{FEF4E6DC-E916-D97A-4D18-D469285C4F2C}"/>
                   </a:ext>
                 </a:extLst>
               </p:cNvPr>
@@ -19004,7 +19070,7 @@
           <p:cNvPr id="2" name="Título 1">
             <a:extLst>
               <a:ext uri="{FF2B5EF4-FFF2-40B4-BE49-F238E27FC236}">
-                <a16:creationId xmlns:a16="http://schemas.microsoft.com/office/drawing/2014/main" xmlns="" id="{D5807923-28D2-8150-E304-526DA460D220}"/>
+                <a16:creationId xmlns="" xmlns:a16="http://schemas.microsoft.com/office/drawing/2014/main" id="{D5807923-28D2-8150-E304-526DA460D220}"/>
               </a:ext>
             </a:extLst>
           </p:cNvPr>
@@ -19033,7 +19099,7 @@
           <p:cNvPr id="3" name="Espaço Reservado para Conteúdo 2">
             <a:extLst>
               <a:ext uri="{FF2B5EF4-FFF2-40B4-BE49-F238E27FC236}">
-                <a16:creationId xmlns:a16="http://schemas.microsoft.com/office/drawing/2014/main" xmlns="" id="{FFACD180-C529-EB91-BD2D-B5F491B1E35C}"/>
+                <a16:creationId xmlns="" xmlns:a16="http://schemas.microsoft.com/office/drawing/2014/main" id="{FFACD180-C529-EB91-BD2D-B5F491B1E35C}"/>
               </a:ext>
             </a:extLst>
           </p:cNvPr>
@@ -19080,7 +19146,15 @@
                   <a:srgbClr val="7030A0"/>
                 </a:solidFill>
               </a:rPr>
-              <a:t>não existe uma forma fechada</a:t>
+              <a:t>não existe uma </a:t>
+            </a:r>
+            <a:r>
+              <a:rPr lang="pt-BR" b="1" dirty="0">
+                <a:solidFill>
+                  <a:schemeClr val="accent2"/>
+                </a:solidFill>
+              </a:rPr>
+              <a:t>forma fechada</a:t>
             </a:r>
             <a:r>
               <a:rPr lang="pt-BR" b="1" dirty="0"/>
@@ -19157,7 +19231,7 @@
           <p:cNvPr id="1026" name="Picture 2">
             <a:extLst>
               <a:ext uri="{FF2B5EF4-FFF2-40B4-BE49-F238E27FC236}">
-                <a16:creationId xmlns:a16="http://schemas.microsoft.com/office/drawing/2014/main" xmlns="" id="{6FC2BDE8-91E0-6379-9BA3-76511C6153D5}"/>
+                <a16:creationId xmlns="" xmlns:a16="http://schemas.microsoft.com/office/drawing/2014/main" id="{6FC2BDE8-91E0-6379-9BA3-76511C6153D5}"/>
               </a:ext>
             </a:extLst>
           </p:cNvPr>
@@ -19202,7 +19276,7 @@
           <p:cNvPr id="5" name="Picture 2">
             <a:extLst>
               <a:ext uri="{FF2B5EF4-FFF2-40B4-BE49-F238E27FC236}">
-                <a16:creationId xmlns:a16="http://schemas.microsoft.com/office/drawing/2014/main" xmlns="" id="{2771BE1F-7B74-36A4-AA69-9171B025A4B6}"/>
+                <a16:creationId xmlns="" xmlns:a16="http://schemas.microsoft.com/office/drawing/2014/main" id="{2771BE1F-7B74-36A4-AA69-9171B025A4B6}"/>
               </a:ext>
             </a:extLst>
           </p:cNvPr>
@@ -19277,7 +19351,7 @@
           <p:cNvPr id="2" name="Título 1">
             <a:extLst>
               <a:ext uri="{FF2B5EF4-FFF2-40B4-BE49-F238E27FC236}">
-                <a16:creationId xmlns:a16="http://schemas.microsoft.com/office/drawing/2014/main" xmlns="" id="{5D929962-9BFC-4174-AB35-CC23FA013168}"/>
+                <a16:creationId xmlns="" xmlns:a16="http://schemas.microsoft.com/office/drawing/2014/main" id="{5D929962-9BFC-4174-AB35-CC23FA013168}"/>
               </a:ext>
             </a:extLst>
           </p:cNvPr>
@@ -19308,7 +19382,7 @@
               <p:cNvPr id="3" name="Espaço Reservado para Conteúdo 2">
                 <a:extLst>
                   <a:ext uri="{FF2B5EF4-FFF2-40B4-BE49-F238E27FC236}">
-                    <a16:creationId xmlns:a16="http://schemas.microsoft.com/office/drawing/2014/main" xmlns="" id="{1D38055D-E355-F780-9CA0-0337EA0BE4FD}"/>
+                    <a16:creationId xmlns="" xmlns:a16="http://schemas.microsoft.com/office/drawing/2014/main" id="{1D38055D-E355-F780-9CA0-0337EA0BE4FD}"/>
                   </a:ext>
                 </a:extLst>
               </p:cNvPr>
@@ -20540,7 +20614,7 @@
           <p:cNvPr id="2" name="Título 1">
             <a:extLst>
               <a:ext uri="{FF2B5EF4-FFF2-40B4-BE49-F238E27FC236}">
-                <a16:creationId xmlns:a16="http://schemas.microsoft.com/office/drawing/2014/main" xmlns="" id="{01D0947A-594D-A8D5-95F3-38EB04C6BDB6}"/>
+                <a16:creationId xmlns="" xmlns:a16="http://schemas.microsoft.com/office/drawing/2014/main" id="{01D0947A-594D-A8D5-95F3-38EB04C6BDB6}"/>
               </a:ext>
             </a:extLst>
           </p:cNvPr>
@@ -20567,14 +20641,14 @@
           </a:p>
         </p:txBody>
       </p:sp>
-      <mc:AlternateContent xmlns:mc="http://schemas.openxmlformats.org/markup-compatibility/2006" xmlns:a14="http://schemas.microsoft.com/office/drawing/2010/main">
-        <mc:Choice Requires="a14">
+      <mc:AlternateContent xmlns:mc="http://schemas.openxmlformats.org/markup-compatibility/2006">
+        <mc:Choice xmlns:a14="http://schemas.microsoft.com/office/drawing/2010/main" Requires="a14">
           <p:sp>
             <p:nvSpPr>
               <p:cNvPr id="3" name="Espaço Reservado para Conteúdo 2">
                 <a:extLst>
                   <a:ext uri="{FF2B5EF4-FFF2-40B4-BE49-F238E27FC236}">
-                    <a16:creationId xmlns:a16="http://schemas.microsoft.com/office/drawing/2014/main" xmlns="" id="{DDBA288E-BBB8-E157-840C-AA685AD7D65C}"/>
+                    <a16:creationId xmlns="" xmlns:a16="http://schemas.microsoft.com/office/drawing/2014/main" id="{DDBA288E-BBB8-E157-840C-AA685AD7D65C}"/>
                   </a:ext>
                 </a:extLst>
               </p:cNvPr>
@@ -20587,8 +20661,8 @@
             </p:nvSpPr>
             <p:spPr>
               <a:xfrm>
-                <a:off x="838200" y="1825624"/>
-                <a:ext cx="11119338" cy="5032375"/>
+                <a:off x="838200" y="1840864"/>
+                <a:ext cx="11353800" cy="5032375"/>
               </a:xfrm>
             </p:spPr>
             <p:txBody>
@@ -20883,18 +20957,32 @@
               <a:p>
                 <a:r>
                   <a:rPr lang="pt-BR" dirty="0"/>
-                  <a:t>O vetor gradiente pode ser reescrito levando-se em consideração todos os </a:t>
+                  <a:t>O vetor gradiente pode ser reescrito </a:t>
+                </a:r>
+                <a:r>
+                  <a:rPr lang="pt-BR" b="1" dirty="0" smtClean="0">
+                    <a:solidFill>
+                      <a:schemeClr val="accent2"/>
+                    </a:solidFill>
+                  </a:rPr>
+                  <a:t>levando-se em consideração todos os </a:t>
                 </a:r>
                 <a14:m>
                   <m:oMath xmlns:m="http://schemas.openxmlformats.org/officeDocument/2006/math">
                     <m:r>
-                      <a:rPr lang="pt-BR" i="1" smtClean="0">
+                      <a:rPr lang="pt-BR" b="1" i="1" smtClean="0">
+                        <a:solidFill>
+                          <a:schemeClr val="accent2"/>
+                        </a:solidFill>
                         <a:latin typeface="Cambria Math" panose="02040503050406030204" pitchFamily="18" charset="0"/>
                       </a:rPr>
-                      <m:t>𝑄</m:t>
+                      <m:t>𝑸</m:t>
                     </m:r>
                     <m:r>
-                      <a:rPr lang="pt-BR" i="1" smtClean="0">
+                      <a:rPr lang="pt-BR" b="1" i="1" smtClean="0">
+                        <a:solidFill>
+                          <a:schemeClr val="accent2"/>
+                        </a:solidFill>
                         <a:latin typeface="Cambria Math" panose="02040503050406030204" pitchFamily="18" charset="0"/>
                       </a:rPr>
                       <m:t> </m:t>
@@ -20902,7 +20990,11 @@
                   </m:oMath>
                 </a14:m>
                 <a:r>
-                  <a:rPr lang="pt-BR" dirty="0"/>
+                  <a:rPr lang="pt-BR" b="1" dirty="0">
+                    <a:solidFill>
+                      <a:schemeClr val="accent2"/>
+                    </a:solidFill>
+                  </a:rPr>
                   <a:t>vetores de peso</a:t>
                 </a:r>
               </a:p>
@@ -21339,13 +21431,13 @@
             </p:txBody>
           </p:sp>
         </mc:Choice>
-        <mc:Fallback xmlns="">
+        <mc:Fallback>
           <p:sp>
             <p:nvSpPr>
               <p:cNvPr id="3" name="Espaço Reservado para Conteúdo 2">
                 <a:extLst>
                   <a:ext uri="{FF2B5EF4-FFF2-40B4-BE49-F238E27FC236}">
-                    <a16:creationId xmlns:a16="http://schemas.microsoft.com/office/drawing/2014/main" id="{DDBA288E-BBB8-E157-840C-AA685AD7D65C}"/>
+                    <a16:creationId xmlns="" xmlns:a16="http://schemas.microsoft.com/office/drawing/2014/main" xmlns:a14="http://schemas.microsoft.com/office/drawing/2010/main" id="{DDBA288E-BBB8-E157-840C-AA685AD7D65C}"/>
                   </a:ext>
                 </a:extLst>
               </p:cNvPr>
@@ -21358,13 +21450,13 @@
             </p:nvSpPr>
             <p:spPr>
               <a:xfrm>
-                <a:off x="838200" y="1825624"/>
-                <a:ext cx="11119338" cy="5032375"/>
+                <a:off x="838200" y="1840864"/>
+                <a:ext cx="11353800" cy="5032375"/>
               </a:xfrm>
-              <a:blipFill>
+              <a:blipFill rotWithShape="0">
                 <a:blip r:embed="rId3"/>
                 <a:stretch>
-                  <a:fillRect l="-1151" r="-1754" b="-726"/>
+                  <a:fillRect l="-1128" r="-1557" b="-848"/>
                 </a:stretch>
               </a:blipFill>
             </p:spPr>
@@ -21373,7 +21465,7 @@
               <a:lstStyle/>
               <a:p>
                 <a:r>
-                  <a:rPr lang="en-US">
+                  <a:rPr lang="pt-BR">
                     <a:noFill/>
                   </a:rPr>
                   <a:t> </a:t>
@@ -21418,7 +21510,7 @@
           <p:cNvPr id="2" name="Título 1">
             <a:extLst>
               <a:ext uri="{FF2B5EF4-FFF2-40B4-BE49-F238E27FC236}">
-                <a16:creationId xmlns:a16="http://schemas.microsoft.com/office/drawing/2014/main" xmlns="" id="{E0F1FD81-6095-2AF0-8691-34E55B8A93B5}"/>
+                <a16:creationId xmlns="" xmlns:a16="http://schemas.microsoft.com/office/drawing/2014/main" id="{E0F1FD81-6095-2AF0-8691-34E55B8A93B5}"/>
               </a:ext>
             </a:extLst>
           </p:cNvPr>
@@ -21452,7 +21544,7 @@
               <p:cNvPr id="3" name="Espaço Reservado para Conteúdo 2">
                 <a:extLst>
                   <a:ext uri="{FF2B5EF4-FFF2-40B4-BE49-F238E27FC236}">
-                    <a16:creationId xmlns:a16="http://schemas.microsoft.com/office/drawing/2014/main" xmlns="" id="{BB734B24-DA50-860B-5D55-C33F6F451B6F}"/>
+                    <a16:creationId xmlns="" xmlns:a16="http://schemas.microsoft.com/office/drawing/2014/main" id="{BB734B24-DA50-860B-5D55-C33F6F451B6F}"/>
                   </a:ext>
                 </a:extLst>
               </p:cNvPr>
@@ -22000,7 +22092,7 @@
           <p:cNvPr id="4" name="Imagem 5">
             <a:extLst>
               <a:ext uri="{FF2B5EF4-FFF2-40B4-BE49-F238E27FC236}">
-                <a16:creationId xmlns:a16="http://schemas.microsoft.com/office/drawing/2014/main" xmlns="" id="{535159CB-11DC-74B8-5C5F-D571CD018327}"/>
+                <a16:creationId xmlns="" xmlns:a16="http://schemas.microsoft.com/office/drawing/2014/main" id="{535159CB-11DC-74B8-5C5F-D571CD018327}"/>
               </a:ext>
             </a:extLst>
           </p:cNvPr>
@@ -22066,7 +22158,7 @@
           <p:cNvPr id="2" name="Título 1">
             <a:extLst>
               <a:ext uri="{FF2B5EF4-FFF2-40B4-BE49-F238E27FC236}">
-                <a16:creationId xmlns:a16="http://schemas.microsoft.com/office/drawing/2014/main" xmlns="" id="{FC175046-E9DF-FCC8-C62B-B00332089713}"/>
+                <a16:creationId xmlns="" xmlns:a16="http://schemas.microsoft.com/office/drawing/2014/main" id="{FC175046-E9DF-FCC8-C62B-B00332089713}"/>
               </a:ext>
             </a:extLst>
           </p:cNvPr>
@@ -22100,7 +22192,7 @@
               <p:cNvPr id="3" name="Espaço Reservado para Conteúdo 2">
                 <a:extLst>
                   <a:ext uri="{FF2B5EF4-FFF2-40B4-BE49-F238E27FC236}">
-                    <a16:creationId xmlns:a16="http://schemas.microsoft.com/office/drawing/2014/main" xmlns="" id="{24721BB7-DBA3-D8BF-7F98-ED91BD59DAEC}"/>
+                    <a16:creationId xmlns="" xmlns:a16="http://schemas.microsoft.com/office/drawing/2014/main" id="{24721BB7-DBA3-D8BF-7F98-ED91BD59DAEC}"/>
                   </a:ext>
                 </a:extLst>
               </p:cNvPr>
@@ -22408,7 +22500,7 @@
           <p:cNvPr id="6" name="Imagem 5">
             <a:extLst>
               <a:ext uri="{FF2B5EF4-FFF2-40B4-BE49-F238E27FC236}">
-                <a16:creationId xmlns:a16="http://schemas.microsoft.com/office/drawing/2014/main" xmlns="" id="{FF78CF76-EB26-3FAE-0391-E452288FA28E}"/>
+                <a16:creationId xmlns="" xmlns:a16="http://schemas.microsoft.com/office/drawing/2014/main" id="{FF78CF76-EB26-3FAE-0391-E452288FA28E}"/>
               </a:ext>
             </a:extLst>
           </p:cNvPr>
@@ -22444,7 +22536,7 @@
           <p:cNvPr id="5" name="Rectangle 2">
             <a:extLst>
               <a:ext uri="{FF2B5EF4-FFF2-40B4-BE49-F238E27FC236}">
-                <a16:creationId xmlns="" xmlns:a16="http://schemas.microsoft.com/office/drawing/2014/main" id="{0357C04D-3666-45D0-A263-597819F48D09}"/>
+                <a16:creationId xmlns:a16="http://schemas.microsoft.com/office/drawing/2014/main" xmlns="" id="{0357C04D-3666-45D0-A263-597819F48D09}"/>
               </a:ext>
             </a:extLst>
           </p:cNvPr>
@@ -22672,7 +22764,7 @@
           <p:cNvPr id="4" name="Título 1">
             <a:extLst>
               <a:ext uri="{FF2B5EF4-FFF2-40B4-BE49-F238E27FC236}">
-                <a16:creationId xmlns="" xmlns:a16="http://schemas.microsoft.com/office/drawing/2014/main" id="{32666AC8-2E17-4DB4-B0F5-60C640CCFD2E}"/>
+                <a16:creationId xmlns:a16="http://schemas.microsoft.com/office/drawing/2014/main" xmlns="" id="{32666AC8-2E17-4DB4-B0F5-60C640CCFD2E}"/>
               </a:ext>
             </a:extLst>
           </p:cNvPr>
@@ -22946,7 +23038,7 @@
           <p:cNvPr id="4" name="Picture 2" descr="Ana Barros (@anathinker) | Twitter">
             <a:extLst>
               <a:ext uri="{FF2B5EF4-FFF2-40B4-BE49-F238E27FC236}">
-                <a16:creationId xmlns="" xmlns:a16="http://schemas.microsoft.com/office/drawing/2014/main" id="{AF3F0044-4F7D-98F6-34C1-8351487DFDAA}"/>
+                <a16:creationId xmlns:a16="http://schemas.microsoft.com/office/drawing/2014/main" xmlns="" id="{AF3F0044-4F7D-98F6-34C1-8351487DFDAA}"/>
               </a:ext>
             </a:extLst>
           </p:cNvPr>
@@ -22993,7 +23085,7 @@
           <p:cNvPr id="5" name="Picture 6" descr="Analyzing Text Classification Techniques on Youtube Data">
             <a:extLst>
               <a:ext uri="{FF2B5EF4-FFF2-40B4-BE49-F238E27FC236}">
-                <a16:creationId xmlns="" xmlns:a16="http://schemas.microsoft.com/office/drawing/2014/main" id="{0E6041F8-AB14-54C0-C790-0288A3AC8FBA}"/>
+                <a16:creationId xmlns:a16="http://schemas.microsoft.com/office/drawing/2014/main" xmlns="" id="{0E6041F8-AB14-54C0-C790-0288A3AC8FBA}"/>
               </a:ext>
             </a:extLst>
           </p:cNvPr>
@@ -23038,7 +23130,7 @@
           <p:cNvPr id="6" name="Picture 2" descr="Sentiment Fig 1">
             <a:extLst>
               <a:ext uri="{FF2B5EF4-FFF2-40B4-BE49-F238E27FC236}">
-                <a16:creationId xmlns="" xmlns:a16="http://schemas.microsoft.com/office/drawing/2014/main" id="{1E7CC96F-55AB-1482-92F6-240F8E2E0D1E}"/>
+                <a16:creationId xmlns:a16="http://schemas.microsoft.com/office/drawing/2014/main" xmlns="" id="{1E7CC96F-55AB-1482-92F6-240F8E2E0D1E}"/>
               </a:ext>
             </a:extLst>
           </p:cNvPr>
@@ -23325,7 +23417,7 @@
           <p:cNvPr id="7" name="Picture 2" descr="Ana Barros (@anathinker) | Twitter">
             <a:extLst>
               <a:ext uri="{FF2B5EF4-FFF2-40B4-BE49-F238E27FC236}">
-                <a16:creationId xmlns="" xmlns:a16="http://schemas.microsoft.com/office/drawing/2014/main" id="{A2D479C7-0684-420F-2CCD-64C3DB79FDAB}"/>
+                <a16:creationId xmlns:a16="http://schemas.microsoft.com/office/drawing/2014/main" xmlns="" id="{A2D479C7-0684-420F-2CCD-64C3DB79FDAB}"/>
               </a:ext>
             </a:extLst>
           </p:cNvPr>
@@ -23372,7 +23464,7 @@
           <p:cNvPr id="8" name="Picture 6" descr="Analyzing Text Classification Techniques on Youtube Data">
             <a:extLst>
               <a:ext uri="{FF2B5EF4-FFF2-40B4-BE49-F238E27FC236}">
-                <a16:creationId xmlns="" xmlns:a16="http://schemas.microsoft.com/office/drawing/2014/main" id="{A59F8A2C-ACDF-09C7-B528-9064CEF3B848}"/>
+                <a16:creationId xmlns:a16="http://schemas.microsoft.com/office/drawing/2014/main" xmlns="" id="{A59F8A2C-ACDF-09C7-B528-9064CEF3B848}"/>
               </a:ext>
             </a:extLst>
           </p:cNvPr>
@@ -23417,7 +23509,7 @@
           <p:cNvPr id="9" name="Picture 2" descr="Sentiment Fig 1">
             <a:extLst>
               <a:ext uri="{FF2B5EF4-FFF2-40B4-BE49-F238E27FC236}">
-                <a16:creationId xmlns="" xmlns:a16="http://schemas.microsoft.com/office/drawing/2014/main" id="{E178FF16-CC3F-C34B-6C8B-874BC4FA61A4}"/>
+                <a16:creationId xmlns:a16="http://schemas.microsoft.com/office/drawing/2014/main" xmlns="" id="{E178FF16-CC3F-C34B-6C8B-874BC4FA61A4}"/>
               </a:ext>
             </a:extLst>
           </p:cNvPr>
@@ -23494,7 +23586,7 @@
           <p:cNvPr id="2" name="Título 1">
             <a:extLst>
               <a:ext uri="{FF2B5EF4-FFF2-40B4-BE49-F238E27FC236}">
-                <a16:creationId xmlns="" xmlns:a16="http://schemas.microsoft.com/office/drawing/2014/main" id="{95206997-C98C-FF52-62A1-725EEA7A8A7E}"/>
+                <a16:creationId xmlns:a16="http://schemas.microsoft.com/office/drawing/2014/main" xmlns="" id="{95206997-C98C-FF52-62A1-725EEA7A8A7E}"/>
               </a:ext>
             </a:extLst>
           </p:cNvPr>
@@ -23524,7 +23616,7 @@
               <p:cNvPr id="3" name="Espaço Reservado para Conteúdo 2">
                 <a:extLst>
                   <a:ext uri="{FF2B5EF4-FFF2-40B4-BE49-F238E27FC236}">
-                    <a16:creationId xmlns="" xmlns:a16="http://schemas.microsoft.com/office/drawing/2014/main" id="{50B99F56-FF18-D044-7799-0502D4F6A5FB}"/>
+                    <a16:creationId xmlns:a16="http://schemas.microsoft.com/office/drawing/2014/main" xmlns="" id="{50B99F56-FF18-D044-7799-0502D4F6A5FB}"/>
                   </a:ext>
                 </a:extLst>
               </p:cNvPr>
@@ -24109,7 +24201,7 @@
           <p:cNvPr id="2" name="Título 1">
             <a:extLst>
               <a:ext uri="{FF2B5EF4-FFF2-40B4-BE49-F238E27FC236}">
-                <a16:creationId xmlns="" xmlns:a16="http://schemas.microsoft.com/office/drawing/2014/main" id="{40D4148F-5E93-6FF0-6B66-AC9E3B82640A}"/>
+                <a16:creationId xmlns:a16="http://schemas.microsoft.com/office/drawing/2014/main" xmlns="" id="{40D4148F-5E93-6FF0-6B66-AC9E3B82640A}"/>
               </a:ext>
             </a:extLst>
           </p:cNvPr>
@@ -24139,7 +24231,7 @@
               <p:cNvPr id="3" name="Espaço Reservado para Conteúdo 2">
                 <a:extLst>
                   <a:ext uri="{FF2B5EF4-FFF2-40B4-BE49-F238E27FC236}">
-                    <a16:creationId xmlns="" xmlns:a16="http://schemas.microsoft.com/office/drawing/2014/main" id="{A4787C4F-F235-6888-5AFF-2CB1361FF6FD}"/>
+                    <a16:creationId xmlns:a16="http://schemas.microsoft.com/office/drawing/2014/main" xmlns="" id="{A4787C4F-F235-6888-5AFF-2CB1361FF6FD}"/>
                   </a:ext>
                 </a:extLst>
               </p:cNvPr>
@@ -25896,7 +25988,7 @@
           <p:cNvPr id="21" name="Mais 7">
             <a:extLst>
               <a:ext uri="{FF2B5EF4-FFF2-40B4-BE49-F238E27FC236}">
-                <a16:creationId xmlns="" xmlns:a16="http://schemas.microsoft.com/office/drawing/2014/main" id="{7B31CAF2-5F3C-E55A-EC75-167BCE74F1F7}"/>
+                <a16:creationId xmlns:a16="http://schemas.microsoft.com/office/drawing/2014/main" xmlns="" id="{7B31CAF2-5F3C-E55A-EC75-167BCE74F1F7}"/>
               </a:ext>
             </a:extLst>
           </p:cNvPr>
@@ -25980,7 +26072,7 @@
           <p:cNvPr id="2" name="Título 1">
             <a:extLst>
               <a:ext uri="{FF2B5EF4-FFF2-40B4-BE49-F238E27FC236}">
-                <a16:creationId xmlns="" xmlns:a16="http://schemas.microsoft.com/office/drawing/2014/main" id="{F625D040-A3FE-41E3-3BD0-3C0548CFEAD3}"/>
+                <a16:creationId xmlns:a16="http://schemas.microsoft.com/office/drawing/2014/main" xmlns="" id="{F625D040-A3FE-41E3-3BD0-3C0548CFEAD3}"/>
               </a:ext>
             </a:extLst>
           </p:cNvPr>
@@ -26010,7 +26102,7 @@
               <p:cNvPr id="3" name="Espaço Reservado para Conteúdo 2">
                 <a:extLst>
                   <a:ext uri="{FF2B5EF4-FFF2-40B4-BE49-F238E27FC236}">
-                    <a16:creationId xmlns="" xmlns:a16="http://schemas.microsoft.com/office/drawing/2014/main" id="{3BAFA38F-B924-7049-765D-660ED8C4845B}"/>
+                    <a16:creationId xmlns:a16="http://schemas.microsoft.com/office/drawing/2014/main" xmlns="" id="{3BAFA38F-B924-7049-765D-660ED8C4845B}"/>
                   </a:ext>
                 </a:extLst>
               </p:cNvPr>
@@ -26775,7 +26867,7 @@
           <p:cNvPr id="2" name="Título 1">
             <a:extLst>
               <a:ext uri="{FF2B5EF4-FFF2-40B4-BE49-F238E27FC236}">
-                <a16:creationId xmlns="" xmlns:a16="http://schemas.microsoft.com/office/drawing/2014/main" id="{685EDE22-7739-3353-3DBC-8480197DC616}"/>
+                <a16:creationId xmlns:a16="http://schemas.microsoft.com/office/drawing/2014/main" xmlns="" id="{685EDE22-7739-3353-3DBC-8480197DC616}"/>
               </a:ext>
             </a:extLst>
           </p:cNvPr>
@@ -26805,7 +26897,7 @@
               <p:cNvPr id="3" name="Espaço Reservado para Conteúdo 2">
                 <a:extLst>
                   <a:ext uri="{FF2B5EF4-FFF2-40B4-BE49-F238E27FC236}">
-                    <a16:creationId xmlns="" xmlns:a16="http://schemas.microsoft.com/office/drawing/2014/main" id="{2145CEE8-2FB2-6EEA-841B-CC93323A97A6}"/>
+                    <a16:creationId xmlns:a16="http://schemas.microsoft.com/office/drawing/2014/main" xmlns="" id="{2145CEE8-2FB2-6EEA-841B-CC93323A97A6}"/>
                   </a:ext>
                 </a:extLst>
               </p:cNvPr>

--- a/slides/T320_Classificação (Parte IV).pptx
+++ b/slides/T320_Classificação (Parte IV).pptx
@@ -6419,7 +6419,7 @@
           <p:cNvPr id="2" name="Título 1">
             <a:extLst>
               <a:ext uri="{FF2B5EF4-FFF2-40B4-BE49-F238E27FC236}">
-                <a16:creationId xmlns:a16="http://schemas.microsoft.com/office/drawing/2014/main" xmlns="" id="{1DB9B4FF-B06E-403C-A326-BDC64D8FF94E}"/>
+                <a16:creationId xmlns="" xmlns:a16="http://schemas.microsoft.com/office/drawing/2014/main" id="{1DB9B4FF-B06E-403C-A326-BDC64D8FF94E}"/>
               </a:ext>
             </a:extLst>
           </p:cNvPr>
@@ -6456,7 +6456,7 @@
           <p:cNvPr id="3" name="Subtítulo 2">
             <a:extLst>
               <a:ext uri="{FF2B5EF4-FFF2-40B4-BE49-F238E27FC236}">
-                <a16:creationId xmlns:a16="http://schemas.microsoft.com/office/drawing/2014/main" xmlns="" id="{247BDFCE-746E-45BF-A319-4733D58D1632}"/>
+                <a16:creationId xmlns="" xmlns:a16="http://schemas.microsoft.com/office/drawing/2014/main" id="{247BDFCE-746E-45BF-A319-4733D58D1632}"/>
               </a:ext>
             </a:extLst>
           </p:cNvPr>
@@ -6526,7 +6526,7 @@
           <p:cNvPr id="4" name="Espaço Reservado para Data 3">
             <a:extLst>
               <a:ext uri="{FF2B5EF4-FFF2-40B4-BE49-F238E27FC236}">
-                <a16:creationId xmlns:a16="http://schemas.microsoft.com/office/drawing/2014/main" xmlns="" id="{9EDE2778-5372-4104-B96D-968184DA8288}"/>
+                <a16:creationId xmlns="" xmlns:a16="http://schemas.microsoft.com/office/drawing/2014/main" id="{9EDE2778-5372-4104-B96D-968184DA8288}"/>
               </a:ext>
             </a:extLst>
           </p:cNvPr>
@@ -6555,7 +6555,7 @@
           <p:cNvPr id="5" name="Espaço Reservado para Rodapé 4">
             <a:extLst>
               <a:ext uri="{FF2B5EF4-FFF2-40B4-BE49-F238E27FC236}">
-                <a16:creationId xmlns:a16="http://schemas.microsoft.com/office/drawing/2014/main" xmlns="" id="{C1DD0F41-C861-4051-988D-3024A37A4B93}"/>
+                <a16:creationId xmlns="" xmlns:a16="http://schemas.microsoft.com/office/drawing/2014/main" id="{C1DD0F41-C861-4051-988D-3024A37A4B93}"/>
               </a:ext>
             </a:extLst>
           </p:cNvPr>
@@ -6580,7 +6580,7 @@
           <p:cNvPr id="6" name="Espaço Reservado para Número de Slide 5">
             <a:extLst>
               <a:ext uri="{FF2B5EF4-FFF2-40B4-BE49-F238E27FC236}">
-                <a16:creationId xmlns:a16="http://schemas.microsoft.com/office/drawing/2014/main" xmlns="" id="{07E5967E-D980-431A-A5DB-3F0C5030A81E}"/>
+                <a16:creationId xmlns="" xmlns:a16="http://schemas.microsoft.com/office/drawing/2014/main" id="{07E5967E-D980-431A-A5DB-3F0C5030A81E}"/>
               </a:ext>
             </a:extLst>
           </p:cNvPr>
@@ -6639,7 +6639,7 @@
           <p:cNvPr id="2" name="Título 1">
             <a:extLst>
               <a:ext uri="{FF2B5EF4-FFF2-40B4-BE49-F238E27FC236}">
-                <a16:creationId xmlns:a16="http://schemas.microsoft.com/office/drawing/2014/main" xmlns="" id="{9036C49F-3E68-4175-81BA-3C3FEE44308A}"/>
+                <a16:creationId xmlns="" xmlns:a16="http://schemas.microsoft.com/office/drawing/2014/main" id="{9036C49F-3E68-4175-81BA-3C3FEE44308A}"/>
               </a:ext>
             </a:extLst>
           </p:cNvPr>
@@ -6667,7 +6667,7 @@
           <p:cNvPr id="3" name="Espaço Reservado para Texto Vertical 2">
             <a:extLst>
               <a:ext uri="{FF2B5EF4-FFF2-40B4-BE49-F238E27FC236}">
-                <a16:creationId xmlns:a16="http://schemas.microsoft.com/office/drawing/2014/main" xmlns="" id="{426FA736-3DD3-4D4E-B57B-BBE1D8F7D424}"/>
+                <a16:creationId xmlns="" xmlns:a16="http://schemas.microsoft.com/office/drawing/2014/main" id="{426FA736-3DD3-4D4E-B57B-BBE1D8F7D424}"/>
               </a:ext>
             </a:extLst>
           </p:cNvPr>
@@ -6724,7 +6724,7 @@
           <p:cNvPr id="4" name="Espaço Reservado para Data 3">
             <a:extLst>
               <a:ext uri="{FF2B5EF4-FFF2-40B4-BE49-F238E27FC236}">
-                <a16:creationId xmlns:a16="http://schemas.microsoft.com/office/drawing/2014/main" xmlns="" id="{99E8855C-D8FD-48F6-B14E-861E0DE4D915}"/>
+                <a16:creationId xmlns="" xmlns:a16="http://schemas.microsoft.com/office/drawing/2014/main" id="{99E8855C-D8FD-48F6-B14E-861E0DE4D915}"/>
               </a:ext>
             </a:extLst>
           </p:cNvPr>
@@ -6753,7 +6753,7 @@
           <p:cNvPr id="5" name="Espaço Reservado para Rodapé 4">
             <a:extLst>
               <a:ext uri="{FF2B5EF4-FFF2-40B4-BE49-F238E27FC236}">
-                <a16:creationId xmlns:a16="http://schemas.microsoft.com/office/drawing/2014/main" xmlns="" id="{97C0BB88-2F21-42A5-ACFF-83DA47F2D340}"/>
+                <a16:creationId xmlns="" xmlns:a16="http://schemas.microsoft.com/office/drawing/2014/main" id="{97C0BB88-2F21-42A5-ACFF-83DA47F2D340}"/>
               </a:ext>
             </a:extLst>
           </p:cNvPr>
@@ -6778,7 +6778,7 @@
           <p:cNvPr id="6" name="Espaço Reservado para Número de Slide 5">
             <a:extLst>
               <a:ext uri="{FF2B5EF4-FFF2-40B4-BE49-F238E27FC236}">
-                <a16:creationId xmlns:a16="http://schemas.microsoft.com/office/drawing/2014/main" xmlns="" id="{6CB462B3-1F22-4C05-B4B8-7A279FB7D5E9}"/>
+                <a16:creationId xmlns="" xmlns:a16="http://schemas.microsoft.com/office/drawing/2014/main" id="{6CB462B3-1F22-4C05-B4B8-7A279FB7D5E9}"/>
               </a:ext>
             </a:extLst>
           </p:cNvPr>
@@ -6837,7 +6837,7 @@
           <p:cNvPr id="2" name="Título Vertical 1">
             <a:extLst>
               <a:ext uri="{FF2B5EF4-FFF2-40B4-BE49-F238E27FC236}">
-                <a16:creationId xmlns:a16="http://schemas.microsoft.com/office/drawing/2014/main" xmlns="" id="{EAEAB728-701C-4207-A9D5-23FF45C60502}"/>
+                <a16:creationId xmlns="" xmlns:a16="http://schemas.microsoft.com/office/drawing/2014/main" id="{EAEAB728-701C-4207-A9D5-23FF45C60502}"/>
               </a:ext>
             </a:extLst>
           </p:cNvPr>
@@ -6870,7 +6870,7 @@
           <p:cNvPr id="3" name="Espaço Reservado para Texto Vertical 2">
             <a:extLst>
               <a:ext uri="{FF2B5EF4-FFF2-40B4-BE49-F238E27FC236}">
-                <a16:creationId xmlns:a16="http://schemas.microsoft.com/office/drawing/2014/main" xmlns="" id="{BA8C8CCF-7823-480A-9A19-0F664DD17E3B}"/>
+                <a16:creationId xmlns="" xmlns:a16="http://schemas.microsoft.com/office/drawing/2014/main" id="{BA8C8CCF-7823-480A-9A19-0F664DD17E3B}"/>
               </a:ext>
             </a:extLst>
           </p:cNvPr>
@@ -6932,7 +6932,7 @@
           <p:cNvPr id="4" name="Espaço Reservado para Data 3">
             <a:extLst>
               <a:ext uri="{FF2B5EF4-FFF2-40B4-BE49-F238E27FC236}">
-                <a16:creationId xmlns:a16="http://schemas.microsoft.com/office/drawing/2014/main" xmlns="" id="{721D5734-7B1F-425D-942F-6EB73344027C}"/>
+                <a16:creationId xmlns="" xmlns:a16="http://schemas.microsoft.com/office/drawing/2014/main" id="{721D5734-7B1F-425D-942F-6EB73344027C}"/>
               </a:ext>
             </a:extLst>
           </p:cNvPr>
@@ -6961,7 +6961,7 @@
           <p:cNvPr id="5" name="Espaço Reservado para Rodapé 4">
             <a:extLst>
               <a:ext uri="{FF2B5EF4-FFF2-40B4-BE49-F238E27FC236}">
-                <a16:creationId xmlns:a16="http://schemas.microsoft.com/office/drawing/2014/main" xmlns="" id="{1E1AAEAC-F08D-45FE-89EC-B1B349A868C9}"/>
+                <a16:creationId xmlns="" xmlns:a16="http://schemas.microsoft.com/office/drawing/2014/main" id="{1E1AAEAC-F08D-45FE-89EC-B1B349A868C9}"/>
               </a:ext>
             </a:extLst>
           </p:cNvPr>
@@ -6986,7 +6986,7 @@
           <p:cNvPr id="6" name="Espaço Reservado para Número de Slide 5">
             <a:extLst>
               <a:ext uri="{FF2B5EF4-FFF2-40B4-BE49-F238E27FC236}">
-                <a16:creationId xmlns:a16="http://schemas.microsoft.com/office/drawing/2014/main" xmlns="" id="{BAA44493-9911-47B2-87A6-C2141A972BC8}"/>
+                <a16:creationId xmlns="" xmlns:a16="http://schemas.microsoft.com/office/drawing/2014/main" id="{BAA44493-9911-47B2-87A6-C2141A972BC8}"/>
               </a:ext>
             </a:extLst>
           </p:cNvPr>
@@ -7045,7 +7045,7 @@
           <p:cNvPr id="2" name="Título 1">
             <a:extLst>
               <a:ext uri="{FF2B5EF4-FFF2-40B4-BE49-F238E27FC236}">
-                <a16:creationId xmlns:a16="http://schemas.microsoft.com/office/drawing/2014/main" xmlns="" id="{71BD44A5-8F21-4626-A01D-48A1C874B1D5}"/>
+                <a16:creationId xmlns="" xmlns:a16="http://schemas.microsoft.com/office/drawing/2014/main" id="{71BD44A5-8F21-4626-A01D-48A1C874B1D5}"/>
               </a:ext>
             </a:extLst>
           </p:cNvPr>
@@ -7073,7 +7073,7 @@
           <p:cNvPr id="3" name="Espaço Reservado para Conteúdo 2">
             <a:extLst>
               <a:ext uri="{FF2B5EF4-FFF2-40B4-BE49-F238E27FC236}">
-                <a16:creationId xmlns:a16="http://schemas.microsoft.com/office/drawing/2014/main" xmlns="" id="{B79E8085-65A9-48AA-951D-71D978BFF4ED}"/>
+                <a16:creationId xmlns="" xmlns:a16="http://schemas.microsoft.com/office/drawing/2014/main" id="{B79E8085-65A9-48AA-951D-71D978BFF4ED}"/>
               </a:ext>
             </a:extLst>
           </p:cNvPr>
@@ -7130,7 +7130,7 @@
           <p:cNvPr id="4" name="Espaço Reservado para Data 3">
             <a:extLst>
               <a:ext uri="{FF2B5EF4-FFF2-40B4-BE49-F238E27FC236}">
-                <a16:creationId xmlns:a16="http://schemas.microsoft.com/office/drawing/2014/main" xmlns="" id="{F05BE1AF-51EA-425D-B188-DE7BD675009F}"/>
+                <a16:creationId xmlns="" xmlns:a16="http://schemas.microsoft.com/office/drawing/2014/main" id="{F05BE1AF-51EA-425D-B188-DE7BD675009F}"/>
               </a:ext>
             </a:extLst>
           </p:cNvPr>
@@ -7159,7 +7159,7 @@
           <p:cNvPr id="5" name="Espaço Reservado para Rodapé 4">
             <a:extLst>
               <a:ext uri="{FF2B5EF4-FFF2-40B4-BE49-F238E27FC236}">
-                <a16:creationId xmlns:a16="http://schemas.microsoft.com/office/drawing/2014/main" xmlns="" id="{121BE632-29CF-4CB9-B365-C9EF38F89BE6}"/>
+                <a16:creationId xmlns="" xmlns:a16="http://schemas.microsoft.com/office/drawing/2014/main" id="{121BE632-29CF-4CB9-B365-C9EF38F89BE6}"/>
               </a:ext>
             </a:extLst>
           </p:cNvPr>
@@ -7184,7 +7184,7 @@
           <p:cNvPr id="6" name="Espaço Reservado para Número de Slide 5">
             <a:extLst>
               <a:ext uri="{FF2B5EF4-FFF2-40B4-BE49-F238E27FC236}">
-                <a16:creationId xmlns:a16="http://schemas.microsoft.com/office/drawing/2014/main" xmlns="" id="{60CF3DD1-9AEC-4A57-B461-4E4DD86FAC18}"/>
+                <a16:creationId xmlns="" xmlns:a16="http://schemas.microsoft.com/office/drawing/2014/main" id="{60CF3DD1-9AEC-4A57-B461-4E4DD86FAC18}"/>
               </a:ext>
             </a:extLst>
           </p:cNvPr>
@@ -7243,7 +7243,7 @@
           <p:cNvPr id="2" name="Título 1">
             <a:extLst>
               <a:ext uri="{FF2B5EF4-FFF2-40B4-BE49-F238E27FC236}">
-                <a16:creationId xmlns:a16="http://schemas.microsoft.com/office/drawing/2014/main" xmlns="" id="{34AB2FF0-A4D7-4E28-991D-FF26140D5988}"/>
+                <a16:creationId xmlns="" xmlns:a16="http://schemas.microsoft.com/office/drawing/2014/main" id="{34AB2FF0-A4D7-4E28-991D-FF26140D5988}"/>
               </a:ext>
             </a:extLst>
           </p:cNvPr>
@@ -7280,7 +7280,7 @@
           <p:cNvPr id="3" name="Espaço Reservado para Texto 2">
             <a:extLst>
               <a:ext uri="{FF2B5EF4-FFF2-40B4-BE49-F238E27FC236}">
-                <a16:creationId xmlns:a16="http://schemas.microsoft.com/office/drawing/2014/main" xmlns="" id="{E2AC45B0-4145-40DB-8E61-105461170604}"/>
+                <a16:creationId xmlns="" xmlns:a16="http://schemas.microsoft.com/office/drawing/2014/main" id="{E2AC45B0-4145-40DB-8E61-105461170604}"/>
               </a:ext>
             </a:extLst>
           </p:cNvPr>
@@ -7405,7 +7405,7 @@
           <p:cNvPr id="4" name="Espaço Reservado para Data 3">
             <a:extLst>
               <a:ext uri="{FF2B5EF4-FFF2-40B4-BE49-F238E27FC236}">
-                <a16:creationId xmlns:a16="http://schemas.microsoft.com/office/drawing/2014/main" xmlns="" id="{50F1D3FB-740A-4EBA-A309-2CE71D12ECFB}"/>
+                <a16:creationId xmlns="" xmlns:a16="http://schemas.microsoft.com/office/drawing/2014/main" id="{50F1D3FB-740A-4EBA-A309-2CE71D12ECFB}"/>
               </a:ext>
             </a:extLst>
           </p:cNvPr>
@@ -7434,7 +7434,7 @@
           <p:cNvPr id="5" name="Espaço Reservado para Rodapé 4">
             <a:extLst>
               <a:ext uri="{FF2B5EF4-FFF2-40B4-BE49-F238E27FC236}">
-                <a16:creationId xmlns:a16="http://schemas.microsoft.com/office/drawing/2014/main" xmlns="" id="{BDCAB18F-8715-4465-A940-F9C193A2ACE9}"/>
+                <a16:creationId xmlns="" xmlns:a16="http://schemas.microsoft.com/office/drawing/2014/main" id="{BDCAB18F-8715-4465-A940-F9C193A2ACE9}"/>
               </a:ext>
             </a:extLst>
           </p:cNvPr>
@@ -7459,7 +7459,7 @@
           <p:cNvPr id="6" name="Espaço Reservado para Número de Slide 5">
             <a:extLst>
               <a:ext uri="{FF2B5EF4-FFF2-40B4-BE49-F238E27FC236}">
-                <a16:creationId xmlns:a16="http://schemas.microsoft.com/office/drawing/2014/main" xmlns="" id="{353466C6-8248-429F-8056-FF040BF509EB}"/>
+                <a16:creationId xmlns="" xmlns:a16="http://schemas.microsoft.com/office/drawing/2014/main" id="{353466C6-8248-429F-8056-FF040BF509EB}"/>
               </a:ext>
             </a:extLst>
           </p:cNvPr>
@@ -7518,7 +7518,7 @@
           <p:cNvPr id="2" name="Título 1">
             <a:extLst>
               <a:ext uri="{FF2B5EF4-FFF2-40B4-BE49-F238E27FC236}">
-                <a16:creationId xmlns:a16="http://schemas.microsoft.com/office/drawing/2014/main" xmlns="" id="{BC7BB9F0-F14B-4A91-B2B7-35BC47FE4DE7}"/>
+                <a16:creationId xmlns="" xmlns:a16="http://schemas.microsoft.com/office/drawing/2014/main" id="{BC7BB9F0-F14B-4A91-B2B7-35BC47FE4DE7}"/>
               </a:ext>
             </a:extLst>
           </p:cNvPr>
@@ -7546,7 +7546,7 @@
           <p:cNvPr id="3" name="Espaço Reservado para Conteúdo 2">
             <a:extLst>
               <a:ext uri="{FF2B5EF4-FFF2-40B4-BE49-F238E27FC236}">
-                <a16:creationId xmlns:a16="http://schemas.microsoft.com/office/drawing/2014/main" xmlns="" id="{EC1FC1C4-73DA-47A6-8496-B0B457F7D39A}"/>
+                <a16:creationId xmlns="" xmlns:a16="http://schemas.microsoft.com/office/drawing/2014/main" id="{EC1FC1C4-73DA-47A6-8496-B0B457F7D39A}"/>
               </a:ext>
             </a:extLst>
           </p:cNvPr>
@@ -7608,7 +7608,7 @@
           <p:cNvPr id="4" name="Espaço Reservado para Conteúdo 3">
             <a:extLst>
               <a:ext uri="{FF2B5EF4-FFF2-40B4-BE49-F238E27FC236}">
-                <a16:creationId xmlns:a16="http://schemas.microsoft.com/office/drawing/2014/main" xmlns="" id="{E92F06A8-A449-4D92-9912-76873E529B38}"/>
+                <a16:creationId xmlns="" xmlns:a16="http://schemas.microsoft.com/office/drawing/2014/main" id="{E92F06A8-A449-4D92-9912-76873E529B38}"/>
               </a:ext>
             </a:extLst>
           </p:cNvPr>
@@ -7670,7 +7670,7 @@
           <p:cNvPr id="5" name="Espaço Reservado para Data 4">
             <a:extLst>
               <a:ext uri="{FF2B5EF4-FFF2-40B4-BE49-F238E27FC236}">
-                <a16:creationId xmlns:a16="http://schemas.microsoft.com/office/drawing/2014/main" xmlns="" id="{938070A4-BC2F-4D55-BD8D-DEAF11BB9EE9}"/>
+                <a16:creationId xmlns="" xmlns:a16="http://schemas.microsoft.com/office/drawing/2014/main" id="{938070A4-BC2F-4D55-BD8D-DEAF11BB9EE9}"/>
               </a:ext>
             </a:extLst>
           </p:cNvPr>
@@ -7699,7 +7699,7 @@
           <p:cNvPr id="6" name="Espaço Reservado para Rodapé 5">
             <a:extLst>
               <a:ext uri="{FF2B5EF4-FFF2-40B4-BE49-F238E27FC236}">
-                <a16:creationId xmlns:a16="http://schemas.microsoft.com/office/drawing/2014/main" xmlns="" id="{45CC2DB8-844A-465F-BA9A-7734C80C7F43}"/>
+                <a16:creationId xmlns="" xmlns:a16="http://schemas.microsoft.com/office/drawing/2014/main" id="{45CC2DB8-844A-465F-BA9A-7734C80C7F43}"/>
               </a:ext>
             </a:extLst>
           </p:cNvPr>
@@ -7724,7 +7724,7 @@
           <p:cNvPr id="7" name="Espaço Reservado para Número de Slide 6">
             <a:extLst>
               <a:ext uri="{FF2B5EF4-FFF2-40B4-BE49-F238E27FC236}">
-                <a16:creationId xmlns:a16="http://schemas.microsoft.com/office/drawing/2014/main" xmlns="" id="{4CC606A8-097B-4040-94E0-CD8C88280D8F}"/>
+                <a16:creationId xmlns="" xmlns:a16="http://schemas.microsoft.com/office/drawing/2014/main" id="{4CC606A8-097B-4040-94E0-CD8C88280D8F}"/>
               </a:ext>
             </a:extLst>
           </p:cNvPr>
@@ -7783,7 +7783,7 @@
           <p:cNvPr id="2" name="Título 1">
             <a:extLst>
               <a:ext uri="{FF2B5EF4-FFF2-40B4-BE49-F238E27FC236}">
-                <a16:creationId xmlns:a16="http://schemas.microsoft.com/office/drawing/2014/main" xmlns="" id="{76D66686-0143-4CB6-8C09-BA326F1E7ACA}"/>
+                <a16:creationId xmlns="" xmlns:a16="http://schemas.microsoft.com/office/drawing/2014/main" id="{76D66686-0143-4CB6-8C09-BA326F1E7ACA}"/>
               </a:ext>
             </a:extLst>
           </p:cNvPr>
@@ -7816,7 +7816,7 @@
           <p:cNvPr id="3" name="Espaço Reservado para Texto 2">
             <a:extLst>
               <a:ext uri="{FF2B5EF4-FFF2-40B4-BE49-F238E27FC236}">
-                <a16:creationId xmlns:a16="http://schemas.microsoft.com/office/drawing/2014/main" xmlns="" id="{0227AB85-F59E-4BCE-B846-4FA0992C2F23}"/>
+                <a16:creationId xmlns="" xmlns:a16="http://schemas.microsoft.com/office/drawing/2014/main" id="{0227AB85-F59E-4BCE-B846-4FA0992C2F23}"/>
               </a:ext>
             </a:extLst>
           </p:cNvPr>
@@ -7887,7 +7887,7 @@
           <p:cNvPr id="4" name="Espaço Reservado para Conteúdo 3">
             <a:extLst>
               <a:ext uri="{FF2B5EF4-FFF2-40B4-BE49-F238E27FC236}">
-                <a16:creationId xmlns:a16="http://schemas.microsoft.com/office/drawing/2014/main" xmlns="" id="{3373456C-7319-4D0A-827D-D29F6B083F5D}"/>
+                <a16:creationId xmlns="" xmlns:a16="http://schemas.microsoft.com/office/drawing/2014/main" id="{3373456C-7319-4D0A-827D-D29F6B083F5D}"/>
               </a:ext>
             </a:extLst>
           </p:cNvPr>
@@ -7949,7 +7949,7 @@
           <p:cNvPr id="5" name="Espaço Reservado para Texto 4">
             <a:extLst>
               <a:ext uri="{FF2B5EF4-FFF2-40B4-BE49-F238E27FC236}">
-                <a16:creationId xmlns:a16="http://schemas.microsoft.com/office/drawing/2014/main" xmlns="" id="{4CD109D0-2E83-4262-8029-A871CEC47406}"/>
+                <a16:creationId xmlns="" xmlns:a16="http://schemas.microsoft.com/office/drawing/2014/main" id="{4CD109D0-2E83-4262-8029-A871CEC47406}"/>
               </a:ext>
             </a:extLst>
           </p:cNvPr>
@@ -8020,7 +8020,7 @@
           <p:cNvPr id="6" name="Espaço Reservado para Conteúdo 5">
             <a:extLst>
               <a:ext uri="{FF2B5EF4-FFF2-40B4-BE49-F238E27FC236}">
-                <a16:creationId xmlns:a16="http://schemas.microsoft.com/office/drawing/2014/main" xmlns="" id="{AD706E3A-CFBB-4A6C-A65F-D0360A9E74FE}"/>
+                <a16:creationId xmlns="" xmlns:a16="http://schemas.microsoft.com/office/drawing/2014/main" id="{AD706E3A-CFBB-4A6C-A65F-D0360A9E74FE}"/>
               </a:ext>
             </a:extLst>
           </p:cNvPr>
@@ -8082,7 +8082,7 @@
           <p:cNvPr id="7" name="Espaço Reservado para Data 6">
             <a:extLst>
               <a:ext uri="{FF2B5EF4-FFF2-40B4-BE49-F238E27FC236}">
-                <a16:creationId xmlns:a16="http://schemas.microsoft.com/office/drawing/2014/main" xmlns="" id="{4172C0E5-5AF0-4805-BB51-443733CD2BD5}"/>
+                <a16:creationId xmlns="" xmlns:a16="http://schemas.microsoft.com/office/drawing/2014/main" id="{4172C0E5-5AF0-4805-BB51-443733CD2BD5}"/>
               </a:ext>
             </a:extLst>
           </p:cNvPr>
@@ -8111,7 +8111,7 @@
           <p:cNvPr id="8" name="Espaço Reservado para Rodapé 7">
             <a:extLst>
               <a:ext uri="{FF2B5EF4-FFF2-40B4-BE49-F238E27FC236}">
-                <a16:creationId xmlns:a16="http://schemas.microsoft.com/office/drawing/2014/main" xmlns="" id="{0E801648-156F-497E-99CF-797DF48051E1}"/>
+                <a16:creationId xmlns="" xmlns:a16="http://schemas.microsoft.com/office/drawing/2014/main" id="{0E801648-156F-497E-99CF-797DF48051E1}"/>
               </a:ext>
             </a:extLst>
           </p:cNvPr>
@@ -8136,7 +8136,7 @@
           <p:cNvPr id="9" name="Espaço Reservado para Número de Slide 8">
             <a:extLst>
               <a:ext uri="{FF2B5EF4-FFF2-40B4-BE49-F238E27FC236}">
-                <a16:creationId xmlns:a16="http://schemas.microsoft.com/office/drawing/2014/main" xmlns="" id="{EEE23D32-80E7-4796-A137-66BF842E4B53}"/>
+                <a16:creationId xmlns="" xmlns:a16="http://schemas.microsoft.com/office/drawing/2014/main" id="{EEE23D32-80E7-4796-A137-66BF842E4B53}"/>
               </a:ext>
             </a:extLst>
           </p:cNvPr>
@@ -8195,7 +8195,7 @@
           <p:cNvPr id="2" name="Título 1">
             <a:extLst>
               <a:ext uri="{FF2B5EF4-FFF2-40B4-BE49-F238E27FC236}">
-                <a16:creationId xmlns:a16="http://schemas.microsoft.com/office/drawing/2014/main" xmlns="" id="{2BCE2379-C78F-47E1-8CFC-B846E7AF148D}"/>
+                <a16:creationId xmlns="" xmlns:a16="http://schemas.microsoft.com/office/drawing/2014/main" id="{2BCE2379-C78F-47E1-8CFC-B846E7AF148D}"/>
               </a:ext>
             </a:extLst>
           </p:cNvPr>
@@ -8223,7 +8223,7 @@
           <p:cNvPr id="3" name="Espaço Reservado para Data 2">
             <a:extLst>
               <a:ext uri="{FF2B5EF4-FFF2-40B4-BE49-F238E27FC236}">
-                <a16:creationId xmlns:a16="http://schemas.microsoft.com/office/drawing/2014/main" xmlns="" id="{342600A9-7F92-4E22-9D94-E4717252A817}"/>
+                <a16:creationId xmlns="" xmlns:a16="http://schemas.microsoft.com/office/drawing/2014/main" id="{342600A9-7F92-4E22-9D94-E4717252A817}"/>
               </a:ext>
             </a:extLst>
           </p:cNvPr>
@@ -8252,7 +8252,7 @@
           <p:cNvPr id="4" name="Espaço Reservado para Rodapé 3">
             <a:extLst>
               <a:ext uri="{FF2B5EF4-FFF2-40B4-BE49-F238E27FC236}">
-                <a16:creationId xmlns:a16="http://schemas.microsoft.com/office/drawing/2014/main" xmlns="" id="{192E6BED-F546-40CC-A2DF-99CBA853654E}"/>
+                <a16:creationId xmlns="" xmlns:a16="http://schemas.microsoft.com/office/drawing/2014/main" id="{192E6BED-F546-40CC-A2DF-99CBA853654E}"/>
               </a:ext>
             </a:extLst>
           </p:cNvPr>
@@ -8277,7 +8277,7 @@
           <p:cNvPr id="5" name="Espaço Reservado para Número de Slide 4">
             <a:extLst>
               <a:ext uri="{FF2B5EF4-FFF2-40B4-BE49-F238E27FC236}">
-                <a16:creationId xmlns:a16="http://schemas.microsoft.com/office/drawing/2014/main" xmlns="" id="{6091CC40-A8C4-4063-80EB-CC5099621678}"/>
+                <a16:creationId xmlns="" xmlns:a16="http://schemas.microsoft.com/office/drawing/2014/main" id="{6091CC40-A8C4-4063-80EB-CC5099621678}"/>
               </a:ext>
             </a:extLst>
           </p:cNvPr>
@@ -8336,7 +8336,7 @@
           <p:cNvPr id="2" name="Espaço Reservado para Data 1">
             <a:extLst>
               <a:ext uri="{FF2B5EF4-FFF2-40B4-BE49-F238E27FC236}">
-                <a16:creationId xmlns:a16="http://schemas.microsoft.com/office/drawing/2014/main" xmlns="" id="{DD19515C-212C-4EAE-84A3-8FF4BC844F1B}"/>
+                <a16:creationId xmlns="" xmlns:a16="http://schemas.microsoft.com/office/drawing/2014/main" id="{DD19515C-212C-4EAE-84A3-8FF4BC844F1B}"/>
               </a:ext>
             </a:extLst>
           </p:cNvPr>
@@ -8365,7 +8365,7 @@
           <p:cNvPr id="3" name="Espaço Reservado para Rodapé 2">
             <a:extLst>
               <a:ext uri="{FF2B5EF4-FFF2-40B4-BE49-F238E27FC236}">
-                <a16:creationId xmlns:a16="http://schemas.microsoft.com/office/drawing/2014/main" xmlns="" id="{94D3D120-B3E8-4C96-861D-7A4F12F49B3A}"/>
+                <a16:creationId xmlns="" xmlns:a16="http://schemas.microsoft.com/office/drawing/2014/main" id="{94D3D120-B3E8-4C96-861D-7A4F12F49B3A}"/>
               </a:ext>
             </a:extLst>
           </p:cNvPr>
@@ -8390,7 +8390,7 @@
           <p:cNvPr id="4" name="Espaço Reservado para Número de Slide 3">
             <a:extLst>
               <a:ext uri="{FF2B5EF4-FFF2-40B4-BE49-F238E27FC236}">
-                <a16:creationId xmlns:a16="http://schemas.microsoft.com/office/drawing/2014/main" xmlns="" id="{42E49B68-FA1B-468B-9F17-D5C09243D454}"/>
+                <a16:creationId xmlns="" xmlns:a16="http://schemas.microsoft.com/office/drawing/2014/main" id="{42E49B68-FA1B-468B-9F17-D5C09243D454}"/>
               </a:ext>
             </a:extLst>
           </p:cNvPr>
@@ -8449,7 +8449,7 @@
           <p:cNvPr id="2" name="Título 1">
             <a:extLst>
               <a:ext uri="{FF2B5EF4-FFF2-40B4-BE49-F238E27FC236}">
-                <a16:creationId xmlns:a16="http://schemas.microsoft.com/office/drawing/2014/main" xmlns="" id="{1C17BCBE-A897-4319-85EC-D87909C24980}"/>
+                <a16:creationId xmlns="" xmlns:a16="http://schemas.microsoft.com/office/drawing/2014/main" id="{1C17BCBE-A897-4319-85EC-D87909C24980}"/>
               </a:ext>
             </a:extLst>
           </p:cNvPr>
@@ -8486,7 +8486,7 @@
           <p:cNvPr id="3" name="Espaço Reservado para Conteúdo 2">
             <a:extLst>
               <a:ext uri="{FF2B5EF4-FFF2-40B4-BE49-F238E27FC236}">
-                <a16:creationId xmlns:a16="http://schemas.microsoft.com/office/drawing/2014/main" xmlns="" id="{4226F885-0204-4913-868B-4B8B82576F17}"/>
+                <a16:creationId xmlns="" xmlns:a16="http://schemas.microsoft.com/office/drawing/2014/main" id="{4226F885-0204-4913-868B-4B8B82576F17}"/>
               </a:ext>
             </a:extLst>
           </p:cNvPr>
@@ -8576,7 +8576,7 @@
           <p:cNvPr id="4" name="Espaço Reservado para Texto 3">
             <a:extLst>
               <a:ext uri="{FF2B5EF4-FFF2-40B4-BE49-F238E27FC236}">
-                <a16:creationId xmlns:a16="http://schemas.microsoft.com/office/drawing/2014/main" xmlns="" id="{00F9F784-A858-441B-8AB5-697098141751}"/>
+                <a16:creationId xmlns="" xmlns:a16="http://schemas.microsoft.com/office/drawing/2014/main" id="{00F9F784-A858-441B-8AB5-697098141751}"/>
               </a:ext>
             </a:extLst>
           </p:cNvPr>
@@ -8647,7 +8647,7 @@
           <p:cNvPr id="5" name="Espaço Reservado para Data 4">
             <a:extLst>
               <a:ext uri="{FF2B5EF4-FFF2-40B4-BE49-F238E27FC236}">
-                <a16:creationId xmlns:a16="http://schemas.microsoft.com/office/drawing/2014/main" xmlns="" id="{A4DC363A-5000-472E-8B17-02E7DCB8840A}"/>
+                <a16:creationId xmlns="" xmlns:a16="http://schemas.microsoft.com/office/drawing/2014/main" id="{A4DC363A-5000-472E-8B17-02E7DCB8840A}"/>
               </a:ext>
             </a:extLst>
           </p:cNvPr>
@@ -8676,7 +8676,7 @@
           <p:cNvPr id="6" name="Espaço Reservado para Rodapé 5">
             <a:extLst>
               <a:ext uri="{FF2B5EF4-FFF2-40B4-BE49-F238E27FC236}">
-                <a16:creationId xmlns:a16="http://schemas.microsoft.com/office/drawing/2014/main" xmlns="" id="{5548425D-2C21-4C56-BAD4-662978775C28}"/>
+                <a16:creationId xmlns="" xmlns:a16="http://schemas.microsoft.com/office/drawing/2014/main" id="{5548425D-2C21-4C56-BAD4-662978775C28}"/>
               </a:ext>
             </a:extLst>
           </p:cNvPr>
@@ -8701,7 +8701,7 @@
           <p:cNvPr id="7" name="Espaço Reservado para Número de Slide 6">
             <a:extLst>
               <a:ext uri="{FF2B5EF4-FFF2-40B4-BE49-F238E27FC236}">
-                <a16:creationId xmlns:a16="http://schemas.microsoft.com/office/drawing/2014/main" xmlns="" id="{C63E9726-E64C-42B2-AE8A-8C235A956B48}"/>
+                <a16:creationId xmlns="" xmlns:a16="http://schemas.microsoft.com/office/drawing/2014/main" id="{C63E9726-E64C-42B2-AE8A-8C235A956B48}"/>
               </a:ext>
             </a:extLst>
           </p:cNvPr>
@@ -8760,7 +8760,7 @@
           <p:cNvPr id="2" name="Título 1">
             <a:extLst>
               <a:ext uri="{FF2B5EF4-FFF2-40B4-BE49-F238E27FC236}">
-                <a16:creationId xmlns:a16="http://schemas.microsoft.com/office/drawing/2014/main" xmlns="" id="{11086A78-3E74-450C-96A6-CA8AC37AF772}"/>
+                <a16:creationId xmlns="" xmlns:a16="http://schemas.microsoft.com/office/drawing/2014/main" id="{11086A78-3E74-450C-96A6-CA8AC37AF772}"/>
               </a:ext>
             </a:extLst>
           </p:cNvPr>
@@ -8797,7 +8797,7 @@
           <p:cNvPr id="3" name="Espaço Reservado para Imagem 2">
             <a:extLst>
               <a:ext uri="{FF2B5EF4-FFF2-40B4-BE49-F238E27FC236}">
-                <a16:creationId xmlns:a16="http://schemas.microsoft.com/office/drawing/2014/main" xmlns="" id="{5F5B7312-975A-4DBC-9B2F-3652ADA006FD}"/>
+                <a16:creationId xmlns="" xmlns:a16="http://schemas.microsoft.com/office/drawing/2014/main" id="{5F5B7312-975A-4DBC-9B2F-3652ADA006FD}"/>
               </a:ext>
             </a:extLst>
           </p:cNvPr>
@@ -8864,7 +8864,7 @@
           <p:cNvPr id="4" name="Espaço Reservado para Texto 3">
             <a:extLst>
               <a:ext uri="{FF2B5EF4-FFF2-40B4-BE49-F238E27FC236}">
-                <a16:creationId xmlns:a16="http://schemas.microsoft.com/office/drawing/2014/main" xmlns="" id="{AAF805F5-1DFF-41C6-944C-7D79FE0D0963}"/>
+                <a16:creationId xmlns="" xmlns:a16="http://schemas.microsoft.com/office/drawing/2014/main" id="{AAF805F5-1DFF-41C6-944C-7D79FE0D0963}"/>
               </a:ext>
             </a:extLst>
           </p:cNvPr>
@@ -8935,7 +8935,7 @@
           <p:cNvPr id="5" name="Espaço Reservado para Data 4">
             <a:extLst>
               <a:ext uri="{FF2B5EF4-FFF2-40B4-BE49-F238E27FC236}">
-                <a16:creationId xmlns:a16="http://schemas.microsoft.com/office/drawing/2014/main" xmlns="" id="{02113D81-8665-4516-BD81-C6A1F254EECD}"/>
+                <a16:creationId xmlns="" xmlns:a16="http://schemas.microsoft.com/office/drawing/2014/main" id="{02113D81-8665-4516-BD81-C6A1F254EECD}"/>
               </a:ext>
             </a:extLst>
           </p:cNvPr>
@@ -8964,7 +8964,7 @@
           <p:cNvPr id="6" name="Espaço Reservado para Rodapé 5">
             <a:extLst>
               <a:ext uri="{FF2B5EF4-FFF2-40B4-BE49-F238E27FC236}">
-                <a16:creationId xmlns:a16="http://schemas.microsoft.com/office/drawing/2014/main" xmlns="" id="{2B00C88B-FF32-40AA-A187-727D96FD7862}"/>
+                <a16:creationId xmlns="" xmlns:a16="http://schemas.microsoft.com/office/drawing/2014/main" id="{2B00C88B-FF32-40AA-A187-727D96FD7862}"/>
               </a:ext>
             </a:extLst>
           </p:cNvPr>
@@ -8989,7 +8989,7 @@
           <p:cNvPr id="7" name="Espaço Reservado para Número de Slide 6">
             <a:extLst>
               <a:ext uri="{FF2B5EF4-FFF2-40B4-BE49-F238E27FC236}">
-                <a16:creationId xmlns:a16="http://schemas.microsoft.com/office/drawing/2014/main" xmlns="" id="{A04D1A2D-69F7-4B8F-A730-BC26DC340BA6}"/>
+                <a16:creationId xmlns="" xmlns:a16="http://schemas.microsoft.com/office/drawing/2014/main" id="{A04D1A2D-69F7-4B8F-A730-BC26DC340BA6}"/>
               </a:ext>
             </a:extLst>
           </p:cNvPr>
@@ -9053,7 +9053,7 @@
           <p:cNvPr id="2" name="Espaço Reservado para Título 1">
             <a:extLst>
               <a:ext uri="{FF2B5EF4-FFF2-40B4-BE49-F238E27FC236}">
-                <a16:creationId xmlns:a16="http://schemas.microsoft.com/office/drawing/2014/main" xmlns="" id="{E69A0273-1966-4A1B-9370-4C1CE5036371}"/>
+                <a16:creationId xmlns="" xmlns:a16="http://schemas.microsoft.com/office/drawing/2014/main" id="{E69A0273-1966-4A1B-9370-4C1CE5036371}"/>
               </a:ext>
             </a:extLst>
           </p:cNvPr>
@@ -9091,7 +9091,7 @@
           <p:cNvPr id="3" name="Espaço Reservado para Texto 2">
             <a:extLst>
               <a:ext uri="{FF2B5EF4-FFF2-40B4-BE49-F238E27FC236}">
-                <a16:creationId xmlns:a16="http://schemas.microsoft.com/office/drawing/2014/main" xmlns="" id="{3B9CF87A-0448-49A7-AB25-EBC1D56A40EF}"/>
+                <a16:creationId xmlns="" xmlns:a16="http://schemas.microsoft.com/office/drawing/2014/main" id="{3B9CF87A-0448-49A7-AB25-EBC1D56A40EF}"/>
               </a:ext>
             </a:extLst>
           </p:cNvPr>
@@ -9158,7 +9158,7 @@
           <p:cNvPr id="4" name="Espaço Reservado para Data 3">
             <a:extLst>
               <a:ext uri="{FF2B5EF4-FFF2-40B4-BE49-F238E27FC236}">
-                <a16:creationId xmlns:a16="http://schemas.microsoft.com/office/drawing/2014/main" xmlns="" id="{2EF7B1F2-BB5A-44D0-816D-16AD2C71430E}"/>
+                <a16:creationId xmlns="" xmlns:a16="http://schemas.microsoft.com/office/drawing/2014/main" id="{2EF7B1F2-BB5A-44D0-816D-16AD2C71430E}"/>
               </a:ext>
             </a:extLst>
           </p:cNvPr>
@@ -9205,7 +9205,7 @@
           <p:cNvPr id="5" name="Espaço Reservado para Rodapé 4">
             <a:extLst>
               <a:ext uri="{FF2B5EF4-FFF2-40B4-BE49-F238E27FC236}">
-                <a16:creationId xmlns:a16="http://schemas.microsoft.com/office/drawing/2014/main" xmlns="" id="{C703F94C-2CC8-4DAA-BC35-14FC3E841DCD}"/>
+                <a16:creationId xmlns="" xmlns:a16="http://schemas.microsoft.com/office/drawing/2014/main" id="{C703F94C-2CC8-4DAA-BC35-14FC3E841DCD}"/>
               </a:ext>
             </a:extLst>
           </p:cNvPr>
@@ -9248,7 +9248,7 @@
           <p:cNvPr id="6" name="Espaço Reservado para Número de Slide 5">
             <a:extLst>
               <a:ext uri="{FF2B5EF4-FFF2-40B4-BE49-F238E27FC236}">
-                <a16:creationId xmlns:a16="http://schemas.microsoft.com/office/drawing/2014/main" xmlns="" id="{64051336-7048-457A-8B61-D94291D71648}"/>
+                <a16:creationId xmlns="" xmlns:a16="http://schemas.microsoft.com/office/drawing/2014/main" id="{64051336-7048-457A-8B61-D94291D71648}"/>
               </a:ext>
             </a:extLst>
           </p:cNvPr>
@@ -9616,7 +9616,7 @@
           <p:cNvPr id="2" name="Título 1">
             <a:extLst>
               <a:ext uri="{FF2B5EF4-FFF2-40B4-BE49-F238E27FC236}">
-                <a16:creationId xmlns:a16="http://schemas.microsoft.com/office/drawing/2014/main" xmlns="" id="{32666AC8-2E17-4DB4-B0F5-60C640CCFD2E}"/>
+                <a16:creationId xmlns="" xmlns:a16="http://schemas.microsoft.com/office/drawing/2014/main" id="{32666AC8-2E17-4DB4-B0F5-60C640CCFD2E}"/>
               </a:ext>
             </a:extLst>
           </p:cNvPr>
@@ -9662,7 +9662,7 @@
           <p:cNvPr id="4" name="CaixaDeTexto 3">
             <a:extLst>
               <a:ext uri="{FF2B5EF4-FFF2-40B4-BE49-F238E27FC236}">
-                <a16:creationId xmlns:a16="http://schemas.microsoft.com/office/drawing/2014/main" xmlns="" id="{430EB894-B7D4-434C-9D1A-A14094D9BEEC}"/>
+                <a16:creationId xmlns="" xmlns:a16="http://schemas.microsoft.com/office/drawing/2014/main" id="{430EB894-B7D4-434C-9D1A-A14094D9BEEC}"/>
               </a:ext>
             </a:extLst>
           </p:cNvPr>
@@ -9703,7 +9703,7 @@
           <p:cNvPr id="1026" name="Picture 2" descr="Logo">
             <a:extLst>
               <a:ext uri="{FF2B5EF4-FFF2-40B4-BE49-F238E27FC236}">
-                <a16:creationId xmlns:a16="http://schemas.microsoft.com/office/drawing/2014/main" xmlns="" id="{3F2642E0-4F6A-4196-8F58-E77D36E9A33F}"/>
+                <a16:creationId xmlns="" xmlns:a16="http://schemas.microsoft.com/office/drawing/2014/main" id="{3F2642E0-4F6A-4196-8F58-E77D36E9A33F}"/>
               </a:ext>
             </a:extLst>
           </p:cNvPr>
@@ -9748,7 +9748,7 @@
           <p:cNvPr id="5122" name="Picture 2" descr="Image result for machine learning">
             <a:extLst>
               <a:ext uri="{FF2B5EF4-FFF2-40B4-BE49-F238E27FC236}">
-                <a16:creationId xmlns:a16="http://schemas.microsoft.com/office/drawing/2014/main" xmlns="" id="{810CE0A2-4102-44A6-A370-175E7896CDCB}"/>
+                <a16:creationId xmlns="" xmlns:a16="http://schemas.microsoft.com/office/drawing/2014/main" id="{810CE0A2-4102-44A6-A370-175E7896CDCB}"/>
               </a:ext>
             </a:extLst>
           </p:cNvPr>
@@ -11152,7 +11152,7 @@
           <p:cNvPr id="13" name="CaixaDeTexto 12">
             <a:extLst>
               <a:ext uri="{FF2B5EF4-FFF2-40B4-BE49-F238E27FC236}">
-                <a16:creationId xmlns:a16="http://schemas.microsoft.com/office/drawing/2014/main" xmlns="" id="{9989FE69-01F8-8C6A-4EA0-DA1C9792B919}"/>
+                <a16:creationId xmlns="" xmlns:a16="http://schemas.microsoft.com/office/drawing/2014/main" id="{9989FE69-01F8-8C6A-4EA0-DA1C9792B919}"/>
               </a:ext>
             </a:extLst>
           </p:cNvPr>
@@ -11234,7 +11234,7 @@
           <p:cNvPr id="2" name="Título 1">
             <a:extLst>
               <a:ext uri="{FF2B5EF4-FFF2-40B4-BE49-F238E27FC236}">
-                <a16:creationId xmlns="" xmlns:a16="http://schemas.microsoft.com/office/drawing/2014/main" id="{B022D379-CAA0-9DC9-CDBD-6E0EBE1BFF31}"/>
+                <a16:creationId xmlns:a16="http://schemas.microsoft.com/office/drawing/2014/main" xmlns="" id="{B022D379-CAA0-9DC9-CDBD-6E0EBE1BFF31}"/>
               </a:ext>
             </a:extLst>
           </p:cNvPr>
@@ -11268,7 +11268,7 @@
               <p:cNvPr id="3" name="Espaço Reservado para Conteúdo 2">
                 <a:extLst>
                   <a:ext uri="{FF2B5EF4-FFF2-40B4-BE49-F238E27FC236}">
-                    <a16:creationId xmlns="" xmlns:a16="http://schemas.microsoft.com/office/drawing/2014/main" id="{B68F0D74-8673-A432-A1D7-BDEF7725851A}"/>
+                    <a16:creationId xmlns:a16="http://schemas.microsoft.com/office/drawing/2014/main" xmlns="" id="{B68F0D74-8673-A432-A1D7-BDEF7725851A}"/>
                   </a:ext>
                 </a:extLst>
               </p:cNvPr>
@@ -11555,7 +11555,7 @@
           <p:cNvPr id="2" name="Título 1">
             <a:extLst>
               <a:ext uri="{FF2B5EF4-FFF2-40B4-BE49-F238E27FC236}">
-                <a16:creationId xmlns="" xmlns:a16="http://schemas.microsoft.com/office/drawing/2014/main" id="{519F0958-530D-D942-BA01-15C1583DD1E6}"/>
+                <a16:creationId xmlns:a16="http://schemas.microsoft.com/office/drawing/2014/main" xmlns="" id="{519F0958-530D-D942-BA01-15C1583DD1E6}"/>
               </a:ext>
             </a:extLst>
           </p:cNvPr>
@@ -11589,7 +11589,7 @@
               <p:cNvPr id="3" name="Espaço Reservado para Conteúdo 2">
                 <a:extLst>
                   <a:ext uri="{FF2B5EF4-FFF2-40B4-BE49-F238E27FC236}">
-                    <a16:creationId xmlns="" xmlns:a16="http://schemas.microsoft.com/office/drawing/2014/main" id="{21416F72-28FB-E27C-D129-16A944A87C67}"/>
+                    <a16:creationId xmlns:a16="http://schemas.microsoft.com/office/drawing/2014/main" xmlns="" id="{21416F72-28FB-E27C-D129-16A944A87C67}"/>
                   </a:ext>
                 </a:extLst>
               </p:cNvPr>
@@ -11678,11 +11678,7 @@
                 </a:pPr>
                 <a:r>
                   <a:rPr lang="pt-BR" dirty="0" smtClean="0"/>
-                  <a:t>Por exemplo,</a:t>
-                </a:r>
-                <a:r>
-                  <a:rPr lang="pt-BR" dirty="0" smtClean="0"/>
-                  <a:t> </a:t>
+                  <a:t>Por exemplo, </a:t>
                 </a:r>
                 <a:r>
                   <a:rPr lang="pt-BR" dirty="0"/>
@@ -11911,8 +11907,12 @@
                   <a:buChar char="§"/>
                 </a:pPr>
                 <a:r>
-                  <a:rPr lang="pt-BR" dirty="0"/>
-                  <a:t>Se temos 3 classes, teremos 3 funções discriminantes, </a:t>
+                  <a:rPr lang="pt-BR" dirty="0" smtClean="0"/>
+                  <a:t>Por exemplo, se </a:t>
+                </a:r>
+                <a:r>
+                  <a:rPr lang="pt-BR" dirty="0"/>
+                  <a:t>temos 3 classes, teremos 3 funções discriminantes, </a:t>
                 </a:r>
                 <a14:m>
                   <m:oMath xmlns:m="http://schemas.openxmlformats.org/officeDocument/2006/math">
@@ -11993,7 +11993,7 @@
               <p:cNvPr id="3" name="Espaço Reservado para Conteúdo 2">
                 <a:extLst>
                   <a:ext uri="{FF2B5EF4-FFF2-40B4-BE49-F238E27FC236}">
-                    <a16:creationId xmlns="" xmlns:a16="http://schemas.microsoft.com/office/drawing/2014/main" xmlns:a14="http://schemas.microsoft.com/office/drawing/2010/main" id="{21416F72-28FB-E27C-D129-16A944A87C67}"/>
+                    <a16:creationId xmlns:a16="http://schemas.microsoft.com/office/drawing/2014/main" xmlns="" xmlns:a14="http://schemas.microsoft.com/office/drawing/2010/main" id="{21416F72-28FB-E27C-D129-16A944A87C67}"/>
                   </a:ext>
                 </a:extLst>
               </p:cNvPr>
@@ -12066,7 +12066,7 @@
           <p:cNvPr id="2" name="Título 1">
             <a:extLst>
               <a:ext uri="{FF2B5EF4-FFF2-40B4-BE49-F238E27FC236}">
-                <a16:creationId xmlns="" xmlns:a16="http://schemas.microsoft.com/office/drawing/2014/main" id="{DCD47F25-5DD1-794E-8733-BFD771A2DE49}"/>
+                <a16:creationId xmlns:a16="http://schemas.microsoft.com/office/drawing/2014/main" xmlns="" id="{DCD47F25-5DD1-794E-8733-BFD771A2DE49}"/>
               </a:ext>
             </a:extLst>
           </p:cNvPr>
@@ -12100,7 +12100,7 @@
               <p:cNvPr id="3" name="Espaço Reservado para Conteúdo 2">
                 <a:extLst>
                   <a:ext uri="{FF2B5EF4-FFF2-40B4-BE49-F238E27FC236}">
-                    <a16:creationId xmlns="" xmlns:a16="http://schemas.microsoft.com/office/drawing/2014/main" id="{D79BB7DC-99E7-8958-EC77-566B7E3C2BBB}"/>
+                    <a16:creationId xmlns:a16="http://schemas.microsoft.com/office/drawing/2014/main" xmlns="" id="{D79BB7DC-99E7-8958-EC77-566B7E3C2BBB}"/>
                   </a:ext>
                 </a:extLst>
               </p:cNvPr>
@@ -13439,7 +13439,7 @@
           <p:cNvPr id="2" name="Título 1">
             <a:extLst>
               <a:ext uri="{FF2B5EF4-FFF2-40B4-BE49-F238E27FC236}">
-                <a16:creationId xmlns="" xmlns:a16="http://schemas.microsoft.com/office/drawing/2014/main" id="{52E3438D-F516-F1D3-A02F-51857586D07A}"/>
+                <a16:creationId xmlns:a16="http://schemas.microsoft.com/office/drawing/2014/main" xmlns="" id="{52E3438D-F516-F1D3-A02F-51857586D07A}"/>
               </a:ext>
             </a:extLst>
           </p:cNvPr>
@@ -13473,7 +13473,7 @@
               <p:cNvPr id="3" name="Espaço Reservado para Conteúdo 2">
                 <a:extLst>
                   <a:ext uri="{FF2B5EF4-FFF2-40B4-BE49-F238E27FC236}">
-                    <a16:creationId xmlns="" xmlns:a16="http://schemas.microsoft.com/office/drawing/2014/main" id="{BCAAD57B-65A0-9DAD-79FC-2AE2692EB84B}"/>
+                    <a16:creationId xmlns:a16="http://schemas.microsoft.com/office/drawing/2014/main" xmlns="" id="{BCAAD57B-65A0-9DAD-79FC-2AE2692EB84B}"/>
                   </a:ext>
                 </a:extLst>
               </p:cNvPr>
@@ -13597,8 +13597,13 @@
                 </a14:m>
                 <a:r>
                   <a:rPr lang="pt-BR" dirty="0"/>
-                  <a:t> saídas seja igual a 1</a:t>
-                </a:r>
+                  <a:t> saídas seja igual a </a:t>
+                </a:r>
+                <a:r>
+                  <a:rPr lang="pt-BR" dirty="0" smtClean="0"/>
+                  <a:t>1.</a:t>
+                </a:r>
+                <a:endParaRPr lang="pt-BR" dirty="0"/>
               </a:p>
               <a:p>
                 <a:pPr marL="0" indent="0">
@@ -14140,7 +14145,7 @@
               <p:cNvPr id="3" name="Espaço Reservado para Conteúdo 2">
                 <a:extLst>
                   <a:ext uri="{FF2B5EF4-FFF2-40B4-BE49-F238E27FC236}">
-                    <a16:creationId xmlns="" xmlns:a16="http://schemas.microsoft.com/office/drawing/2014/main" xmlns:a14="http://schemas.microsoft.com/office/drawing/2010/main" id="{BCAAD57B-65A0-9DAD-79FC-2AE2692EB84B}"/>
+                    <a16:creationId xmlns:a16="http://schemas.microsoft.com/office/drawing/2014/main" xmlns="" xmlns:a14="http://schemas.microsoft.com/office/drawing/2010/main" id="{BCAAD57B-65A0-9DAD-79FC-2AE2692EB84B}"/>
                   </a:ext>
                 </a:extLst>
               </p:cNvPr>
@@ -14183,7 +14188,7 @@
           <p:cNvPr id="5" name="Rectangle 11">
             <a:extLst>
               <a:ext uri="{FF2B5EF4-FFF2-40B4-BE49-F238E27FC236}">
-                <a16:creationId xmlns="" xmlns:a16="http://schemas.microsoft.com/office/drawing/2014/main" id="{D1D7E603-A964-1188-9D09-B0C1E18592FA}"/>
+                <a16:creationId xmlns:a16="http://schemas.microsoft.com/office/drawing/2014/main" xmlns="" id="{D1D7E603-A964-1188-9D09-B0C1E18592FA}"/>
               </a:ext>
             </a:extLst>
           </p:cNvPr>
@@ -14265,7 +14270,7 @@
           <p:cNvPr id="2" name="Título 1">
             <a:extLst>
               <a:ext uri="{FF2B5EF4-FFF2-40B4-BE49-F238E27FC236}">
-                <a16:creationId xmlns="" xmlns:a16="http://schemas.microsoft.com/office/drawing/2014/main" id="{99DAA83A-B143-94BB-B48B-41A7423070CE}"/>
+                <a16:creationId xmlns:a16="http://schemas.microsoft.com/office/drawing/2014/main" xmlns="" id="{99DAA83A-B143-94BB-B48B-41A7423070CE}"/>
               </a:ext>
             </a:extLst>
           </p:cNvPr>
@@ -14300,7 +14305,7 @@
               <p:cNvPr id="3" name="Espaço Reservado para Conteúdo 2">
                 <a:extLst>
                   <a:ext uri="{FF2B5EF4-FFF2-40B4-BE49-F238E27FC236}">
-                    <a16:creationId xmlns="" xmlns:a16="http://schemas.microsoft.com/office/drawing/2014/main" id="{32DF54A1-52F5-C48C-7CD4-D6E451DF19D8}"/>
+                    <a16:creationId xmlns:a16="http://schemas.microsoft.com/office/drawing/2014/main" xmlns="" id="{32DF54A1-52F5-C48C-7CD4-D6E451DF19D8}"/>
                   </a:ext>
                 </a:extLst>
               </p:cNvPr>
@@ -14608,7 +14613,7 @@
           <p:cNvPr id="6" name="Imagem 5">
             <a:extLst>
               <a:ext uri="{FF2B5EF4-FFF2-40B4-BE49-F238E27FC236}">
-                <a16:creationId xmlns="" xmlns:a16="http://schemas.microsoft.com/office/drawing/2014/main" id="{ED5D1F5D-F195-0452-50D4-07E9F2B1C49D}"/>
+                <a16:creationId xmlns:a16="http://schemas.microsoft.com/office/drawing/2014/main" xmlns="" id="{ED5D1F5D-F195-0452-50D4-07E9F2B1C49D}"/>
               </a:ext>
             </a:extLst>
           </p:cNvPr>
@@ -14644,7 +14649,7 @@
           <p:cNvPr id="8" name="CaixaDeTexto 7">
             <a:extLst>
               <a:ext uri="{FF2B5EF4-FFF2-40B4-BE49-F238E27FC236}">
-                <a16:creationId xmlns="" xmlns:a16="http://schemas.microsoft.com/office/drawing/2014/main" id="{0DC5673F-9B77-2E9E-8317-E71CA8896FE0}"/>
+                <a16:creationId xmlns:a16="http://schemas.microsoft.com/office/drawing/2014/main" xmlns="" id="{0DC5673F-9B77-2E9E-8317-E71CA8896FE0}"/>
               </a:ext>
             </a:extLst>
           </p:cNvPr>
@@ -14696,7 +14701,7 @@
               <p:cNvPr id="4" name="CaixaDeTexto 3">
                 <a:extLst>
                   <a:ext uri="{FF2B5EF4-FFF2-40B4-BE49-F238E27FC236}">
-                    <a16:creationId xmlns="" xmlns:a16="http://schemas.microsoft.com/office/drawing/2014/main" id="{CBD55F82-56D5-32C8-C5AB-AF99477FBAAC}"/>
+                    <a16:creationId xmlns:a16="http://schemas.microsoft.com/office/drawing/2014/main" xmlns="" id="{CBD55F82-56D5-32C8-C5AB-AF99477FBAAC}"/>
                   </a:ext>
                 </a:extLst>
               </p:cNvPr>
@@ -14823,7 +14828,7 @@
           <p:cNvPr id="2" name="Título 1">
             <a:extLst>
               <a:ext uri="{FF2B5EF4-FFF2-40B4-BE49-F238E27FC236}">
-                <a16:creationId xmlns="" xmlns:a16="http://schemas.microsoft.com/office/drawing/2014/main" id="{99DAA83A-B143-94BB-B48B-41A7423070CE}"/>
+                <a16:creationId xmlns:a16="http://schemas.microsoft.com/office/drawing/2014/main" xmlns="" id="{99DAA83A-B143-94BB-B48B-41A7423070CE}"/>
               </a:ext>
             </a:extLst>
           </p:cNvPr>
@@ -14858,7 +14863,7 @@
               <p:cNvPr id="3" name="Espaço Reservado para Conteúdo 2">
                 <a:extLst>
                   <a:ext uri="{FF2B5EF4-FFF2-40B4-BE49-F238E27FC236}">
-                    <a16:creationId xmlns="" xmlns:a16="http://schemas.microsoft.com/office/drawing/2014/main" id="{32DF54A1-52F5-C48C-7CD4-D6E451DF19D8}"/>
+                    <a16:creationId xmlns:a16="http://schemas.microsoft.com/office/drawing/2014/main" xmlns="" id="{32DF54A1-52F5-C48C-7CD4-D6E451DF19D8}"/>
                   </a:ext>
                 </a:extLst>
               </p:cNvPr>
@@ -14923,7 +14928,7 @@
                 <a:r>
                   <a:rPr lang="pt-BR" b="1" dirty="0">
                     <a:solidFill>
-                      <a:srgbClr val="00B050"/>
+                      <a:schemeClr val="accent2"/>
                     </a:solidFill>
                     <a:effectLst/>
                   </a:rPr>
@@ -14932,7 +14937,7 @@
                 <a:r>
                   <a:rPr lang="pt-BR" b="1" dirty="0" err="1">
                     <a:solidFill>
-                      <a:srgbClr val="00B050"/>
+                      <a:schemeClr val="accent2"/>
                     </a:solidFill>
                     <a:effectLst/>
                   </a:rPr>
@@ -15536,7 +15541,7 @@
               <p:cNvPr id="3" name="Espaço Reservado para Conteúdo 2">
                 <a:extLst>
                   <a:ext uri="{FF2B5EF4-FFF2-40B4-BE49-F238E27FC236}">
-                    <a16:creationId xmlns="" xmlns:a16="http://schemas.microsoft.com/office/drawing/2014/main" xmlns:a14="http://schemas.microsoft.com/office/drawing/2010/main" id="{32DF54A1-52F5-C48C-7CD4-D6E451DF19D8}"/>
+                    <a16:creationId xmlns:a16="http://schemas.microsoft.com/office/drawing/2014/main" xmlns="" xmlns:a14="http://schemas.microsoft.com/office/drawing/2010/main" id="{32DF54A1-52F5-C48C-7CD4-D6E451DF19D8}"/>
                   </a:ext>
                 </a:extLst>
               </p:cNvPr>
@@ -15579,7 +15584,7 @@
           <p:cNvPr id="6" name="Imagem 5">
             <a:extLst>
               <a:ext uri="{FF2B5EF4-FFF2-40B4-BE49-F238E27FC236}">
-                <a16:creationId xmlns="" xmlns:a16="http://schemas.microsoft.com/office/drawing/2014/main" id="{ED5D1F5D-F195-0452-50D4-07E9F2B1C49D}"/>
+                <a16:creationId xmlns:a16="http://schemas.microsoft.com/office/drawing/2014/main" xmlns="" id="{ED5D1F5D-F195-0452-50D4-07E9F2B1C49D}"/>
               </a:ext>
             </a:extLst>
           </p:cNvPr>
@@ -15617,7 +15622,7 @@
               <p:cNvPr id="4" name="CaixaDeTexto 3">
                 <a:extLst>
                   <a:ext uri="{FF2B5EF4-FFF2-40B4-BE49-F238E27FC236}">
-                    <a16:creationId xmlns="" xmlns:a16="http://schemas.microsoft.com/office/drawing/2014/main" id="{2B7728A0-505D-9DAE-23EC-8172E2EEEFA9}"/>
+                    <a16:creationId xmlns:a16="http://schemas.microsoft.com/office/drawing/2014/main" xmlns="" id="{2B7728A0-505D-9DAE-23EC-8172E2EEEFA9}"/>
                   </a:ext>
                 </a:extLst>
               </p:cNvPr>
@@ -15744,7 +15749,7 @@
           <p:cNvPr id="2" name="Título 1">
             <a:extLst>
               <a:ext uri="{FF2B5EF4-FFF2-40B4-BE49-F238E27FC236}">
-                <a16:creationId xmlns="" xmlns:a16="http://schemas.microsoft.com/office/drawing/2014/main" id="{028A152F-93D8-11FA-9B7A-B62AE5BB6486}"/>
+                <a16:creationId xmlns:a16="http://schemas.microsoft.com/office/drawing/2014/main" xmlns="" id="{028A152F-93D8-11FA-9B7A-B62AE5BB6486}"/>
               </a:ext>
             </a:extLst>
           </p:cNvPr>
@@ -15778,7 +15783,7 @@
               <p:cNvPr id="3" name="Espaço Reservado para Conteúdo 2">
                 <a:extLst>
                   <a:ext uri="{FF2B5EF4-FFF2-40B4-BE49-F238E27FC236}">
-                    <a16:creationId xmlns="" xmlns:a16="http://schemas.microsoft.com/office/drawing/2014/main" id="{B3535727-BB24-BB15-5C03-3DA9A3F9A09A}"/>
+                    <a16:creationId xmlns:a16="http://schemas.microsoft.com/office/drawing/2014/main" xmlns="" id="{B3535727-BB24-BB15-5C03-3DA9A3F9A09A}"/>
                   </a:ext>
                 </a:extLst>
               </p:cNvPr>
@@ -15956,7 +15961,7 @@
           <p:cNvPr id="4" name="Imagem 5">
             <a:extLst>
               <a:ext uri="{FF2B5EF4-FFF2-40B4-BE49-F238E27FC236}">
-                <a16:creationId xmlns="" xmlns:a16="http://schemas.microsoft.com/office/drawing/2014/main" id="{42A1713D-06B5-FB35-8488-833F7CAB7166}"/>
+                <a16:creationId xmlns:a16="http://schemas.microsoft.com/office/drawing/2014/main" xmlns="" id="{42A1713D-06B5-FB35-8488-833F7CAB7166}"/>
               </a:ext>
             </a:extLst>
           </p:cNvPr>
@@ -16022,7 +16027,7 @@
           <p:cNvPr id="2" name="Title 1">
             <a:extLst>
               <a:ext uri="{FF2B5EF4-FFF2-40B4-BE49-F238E27FC236}">
-                <a16:creationId xmlns="" xmlns:a16="http://schemas.microsoft.com/office/drawing/2014/main" id="{2DB9D242-5419-0FFB-7863-B3BB3BD80869}"/>
+                <a16:creationId xmlns:a16="http://schemas.microsoft.com/office/drawing/2014/main" xmlns="" id="{2DB9D242-5419-0FFB-7863-B3BB3BD80869}"/>
               </a:ext>
             </a:extLst>
           </p:cNvPr>
@@ -16046,14 +16051,14 @@
           </a:p>
         </p:txBody>
       </p:sp>
-      <mc:AlternateContent xmlns:mc="http://schemas.openxmlformats.org/markup-compatibility/2006">
-        <mc:Choice xmlns:a14="http://schemas.microsoft.com/office/drawing/2010/main" Requires="a14">
+      <mc:AlternateContent xmlns:mc="http://schemas.openxmlformats.org/markup-compatibility/2006" xmlns:a14="http://schemas.microsoft.com/office/drawing/2010/main">
+        <mc:Choice Requires="a14">
           <p:sp>
             <p:nvSpPr>
               <p:cNvPr id="3" name="Content Placeholder 2">
                 <a:extLst>
                   <a:ext uri="{FF2B5EF4-FFF2-40B4-BE49-F238E27FC236}">
-                    <a16:creationId xmlns="" xmlns:a16="http://schemas.microsoft.com/office/drawing/2014/main" id="{34B1DEA3-BAAD-D90C-CD9D-99A5A24F4544}"/>
+                    <a16:creationId xmlns:a16="http://schemas.microsoft.com/office/drawing/2014/main" xmlns="" id="{34B1DEA3-BAAD-D90C-CD9D-99A5A24F4544}"/>
                   </a:ext>
                 </a:extLst>
               </p:cNvPr>
@@ -16842,7 +16847,7 @@
             </p:txBody>
           </p:sp>
         </mc:Choice>
-        <mc:Fallback>
+        <mc:Fallback xmlns="">
           <p:sp>
             <p:nvSpPr>
               <p:cNvPr id="3" name="Content Placeholder 2">
@@ -16921,7 +16926,7 @@
           <p:cNvPr id="2" name="Title 1">
             <a:extLst>
               <a:ext uri="{FF2B5EF4-FFF2-40B4-BE49-F238E27FC236}">
-                <a16:creationId xmlns="" xmlns:a16="http://schemas.microsoft.com/office/drawing/2014/main" id="{997538D5-DC01-EC48-38D2-99D754F1BB92}"/>
+                <a16:creationId xmlns:a16="http://schemas.microsoft.com/office/drawing/2014/main" xmlns="" id="{997538D5-DC01-EC48-38D2-99D754F1BB92}"/>
               </a:ext>
             </a:extLst>
           </p:cNvPr>
@@ -16945,14 +16950,14 @@
           </a:p>
         </p:txBody>
       </p:sp>
-      <mc:AlternateContent xmlns:mc="http://schemas.openxmlformats.org/markup-compatibility/2006">
-        <mc:Choice xmlns:a14="http://schemas.microsoft.com/office/drawing/2010/main" Requires="a14">
+      <mc:AlternateContent xmlns:mc="http://schemas.openxmlformats.org/markup-compatibility/2006" xmlns:a14="http://schemas.microsoft.com/office/drawing/2010/main">
+        <mc:Choice Requires="a14">
           <p:sp>
             <p:nvSpPr>
               <p:cNvPr id="3" name="Content Placeholder 2">
                 <a:extLst>
                   <a:ext uri="{FF2B5EF4-FFF2-40B4-BE49-F238E27FC236}">
-                    <a16:creationId xmlns="" xmlns:a16="http://schemas.microsoft.com/office/drawing/2014/main" id="{17D7928D-3A32-7330-5FDC-756155EF2F3D}"/>
+                    <a16:creationId xmlns:a16="http://schemas.microsoft.com/office/drawing/2014/main" xmlns="" id="{17D7928D-3A32-7330-5FDC-756155EF2F3D}"/>
                   </a:ext>
                 </a:extLst>
               </p:cNvPr>
@@ -17344,11 +17349,7 @@
               <a:p>
                 <a:r>
                   <a:rPr lang="pt-BR" dirty="0" smtClean="0"/>
-                  <a:t>Essa</a:t>
-                </a:r>
-                <a:r>
-                  <a:rPr lang="pt-BR" dirty="0" smtClean="0"/>
-                  <a:t> </a:t>
+                  <a:t>Essa </a:t>
                 </a:r>
                 <a:r>
                   <a:rPr lang="pt-BR" dirty="0"/>
@@ -17384,7 +17385,7 @@
             </p:txBody>
           </p:sp>
         </mc:Choice>
-        <mc:Fallback>
+        <mc:Fallback xmlns="">
           <p:sp>
             <p:nvSpPr>
               <p:cNvPr id="3" name="Content Placeholder 2">
@@ -17554,7 +17555,7 @@
           <p:cNvPr id="2" name="Título 1">
             <a:extLst>
               <a:ext uri="{FF2B5EF4-FFF2-40B4-BE49-F238E27FC236}">
-                <a16:creationId xmlns="" xmlns:a16="http://schemas.microsoft.com/office/drawing/2014/main" id="{1FE7CD05-66F2-8967-6154-CCED38E0F987}"/>
+                <a16:creationId xmlns:a16="http://schemas.microsoft.com/office/drawing/2014/main" xmlns="" id="{1FE7CD05-66F2-8967-6154-CCED38E0F987}"/>
               </a:ext>
             </a:extLst>
           </p:cNvPr>
@@ -17584,7 +17585,7 @@
               <p:cNvPr id="3" name="Espaço Reservado para Conteúdo 2">
                 <a:extLst>
                   <a:ext uri="{FF2B5EF4-FFF2-40B4-BE49-F238E27FC236}">
-                    <a16:creationId xmlns="" xmlns:a16="http://schemas.microsoft.com/office/drawing/2014/main" id="{21A86630-5D79-AD4B-79FC-6C8373E8DB39}"/>
+                    <a16:creationId xmlns:a16="http://schemas.microsoft.com/office/drawing/2014/main" xmlns="" id="{21A86630-5D79-AD4B-79FC-6C8373E8DB39}"/>
                   </a:ext>
                 </a:extLst>
               </p:cNvPr>
@@ -18569,7 +18570,7 @@
           <p:cNvPr id="2" name="Título 1">
             <a:extLst>
               <a:ext uri="{FF2B5EF4-FFF2-40B4-BE49-F238E27FC236}">
-                <a16:creationId xmlns="" xmlns:a16="http://schemas.microsoft.com/office/drawing/2014/main" id="{E4598F11-6F65-0753-89FE-F5ABED77B46A}"/>
+                <a16:creationId xmlns:a16="http://schemas.microsoft.com/office/drawing/2014/main" xmlns="" id="{E4598F11-6F65-0753-89FE-F5ABED77B46A}"/>
               </a:ext>
             </a:extLst>
           </p:cNvPr>
@@ -18600,7 +18601,7 @@
               <p:cNvPr id="3" name="Espaço Reservado para Conteúdo 2">
                 <a:extLst>
                   <a:ext uri="{FF2B5EF4-FFF2-40B4-BE49-F238E27FC236}">
-                    <a16:creationId xmlns="" xmlns:a16="http://schemas.microsoft.com/office/drawing/2014/main" id="{FEF4E6DC-E916-D97A-4D18-D469285C4F2C}"/>
+                    <a16:creationId xmlns:a16="http://schemas.microsoft.com/office/drawing/2014/main" xmlns="" id="{FEF4E6DC-E916-D97A-4D18-D469285C4F2C}"/>
                   </a:ext>
                 </a:extLst>
               </p:cNvPr>
@@ -19070,7 +19071,7 @@
           <p:cNvPr id="2" name="Título 1">
             <a:extLst>
               <a:ext uri="{FF2B5EF4-FFF2-40B4-BE49-F238E27FC236}">
-                <a16:creationId xmlns="" xmlns:a16="http://schemas.microsoft.com/office/drawing/2014/main" id="{D5807923-28D2-8150-E304-526DA460D220}"/>
+                <a16:creationId xmlns:a16="http://schemas.microsoft.com/office/drawing/2014/main" xmlns="" id="{D5807923-28D2-8150-E304-526DA460D220}"/>
               </a:ext>
             </a:extLst>
           </p:cNvPr>
@@ -19099,7 +19100,7 @@
           <p:cNvPr id="3" name="Espaço Reservado para Conteúdo 2">
             <a:extLst>
               <a:ext uri="{FF2B5EF4-FFF2-40B4-BE49-F238E27FC236}">
-                <a16:creationId xmlns="" xmlns:a16="http://schemas.microsoft.com/office/drawing/2014/main" id="{FFACD180-C529-EB91-BD2D-B5F491B1E35C}"/>
+                <a16:creationId xmlns:a16="http://schemas.microsoft.com/office/drawing/2014/main" xmlns="" id="{FFACD180-C529-EB91-BD2D-B5F491B1E35C}"/>
               </a:ext>
             </a:extLst>
           </p:cNvPr>
@@ -19231,7 +19232,7 @@
           <p:cNvPr id="1026" name="Picture 2">
             <a:extLst>
               <a:ext uri="{FF2B5EF4-FFF2-40B4-BE49-F238E27FC236}">
-                <a16:creationId xmlns="" xmlns:a16="http://schemas.microsoft.com/office/drawing/2014/main" id="{6FC2BDE8-91E0-6379-9BA3-76511C6153D5}"/>
+                <a16:creationId xmlns:a16="http://schemas.microsoft.com/office/drawing/2014/main" xmlns="" id="{6FC2BDE8-91E0-6379-9BA3-76511C6153D5}"/>
               </a:ext>
             </a:extLst>
           </p:cNvPr>
@@ -19276,7 +19277,7 @@
           <p:cNvPr id="5" name="Picture 2">
             <a:extLst>
               <a:ext uri="{FF2B5EF4-FFF2-40B4-BE49-F238E27FC236}">
-                <a16:creationId xmlns="" xmlns:a16="http://schemas.microsoft.com/office/drawing/2014/main" id="{2771BE1F-7B74-36A4-AA69-9171B025A4B6}"/>
+                <a16:creationId xmlns:a16="http://schemas.microsoft.com/office/drawing/2014/main" xmlns="" id="{2771BE1F-7B74-36A4-AA69-9171B025A4B6}"/>
               </a:ext>
             </a:extLst>
           </p:cNvPr>
@@ -19351,7 +19352,7 @@
           <p:cNvPr id="2" name="Título 1">
             <a:extLst>
               <a:ext uri="{FF2B5EF4-FFF2-40B4-BE49-F238E27FC236}">
-                <a16:creationId xmlns="" xmlns:a16="http://schemas.microsoft.com/office/drawing/2014/main" id="{5D929962-9BFC-4174-AB35-CC23FA013168}"/>
+                <a16:creationId xmlns:a16="http://schemas.microsoft.com/office/drawing/2014/main" xmlns="" id="{5D929962-9BFC-4174-AB35-CC23FA013168}"/>
               </a:ext>
             </a:extLst>
           </p:cNvPr>
@@ -19382,7 +19383,7 @@
               <p:cNvPr id="3" name="Espaço Reservado para Conteúdo 2">
                 <a:extLst>
                   <a:ext uri="{FF2B5EF4-FFF2-40B4-BE49-F238E27FC236}">
-                    <a16:creationId xmlns="" xmlns:a16="http://schemas.microsoft.com/office/drawing/2014/main" id="{1D38055D-E355-F780-9CA0-0337EA0BE4FD}"/>
+                    <a16:creationId xmlns:a16="http://schemas.microsoft.com/office/drawing/2014/main" xmlns="" id="{1D38055D-E355-F780-9CA0-0337EA0BE4FD}"/>
                   </a:ext>
                 </a:extLst>
               </p:cNvPr>
@@ -20614,7 +20615,7 @@
           <p:cNvPr id="2" name="Título 1">
             <a:extLst>
               <a:ext uri="{FF2B5EF4-FFF2-40B4-BE49-F238E27FC236}">
-                <a16:creationId xmlns="" xmlns:a16="http://schemas.microsoft.com/office/drawing/2014/main" id="{01D0947A-594D-A8D5-95F3-38EB04C6BDB6}"/>
+                <a16:creationId xmlns:a16="http://schemas.microsoft.com/office/drawing/2014/main" xmlns="" id="{01D0947A-594D-A8D5-95F3-38EB04C6BDB6}"/>
               </a:ext>
             </a:extLst>
           </p:cNvPr>
@@ -20641,14 +20642,14 @@
           </a:p>
         </p:txBody>
       </p:sp>
-      <mc:AlternateContent xmlns:mc="http://schemas.openxmlformats.org/markup-compatibility/2006">
-        <mc:Choice xmlns:a14="http://schemas.microsoft.com/office/drawing/2010/main" Requires="a14">
+      <mc:AlternateContent xmlns:mc="http://schemas.openxmlformats.org/markup-compatibility/2006" xmlns:a14="http://schemas.microsoft.com/office/drawing/2010/main">
+        <mc:Choice Requires="a14">
           <p:sp>
             <p:nvSpPr>
               <p:cNvPr id="3" name="Espaço Reservado para Conteúdo 2">
                 <a:extLst>
                   <a:ext uri="{FF2B5EF4-FFF2-40B4-BE49-F238E27FC236}">
-                    <a16:creationId xmlns="" xmlns:a16="http://schemas.microsoft.com/office/drawing/2014/main" id="{DDBA288E-BBB8-E157-840C-AA685AD7D65C}"/>
+                    <a16:creationId xmlns:a16="http://schemas.microsoft.com/office/drawing/2014/main" xmlns="" id="{DDBA288E-BBB8-E157-840C-AA685AD7D65C}"/>
                   </a:ext>
                 </a:extLst>
               </p:cNvPr>
@@ -21431,7 +21432,7 @@
             </p:txBody>
           </p:sp>
         </mc:Choice>
-        <mc:Fallback>
+        <mc:Fallback xmlns="">
           <p:sp>
             <p:nvSpPr>
               <p:cNvPr id="3" name="Espaço Reservado para Conteúdo 2">
@@ -21510,7 +21511,7 @@
           <p:cNvPr id="2" name="Título 1">
             <a:extLst>
               <a:ext uri="{FF2B5EF4-FFF2-40B4-BE49-F238E27FC236}">
-                <a16:creationId xmlns="" xmlns:a16="http://schemas.microsoft.com/office/drawing/2014/main" id="{E0F1FD81-6095-2AF0-8691-34E55B8A93B5}"/>
+                <a16:creationId xmlns:a16="http://schemas.microsoft.com/office/drawing/2014/main" xmlns="" id="{E0F1FD81-6095-2AF0-8691-34E55B8A93B5}"/>
               </a:ext>
             </a:extLst>
           </p:cNvPr>
@@ -21544,7 +21545,7 @@
               <p:cNvPr id="3" name="Espaço Reservado para Conteúdo 2">
                 <a:extLst>
                   <a:ext uri="{FF2B5EF4-FFF2-40B4-BE49-F238E27FC236}">
-                    <a16:creationId xmlns="" xmlns:a16="http://schemas.microsoft.com/office/drawing/2014/main" id="{BB734B24-DA50-860B-5D55-C33F6F451B6F}"/>
+                    <a16:creationId xmlns:a16="http://schemas.microsoft.com/office/drawing/2014/main" xmlns="" id="{BB734B24-DA50-860B-5D55-C33F6F451B6F}"/>
                   </a:ext>
                 </a:extLst>
               </p:cNvPr>
@@ -22092,7 +22093,7 @@
           <p:cNvPr id="4" name="Imagem 5">
             <a:extLst>
               <a:ext uri="{FF2B5EF4-FFF2-40B4-BE49-F238E27FC236}">
-                <a16:creationId xmlns="" xmlns:a16="http://schemas.microsoft.com/office/drawing/2014/main" id="{535159CB-11DC-74B8-5C5F-D571CD018327}"/>
+                <a16:creationId xmlns:a16="http://schemas.microsoft.com/office/drawing/2014/main" xmlns="" id="{535159CB-11DC-74B8-5C5F-D571CD018327}"/>
               </a:ext>
             </a:extLst>
           </p:cNvPr>
@@ -22158,7 +22159,7 @@
           <p:cNvPr id="2" name="Título 1">
             <a:extLst>
               <a:ext uri="{FF2B5EF4-FFF2-40B4-BE49-F238E27FC236}">
-                <a16:creationId xmlns="" xmlns:a16="http://schemas.microsoft.com/office/drawing/2014/main" id="{FC175046-E9DF-FCC8-C62B-B00332089713}"/>
+                <a16:creationId xmlns:a16="http://schemas.microsoft.com/office/drawing/2014/main" xmlns="" id="{FC175046-E9DF-FCC8-C62B-B00332089713}"/>
               </a:ext>
             </a:extLst>
           </p:cNvPr>
@@ -22192,7 +22193,7 @@
               <p:cNvPr id="3" name="Espaço Reservado para Conteúdo 2">
                 <a:extLst>
                   <a:ext uri="{FF2B5EF4-FFF2-40B4-BE49-F238E27FC236}">
-                    <a16:creationId xmlns="" xmlns:a16="http://schemas.microsoft.com/office/drawing/2014/main" id="{24721BB7-DBA3-D8BF-7F98-ED91BD59DAEC}"/>
+                    <a16:creationId xmlns:a16="http://schemas.microsoft.com/office/drawing/2014/main" xmlns="" id="{24721BB7-DBA3-D8BF-7F98-ED91BD59DAEC}"/>
                   </a:ext>
                 </a:extLst>
               </p:cNvPr>
@@ -22500,7 +22501,7 @@
           <p:cNvPr id="6" name="Imagem 5">
             <a:extLst>
               <a:ext uri="{FF2B5EF4-FFF2-40B4-BE49-F238E27FC236}">
-                <a16:creationId xmlns="" xmlns:a16="http://schemas.microsoft.com/office/drawing/2014/main" id="{FF78CF76-EB26-3FAE-0391-E452288FA28E}"/>
+                <a16:creationId xmlns:a16="http://schemas.microsoft.com/office/drawing/2014/main" xmlns="" id="{FF78CF76-EB26-3FAE-0391-E452288FA28E}"/>
               </a:ext>
             </a:extLst>
           </p:cNvPr>
@@ -22536,7 +22537,7 @@
           <p:cNvPr id="5" name="Rectangle 2">
             <a:extLst>
               <a:ext uri="{FF2B5EF4-FFF2-40B4-BE49-F238E27FC236}">
-                <a16:creationId xmlns:a16="http://schemas.microsoft.com/office/drawing/2014/main" xmlns="" id="{0357C04D-3666-45D0-A263-597819F48D09}"/>
+                <a16:creationId xmlns="" xmlns:a16="http://schemas.microsoft.com/office/drawing/2014/main" id="{0357C04D-3666-45D0-A263-597819F48D09}"/>
               </a:ext>
             </a:extLst>
           </p:cNvPr>
@@ -22764,7 +22765,7 @@
           <p:cNvPr id="4" name="Título 1">
             <a:extLst>
               <a:ext uri="{FF2B5EF4-FFF2-40B4-BE49-F238E27FC236}">
-                <a16:creationId xmlns:a16="http://schemas.microsoft.com/office/drawing/2014/main" xmlns="" id="{32666AC8-2E17-4DB4-B0F5-60C640CCFD2E}"/>
+                <a16:creationId xmlns="" xmlns:a16="http://schemas.microsoft.com/office/drawing/2014/main" id="{32666AC8-2E17-4DB4-B0F5-60C640CCFD2E}"/>
               </a:ext>
             </a:extLst>
           </p:cNvPr>
@@ -23038,7 +23039,7 @@
           <p:cNvPr id="4" name="Picture 2" descr="Ana Barros (@anathinker) | Twitter">
             <a:extLst>
               <a:ext uri="{FF2B5EF4-FFF2-40B4-BE49-F238E27FC236}">
-                <a16:creationId xmlns:a16="http://schemas.microsoft.com/office/drawing/2014/main" xmlns="" id="{AF3F0044-4F7D-98F6-34C1-8351487DFDAA}"/>
+                <a16:creationId xmlns="" xmlns:a16="http://schemas.microsoft.com/office/drawing/2014/main" id="{AF3F0044-4F7D-98F6-34C1-8351487DFDAA}"/>
               </a:ext>
             </a:extLst>
           </p:cNvPr>
@@ -23085,7 +23086,7 @@
           <p:cNvPr id="5" name="Picture 6" descr="Analyzing Text Classification Techniques on Youtube Data">
             <a:extLst>
               <a:ext uri="{FF2B5EF4-FFF2-40B4-BE49-F238E27FC236}">
-                <a16:creationId xmlns:a16="http://schemas.microsoft.com/office/drawing/2014/main" xmlns="" id="{0E6041F8-AB14-54C0-C790-0288A3AC8FBA}"/>
+                <a16:creationId xmlns="" xmlns:a16="http://schemas.microsoft.com/office/drawing/2014/main" id="{0E6041F8-AB14-54C0-C790-0288A3AC8FBA}"/>
               </a:ext>
             </a:extLst>
           </p:cNvPr>
@@ -23130,7 +23131,7 @@
           <p:cNvPr id="6" name="Picture 2" descr="Sentiment Fig 1">
             <a:extLst>
               <a:ext uri="{FF2B5EF4-FFF2-40B4-BE49-F238E27FC236}">
-                <a16:creationId xmlns:a16="http://schemas.microsoft.com/office/drawing/2014/main" xmlns="" id="{1E7CC96F-55AB-1482-92F6-240F8E2E0D1E}"/>
+                <a16:creationId xmlns="" xmlns:a16="http://schemas.microsoft.com/office/drawing/2014/main" id="{1E7CC96F-55AB-1482-92F6-240F8E2E0D1E}"/>
               </a:ext>
             </a:extLst>
           </p:cNvPr>
@@ -23417,7 +23418,7 @@
           <p:cNvPr id="7" name="Picture 2" descr="Ana Barros (@anathinker) | Twitter">
             <a:extLst>
               <a:ext uri="{FF2B5EF4-FFF2-40B4-BE49-F238E27FC236}">
-                <a16:creationId xmlns:a16="http://schemas.microsoft.com/office/drawing/2014/main" xmlns="" id="{A2D479C7-0684-420F-2CCD-64C3DB79FDAB}"/>
+                <a16:creationId xmlns="" xmlns:a16="http://schemas.microsoft.com/office/drawing/2014/main" id="{A2D479C7-0684-420F-2CCD-64C3DB79FDAB}"/>
               </a:ext>
             </a:extLst>
           </p:cNvPr>
@@ -23464,7 +23465,7 @@
           <p:cNvPr id="8" name="Picture 6" descr="Analyzing Text Classification Techniques on Youtube Data">
             <a:extLst>
               <a:ext uri="{FF2B5EF4-FFF2-40B4-BE49-F238E27FC236}">
-                <a16:creationId xmlns:a16="http://schemas.microsoft.com/office/drawing/2014/main" xmlns="" id="{A59F8A2C-ACDF-09C7-B528-9064CEF3B848}"/>
+                <a16:creationId xmlns="" xmlns:a16="http://schemas.microsoft.com/office/drawing/2014/main" id="{A59F8A2C-ACDF-09C7-B528-9064CEF3B848}"/>
               </a:ext>
             </a:extLst>
           </p:cNvPr>
@@ -23509,7 +23510,7 @@
           <p:cNvPr id="9" name="Picture 2" descr="Sentiment Fig 1">
             <a:extLst>
               <a:ext uri="{FF2B5EF4-FFF2-40B4-BE49-F238E27FC236}">
-                <a16:creationId xmlns:a16="http://schemas.microsoft.com/office/drawing/2014/main" xmlns="" id="{E178FF16-CC3F-C34B-6C8B-874BC4FA61A4}"/>
+                <a16:creationId xmlns="" xmlns:a16="http://schemas.microsoft.com/office/drawing/2014/main" id="{E178FF16-CC3F-C34B-6C8B-874BC4FA61A4}"/>
               </a:ext>
             </a:extLst>
           </p:cNvPr>
@@ -23586,7 +23587,7 @@
           <p:cNvPr id="2" name="Título 1">
             <a:extLst>
               <a:ext uri="{FF2B5EF4-FFF2-40B4-BE49-F238E27FC236}">
-                <a16:creationId xmlns:a16="http://schemas.microsoft.com/office/drawing/2014/main" xmlns="" id="{95206997-C98C-FF52-62A1-725EEA7A8A7E}"/>
+                <a16:creationId xmlns="" xmlns:a16="http://schemas.microsoft.com/office/drawing/2014/main" id="{95206997-C98C-FF52-62A1-725EEA7A8A7E}"/>
               </a:ext>
             </a:extLst>
           </p:cNvPr>
@@ -23616,7 +23617,7 @@
               <p:cNvPr id="3" name="Espaço Reservado para Conteúdo 2">
                 <a:extLst>
                   <a:ext uri="{FF2B5EF4-FFF2-40B4-BE49-F238E27FC236}">
-                    <a16:creationId xmlns:a16="http://schemas.microsoft.com/office/drawing/2014/main" xmlns="" id="{50B99F56-FF18-D044-7799-0502D4F6A5FB}"/>
+                    <a16:creationId xmlns="" xmlns:a16="http://schemas.microsoft.com/office/drawing/2014/main" id="{50B99F56-FF18-D044-7799-0502D4F6A5FB}"/>
                   </a:ext>
                 </a:extLst>
               </p:cNvPr>
@@ -24201,7 +24202,7 @@
           <p:cNvPr id="2" name="Título 1">
             <a:extLst>
               <a:ext uri="{FF2B5EF4-FFF2-40B4-BE49-F238E27FC236}">
-                <a16:creationId xmlns:a16="http://schemas.microsoft.com/office/drawing/2014/main" xmlns="" id="{40D4148F-5E93-6FF0-6B66-AC9E3B82640A}"/>
+                <a16:creationId xmlns="" xmlns:a16="http://schemas.microsoft.com/office/drawing/2014/main" id="{40D4148F-5E93-6FF0-6B66-AC9E3B82640A}"/>
               </a:ext>
             </a:extLst>
           </p:cNvPr>
@@ -24231,7 +24232,7 @@
               <p:cNvPr id="3" name="Espaço Reservado para Conteúdo 2">
                 <a:extLst>
                   <a:ext uri="{FF2B5EF4-FFF2-40B4-BE49-F238E27FC236}">
-                    <a16:creationId xmlns:a16="http://schemas.microsoft.com/office/drawing/2014/main" xmlns="" id="{A4787C4F-F235-6888-5AFF-2CB1361FF6FD}"/>
+                    <a16:creationId xmlns="" xmlns:a16="http://schemas.microsoft.com/office/drawing/2014/main" id="{A4787C4F-F235-6888-5AFF-2CB1361FF6FD}"/>
                   </a:ext>
                 </a:extLst>
               </p:cNvPr>
@@ -25988,7 +25989,7 @@
           <p:cNvPr id="21" name="Mais 7">
             <a:extLst>
               <a:ext uri="{FF2B5EF4-FFF2-40B4-BE49-F238E27FC236}">
-                <a16:creationId xmlns:a16="http://schemas.microsoft.com/office/drawing/2014/main" xmlns="" id="{7B31CAF2-5F3C-E55A-EC75-167BCE74F1F7}"/>
+                <a16:creationId xmlns="" xmlns:a16="http://schemas.microsoft.com/office/drawing/2014/main" id="{7B31CAF2-5F3C-E55A-EC75-167BCE74F1F7}"/>
               </a:ext>
             </a:extLst>
           </p:cNvPr>
@@ -26072,7 +26073,7 @@
           <p:cNvPr id="2" name="Título 1">
             <a:extLst>
               <a:ext uri="{FF2B5EF4-FFF2-40B4-BE49-F238E27FC236}">
-                <a16:creationId xmlns:a16="http://schemas.microsoft.com/office/drawing/2014/main" xmlns="" id="{F625D040-A3FE-41E3-3BD0-3C0548CFEAD3}"/>
+                <a16:creationId xmlns="" xmlns:a16="http://schemas.microsoft.com/office/drawing/2014/main" id="{F625D040-A3FE-41E3-3BD0-3C0548CFEAD3}"/>
               </a:ext>
             </a:extLst>
           </p:cNvPr>
@@ -26102,7 +26103,7 @@
               <p:cNvPr id="3" name="Espaço Reservado para Conteúdo 2">
                 <a:extLst>
                   <a:ext uri="{FF2B5EF4-FFF2-40B4-BE49-F238E27FC236}">
-                    <a16:creationId xmlns:a16="http://schemas.microsoft.com/office/drawing/2014/main" xmlns="" id="{3BAFA38F-B924-7049-765D-660ED8C4845B}"/>
+                    <a16:creationId xmlns="" xmlns:a16="http://schemas.microsoft.com/office/drawing/2014/main" id="{3BAFA38F-B924-7049-765D-660ED8C4845B}"/>
                   </a:ext>
                 </a:extLst>
               </p:cNvPr>
@@ -26867,7 +26868,7 @@
           <p:cNvPr id="2" name="Título 1">
             <a:extLst>
               <a:ext uri="{FF2B5EF4-FFF2-40B4-BE49-F238E27FC236}">
-                <a16:creationId xmlns:a16="http://schemas.microsoft.com/office/drawing/2014/main" xmlns="" id="{685EDE22-7739-3353-3DBC-8480197DC616}"/>
+                <a16:creationId xmlns="" xmlns:a16="http://schemas.microsoft.com/office/drawing/2014/main" id="{685EDE22-7739-3353-3DBC-8480197DC616}"/>
               </a:ext>
             </a:extLst>
           </p:cNvPr>
@@ -26897,7 +26898,7 @@
               <p:cNvPr id="3" name="Espaço Reservado para Conteúdo 2">
                 <a:extLst>
                   <a:ext uri="{FF2B5EF4-FFF2-40B4-BE49-F238E27FC236}">
-                    <a16:creationId xmlns:a16="http://schemas.microsoft.com/office/drawing/2014/main" xmlns="" id="{2145CEE8-2FB2-6EEA-841B-CC93323A97A6}"/>
+                    <a16:creationId xmlns="" xmlns:a16="http://schemas.microsoft.com/office/drawing/2014/main" id="{2145CEE8-2FB2-6EEA-841B-CC93323A97A6}"/>
                   </a:ext>
                 </a:extLst>
               </p:cNvPr>

--- a/slides/T320_Classificação (Parte IV).pptx
+++ b/slides/T320_Classificação (Parte IV).pptx
@@ -302,7 +302,7 @@
           <a:p>
             <a:fld id="{144F1436-6906-4D93-B7A2-786C327BFA14}" type="datetimeFigureOut">
               <a:rPr lang="nl-BE" smtClean="0"/>
-              <a:t>21/03/2026</a:t>
+              <a:t>28/03/2026</a:t>
             </a:fld>
             <a:endParaRPr lang="nl-BE"/>
           </a:p>
@@ -467,7 +467,7 @@
           <a:p>
             <a:fld id="{AA8CD09E-2914-4F47-B6C1-51B2C31814C9}" type="datetimeFigureOut">
               <a:rPr lang="pt-BR" smtClean="0"/>
-              <a:t>21/03/2026</a:t>
+              <a:t>28/03/2026</a:t>
             </a:fld>
             <a:endParaRPr lang="pt-BR"/>
           </a:p>
@@ -847,546 +847,192 @@
         </p:nvSpPr>
         <p:spPr/>
       </p:sp>
-      <p:sp>
-        <p:nvSpPr>
-          <p:cNvPr id="3" name="Espaço Reservado para Anotações 2"/>
-          <p:cNvSpPr>
-            <a:spLocks noGrp="1"/>
-          </p:cNvSpPr>
-          <p:nvPr>
-            <p:ph type="body" idx="1"/>
-          </p:nvPr>
-        </p:nvSpPr>
-        <p:spPr/>
-        <p:txBody>
-          <a:bodyPr/>
-          <a:lstStyle/>
-          <a:p>
-            <a:pPr algn="l"/>
-            <a:r>
-              <a:rPr lang="pt-BR" b="0" i="0" dirty="0">
-                <a:solidFill>
-                  <a:srgbClr val="374151"/>
-                </a:solidFill>
-                <a:effectLst/>
-                <a:latin typeface="Söhne"/>
-              </a:rPr>
-              <a:t/>
-            </a:r>
-            <a:br>
-              <a:rPr lang="pt-BR" b="0" i="0" dirty="0">
-                <a:solidFill>
-                  <a:srgbClr val="374151"/>
-                </a:solidFill>
-                <a:effectLst/>
-                <a:latin typeface="Söhne"/>
-              </a:rPr>
-            </a:br>
-            <a:r>
-              <a:rPr lang="pt-BR" b="0" i="0" dirty="0">
-                <a:solidFill>
-                  <a:srgbClr val="374151"/>
-                </a:solidFill>
-                <a:effectLst/>
-                <a:latin typeface="Söhne"/>
-              </a:rPr>
-              <a:t>O problema da "</a:t>
-            </a:r>
-            <a:r>
-              <a:rPr lang="pt-BR" b="0" i="0" dirty="0" err="1">
-                <a:solidFill>
-                  <a:srgbClr val="374151"/>
-                </a:solidFill>
-                <a:effectLst/>
-                <a:latin typeface="Söhne"/>
-              </a:rPr>
-              <a:t>ReLU</a:t>
-            </a:r>
-            <a:r>
-              <a:rPr lang="pt-BR" b="0" i="0" dirty="0">
-                <a:solidFill>
-                  <a:srgbClr val="374151"/>
-                </a:solidFill>
-                <a:effectLst/>
-                <a:latin typeface="Söhne"/>
-              </a:rPr>
-              <a:t> agonizante", conhecido como "</a:t>
-            </a:r>
-            <a:r>
-              <a:rPr lang="pt-BR" b="0" i="0" dirty="0" err="1">
-                <a:solidFill>
-                  <a:srgbClr val="374151"/>
-                </a:solidFill>
-                <a:effectLst/>
-                <a:latin typeface="Söhne"/>
-              </a:rPr>
-              <a:t>dying</a:t>
-            </a:r>
-            <a:r>
-              <a:rPr lang="pt-BR" b="0" i="0" dirty="0">
-                <a:solidFill>
-                  <a:srgbClr val="374151"/>
-                </a:solidFill>
-                <a:effectLst/>
-                <a:latin typeface="Söhne"/>
-              </a:rPr>
-              <a:t> </a:t>
-            </a:r>
-            <a:r>
-              <a:rPr lang="pt-BR" b="0" i="0" dirty="0" err="1">
-                <a:solidFill>
-                  <a:srgbClr val="374151"/>
-                </a:solidFill>
-                <a:effectLst/>
-                <a:latin typeface="Söhne"/>
-              </a:rPr>
-              <a:t>ReLU</a:t>
-            </a:r>
-            <a:r>
-              <a:rPr lang="pt-BR" b="0" i="0" dirty="0">
-                <a:solidFill>
-                  <a:srgbClr val="374151"/>
-                </a:solidFill>
-                <a:effectLst/>
-                <a:latin typeface="Söhne"/>
-              </a:rPr>
-              <a:t> </a:t>
-            </a:r>
-            <a:r>
-              <a:rPr lang="pt-BR" b="0" i="0" dirty="0" err="1">
-                <a:solidFill>
-                  <a:srgbClr val="374151"/>
-                </a:solidFill>
-                <a:effectLst/>
-                <a:latin typeface="Söhne"/>
-              </a:rPr>
-              <a:t>problem</a:t>
-            </a:r>
-            <a:r>
-              <a:rPr lang="pt-BR" b="0" i="0" dirty="0">
-                <a:solidFill>
-                  <a:srgbClr val="374151"/>
-                </a:solidFill>
-                <a:effectLst/>
-                <a:latin typeface="Söhne"/>
-              </a:rPr>
-              <a:t>" em inglês, é uma desvantagem associada à função de ativação </a:t>
-            </a:r>
-            <a:r>
-              <a:rPr lang="pt-BR" b="0" i="0" dirty="0" err="1">
-                <a:solidFill>
-                  <a:srgbClr val="374151"/>
-                </a:solidFill>
-                <a:effectLst/>
-                <a:latin typeface="Söhne"/>
-              </a:rPr>
-              <a:t>ReLU</a:t>
-            </a:r>
-            <a:r>
-              <a:rPr lang="pt-BR" b="0" i="0" dirty="0">
-                <a:solidFill>
-                  <a:srgbClr val="374151"/>
-                </a:solidFill>
-                <a:effectLst/>
-                <a:latin typeface="Söhne"/>
-              </a:rPr>
-              <a:t> (</a:t>
-            </a:r>
-            <a:r>
-              <a:rPr lang="pt-BR" b="0" i="0" dirty="0" err="1">
-                <a:solidFill>
-                  <a:srgbClr val="374151"/>
-                </a:solidFill>
-                <a:effectLst/>
-                <a:latin typeface="Söhne"/>
-              </a:rPr>
-              <a:t>Rectified</a:t>
-            </a:r>
-            <a:r>
-              <a:rPr lang="pt-BR" b="0" i="0" dirty="0">
-                <a:solidFill>
-                  <a:srgbClr val="374151"/>
-                </a:solidFill>
-                <a:effectLst/>
-                <a:latin typeface="Söhne"/>
-              </a:rPr>
-              <a:t> Linear </a:t>
-            </a:r>
-            <a:r>
-              <a:rPr lang="pt-BR" b="0" i="0" dirty="0" err="1">
-                <a:solidFill>
-                  <a:srgbClr val="374151"/>
-                </a:solidFill>
-                <a:effectLst/>
-                <a:latin typeface="Söhne"/>
-              </a:rPr>
-              <a:t>Activation</a:t>
-            </a:r>
-            <a:r>
-              <a:rPr lang="pt-BR" b="0" i="0" dirty="0">
-                <a:solidFill>
-                  <a:srgbClr val="374151"/>
-                </a:solidFill>
-                <a:effectLst/>
-                <a:latin typeface="Söhne"/>
-              </a:rPr>
-              <a:t>) em redes neurais. Esse problema ocorre quando um grande número de neurônios em uma rede neural ativam para zero durante o treinamento e não conseguem atualizar seus pesos durante a retropropagação.</a:t>
-            </a:r>
-          </a:p>
-          <a:p>
-            <a:pPr algn="l"/>
-            <a:endParaRPr lang="pt-BR" b="0" i="0" dirty="0">
-              <a:solidFill>
-                <a:srgbClr val="374151"/>
-              </a:solidFill>
-              <a:effectLst/>
-              <a:latin typeface="Söhne"/>
-            </a:endParaRPr>
-          </a:p>
-          <a:p>
-            <a:pPr algn="l"/>
-            <a:r>
-              <a:rPr lang="pt-BR" b="0" i="0" dirty="0">
-                <a:solidFill>
-                  <a:srgbClr val="374151"/>
-                </a:solidFill>
-                <a:effectLst/>
-                <a:latin typeface="Söhne"/>
-              </a:rPr>
-              <a:t>Quando a saída de um neurônio </a:t>
-            </a:r>
-            <a:r>
-              <a:rPr lang="pt-BR" b="0" i="0" dirty="0" err="1">
-                <a:solidFill>
-                  <a:srgbClr val="374151"/>
-                </a:solidFill>
-                <a:effectLst/>
-                <a:latin typeface="Söhne"/>
-              </a:rPr>
-              <a:t>ReLU</a:t>
-            </a:r>
-            <a:r>
-              <a:rPr lang="pt-BR" b="0" i="0" dirty="0">
-                <a:solidFill>
-                  <a:srgbClr val="374151"/>
-                </a:solidFill>
-                <a:effectLst/>
-                <a:latin typeface="Söhne"/>
-              </a:rPr>
-              <a:t> é sempre zero (ou quase zero) para todos os exemplos do conjunto de dados, isso resulta em uma falta de atualização dos pesos desse neurônio durante o processo de otimização. Como resultado, o neurônio permanece inativo e não contribui para o aprendizado da rede.</a:t>
-            </a:r>
-          </a:p>
-          <a:p>
-            <a:pPr algn="l"/>
-            <a:endParaRPr lang="pt-BR" b="0" i="0" dirty="0">
-              <a:solidFill>
-                <a:srgbClr val="374151"/>
-              </a:solidFill>
-              <a:effectLst/>
-              <a:latin typeface="Söhne"/>
-            </a:endParaRPr>
-          </a:p>
-          <a:p>
-            <a:pPr algn="l"/>
-            <a:r>
-              <a:rPr lang="pt-BR" b="0" i="0" dirty="0">
-                <a:solidFill>
-                  <a:srgbClr val="374151"/>
-                </a:solidFill>
-                <a:effectLst/>
-                <a:latin typeface="Söhne"/>
-              </a:rPr>
-              <a:t>Isso pode levar a uma redução na capacidade da rede de aprender padrões complexos e representações úteis dos dados. A rede pode não ser capaz de modelar relações importantes nos dados e pode levar a um desempenho </a:t>
-            </a:r>
-            <a:r>
-              <a:rPr lang="pt-BR" b="0" i="0" dirty="0" err="1">
-                <a:solidFill>
-                  <a:srgbClr val="374151"/>
-                </a:solidFill>
-                <a:effectLst/>
-                <a:latin typeface="Söhne"/>
-              </a:rPr>
-              <a:t>subótimo</a:t>
-            </a:r>
-            <a:r>
-              <a:rPr lang="pt-BR" b="0" i="0" dirty="0">
-                <a:solidFill>
-                  <a:srgbClr val="374151"/>
-                </a:solidFill>
-                <a:effectLst/>
-                <a:latin typeface="Söhne"/>
-              </a:rPr>
-              <a:t>.</a:t>
-            </a:r>
-          </a:p>
-          <a:p>
-            <a:pPr algn="l"/>
-            <a:endParaRPr lang="pt-BR" b="0" i="0" dirty="0">
-              <a:solidFill>
-                <a:srgbClr val="374151"/>
-              </a:solidFill>
-              <a:effectLst/>
-              <a:latin typeface="Söhne"/>
-            </a:endParaRPr>
-          </a:p>
-          <a:p>
-            <a:pPr algn="l"/>
-            <a:r>
-              <a:rPr lang="pt-BR" b="0" i="0" dirty="0">
-                <a:solidFill>
-                  <a:srgbClr val="374151"/>
-                </a:solidFill>
-                <a:effectLst/>
-                <a:latin typeface="Söhne"/>
-              </a:rPr>
-              <a:t>Para mitigar o problema da </a:t>
-            </a:r>
-            <a:r>
-              <a:rPr lang="pt-BR" b="0" i="0" dirty="0" err="1">
-                <a:solidFill>
-                  <a:srgbClr val="374151"/>
-                </a:solidFill>
-                <a:effectLst/>
-                <a:latin typeface="Söhne"/>
-              </a:rPr>
-              <a:t>ReLU</a:t>
-            </a:r>
-            <a:r>
-              <a:rPr lang="pt-BR" b="0" i="0" dirty="0">
-                <a:solidFill>
-                  <a:srgbClr val="374151"/>
-                </a:solidFill>
-                <a:effectLst/>
-                <a:latin typeface="Söhne"/>
-              </a:rPr>
-              <a:t> agonizante, variantes da </a:t>
-            </a:r>
-            <a:r>
-              <a:rPr lang="pt-BR" b="0" i="0" dirty="0" err="1">
-                <a:solidFill>
-                  <a:srgbClr val="374151"/>
-                </a:solidFill>
-                <a:effectLst/>
-                <a:latin typeface="Söhne"/>
-              </a:rPr>
-              <a:t>ReLU</a:t>
-            </a:r>
-            <a:r>
-              <a:rPr lang="pt-BR" b="0" i="0" dirty="0">
-                <a:solidFill>
-                  <a:srgbClr val="374151"/>
-                </a:solidFill>
-                <a:effectLst/>
-                <a:latin typeface="Söhne"/>
-              </a:rPr>
-              <a:t>, como a </a:t>
-            </a:r>
-            <a:r>
-              <a:rPr lang="pt-BR" b="0" i="0" dirty="0" err="1">
-                <a:solidFill>
-                  <a:srgbClr val="374151"/>
-                </a:solidFill>
-                <a:effectLst/>
-                <a:latin typeface="Söhne"/>
-              </a:rPr>
-              <a:t>Leaky</a:t>
-            </a:r>
-            <a:r>
-              <a:rPr lang="pt-BR" b="0" i="0" dirty="0">
-                <a:solidFill>
-                  <a:srgbClr val="374151"/>
-                </a:solidFill>
-                <a:effectLst/>
-                <a:latin typeface="Söhne"/>
-              </a:rPr>
-              <a:t> </a:t>
-            </a:r>
-            <a:r>
-              <a:rPr lang="pt-BR" b="0" i="0" dirty="0" err="1">
-                <a:solidFill>
-                  <a:srgbClr val="374151"/>
-                </a:solidFill>
-                <a:effectLst/>
-                <a:latin typeface="Söhne"/>
-              </a:rPr>
-              <a:t>ReLU</a:t>
-            </a:r>
-            <a:r>
-              <a:rPr lang="pt-BR" b="0" i="0" dirty="0">
-                <a:solidFill>
-                  <a:srgbClr val="374151"/>
-                </a:solidFill>
-                <a:effectLst/>
-                <a:latin typeface="Söhne"/>
-              </a:rPr>
-              <a:t>, </a:t>
-            </a:r>
-            <a:r>
-              <a:rPr lang="pt-BR" b="0" i="0" dirty="0" err="1">
-                <a:solidFill>
-                  <a:srgbClr val="374151"/>
-                </a:solidFill>
-                <a:effectLst/>
-                <a:latin typeface="Söhne"/>
-              </a:rPr>
-              <a:t>Parametric</a:t>
-            </a:r>
-            <a:r>
-              <a:rPr lang="pt-BR" b="0" i="0" dirty="0">
-                <a:solidFill>
-                  <a:srgbClr val="374151"/>
-                </a:solidFill>
-                <a:effectLst/>
-                <a:latin typeface="Söhne"/>
-              </a:rPr>
-              <a:t> </a:t>
-            </a:r>
-            <a:r>
-              <a:rPr lang="pt-BR" b="0" i="0" dirty="0" err="1">
-                <a:solidFill>
-                  <a:srgbClr val="374151"/>
-                </a:solidFill>
-                <a:effectLst/>
-                <a:latin typeface="Söhne"/>
-              </a:rPr>
-              <a:t>ReLU</a:t>
-            </a:r>
-            <a:r>
-              <a:rPr lang="pt-BR" b="0" i="0" dirty="0">
-                <a:solidFill>
-                  <a:srgbClr val="374151"/>
-                </a:solidFill>
-                <a:effectLst/>
-                <a:latin typeface="Söhne"/>
-              </a:rPr>
-              <a:t> e </a:t>
-            </a:r>
-            <a:r>
-              <a:rPr lang="pt-BR" b="0" i="0" dirty="0" err="1">
-                <a:solidFill>
-                  <a:srgbClr val="374151"/>
-                </a:solidFill>
-                <a:effectLst/>
-                <a:latin typeface="Söhne"/>
-              </a:rPr>
-              <a:t>Exponential</a:t>
-            </a:r>
-            <a:r>
-              <a:rPr lang="pt-BR" b="0" i="0" dirty="0">
-                <a:solidFill>
-                  <a:srgbClr val="374151"/>
-                </a:solidFill>
-                <a:effectLst/>
-                <a:latin typeface="Söhne"/>
-              </a:rPr>
-              <a:t> Linear </a:t>
-            </a:r>
-            <a:r>
-              <a:rPr lang="pt-BR" b="0" i="0" dirty="0" err="1">
-                <a:solidFill>
-                  <a:srgbClr val="374151"/>
-                </a:solidFill>
-                <a:effectLst/>
-                <a:latin typeface="Söhne"/>
-              </a:rPr>
-              <a:t>Units</a:t>
-            </a:r>
-            <a:r>
-              <a:rPr lang="pt-BR" b="0" i="0" dirty="0">
-                <a:solidFill>
-                  <a:srgbClr val="374151"/>
-                </a:solidFill>
-                <a:effectLst/>
-                <a:latin typeface="Söhne"/>
-              </a:rPr>
-              <a:t> (ELU), foram propostas. Essas variantes buscam resolver o problema de ativação constante igual a zero, permitindo que os neurônios continuem aprendendo mesmo quando estão desativados para algumas entradas.</a:t>
-            </a:r>
-          </a:p>
-          <a:p>
-            <a:pPr algn="l"/>
-            <a:endParaRPr lang="pt-BR" b="0" i="0" dirty="0">
-              <a:solidFill>
-                <a:srgbClr val="374151"/>
-              </a:solidFill>
-              <a:effectLst/>
-              <a:latin typeface="Söhne"/>
-            </a:endParaRPr>
-          </a:p>
-          <a:p>
-            <a:pPr algn="l"/>
-            <a:r>
-              <a:rPr lang="pt-BR" b="0" i="0" dirty="0">
-                <a:solidFill>
-                  <a:srgbClr val="374151"/>
-                </a:solidFill>
-                <a:effectLst/>
-                <a:latin typeface="Söhne"/>
-              </a:rPr>
-              <a:t>Em resumo, o problema da </a:t>
-            </a:r>
-            <a:r>
-              <a:rPr lang="pt-BR" b="0" i="0" dirty="0" err="1">
-                <a:solidFill>
-                  <a:srgbClr val="374151"/>
-                </a:solidFill>
-                <a:effectLst/>
-                <a:latin typeface="Söhne"/>
-              </a:rPr>
-              <a:t>ReLU</a:t>
-            </a:r>
-            <a:r>
-              <a:rPr lang="pt-BR" b="0" i="0" dirty="0">
-                <a:solidFill>
-                  <a:srgbClr val="374151"/>
-                </a:solidFill>
-                <a:effectLst/>
-                <a:latin typeface="Söhne"/>
-              </a:rPr>
-              <a:t> agonizante refere-se à inatividade permanente de neurônios </a:t>
-            </a:r>
-            <a:r>
-              <a:rPr lang="pt-BR" b="0" i="0" dirty="0" err="1">
-                <a:solidFill>
-                  <a:srgbClr val="374151"/>
-                </a:solidFill>
-                <a:effectLst/>
-                <a:latin typeface="Söhne"/>
-              </a:rPr>
-              <a:t>ReLU</a:t>
-            </a:r>
-            <a:r>
-              <a:rPr lang="pt-BR" b="0" i="0" dirty="0">
-                <a:solidFill>
-                  <a:srgbClr val="374151"/>
-                </a:solidFill>
-                <a:effectLst/>
-                <a:latin typeface="Söhne"/>
-              </a:rPr>
-              <a:t> durante o treinamento, o que pode prejudicar o desempenho da rede neural. Variantes da </a:t>
-            </a:r>
-            <a:r>
-              <a:rPr lang="pt-BR" b="0" i="0" dirty="0" err="1">
-                <a:solidFill>
-                  <a:srgbClr val="374151"/>
-                </a:solidFill>
-                <a:effectLst/>
-                <a:latin typeface="Söhne"/>
-              </a:rPr>
-              <a:t>ReLU</a:t>
-            </a:r>
-            <a:r>
-              <a:rPr lang="pt-BR" b="0" i="0" dirty="0">
-                <a:solidFill>
-                  <a:srgbClr val="374151"/>
-                </a:solidFill>
-                <a:effectLst/>
-                <a:latin typeface="Söhne"/>
-              </a:rPr>
-              <a:t> foram desenvolvidas para contornar esse problema e permitir uma aprendizagem mais eficaz.</a:t>
-            </a:r>
-          </a:p>
-        </p:txBody>
-      </p:sp>
+      <mc:AlternateContent xmlns:mc="http://schemas.openxmlformats.org/markup-compatibility/2006">
+        <mc:Choice xmlns:a14="http://schemas.microsoft.com/office/drawing/2010/main" Requires="a14">
+          <p:sp>
+            <p:nvSpPr>
+              <p:cNvPr id="3" name="Espaço Reservado para Anotações 2"/>
+              <p:cNvSpPr>
+                <a:spLocks noGrp="1"/>
+              </p:cNvSpPr>
+              <p:nvPr>
+                <p:ph type="body" idx="1"/>
+              </p:nvPr>
+            </p:nvSpPr>
+            <p:spPr/>
+            <p:txBody>
+              <a:bodyPr/>
+              <a:lstStyle/>
+              <a:p>
+                <a:pPr marL="0" marR="0" lvl="0" indent="0" algn="l" defTabSz="914400" rtl="0" eaLnBrk="1" fontAlgn="auto" latinLnBrk="0" hangingPunct="1">
+                  <a:lnSpc>
+                    <a:spcPct val="100000"/>
+                  </a:lnSpc>
+                  <a:spcBef>
+                    <a:spcPts val="0"/>
+                  </a:spcBef>
+                  <a:spcAft>
+                    <a:spcPts val="0"/>
+                  </a:spcAft>
+                  <a:buClrTx/>
+                  <a:buSzTx/>
+                  <a:buFontTx/>
+                  <a:buNone/>
+                  <a:tabLst/>
+                  <a:defRPr/>
+                </a:pPr>
+                <a:r>
+                  <a:rPr lang="pt-BR" dirty="0" smtClean="0"/>
+                  <a:t>O </a:t>
+                </a:r>
+                <a:r>
+                  <a:rPr lang="pt-BR" dirty="0"/>
+                  <a:t>somatório de termos exponenciais no denominador </a:t>
+                </a:r>
+                <a:r>
+                  <a:rPr lang="pt-BR" b="1" dirty="0">
+                    <a:solidFill>
+                      <a:srgbClr val="00B050"/>
+                    </a:solidFill>
+                  </a:rPr>
+                  <a:t>normaliza</a:t>
+                </a:r>
+                <a:r>
+                  <a:rPr lang="pt-BR" dirty="0"/>
+                  <a:t> o valor da </a:t>
+                </a:r>
+                <a:r>
+                  <a:rPr lang="pt-BR" i="1" dirty="0"/>
+                  <a:t>q</a:t>
+                </a:r>
+                <a:r>
+                  <a:rPr lang="pt-BR" dirty="0"/>
+                  <a:t>-ésima saída de tal forma que o somatório das </a:t>
+                </a:r>
+                <a14:m>
+                  <m:oMath xmlns:m="http://schemas.openxmlformats.org/officeDocument/2006/math">
+                    <m:r>
+                      <a:rPr lang="pt-BR" i="1">
+                        <a:latin typeface="Cambria Math" panose="02040503050406030204" pitchFamily="18" charset="0"/>
+                      </a:rPr>
+                      <m:t>𝑄</m:t>
+                    </m:r>
+                  </m:oMath>
+                </a14:m>
+                <a:r>
+                  <a:rPr lang="pt-BR" dirty="0"/>
+                  <a:t> saídas seja igual a </a:t>
+                </a:r>
+                <a:r>
+                  <a:rPr lang="pt-BR" dirty="0" smtClean="0"/>
+                  <a:t>1.</a:t>
+                </a:r>
+                <a:endParaRPr lang="pt-BR" dirty="0"/>
+              </a:p>
+              <a:p>
+                <a:pPr algn="l"/>
+                <a:endParaRPr lang="pt-BR" b="0" i="0" dirty="0">
+                  <a:solidFill>
+                    <a:srgbClr val="374151"/>
+                  </a:solidFill>
+                  <a:effectLst/>
+                  <a:latin typeface="Söhne"/>
+                </a:endParaRPr>
+              </a:p>
+            </p:txBody>
+          </p:sp>
+        </mc:Choice>
+        <mc:Fallback>
+          <p:sp>
+            <p:nvSpPr>
+              <p:cNvPr id="3" name="Espaço Reservado para Anotações 2"/>
+              <p:cNvSpPr>
+                <a:spLocks noGrp="1"/>
+              </p:cNvSpPr>
+              <p:nvPr>
+                <p:ph type="body" idx="1"/>
+              </p:nvPr>
+            </p:nvSpPr>
+            <p:spPr/>
+            <p:txBody>
+              <a:bodyPr/>
+              <a:lstStyle/>
+              <a:p>
+                <a:pPr marL="0" marR="0" lvl="0" indent="0" algn="l" defTabSz="914400" rtl="0" eaLnBrk="1" fontAlgn="auto" latinLnBrk="0" hangingPunct="1">
+                  <a:lnSpc>
+                    <a:spcPct val="100000"/>
+                  </a:lnSpc>
+                  <a:spcBef>
+                    <a:spcPts val="0"/>
+                  </a:spcBef>
+                  <a:spcAft>
+                    <a:spcPts val="0"/>
+                  </a:spcAft>
+                  <a:buClrTx/>
+                  <a:buSzTx/>
+                  <a:buFontTx/>
+                  <a:buNone/>
+                  <a:tabLst/>
+                  <a:defRPr/>
+                </a:pPr>
+                <a:r>
+                  <a:rPr lang="pt-BR" dirty="0" smtClean="0"/>
+                  <a:t>O </a:t>
+                </a:r>
+                <a:r>
+                  <a:rPr lang="pt-BR" dirty="0"/>
+                  <a:t>somatório de termos exponenciais no denominador </a:t>
+                </a:r>
+                <a:r>
+                  <a:rPr lang="pt-BR" b="1" dirty="0">
+                    <a:solidFill>
+                      <a:srgbClr val="00B050"/>
+                    </a:solidFill>
+                  </a:rPr>
+                  <a:t>normaliza</a:t>
+                </a:r>
+                <a:r>
+                  <a:rPr lang="pt-BR" dirty="0"/>
+                  <a:t> o valor da </a:t>
+                </a:r>
+                <a:r>
+                  <a:rPr lang="pt-BR" i="1" dirty="0"/>
+                  <a:t>q</a:t>
+                </a:r>
+                <a:r>
+                  <a:rPr lang="pt-BR" dirty="0"/>
+                  <a:t>-ésima saída de tal forma que o somatório das </a:t>
+                </a:r>
+                <a:r>
+                  <a:rPr lang="pt-BR" i="0">
+                    <a:latin typeface="Cambria Math" panose="02040503050406030204" pitchFamily="18" charset="0"/>
+                  </a:rPr>
+                  <a:t>𝑄</a:t>
+                </a:r>
+                <a:r>
+                  <a:rPr lang="pt-BR" dirty="0"/>
+                  <a:t> saídas seja igual a </a:t>
+                </a:r>
+                <a:r>
+                  <a:rPr lang="pt-BR" dirty="0" smtClean="0"/>
+                  <a:t>1.</a:t>
+                </a:r>
+                <a:endParaRPr lang="pt-BR" dirty="0"/>
+              </a:p>
+              <a:p>
+                <a:pPr algn="l"/>
+                <a:endParaRPr lang="pt-BR" b="0" i="0" dirty="0">
+                  <a:solidFill>
+                    <a:srgbClr val="374151"/>
+                  </a:solidFill>
+                  <a:effectLst/>
+                  <a:latin typeface="Söhne"/>
+                </a:endParaRPr>
+              </a:p>
+            </p:txBody>
+          </p:sp>
+        </mc:Fallback>
+      </mc:AlternateContent>
       <p:sp>
         <p:nvSpPr>
           <p:cNvPr id="4" name="Espaço Reservado para Número de Slide 3"/>
@@ -6419,7 +6065,7 @@
           <p:cNvPr id="2" name="Título 1">
             <a:extLst>
               <a:ext uri="{FF2B5EF4-FFF2-40B4-BE49-F238E27FC236}">
-                <a16:creationId xmlns="" xmlns:a16="http://schemas.microsoft.com/office/drawing/2014/main" id="{1DB9B4FF-B06E-403C-A326-BDC64D8FF94E}"/>
+                <a16:creationId xmlns:a16="http://schemas.microsoft.com/office/drawing/2014/main" xmlns="" id="{1DB9B4FF-B06E-403C-A326-BDC64D8FF94E}"/>
               </a:ext>
             </a:extLst>
           </p:cNvPr>
@@ -6456,7 +6102,7 @@
           <p:cNvPr id="3" name="Subtítulo 2">
             <a:extLst>
               <a:ext uri="{FF2B5EF4-FFF2-40B4-BE49-F238E27FC236}">
-                <a16:creationId xmlns="" xmlns:a16="http://schemas.microsoft.com/office/drawing/2014/main" id="{247BDFCE-746E-45BF-A319-4733D58D1632}"/>
+                <a16:creationId xmlns:a16="http://schemas.microsoft.com/office/drawing/2014/main" xmlns="" id="{247BDFCE-746E-45BF-A319-4733D58D1632}"/>
               </a:ext>
             </a:extLst>
           </p:cNvPr>
@@ -6526,7 +6172,7 @@
           <p:cNvPr id="4" name="Espaço Reservado para Data 3">
             <a:extLst>
               <a:ext uri="{FF2B5EF4-FFF2-40B4-BE49-F238E27FC236}">
-                <a16:creationId xmlns="" xmlns:a16="http://schemas.microsoft.com/office/drawing/2014/main" id="{9EDE2778-5372-4104-B96D-968184DA8288}"/>
+                <a16:creationId xmlns:a16="http://schemas.microsoft.com/office/drawing/2014/main" xmlns="" id="{9EDE2778-5372-4104-B96D-968184DA8288}"/>
               </a:ext>
             </a:extLst>
           </p:cNvPr>
@@ -6544,7 +6190,7 @@
           <a:p>
             <a:fld id="{63289F7E-B80B-496E-81B4-D396C37C9454}" type="datetimeFigureOut">
               <a:rPr lang="pt-BR" smtClean="0"/>
-              <a:t>21/03/2026</a:t>
+              <a:t>28/03/2026</a:t>
             </a:fld>
             <a:endParaRPr lang="pt-BR"/>
           </a:p>
@@ -6555,7 +6201,7 @@
           <p:cNvPr id="5" name="Espaço Reservado para Rodapé 4">
             <a:extLst>
               <a:ext uri="{FF2B5EF4-FFF2-40B4-BE49-F238E27FC236}">
-                <a16:creationId xmlns="" xmlns:a16="http://schemas.microsoft.com/office/drawing/2014/main" id="{C1DD0F41-C861-4051-988D-3024A37A4B93}"/>
+                <a16:creationId xmlns:a16="http://schemas.microsoft.com/office/drawing/2014/main" xmlns="" id="{C1DD0F41-C861-4051-988D-3024A37A4B93}"/>
               </a:ext>
             </a:extLst>
           </p:cNvPr>
@@ -6580,7 +6226,7 @@
           <p:cNvPr id="6" name="Espaço Reservado para Número de Slide 5">
             <a:extLst>
               <a:ext uri="{FF2B5EF4-FFF2-40B4-BE49-F238E27FC236}">
-                <a16:creationId xmlns="" xmlns:a16="http://schemas.microsoft.com/office/drawing/2014/main" id="{07E5967E-D980-431A-A5DB-3F0C5030A81E}"/>
+                <a16:creationId xmlns:a16="http://schemas.microsoft.com/office/drawing/2014/main" xmlns="" id="{07E5967E-D980-431A-A5DB-3F0C5030A81E}"/>
               </a:ext>
             </a:extLst>
           </p:cNvPr>
@@ -6639,7 +6285,7 @@
           <p:cNvPr id="2" name="Título 1">
             <a:extLst>
               <a:ext uri="{FF2B5EF4-FFF2-40B4-BE49-F238E27FC236}">
-                <a16:creationId xmlns="" xmlns:a16="http://schemas.microsoft.com/office/drawing/2014/main" id="{9036C49F-3E68-4175-81BA-3C3FEE44308A}"/>
+                <a16:creationId xmlns:a16="http://schemas.microsoft.com/office/drawing/2014/main" xmlns="" id="{9036C49F-3E68-4175-81BA-3C3FEE44308A}"/>
               </a:ext>
             </a:extLst>
           </p:cNvPr>
@@ -6667,7 +6313,7 @@
           <p:cNvPr id="3" name="Espaço Reservado para Texto Vertical 2">
             <a:extLst>
               <a:ext uri="{FF2B5EF4-FFF2-40B4-BE49-F238E27FC236}">
-                <a16:creationId xmlns="" xmlns:a16="http://schemas.microsoft.com/office/drawing/2014/main" id="{426FA736-3DD3-4D4E-B57B-BBE1D8F7D424}"/>
+                <a16:creationId xmlns:a16="http://schemas.microsoft.com/office/drawing/2014/main" xmlns="" id="{426FA736-3DD3-4D4E-B57B-BBE1D8F7D424}"/>
               </a:ext>
             </a:extLst>
           </p:cNvPr>
@@ -6724,7 +6370,7 @@
           <p:cNvPr id="4" name="Espaço Reservado para Data 3">
             <a:extLst>
               <a:ext uri="{FF2B5EF4-FFF2-40B4-BE49-F238E27FC236}">
-                <a16:creationId xmlns="" xmlns:a16="http://schemas.microsoft.com/office/drawing/2014/main" id="{99E8855C-D8FD-48F6-B14E-861E0DE4D915}"/>
+                <a16:creationId xmlns:a16="http://schemas.microsoft.com/office/drawing/2014/main" xmlns="" id="{99E8855C-D8FD-48F6-B14E-861E0DE4D915}"/>
               </a:ext>
             </a:extLst>
           </p:cNvPr>
@@ -6742,7 +6388,7 @@
           <a:p>
             <a:fld id="{63289F7E-B80B-496E-81B4-D396C37C9454}" type="datetimeFigureOut">
               <a:rPr lang="pt-BR" smtClean="0"/>
-              <a:t>21/03/2026</a:t>
+              <a:t>28/03/2026</a:t>
             </a:fld>
             <a:endParaRPr lang="pt-BR"/>
           </a:p>
@@ -6753,7 +6399,7 @@
           <p:cNvPr id="5" name="Espaço Reservado para Rodapé 4">
             <a:extLst>
               <a:ext uri="{FF2B5EF4-FFF2-40B4-BE49-F238E27FC236}">
-                <a16:creationId xmlns="" xmlns:a16="http://schemas.microsoft.com/office/drawing/2014/main" id="{97C0BB88-2F21-42A5-ACFF-83DA47F2D340}"/>
+                <a16:creationId xmlns:a16="http://schemas.microsoft.com/office/drawing/2014/main" xmlns="" id="{97C0BB88-2F21-42A5-ACFF-83DA47F2D340}"/>
               </a:ext>
             </a:extLst>
           </p:cNvPr>
@@ -6778,7 +6424,7 @@
           <p:cNvPr id="6" name="Espaço Reservado para Número de Slide 5">
             <a:extLst>
               <a:ext uri="{FF2B5EF4-FFF2-40B4-BE49-F238E27FC236}">
-                <a16:creationId xmlns="" xmlns:a16="http://schemas.microsoft.com/office/drawing/2014/main" id="{6CB462B3-1F22-4C05-B4B8-7A279FB7D5E9}"/>
+                <a16:creationId xmlns:a16="http://schemas.microsoft.com/office/drawing/2014/main" xmlns="" id="{6CB462B3-1F22-4C05-B4B8-7A279FB7D5E9}"/>
               </a:ext>
             </a:extLst>
           </p:cNvPr>
@@ -6837,7 +6483,7 @@
           <p:cNvPr id="2" name="Título Vertical 1">
             <a:extLst>
               <a:ext uri="{FF2B5EF4-FFF2-40B4-BE49-F238E27FC236}">
-                <a16:creationId xmlns="" xmlns:a16="http://schemas.microsoft.com/office/drawing/2014/main" id="{EAEAB728-701C-4207-A9D5-23FF45C60502}"/>
+                <a16:creationId xmlns:a16="http://schemas.microsoft.com/office/drawing/2014/main" xmlns="" id="{EAEAB728-701C-4207-A9D5-23FF45C60502}"/>
               </a:ext>
             </a:extLst>
           </p:cNvPr>
@@ -6870,7 +6516,7 @@
           <p:cNvPr id="3" name="Espaço Reservado para Texto Vertical 2">
             <a:extLst>
               <a:ext uri="{FF2B5EF4-FFF2-40B4-BE49-F238E27FC236}">
-                <a16:creationId xmlns="" xmlns:a16="http://schemas.microsoft.com/office/drawing/2014/main" id="{BA8C8CCF-7823-480A-9A19-0F664DD17E3B}"/>
+                <a16:creationId xmlns:a16="http://schemas.microsoft.com/office/drawing/2014/main" xmlns="" id="{BA8C8CCF-7823-480A-9A19-0F664DD17E3B}"/>
               </a:ext>
             </a:extLst>
           </p:cNvPr>
@@ -6932,7 +6578,7 @@
           <p:cNvPr id="4" name="Espaço Reservado para Data 3">
             <a:extLst>
               <a:ext uri="{FF2B5EF4-FFF2-40B4-BE49-F238E27FC236}">
-                <a16:creationId xmlns="" xmlns:a16="http://schemas.microsoft.com/office/drawing/2014/main" id="{721D5734-7B1F-425D-942F-6EB73344027C}"/>
+                <a16:creationId xmlns:a16="http://schemas.microsoft.com/office/drawing/2014/main" xmlns="" id="{721D5734-7B1F-425D-942F-6EB73344027C}"/>
               </a:ext>
             </a:extLst>
           </p:cNvPr>
@@ -6950,7 +6596,7 @@
           <a:p>
             <a:fld id="{63289F7E-B80B-496E-81B4-D396C37C9454}" type="datetimeFigureOut">
               <a:rPr lang="pt-BR" smtClean="0"/>
-              <a:t>21/03/2026</a:t>
+              <a:t>28/03/2026</a:t>
             </a:fld>
             <a:endParaRPr lang="pt-BR"/>
           </a:p>
@@ -6961,7 +6607,7 @@
           <p:cNvPr id="5" name="Espaço Reservado para Rodapé 4">
             <a:extLst>
               <a:ext uri="{FF2B5EF4-FFF2-40B4-BE49-F238E27FC236}">
-                <a16:creationId xmlns="" xmlns:a16="http://schemas.microsoft.com/office/drawing/2014/main" id="{1E1AAEAC-F08D-45FE-89EC-B1B349A868C9}"/>
+                <a16:creationId xmlns:a16="http://schemas.microsoft.com/office/drawing/2014/main" xmlns="" id="{1E1AAEAC-F08D-45FE-89EC-B1B349A868C9}"/>
               </a:ext>
             </a:extLst>
           </p:cNvPr>
@@ -6986,7 +6632,7 @@
           <p:cNvPr id="6" name="Espaço Reservado para Número de Slide 5">
             <a:extLst>
               <a:ext uri="{FF2B5EF4-FFF2-40B4-BE49-F238E27FC236}">
-                <a16:creationId xmlns="" xmlns:a16="http://schemas.microsoft.com/office/drawing/2014/main" id="{BAA44493-9911-47B2-87A6-C2141A972BC8}"/>
+                <a16:creationId xmlns:a16="http://schemas.microsoft.com/office/drawing/2014/main" xmlns="" id="{BAA44493-9911-47B2-87A6-C2141A972BC8}"/>
               </a:ext>
             </a:extLst>
           </p:cNvPr>
@@ -7045,7 +6691,7 @@
           <p:cNvPr id="2" name="Título 1">
             <a:extLst>
               <a:ext uri="{FF2B5EF4-FFF2-40B4-BE49-F238E27FC236}">
-                <a16:creationId xmlns="" xmlns:a16="http://schemas.microsoft.com/office/drawing/2014/main" id="{71BD44A5-8F21-4626-A01D-48A1C874B1D5}"/>
+                <a16:creationId xmlns:a16="http://schemas.microsoft.com/office/drawing/2014/main" xmlns="" id="{71BD44A5-8F21-4626-A01D-48A1C874B1D5}"/>
               </a:ext>
             </a:extLst>
           </p:cNvPr>
@@ -7073,7 +6719,7 @@
           <p:cNvPr id="3" name="Espaço Reservado para Conteúdo 2">
             <a:extLst>
               <a:ext uri="{FF2B5EF4-FFF2-40B4-BE49-F238E27FC236}">
-                <a16:creationId xmlns="" xmlns:a16="http://schemas.microsoft.com/office/drawing/2014/main" id="{B79E8085-65A9-48AA-951D-71D978BFF4ED}"/>
+                <a16:creationId xmlns:a16="http://schemas.microsoft.com/office/drawing/2014/main" xmlns="" id="{B79E8085-65A9-48AA-951D-71D978BFF4ED}"/>
               </a:ext>
             </a:extLst>
           </p:cNvPr>
@@ -7130,7 +6776,7 @@
           <p:cNvPr id="4" name="Espaço Reservado para Data 3">
             <a:extLst>
               <a:ext uri="{FF2B5EF4-FFF2-40B4-BE49-F238E27FC236}">
-                <a16:creationId xmlns="" xmlns:a16="http://schemas.microsoft.com/office/drawing/2014/main" id="{F05BE1AF-51EA-425D-B188-DE7BD675009F}"/>
+                <a16:creationId xmlns:a16="http://schemas.microsoft.com/office/drawing/2014/main" xmlns="" id="{F05BE1AF-51EA-425D-B188-DE7BD675009F}"/>
               </a:ext>
             </a:extLst>
           </p:cNvPr>
@@ -7148,7 +6794,7 @@
           <a:p>
             <a:fld id="{63289F7E-B80B-496E-81B4-D396C37C9454}" type="datetimeFigureOut">
               <a:rPr lang="pt-BR" smtClean="0"/>
-              <a:t>21/03/2026</a:t>
+              <a:t>28/03/2026</a:t>
             </a:fld>
             <a:endParaRPr lang="pt-BR"/>
           </a:p>
@@ -7159,7 +6805,7 @@
           <p:cNvPr id="5" name="Espaço Reservado para Rodapé 4">
             <a:extLst>
               <a:ext uri="{FF2B5EF4-FFF2-40B4-BE49-F238E27FC236}">
-                <a16:creationId xmlns="" xmlns:a16="http://schemas.microsoft.com/office/drawing/2014/main" id="{121BE632-29CF-4CB9-B365-C9EF38F89BE6}"/>
+                <a16:creationId xmlns:a16="http://schemas.microsoft.com/office/drawing/2014/main" xmlns="" id="{121BE632-29CF-4CB9-B365-C9EF38F89BE6}"/>
               </a:ext>
             </a:extLst>
           </p:cNvPr>
@@ -7184,7 +6830,7 @@
           <p:cNvPr id="6" name="Espaço Reservado para Número de Slide 5">
             <a:extLst>
               <a:ext uri="{FF2B5EF4-FFF2-40B4-BE49-F238E27FC236}">
-                <a16:creationId xmlns="" xmlns:a16="http://schemas.microsoft.com/office/drawing/2014/main" id="{60CF3DD1-9AEC-4A57-B461-4E4DD86FAC18}"/>
+                <a16:creationId xmlns:a16="http://schemas.microsoft.com/office/drawing/2014/main" xmlns="" id="{60CF3DD1-9AEC-4A57-B461-4E4DD86FAC18}"/>
               </a:ext>
             </a:extLst>
           </p:cNvPr>
@@ -7243,7 +6889,7 @@
           <p:cNvPr id="2" name="Título 1">
             <a:extLst>
               <a:ext uri="{FF2B5EF4-FFF2-40B4-BE49-F238E27FC236}">
-                <a16:creationId xmlns="" xmlns:a16="http://schemas.microsoft.com/office/drawing/2014/main" id="{34AB2FF0-A4D7-4E28-991D-FF26140D5988}"/>
+                <a16:creationId xmlns:a16="http://schemas.microsoft.com/office/drawing/2014/main" xmlns="" id="{34AB2FF0-A4D7-4E28-991D-FF26140D5988}"/>
               </a:ext>
             </a:extLst>
           </p:cNvPr>
@@ -7280,7 +6926,7 @@
           <p:cNvPr id="3" name="Espaço Reservado para Texto 2">
             <a:extLst>
               <a:ext uri="{FF2B5EF4-FFF2-40B4-BE49-F238E27FC236}">
-                <a16:creationId xmlns="" xmlns:a16="http://schemas.microsoft.com/office/drawing/2014/main" id="{E2AC45B0-4145-40DB-8E61-105461170604}"/>
+                <a16:creationId xmlns:a16="http://schemas.microsoft.com/office/drawing/2014/main" xmlns="" id="{E2AC45B0-4145-40DB-8E61-105461170604}"/>
               </a:ext>
             </a:extLst>
           </p:cNvPr>
@@ -7405,7 +7051,7 @@
           <p:cNvPr id="4" name="Espaço Reservado para Data 3">
             <a:extLst>
               <a:ext uri="{FF2B5EF4-FFF2-40B4-BE49-F238E27FC236}">
-                <a16:creationId xmlns="" xmlns:a16="http://schemas.microsoft.com/office/drawing/2014/main" id="{50F1D3FB-740A-4EBA-A309-2CE71D12ECFB}"/>
+                <a16:creationId xmlns:a16="http://schemas.microsoft.com/office/drawing/2014/main" xmlns="" id="{50F1D3FB-740A-4EBA-A309-2CE71D12ECFB}"/>
               </a:ext>
             </a:extLst>
           </p:cNvPr>
@@ -7423,7 +7069,7 @@
           <a:p>
             <a:fld id="{63289F7E-B80B-496E-81B4-D396C37C9454}" type="datetimeFigureOut">
               <a:rPr lang="pt-BR" smtClean="0"/>
-              <a:t>21/03/2026</a:t>
+              <a:t>28/03/2026</a:t>
             </a:fld>
             <a:endParaRPr lang="pt-BR"/>
           </a:p>
@@ -7434,7 +7080,7 @@
           <p:cNvPr id="5" name="Espaço Reservado para Rodapé 4">
             <a:extLst>
               <a:ext uri="{FF2B5EF4-FFF2-40B4-BE49-F238E27FC236}">
-                <a16:creationId xmlns="" xmlns:a16="http://schemas.microsoft.com/office/drawing/2014/main" id="{BDCAB18F-8715-4465-A940-F9C193A2ACE9}"/>
+                <a16:creationId xmlns:a16="http://schemas.microsoft.com/office/drawing/2014/main" xmlns="" id="{BDCAB18F-8715-4465-A940-F9C193A2ACE9}"/>
               </a:ext>
             </a:extLst>
           </p:cNvPr>
@@ -7459,7 +7105,7 @@
           <p:cNvPr id="6" name="Espaço Reservado para Número de Slide 5">
             <a:extLst>
               <a:ext uri="{FF2B5EF4-FFF2-40B4-BE49-F238E27FC236}">
-                <a16:creationId xmlns="" xmlns:a16="http://schemas.microsoft.com/office/drawing/2014/main" id="{353466C6-8248-429F-8056-FF040BF509EB}"/>
+                <a16:creationId xmlns:a16="http://schemas.microsoft.com/office/drawing/2014/main" xmlns="" id="{353466C6-8248-429F-8056-FF040BF509EB}"/>
               </a:ext>
             </a:extLst>
           </p:cNvPr>
@@ -7518,7 +7164,7 @@
           <p:cNvPr id="2" name="Título 1">
             <a:extLst>
               <a:ext uri="{FF2B5EF4-FFF2-40B4-BE49-F238E27FC236}">
-                <a16:creationId xmlns="" xmlns:a16="http://schemas.microsoft.com/office/drawing/2014/main" id="{BC7BB9F0-F14B-4A91-B2B7-35BC47FE4DE7}"/>
+                <a16:creationId xmlns:a16="http://schemas.microsoft.com/office/drawing/2014/main" xmlns="" id="{BC7BB9F0-F14B-4A91-B2B7-35BC47FE4DE7}"/>
               </a:ext>
             </a:extLst>
           </p:cNvPr>
@@ -7546,7 +7192,7 @@
           <p:cNvPr id="3" name="Espaço Reservado para Conteúdo 2">
             <a:extLst>
               <a:ext uri="{FF2B5EF4-FFF2-40B4-BE49-F238E27FC236}">
-                <a16:creationId xmlns="" xmlns:a16="http://schemas.microsoft.com/office/drawing/2014/main" id="{EC1FC1C4-73DA-47A6-8496-B0B457F7D39A}"/>
+                <a16:creationId xmlns:a16="http://schemas.microsoft.com/office/drawing/2014/main" xmlns="" id="{EC1FC1C4-73DA-47A6-8496-B0B457F7D39A}"/>
               </a:ext>
             </a:extLst>
           </p:cNvPr>
@@ -7608,7 +7254,7 @@
           <p:cNvPr id="4" name="Espaço Reservado para Conteúdo 3">
             <a:extLst>
               <a:ext uri="{FF2B5EF4-FFF2-40B4-BE49-F238E27FC236}">
-                <a16:creationId xmlns="" xmlns:a16="http://schemas.microsoft.com/office/drawing/2014/main" id="{E92F06A8-A449-4D92-9912-76873E529B38}"/>
+                <a16:creationId xmlns:a16="http://schemas.microsoft.com/office/drawing/2014/main" xmlns="" id="{E92F06A8-A449-4D92-9912-76873E529B38}"/>
               </a:ext>
             </a:extLst>
           </p:cNvPr>
@@ -7670,7 +7316,7 @@
           <p:cNvPr id="5" name="Espaço Reservado para Data 4">
             <a:extLst>
               <a:ext uri="{FF2B5EF4-FFF2-40B4-BE49-F238E27FC236}">
-                <a16:creationId xmlns="" xmlns:a16="http://schemas.microsoft.com/office/drawing/2014/main" id="{938070A4-BC2F-4D55-BD8D-DEAF11BB9EE9}"/>
+                <a16:creationId xmlns:a16="http://schemas.microsoft.com/office/drawing/2014/main" xmlns="" id="{938070A4-BC2F-4D55-BD8D-DEAF11BB9EE9}"/>
               </a:ext>
             </a:extLst>
           </p:cNvPr>
@@ -7688,7 +7334,7 @@
           <a:p>
             <a:fld id="{63289F7E-B80B-496E-81B4-D396C37C9454}" type="datetimeFigureOut">
               <a:rPr lang="pt-BR" smtClean="0"/>
-              <a:t>21/03/2026</a:t>
+              <a:t>28/03/2026</a:t>
             </a:fld>
             <a:endParaRPr lang="pt-BR"/>
           </a:p>
@@ -7699,7 +7345,7 @@
           <p:cNvPr id="6" name="Espaço Reservado para Rodapé 5">
             <a:extLst>
               <a:ext uri="{FF2B5EF4-FFF2-40B4-BE49-F238E27FC236}">
-                <a16:creationId xmlns="" xmlns:a16="http://schemas.microsoft.com/office/drawing/2014/main" id="{45CC2DB8-844A-465F-BA9A-7734C80C7F43}"/>
+                <a16:creationId xmlns:a16="http://schemas.microsoft.com/office/drawing/2014/main" xmlns="" id="{45CC2DB8-844A-465F-BA9A-7734C80C7F43}"/>
               </a:ext>
             </a:extLst>
           </p:cNvPr>
@@ -7724,7 +7370,7 @@
           <p:cNvPr id="7" name="Espaço Reservado para Número de Slide 6">
             <a:extLst>
               <a:ext uri="{FF2B5EF4-FFF2-40B4-BE49-F238E27FC236}">
-                <a16:creationId xmlns="" xmlns:a16="http://schemas.microsoft.com/office/drawing/2014/main" id="{4CC606A8-097B-4040-94E0-CD8C88280D8F}"/>
+                <a16:creationId xmlns:a16="http://schemas.microsoft.com/office/drawing/2014/main" xmlns="" id="{4CC606A8-097B-4040-94E0-CD8C88280D8F}"/>
               </a:ext>
             </a:extLst>
           </p:cNvPr>
@@ -7783,7 +7429,7 @@
           <p:cNvPr id="2" name="Título 1">
             <a:extLst>
               <a:ext uri="{FF2B5EF4-FFF2-40B4-BE49-F238E27FC236}">
-                <a16:creationId xmlns="" xmlns:a16="http://schemas.microsoft.com/office/drawing/2014/main" id="{76D66686-0143-4CB6-8C09-BA326F1E7ACA}"/>
+                <a16:creationId xmlns:a16="http://schemas.microsoft.com/office/drawing/2014/main" xmlns="" id="{76D66686-0143-4CB6-8C09-BA326F1E7ACA}"/>
               </a:ext>
             </a:extLst>
           </p:cNvPr>
@@ -7816,7 +7462,7 @@
           <p:cNvPr id="3" name="Espaço Reservado para Texto 2">
             <a:extLst>
               <a:ext uri="{FF2B5EF4-FFF2-40B4-BE49-F238E27FC236}">
-                <a16:creationId xmlns="" xmlns:a16="http://schemas.microsoft.com/office/drawing/2014/main" id="{0227AB85-F59E-4BCE-B846-4FA0992C2F23}"/>
+                <a16:creationId xmlns:a16="http://schemas.microsoft.com/office/drawing/2014/main" xmlns="" id="{0227AB85-F59E-4BCE-B846-4FA0992C2F23}"/>
               </a:ext>
             </a:extLst>
           </p:cNvPr>
@@ -7887,7 +7533,7 @@
           <p:cNvPr id="4" name="Espaço Reservado para Conteúdo 3">
             <a:extLst>
               <a:ext uri="{FF2B5EF4-FFF2-40B4-BE49-F238E27FC236}">
-                <a16:creationId xmlns="" xmlns:a16="http://schemas.microsoft.com/office/drawing/2014/main" id="{3373456C-7319-4D0A-827D-D29F6B083F5D}"/>
+                <a16:creationId xmlns:a16="http://schemas.microsoft.com/office/drawing/2014/main" xmlns="" id="{3373456C-7319-4D0A-827D-D29F6B083F5D}"/>
               </a:ext>
             </a:extLst>
           </p:cNvPr>
@@ -7949,7 +7595,7 @@
           <p:cNvPr id="5" name="Espaço Reservado para Texto 4">
             <a:extLst>
               <a:ext uri="{FF2B5EF4-FFF2-40B4-BE49-F238E27FC236}">
-                <a16:creationId xmlns="" xmlns:a16="http://schemas.microsoft.com/office/drawing/2014/main" id="{4CD109D0-2E83-4262-8029-A871CEC47406}"/>
+                <a16:creationId xmlns:a16="http://schemas.microsoft.com/office/drawing/2014/main" xmlns="" id="{4CD109D0-2E83-4262-8029-A871CEC47406}"/>
               </a:ext>
             </a:extLst>
           </p:cNvPr>
@@ -8020,7 +7666,7 @@
           <p:cNvPr id="6" name="Espaço Reservado para Conteúdo 5">
             <a:extLst>
               <a:ext uri="{FF2B5EF4-FFF2-40B4-BE49-F238E27FC236}">
-                <a16:creationId xmlns="" xmlns:a16="http://schemas.microsoft.com/office/drawing/2014/main" id="{AD706E3A-CFBB-4A6C-A65F-D0360A9E74FE}"/>
+                <a16:creationId xmlns:a16="http://schemas.microsoft.com/office/drawing/2014/main" xmlns="" id="{AD706E3A-CFBB-4A6C-A65F-D0360A9E74FE}"/>
               </a:ext>
             </a:extLst>
           </p:cNvPr>
@@ -8082,7 +7728,7 @@
           <p:cNvPr id="7" name="Espaço Reservado para Data 6">
             <a:extLst>
               <a:ext uri="{FF2B5EF4-FFF2-40B4-BE49-F238E27FC236}">
-                <a16:creationId xmlns="" xmlns:a16="http://schemas.microsoft.com/office/drawing/2014/main" id="{4172C0E5-5AF0-4805-BB51-443733CD2BD5}"/>
+                <a16:creationId xmlns:a16="http://schemas.microsoft.com/office/drawing/2014/main" xmlns="" id="{4172C0E5-5AF0-4805-BB51-443733CD2BD5}"/>
               </a:ext>
             </a:extLst>
           </p:cNvPr>
@@ -8100,7 +7746,7 @@
           <a:p>
             <a:fld id="{63289F7E-B80B-496E-81B4-D396C37C9454}" type="datetimeFigureOut">
               <a:rPr lang="pt-BR" smtClean="0"/>
-              <a:t>21/03/2026</a:t>
+              <a:t>28/03/2026</a:t>
             </a:fld>
             <a:endParaRPr lang="pt-BR"/>
           </a:p>
@@ -8111,7 +7757,7 @@
           <p:cNvPr id="8" name="Espaço Reservado para Rodapé 7">
             <a:extLst>
               <a:ext uri="{FF2B5EF4-FFF2-40B4-BE49-F238E27FC236}">
-                <a16:creationId xmlns="" xmlns:a16="http://schemas.microsoft.com/office/drawing/2014/main" id="{0E801648-156F-497E-99CF-797DF48051E1}"/>
+                <a16:creationId xmlns:a16="http://schemas.microsoft.com/office/drawing/2014/main" xmlns="" id="{0E801648-156F-497E-99CF-797DF48051E1}"/>
               </a:ext>
             </a:extLst>
           </p:cNvPr>
@@ -8136,7 +7782,7 @@
           <p:cNvPr id="9" name="Espaço Reservado para Número de Slide 8">
             <a:extLst>
               <a:ext uri="{FF2B5EF4-FFF2-40B4-BE49-F238E27FC236}">
-                <a16:creationId xmlns="" xmlns:a16="http://schemas.microsoft.com/office/drawing/2014/main" id="{EEE23D32-80E7-4796-A137-66BF842E4B53}"/>
+                <a16:creationId xmlns:a16="http://schemas.microsoft.com/office/drawing/2014/main" xmlns="" id="{EEE23D32-80E7-4796-A137-66BF842E4B53}"/>
               </a:ext>
             </a:extLst>
           </p:cNvPr>
@@ -8195,7 +7841,7 @@
           <p:cNvPr id="2" name="Título 1">
             <a:extLst>
               <a:ext uri="{FF2B5EF4-FFF2-40B4-BE49-F238E27FC236}">
-                <a16:creationId xmlns="" xmlns:a16="http://schemas.microsoft.com/office/drawing/2014/main" id="{2BCE2379-C78F-47E1-8CFC-B846E7AF148D}"/>
+                <a16:creationId xmlns:a16="http://schemas.microsoft.com/office/drawing/2014/main" xmlns="" id="{2BCE2379-C78F-47E1-8CFC-B846E7AF148D}"/>
               </a:ext>
             </a:extLst>
           </p:cNvPr>
@@ -8223,7 +7869,7 @@
           <p:cNvPr id="3" name="Espaço Reservado para Data 2">
             <a:extLst>
               <a:ext uri="{FF2B5EF4-FFF2-40B4-BE49-F238E27FC236}">
-                <a16:creationId xmlns="" xmlns:a16="http://schemas.microsoft.com/office/drawing/2014/main" id="{342600A9-7F92-4E22-9D94-E4717252A817}"/>
+                <a16:creationId xmlns:a16="http://schemas.microsoft.com/office/drawing/2014/main" xmlns="" id="{342600A9-7F92-4E22-9D94-E4717252A817}"/>
               </a:ext>
             </a:extLst>
           </p:cNvPr>
@@ -8241,7 +7887,7 @@
           <a:p>
             <a:fld id="{63289F7E-B80B-496E-81B4-D396C37C9454}" type="datetimeFigureOut">
               <a:rPr lang="pt-BR" smtClean="0"/>
-              <a:t>21/03/2026</a:t>
+              <a:t>28/03/2026</a:t>
             </a:fld>
             <a:endParaRPr lang="pt-BR"/>
           </a:p>
@@ -8252,7 +7898,7 @@
           <p:cNvPr id="4" name="Espaço Reservado para Rodapé 3">
             <a:extLst>
               <a:ext uri="{FF2B5EF4-FFF2-40B4-BE49-F238E27FC236}">
-                <a16:creationId xmlns="" xmlns:a16="http://schemas.microsoft.com/office/drawing/2014/main" id="{192E6BED-F546-40CC-A2DF-99CBA853654E}"/>
+                <a16:creationId xmlns:a16="http://schemas.microsoft.com/office/drawing/2014/main" xmlns="" id="{192E6BED-F546-40CC-A2DF-99CBA853654E}"/>
               </a:ext>
             </a:extLst>
           </p:cNvPr>
@@ -8277,7 +7923,7 @@
           <p:cNvPr id="5" name="Espaço Reservado para Número de Slide 4">
             <a:extLst>
               <a:ext uri="{FF2B5EF4-FFF2-40B4-BE49-F238E27FC236}">
-                <a16:creationId xmlns="" xmlns:a16="http://schemas.microsoft.com/office/drawing/2014/main" id="{6091CC40-A8C4-4063-80EB-CC5099621678}"/>
+                <a16:creationId xmlns:a16="http://schemas.microsoft.com/office/drawing/2014/main" xmlns="" id="{6091CC40-A8C4-4063-80EB-CC5099621678}"/>
               </a:ext>
             </a:extLst>
           </p:cNvPr>
@@ -8336,7 +7982,7 @@
           <p:cNvPr id="2" name="Espaço Reservado para Data 1">
             <a:extLst>
               <a:ext uri="{FF2B5EF4-FFF2-40B4-BE49-F238E27FC236}">
-                <a16:creationId xmlns="" xmlns:a16="http://schemas.microsoft.com/office/drawing/2014/main" id="{DD19515C-212C-4EAE-84A3-8FF4BC844F1B}"/>
+                <a16:creationId xmlns:a16="http://schemas.microsoft.com/office/drawing/2014/main" xmlns="" id="{DD19515C-212C-4EAE-84A3-8FF4BC844F1B}"/>
               </a:ext>
             </a:extLst>
           </p:cNvPr>
@@ -8354,7 +8000,7 @@
           <a:p>
             <a:fld id="{63289F7E-B80B-496E-81B4-D396C37C9454}" type="datetimeFigureOut">
               <a:rPr lang="pt-BR" smtClean="0"/>
-              <a:t>21/03/2026</a:t>
+              <a:t>28/03/2026</a:t>
             </a:fld>
             <a:endParaRPr lang="pt-BR"/>
           </a:p>
@@ -8365,7 +8011,7 @@
           <p:cNvPr id="3" name="Espaço Reservado para Rodapé 2">
             <a:extLst>
               <a:ext uri="{FF2B5EF4-FFF2-40B4-BE49-F238E27FC236}">
-                <a16:creationId xmlns="" xmlns:a16="http://schemas.microsoft.com/office/drawing/2014/main" id="{94D3D120-B3E8-4C96-861D-7A4F12F49B3A}"/>
+                <a16:creationId xmlns:a16="http://schemas.microsoft.com/office/drawing/2014/main" xmlns="" id="{94D3D120-B3E8-4C96-861D-7A4F12F49B3A}"/>
               </a:ext>
             </a:extLst>
           </p:cNvPr>
@@ -8390,7 +8036,7 @@
           <p:cNvPr id="4" name="Espaço Reservado para Número de Slide 3">
             <a:extLst>
               <a:ext uri="{FF2B5EF4-FFF2-40B4-BE49-F238E27FC236}">
-                <a16:creationId xmlns="" xmlns:a16="http://schemas.microsoft.com/office/drawing/2014/main" id="{42E49B68-FA1B-468B-9F17-D5C09243D454}"/>
+                <a16:creationId xmlns:a16="http://schemas.microsoft.com/office/drawing/2014/main" xmlns="" id="{42E49B68-FA1B-468B-9F17-D5C09243D454}"/>
               </a:ext>
             </a:extLst>
           </p:cNvPr>
@@ -8449,7 +8095,7 @@
           <p:cNvPr id="2" name="Título 1">
             <a:extLst>
               <a:ext uri="{FF2B5EF4-FFF2-40B4-BE49-F238E27FC236}">
-                <a16:creationId xmlns="" xmlns:a16="http://schemas.microsoft.com/office/drawing/2014/main" id="{1C17BCBE-A897-4319-85EC-D87909C24980}"/>
+                <a16:creationId xmlns:a16="http://schemas.microsoft.com/office/drawing/2014/main" xmlns="" id="{1C17BCBE-A897-4319-85EC-D87909C24980}"/>
               </a:ext>
             </a:extLst>
           </p:cNvPr>
@@ -8486,7 +8132,7 @@
           <p:cNvPr id="3" name="Espaço Reservado para Conteúdo 2">
             <a:extLst>
               <a:ext uri="{FF2B5EF4-FFF2-40B4-BE49-F238E27FC236}">
-                <a16:creationId xmlns="" xmlns:a16="http://schemas.microsoft.com/office/drawing/2014/main" id="{4226F885-0204-4913-868B-4B8B82576F17}"/>
+                <a16:creationId xmlns:a16="http://schemas.microsoft.com/office/drawing/2014/main" xmlns="" id="{4226F885-0204-4913-868B-4B8B82576F17}"/>
               </a:ext>
             </a:extLst>
           </p:cNvPr>
@@ -8576,7 +8222,7 @@
           <p:cNvPr id="4" name="Espaço Reservado para Texto 3">
             <a:extLst>
               <a:ext uri="{FF2B5EF4-FFF2-40B4-BE49-F238E27FC236}">
-                <a16:creationId xmlns="" xmlns:a16="http://schemas.microsoft.com/office/drawing/2014/main" id="{00F9F784-A858-441B-8AB5-697098141751}"/>
+                <a16:creationId xmlns:a16="http://schemas.microsoft.com/office/drawing/2014/main" xmlns="" id="{00F9F784-A858-441B-8AB5-697098141751}"/>
               </a:ext>
             </a:extLst>
           </p:cNvPr>
@@ -8647,7 +8293,7 @@
           <p:cNvPr id="5" name="Espaço Reservado para Data 4">
             <a:extLst>
               <a:ext uri="{FF2B5EF4-FFF2-40B4-BE49-F238E27FC236}">
-                <a16:creationId xmlns="" xmlns:a16="http://schemas.microsoft.com/office/drawing/2014/main" id="{A4DC363A-5000-472E-8B17-02E7DCB8840A}"/>
+                <a16:creationId xmlns:a16="http://schemas.microsoft.com/office/drawing/2014/main" xmlns="" id="{A4DC363A-5000-472E-8B17-02E7DCB8840A}"/>
               </a:ext>
             </a:extLst>
           </p:cNvPr>
@@ -8665,7 +8311,7 @@
           <a:p>
             <a:fld id="{63289F7E-B80B-496E-81B4-D396C37C9454}" type="datetimeFigureOut">
               <a:rPr lang="pt-BR" smtClean="0"/>
-              <a:t>21/03/2026</a:t>
+              <a:t>28/03/2026</a:t>
             </a:fld>
             <a:endParaRPr lang="pt-BR"/>
           </a:p>
@@ -8676,7 +8322,7 @@
           <p:cNvPr id="6" name="Espaço Reservado para Rodapé 5">
             <a:extLst>
               <a:ext uri="{FF2B5EF4-FFF2-40B4-BE49-F238E27FC236}">
-                <a16:creationId xmlns="" xmlns:a16="http://schemas.microsoft.com/office/drawing/2014/main" id="{5548425D-2C21-4C56-BAD4-662978775C28}"/>
+                <a16:creationId xmlns:a16="http://schemas.microsoft.com/office/drawing/2014/main" xmlns="" id="{5548425D-2C21-4C56-BAD4-662978775C28}"/>
               </a:ext>
             </a:extLst>
           </p:cNvPr>
@@ -8701,7 +8347,7 @@
           <p:cNvPr id="7" name="Espaço Reservado para Número de Slide 6">
             <a:extLst>
               <a:ext uri="{FF2B5EF4-FFF2-40B4-BE49-F238E27FC236}">
-                <a16:creationId xmlns="" xmlns:a16="http://schemas.microsoft.com/office/drawing/2014/main" id="{C63E9726-E64C-42B2-AE8A-8C235A956B48}"/>
+                <a16:creationId xmlns:a16="http://schemas.microsoft.com/office/drawing/2014/main" xmlns="" id="{C63E9726-E64C-42B2-AE8A-8C235A956B48}"/>
               </a:ext>
             </a:extLst>
           </p:cNvPr>
@@ -8760,7 +8406,7 @@
           <p:cNvPr id="2" name="Título 1">
             <a:extLst>
               <a:ext uri="{FF2B5EF4-FFF2-40B4-BE49-F238E27FC236}">
-                <a16:creationId xmlns="" xmlns:a16="http://schemas.microsoft.com/office/drawing/2014/main" id="{11086A78-3E74-450C-96A6-CA8AC37AF772}"/>
+                <a16:creationId xmlns:a16="http://schemas.microsoft.com/office/drawing/2014/main" xmlns="" id="{11086A78-3E74-450C-96A6-CA8AC37AF772}"/>
               </a:ext>
             </a:extLst>
           </p:cNvPr>
@@ -8797,7 +8443,7 @@
           <p:cNvPr id="3" name="Espaço Reservado para Imagem 2">
             <a:extLst>
               <a:ext uri="{FF2B5EF4-FFF2-40B4-BE49-F238E27FC236}">
-                <a16:creationId xmlns="" xmlns:a16="http://schemas.microsoft.com/office/drawing/2014/main" id="{5F5B7312-975A-4DBC-9B2F-3652ADA006FD}"/>
+                <a16:creationId xmlns:a16="http://schemas.microsoft.com/office/drawing/2014/main" xmlns="" id="{5F5B7312-975A-4DBC-9B2F-3652ADA006FD}"/>
               </a:ext>
             </a:extLst>
           </p:cNvPr>
@@ -8864,7 +8510,7 @@
           <p:cNvPr id="4" name="Espaço Reservado para Texto 3">
             <a:extLst>
               <a:ext uri="{FF2B5EF4-FFF2-40B4-BE49-F238E27FC236}">
-                <a16:creationId xmlns="" xmlns:a16="http://schemas.microsoft.com/office/drawing/2014/main" id="{AAF805F5-1DFF-41C6-944C-7D79FE0D0963}"/>
+                <a16:creationId xmlns:a16="http://schemas.microsoft.com/office/drawing/2014/main" xmlns="" id="{AAF805F5-1DFF-41C6-944C-7D79FE0D0963}"/>
               </a:ext>
             </a:extLst>
           </p:cNvPr>
@@ -8935,7 +8581,7 @@
           <p:cNvPr id="5" name="Espaço Reservado para Data 4">
             <a:extLst>
               <a:ext uri="{FF2B5EF4-FFF2-40B4-BE49-F238E27FC236}">
-                <a16:creationId xmlns="" xmlns:a16="http://schemas.microsoft.com/office/drawing/2014/main" id="{02113D81-8665-4516-BD81-C6A1F254EECD}"/>
+                <a16:creationId xmlns:a16="http://schemas.microsoft.com/office/drawing/2014/main" xmlns="" id="{02113D81-8665-4516-BD81-C6A1F254EECD}"/>
               </a:ext>
             </a:extLst>
           </p:cNvPr>
@@ -8953,7 +8599,7 @@
           <a:p>
             <a:fld id="{63289F7E-B80B-496E-81B4-D396C37C9454}" type="datetimeFigureOut">
               <a:rPr lang="pt-BR" smtClean="0"/>
-              <a:t>21/03/2026</a:t>
+              <a:t>28/03/2026</a:t>
             </a:fld>
             <a:endParaRPr lang="pt-BR"/>
           </a:p>
@@ -8964,7 +8610,7 @@
           <p:cNvPr id="6" name="Espaço Reservado para Rodapé 5">
             <a:extLst>
               <a:ext uri="{FF2B5EF4-FFF2-40B4-BE49-F238E27FC236}">
-                <a16:creationId xmlns="" xmlns:a16="http://schemas.microsoft.com/office/drawing/2014/main" id="{2B00C88B-FF32-40AA-A187-727D96FD7862}"/>
+                <a16:creationId xmlns:a16="http://schemas.microsoft.com/office/drawing/2014/main" xmlns="" id="{2B00C88B-FF32-40AA-A187-727D96FD7862}"/>
               </a:ext>
             </a:extLst>
           </p:cNvPr>
@@ -8989,7 +8635,7 @@
           <p:cNvPr id="7" name="Espaço Reservado para Número de Slide 6">
             <a:extLst>
               <a:ext uri="{FF2B5EF4-FFF2-40B4-BE49-F238E27FC236}">
-                <a16:creationId xmlns="" xmlns:a16="http://schemas.microsoft.com/office/drawing/2014/main" id="{A04D1A2D-69F7-4B8F-A730-BC26DC340BA6}"/>
+                <a16:creationId xmlns:a16="http://schemas.microsoft.com/office/drawing/2014/main" xmlns="" id="{A04D1A2D-69F7-4B8F-A730-BC26DC340BA6}"/>
               </a:ext>
             </a:extLst>
           </p:cNvPr>
@@ -9053,7 +8699,7 @@
           <p:cNvPr id="2" name="Espaço Reservado para Título 1">
             <a:extLst>
               <a:ext uri="{FF2B5EF4-FFF2-40B4-BE49-F238E27FC236}">
-                <a16:creationId xmlns="" xmlns:a16="http://schemas.microsoft.com/office/drawing/2014/main" id="{E69A0273-1966-4A1B-9370-4C1CE5036371}"/>
+                <a16:creationId xmlns:a16="http://schemas.microsoft.com/office/drawing/2014/main" xmlns="" id="{E69A0273-1966-4A1B-9370-4C1CE5036371}"/>
               </a:ext>
             </a:extLst>
           </p:cNvPr>
@@ -9091,7 +8737,7 @@
           <p:cNvPr id="3" name="Espaço Reservado para Texto 2">
             <a:extLst>
               <a:ext uri="{FF2B5EF4-FFF2-40B4-BE49-F238E27FC236}">
-                <a16:creationId xmlns="" xmlns:a16="http://schemas.microsoft.com/office/drawing/2014/main" id="{3B9CF87A-0448-49A7-AB25-EBC1D56A40EF}"/>
+                <a16:creationId xmlns:a16="http://schemas.microsoft.com/office/drawing/2014/main" xmlns="" id="{3B9CF87A-0448-49A7-AB25-EBC1D56A40EF}"/>
               </a:ext>
             </a:extLst>
           </p:cNvPr>
@@ -9158,7 +8804,7 @@
           <p:cNvPr id="4" name="Espaço Reservado para Data 3">
             <a:extLst>
               <a:ext uri="{FF2B5EF4-FFF2-40B4-BE49-F238E27FC236}">
-                <a16:creationId xmlns="" xmlns:a16="http://schemas.microsoft.com/office/drawing/2014/main" id="{2EF7B1F2-BB5A-44D0-816D-16AD2C71430E}"/>
+                <a16:creationId xmlns:a16="http://schemas.microsoft.com/office/drawing/2014/main" xmlns="" id="{2EF7B1F2-BB5A-44D0-816D-16AD2C71430E}"/>
               </a:ext>
             </a:extLst>
           </p:cNvPr>
@@ -9194,7 +8840,7 @@
           <a:p>
             <a:fld id="{63289F7E-B80B-496E-81B4-D396C37C9454}" type="datetimeFigureOut">
               <a:rPr lang="pt-BR" smtClean="0"/>
-              <a:t>21/03/2026</a:t>
+              <a:t>28/03/2026</a:t>
             </a:fld>
             <a:endParaRPr lang="pt-BR"/>
           </a:p>
@@ -9205,7 +8851,7 @@
           <p:cNvPr id="5" name="Espaço Reservado para Rodapé 4">
             <a:extLst>
               <a:ext uri="{FF2B5EF4-FFF2-40B4-BE49-F238E27FC236}">
-                <a16:creationId xmlns="" xmlns:a16="http://schemas.microsoft.com/office/drawing/2014/main" id="{C703F94C-2CC8-4DAA-BC35-14FC3E841DCD}"/>
+                <a16:creationId xmlns:a16="http://schemas.microsoft.com/office/drawing/2014/main" xmlns="" id="{C703F94C-2CC8-4DAA-BC35-14FC3E841DCD}"/>
               </a:ext>
             </a:extLst>
           </p:cNvPr>
@@ -9248,7 +8894,7 @@
           <p:cNvPr id="6" name="Espaço Reservado para Número de Slide 5">
             <a:extLst>
               <a:ext uri="{FF2B5EF4-FFF2-40B4-BE49-F238E27FC236}">
-                <a16:creationId xmlns="" xmlns:a16="http://schemas.microsoft.com/office/drawing/2014/main" id="{64051336-7048-457A-8B61-D94291D71648}"/>
+                <a16:creationId xmlns:a16="http://schemas.microsoft.com/office/drawing/2014/main" xmlns="" id="{64051336-7048-457A-8B61-D94291D71648}"/>
               </a:ext>
             </a:extLst>
           </p:cNvPr>
@@ -9616,7 +9262,7 @@
           <p:cNvPr id="2" name="Título 1">
             <a:extLst>
               <a:ext uri="{FF2B5EF4-FFF2-40B4-BE49-F238E27FC236}">
-                <a16:creationId xmlns="" xmlns:a16="http://schemas.microsoft.com/office/drawing/2014/main" id="{32666AC8-2E17-4DB4-B0F5-60C640CCFD2E}"/>
+                <a16:creationId xmlns:a16="http://schemas.microsoft.com/office/drawing/2014/main" xmlns="" id="{32666AC8-2E17-4DB4-B0F5-60C640CCFD2E}"/>
               </a:ext>
             </a:extLst>
           </p:cNvPr>
@@ -9662,7 +9308,7 @@
           <p:cNvPr id="4" name="CaixaDeTexto 3">
             <a:extLst>
               <a:ext uri="{FF2B5EF4-FFF2-40B4-BE49-F238E27FC236}">
-                <a16:creationId xmlns="" xmlns:a16="http://schemas.microsoft.com/office/drawing/2014/main" id="{430EB894-B7D4-434C-9D1A-A14094D9BEEC}"/>
+                <a16:creationId xmlns:a16="http://schemas.microsoft.com/office/drawing/2014/main" xmlns="" id="{430EB894-B7D4-434C-9D1A-A14094D9BEEC}"/>
               </a:ext>
             </a:extLst>
           </p:cNvPr>
@@ -9703,7 +9349,7 @@
           <p:cNvPr id="1026" name="Picture 2" descr="Logo">
             <a:extLst>
               <a:ext uri="{FF2B5EF4-FFF2-40B4-BE49-F238E27FC236}">
-                <a16:creationId xmlns="" xmlns:a16="http://schemas.microsoft.com/office/drawing/2014/main" id="{3F2642E0-4F6A-4196-8F58-E77D36E9A33F}"/>
+                <a16:creationId xmlns:a16="http://schemas.microsoft.com/office/drawing/2014/main" xmlns="" id="{3F2642E0-4F6A-4196-8F58-E77D36E9A33F}"/>
               </a:ext>
             </a:extLst>
           </p:cNvPr>
@@ -9748,7 +9394,7 @@
           <p:cNvPr id="5122" name="Picture 2" descr="Image result for machine learning">
             <a:extLst>
               <a:ext uri="{FF2B5EF4-FFF2-40B4-BE49-F238E27FC236}">
-                <a16:creationId xmlns="" xmlns:a16="http://schemas.microsoft.com/office/drawing/2014/main" id="{810CE0A2-4102-44A6-A370-175E7896CDCB}"/>
+                <a16:creationId xmlns:a16="http://schemas.microsoft.com/office/drawing/2014/main" xmlns="" id="{810CE0A2-4102-44A6-A370-175E7896CDCB}"/>
               </a:ext>
             </a:extLst>
           </p:cNvPr>
@@ -11152,7 +10798,7 @@
           <p:cNvPr id="13" name="CaixaDeTexto 12">
             <a:extLst>
               <a:ext uri="{FF2B5EF4-FFF2-40B4-BE49-F238E27FC236}">
-                <a16:creationId xmlns="" xmlns:a16="http://schemas.microsoft.com/office/drawing/2014/main" id="{9989FE69-01F8-8C6A-4EA0-DA1C9792B919}"/>
+                <a16:creationId xmlns:a16="http://schemas.microsoft.com/office/drawing/2014/main" xmlns="" id="{9989FE69-01F8-8C6A-4EA0-DA1C9792B919}"/>
               </a:ext>
             </a:extLst>
           </p:cNvPr>
@@ -11234,7 +10880,7 @@
           <p:cNvPr id="2" name="Título 1">
             <a:extLst>
               <a:ext uri="{FF2B5EF4-FFF2-40B4-BE49-F238E27FC236}">
-                <a16:creationId xmlns:a16="http://schemas.microsoft.com/office/drawing/2014/main" xmlns="" id="{B022D379-CAA0-9DC9-CDBD-6E0EBE1BFF31}"/>
+                <a16:creationId xmlns="" xmlns:a16="http://schemas.microsoft.com/office/drawing/2014/main" id="{B022D379-CAA0-9DC9-CDBD-6E0EBE1BFF31}"/>
               </a:ext>
             </a:extLst>
           </p:cNvPr>
@@ -11268,7 +10914,7 @@
               <p:cNvPr id="3" name="Espaço Reservado para Conteúdo 2">
                 <a:extLst>
                   <a:ext uri="{FF2B5EF4-FFF2-40B4-BE49-F238E27FC236}">
-                    <a16:creationId xmlns:a16="http://schemas.microsoft.com/office/drawing/2014/main" xmlns="" id="{B68F0D74-8673-A432-A1D7-BDEF7725851A}"/>
+                    <a16:creationId xmlns="" xmlns:a16="http://schemas.microsoft.com/office/drawing/2014/main" id="{B68F0D74-8673-A432-A1D7-BDEF7725851A}"/>
                   </a:ext>
                 </a:extLst>
               </p:cNvPr>
@@ -11555,7 +11201,7 @@
           <p:cNvPr id="2" name="Título 1">
             <a:extLst>
               <a:ext uri="{FF2B5EF4-FFF2-40B4-BE49-F238E27FC236}">
-                <a16:creationId xmlns:a16="http://schemas.microsoft.com/office/drawing/2014/main" xmlns="" id="{519F0958-530D-D942-BA01-15C1583DD1E6}"/>
+                <a16:creationId xmlns="" xmlns:a16="http://schemas.microsoft.com/office/drawing/2014/main" id="{519F0958-530D-D942-BA01-15C1583DD1E6}"/>
               </a:ext>
             </a:extLst>
           </p:cNvPr>
@@ -11582,14 +11228,14 @@
           </a:p>
         </p:txBody>
       </p:sp>
-      <mc:AlternateContent xmlns:mc="http://schemas.openxmlformats.org/markup-compatibility/2006">
-        <mc:Choice xmlns:a14="http://schemas.microsoft.com/office/drawing/2010/main" Requires="a14">
+      <mc:AlternateContent xmlns:mc="http://schemas.openxmlformats.org/markup-compatibility/2006" xmlns:a14="http://schemas.microsoft.com/office/drawing/2010/main">
+        <mc:Choice Requires="a14">
           <p:sp>
             <p:nvSpPr>
               <p:cNvPr id="3" name="Espaço Reservado para Conteúdo 2">
                 <a:extLst>
                   <a:ext uri="{FF2B5EF4-FFF2-40B4-BE49-F238E27FC236}">
-                    <a16:creationId xmlns:a16="http://schemas.microsoft.com/office/drawing/2014/main" xmlns="" id="{21416F72-28FB-E27C-D129-16A944A87C67}"/>
+                    <a16:creationId xmlns="" xmlns:a16="http://schemas.microsoft.com/office/drawing/2014/main" id="{21416F72-28FB-E27C-D129-16A944A87C67}"/>
                   </a:ext>
                 </a:extLst>
               </p:cNvPr>
@@ -11987,7 +11633,7 @@
             </p:txBody>
           </p:sp>
         </mc:Choice>
-        <mc:Fallback>
+        <mc:Fallback xmlns="">
           <p:sp>
             <p:nvSpPr>
               <p:cNvPr id="3" name="Espaço Reservado para Conteúdo 2">
@@ -12066,7 +11712,7 @@
           <p:cNvPr id="2" name="Título 1">
             <a:extLst>
               <a:ext uri="{FF2B5EF4-FFF2-40B4-BE49-F238E27FC236}">
-                <a16:creationId xmlns:a16="http://schemas.microsoft.com/office/drawing/2014/main" xmlns="" id="{DCD47F25-5DD1-794E-8733-BFD771A2DE49}"/>
+                <a16:creationId xmlns="" xmlns:a16="http://schemas.microsoft.com/office/drawing/2014/main" id="{DCD47F25-5DD1-794E-8733-BFD771A2DE49}"/>
               </a:ext>
             </a:extLst>
           </p:cNvPr>
@@ -12093,14 +11739,14 @@
           </a:p>
         </p:txBody>
       </p:sp>
-      <mc:AlternateContent xmlns:mc="http://schemas.openxmlformats.org/markup-compatibility/2006" xmlns:a14="http://schemas.microsoft.com/office/drawing/2010/main">
-        <mc:Choice Requires="a14">
+      <mc:AlternateContent xmlns:mc="http://schemas.openxmlformats.org/markup-compatibility/2006">
+        <mc:Choice xmlns:a14="http://schemas.microsoft.com/office/drawing/2010/main" Requires="a14">
           <p:sp>
             <p:nvSpPr>
               <p:cNvPr id="3" name="Espaço Reservado para Conteúdo 2">
                 <a:extLst>
                   <a:ext uri="{FF2B5EF4-FFF2-40B4-BE49-F238E27FC236}">
-                    <a16:creationId xmlns:a16="http://schemas.microsoft.com/office/drawing/2014/main" xmlns="" id="{D79BB7DC-99E7-8958-EC77-566B7E3C2BBB}"/>
+                    <a16:creationId xmlns="" xmlns:a16="http://schemas.microsoft.com/office/drawing/2014/main" id="{D79BB7DC-99E7-8958-EC77-566B7E3C2BBB}"/>
                   </a:ext>
                 </a:extLst>
               </p:cNvPr>
@@ -12377,7 +12023,7 @@
                     </m:oMathParaPr>
                     <m:oMath xmlns:m="http://schemas.openxmlformats.org/officeDocument/2006/math">
                       <m:r>
-                        <a:rPr lang="pt-BR" sz="2400" i="1">
+                        <a:rPr lang="pt-BR" i="1">
                           <a:latin typeface="Cambria Math" panose="02040503050406030204" pitchFamily="18" charset="0"/>
                         </a:rPr>
                         <m:t>𝑃</m:t>
@@ -12385,7 +12031,7 @@
                       <m:d>
                         <m:dPr>
                           <m:ctrlPr>
-                            <a:rPr lang="pt-BR" sz="2400" i="1">
+                            <a:rPr lang="pt-BR" i="1">
                               <a:latin typeface="Cambria Math" panose="02040503050406030204" pitchFamily="18" charset="0"/>
                             </a:rPr>
                           </m:ctrlPr>
@@ -12394,14 +12040,14 @@
                           <m:sSub>
                             <m:sSubPr>
                               <m:ctrlPr>
-                                <a:rPr lang="pt-BR" sz="2400" i="1">
+                                <a:rPr lang="pt-BR" i="1">
                                   <a:latin typeface="Cambria Math" panose="02040503050406030204" pitchFamily="18" charset="0"/>
                                 </a:rPr>
                               </m:ctrlPr>
                             </m:sSubPr>
                             <m:e>
                               <m:r>
-                                <a:rPr lang="pt-BR" sz="2400" i="1">
+                                <a:rPr lang="pt-BR" i="1">
                                   <a:latin typeface="Cambria Math" panose="02040503050406030204" pitchFamily="18" charset="0"/>
                                 </a:rPr>
                                 <m:t>𝐶</m:t>
@@ -12409,7 +12055,7 @@
                             </m:e>
                             <m:sub>
                               <m:r>
-                                <a:rPr lang="pt-BR" sz="2400" i="1">
+                                <a:rPr lang="pt-BR" i="1">
                                   <a:latin typeface="Cambria Math" panose="02040503050406030204" pitchFamily="18" charset="0"/>
                                 </a:rPr>
                                 <m:t>𝑞</m:t>
@@ -12417,25 +12063,25 @@
                             </m:sub>
                           </m:sSub>
                           <m:r>
-                            <a:rPr lang="pt-BR" sz="2400" b="0" i="1" smtClean="0">
+                            <a:rPr lang="pt-BR" b="0" i="1" smtClean="0">
                               <a:latin typeface="Cambria Math" panose="02040503050406030204" pitchFamily="18" charset="0"/>
                             </a:rPr>
                             <m:t> </m:t>
                           </m:r>
                           <m:r>
-                            <a:rPr lang="pt-BR" sz="2400" i="1">
+                            <a:rPr lang="pt-BR" i="1">
                               <a:latin typeface="Cambria Math" panose="02040503050406030204" pitchFamily="18" charset="0"/>
                             </a:rPr>
                             <m:t>|</m:t>
                           </m:r>
                           <m:r>
-                            <a:rPr lang="pt-BR" sz="2400" b="0" i="1" smtClean="0">
+                            <a:rPr lang="pt-BR" b="0" i="1" smtClean="0">
                               <a:latin typeface="Cambria Math" panose="02040503050406030204" pitchFamily="18" charset="0"/>
                             </a:rPr>
                             <m:t> </m:t>
                           </m:r>
                           <m:r>
-                            <a:rPr lang="pt-BR" sz="2400" b="1" i="1">
+                            <a:rPr lang="pt-BR" b="1" i="1">
                               <a:latin typeface="Cambria Math" panose="02040503050406030204" pitchFamily="18" charset="0"/>
                             </a:rPr>
                             <m:t>𝒙</m:t>
@@ -12443,14 +12089,14 @@
                           <m:d>
                             <m:dPr>
                               <m:ctrlPr>
-                                <a:rPr lang="pt-BR" sz="2400" b="1" i="1">
+                                <a:rPr lang="pt-BR" b="1" i="1">
                                   <a:latin typeface="Cambria Math" panose="02040503050406030204" pitchFamily="18" charset="0"/>
                                 </a:rPr>
                               </m:ctrlPr>
                             </m:dPr>
                             <m:e>
                               <m:r>
-                                <a:rPr lang="pt-BR" sz="2400" b="0" i="1" smtClean="0">
+                                <a:rPr lang="pt-BR" b="0" i="1" smtClean="0">
                                   <a:latin typeface="Cambria Math" panose="02040503050406030204" pitchFamily="18" charset="0"/>
                                 </a:rPr>
                                 <m:t>𝑛</m:t>
@@ -12458,7 +12104,7 @@
                             </m:e>
                           </m:d>
                           <m:r>
-                            <a:rPr lang="pt-BR" sz="2400" b="0" i="1" smtClean="0">
+                            <a:rPr lang="pt-BR" b="0" i="1" smtClean="0">
                               <a:latin typeface="Cambria Math" panose="02040503050406030204" pitchFamily="18" charset="0"/>
                             </a:rPr>
                             <m:t>,</m:t>
@@ -12466,14 +12112,14 @@
                           <m:sSub>
                             <m:sSubPr>
                               <m:ctrlPr>
-                                <a:rPr lang="pt-BR" sz="2400" i="1">
+                                <a:rPr lang="pt-BR" i="1">
                                   <a:latin typeface="Cambria Math" panose="02040503050406030204" pitchFamily="18" charset="0"/>
                                 </a:rPr>
                               </m:ctrlPr>
                             </m:sSubPr>
                             <m:e>
                               <m:r>
-                                <a:rPr lang="pt-BR" sz="2400" b="1" i="1">
+                                <a:rPr lang="pt-BR" b="1" i="1">
                                   <a:latin typeface="Cambria Math" panose="02040503050406030204" pitchFamily="18" charset="0"/>
                                 </a:rPr>
                                 <m:t>𝒂</m:t>
@@ -12481,7 +12127,7 @@
                             </m:e>
                             <m:sub>
                               <m:r>
-                                <a:rPr lang="pt-BR" sz="2400" b="0" i="1" smtClean="0">
+                                <a:rPr lang="pt-BR" b="0" i="1" smtClean="0">
                                   <a:latin typeface="Cambria Math" panose="02040503050406030204" pitchFamily="18" charset="0"/>
                                 </a:rPr>
                                 <m:t>𝑞</m:t>
@@ -12491,7 +12137,7 @@
                         </m:e>
                       </m:d>
                       <m:r>
-                        <a:rPr lang="pt-BR" sz="2400" i="1">
+                        <a:rPr lang="pt-BR" i="1">
                           <a:latin typeface="Cambria Math" panose="02040503050406030204" pitchFamily="18" charset="0"/>
                         </a:rPr>
                         <m:t>=</m:t>
@@ -12499,14 +12145,14 @@
                       <m:sSubSup>
                         <m:sSubSupPr>
                           <m:ctrlPr>
-                            <a:rPr lang="pt-BR" sz="2400" b="1" i="1">
+                            <a:rPr lang="pt-BR" b="1" i="1">
                               <a:latin typeface="Cambria Math" panose="02040503050406030204" pitchFamily="18" charset="0"/>
                             </a:rPr>
                           </m:ctrlPr>
                         </m:sSubSupPr>
                         <m:e>
                           <m:r>
-                            <a:rPr lang="pt-BR" sz="2400" i="1">
+                            <a:rPr lang="pt-BR" i="1">
                               <a:latin typeface="Cambria Math" panose="02040503050406030204" pitchFamily="18" charset="0"/>
                             </a:rPr>
                             <m:t>h</m:t>
@@ -12514,7 +12160,7 @@
                         </m:e>
                         <m:sub>
                           <m:r>
-                            <a:rPr lang="pt-BR" sz="2400" b="1" i="1">
+                            <a:rPr lang="pt-BR" b="1" i="1">
                               <a:latin typeface="Cambria Math" panose="02040503050406030204" pitchFamily="18" charset="0"/>
                             </a:rPr>
                             <m:t>𝒂</m:t>
@@ -12522,7 +12168,7 @@
                         </m:sub>
                         <m:sup>
                           <m:r>
-                            <a:rPr lang="pt-BR" sz="2400" i="1">
+                            <a:rPr lang="pt-BR" i="1">
                               <a:latin typeface="Cambria Math" panose="02040503050406030204" pitchFamily="18" charset="0"/>
                             </a:rPr>
                             <m:t>𝑞</m:t>
@@ -12532,14 +12178,14 @@
                       <m:d>
                         <m:dPr>
                           <m:ctrlPr>
-                            <a:rPr lang="pt-BR" sz="2400" i="1">
+                            <a:rPr lang="pt-BR" i="1">
                               <a:latin typeface="Cambria Math" panose="02040503050406030204" pitchFamily="18" charset="0"/>
                             </a:rPr>
                           </m:ctrlPr>
                         </m:dPr>
                         <m:e>
                           <m:r>
-                            <a:rPr lang="pt-BR" sz="2400" b="1" i="1">
+                            <a:rPr lang="pt-BR" b="1" i="1">
                               <a:latin typeface="Cambria Math" panose="02040503050406030204" pitchFamily="18" charset="0"/>
                             </a:rPr>
                             <m:t>𝒙</m:t>
@@ -12547,14 +12193,14 @@
                           <m:d>
                             <m:dPr>
                               <m:ctrlPr>
-                                <a:rPr lang="pt-BR" sz="2400" b="1" i="1">
+                                <a:rPr lang="pt-BR" b="1" i="1">
                                   <a:latin typeface="Cambria Math" panose="02040503050406030204" pitchFamily="18" charset="0"/>
                                 </a:rPr>
                               </m:ctrlPr>
                             </m:dPr>
                             <m:e>
                               <m:r>
-                                <a:rPr lang="pt-BR" sz="2400" b="0" i="1" smtClean="0">
+                                <a:rPr lang="pt-BR" b="0" i="1" smtClean="0">
                                   <a:latin typeface="Cambria Math" panose="02040503050406030204" pitchFamily="18" charset="0"/>
                                 </a:rPr>
                                 <m:t>𝑛</m:t>
@@ -12564,7 +12210,7 @@
                         </m:e>
                       </m:d>
                       <m:r>
-                        <a:rPr lang="pt-BR" sz="2400" b="1" i="1">
+                        <a:rPr lang="pt-BR" b="1" i="1">
                           <a:latin typeface="Cambria Math" panose="02040503050406030204" pitchFamily="18" charset="0"/>
                         </a:rPr>
                         <m:t>=</m:t>
@@ -12572,7 +12218,7 @@
                       <m:f>
                         <m:fPr>
                           <m:ctrlPr>
-                            <a:rPr lang="pt-BR" sz="2400" b="1" i="1">
+                            <a:rPr lang="pt-BR" b="1" i="1">
                               <a:latin typeface="Cambria Math" panose="02040503050406030204" pitchFamily="18" charset="0"/>
                             </a:rPr>
                           </m:ctrlPr>
@@ -12581,14 +12227,14 @@
                           <m:sSup>
                             <m:sSupPr>
                               <m:ctrlPr>
-                                <a:rPr lang="pt-BR" sz="2400" b="1" i="1">
+                                <a:rPr lang="pt-BR" b="1" i="1">
                                   <a:latin typeface="Cambria Math" panose="02040503050406030204" pitchFamily="18" charset="0"/>
                                 </a:rPr>
                               </m:ctrlPr>
                             </m:sSupPr>
                             <m:e>
                               <m:r>
-                                <a:rPr lang="pt-BR" sz="2400" i="1">
+                                <a:rPr lang="pt-BR" i="1">
                                   <a:latin typeface="Cambria Math" panose="02040503050406030204" pitchFamily="18" charset="0"/>
                                 </a:rPr>
                                 <m:t>𝑒</m:t>
@@ -12598,14 +12244,14 @@
                               <m:sSub>
                                 <m:sSubPr>
                                   <m:ctrlPr>
-                                    <a:rPr lang="pt-BR" sz="2400" i="1">
+                                    <a:rPr lang="pt-BR" i="1">
                                       <a:latin typeface="Cambria Math" panose="02040503050406030204" pitchFamily="18" charset="0"/>
                                     </a:rPr>
                                   </m:ctrlPr>
                                 </m:sSubPr>
                                 <m:e>
                                   <m:r>
-                                    <a:rPr lang="pt-BR" sz="2400" i="1">
+                                    <a:rPr lang="pt-BR" i="1">
                                       <a:latin typeface="Cambria Math" panose="02040503050406030204" pitchFamily="18" charset="0"/>
                                     </a:rPr>
                                     <m:t>𝑔</m:t>
@@ -12613,7 +12259,7 @@
                                 </m:e>
                                 <m:sub>
                                   <m:r>
-                                    <a:rPr lang="pt-BR" sz="2400" i="1">
+                                    <a:rPr lang="pt-BR" i="1">
                                       <a:latin typeface="Cambria Math" panose="02040503050406030204" pitchFamily="18" charset="0"/>
                                     </a:rPr>
                                     <m:t>𝑞</m:t>
@@ -12621,37 +12267,37 @@
                                 </m:sub>
                               </m:sSub>
                               <m:r>
-                                <a:rPr lang="pt-BR" sz="2400" b="1" i="1">
+                                <a:rPr lang="pt-BR" b="1" i="1">
                                   <a:latin typeface="Cambria Math" panose="02040503050406030204" pitchFamily="18" charset="0"/>
                                 </a:rPr>
                                 <m:t>(</m:t>
                               </m:r>
                               <m:r>
-                                <a:rPr lang="pt-BR" sz="2400" b="1" i="1">
+                                <a:rPr lang="pt-BR" b="1" i="1">
                                   <a:latin typeface="Cambria Math" panose="02040503050406030204" pitchFamily="18" charset="0"/>
                                 </a:rPr>
                                 <m:t>𝒙</m:t>
                               </m:r>
                               <m:r>
-                                <a:rPr lang="pt-BR" sz="2400" i="1">
+                                <a:rPr lang="pt-BR" i="1">
                                   <a:latin typeface="Cambria Math" panose="02040503050406030204" pitchFamily="18" charset="0"/>
                                 </a:rPr>
                                 <m:t>(</m:t>
                               </m:r>
                               <m:r>
-                                <a:rPr lang="pt-BR" sz="2400" b="0" i="1" smtClean="0">
+                                <a:rPr lang="pt-BR" b="0" i="1" smtClean="0">
                                   <a:latin typeface="Cambria Math" panose="02040503050406030204" pitchFamily="18" charset="0"/>
                                 </a:rPr>
                                 <m:t>𝑛</m:t>
                               </m:r>
                               <m:r>
-                                <a:rPr lang="pt-BR" sz="2400" i="1">
+                                <a:rPr lang="pt-BR" i="1">
                                   <a:latin typeface="Cambria Math" panose="02040503050406030204" pitchFamily="18" charset="0"/>
                                 </a:rPr>
                                 <m:t>)</m:t>
                               </m:r>
                               <m:r>
-                                <a:rPr lang="pt-BR" sz="2400" b="1" i="1">
+                                <a:rPr lang="pt-BR" b="1" i="1">
                                   <a:latin typeface="Cambria Math" panose="02040503050406030204" pitchFamily="18" charset="0"/>
                                 </a:rPr>
                                 <m:t>)</m:t>
@@ -12664,20 +12310,20 @@
                             <m:naryPr>
                               <m:chr m:val="∑"/>
                               <m:ctrlPr>
-                                <a:rPr lang="pt-BR" sz="2400" b="1" i="1">
+                                <a:rPr lang="pt-BR" b="1" i="1">
                                   <a:latin typeface="Cambria Math" panose="02040503050406030204" pitchFamily="18" charset="0"/>
                                 </a:rPr>
                               </m:ctrlPr>
                             </m:naryPr>
                             <m:sub>
                               <m:r>
-                                <a:rPr lang="pt-BR" sz="2400" i="1">
+                                <a:rPr lang="pt-BR" i="1">
                                   <a:latin typeface="Cambria Math" panose="02040503050406030204" pitchFamily="18" charset="0"/>
                                 </a:rPr>
                                 <m:t>𝑗</m:t>
                               </m:r>
                               <m:r>
-                                <a:rPr lang="pt-BR" sz="2400" i="1">
+                                <a:rPr lang="pt-BR" i="1">
                                   <a:latin typeface="Cambria Math" panose="02040503050406030204" pitchFamily="18" charset="0"/>
                                 </a:rPr>
                                 <m:t>=0</m:t>
@@ -12685,13 +12331,13 @@
                             </m:sub>
                             <m:sup>
                               <m:r>
-                                <a:rPr lang="pt-BR" sz="2400" i="1">
+                                <a:rPr lang="pt-BR" i="1">
                                   <a:latin typeface="Cambria Math" panose="02040503050406030204" pitchFamily="18" charset="0"/>
                                 </a:rPr>
                                 <m:t>𝑄</m:t>
                               </m:r>
                               <m:r>
-                                <a:rPr lang="pt-BR" sz="2400" b="0" i="1" smtClean="0">
+                                <a:rPr lang="pt-BR" b="0" i="1" smtClean="0">
                                   <a:latin typeface="Cambria Math" panose="02040503050406030204" pitchFamily="18" charset="0"/>
                                 </a:rPr>
                                 <m:t>−1</m:t>
@@ -12701,14 +12347,14 @@
                               <m:sSup>
                                 <m:sSupPr>
                                   <m:ctrlPr>
-                                    <a:rPr lang="pt-BR" sz="2400" b="1" i="1">
+                                    <a:rPr lang="pt-BR" b="1" i="1">
                                       <a:latin typeface="Cambria Math" panose="02040503050406030204" pitchFamily="18" charset="0"/>
                                     </a:rPr>
                                   </m:ctrlPr>
                                 </m:sSupPr>
                                 <m:e>
                                   <m:r>
-                                    <a:rPr lang="pt-BR" sz="2400" i="1">
+                                    <a:rPr lang="pt-BR" i="1">
                                       <a:latin typeface="Cambria Math" panose="02040503050406030204" pitchFamily="18" charset="0"/>
                                     </a:rPr>
                                     <m:t>𝑒</m:t>
@@ -12718,14 +12364,14 @@
                                   <m:sSub>
                                     <m:sSubPr>
                                       <m:ctrlPr>
-                                        <a:rPr lang="pt-BR" sz="2400" i="1">
+                                        <a:rPr lang="pt-BR" i="1">
                                           <a:latin typeface="Cambria Math" panose="02040503050406030204" pitchFamily="18" charset="0"/>
                                         </a:rPr>
                                       </m:ctrlPr>
                                     </m:sSubPr>
                                     <m:e>
                                       <m:r>
-                                        <a:rPr lang="pt-BR" sz="2400" i="1">
+                                        <a:rPr lang="pt-BR" i="1">
                                           <a:latin typeface="Cambria Math" panose="02040503050406030204" pitchFamily="18" charset="0"/>
                                         </a:rPr>
                                         <m:t>𝑔</m:t>
@@ -12733,7 +12379,7 @@
                                     </m:e>
                                     <m:sub>
                                       <m:r>
-                                        <a:rPr lang="pt-BR" sz="2400" i="1">
+                                        <a:rPr lang="pt-BR" i="1">
                                           <a:latin typeface="Cambria Math" panose="02040503050406030204" pitchFamily="18" charset="0"/>
                                         </a:rPr>
                                         <m:t>𝑗</m:t>
@@ -12741,37 +12387,37 @@
                                     </m:sub>
                                   </m:sSub>
                                   <m:r>
-                                    <a:rPr lang="pt-BR" sz="2400" b="1" i="1">
+                                    <a:rPr lang="pt-BR" b="1" i="1">
                                       <a:latin typeface="Cambria Math" panose="02040503050406030204" pitchFamily="18" charset="0"/>
                                     </a:rPr>
                                     <m:t>(</m:t>
                                   </m:r>
                                   <m:r>
-                                    <a:rPr lang="pt-BR" sz="2400" b="1" i="1">
+                                    <a:rPr lang="pt-BR" b="1" i="1">
                                       <a:latin typeface="Cambria Math" panose="02040503050406030204" pitchFamily="18" charset="0"/>
                                     </a:rPr>
                                     <m:t>𝒙</m:t>
                                   </m:r>
                                   <m:r>
-                                    <a:rPr lang="pt-BR" sz="2400" i="1">
+                                    <a:rPr lang="pt-BR" i="1">
                                       <a:latin typeface="Cambria Math" panose="02040503050406030204" pitchFamily="18" charset="0"/>
                                     </a:rPr>
                                     <m:t>(</m:t>
                                   </m:r>
                                   <m:r>
-                                    <a:rPr lang="pt-BR" sz="2400" b="0" i="1" smtClean="0">
+                                    <a:rPr lang="pt-BR" b="0" i="1" smtClean="0">
                                       <a:latin typeface="Cambria Math" panose="02040503050406030204" pitchFamily="18" charset="0"/>
                                     </a:rPr>
                                     <m:t>𝑛</m:t>
                                   </m:r>
                                   <m:r>
-                                    <a:rPr lang="pt-BR" sz="2400" i="1">
+                                    <a:rPr lang="pt-BR" i="1">
                                       <a:latin typeface="Cambria Math" panose="02040503050406030204" pitchFamily="18" charset="0"/>
                                     </a:rPr>
                                     <m:t>)</m:t>
                                   </m:r>
                                   <m:r>
-                                    <a:rPr lang="pt-BR" sz="2400" b="1" i="1">
+                                    <a:rPr lang="pt-BR" b="1" i="1">
                                       <a:latin typeface="Cambria Math" panose="02040503050406030204" pitchFamily="18" charset="0"/>
                                     </a:rPr>
                                     <m:t>)</m:t>
@@ -12783,60 +12429,7 @@
                         </m:den>
                       </m:f>
                       <m:r>
-                        <a:rPr lang="pt-BR" sz="2400" b="1" i="1">
-                          <a:latin typeface="Cambria Math" panose="02040503050406030204" pitchFamily="18" charset="0"/>
-                          <a:ea typeface="Cambria Math" panose="02040503050406030204" pitchFamily="18" charset="0"/>
-                        </a:rPr>
-                        <m:t>∈</m:t>
-                      </m:r>
-                      <m:r>
-                        <a:rPr lang="pt-BR" sz="2400" b="1" i="1">
-                          <a:latin typeface="Cambria Math" panose="02040503050406030204" pitchFamily="18" charset="0"/>
-                          <a:ea typeface="Cambria Math" panose="02040503050406030204" pitchFamily="18" charset="0"/>
-                        </a:rPr>
-                        <m:t>ℝ</m:t>
-                      </m:r>
-                      <m:r>
-                        <a:rPr lang="pt-BR" sz="2400" b="1" i="1">
-                          <a:latin typeface="Cambria Math" panose="02040503050406030204" pitchFamily="18" charset="0"/>
-                          <a:ea typeface="Cambria Math" panose="02040503050406030204" pitchFamily="18" charset="0"/>
-                        </a:rPr>
-                        <m:t> </m:t>
-                      </m:r>
-                      <m:d>
-                        <m:dPr>
-                          <m:begChr m:val="["/>
-                          <m:endChr m:val="]"/>
-                          <m:ctrlPr>
-                            <a:rPr lang="pt-BR" sz="2400" b="1" i="1">
-                              <a:latin typeface="Cambria Math" panose="02040503050406030204" pitchFamily="18" charset="0"/>
-                              <a:ea typeface="Cambria Math" panose="02040503050406030204" pitchFamily="18" charset="0"/>
-                            </a:rPr>
-                          </m:ctrlPr>
-                        </m:dPr>
-                        <m:e>
-                          <m:r>
-                            <a:rPr lang="pt-BR" sz="2400">
-                              <a:latin typeface="Cambria Math" panose="02040503050406030204" pitchFamily="18" charset="0"/>
-                            </a:rPr>
-                            <m:t>0,</m:t>
-                          </m:r>
-                          <m:r>
-                            <a:rPr lang="pt-BR" sz="2400" b="0" i="0" smtClean="0">
-                              <a:latin typeface="Cambria Math" panose="02040503050406030204" pitchFamily="18" charset="0"/>
-                            </a:rPr>
-                            <m:t> </m:t>
-                          </m:r>
-                          <m:r>
-                            <a:rPr lang="pt-BR" sz="2400">
-                              <a:latin typeface="Cambria Math" panose="02040503050406030204" pitchFamily="18" charset="0"/>
-                            </a:rPr>
-                            <m:t>1</m:t>
-                          </m:r>
-                        </m:e>
-                      </m:d>
-                      <m:r>
-                        <a:rPr lang="pt-BR" sz="2400" b="1" i="1" smtClean="0">
+                        <a:rPr lang="pt-BR" b="1" i="1" smtClean="0">
                           <a:latin typeface="Cambria Math" panose="02040503050406030204" pitchFamily="18" charset="0"/>
                         </a:rPr>
                         <m:t>,</m:t>
@@ -12844,7 +12437,7 @@
                     </m:oMath>
                   </m:oMathPara>
                 </a14:m>
-                <a:endParaRPr lang="pt-BR" sz="2400" i="1" dirty="0"/>
+                <a:endParaRPr lang="pt-BR" i="1" dirty="0"/>
               </a:p>
               <a:p>
                 <a:pPr marL="0" indent="0">
@@ -13360,13 +12953,13 @@
             </p:txBody>
           </p:sp>
         </mc:Choice>
-        <mc:Fallback xmlns="">
+        <mc:Fallback>
           <p:sp>
             <p:nvSpPr>
               <p:cNvPr id="3" name="Espaço Reservado para Conteúdo 2">
                 <a:extLst>
                   <a:ext uri="{FF2B5EF4-FFF2-40B4-BE49-F238E27FC236}">
-                    <a16:creationId xmlns:a16="http://schemas.microsoft.com/office/drawing/2014/main" id="{D79BB7DC-99E7-8958-EC77-566B7E3C2BBB}"/>
+                    <a16:creationId xmlns="" xmlns:a16="http://schemas.microsoft.com/office/drawing/2014/main" xmlns:a14="http://schemas.microsoft.com/office/drawing/2010/main" id="{D79BB7DC-99E7-8958-EC77-566B7E3C2BBB}"/>
                   </a:ext>
                 </a:extLst>
               </p:cNvPr>
@@ -13382,7 +12975,7 @@
                 <a:off x="838200" y="1825624"/>
                 <a:ext cx="11080174" cy="5032375"/>
               </a:xfrm>
-              <a:blipFill>
+              <a:blipFill rotWithShape="0">
                 <a:blip r:embed="rId3"/>
                 <a:stretch>
                   <a:fillRect l="-1156" t="-1332"/>
@@ -13394,7 +12987,7 @@
               <a:lstStyle/>
               <a:p>
                 <a:r>
-                  <a:rPr lang="en-US">
+                  <a:rPr lang="pt-BR">
                     <a:noFill/>
                   </a:rPr>
                   <a:t> </a:t>
@@ -13439,7 +13032,7 @@
           <p:cNvPr id="2" name="Título 1">
             <a:extLst>
               <a:ext uri="{FF2B5EF4-FFF2-40B4-BE49-F238E27FC236}">
-                <a16:creationId xmlns:a16="http://schemas.microsoft.com/office/drawing/2014/main" xmlns="" id="{52E3438D-F516-F1D3-A02F-51857586D07A}"/>
+                <a16:creationId xmlns="" xmlns:a16="http://schemas.microsoft.com/office/drawing/2014/main" id="{52E3438D-F516-F1D3-A02F-51857586D07A}"/>
               </a:ext>
             </a:extLst>
           </p:cNvPr>
@@ -13473,7 +13066,7 @@
               <p:cNvPr id="3" name="Espaço Reservado para Conteúdo 2">
                 <a:extLst>
                   <a:ext uri="{FF2B5EF4-FFF2-40B4-BE49-F238E27FC236}">
-                    <a16:creationId xmlns:a16="http://schemas.microsoft.com/office/drawing/2014/main" xmlns="" id="{BCAAD57B-65A0-9DAD-79FC-2AE2692EB84B}"/>
+                    <a16:creationId xmlns="" xmlns:a16="http://schemas.microsoft.com/office/drawing/2014/main" id="{BCAAD57B-65A0-9DAD-79FC-2AE2692EB84B}"/>
                   </a:ext>
                 </a:extLst>
               </p:cNvPr>
@@ -13487,7 +13080,7 @@
             <p:spPr>
               <a:xfrm>
                 <a:off x="838200" y="1825624"/>
-                <a:ext cx="11232473" cy="5032375"/>
+                <a:ext cx="11353800" cy="5032375"/>
               </a:xfrm>
             </p:spPr>
             <p:txBody>
@@ -13497,73 +13090,19 @@
               <a:lstStyle/>
               <a:p>
                 <a:r>
-                  <a:rPr lang="pt-BR" b="0" dirty="0" smtClean="0">
-                    <a:effectLst/>
-                  </a:rPr>
-                  <a:t>Ela transforma os </a:t>
-                </a:r>
-                <a:r>
-                  <a:rPr lang="pt-BR" b="1" dirty="0" smtClean="0">
-                    <a:solidFill>
-                      <a:srgbClr val="00B050"/>
-                    </a:solidFill>
-                    <a:effectLst/>
-                  </a:rPr>
-                  <a:t>valores</a:t>
-                </a:r>
-                <a:r>
-                  <a:rPr lang="pt-BR" b="1" dirty="0" smtClean="0">
-                    <a:solidFill>
-                      <a:srgbClr val="00B050"/>
-                    </a:solidFill>
-                  </a:rPr>
-                  <a:t> das </a:t>
-                </a:r>
-                <a14:m>
-                  <m:oMath xmlns:m="http://schemas.openxmlformats.org/officeDocument/2006/math">
-                    <m:r>
-                      <a:rPr lang="pt-BR" b="1" i="1" smtClean="0">
-                        <a:solidFill>
-                          <a:srgbClr val="00B050"/>
-                        </a:solidFill>
-                        <a:latin typeface="Cambria Math" panose="02040503050406030204" pitchFamily="18" charset="0"/>
-                      </a:rPr>
-                      <m:t>𝑸</m:t>
-                    </m:r>
-                  </m:oMath>
-                </a14:m>
-                <a:r>
-                  <a:rPr lang="pt-BR" b="1" dirty="0" smtClean="0">
-                    <a:solidFill>
-                      <a:srgbClr val="00B050"/>
-                    </a:solidFill>
-                  </a:rPr>
-                  <a:t> </a:t>
-                </a:r>
-                <a:r>
-                  <a:rPr lang="pt-BR" b="1" dirty="0">
-                    <a:solidFill>
-                      <a:srgbClr val="00B050"/>
-                    </a:solidFill>
-                    <a:effectLst/>
-                  </a:rPr>
-                  <a:t>funções discriminantes em uma distribuição de probabilidades</a:t>
-                </a:r>
-                <a:r>
-                  <a:rPr lang="pt-BR" b="0" dirty="0">
-                    <a:effectLst/>
-                  </a:rPr>
-                  <a:t>.</a:t>
-                </a:r>
+                  <a:rPr lang="pt-BR" dirty="0" smtClean="0"/>
+                  <a:t>É uma generalização da função sigmoide.</a:t>
+                </a:r>
+                <a:endParaRPr lang="pt-BR" dirty="0"/>
               </a:p>
               <a:p>
-                <a:pPr lvl="1">
-                  <a:buFont typeface="Wingdings" panose="05000000000000000000" pitchFamily="2" charset="2"/>
-                  <a:buChar char="§"/>
-                </a:pPr>
-                <a:r>
-                  <a:rPr lang="pt-BR" dirty="0"/>
-                  <a:t>O somatório de termos exponenciais no denominador </a:t>
+                <a:r>
+                  <a:rPr lang="pt-BR" dirty="0" smtClean="0"/>
+                  <a:t>O </a:t>
+                </a:r>
+                <a:r>
+                  <a:rPr lang="pt-BR" dirty="0"/>
+                  <a:t>somatório de termos exponenciais no denominador </a:t>
                 </a:r>
                 <a:r>
                   <a:rPr lang="pt-BR" b="1" dirty="0">
@@ -13575,20 +13114,16 @@
                 </a:r>
                 <a:r>
                   <a:rPr lang="pt-BR" dirty="0"/>
-                  <a:t> o valor da </a:t>
-                </a:r>
-                <a:r>
-                  <a:rPr lang="pt-BR" i="1" dirty="0"/>
-                  <a:t>q</a:t>
-                </a:r>
-                <a:r>
-                  <a:rPr lang="pt-BR" dirty="0"/>
-                  <a:t>-ésima saída de tal forma que o somatório das </a:t>
+                  <a:t> o valor </a:t>
+                </a:r>
+                <a:r>
+                  <a:rPr lang="pt-BR" dirty="0" smtClean="0"/>
+                  <a:t>de cada uma das </a:t>
                 </a:r>
                 <a14:m>
                   <m:oMath xmlns:m="http://schemas.openxmlformats.org/officeDocument/2006/math">
                     <m:r>
-                      <a:rPr lang="pt-BR" i="1">
+                      <a:rPr lang="pt-BR" b="0" i="1" smtClean="0">
                         <a:latin typeface="Cambria Math" panose="02040503050406030204" pitchFamily="18" charset="0"/>
                       </a:rPr>
                       <m:t>𝑄</m:t>
@@ -13596,12 +13131,8 @@
                   </m:oMath>
                 </a14:m>
                 <a:r>
-                  <a:rPr lang="pt-BR" dirty="0"/>
-                  <a:t> saídas seja igual a </a:t>
-                </a:r>
-                <a:r>
                   <a:rPr lang="pt-BR" dirty="0" smtClean="0"/>
-                  <a:t>1.</a:t>
+                  <a:t> saídas, fazendo com que elas fiquem no intervalo [0, 1].</a:t>
                 </a:r>
                 <a:endParaRPr lang="pt-BR" dirty="0"/>
               </a:p>
@@ -14087,7 +13618,59 @@
               <a:p>
                 <a:r>
                   <a:rPr lang="pt-BR" dirty="0"/>
-                  <a:t>Dado um exemplo de entrada, ela </a:t>
+                  <a:t>Ela transforma os </a:t>
+                </a:r>
+                <a:r>
+                  <a:rPr lang="pt-BR" b="1" dirty="0">
+                    <a:solidFill>
+                      <a:srgbClr val="00B050"/>
+                    </a:solidFill>
+                  </a:rPr>
+                  <a:t>valores das </a:t>
+                </a:r>
+                <a14:m>
+                  <m:oMath xmlns:m="http://schemas.openxmlformats.org/officeDocument/2006/math">
+                    <m:r>
+                      <a:rPr lang="pt-BR" b="1" i="1">
+                        <a:solidFill>
+                          <a:srgbClr val="00B050"/>
+                        </a:solidFill>
+                        <a:latin typeface="Cambria Math" panose="02040503050406030204" pitchFamily="18" charset="0"/>
+                      </a:rPr>
+                      <m:t>𝑸</m:t>
+                    </m:r>
+                  </m:oMath>
+                </a14:m>
+                <a:r>
+                  <a:rPr lang="pt-BR" b="1" dirty="0">
+                    <a:solidFill>
+                      <a:srgbClr val="00B050"/>
+                    </a:solidFill>
+                  </a:rPr>
+                  <a:t> </a:t>
+                </a:r>
+                <a:r>
+                  <a:rPr lang="pt-BR" b="1" dirty="0">
+                    <a:solidFill>
+                      <a:srgbClr val="00B050"/>
+                    </a:solidFill>
+                  </a:rPr>
+                  <a:t>funções discriminantes em uma distribuição de probabilidades</a:t>
+                </a:r>
+                <a:r>
+                  <a:rPr lang="pt-BR" dirty="0" smtClean="0"/>
+                  <a:t>.</a:t>
+                </a:r>
+                <a:endParaRPr lang="pt-BR" dirty="0" smtClean="0"/>
+              </a:p>
+              <a:p>
+                <a:r>
+                  <a:rPr lang="pt-BR" dirty="0" smtClean="0"/>
+                  <a:t>Assim, dado </a:t>
+                </a:r>
+                <a:r>
+                  <a:rPr lang="pt-BR" dirty="0"/>
+                  <a:t>um exemplo de entrada, ela </a:t>
                 </a:r>
                 <a:r>
                   <a:rPr lang="pt-BR" b="1" dirty="0">
@@ -14118,861 +13701,19 @@
                   <a:t> </a:t>
                 </a:r>
                 <a:r>
-                  <a:rPr lang="pt-BR" b="1" dirty="0">
+                  <a:rPr lang="pt-BR" b="1" dirty="0" smtClean="0">
                     <a:solidFill>
                       <a:srgbClr val="00B050"/>
                     </a:solidFill>
                   </a:rPr>
-                  <a:t>para cada classe </a:t>
-                </a:r>
-                <a:r>
-                  <a:rPr lang="pt-BR" dirty="0"/>
-                  <a:t>possível.</a:t>
-                </a:r>
-              </a:p>
-              <a:p>
-                <a:r>
-                  <a:rPr lang="pt-BR" dirty="0"/>
-                  <a:t>É uma generalização da função sigmoide.</a:t>
-                </a:r>
-              </a:p>
-            </p:txBody>
-          </p:sp>
-        </mc:Choice>
-        <mc:Fallback>
-          <p:sp>
-            <p:nvSpPr>
-              <p:cNvPr id="3" name="Espaço Reservado para Conteúdo 2">
-                <a:extLst>
-                  <a:ext uri="{FF2B5EF4-FFF2-40B4-BE49-F238E27FC236}">
-                    <a16:creationId xmlns:a16="http://schemas.microsoft.com/office/drawing/2014/main" xmlns="" xmlns:a14="http://schemas.microsoft.com/office/drawing/2010/main" id="{BCAAD57B-65A0-9DAD-79FC-2AE2692EB84B}"/>
-                  </a:ext>
-                </a:extLst>
-              </p:cNvPr>
-              <p:cNvSpPr>
-                <a:spLocks noGrp="1" noRot="1" noChangeAspect="1" noMove="1" noResize="1" noEditPoints="1" noAdjustHandles="1" noChangeArrowheads="1" noChangeShapeType="1" noTextEdit="1"/>
-              </p:cNvSpPr>
-              <p:nvPr>
-                <p:ph idx="1"/>
-              </p:nvPr>
-            </p:nvSpPr>
-            <p:spPr>
-              <a:xfrm>
-                <a:off x="838200" y="1825624"/>
-                <a:ext cx="11232473" cy="5032375"/>
-              </a:xfrm>
-              <a:blipFill rotWithShape="0">
-                <a:blip r:embed="rId3"/>
-                <a:stretch>
-                  <a:fillRect l="-977" t="-1937" r="-1140"/>
-                </a:stretch>
-              </a:blipFill>
-            </p:spPr>
-            <p:txBody>
-              <a:bodyPr/>
-              <a:lstStyle/>
-              <a:p>
-                <a:r>
-                  <a:rPr lang="pt-BR">
-                    <a:noFill/>
-                  </a:rPr>
-                  <a:t> </a:t>
-                </a:r>
-              </a:p>
-            </p:txBody>
-          </p:sp>
-        </mc:Fallback>
-      </mc:AlternateContent>
-      <p:sp>
-        <p:nvSpPr>
-          <p:cNvPr id="5" name="Rectangle 11">
-            <a:extLst>
-              <a:ext uri="{FF2B5EF4-FFF2-40B4-BE49-F238E27FC236}">
-                <a16:creationId xmlns:a16="http://schemas.microsoft.com/office/drawing/2014/main" xmlns="" id="{D1D7E603-A964-1188-9D09-B0C1E18592FA}"/>
-              </a:ext>
-            </a:extLst>
-          </p:cNvPr>
-          <p:cNvSpPr/>
-          <p:nvPr/>
-        </p:nvSpPr>
-        <p:spPr>
-          <a:xfrm>
-            <a:off x="6677025" y="3843791"/>
-            <a:ext cx="2143124" cy="575809"/>
-          </a:xfrm>
-          <a:prstGeom prst="rect">
-            <a:avLst/>
-          </a:prstGeom>
-          <a:noFill/>
-          <a:ln w="28575">
-            <a:solidFill>
-              <a:srgbClr val="FF0000"/>
-            </a:solidFill>
-          </a:ln>
-        </p:spPr>
-        <p:style>
-          <a:lnRef idx="2">
-            <a:schemeClr val="accent1">
-              <a:shade val="50000"/>
-            </a:schemeClr>
-          </a:lnRef>
-          <a:fillRef idx="1">
-            <a:schemeClr val="accent1"/>
-          </a:fillRef>
-          <a:effectRef idx="0">
-            <a:schemeClr val="accent1"/>
-          </a:effectRef>
-          <a:fontRef idx="minor">
-            <a:schemeClr val="lt1"/>
-          </a:fontRef>
-        </p:style>
-        <p:txBody>
-          <a:bodyPr rtlCol="0" anchor="ctr"/>
-          <a:lstStyle/>
-          <a:p>
-            <a:pPr algn="ctr"/>
-            <a:endParaRPr lang="pt-BR"/>
-          </a:p>
-        </p:txBody>
-      </p:sp>
-    </p:spTree>
-    <p:extLst>
-      <p:ext uri="{BB962C8B-B14F-4D97-AF65-F5344CB8AC3E}">
-        <p14:creationId xmlns:p14="http://schemas.microsoft.com/office/powerpoint/2010/main" val="2375032691"/>
-      </p:ext>
-    </p:extLst>
-  </p:cSld>
-  <p:clrMapOvr>
-    <a:masterClrMapping/>
-  </p:clrMapOvr>
-</p:sld>
-</file>
-
-<file path=ppt/slides/slide15.xml><?xml version="1.0" encoding="utf-8"?>
-<p:sld xmlns:a="http://schemas.openxmlformats.org/drawingml/2006/main" xmlns:r="http://schemas.openxmlformats.org/officeDocument/2006/relationships" xmlns:p="http://schemas.openxmlformats.org/presentationml/2006/main">
-  <p:cSld>
-    <p:spTree>
-      <p:nvGrpSpPr>
-        <p:cNvPr id="1" name=""/>
-        <p:cNvGrpSpPr/>
-        <p:nvPr/>
-      </p:nvGrpSpPr>
-      <p:grpSpPr>
-        <a:xfrm>
-          <a:off x="0" y="0"/>
-          <a:ext cx="0" cy="0"/>
-          <a:chOff x="0" y="0"/>
-          <a:chExt cx="0" cy="0"/>
-        </a:xfrm>
-      </p:grpSpPr>
-      <p:sp>
-        <p:nvSpPr>
-          <p:cNvPr id="2" name="Título 1">
-            <a:extLst>
-              <a:ext uri="{FF2B5EF4-FFF2-40B4-BE49-F238E27FC236}">
-                <a16:creationId xmlns:a16="http://schemas.microsoft.com/office/drawing/2014/main" xmlns="" id="{99DAA83A-B143-94BB-B48B-41A7423070CE}"/>
-              </a:ext>
-            </a:extLst>
-          </p:cNvPr>
-          <p:cNvSpPr>
-            <a:spLocks noGrp="1"/>
-          </p:cNvSpPr>
-          <p:nvPr>
-            <p:ph type="title"/>
-          </p:nvPr>
-        </p:nvSpPr>
-        <p:spPr/>
-        <p:txBody>
-          <a:bodyPr/>
-          <a:lstStyle/>
-          <a:p>
-            <a:r>
-              <a:rPr lang="pt-BR" dirty="0"/>
-              <a:t>Função de ativação </a:t>
-            </a:r>
-            <a:r>
-              <a:rPr lang="pt-BR" i="1" dirty="0"/>
-              <a:t>softmax</a:t>
-            </a:r>
-            <a:endParaRPr lang="pt-BR" dirty="0"/>
-          </a:p>
-        </p:txBody>
-      </p:sp>
-      <mc:AlternateContent xmlns:mc="http://schemas.openxmlformats.org/markup-compatibility/2006" xmlns:a14="http://schemas.microsoft.com/office/drawing/2010/main">
-        <mc:Choice Requires="a14">
-          <p:sp>
-            <p:nvSpPr>
-              <p:cNvPr id="3" name="Espaço Reservado para Conteúdo 2">
-                <a:extLst>
-                  <a:ext uri="{FF2B5EF4-FFF2-40B4-BE49-F238E27FC236}">
-                    <a16:creationId xmlns:a16="http://schemas.microsoft.com/office/drawing/2014/main" xmlns="" id="{32DF54A1-52F5-C48C-7CD4-D6E451DF19D8}"/>
-                  </a:ext>
-                </a:extLst>
-              </p:cNvPr>
-              <p:cNvSpPr>
-                <a:spLocks noGrp="1"/>
-              </p:cNvSpPr>
-              <p:nvPr>
-                <p:ph idx="1"/>
-              </p:nvPr>
-            </p:nvSpPr>
-            <p:spPr>
-              <a:xfrm>
-                <a:off x="6646606" y="1825624"/>
-                <a:ext cx="5417575" cy="5032375"/>
-              </a:xfrm>
-            </p:spPr>
-            <p:txBody>
-              <a:bodyPr>
-                <a:normAutofit/>
-              </a:bodyPr>
-              <a:lstStyle/>
-              <a:p>
-                <a:r>
-                  <a:rPr lang="pt-BR" dirty="0"/>
-                  <a:t>A função </a:t>
-                </a:r>
-                <a:r>
-                  <a:rPr lang="pt-BR" i="1" dirty="0"/>
-                  <a:t>softmax</a:t>
-                </a:r>
-                <a:r>
-                  <a:rPr lang="pt-BR" dirty="0"/>
-                  <a:t> </a:t>
-                </a:r>
-                <a:r>
-                  <a:rPr lang="pt-BR" dirty="0">
-                    <a:solidFill>
-                      <a:schemeClr val="tx1"/>
-                    </a:solidFill>
-                  </a:rPr>
-                  <a:t>o</a:t>
-                </a:r>
-                <a:r>
-                  <a:rPr lang="pt-BR" b="0" i="0" dirty="0">
-                    <a:solidFill>
-                      <a:schemeClr val="tx1"/>
-                    </a:solidFill>
-                    <a:effectLst/>
-                  </a:rPr>
-                  <a:t>pera da seguinte maneira.</a:t>
-                </a:r>
-              </a:p>
-              <a:p>
-                <a:r>
-                  <a:rPr lang="pt-BR" b="0" i="0" dirty="0">
-                    <a:solidFill>
-                      <a:schemeClr val="tx1"/>
-                    </a:solidFill>
-                    <a:effectLst/>
-                  </a:rPr>
-                  <a:t>Dado um </a:t>
-                </a:r>
-                <a:r>
-                  <a:rPr lang="pt-BR" b="1" dirty="0">
-                    <a:solidFill>
-                      <a:srgbClr val="00B050"/>
-                    </a:solidFill>
-                    <a:effectLst/>
-                  </a:rPr>
-                  <a:t>vetor </a:t>
-                </a:r>
-                <a:r>
-                  <a:rPr lang="pt-BR" b="1" dirty="0">
+                  <a:t>condicional</a:t>
+                </a:r>
+                <a:r>
+                  <a:rPr lang="pt-BR" dirty="0" smtClean="0">
                     <a:solidFill>
                       <a:srgbClr val="00B050"/>
                     </a:solidFill>
                   </a:rPr>
-                  <a:t>com</a:t>
-                </a:r>
-                <a:r>
-                  <a:rPr lang="pt-BR" b="1" dirty="0">
-                    <a:solidFill>
-                      <a:srgbClr val="00B050"/>
-                    </a:solidFill>
-                    <a:effectLst/>
-                  </a:rPr>
-                  <a:t> valores de funções discriminantes</a:t>
-                </a:r>
-                <a:r>
-                  <a:rPr lang="pt-BR" b="0" i="0" dirty="0">
-                    <a:solidFill>
-                      <a:schemeClr val="tx1"/>
-                    </a:solidFill>
-                    <a:effectLst/>
-                  </a:rPr>
-                  <a:t>, </a:t>
-                </a:r>
-                <a14:m>
-                  <m:oMath xmlns:m="http://schemas.openxmlformats.org/officeDocument/2006/math">
-                    <m:sSub>
-                      <m:sSubPr>
-                        <m:ctrlPr>
-                          <a:rPr lang="pt-BR" sz="2800" i="1" smtClean="0">
-                            <a:solidFill>
-                              <a:schemeClr val="tx1"/>
-                            </a:solidFill>
-                            <a:latin typeface="Cambria Math" panose="02040503050406030204" pitchFamily="18" charset="0"/>
-                          </a:rPr>
-                        </m:ctrlPr>
-                      </m:sSubPr>
-                      <m:e>
-                        <m:r>
-                          <a:rPr lang="pt-BR" sz="2800" i="1">
-                            <a:solidFill>
-                              <a:schemeClr val="tx1"/>
-                            </a:solidFill>
-                            <a:latin typeface="Cambria Math" panose="02040503050406030204" pitchFamily="18" charset="0"/>
-                          </a:rPr>
-                          <m:t>𝑔</m:t>
-                        </m:r>
-                      </m:e>
-                      <m:sub>
-                        <m:r>
-                          <a:rPr lang="pt-BR" sz="2800" b="0" i="1" smtClean="0">
-                            <a:solidFill>
-                              <a:schemeClr val="tx1"/>
-                            </a:solidFill>
-                            <a:latin typeface="Cambria Math" panose="02040503050406030204" pitchFamily="18" charset="0"/>
-                          </a:rPr>
-                          <m:t>𝑞</m:t>
-                        </m:r>
-                      </m:sub>
-                    </m:sSub>
-                    <m:d>
-                      <m:dPr>
-                        <m:ctrlPr>
-                          <a:rPr lang="pt-BR" sz="2800" i="1">
-                            <a:solidFill>
-                              <a:schemeClr val="tx1"/>
-                            </a:solidFill>
-                            <a:latin typeface="Cambria Math" panose="02040503050406030204" pitchFamily="18" charset="0"/>
-                          </a:rPr>
-                        </m:ctrlPr>
-                      </m:dPr>
-                      <m:e>
-                        <m:r>
-                          <a:rPr lang="pt-BR" sz="2800" b="1" i="1">
-                            <a:solidFill>
-                              <a:schemeClr val="tx1"/>
-                            </a:solidFill>
-                            <a:latin typeface="Cambria Math" panose="02040503050406030204" pitchFamily="18" charset="0"/>
-                          </a:rPr>
-                          <m:t>𝒙</m:t>
-                        </m:r>
-                        <m:r>
-                          <a:rPr lang="pt-BR" sz="2800" b="0" i="1" smtClean="0">
-                            <a:solidFill>
-                              <a:schemeClr val="tx1"/>
-                            </a:solidFill>
-                            <a:latin typeface="Cambria Math" panose="02040503050406030204" pitchFamily="18" charset="0"/>
-                          </a:rPr>
-                          <m:t>(</m:t>
-                        </m:r>
-                        <m:r>
-                          <a:rPr lang="pt-BR" sz="2800" b="0" i="1" smtClean="0">
-                            <a:solidFill>
-                              <a:schemeClr val="tx1"/>
-                            </a:solidFill>
-                            <a:latin typeface="Cambria Math" panose="02040503050406030204" pitchFamily="18" charset="0"/>
-                          </a:rPr>
-                          <m:t>𝑛</m:t>
-                        </m:r>
-                        <m:r>
-                          <a:rPr lang="pt-BR" sz="2800" b="0" i="1" smtClean="0">
-                            <a:solidFill>
-                              <a:schemeClr val="tx1"/>
-                            </a:solidFill>
-                            <a:latin typeface="Cambria Math" panose="02040503050406030204" pitchFamily="18" charset="0"/>
-                          </a:rPr>
-                          <m:t>)</m:t>
-                        </m:r>
-                      </m:e>
-                    </m:d>
-                    <m:r>
-                      <a:rPr lang="pt-BR" sz="2800" b="0" i="1" smtClean="0">
-                        <a:solidFill>
-                          <a:schemeClr val="tx1"/>
-                        </a:solidFill>
-                        <a:latin typeface="Cambria Math" panose="02040503050406030204" pitchFamily="18" charset="0"/>
-                      </a:rPr>
-                      <m:t>,</m:t>
-                    </m:r>
-                    <m:r>
-                      <a:rPr lang="pt-BR" sz="2800" i="1" smtClean="0">
-                        <a:solidFill>
-                          <a:schemeClr val="tx1"/>
-                        </a:solidFill>
-                        <a:latin typeface="Cambria Math" panose="02040503050406030204" pitchFamily="18" charset="0"/>
-                        <a:ea typeface="Cambria Math" panose="02040503050406030204" pitchFamily="18" charset="0"/>
-                      </a:rPr>
-                      <m:t>∀</m:t>
-                    </m:r>
-                    <m:r>
-                      <a:rPr lang="pt-BR" sz="2800" b="0" i="1" smtClean="0">
-                        <a:solidFill>
-                          <a:schemeClr val="tx1"/>
-                        </a:solidFill>
-                        <a:latin typeface="Cambria Math" panose="02040503050406030204" pitchFamily="18" charset="0"/>
-                        <a:ea typeface="Cambria Math" panose="02040503050406030204" pitchFamily="18" charset="0"/>
-                      </a:rPr>
-                      <m:t>𝑞</m:t>
-                    </m:r>
-                  </m:oMath>
-                </a14:m>
-                <a:r>
-                  <a:rPr lang="pt-BR" b="0" i="0" dirty="0">
-                    <a:solidFill>
-                      <a:schemeClr val="tx1"/>
-                    </a:solidFill>
-                    <a:effectLst/>
-                  </a:rPr>
-                  <a:t>, ela</a:t>
-                </a:r>
-                <a:endParaRPr lang="pt-BR" dirty="0"/>
-              </a:p>
-              <a:p>
-                <a:pPr lvl="1">
-                  <a:buFont typeface="Wingdings" panose="05000000000000000000" pitchFamily="2" charset="2"/>
-                  <a:buChar char="§"/>
-                </a:pPr>
-                <a:r>
-                  <a:rPr lang="pt-BR" b="0" i="0" dirty="0">
-                    <a:solidFill>
-                      <a:schemeClr val="tx1"/>
-                    </a:solidFill>
-                    <a:effectLst/>
-                  </a:rPr>
-                  <a:t>calcula a exponencial de cada função discriminante, </a:t>
-                </a:r>
-              </a:p>
-              <a:p>
-                <a:pPr lvl="1">
-                  <a:buFont typeface="Wingdings" panose="05000000000000000000" pitchFamily="2" charset="2"/>
-                  <a:buChar char="§"/>
-                </a:pPr>
-                <a:r>
-                  <a:rPr lang="pt-BR" b="0" i="0" dirty="0">
-                    <a:solidFill>
-                      <a:schemeClr val="tx1"/>
-                    </a:solidFill>
-                    <a:effectLst/>
-                  </a:rPr>
-                  <a:t>normaliza essas exponenciais dividindo-as pela soma de todas as exponenciais, gerando uma distribuição de probabilidades das classes.</a:t>
-                </a:r>
-              </a:p>
-            </p:txBody>
-          </p:sp>
-        </mc:Choice>
-        <mc:Fallback xmlns="">
-          <p:sp>
-            <p:nvSpPr>
-              <p:cNvPr id="3" name="Espaço Reservado para Conteúdo 2">
-                <a:extLst>
-                  <a:ext uri="{FF2B5EF4-FFF2-40B4-BE49-F238E27FC236}">
-                    <a16:creationId xmlns:a16="http://schemas.microsoft.com/office/drawing/2014/main" id="{32DF54A1-52F5-C48C-7CD4-D6E451DF19D8}"/>
-                  </a:ext>
-                </a:extLst>
-              </p:cNvPr>
-              <p:cNvSpPr>
-                <a:spLocks noGrp="1" noRot="1" noChangeAspect="1" noMove="1" noResize="1" noEditPoints="1" noAdjustHandles="1" noChangeArrowheads="1" noChangeShapeType="1" noTextEdit="1"/>
-              </p:cNvSpPr>
-              <p:nvPr>
-                <p:ph idx="1"/>
-              </p:nvPr>
-            </p:nvSpPr>
-            <p:spPr>
-              <a:xfrm>
-                <a:off x="6646606" y="1825624"/>
-                <a:ext cx="5417575" cy="5032375"/>
-              </a:xfrm>
-              <a:blipFill>
-                <a:blip r:embed="rId2"/>
-                <a:stretch>
-                  <a:fillRect l="-2025" t="-1937"/>
-                </a:stretch>
-              </a:blipFill>
-            </p:spPr>
-            <p:txBody>
-              <a:bodyPr/>
-              <a:lstStyle/>
-              <a:p>
-                <a:r>
-                  <a:rPr lang="en-US">
-                    <a:noFill/>
-                  </a:rPr>
-                  <a:t> </a:t>
-                </a:r>
-              </a:p>
-            </p:txBody>
-          </p:sp>
-        </mc:Fallback>
-      </mc:AlternateContent>
-      <p:pic>
-        <p:nvPicPr>
-          <p:cNvPr id="6" name="Imagem 5">
-            <a:extLst>
-              <a:ext uri="{FF2B5EF4-FFF2-40B4-BE49-F238E27FC236}">
-                <a16:creationId xmlns:a16="http://schemas.microsoft.com/office/drawing/2014/main" xmlns="" id="{ED5D1F5D-F195-0452-50D4-07E9F2B1C49D}"/>
-              </a:ext>
-            </a:extLst>
-          </p:cNvPr>
-          <p:cNvPicPr>
-            <a:picLocks noChangeAspect="1"/>
-          </p:cNvPicPr>
-          <p:nvPr/>
-        </p:nvPicPr>
-        <p:blipFill>
-          <a:blip r:embed="rId3" cstate="print">
-            <a:extLst>
-              <a:ext uri="{28A0092B-C50C-407E-A947-70E740481C1C}">
-                <a14:useLocalDpi xmlns:a14="http://schemas.microsoft.com/office/drawing/2010/main" val="0"/>
-              </a:ext>
-            </a:extLst>
-          </a:blip>
-          <a:stretch>
-            <a:fillRect/>
-          </a:stretch>
-        </p:blipFill>
-        <p:spPr>
-          <a:xfrm>
-            <a:off x="275559" y="2536723"/>
-            <a:ext cx="6066351" cy="2487561"/>
-          </a:xfrm>
-          <a:prstGeom prst="rect">
-            <a:avLst/>
-          </a:prstGeom>
-        </p:spPr>
-      </p:pic>
-      <p:sp>
-        <p:nvSpPr>
-          <p:cNvPr id="8" name="CaixaDeTexto 7">
-            <a:extLst>
-              <a:ext uri="{FF2B5EF4-FFF2-40B4-BE49-F238E27FC236}">
-                <a16:creationId xmlns:a16="http://schemas.microsoft.com/office/drawing/2014/main" xmlns="" id="{0DC5673F-9B77-2E9E-8317-E71CA8896FE0}"/>
-              </a:ext>
-            </a:extLst>
-          </p:cNvPr>
-          <p:cNvSpPr txBox="1"/>
-          <p:nvPr/>
-        </p:nvSpPr>
-        <p:spPr>
-          <a:xfrm>
-            <a:off x="127819" y="6492875"/>
-            <a:ext cx="2792362" cy="276999"/>
-          </a:xfrm>
-          <a:prstGeom prst="rect">
-            <a:avLst/>
-          </a:prstGeom>
-          <a:noFill/>
-        </p:spPr>
-        <p:txBody>
-          <a:bodyPr wrap="square">
-            <a:spAutoFit/>
-          </a:bodyPr>
-          <a:lstStyle/>
-          <a:p>
-            <a:r>
-              <a:rPr lang="pt-BR" sz="1200" b="0" dirty="0">
-                <a:effectLst/>
-              </a:rPr>
-              <a:t>OBS.:</a:t>
-            </a:r>
-            <a:r>
-              <a:rPr lang="pt-BR" sz="1200" b="0" i="1" dirty="0">
-                <a:effectLst/>
-              </a:rPr>
-              <a:t> e</a:t>
-            </a:r>
-            <a:r>
-              <a:rPr lang="pt-BR" sz="1200" b="0" i="0" dirty="0">
-                <a:effectLst/>
-              </a:rPr>
-              <a:t> é a base do logaritmo natural. </a:t>
-            </a:r>
-            <a:endParaRPr lang="pt-BR" sz="1200" dirty="0"/>
-          </a:p>
-        </p:txBody>
-      </p:sp>
-      <mc:AlternateContent xmlns:mc="http://schemas.openxmlformats.org/markup-compatibility/2006" xmlns:a14="http://schemas.microsoft.com/office/drawing/2010/main">
-        <mc:Choice Requires="a14">
-          <p:sp>
-            <p:nvSpPr>
-              <p:cNvPr id="4" name="CaixaDeTexto 3">
-                <a:extLst>
-                  <a:ext uri="{FF2B5EF4-FFF2-40B4-BE49-F238E27FC236}">
-                    <a16:creationId xmlns:a16="http://schemas.microsoft.com/office/drawing/2014/main" xmlns="" id="{CBD55F82-56D5-32C8-C5AB-AF99477FBAAC}"/>
-                  </a:ext>
-                </a:extLst>
-              </p:cNvPr>
-              <p:cNvSpPr txBox="1"/>
-              <p:nvPr/>
-            </p:nvSpPr>
-            <p:spPr>
-              <a:xfrm>
-                <a:off x="1543507" y="5639486"/>
-                <a:ext cx="3530454" cy="461665"/>
-              </a:xfrm>
-              <a:prstGeom prst="rect">
-                <a:avLst/>
-              </a:prstGeom>
-              <a:noFill/>
-            </p:spPr>
-            <p:txBody>
-              <a:bodyPr wrap="none" rtlCol="0">
-                <a:spAutoFit/>
-              </a:bodyPr>
-              <a:lstStyle/>
-              <a:p>
-                <a14:m>
-                  <m:oMath xmlns:m="http://schemas.openxmlformats.org/officeDocument/2006/math">
-                    <m:r>
-                      <a:rPr lang="pt-BR" sz="2400" b="0" i="1" smtClean="0">
-                        <a:latin typeface="Cambria Math" panose="02040503050406030204" pitchFamily="18" charset="0"/>
-                      </a:rPr>
-                      <m:t>𝑄</m:t>
-                    </m:r>
-                    <m:r>
-                      <a:rPr lang="pt-BR" sz="2400" b="0" i="1" smtClean="0">
-                        <a:latin typeface="Cambria Math" panose="02040503050406030204" pitchFamily="18" charset="0"/>
-                      </a:rPr>
-                      <m:t>=5</m:t>
-                    </m:r>
-                  </m:oMath>
-                </a14:m>
-                <a:r>
-                  <a:rPr lang="pt-BR" sz="2400" dirty="0"/>
-                  <a:t> (número de classes)</a:t>
-                </a:r>
-              </a:p>
-            </p:txBody>
-          </p:sp>
-        </mc:Choice>
-        <mc:Fallback xmlns="">
-          <p:sp>
-            <p:nvSpPr>
-              <p:cNvPr id="4" name="CaixaDeTexto 3">
-                <a:extLst>
-                  <a:ext uri="{FF2B5EF4-FFF2-40B4-BE49-F238E27FC236}">
-                    <a16:creationId xmlns:a16="http://schemas.microsoft.com/office/drawing/2014/main" id="{CBD55F82-56D5-32C8-C5AB-AF99477FBAAC}"/>
-                  </a:ext>
-                </a:extLst>
-              </p:cNvPr>
-              <p:cNvSpPr txBox="1">
-                <a:spLocks noRot="1" noChangeAspect="1" noMove="1" noResize="1" noEditPoints="1" noAdjustHandles="1" noChangeArrowheads="1" noChangeShapeType="1" noTextEdit="1"/>
-              </p:cNvSpPr>
-              <p:nvPr/>
-            </p:nvSpPr>
-            <p:spPr>
-              <a:xfrm>
-                <a:off x="1543507" y="5639486"/>
-                <a:ext cx="3530454" cy="461665"/>
-              </a:xfrm>
-              <a:prstGeom prst="rect">
-                <a:avLst/>
-              </a:prstGeom>
-              <a:blipFill>
-                <a:blip r:embed="rId4"/>
-                <a:stretch>
-                  <a:fillRect l="-1209" t="-10526" r="-1900" b="-28947"/>
-                </a:stretch>
-              </a:blipFill>
-            </p:spPr>
-            <p:txBody>
-              <a:bodyPr/>
-              <a:lstStyle/>
-              <a:p>
-                <a:r>
-                  <a:rPr lang="en-US">
-                    <a:noFill/>
-                  </a:rPr>
-                  <a:t> </a:t>
-                </a:r>
-              </a:p>
-            </p:txBody>
-          </p:sp>
-        </mc:Fallback>
-      </mc:AlternateContent>
-    </p:spTree>
-    <p:extLst>
-      <p:ext uri="{BB962C8B-B14F-4D97-AF65-F5344CB8AC3E}">
-        <p14:creationId xmlns:p14="http://schemas.microsoft.com/office/powerpoint/2010/main" val="2357809270"/>
-      </p:ext>
-    </p:extLst>
-  </p:cSld>
-  <p:clrMapOvr>
-    <a:masterClrMapping/>
-  </p:clrMapOvr>
-</p:sld>
-</file>
-
-<file path=ppt/slides/slide16.xml><?xml version="1.0" encoding="utf-8"?>
-<p:sld xmlns:a="http://schemas.openxmlformats.org/drawingml/2006/main" xmlns:r="http://schemas.openxmlformats.org/officeDocument/2006/relationships" xmlns:p="http://schemas.openxmlformats.org/presentationml/2006/main">
-  <p:cSld>
-    <p:spTree>
-      <p:nvGrpSpPr>
-        <p:cNvPr id="1" name=""/>
-        <p:cNvGrpSpPr/>
-        <p:nvPr/>
-      </p:nvGrpSpPr>
-      <p:grpSpPr>
-        <a:xfrm>
-          <a:off x="0" y="0"/>
-          <a:ext cx="0" cy="0"/>
-          <a:chOff x="0" y="0"/>
-          <a:chExt cx="0" cy="0"/>
-        </a:xfrm>
-      </p:grpSpPr>
-      <p:sp>
-        <p:nvSpPr>
-          <p:cNvPr id="2" name="Título 1">
-            <a:extLst>
-              <a:ext uri="{FF2B5EF4-FFF2-40B4-BE49-F238E27FC236}">
-                <a16:creationId xmlns:a16="http://schemas.microsoft.com/office/drawing/2014/main" xmlns="" id="{99DAA83A-B143-94BB-B48B-41A7423070CE}"/>
-              </a:ext>
-            </a:extLst>
-          </p:cNvPr>
-          <p:cNvSpPr>
-            <a:spLocks noGrp="1"/>
-          </p:cNvSpPr>
-          <p:nvPr>
-            <p:ph type="title"/>
-          </p:nvPr>
-        </p:nvSpPr>
-        <p:spPr/>
-        <p:txBody>
-          <a:bodyPr/>
-          <a:lstStyle/>
-          <a:p>
-            <a:r>
-              <a:rPr lang="pt-BR" dirty="0"/>
-              <a:t>Função de ativação </a:t>
-            </a:r>
-            <a:r>
-              <a:rPr lang="pt-BR" i="1" dirty="0"/>
-              <a:t>softmax</a:t>
-            </a:r>
-            <a:endParaRPr lang="pt-BR" dirty="0"/>
-          </a:p>
-        </p:txBody>
-      </p:sp>
-      <mc:AlternateContent xmlns:mc="http://schemas.openxmlformats.org/markup-compatibility/2006">
-        <mc:Choice xmlns:a14="http://schemas.microsoft.com/office/drawing/2010/main" Requires="a14">
-          <p:sp>
-            <p:nvSpPr>
-              <p:cNvPr id="3" name="Espaço Reservado para Conteúdo 2">
-                <a:extLst>
-                  <a:ext uri="{FF2B5EF4-FFF2-40B4-BE49-F238E27FC236}">
-                    <a16:creationId xmlns:a16="http://schemas.microsoft.com/office/drawing/2014/main" xmlns="" id="{32DF54A1-52F5-C48C-7CD4-D6E451DF19D8}"/>
-                  </a:ext>
-                </a:extLst>
-              </p:cNvPr>
-              <p:cNvSpPr>
-                <a:spLocks noGrp="1"/>
-              </p:cNvSpPr>
-              <p:nvPr>
-                <p:ph idx="1"/>
-              </p:nvPr>
-            </p:nvSpPr>
-            <p:spPr>
-              <a:xfrm>
-                <a:off x="838200" y="1825624"/>
-                <a:ext cx="11225981" cy="5032375"/>
-              </a:xfrm>
-            </p:spPr>
-            <p:txBody>
-              <a:bodyPr>
-                <a:normAutofit/>
-              </a:bodyPr>
-              <a:lstStyle/>
-              <a:p>
-                <a:r>
-                  <a:rPr lang="pt-BR" b="0" dirty="0">
-                    <a:effectLst/>
-                  </a:rPr>
-                  <a:t>Ela </a:t>
-                </a:r>
-                <a:r>
-                  <a:rPr lang="pt-BR" b="1" dirty="0">
-                    <a:solidFill>
-                      <a:srgbClr val="00B050"/>
-                    </a:solidFill>
-                    <a:effectLst/>
-                  </a:rPr>
-                  <a:t>garante que as saídas estejam no intervalo entre 0 e </a:t>
-                </a:r>
-                <a:r>
-                  <a:rPr lang="pt-BR" b="1" dirty="0" smtClean="0">
-                    <a:solidFill>
-                      <a:srgbClr val="00B050"/>
-                    </a:solidFill>
-                    <a:effectLst/>
-                  </a:rPr>
-                  <a:t>1 </a:t>
-                </a:r>
-                <a:r>
-                  <a:rPr lang="pt-BR" b="1" dirty="0">
-                    <a:solidFill>
-                      <a:srgbClr val="00B050"/>
-                    </a:solidFill>
-                    <a:effectLst/>
-                  </a:rPr>
-                  <a:t>e a soma de todas as saídas seja igual a 1</a:t>
-                </a:r>
-                <a:r>
-                  <a:rPr lang="pt-BR" b="0" dirty="0">
-                    <a:effectLst/>
-                  </a:rPr>
-                  <a:t>, tornando-as interpretáveis como uma </a:t>
-                </a:r>
-                <a:r>
-                  <a:rPr lang="pt-BR" b="1" dirty="0">
-                    <a:solidFill>
-                      <a:schemeClr val="accent2"/>
-                    </a:solidFill>
-                    <a:effectLst/>
-                  </a:rPr>
-                  <a:t>função massa de probabilidade </a:t>
-                </a:r>
-                <a:r>
-                  <a:rPr lang="pt-BR" b="1" dirty="0" err="1">
-                    <a:solidFill>
-                      <a:schemeClr val="accent2"/>
-                    </a:solidFill>
-                    <a:effectLst/>
-                  </a:rPr>
-                  <a:t>multinomial</a:t>
-                </a:r>
-                <a:r>
-                  <a:rPr lang="pt-BR" b="0" dirty="0">
-                    <a:effectLst/>
-                  </a:rPr>
-                  <a:t>.</a:t>
-                </a:r>
-              </a:p>
-              <a:p>
-                <a:r>
-                  <a:rPr lang="pt-BR" dirty="0"/>
-                  <a:t>Ela</a:t>
-                </a:r>
-                <a:r>
-                  <a:rPr lang="pt-BR" b="1" i="1" dirty="0"/>
-                  <a:t> </a:t>
-                </a:r>
-                <a:r>
-                  <a:rPr lang="pt-BR" dirty="0"/>
-                  <a:t>atribui uma </a:t>
-                </a:r>
-                <a:r>
-                  <a:rPr lang="pt-BR" b="1" dirty="0"/>
-                  <a:t>probabilidade condicional</a:t>
-                </a:r>
-                <a:r>
-                  <a:rPr lang="pt-BR" dirty="0"/>
-                  <a:t>,</a:t>
-                </a:r>
-                <a:r>
-                  <a:rPr lang="pt-BR" b="1" i="1" dirty="0"/>
                   <a:t> </a:t>
                 </a:r>
                 <a14:m>
@@ -15045,7 +13786,7 @@
                           </m:dPr>
                           <m:e>
                             <m:r>
-                              <a:rPr lang="pt-BR" b="0" i="1" smtClean="0">
+                              <a:rPr lang="pt-BR" i="1">
                                 <a:latin typeface="Cambria Math" panose="02040503050406030204" pitchFamily="18" charset="0"/>
                               </a:rPr>
                               <m:t>𝑛</m:t>
@@ -15086,7 +13827,7 @@
                       </m:e>
                     </m:d>
                     <m:r>
-                      <a:rPr lang="pt-BR" i="1" smtClean="0">
+                      <a:rPr lang="pt-BR" i="1">
                         <a:latin typeface="Cambria Math" panose="02040503050406030204" pitchFamily="18" charset="0"/>
                         <a:ea typeface="Cambria Math" panose="02040503050406030204" pitchFamily="18" charset="0"/>
                       </a:rPr>
@@ -15097,7 +13838,7 @@
                         <m:begChr m:val="["/>
                         <m:endChr m:val="]"/>
                         <m:ctrlPr>
-                          <a:rPr lang="pt-BR" i="1" smtClean="0">
+                          <a:rPr lang="pt-BR" i="1">
                             <a:latin typeface="Cambria Math" panose="02040503050406030204" pitchFamily="18" charset="0"/>
                             <a:ea typeface="Cambria Math" panose="02040503050406030204" pitchFamily="18" charset="0"/>
                           </a:rPr>
@@ -15105,7 +13846,7 @@
                       </m:dPr>
                       <m:e>
                         <m:r>
-                          <a:rPr lang="pt-BR" b="0" i="1" smtClean="0">
+                          <a:rPr lang="pt-BR" i="1">
                             <a:latin typeface="Cambria Math" panose="02040503050406030204" pitchFamily="18" charset="0"/>
                             <a:ea typeface="Cambria Math" panose="02040503050406030204" pitchFamily="18" charset="0"/>
                           </a:rPr>
@@ -15117,7 +13858,27 @@
                 </a14:m>
                 <a:r>
                   <a:rPr lang="pt-BR" dirty="0"/>
-                  <a:t>, a cada classe, </a:t>
+                  <a:t> </a:t>
+                </a:r>
+                <a:r>
+                  <a:rPr lang="pt-BR" b="1" dirty="0">
+                    <a:solidFill>
+                      <a:srgbClr val="00B050"/>
+                    </a:solidFill>
+                  </a:rPr>
+                  <a:t>a cada </a:t>
+                </a:r>
+                <a:r>
+                  <a:rPr lang="pt-BR" b="1" dirty="0" smtClean="0">
+                    <a:solidFill>
+                      <a:srgbClr val="00B050"/>
+                    </a:solidFill>
+                  </a:rPr>
+                  <a:t>uma </a:t>
+                </a:r>
+                <a:r>
+                  <a:rPr lang="pt-BR" dirty="0" smtClean="0"/>
+                  <a:t>das </a:t>
                 </a:r>
                 <a14:m>
                   <m:oMath xmlns:m="http://schemas.openxmlformats.org/officeDocument/2006/math">
@@ -15125,13 +13886,266 @@
                       <a:rPr lang="pt-BR" i="1">
                         <a:latin typeface="Cambria Math" panose="02040503050406030204" pitchFamily="18" charset="0"/>
                       </a:rPr>
-                      <m:t>𝑞</m:t>
+                      <m:t>𝑄</m:t>
+                    </m:r>
+                    <m:r>
+                      <a:rPr lang="pt-BR" i="1">
+                        <a:latin typeface="Cambria Math" panose="02040503050406030204" pitchFamily="18" charset="0"/>
+                      </a:rPr>
+                      <m:t> </m:t>
                     </m:r>
                   </m:oMath>
                 </a14:m>
                 <a:r>
-                  <a:rPr lang="pt-BR" dirty="0"/>
-                  <a:t>, onde </a:t>
+                  <a:rPr lang="pt-BR" dirty="0" smtClean="0"/>
+                  <a:t>classes.</a:t>
+                </a:r>
+                <a:endParaRPr lang="pt-BR" b="1" dirty="0">
+                  <a:solidFill>
+                    <a:srgbClr val="00B050"/>
+                  </a:solidFill>
+                </a:endParaRPr>
+              </a:p>
+            </p:txBody>
+          </p:sp>
+        </mc:Choice>
+        <mc:Fallback>
+          <p:sp>
+            <p:nvSpPr>
+              <p:cNvPr id="3" name="Espaço Reservado para Conteúdo 2">
+                <a:extLst>
+                  <a:ext uri="{FF2B5EF4-FFF2-40B4-BE49-F238E27FC236}">
+                    <a16:creationId xmlns="" xmlns:a16="http://schemas.microsoft.com/office/drawing/2014/main" xmlns:a14="http://schemas.microsoft.com/office/drawing/2010/main" id="{BCAAD57B-65A0-9DAD-79FC-2AE2692EB84B}"/>
+                  </a:ext>
+                </a:extLst>
+              </p:cNvPr>
+              <p:cNvSpPr>
+                <a:spLocks noGrp="1" noRot="1" noChangeAspect="1" noMove="1" noResize="1" noEditPoints="1" noAdjustHandles="1" noChangeArrowheads="1" noChangeShapeType="1" noTextEdit="1"/>
+              </p:cNvSpPr>
+              <p:nvPr>
+                <p:ph idx="1"/>
+              </p:nvPr>
+            </p:nvSpPr>
+            <p:spPr>
+              <a:xfrm>
+                <a:off x="838200" y="1825624"/>
+                <a:ext cx="11353800" cy="5032375"/>
+              </a:xfrm>
+              <a:blipFill rotWithShape="0">
+                <a:blip r:embed="rId3"/>
+                <a:stretch>
+                  <a:fillRect l="-967" t="-1937" r="-967"/>
+                </a:stretch>
+              </a:blipFill>
+            </p:spPr>
+            <p:txBody>
+              <a:bodyPr/>
+              <a:lstStyle/>
+              <a:p>
+                <a:r>
+                  <a:rPr lang="pt-BR">
+                    <a:noFill/>
+                  </a:rPr>
+                  <a:t> </a:t>
+                </a:r>
+              </a:p>
+            </p:txBody>
+          </p:sp>
+        </mc:Fallback>
+      </mc:AlternateContent>
+      <p:sp>
+        <p:nvSpPr>
+          <p:cNvPr id="5" name="Rectangle 11">
+            <a:extLst>
+              <a:ext uri="{FF2B5EF4-FFF2-40B4-BE49-F238E27FC236}">
+                <a16:creationId xmlns="" xmlns:a16="http://schemas.microsoft.com/office/drawing/2014/main" id="{D1D7E603-A964-1188-9D09-B0C1E18592FA}"/>
+              </a:ext>
+            </a:extLst>
+          </p:cNvPr>
+          <p:cNvSpPr/>
+          <p:nvPr/>
+        </p:nvSpPr>
+        <p:spPr>
+          <a:xfrm>
+            <a:off x="6765514" y="3622566"/>
+            <a:ext cx="2143124" cy="610221"/>
+          </a:xfrm>
+          <a:prstGeom prst="rect">
+            <a:avLst/>
+          </a:prstGeom>
+          <a:noFill/>
+          <a:ln w="28575">
+            <a:solidFill>
+              <a:srgbClr val="FF0000"/>
+            </a:solidFill>
+          </a:ln>
+        </p:spPr>
+        <p:style>
+          <a:lnRef idx="2">
+            <a:schemeClr val="accent1">
+              <a:shade val="50000"/>
+            </a:schemeClr>
+          </a:lnRef>
+          <a:fillRef idx="1">
+            <a:schemeClr val="accent1"/>
+          </a:fillRef>
+          <a:effectRef idx="0">
+            <a:schemeClr val="accent1"/>
+          </a:effectRef>
+          <a:fontRef idx="minor">
+            <a:schemeClr val="lt1"/>
+          </a:fontRef>
+        </p:style>
+        <p:txBody>
+          <a:bodyPr rtlCol="0" anchor="ctr"/>
+          <a:lstStyle/>
+          <a:p>
+            <a:pPr algn="ctr"/>
+            <a:endParaRPr lang="pt-BR"/>
+          </a:p>
+        </p:txBody>
+      </p:sp>
+    </p:spTree>
+    <p:extLst>
+      <p:ext uri="{BB962C8B-B14F-4D97-AF65-F5344CB8AC3E}">
+        <p14:creationId xmlns:p14="http://schemas.microsoft.com/office/powerpoint/2010/main" val="2375032691"/>
+      </p:ext>
+    </p:extLst>
+  </p:cSld>
+  <p:clrMapOvr>
+    <a:masterClrMapping/>
+  </p:clrMapOvr>
+</p:sld>
+</file>
+
+<file path=ppt/slides/slide15.xml><?xml version="1.0" encoding="utf-8"?>
+<p:sld xmlns:a="http://schemas.openxmlformats.org/drawingml/2006/main" xmlns:r="http://schemas.openxmlformats.org/officeDocument/2006/relationships" xmlns:p="http://schemas.openxmlformats.org/presentationml/2006/main">
+  <p:cSld>
+    <p:spTree>
+      <p:nvGrpSpPr>
+        <p:cNvPr id="1" name=""/>
+        <p:cNvGrpSpPr/>
+        <p:nvPr/>
+      </p:nvGrpSpPr>
+      <p:grpSpPr>
+        <a:xfrm>
+          <a:off x="0" y="0"/>
+          <a:ext cx="0" cy="0"/>
+          <a:chOff x="0" y="0"/>
+          <a:chExt cx="0" cy="0"/>
+        </a:xfrm>
+      </p:grpSpPr>
+      <p:sp>
+        <p:nvSpPr>
+          <p:cNvPr id="2" name="Título 1">
+            <a:extLst>
+              <a:ext uri="{FF2B5EF4-FFF2-40B4-BE49-F238E27FC236}">
+                <a16:creationId xmlns="" xmlns:a16="http://schemas.microsoft.com/office/drawing/2014/main" id="{99DAA83A-B143-94BB-B48B-41A7423070CE}"/>
+              </a:ext>
+            </a:extLst>
+          </p:cNvPr>
+          <p:cNvSpPr>
+            <a:spLocks noGrp="1"/>
+          </p:cNvSpPr>
+          <p:nvPr>
+            <p:ph type="title"/>
+          </p:nvPr>
+        </p:nvSpPr>
+        <p:spPr/>
+        <p:txBody>
+          <a:bodyPr/>
+          <a:lstStyle/>
+          <a:p>
+            <a:r>
+              <a:rPr lang="pt-BR" dirty="0"/>
+              <a:t>Função de ativação </a:t>
+            </a:r>
+            <a:r>
+              <a:rPr lang="pt-BR" i="1" dirty="0"/>
+              <a:t>softmax</a:t>
+            </a:r>
+            <a:endParaRPr lang="pt-BR" dirty="0"/>
+          </a:p>
+        </p:txBody>
+      </p:sp>
+      <mc:AlternateContent xmlns:mc="http://schemas.openxmlformats.org/markup-compatibility/2006">
+        <mc:Choice xmlns:a14="http://schemas.microsoft.com/office/drawing/2010/main" Requires="a14">
+          <p:sp>
+            <p:nvSpPr>
+              <p:cNvPr id="3" name="Espaço Reservado para Conteúdo 2">
+                <a:extLst>
+                  <a:ext uri="{FF2B5EF4-FFF2-40B4-BE49-F238E27FC236}">
+                    <a16:creationId xmlns="" xmlns:a16="http://schemas.microsoft.com/office/drawing/2014/main" id="{32DF54A1-52F5-C48C-7CD4-D6E451DF19D8}"/>
+                  </a:ext>
+                </a:extLst>
+              </p:cNvPr>
+              <p:cNvSpPr>
+                <a:spLocks noGrp="1"/>
+              </p:cNvSpPr>
+              <p:nvPr>
+                <p:ph idx="1"/>
+              </p:nvPr>
+            </p:nvSpPr>
+            <p:spPr>
+              <a:xfrm>
+                <a:off x="6646606" y="1825624"/>
+                <a:ext cx="5545394" cy="5032375"/>
+              </a:xfrm>
+            </p:spPr>
+            <p:txBody>
+              <a:bodyPr>
+                <a:normAutofit/>
+              </a:bodyPr>
+              <a:lstStyle/>
+              <a:p>
+                <a:r>
+                  <a:rPr lang="pt-BR" dirty="0"/>
+                  <a:t>A função </a:t>
+                </a:r>
+                <a:r>
+                  <a:rPr lang="pt-BR" i="1" dirty="0"/>
+                  <a:t>softmax</a:t>
+                </a:r>
+                <a:r>
+                  <a:rPr lang="pt-BR" dirty="0"/>
+                  <a:t> </a:t>
+                </a:r>
+                <a:r>
+                  <a:rPr lang="pt-BR" dirty="0">
+                    <a:solidFill>
+                      <a:schemeClr val="tx1"/>
+                    </a:solidFill>
+                  </a:rPr>
+                  <a:t>o</a:t>
+                </a:r>
+                <a:r>
+                  <a:rPr lang="pt-BR" b="0" i="0" dirty="0">
+                    <a:solidFill>
+                      <a:schemeClr val="tx1"/>
+                    </a:solidFill>
+                    <a:effectLst/>
+                  </a:rPr>
+                  <a:t>pera da seguinte maneira.</a:t>
+                </a:r>
+              </a:p>
+              <a:p>
+                <a:r>
+                  <a:rPr lang="pt-BR" b="0" i="0" dirty="0">
+                    <a:solidFill>
+                      <a:schemeClr val="tx1"/>
+                    </a:solidFill>
+                    <a:effectLst/>
+                  </a:rPr>
+                  <a:t>Dado um </a:t>
+                </a:r>
+                <a:r>
+                  <a:rPr lang="pt-BR" b="1" dirty="0">
+                    <a:solidFill>
+                      <a:srgbClr val="00B050"/>
+                    </a:solidFill>
+                    <a:effectLst/>
+                  </a:rPr>
+                  <a:t>vetor </a:t>
                 </a:r>
                 <a:r>
                   <a:rPr lang="pt-BR" b="1" dirty="0">
@@ -15139,18 +14153,40 @@
                       <a:srgbClr val="00B050"/>
                     </a:solidFill>
                   </a:rPr>
-                  <a:t>a soma das </a:t>
+                  <a:t>com</a:t>
+                </a:r>
+                <a:r>
+                  <a:rPr lang="pt-BR" b="1" dirty="0">
+                    <a:solidFill>
+                      <a:srgbClr val="00B050"/>
+                    </a:solidFill>
+                    <a:effectLst/>
+                  </a:rPr>
+                  <a:t> </a:t>
+                </a:r>
+                <a:r>
+                  <a:rPr lang="pt-BR" b="1" dirty="0" smtClean="0">
+                    <a:solidFill>
+                      <a:srgbClr val="00B050"/>
+                    </a:solidFill>
+                    <a:effectLst/>
+                  </a:rPr>
+                  <a:t>os valores das </a:t>
+                </a:r>
+                <a:r>
+                  <a:rPr lang="pt-BR" dirty="0"/>
+                  <a:t> </a:t>
                 </a:r>
                 <a14:m>
                   <m:oMath xmlns:m="http://schemas.openxmlformats.org/officeDocument/2006/math">
                     <m:r>
-                      <a:rPr lang="pt-BR" b="1" i="0">
+                      <a:rPr lang="pt-BR" b="1" i="1" smtClean="0">
                         <a:solidFill>
                           <a:srgbClr val="00B050"/>
                         </a:solidFill>
                         <a:latin typeface="Cambria Math" panose="02040503050406030204" pitchFamily="18" charset="0"/>
                       </a:rPr>
-                      <m:t>𝐐</m:t>
+                      <m:t>𝑸</m:t>
                     </m:r>
                   </m:oMath>
                 </a14:m>
@@ -15160,7 +14196,513 @@
                       <a:srgbClr val="00B050"/>
                     </a:solidFill>
                   </a:rPr>
-                  <a:t> probabilidades deve ser igual a 1</a:t>
+                  <a:t> </a:t>
+                </a:r>
+                <a:r>
+                  <a:rPr lang="pt-BR" b="1" dirty="0">
+                    <a:solidFill>
+                      <a:srgbClr val="00B050"/>
+                    </a:solidFill>
+                    <a:effectLst/>
+                  </a:rPr>
+                  <a:t>funções </a:t>
+                </a:r>
+                <a:r>
+                  <a:rPr lang="pt-BR" b="1" dirty="0" smtClean="0">
+                    <a:solidFill>
+                      <a:srgbClr val="00B050"/>
+                    </a:solidFill>
+                    <a:effectLst/>
+                  </a:rPr>
+                  <a:t>discriminantes</a:t>
+                </a:r>
+                <a:r>
+                  <a:rPr lang="pt-BR" b="0" i="0" dirty="0" smtClean="0">
+                    <a:solidFill>
+                      <a:schemeClr val="tx1"/>
+                    </a:solidFill>
+                    <a:effectLst/>
+                  </a:rPr>
+                  <a:t>, </a:t>
+                </a:r>
+                <a:r>
+                  <a:rPr lang="pt-BR" b="0" i="0" dirty="0">
+                    <a:solidFill>
+                      <a:schemeClr val="tx1"/>
+                    </a:solidFill>
+                    <a:effectLst/>
+                  </a:rPr>
+                  <a:t>ela</a:t>
+                </a:r>
+                <a:endParaRPr lang="pt-BR" dirty="0"/>
+              </a:p>
+              <a:p>
+                <a:pPr lvl="1">
+                  <a:buFont typeface="Wingdings" panose="05000000000000000000" pitchFamily="2" charset="2"/>
+                  <a:buChar char="§"/>
+                </a:pPr>
+                <a:r>
+                  <a:rPr lang="pt-BR" b="0" i="0" dirty="0">
+                    <a:solidFill>
+                      <a:schemeClr val="tx1"/>
+                    </a:solidFill>
+                    <a:effectLst/>
+                  </a:rPr>
+                  <a:t>calcula a exponencial de cada função discriminante, </a:t>
+                </a:r>
+              </a:p>
+              <a:p>
+                <a:pPr lvl="1">
+                  <a:buFont typeface="Wingdings" panose="05000000000000000000" pitchFamily="2" charset="2"/>
+                  <a:buChar char="§"/>
+                </a:pPr>
+                <a:r>
+                  <a:rPr lang="pt-BR" b="0" i="0" dirty="0">
+                    <a:solidFill>
+                      <a:schemeClr val="tx1"/>
+                    </a:solidFill>
+                    <a:effectLst/>
+                  </a:rPr>
+                  <a:t>normaliza essas exponenciais dividindo-as pela soma de todas as exponenciais, gerando uma distribuição de probabilidades das classes.</a:t>
+                </a:r>
+              </a:p>
+            </p:txBody>
+          </p:sp>
+        </mc:Choice>
+        <mc:Fallback>
+          <p:sp>
+            <p:nvSpPr>
+              <p:cNvPr id="3" name="Espaço Reservado para Conteúdo 2">
+                <a:extLst>
+                  <a:ext uri="{FF2B5EF4-FFF2-40B4-BE49-F238E27FC236}">
+                    <a16:creationId xmlns="" xmlns:a16="http://schemas.microsoft.com/office/drawing/2014/main" xmlns:a14="http://schemas.microsoft.com/office/drawing/2010/main" id="{32DF54A1-52F5-C48C-7CD4-D6E451DF19D8}"/>
+                  </a:ext>
+                </a:extLst>
+              </p:cNvPr>
+              <p:cNvSpPr>
+                <a:spLocks noGrp="1" noRot="1" noChangeAspect="1" noMove="1" noResize="1" noEditPoints="1" noAdjustHandles="1" noChangeArrowheads="1" noChangeShapeType="1" noTextEdit="1"/>
+              </p:cNvSpPr>
+              <p:nvPr>
+                <p:ph idx="1"/>
+              </p:nvPr>
+            </p:nvSpPr>
+            <p:spPr>
+              <a:xfrm>
+                <a:off x="6646606" y="1825624"/>
+                <a:ext cx="5545394" cy="5032375"/>
+              </a:xfrm>
+              <a:blipFill rotWithShape="0">
+                <a:blip r:embed="rId2"/>
+                <a:stretch>
+                  <a:fillRect l="-1978" t="-1937" r="-1868"/>
+                </a:stretch>
+              </a:blipFill>
+            </p:spPr>
+            <p:txBody>
+              <a:bodyPr/>
+              <a:lstStyle/>
+              <a:p>
+                <a:r>
+                  <a:rPr lang="pt-BR">
+                    <a:noFill/>
+                  </a:rPr>
+                  <a:t> </a:t>
+                </a:r>
+              </a:p>
+            </p:txBody>
+          </p:sp>
+        </mc:Fallback>
+      </mc:AlternateContent>
+      <p:pic>
+        <p:nvPicPr>
+          <p:cNvPr id="6" name="Imagem 5">
+            <a:extLst>
+              <a:ext uri="{FF2B5EF4-FFF2-40B4-BE49-F238E27FC236}">
+                <a16:creationId xmlns="" xmlns:a16="http://schemas.microsoft.com/office/drawing/2014/main" id="{ED5D1F5D-F195-0452-50D4-07E9F2B1C49D}"/>
+              </a:ext>
+            </a:extLst>
+          </p:cNvPr>
+          <p:cNvPicPr>
+            <a:picLocks noChangeAspect="1"/>
+          </p:cNvPicPr>
+          <p:nvPr/>
+        </p:nvPicPr>
+        <p:blipFill>
+          <a:blip r:embed="rId3" cstate="print">
+            <a:extLst>
+              <a:ext uri="{28A0092B-C50C-407E-A947-70E740481C1C}">
+                <a14:useLocalDpi xmlns:a14="http://schemas.microsoft.com/office/drawing/2010/main" val="0"/>
+              </a:ext>
+            </a:extLst>
+          </a:blip>
+          <a:stretch>
+            <a:fillRect/>
+          </a:stretch>
+        </p:blipFill>
+        <p:spPr>
+          <a:xfrm>
+            <a:off x="275559" y="2536723"/>
+            <a:ext cx="6066351" cy="2487561"/>
+          </a:xfrm>
+          <a:prstGeom prst="rect">
+            <a:avLst/>
+          </a:prstGeom>
+        </p:spPr>
+      </p:pic>
+      <p:sp>
+        <p:nvSpPr>
+          <p:cNvPr id="8" name="CaixaDeTexto 7">
+            <a:extLst>
+              <a:ext uri="{FF2B5EF4-FFF2-40B4-BE49-F238E27FC236}">
+                <a16:creationId xmlns="" xmlns:a16="http://schemas.microsoft.com/office/drawing/2014/main" id="{0DC5673F-9B77-2E9E-8317-E71CA8896FE0}"/>
+              </a:ext>
+            </a:extLst>
+          </p:cNvPr>
+          <p:cNvSpPr txBox="1"/>
+          <p:nvPr/>
+        </p:nvSpPr>
+        <p:spPr>
+          <a:xfrm>
+            <a:off x="127819" y="6492875"/>
+            <a:ext cx="2792362" cy="276999"/>
+          </a:xfrm>
+          <a:prstGeom prst="rect">
+            <a:avLst/>
+          </a:prstGeom>
+          <a:noFill/>
+        </p:spPr>
+        <p:txBody>
+          <a:bodyPr wrap="square">
+            <a:spAutoFit/>
+          </a:bodyPr>
+          <a:lstStyle/>
+          <a:p>
+            <a:r>
+              <a:rPr lang="pt-BR" sz="1200" b="0" dirty="0">
+                <a:effectLst/>
+              </a:rPr>
+              <a:t>OBS.:</a:t>
+            </a:r>
+            <a:r>
+              <a:rPr lang="pt-BR" sz="1200" b="0" i="1" dirty="0">
+                <a:effectLst/>
+              </a:rPr>
+              <a:t> e</a:t>
+            </a:r>
+            <a:r>
+              <a:rPr lang="pt-BR" sz="1200" b="0" i="0" dirty="0">
+                <a:effectLst/>
+              </a:rPr>
+              <a:t> é a base do logaritmo natural. </a:t>
+            </a:r>
+            <a:endParaRPr lang="pt-BR" sz="1200" dirty="0"/>
+          </a:p>
+        </p:txBody>
+      </p:sp>
+      <mc:AlternateContent xmlns:mc="http://schemas.openxmlformats.org/markup-compatibility/2006" xmlns:a14="http://schemas.microsoft.com/office/drawing/2010/main">
+        <mc:Choice Requires="a14">
+          <p:sp>
+            <p:nvSpPr>
+              <p:cNvPr id="4" name="CaixaDeTexto 3">
+                <a:extLst>
+                  <a:ext uri="{FF2B5EF4-FFF2-40B4-BE49-F238E27FC236}">
+                    <a16:creationId xmlns="" xmlns:a16="http://schemas.microsoft.com/office/drawing/2014/main" id="{CBD55F82-56D5-32C8-C5AB-AF99477FBAAC}"/>
+                  </a:ext>
+                </a:extLst>
+              </p:cNvPr>
+              <p:cNvSpPr txBox="1"/>
+              <p:nvPr/>
+            </p:nvSpPr>
+            <p:spPr>
+              <a:xfrm>
+                <a:off x="1543507" y="5639486"/>
+                <a:ext cx="3530454" cy="461665"/>
+              </a:xfrm>
+              <a:prstGeom prst="rect">
+                <a:avLst/>
+              </a:prstGeom>
+              <a:noFill/>
+            </p:spPr>
+            <p:txBody>
+              <a:bodyPr wrap="none" rtlCol="0">
+                <a:spAutoFit/>
+              </a:bodyPr>
+              <a:lstStyle/>
+              <a:p>
+                <a14:m>
+                  <m:oMath xmlns:m="http://schemas.openxmlformats.org/officeDocument/2006/math">
+                    <m:r>
+                      <a:rPr lang="pt-BR" sz="2400" b="0" i="1" smtClean="0">
+                        <a:latin typeface="Cambria Math" panose="02040503050406030204" pitchFamily="18" charset="0"/>
+                      </a:rPr>
+                      <m:t>𝑄</m:t>
+                    </m:r>
+                    <m:r>
+                      <a:rPr lang="pt-BR" sz="2400" b="0" i="1" smtClean="0">
+                        <a:latin typeface="Cambria Math" panose="02040503050406030204" pitchFamily="18" charset="0"/>
+                      </a:rPr>
+                      <m:t>=5</m:t>
+                    </m:r>
+                  </m:oMath>
+                </a14:m>
+                <a:r>
+                  <a:rPr lang="pt-BR" sz="2400" dirty="0"/>
+                  <a:t> (número de classes)</a:t>
+                </a:r>
+              </a:p>
+            </p:txBody>
+          </p:sp>
+        </mc:Choice>
+        <mc:Fallback xmlns="">
+          <p:sp>
+            <p:nvSpPr>
+              <p:cNvPr id="4" name="CaixaDeTexto 3">
+                <a:extLst>
+                  <a:ext uri="{FF2B5EF4-FFF2-40B4-BE49-F238E27FC236}">
+                    <a16:creationId xmlns:a16="http://schemas.microsoft.com/office/drawing/2014/main" id="{CBD55F82-56D5-32C8-C5AB-AF99477FBAAC}"/>
+                  </a:ext>
+                </a:extLst>
+              </p:cNvPr>
+              <p:cNvSpPr txBox="1">
+                <a:spLocks noRot="1" noChangeAspect="1" noMove="1" noResize="1" noEditPoints="1" noAdjustHandles="1" noChangeArrowheads="1" noChangeShapeType="1" noTextEdit="1"/>
+              </p:cNvSpPr>
+              <p:nvPr/>
+            </p:nvSpPr>
+            <p:spPr>
+              <a:xfrm>
+                <a:off x="1543507" y="5639486"/>
+                <a:ext cx="3530454" cy="461665"/>
+              </a:xfrm>
+              <a:prstGeom prst="rect">
+                <a:avLst/>
+              </a:prstGeom>
+              <a:blipFill>
+                <a:blip r:embed="rId4"/>
+                <a:stretch>
+                  <a:fillRect l="-1209" t="-10526" r="-1900" b="-28947"/>
+                </a:stretch>
+              </a:blipFill>
+            </p:spPr>
+            <p:txBody>
+              <a:bodyPr/>
+              <a:lstStyle/>
+              <a:p>
+                <a:r>
+                  <a:rPr lang="en-US">
+                    <a:noFill/>
+                  </a:rPr>
+                  <a:t> </a:t>
+                </a:r>
+              </a:p>
+            </p:txBody>
+          </p:sp>
+        </mc:Fallback>
+      </mc:AlternateContent>
+    </p:spTree>
+    <p:extLst>
+      <p:ext uri="{BB962C8B-B14F-4D97-AF65-F5344CB8AC3E}">
+        <p14:creationId xmlns:p14="http://schemas.microsoft.com/office/powerpoint/2010/main" val="2357809270"/>
+      </p:ext>
+    </p:extLst>
+  </p:cSld>
+  <p:clrMapOvr>
+    <a:masterClrMapping/>
+  </p:clrMapOvr>
+</p:sld>
+</file>
+
+<file path=ppt/slides/slide16.xml><?xml version="1.0" encoding="utf-8"?>
+<p:sld xmlns:a="http://schemas.openxmlformats.org/drawingml/2006/main" xmlns:r="http://schemas.openxmlformats.org/officeDocument/2006/relationships" xmlns:p="http://schemas.openxmlformats.org/presentationml/2006/main">
+  <p:cSld>
+    <p:spTree>
+      <p:nvGrpSpPr>
+        <p:cNvPr id="1" name=""/>
+        <p:cNvGrpSpPr/>
+        <p:nvPr/>
+      </p:nvGrpSpPr>
+      <p:grpSpPr>
+        <a:xfrm>
+          <a:off x="0" y="0"/>
+          <a:ext cx="0" cy="0"/>
+          <a:chOff x="0" y="0"/>
+          <a:chExt cx="0" cy="0"/>
+        </a:xfrm>
+      </p:grpSpPr>
+      <p:sp>
+        <p:nvSpPr>
+          <p:cNvPr id="2" name="Título 1">
+            <a:extLst>
+              <a:ext uri="{FF2B5EF4-FFF2-40B4-BE49-F238E27FC236}">
+                <a16:creationId xmlns="" xmlns:a16="http://schemas.microsoft.com/office/drawing/2014/main" id="{99DAA83A-B143-94BB-B48B-41A7423070CE}"/>
+              </a:ext>
+            </a:extLst>
+          </p:cNvPr>
+          <p:cNvSpPr>
+            <a:spLocks noGrp="1"/>
+          </p:cNvSpPr>
+          <p:nvPr>
+            <p:ph type="title"/>
+          </p:nvPr>
+        </p:nvSpPr>
+        <p:spPr/>
+        <p:txBody>
+          <a:bodyPr/>
+          <a:lstStyle/>
+          <a:p>
+            <a:r>
+              <a:rPr lang="pt-BR" dirty="0"/>
+              <a:t>Função de ativação </a:t>
+            </a:r>
+            <a:r>
+              <a:rPr lang="pt-BR" i="1" dirty="0"/>
+              <a:t>softmax</a:t>
+            </a:r>
+            <a:endParaRPr lang="pt-BR" dirty="0"/>
+          </a:p>
+        </p:txBody>
+      </p:sp>
+      <mc:AlternateContent xmlns:mc="http://schemas.openxmlformats.org/markup-compatibility/2006">
+        <mc:Choice xmlns:a14="http://schemas.microsoft.com/office/drawing/2010/main" Requires="a14">
+          <p:sp>
+            <p:nvSpPr>
+              <p:cNvPr id="3" name="Espaço Reservado para Conteúdo 2">
+                <a:extLst>
+                  <a:ext uri="{FF2B5EF4-FFF2-40B4-BE49-F238E27FC236}">
+                    <a16:creationId xmlns="" xmlns:a16="http://schemas.microsoft.com/office/drawing/2014/main" id="{32DF54A1-52F5-C48C-7CD4-D6E451DF19D8}"/>
+                  </a:ext>
+                </a:extLst>
+              </p:cNvPr>
+              <p:cNvSpPr>
+                <a:spLocks noGrp="1"/>
+              </p:cNvSpPr>
+              <p:nvPr>
+                <p:ph idx="1"/>
+              </p:nvPr>
+            </p:nvSpPr>
+            <p:spPr>
+              <a:xfrm>
+                <a:off x="838200" y="1825624"/>
+                <a:ext cx="11353800" cy="5032375"/>
+              </a:xfrm>
+            </p:spPr>
+            <p:txBody>
+              <a:bodyPr>
+                <a:normAutofit/>
+              </a:bodyPr>
+              <a:lstStyle/>
+              <a:p>
+                <a:r>
+                  <a:rPr lang="pt-BR" b="0" dirty="0" smtClean="0">
+                    <a:effectLst/>
+                  </a:rPr>
+                  <a:t>Além de fazer c</a:t>
+                </a:r>
+                <a:r>
+                  <a:rPr lang="pt-BR" dirty="0" smtClean="0"/>
+                  <a:t>om </a:t>
+                </a:r>
+                <a:r>
+                  <a:rPr lang="pt-BR" dirty="0" smtClean="0">
+                    <a:effectLst/>
+                  </a:rPr>
+                  <a:t>que </a:t>
+                </a:r>
+                <a:r>
+                  <a:rPr lang="pt-BR" dirty="0">
+                    <a:effectLst/>
+                  </a:rPr>
+                  <a:t>as </a:t>
+                </a:r>
+                <a:r>
+                  <a:rPr lang="pt-BR" b="1" dirty="0">
+                    <a:solidFill>
+                      <a:srgbClr val="00B050"/>
+                    </a:solidFill>
+                    <a:effectLst/>
+                  </a:rPr>
+                  <a:t>saídas estejam no intervalo entre 0 e </a:t>
+                </a:r>
+                <a:r>
+                  <a:rPr lang="pt-BR" b="1" dirty="0" smtClean="0">
+                    <a:solidFill>
+                      <a:srgbClr val="00B050"/>
+                    </a:solidFill>
+                    <a:effectLst/>
+                  </a:rPr>
+                  <a:t>1, </a:t>
+                </a:r>
+                <a:r>
+                  <a:rPr lang="pt-BR" b="1" dirty="0">
+                    <a:solidFill>
+                      <a:srgbClr val="00B050"/>
+                    </a:solidFill>
+                  </a:rPr>
+                  <a:t>ela </a:t>
+                </a:r>
+                <a:r>
+                  <a:rPr lang="pt-BR" b="1" dirty="0" smtClean="0">
+                    <a:solidFill>
+                      <a:srgbClr val="00B050"/>
+                    </a:solidFill>
+                  </a:rPr>
+                  <a:t>garante que </a:t>
+                </a:r>
+                <a:r>
+                  <a:rPr lang="pt-BR" b="1" dirty="0">
+                    <a:solidFill>
+                      <a:srgbClr val="00B050"/>
+                    </a:solidFill>
+                    <a:effectLst/>
+                  </a:rPr>
+                  <a:t>soma de todas as saídas </a:t>
+                </a:r>
+                <a:r>
+                  <a:rPr lang="pt-BR" b="1" dirty="0" smtClean="0">
+                    <a:solidFill>
+                      <a:srgbClr val="00B050"/>
+                    </a:solidFill>
+                    <a:effectLst/>
+                  </a:rPr>
+                  <a:t>sempre seja </a:t>
+                </a:r>
+                <a:r>
+                  <a:rPr lang="pt-BR" b="1" dirty="0">
+                    <a:solidFill>
+                      <a:srgbClr val="00B050"/>
+                    </a:solidFill>
+                    <a:effectLst/>
+                  </a:rPr>
+                  <a:t>igual a 1</a:t>
+                </a:r>
+                <a:r>
+                  <a:rPr lang="pt-BR" b="0" dirty="0">
+                    <a:effectLst/>
+                  </a:rPr>
+                  <a:t>, tornando-as interpretáveis como uma </a:t>
+                </a:r>
+                <a:r>
+                  <a:rPr lang="pt-BR" b="1" dirty="0">
+                    <a:solidFill>
+                      <a:schemeClr val="accent2"/>
+                    </a:solidFill>
+                    <a:effectLst/>
+                  </a:rPr>
+                  <a:t>função massa de probabilidade </a:t>
+                </a:r>
+                <a:r>
+                  <a:rPr lang="pt-BR" b="1" dirty="0" err="1">
+                    <a:solidFill>
+                      <a:schemeClr val="accent2"/>
+                    </a:solidFill>
+                    <a:effectLst/>
+                  </a:rPr>
+                  <a:t>multinomial</a:t>
+                </a:r>
+                <a:r>
+                  <a:rPr lang="pt-BR" b="0" dirty="0" smtClean="0">
+                    <a:effectLst/>
+                  </a:rPr>
+                  <a:t>.</a:t>
                 </a:r>
               </a:p>
               <a:p>
@@ -15237,7 +14779,7 @@
                           </m:dPr>
                           <m:e>
                             <m:r>
-                              <a:rPr lang="pt-BR" b="0" i="1" smtClean="0">
+                              <a:rPr lang="pt-BR" i="1">
                                 <a:latin typeface="Cambria Math" panose="02040503050406030204" pitchFamily="18" charset="0"/>
                               </a:rPr>
                               <m:t>𝑛</m:t>
@@ -15348,7 +14890,7 @@
                           <m:t>(</m:t>
                         </m:r>
                         <m:r>
-                          <a:rPr lang="pt-BR" b="0" i="1" smtClean="0">
+                          <a:rPr lang="pt-BR" i="1">
                             <a:latin typeface="Cambria Math" panose="02040503050406030204" pitchFamily="18" charset="0"/>
                           </a:rPr>
                           <m:t>𝑛</m:t>
@@ -15473,7 +15015,7 @@
                           </m:dPr>
                           <m:e>
                             <m:r>
-                              <a:rPr lang="pt-BR" b="0" i="1" smtClean="0">
+                              <a:rPr lang="pt-BR" i="1">
                                 <a:latin typeface="Cambria Math" panose="02040503050406030204" pitchFamily="18" charset="0"/>
                               </a:rPr>
                               <m:t>𝑛</m:t>
@@ -15528,9 +15070,12 @@
                   </m:oMath>
                 </a14:m>
                 <a:r>
-                  <a:rPr lang="pt-BR" dirty="0"/>
+                  <a:rPr lang="pt-BR" dirty="0" smtClean="0"/>
                   <a:t>.</a:t>
                 </a:r>
+                <a:endParaRPr lang="pt-BR" b="0" dirty="0">
+                  <a:effectLst/>
+                </a:endParaRPr>
               </a:p>
             </p:txBody>
           </p:sp>
@@ -15541,7 +15086,7 @@
               <p:cNvPr id="3" name="Espaço Reservado para Conteúdo 2">
                 <a:extLst>
                   <a:ext uri="{FF2B5EF4-FFF2-40B4-BE49-F238E27FC236}">
-                    <a16:creationId xmlns:a16="http://schemas.microsoft.com/office/drawing/2014/main" xmlns="" xmlns:a14="http://schemas.microsoft.com/office/drawing/2010/main" id="{32DF54A1-52F5-C48C-7CD4-D6E451DF19D8}"/>
+                    <a16:creationId xmlns="" xmlns:a16="http://schemas.microsoft.com/office/drawing/2014/main" xmlns:a14="http://schemas.microsoft.com/office/drawing/2010/main" id="{32DF54A1-52F5-C48C-7CD4-D6E451DF19D8}"/>
                   </a:ext>
                 </a:extLst>
               </p:cNvPr>
@@ -15555,12 +15100,12 @@
             <p:spPr>
               <a:xfrm>
                 <a:off x="838200" y="1825624"/>
-                <a:ext cx="11225981" cy="5032375"/>
+                <a:ext cx="11353800" cy="5032375"/>
               </a:xfrm>
               <a:blipFill rotWithShape="0">
                 <a:blip r:embed="rId3"/>
                 <a:stretch>
-                  <a:fillRect l="-978" t="-1937"/>
+                  <a:fillRect l="-967" t="-1937"/>
                 </a:stretch>
               </a:blipFill>
             </p:spPr>
@@ -15584,7 +15129,7 @@
           <p:cNvPr id="6" name="Imagem 5">
             <a:extLst>
               <a:ext uri="{FF2B5EF4-FFF2-40B4-BE49-F238E27FC236}">
-                <a16:creationId xmlns:a16="http://schemas.microsoft.com/office/drawing/2014/main" xmlns="" id="{ED5D1F5D-F195-0452-50D4-07E9F2B1C49D}"/>
+                <a16:creationId xmlns="" xmlns:a16="http://schemas.microsoft.com/office/drawing/2014/main" id="{ED5D1F5D-F195-0452-50D4-07E9F2B1C49D}"/>
               </a:ext>
             </a:extLst>
           </p:cNvPr>
@@ -15607,22 +15152,22 @@
         </p:blipFill>
         <p:spPr>
           <a:xfrm>
-            <a:off x="3590832" y="4709525"/>
-            <a:ext cx="5010336" cy="2054533"/>
+            <a:off x="2778470" y="3952568"/>
+            <a:ext cx="6635059" cy="2720765"/>
           </a:xfrm>
           <a:prstGeom prst="rect">
             <a:avLst/>
           </a:prstGeom>
         </p:spPr>
       </p:pic>
-      <mc:AlternateContent xmlns:mc="http://schemas.openxmlformats.org/markup-compatibility/2006" xmlns:a14="http://schemas.microsoft.com/office/drawing/2010/main">
-        <mc:Choice Requires="a14">
+      <mc:AlternateContent xmlns:mc="http://schemas.openxmlformats.org/markup-compatibility/2006">
+        <mc:Choice xmlns:a14="http://schemas.microsoft.com/office/drawing/2010/main" Requires="a14">
           <p:sp>
             <p:nvSpPr>
               <p:cNvPr id="4" name="CaixaDeTexto 3">
                 <a:extLst>
                   <a:ext uri="{FF2B5EF4-FFF2-40B4-BE49-F238E27FC236}">
-                    <a16:creationId xmlns:a16="http://schemas.microsoft.com/office/drawing/2014/main" xmlns="" id="{2B7728A0-505D-9DAE-23EC-8172E2EEEFA9}"/>
+                    <a16:creationId xmlns="" xmlns:a16="http://schemas.microsoft.com/office/drawing/2014/main" id="{2B7728A0-505D-9DAE-23EC-8172E2EEEFA9}"/>
                   </a:ext>
                 </a:extLst>
               </p:cNvPr>
@@ -15631,7 +15176,7 @@
             </p:nvSpPr>
             <p:spPr>
               <a:xfrm>
-                <a:off x="8601168" y="6488667"/>
+                <a:off x="9468912" y="6488667"/>
                 <a:ext cx="2701189" cy="369332"/>
               </a:xfrm>
               <a:prstGeom prst="rect">
@@ -15669,13 +15214,13 @@
             </p:txBody>
           </p:sp>
         </mc:Choice>
-        <mc:Fallback xmlns="">
+        <mc:Fallback>
           <p:sp>
             <p:nvSpPr>
               <p:cNvPr id="4" name="CaixaDeTexto 3">
                 <a:extLst>
                   <a:ext uri="{FF2B5EF4-FFF2-40B4-BE49-F238E27FC236}">
-                    <a16:creationId xmlns:a16="http://schemas.microsoft.com/office/drawing/2014/main" id="{2B7728A0-505D-9DAE-23EC-8172E2EEEFA9}"/>
+                    <a16:creationId xmlns="" xmlns:a16="http://schemas.microsoft.com/office/drawing/2014/main" xmlns:a14="http://schemas.microsoft.com/office/drawing/2010/main" id="{2B7728A0-505D-9DAE-23EC-8172E2EEEFA9}"/>
                   </a:ext>
                 </a:extLst>
               </p:cNvPr>
@@ -15686,16 +15231,16 @@
             </p:nvSpPr>
             <p:spPr>
               <a:xfrm>
-                <a:off x="8601168" y="6488667"/>
+                <a:off x="9468912" y="6488667"/>
                 <a:ext cx="2701189" cy="369332"/>
               </a:xfrm>
               <a:prstGeom prst="rect">
                 <a:avLst/>
               </a:prstGeom>
-              <a:blipFill>
+              <a:blipFill rotWithShape="0">
                 <a:blip r:embed="rId5"/>
                 <a:stretch>
-                  <a:fillRect l="-451" t="-8197" r="-1354" b="-24590"/>
+                  <a:fillRect l="-451" t="-8197" r="-1580" b="-24590"/>
                 </a:stretch>
               </a:blipFill>
             </p:spPr>
@@ -15704,7 +15249,7 @@
               <a:lstStyle/>
               <a:p>
                 <a:r>
-                  <a:rPr lang="en-US">
+                  <a:rPr lang="pt-BR">
                     <a:noFill/>
                   </a:rPr>
                   <a:t> </a:t>
@@ -15749,7 +15294,7 @@
           <p:cNvPr id="2" name="Título 1">
             <a:extLst>
               <a:ext uri="{FF2B5EF4-FFF2-40B4-BE49-F238E27FC236}">
-                <a16:creationId xmlns:a16="http://schemas.microsoft.com/office/drawing/2014/main" xmlns="" id="{028A152F-93D8-11FA-9B7A-B62AE5BB6486}"/>
+                <a16:creationId xmlns="" xmlns:a16="http://schemas.microsoft.com/office/drawing/2014/main" id="{028A152F-93D8-11FA-9B7A-B62AE5BB6486}"/>
               </a:ext>
             </a:extLst>
           </p:cNvPr>
@@ -15783,7 +15328,7 @@
               <p:cNvPr id="3" name="Espaço Reservado para Conteúdo 2">
                 <a:extLst>
                   <a:ext uri="{FF2B5EF4-FFF2-40B4-BE49-F238E27FC236}">
-                    <a16:creationId xmlns:a16="http://schemas.microsoft.com/office/drawing/2014/main" xmlns="" id="{B3535727-BB24-BB15-5C03-3DA9A3F9A09A}"/>
+                    <a16:creationId xmlns="" xmlns:a16="http://schemas.microsoft.com/office/drawing/2014/main" id="{B3535727-BB24-BB15-5C03-3DA9A3F9A09A}"/>
                   </a:ext>
                 </a:extLst>
               </p:cNvPr>
@@ -15961,7 +15506,7 @@
           <p:cNvPr id="4" name="Imagem 5">
             <a:extLst>
               <a:ext uri="{FF2B5EF4-FFF2-40B4-BE49-F238E27FC236}">
-                <a16:creationId xmlns:a16="http://schemas.microsoft.com/office/drawing/2014/main" xmlns="" id="{42A1713D-06B5-FB35-8488-833F7CAB7166}"/>
+                <a16:creationId xmlns="" xmlns:a16="http://schemas.microsoft.com/office/drawing/2014/main" id="{42A1713D-06B5-FB35-8488-833F7CAB7166}"/>
               </a:ext>
             </a:extLst>
           </p:cNvPr>
@@ -16027,7 +15572,7 @@
           <p:cNvPr id="2" name="Title 1">
             <a:extLst>
               <a:ext uri="{FF2B5EF4-FFF2-40B4-BE49-F238E27FC236}">
-                <a16:creationId xmlns:a16="http://schemas.microsoft.com/office/drawing/2014/main" xmlns="" id="{2DB9D242-5419-0FFB-7863-B3BB3BD80869}"/>
+                <a16:creationId xmlns="" xmlns:a16="http://schemas.microsoft.com/office/drawing/2014/main" id="{2DB9D242-5419-0FFB-7863-B3BB3BD80869}"/>
               </a:ext>
             </a:extLst>
           </p:cNvPr>
@@ -16051,14 +15596,14 @@
           </a:p>
         </p:txBody>
       </p:sp>
-      <mc:AlternateContent xmlns:mc="http://schemas.openxmlformats.org/markup-compatibility/2006" xmlns:a14="http://schemas.microsoft.com/office/drawing/2010/main">
-        <mc:Choice Requires="a14">
+      <mc:AlternateContent xmlns:mc="http://schemas.openxmlformats.org/markup-compatibility/2006">
+        <mc:Choice xmlns:a14="http://schemas.microsoft.com/office/drawing/2010/main" Requires="a14">
           <p:sp>
             <p:nvSpPr>
               <p:cNvPr id="3" name="Content Placeholder 2">
                 <a:extLst>
                   <a:ext uri="{FF2B5EF4-FFF2-40B4-BE49-F238E27FC236}">
-                    <a16:creationId xmlns:a16="http://schemas.microsoft.com/office/drawing/2014/main" xmlns="" id="{34B1DEA3-BAAD-D90C-CD9D-99A5A24F4544}"/>
+                    <a16:creationId xmlns="" xmlns:a16="http://schemas.microsoft.com/office/drawing/2014/main" id="{34B1DEA3-BAAD-D90C-CD9D-99A5A24F4544}"/>
                   </a:ext>
                 </a:extLst>
               </p:cNvPr>
@@ -16841,13 +16386,25 @@
                 </a14:m>
                 <a:r>
                   <a:rPr lang="pt-BR" dirty="0"/>
-                  <a:t> tende a 1, caso contrário, o erro aumenta.</a:t>
+                  <a:t> tende a 1, caso contrário, </a:t>
+                </a:r>
+                <a:r>
+                  <a:rPr lang="pt-BR" dirty="0" smtClean="0"/>
+                  <a:t>ele</a:t>
+                </a:r>
+                <a:r>
+                  <a:rPr lang="pt-BR" dirty="0" smtClean="0"/>
+                  <a:t> </a:t>
+                </a:r>
+                <a:r>
+                  <a:rPr lang="pt-BR" dirty="0"/>
+                  <a:t>aumenta.</a:t>
                 </a:r>
               </a:p>
             </p:txBody>
           </p:sp>
         </mc:Choice>
-        <mc:Fallback xmlns="">
+        <mc:Fallback>
           <p:sp>
             <p:nvSpPr>
               <p:cNvPr id="3" name="Content Placeholder 2">
@@ -16926,7 +16483,7 @@
           <p:cNvPr id="2" name="Title 1">
             <a:extLst>
               <a:ext uri="{FF2B5EF4-FFF2-40B4-BE49-F238E27FC236}">
-                <a16:creationId xmlns:a16="http://schemas.microsoft.com/office/drawing/2014/main" xmlns="" id="{997538D5-DC01-EC48-38D2-99D754F1BB92}"/>
+                <a16:creationId xmlns="" xmlns:a16="http://schemas.microsoft.com/office/drawing/2014/main" id="{997538D5-DC01-EC48-38D2-99D754F1BB92}"/>
               </a:ext>
             </a:extLst>
           </p:cNvPr>
@@ -16950,14 +16507,14 @@
           </a:p>
         </p:txBody>
       </p:sp>
-      <mc:AlternateContent xmlns:mc="http://schemas.openxmlformats.org/markup-compatibility/2006" xmlns:a14="http://schemas.microsoft.com/office/drawing/2010/main">
-        <mc:Choice Requires="a14">
+      <mc:AlternateContent xmlns:mc="http://schemas.openxmlformats.org/markup-compatibility/2006">
+        <mc:Choice xmlns:a14="http://schemas.microsoft.com/office/drawing/2010/main" Requires="a14">
           <p:sp>
             <p:nvSpPr>
               <p:cNvPr id="3" name="Content Placeholder 2">
                 <a:extLst>
                   <a:ext uri="{FF2B5EF4-FFF2-40B4-BE49-F238E27FC236}">
-                    <a16:creationId xmlns:a16="http://schemas.microsoft.com/office/drawing/2014/main" xmlns="" id="{17D7928D-3A32-7330-5FDC-756155EF2F3D}"/>
+                    <a16:creationId xmlns="" xmlns:a16="http://schemas.microsoft.com/office/drawing/2014/main" id="{17D7928D-3A32-7330-5FDC-756155EF2F3D}"/>
                   </a:ext>
                 </a:extLst>
               </p:cNvPr>
@@ -16968,7 +16525,12 @@
                 <p:ph idx="1"/>
               </p:nvPr>
             </p:nvSpPr>
-            <p:spPr/>
+            <p:spPr>
+              <a:xfrm>
+                <a:off x="838199" y="1840373"/>
+                <a:ext cx="11152239" cy="4351338"/>
+              </a:xfrm>
+            </p:spPr>
             <p:txBody>
               <a:bodyPr/>
               <a:lstStyle/>
@@ -17369,23 +16931,70 @@
                       <a:srgbClr val="7030A0"/>
                     </a:solidFill>
                   </a:rPr>
-                  <a:t>entre as distribuições de probabilidade preditas pelo modelo e as distribuições dos rótulos </a:t>
-                </a:r>
-                <a:r>
-                  <a:rPr lang="pt-BR" dirty="0"/>
-                  <a:t>das classes.</a:t>
-                </a:r>
-              </a:p>
-              <a:p>
+                  <a:t>entre as distribuições de probabilidade </a:t>
+                </a:r>
+                <a:r>
+                  <a:rPr lang="pt-BR" b="1" dirty="0" smtClean="0">
+                    <a:solidFill>
+                      <a:srgbClr val="7030A0"/>
+                    </a:solidFill>
+                  </a:rPr>
+                  <a:t>d</a:t>
+                </a:r>
+                <a:r>
+                  <a:rPr lang="pt-BR" b="1" dirty="0" smtClean="0">
+                    <a:solidFill>
+                      <a:srgbClr val="7030A0"/>
+                    </a:solidFill>
+                  </a:rPr>
+                  <a:t>a saída do</a:t>
+                </a:r>
+                <a:r>
+                  <a:rPr lang="pt-BR" b="1" dirty="0" smtClean="0">
+                    <a:solidFill>
+                      <a:srgbClr val="7030A0"/>
+                    </a:solidFill>
+                  </a:rPr>
+                  <a:t> modelo </a:t>
+                </a:r>
+                <a:r>
+                  <a:rPr lang="pt-BR" b="1" dirty="0">
+                    <a:solidFill>
+                      <a:srgbClr val="7030A0"/>
+                    </a:solidFill>
+                  </a:rPr>
+                  <a:t>e </a:t>
+                </a:r>
+                <a:r>
+                  <a:rPr lang="pt-BR" b="1" dirty="0" smtClean="0">
+                    <a:solidFill>
+                      <a:srgbClr val="7030A0"/>
+                    </a:solidFill>
+                  </a:rPr>
+                  <a:t>a dos </a:t>
+                </a:r>
+                <a:r>
+                  <a:rPr lang="pt-BR" b="1" dirty="0">
+                    <a:solidFill>
+                      <a:srgbClr val="7030A0"/>
+                    </a:solidFill>
+                  </a:rPr>
+                  <a:t>rótulos </a:t>
+                </a:r>
+                <a:r>
+                  <a:rPr lang="pt-BR" dirty="0"/>
+                  <a:t>das classes</a:t>
+                </a:r>
+                <a:r>
+                  <a:rPr lang="pt-BR" dirty="0" smtClean="0"/>
+                  <a:t>.</a:t>
+                </a:r>
                 <a:endParaRPr lang="pt-BR" dirty="0"/>
-              </a:p>
-              <a:p>
-                <a:endParaRPr lang="en-US" dirty="0"/>
               </a:p>
             </p:txBody>
           </p:sp>
         </mc:Choice>
-        <mc:Fallback xmlns="">
+        <mc:Fallback>
           <p:sp>
             <p:nvSpPr>
               <p:cNvPr id="3" name="Content Placeholder 2">
@@ -17403,10 +17012,14 @@
               </p:nvPr>
             </p:nvSpPr>
             <p:spPr>
+              <a:xfrm>
+                <a:off x="838199" y="1840373"/>
+                <a:ext cx="11152239" cy="4351338"/>
+              </a:xfrm>
               <a:blipFill rotWithShape="0">
                 <a:blip r:embed="rId2"/>
                 <a:stretch>
-                  <a:fillRect l="-1043" r="-58"/>
+                  <a:fillRect l="-929" r="-874"/>
                 </a:stretch>
               </a:blipFill>
             </p:spPr>
@@ -17555,7 +17168,7 @@
           <p:cNvPr id="2" name="Título 1">
             <a:extLst>
               <a:ext uri="{FF2B5EF4-FFF2-40B4-BE49-F238E27FC236}">
-                <a16:creationId xmlns:a16="http://schemas.microsoft.com/office/drawing/2014/main" xmlns="" id="{1FE7CD05-66F2-8967-6154-CCED38E0F987}"/>
+                <a16:creationId xmlns="" xmlns:a16="http://schemas.microsoft.com/office/drawing/2014/main" id="{1FE7CD05-66F2-8967-6154-CCED38E0F987}"/>
               </a:ext>
             </a:extLst>
           </p:cNvPr>
@@ -17578,14 +17191,14 @@
           </a:p>
         </p:txBody>
       </p:sp>
-      <mc:AlternateContent xmlns:mc="http://schemas.openxmlformats.org/markup-compatibility/2006" xmlns:a14="http://schemas.microsoft.com/office/drawing/2010/main">
-        <mc:Choice Requires="a14">
+      <mc:AlternateContent xmlns:mc="http://schemas.openxmlformats.org/markup-compatibility/2006">
+        <mc:Choice xmlns:a14="http://schemas.microsoft.com/office/drawing/2010/main" Requires="a14">
           <p:sp>
             <p:nvSpPr>
               <p:cNvPr id="3" name="Espaço Reservado para Conteúdo 2">
                 <a:extLst>
                   <a:ext uri="{FF2B5EF4-FFF2-40B4-BE49-F238E27FC236}">
-                    <a16:creationId xmlns:a16="http://schemas.microsoft.com/office/drawing/2014/main" xmlns="" id="{21A86630-5D79-AD4B-79FC-6C8373E8DB39}"/>
+                    <a16:creationId xmlns="" xmlns:a16="http://schemas.microsoft.com/office/drawing/2014/main" id="{21A86630-5D79-AD4B-79FC-6C8373E8DB39}"/>
                   </a:ext>
                 </a:extLst>
               </p:cNvPr>
@@ -17598,8 +17211,8 @@
             </p:nvSpPr>
             <p:spPr>
               <a:xfrm>
-                <a:off x="838199" y="1825624"/>
-                <a:ext cx="11144693" cy="5032375"/>
+                <a:off x="838200" y="1825624"/>
+                <a:ext cx="11240730" cy="5032375"/>
               </a:xfrm>
             </p:spPr>
             <p:txBody>
@@ -18125,7 +17738,45 @@
                 </a14:m>
                 <a:r>
                   <a:rPr lang="pt-BR" dirty="0"/>
-                  <a:t> é um vetor com os rótulos usando a codificação </a:t>
+                  <a:t> é </a:t>
+                </a:r>
+                <a:r>
+                  <a:rPr lang="pt-BR" dirty="0" smtClean="0"/>
+                  <a:t>o vetor </a:t>
+                </a:r>
+                <a:r>
+                  <a:rPr lang="pt-BR" dirty="0" smtClean="0"/>
+                  <a:t>do </a:t>
+                </a:r>
+                <a14:m>
+                  <m:oMath xmlns:m="http://schemas.openxmlformats.org/officeDocument/2006/math">
+                    <m:r>
+                      <a:rPr lang="pt-BR" i="1">
+                        <a:latin typeface="Cambria Math" panose="02040503050406030204" pitchFamily="18" charset="0"/>
+                      </a:rPr>
+                      <m:t>𝑛</m:t>
+                    </m:r>
+                  </m:oMath>
+                </a14:m>
+                <a:r>
+                  <a:rPr lang="pt-BR" dirty="0"/>
+                  <a:t>-</a:t>
+                </a:r>
+                <a:r>
+                  <a:rPr lang="pt-BR" dirty="0" err="1"/>
+                  <a:t>ésimo</a:t>
+                </a:r>
+                <a:r>
+                  <a:rPr lang="pt-BR" dirty="0"/>
+                  <a:t> </a:t>
+                </a:r>
+                <a:r>
+                  <a:rPr lang="pt-BR" dirty="0" smtClean="0"/>
+                  <a:t>rótulo </a:t>
+                </a:r>
+                <a:r>
+                  <a:rPr lang="pt-BR" dirty="0"/>
+                  <a:t>usando a codificação </a:t>
                 </a:r>
                 <a:r>
                   <a:rPr lang="pt-BR" b="1" i="1" dirty="0"/>
@@ -18402,7 +18053,15 @@
                 </a14:m>
                 <a:r>
                   <a:rPr lang="pt-BR" dirty="0"/>
-                  <a:t>é um vetor com as </a:t>
+                  <a:t>é </a:t>
+                </a:r>
+                <a:r>
+                  <a:rPr lang="pt-BR" dirty="0" smtClean="0"/>
+                  <a:t>o vetor </a:t>
+                </a:r>
+                <a:r>
+                  <a:rPr lang="pt-BR" dirty="0"/>
+                  <a:t>com as </a:t>
                 </a:r>
                 <a14:m>
                   <m:oMath xmlns:m="http://schemas.openxmlformats.org/officeDocument/2006/math">
@@ -18491,13 +18150,13 @@
             </p:txBody>
           </p:sp>
         </mc:Choice>
-        <mc:Fallback xmlns="">
+        <mc:Fallback>
           <p:sp>
             <p:nvSpPr>
               <p:cNvPr id="3" name="Espaço Reservado para Conteúdo 2">
                 <a:extLst>
                   <a:ext uri="{FF2B5EF4-FFF2-40B4-BE49-F238E27FC236}">
-                    <a16:creationId xmlns:a16="http://schemas.microsoft.com/office/drawing/2014/main" id="{21A86630-5D79-AD4B-79FC-6C8373E8DB39}"/>
+                    <a16:creationId xmlns="" xmlns:a16="http://schemas.microsoft.com/office/drawing/2014/main" xmlns:a14="http://schemas.microsoft.com/office/drawing/2010/main" id="{21A86630-5D79-AD4B-79FC-6C8373E8DB39}"/>
                   </a:ext>
                 </a:extLst>
               </p:cNvPr>
@@ -18510,13 +18169,13 @@
             </p:nvSpPr>
             <p:spPr>
               <a:xfrm>
-                <a:off x="838199" y="1825624"/>
-                <a:ext cx="11144693" cy="5032375"/>
+                <a:off x="838200" y="1825624"/>
+                <a:ext cx="11240730" cy="5032375"/>
               </a:xfrm>
-              <a:blipFill>
+              <a:blipFill rotWithShape="0">
                 <a:blip r:embed="rId2"/>
                 <a:stretch>
-                  <a:fillRect l="-1093" t="-1937" r="-547"/>
+                  <a:fillRect l="-1139" t="-1937" r="-1248"/>
                 </a:stretch>
               </a:blipFill>
             </p:spPr>
@@ -18525,7 +18184,7 @@
               <a:lstStyle/>
               <a:p>
                 <a:r>
-                  <a:rPr lang="en-US">
+                  <a:rPr lang="pt-BR">
                     <a:noFill/>
                   </a:rPr>
                   <a:t> </a:t>
@@ -18570,7 +18229,7 @@
           <p:cNvPr id="2" name="Título 1">
             <a:extLst>
               <a:ext uri="{FF2B5EF4-FFF2-40B4-BE49-F238E27FC236}">
-                <a16:creationId xmlns:a16="http://schemas.microsoft.com/office/drawing/2014/main" xmlns="" id="{E4598F11-6F65-0753-89FE-F5ABED77B46A}"/>
+                <a16:creationId xmlns="" xmlns:a16="http://schemas.microsoft.com/office/drawing/2014/main" id="{E4598F11-6F65-0753-89FE-F5ABED77B46A}"/>
               </a:ext>
             </a:extLst>
           </p:cNvPr>
@@ -18594,14 +18253,14 @@
           </a:p>
         </p:txBody>
       </p:sp>
-      <mc:AlternateContent xmlns:mc="http://schemas.openxmlformats.org/markup-compatibility/2006" xmlns:a14="http://schemas.microsoft.com/office/drawing/2010/main">
-        <mc:Choice Requires="a14">
+      <mc:AlternateContent xmlns:mc="http://schemas.openxmlformats.org/markup-compatibility/2006">
+        <mc:Choice xmlns:a14="http://schemas.microsoft.com/office/drawing/2010/main" Requires="a14">
           <p:sp>
             <p:nvSpPr>
               <p:cNvPr id="3" name="Espaço Reservado para Conteúdo 2">
                 <a:extLst>
                   <a:ext uri="{FF2B5EF4-FFF2-40B4-BE49-F238E27FC236}">
-                    <a16:creationId xmlns:a16="http://schemas.microsoft.com/office/drawing/2014/main" xmlns="" id="{FEF4E6DC-E916-D97A-4D18-D469285C4F2C}"/>
+                    <a16:creationId xmlns="" xmlns:a16="http://schemas.microsoft.com/office/drawing/2014/main" id="{FEF4E6DC-E916-D97A-4D18-D469285C4F2C}"/>
                   </a:ext>
                 </a:extLst>
               </p:cNvPr>
@@ -18900,18 +18559,30 @@
                 </a:r>
                 <a:r>
                   <a:rPr lang="pt-BR" b="1" dirty="0"/>
-                  <a:t>função de erro médio </a:t>
-                </a:r>
-                <a:r>
-                  <a:rPr lang="pt-BR" dirty="0"/>
-                  <a:t>é equivalente à </a:t>
+                  <a:t>função </a:t>
+                </a:r>
+                <a:r>
+                  <a:rPr lang="pt-BR" b="1" dirty="0" smtClean="0"/>
+                  <a:t>da entropia cruzada categórica </a:t>
+                </a:r>
+                <a:r>
+                  <a:rPr lang="pt-BR" dirty="0" smtClean="0"/>
+                  <a:t>é </a:t>
+                </a:r>
+                <a:r>
+                  <a:rPr lang="pt-BR" dirty="0"/>
+                  <a:t>equivalente à </a:t>
                 </a:r>
                 <a:r>
                   <a:rPr lang="pt-BR" b="1" dirty="0"/>
-                  <a:t>função de erro médio </a:t>
-                </a:r>
-                <a:r>
-                  <a:rPr lang="pt-BR" dirty="0"/>
+                  <a:t>função da entropia </a:t>
+                </a:r>
+                <a:r>
+                  <a:rPr lang="pt-BR" b="1" dirty="0" smtClean="0"/>
+                  <a:t>cruzada </a:t>
+                </a:r>
+                <a:r>
+                  <a:rPr lang="pt-BR" dirty="0" smtClean="0"/>
                   <a:t>do </a:t>
                 </a:r>
                 <a:r>
@@ -18992,13 +18663,13 @@
             </p:txBody>
           </p:sp>
         </mc:Choice>
-        <mc:Fallback xmlns="">
+        <mc:Fallback>
           <p:sp>
             <p:nvSpPr>
               <p:cNvPr id="3" name="Espaço Reservado para Conteúdo 2">
                 <a:extLst>
                   <a:ext uri="{FF2B5EF4-FFF2-40B4-BE49-F238E27FC236}">
-                    <a16:creationId xmlns:a16="http://schemas.microsoft.com/office/drawing/2014/main" id="{FEF4E6DC-E916-D97A-4D18-D469285C4F2C}"/>
+                    <a16:creationId xmlns="" xmlns:a16="http://schemas.microsoft.com/office/drawing/2014/main" xmlns:a14="http://schemas.microsoft.com/office/drawing/2010/main" id="{FEF4E6DC-E916-D97A-4D18-D469285C4F2C}"/>
                   </a:ext>
                 </a:extLst>
               </p:cNvPr>
@@ -19014,10 +18685,10 @@
                 <a:off x="838200" y="1825624"/>
                 <a:ext cx="11201400" cy="5032375"/>
               </a:xfrm>
-              <a:blipFill>
+              <a:blipFill rotWithShape="0">
                 <a:blip r:embed="rId3"/>
                 <a:stretch>
-                  <a:fillRect l="-980" r="-1524"/>
+                  <a:fillRect l="-980"/>
                 </a:stretch>
               </a:blipFill>
             </p:spPr>
@@ -19026,7 +18697,7 @@
               <a:lstStyle/>
               <a:p>
                 <a:r>
-                  <a:rPr lang="en-US">
+                  <a:rPr lang="pt-BR">
                     <a:noFill/>
                   </a:rPr>
                   <a:t> </a:t>
@@ -19071,7 +18742,7 @@
           <p:cNvPr id="2" name="Título 1">
             <a:extLst>
               <a:ext uri="{FF2B5EF4-FFF2-40B4-BE49-F238E27FC236}">
-                <a16:creationId xmlns:a16="http://schemas.microsoft.com/office/drawing/2014/main" xmlns="" id="{D5807923-28D2-8150-E304-526DA460D220}"/>
+                <a16:creationId xmlns="" xmlns:a16="http://schemas.microsoft.com/office/drawing/2014/main" id="{D5807923-28D2-8150-E304-526DA460D220}"/>
               </a:ext>
             </a:extLst>
           </p:cNvPr>
@@ -19100,7 +18771,7 @@
           <p:cNvPr id="3" name="Espaço Reservado para Conteúdo 2">
             <a:extLst>
               <a:ext uri="{FF2B5EF4-FFF2-40B4-BE49-F238E27FC236}">
-                <a16:creationId xmlns:a16="http://schemas.microsoft.com/office/drawing/2014/main" xmlns="" id="{FFACD180-C529-EB91-BD2D-B5F491B1E35C}"/>
+                <a16:creationId xmlns="" xmlns:a16="http://schemas.microsoft.com/office/drawing/2014/main" id="{FFACD180-C529-EB91-BD2D-B5F491B1E35C}"/>
               </a:ext>
             </a:extLst>
           </p:cNvPr>
@@ -19232,7 +18903,7 @@
           <p:cNvPr id="1026" name="Picture 2">
             <a:extLst>
               <a:ext uri="{FF2B5EF4-FFF2-40B4-BE49-F238E27FC236}">
-                <a16:creationId xmlns:a16="http://schemas.microsoft.com/office/drawing/2014/main" xmlns="" id="{6FC2BDE8-91E0-6379-9BA3-76511C6153D5}"/>
+                <a16:creationId xmlns="" xmlns:a16="http://schemas.microsoft.com/office/drawing/2014/main" id="{6FC2BDE8-91E0-6379-9BA3-76511C6153D5}"/>
               </a:ext>
             </a:extLst>
           </p:cNvPr>
@@ -19277,7 +18948,7 @@
           <p:cNvPr id="5" name="Picture 2">
             <a:extLst>
               <a:ext uri="{FF2B5EF4-FFF2-40B4-BE49-F238E27FC236}">
-                <a16:creationId xmlns:a16="http://schemas.microsoft.com/office/drawing/2014/main" xmlns="" id="{2771BE1F-7B74-36A4-AA69-9171B025A4B6}"/>
+                <a16:creationId xmlns="" xmlns:a16="http://schemas.microsoft.com/office/drawing/2014/main" id="{2771BE1F-7B74-36A4-AA69-9171B025A4B6}"/>
               </a:ext>
             </a:extLst>
           </p:cNvPr>
@@ -19352,7 +19023,7 @@
           <p:cNvPr id="2" name="Título 1">
             <a:extLst>
               <a:ext uri="{FF2B5EF4-FFF2-40B4-BE49-F238E27FC236}">
-                <a16:creationId xmlns:a16="http://schemas.microsoft.com/office/drawing/2014/main" xmlns="" id="{5D929962-9BFC-4174-AB35-CC23FA013168}"/>
+                <a16:creationId xmlns="" xmlns:a16="http://schemas.microsoft.com/office/drawing/2014/main" id="{5D929962-9BFC-4174-AB35-CC23FA013168}"/>
               </a:ext>
             </a:extLst>
           </p:cNvPr>
@@ -19376,14 +19047,14 @@
           </a:p>
         </p:txBody>
       </p:sp>
-      <mc:AlternateContent xmlns:mc="http://schemas.openxmlformats.org/markup-compatibility/2006" xmlns:a14="http://schemas.microsoft.com/office/drawing/2010/main">
-        <mc:Choice Requires="a14">
+      <mc:AlternateContent xmlns:mc="http://schemas.openxmlformats.org/markup-compatibility/2006">
+        <mc:Choice xmlns:a14="http://schemas.microsoft.com/office/drawing/2010/main" Requires="a14">
           <p:sp>
             <p:nvSpPr>
               <p:cNvPr id="3" name="Espaço Reservado para Conteúdo 2">
                 <a:extLst>
                   <a:ext uri="{FF2B5EF4-FFF2-40B4-BE49-F238E27FC236}">
-                    <a16:creationId xmlns:a16="http://schemas.microsoft.com/office/drawing/2014/main" xmlns="" id="{1D38055D-E355-F780-9CA0-0337EA0BE4FD}"/>
+                    <a16:creationId xmlns="" xmlns:a16="http://schemas.microsoft.com/office/drawing/2014/main" id="{1D38055D-E355-F780-9CA0-0337EA0BE4FD}"/>
                   </a:ext>
                 </a:extLst>
               </p:cNvPr>
@@ -19396,8 +19067,8 @@
             </p:nvSpPr>
             <p:spPr>
               <a:xfrm>
-                <a:off x="838200" y="1825625"/>
-                <a:ext cx="11163300" cy="5032375"/>
+                <a:off x="838199" y="1825625"/>
+                <a:ext cx="11240729" cy="5032375"/>
               </a:xfrm>
             </p:spPr>
             <p:txBody>
@@ -20536,13 +20207,13 @@
             </p:txBody>
           </p:sp>
         </mc:Choice>
-        <mc:Fallback xmlns="">
+        <mc:Fallback>
           <p:sp>
             <p:nvSpPr>
               <p:cNvPr id="3" name="Espaço Reservado para Conteúdo 2">
                 <a:extLst>
                   <a:ext uri="{FF2B5EF4-FFF2-40B4-BE49-F238E27FC236}">
-                    <a16:creationId xmlns:a16="http://schemas.microsoft.com/office/drawing/2014/main" id="{1D38055D-E355-F780-9CA0-0337EA0BE4FD}"/>
+                    <a16:creationId xmlns="" xmlns:a16="http://schemas.microsoft.com/office/drawing/2014/main" xmlns:a14="http://schemas.microsoft.com/office/drawing/2010/main" id="{1D38055D-E355-F780-9CA0-0337EA0BE4FD}"/>
                   </a:ext>
                 </a:extLst>
               </p:cNvPr>
@@ -20555,13 +20226,13 @@
             </p:nvSpPr>
             <p:spPr>
               <a:xfrm>
-                <a:off x="838200" y="1825625"/>
-                <a:ext cx="11163300" cy="5032375"/>
+                <a:off x="838199" y="1825625"/>
+                <a:ext cx="11240729" cy="5032375"/>
               </a:xfrm>
-              <a:blipFill>
+              <a:blipFill rotWithShape="0">
                 <a:blip r:embed="rId3"/>
                 <a:stretch>
-                  <a:fillRect l="-1147" t="-1695"/>
+                  <a:fillRect l="-1085" t="-1695"/>
                 </a:stretch>
               </a:blipFill>
             </p:spPr>
@@ -20570,7 +20241,7 @@
               <a:lstStyle/>
               <a:p>
                 <a:r>
-                  <a:rPr lang="en-US">
+                  <a:rPr lang="pt-BR">
                     <a:noFill/>
                   </a:rPr>
                   <a:t> </a:t>
@@ -20615,7 +20286,7 @@
           <p:cNvPr id="2" name="Título 1">
             <a:extLst>
               <a:ext uri="{FF2B5EF4-FFF2-40B4-BE49-F238E27FC236}">
-                <a16:creationId xmlns:a16="http://schemas.microsoft.com/office/drawing/2014/main" xmlns="" id="{01D0947A-594D-A8D5-95F3-38EB04C6BDB6}"/>
+                <a16:creationId xmlns="" xmlns:a16="http://schemas.microsoft.com/office/drawing/2014/main" id="{01D0947A-594D-A8D5-95F3-38EB04C6BDB6}"/>
               </a:ext>
             </a:extLst>
           </p:cNvPr>
@@ -20642,14 +20313,14 @@
           </a:p>
         </p:txBody>
       </p:sp>
-      <mc:AlternateContent xmlns:mc="http://schemas.openxmlformats.org/markup-compatibility/2006" xmlns:a14="http://schemas.microsoft.com/office/drawing/2010/main">
-        <mc:Choice Requires="a14">
+      <mc:AlternateContent xmlns:mc="http://schemas.openxmlformats.org/markup-compatibility/2006">
+        <mc:Choice xmlns:a14="http://schemas.microsoft.com/office/drawing/2010/main" Requires="a14">
           <p:sp>
             <p:nvSpPr>
               <p:cNvPr id="3" name="Espaço Reservado para Conteúdo 2">
                 <a:extLst>
                   <a:ext uri="{FF2B5EF4-FFF2-40B4-BE49-F238E27FC236}">
-                    <a16:creationId xmlns:a16="http://schemas.microsoft.com/office/drawing/2014/main" xmlns="" id="{DDBA288E-BBB8-E157-840C-AA685AD7D65C}"/>
+                    <a16:creationId xmlns="" xmlns:a16="http://schemas.microsoft.com/office/drawing/2014/main" id="{DDBA288E-BBB8-E157-840C-AA685AD7D65C}"/>
                   </a:ext>
                 </a:extLst>
               </p:cNvPr>
@@ -20663,7 +20334,7 @@
             <p:spPr>
               <a:xfrm>
                 <a:off x="838200" y="1840864"/>
-                <a:ext cx="11353800" cy="5032375"/>
+                <a:ext cx="11240729" cy="5032375"/>
               </a:xfrm>
             </p:spPr>
             <p:txBody>
@@ -21291,7 +20962,15 @@
                 </a14:m>
                 <a:r>
                   <a:rPr lang="pt-BR" dirty="0"/>
-                  <a:t> são matrizes contendendo em cada linha os vetores </a:t>
+                  <a:t> são matrizes </a:t>
+                </a:r>
+                <a:r>
+                  <a:rPr lang="pt-BR" dirty="0" smtClean="0"/>
+                  <a:t>contendo </a:t>
+                </a:r>
+                <a:r>
+                  <a:rPr lang="pt-BR" dirty="0"/>
+                  <a:t>em cada linha os vetores </a:t>
                 </a:r>
                 <a14:m>
                   <m:oMath xmlns:m="http://schemas.openxmlformats.org/officeDocument/2006/math">
@@ -21432,7 +21111,7 @@
             </p:txBody>
           </p:sp>
         </mc:Choice>
-        <mc:Fallback xmlns="">
+        <mc:Fallback>
           <p:sp>
             <p:nvSpPr>
               <p:cNvPr id="3" name="Espaço Reservado para Conteúdo 2">
@@ -21452,12 +21131,12 @@
             <p:spPr>
               <a:xfrm>
                 <a:off x="838200" y="1840864"/>
-                <a:ext cx="11353800" cy="5032375"/>
+                <a:ext cx="11240729" cy="5032375"/>
               </a:xfrm>
               <a:blipFill rotWithShape="0">
                 <a:blip r:embed="rId3"/>
                 <a:stretch>
-                  <a:fillRect l="-1128" r="-1557" b="-848"/>
+                  <a:fillRect l="-1139" r="-1628" b="-848"/>
                 </a:stretch>
               </a:blipFill>
             </p:spPr>
@@ -21511,7 +21190,7 @@
           <p:cNvPr id="2" name="Título 1">
             <a:extLst>
               <a:ext uri="{FF2B5EF4-FFF2-40B4-BE49-F238E27FC236}">
-                <a16:creationId xmlns:a16="http://schemas.microsoft.com/office/drawing/2014/main" xmlns="" id="{E0F1FD81-6095-2AF0-8691-34E55B8A93B5}"/>
+                <a16:creationId xmlns="" xmlns:a16="http://schemas.microsoft.com/office/drawing/2014/main" id="{E0F1FD81-6095-2AF0-8691-34E55B8A93B5}"/>
               </a:ext>
             </a:extLst>
           </p:cNvPr>
@@ -21538,14 +21217,14 @@
           </a:p>
         </p:txBody>
       </p:sp>
-      <mc:AlternateContent xmlns:mc="http://schemas.openxmlformats.org/markup-compatibility/2006" xmlns:a14="http://schemas.microsoft.com/office/drawing/2010/main">
-        <mc:Choice Requires="a14">
+      <mc:AlternateContent xmlns:mc="http://schemas.openxmlformats.org/markup-compatibility/2006">
+        <mc:Choice xmlns:a14="http://schemas.microsoft.com/office/drawing/2010/main" Requires="a14">
           <p:sp>
             <p:nvSpPr>
               <p:cNvPr id="3" name="Espaço Reservado para Conteúdo 2">
                 <a:extLst>
                   <a:ext uri="{FF2B5EF4-FFF2-40B4-BE49-F238E27FC236}">
-                    <a16:creationId xmlns:a16="http://schemas.microsoft.com/office/drawing/2014/main" xmlns="" id="{BB734B24-DA50-860B-5D55-C33F6F451B6F}"/>
+                    <a16:creationId xmlns="" xmlns:a16="http://schemas.microsoft.com/office/drawing/2014/main" id="{BB734B24-DA50-860B-5D55-C33F6F451B6F}"/>
                   </a:ext>
                 </a:extLst>
               </p:cNvPr>
@@ -21590,7 +21269,31 @@
                       <a:schemeClr val="tx1"/>
                     </a:solidFill>
                   </a:rPr>
-                  <a:t>, o classificador atribui ao exemplo de entrada, </a:t>
+                  <a:t>, o </a:t>
+                </a:r>
+                <a:r>
+                  <a:rPr lang="pt-BR" dirty="0" err="1" smtClean="0">
+                    <a:solidFill>
+                      <a:schemeClr val="tx1"/>
+                    </a:solidFill>
+                  </a:rPr>
+                  <a:t>regressor</a:t>
+                </a:r>
+                <a:r>
+                  <a:rPr lang="pt-BR" dirty="0" smtClean="0">
+                    <a:solidFill>
+                      <a:schemeClr val="tx1"/>
+                    </a:solidFill>
+                  </a:rPr>
+                  <a:t> atribui </a:t>
+                </a:r>
+                <a:r>
+                  <a:rPr lang="pt-BR" dirty="0">
+                    <a:solidFill>
+                      <a:schemeClr val="tx1"/>
+                    </a:solidFill>
+                  </a:rPr>
+                  <a:t>ao exemplo de entrada, </a:t>
                 </a:r>
                 <a14:m>
                   <m:oMath xmlns:m="http://schemas.openxmlformats.org/officeDocument/2006/math">
@@ -21692,7 +21395,15 @@
                       <a:schemeClr val="tx1"/>
                     </a:solidFill>
                   </a:rPr>
-                  <a:t>, da função hipótese com maior valor:</a:t>
+                  <a:t>, da função hipótese com maior </a:t>
+                </a:r>
+                <a:r>
+                  <a:rPr lang="pt-BR" dirty="0" smtClean="0">
+                    <a:solidFill>
+                      <a:schemeClr val="tx1"/>
+                    </a:solidFill>
+                  </a:rPr>
+                  <a:t>valor</a:t>
                 </a:r>
                 <a:endParaRPr lang="pt-BR" sz="1600" dirty="0">
                   <a:solidFill>
@@ -22044,13 +21755,13 @@
             </p:txBody>
           </p:sp>
         </mc:Choice>
-        <mc:Fallback xmlns="">
+        <mc:Fallback>
           <p:sp>
             <p:nvSpPr>
               <p:cNvPr id="3" name="Espaço Reservado para Conteúdo 2">
                 <a:extLst>
                   <a:ext uri="{FF2B5EF4-FFF2-40B4-BE49-F238E27FC236}">
-                    <a16:creationId xmlns:a16="http://schemas.microsoft.com/office/drawing/2014/main" id="{BB734B24-DA50-860B-5D55-C33F6F451B6F}"/>
+                    <a16:creationId xmlns="" xmlns:a16="http://schemas.microsoft.com/office/drawing/2014/main" xmlns:a14="http://schemas.microsoft.com/office/drawing/2010/main" id="{BB734B24-DA50-860B-5D55-C33F6F451B6F}"/>
                   </a:ext>
                 </a:extLst>
               </p:cNvPr>
@@ -22066,10 +21777,10 @@
                 <a:off x="6096000" y="1825624"/>
                 <a:ext cx="5930899" cy="5032375"/>
               </a:xfrm>
-              <a:blipFill>
+              <a:blipFill rotWithShape="0">
                 <a:blip r:embed="rId3"/>
                 <a:stretch>
-                  <a:fillRect l="-1850" t="-1937" r="-719"/>
+                  <a:fillRect l="-1850" t="-1937" r="-3186"/>
                 </a:stretch>
               </a:blipFill>
             </p:spPr>
@@ -22078,7 +21789,7 @@
               <a:lstStyle/>
               <a:p>
                 <a:r>
-                  <a:rPr lang="en-US">
+                  <a:rPr lang="pt-BR">
                     <a:noFill/>
                   </a:rPr>
                   <a:t> </a:t>
@@ -22093,7 +21804,7 @@
           <p:cNvPr id="4" name="Imagem 5">
             <a:extLst>
               <a:ext uri="{FF2B5EF4-FFF2-40B4-BE49-F238E27FC236}">
-                <a16:creationId xmlns:a16="http://schemas.microsoft.com/office/drawing/2014/main" xmlns="" id="{535159CB-11DC-74B8-5C5F-D571CD018327}"/>
+                <a16:creationId xmlns="" xmlns:a16="http://schemas.microsoft.com/office/drawing/2014/main" id="{535159CB-11DC-74B8-5C5F-D571CD018327}"/>
               </a:ext>
             </a:extLst>
           </p:cNvPr>
@@ -22159,7 +21870,7 @@
           <p:cNvPr id="2" name="Título 1">
             <a:extLst>
               <a:ext uri="{FF2B5EF4-FFF2-40B4-BE49-F238E27FC236}">
-                <a16:creationId xmlns:a16="http://schemas.microsoft.com/office/drawing/2014/main" xmlns="" id="{FC175046-E9DF-FCC8-C62B-B00332089713}"/>
+                <a16:creationId xmlns="" xmlns:a16="http://schemas.microsoft.com/office/drawing/2014/main" id="{FC175046-E9DF-FCC8-C62B-B00332089713}"/>
               </a:ext>
             </a:extLst>
           </p:cNvPr>
@@ -22193,7 +21904,7 @@
               <p:cNvPr id="3" name="Espaço Reservado para Conteúdo 2">
                 <a:extLst>
                   <a:ext uri="{FF2B5EF4-FFF2-40B4-BE49-F238E27FC236}">
-                    <a16:creationId xmlns:a16="http://schemas.microsoft.com/office/drawing/2014/main" xmlns="" id="{24721BB7-DBA3-D8BF-7F98-ED91BD59DAEC}"/>
+                    <a16:creationId xmlns="" xmlns:a16="http://schemas.microsoft.com/office/drawing/2014/main" id="{24721BB7-DBA3-D8BF-7F98-ED91BD59DAEC}"/>
                   </a:ext>
                 </a:extLst>
               </p:cNvPr>
@@ -22501,7 +22212,7 @@
           <p:cNvPr id="6" name="Imagem 5">
             <a:extLst>
               <a:ext uri="{FF2B5EF4-FFF2-40B4-BE49-F238E27FC236}">
-                <a16:creationId xmlns:a16="http://schemas.microsoft.com/office/drawing/2014/main" xmlns="" id="{FF78CF76-EB26-3FAE-0391-E452288FA28E}"/>
+                <a16:creationId xmlns="" xmlns:a16="http://schemas.microsoft.com/office/drawing/2014/main" id="{FF78CF76-EB26-3FAE-0391-E452288FA28E}"/>
               </a:ext>
             </a:extLst>
           </p:cNvPr>
@@ -22537,7 +22248,7 @@
           <p:cNvPr id="5" name="Rectangle 2">
             <a:extLst>
               <a:ext uri="{FF2B5EF4-FFF2-40B4-BE49-F238E27FC236}">
-                <a16:creationId xmlns="" xmlns:a16="http://schemas.microsoft.com/office/drawing/2014/main" id="{0357C04D-3666-45D0-A263-597819F48D09}"/>
+                <a16:creationId xmlns:a16="http://schemas.microsoft.com/office/drawing/2014/main" xmlns="" id="{0357C04D-3666-45D0-A263-597819F48D09}"/>
               </a:ext>
             </a:extLst>
           </p:cNvPr>
@@ -22765,7 +22476,7 @@
           <p:cNvPr id="4" name="Título 1">
             <a:extLst>
               <a:ext uri="{FF2B5EF4-FFF2-40B4-BE49-F238E27FC236}">
-                <a16:creationId xmlns="" xmlns:a16="http://schemas.microsoft.com/office/drawing/2014/main" id="{32666AC8-2E17-4DB4-B0F5-60C640CCFD2E}"/>
+                <a16:creationId xmlns:a16="http://schemas.microsoft.com/office/drawing/2014/main" xmlns="" id="{32666AC8-2E17-4DB4-B0F5-60C640CCFD2E}"/>
               </a:ext>
             </a:extLst>
           </p:cNvPr>
@@ -23039,7 +22750,7 @@
           <p:cNvPr id="4" name="Picture 2" descr="Ana Barros (@anathinker) | Twitter">
             <a:extLst>
               <a:ext uri="{FF2B5EF4-FFF2-40B4-BE49-F238E27FC236}">
-                <a16:creationId xmlns="" xmlns:a16="http://schemas.microsoft.com/office/drawing/2014/main" id="{AF3F0044-4F7D-98F6-34C1-8351487DFDAA}"/>
+                <a16:creationId xmlns:a16="http://schemas.microsoft.com/office/drawing/2014/main" xmlns="" id="{AF3F0044-4F7D-98F6-34C1-8351487DFDAA}"/>
               </a:ext>
             </a:extLst>
           </p:cNvPr>
@@ -23086,7 +22797,7 @@
           <p:cNvPr id="5" name="Picture 6" descr="Analyzing Text Classification Techniques on Youtube Data">
             <a:extLst>
               <a:ext uri="{FF2B5EF4-FFF2-40B4-BE49-F238E27FC236}">
-                <a16:creationId xmlns="" xmlns:a16="http://schemas.microsoft.com/office/drawing/2014/main" id="{0E6041F8-AB14-54C0-C790-0288A3AC8FBA}"/>
+                <a16:creationId xmlns:a16="http://schemas.microsoft.com/office/drawing/2014/main" xmlns="" id="{0E6041F8-AB14-54C0-C790-0288A3AC8FBA}"/>
               </a:ext>
             </a:extLst>
           </p:cNvPr>
@@ -23131,7 +22842,7 @@
           <p:cNvPr id="6" name="Picture 2" descr="Sentiment Fig 1">
             <a:extLst>
               <a:ext uri="{FF2B5EF4-FFF2-40B4-BE49-F238E27FC236}">
-                <a16:creationId xmlns="" xmlns:a16="http://schemas.microsoft.com/office/drawing/2014/main" id="{1E7CC96F-55AB-1482-92F6-240F8E2E0D1E}"/>
+                <a16:creationId xmlns:a16="http://schemas.microsoft.com/office/drawing/2014/main" xmlns="" id="{1E7CC96F-55AB-1482-92F6-240F8E2E0D1E}"/>
               </a:ext>
             </a:extLst>
           </p:cNvPr>
@@ -23418,7 +23129,7 @@
           <p:cNvPr id="7" name="Picture 2" descr="Ana Barros (@anathinker) | Twitter">
             <a:extLst>
               <a:ext uri="{FF2B5EF4-FFF2-40B4-BE49-F238E27FC236}">
-                <a16:creationId xmlns="" xmlns:a16="http://schemas.microsoft.com/office/drawing/2014/main" id="{A2D479C7-0684-420F-2CCD-64C3DB79FDAB}"/>
+                <a16:creationId xmlns:a16="http://schemas.microsoft.com/office/drawing/2014/main" xmlns="" id="{A2D479C7-0684-420F-2CCD-64C3DB79FDAB}"/>
               </a:ext>
             </a:extLst>
           </p:cNvPr>
@@ -23465,7 +23176,7 @@
           <p:cNvPr id="8" name="Picture 6" descr="Analyzing Text Classification Techniques on Youtube Data">
             <a:extLst>
               <a:ext uri="{FF2B5EF4-FFF2-40B4-BE49-F238E27FC236}">
-                <a16:creationId xmlns="" xmlns:a16="http://schemas.microsoft.com/office/drawing/2014/main" id="{A59F8A2C-ACDF-09C7-B528-9064CEF3B848}"/>
+                <a16:creationId xmlns:a16="http://schemas.microsoft.com/office/drawing/2014/main" xmlns="" id="{A59F8A2C-ACDF-09C7-B528-9064CEF3B848}"/>
               </a:ext>
             </a:extLst>
           </p:cNvPr>
@@ -23510,7 +23221,7 @@
           <p:cNvPr id="9" name="Picture 2" descr="Sentiment Fig 1">
             <a:extLst>
               <a:ext uri="{FF2B5EF4-FFF2-40B4-BE49-F238E27FC236}">
-                <a16:creationId xmlns="" xmlns:a16="http://schemas.microsoft.com/office/drawing/2014/main" id="{E178FF16-CC3F-C34B-6C8B-874BC4FA61A4}"/>
+                <a16:creationId xmlns:a16="http://schemas.microsoft.com/office/drawing/2014/main" xmlns="" id="{E178FF16-CC3F-C34B-6C8B-874BC4FA61A4}"/>
               </a:ext>
             </a:extLst>
           </p:cNvPr>
@@ -23587,7 +23298,7 @@
           <p:cNvPr id="2" name="Título 1">
             <a:extLst>
               <a:ext uri="{FF2B5EF4-FFF2-40B4-BE49-F238E27FC236}">
-                <a16:creationId xmlns="" xmlns:a16="http://schemas.microsoft.com/office/drawing/2014/main" id="{95206997-C98C-FF52-62A1-725EEA7A8A7E}"/>
+                <a16:creationId xmlns:a16="http://schemas.microsoft.com/office/drawing/2014/main" xmlns="" id="{95206997-C98C-FF52-62A1-725EEA7A8A7E}"/>
               </a:ext>
             </a:extLst>
           </p:cNvPr>
@@ -23617,7 +23328,7 @@
               <p:cNvPr id="3" name="Espaço Reservado para Conteúdo 2">
                 <a:extLst>
                   <a:ext uri="{FF2B5EF4-FFF2-40B4-BE49-F238E27FC236}">
-                    <a16:creationId xmlns="" xmlns:a16="http://schemas.microsoft.com/office/drawing/2014/main" id="{50B99F56-FF18-D044-7799-0502D4F6A5FB}"/>
+                    <a16:creationId xmlns:a16="http://schemas.microsoft.com/office/drawing/2014/main" xmlns="" id="{50B99F56-FF18-D044-7799-0502D4F6A5FB}"/>
                   </a:ext>
                 </a:extLst>
               </p:cNvPr>
@@ -24202,7 +23913,7 @@
           <p:cNvPr id="2" name="Título 1">
             <a:extLst>
               <a:ext uri="{FF2B5EF4-FFF2-40B4-BE49-F238E27FC236}">
-                <a16:creationId xmlns="" xmlns:a16="http://schemas.microsoft.com/office/drawing/2014/main" id="{40D4148F-5E93-6FF0-6B66-AC9E3B82640A}"/>
+                <a16:creationId xmlns:a16="http://schemas.microsoft.com/office/drawing/2014/main" xmlns="" id="{40D4148F-5E93-6FF0-6B66-AC9E3B82640A}"/>
               </a:ext>
             </a:extLst>
           </p:cNvPr>
@@ -24232,7 +23943,7 @@
               <p:cNvPr id="3" name="Espaço Reservado para Conteúdo 2">
                 <a:extLst>
                   <a:ext uri="{FF2B5EF4-FFF2-40B4-BE49-F238E27FC236}">
-                    <a16:creationId xmlns="" xmlns:a16="http://schemas.microsoft.com/office/drawing/2014/main" id="{A4787C4F-F235-6888-5AFF-2CB1361FF6FD}"/>
+                    <a16:creationId xmlns:a16="http://schemas.microsoft.com/office/drawing/2014/main" xmlns="" id="{A4787C4F-F235-6888-5AFF-2CB1361FF6FD}"/>
                   </a:ext>
                 </a:extLst>
               </p:cNvPr>
@@ -25989,7 +25700,7 @@
           <p:cNvPr id="21" name="Mais 7">
             <a:extLst>
               <a:ext uri="{FF2B5EF4-FFF2-40B4-BE49-F238E27FC236}">
-                <a16:creationId xmlns="" xmlns:a16="http://schemas.microsoft.com/office/drawing/2014/main" id="{7B31CAF2-5F3C-E55A-EC75-167BCE74F1F7}"/>
+                <a16:creationId xmlns:a16="http://schemas.microsoft.com/office/drawing/2014/main" xmlns="" id="{7B31CAF2-5F3C-E55A-EC75-167BCE74F1F7}"/>
               </a:ext>
             </a:extLst>
           </p:cNvPr>
@@ -26073,7 +25784,7 @@
           <p:cNvPr id="2" name="Título 1">
             <a:extLst>
               <a:ext uri="{FF2B5EF4-FFF2-40B4-BE49-F238E27FC236}">
-                <a16:creationId xmlns="" xmlns:a16="http://schemas.microsoft.com/office/drawing/2014/main" id="{F625D040-A3FE-41E3-3BD0-3C0548CFEAD3}"/>
+                <a16:creationId xmlns:a16="http://schemas.microsoft.com/office/drawing/2014/main" xmlns="" id="{F625D040-A3FE-41E3-3BD0-3C0548CFEAD3}"/>
               </a:ext>
             </a:extLst>
           </p:cNvPr>
@@ -26103,7 +25814,7 @@
               <p:cNvPr id="3" name="Espaço Reservado para Conteúdo 2">
                 <a:extLst>
                   <a:ext uri="{FF2B5EF4-FFF2-40B4-BE49-F238E27FC236}">
-                    <a16:creationId xmlns="" xmlns:a16="http://schemas.microsoft.com/office/drawing/2014/main" id="{3BAFA38F-B924-7049-765D-660ED8C4845B}"/>
+                    <a16:creationId xmlns:a16="http://schemas.microsoft.com/office/drawing/2014/main" xmlns="" id="{3BAFA38F-B924-7049-765D-660ED8C4845B}"/>
                   </a:ext>
                 </a:extLst>
               </p:cNvPr>
@@ -26868,7 +26579,7 @@
           <p:cNvPr id="2" name="Título 1">
             <a:extLst>
               <a:ext uri="{FF2B5EF4-FFF2-40B4-BE49-F238E27FC236}">
-                <a16:creationId xmlns="" xmlns:a16="http://schemas.microsoft.com/office/drawing/2014/main" id="{685EDE22-7739-3353-3DBC-8480197DC616}"/>
+                <a16:creationId xmlns:a16="http://schemas.microsoft.com/office/drawing/2014/main" xmlns="" id="{685EDE22-7739-3353-3DBC-8480197DC616}"/>
               </a:ext>
             </a:extLst>
           </p:cNvPr>
@@ -26898,7 +26609,7 @@
               <p:cNvPr id="3" name="Espaço Reservado para Conteúdo 2">
                 <a:extLst>
                   <a:ext uri="{FF2B5EF4-FFF2-40B4-BE49-F238E27FC236}">
-                    <a16:creationId xmlns="" xmlns:a16="http://schemas.microsoft.com/office/drawing/2014/main" id="{2145CEE8-2FB2-6EEA-841B-CC93323A97A6}"/>
+                    <a16:creationId xmlns:a16="http://schemas.microsoft.com/office/drawing/2014/main" xmlns="" id="{2145CEE8-2FB2-6EEA-841B-CC93323A97A6}"/>
                   </a:ext>
                 </a:extLst>
               </p:cNvPr>

--- a/slides/T320_Classificação (Parte IV).pptx
+++ b/slides/T320_Classificação (Parte IV).pptx
@@ -847,8 +847,8 @@
         </p:nvSpPr>
         <p:spPr/>
       </p:sp>
-      <mc:AlternateContent xmlns:mc="http://schemas.openxmlformats.org/markup-compatibility/2006">
-        <mc:Choice xmlns:a14="http://schemas.microsoft.com/office/drawing/2010/main" Requires="a14">
+      <mc:AlternateContent xmlns:mc="http://schemas.openxmlformats.org/markup-compatibility/2006" xmlns:a14="http://schemas.microsoft.com/office/drawing/2010/main">
+        <mc:Choice Requires="a14">
           <p:sp>
             <p:nvSpPr>
               <p:cNvPr id="3" name="Espaço Reservado para Anotações 2"/>
@@ -942,7 +942,7 @@
             </p:txBody>
           </p:sp>
         </mc:Choice>
-        <mc:Fallback>
+        <mc:Fallback xmlns="">
           <p:sp>
             <p:nvSpPr>
               <p:cNvPr id="3" name="Espaço Reservado para Anotações 2"/>
@@ -6065,7 +6065,7 @@
           <p:cNvPr id="2" name="Título 1">
             <a:extLst>
               <a:ext uri="{FF2B5EF4-FFF2-40B4-BE49-F238E27FC236}">
-                <a16:creationId xmlns:a16="http://schemas.microsoft.com/office/drawing/2014/main" xmlns="" id="{1DB9B4FF-B06E-403C-A326-BDC64D8FF94E}"/>
+                <a16:creationId xmlns="" xmlns:a16="http://schemas.microsoft.com/office/drawing/2014/main" id="{1DB9B4FF-B06E-403C-A326-BDC64D8FF94E}"/>
               </a:ext>
             </a:extLst>
           </p:cNvPr>
@@ -6102,7 +6102,7 @@
           <p:cNvPr id="3" name="Subtítulo 2">
             <a:extLst>
               <a:ext uri="{FF2B5EF4-FFF2-40B4-BE49-F238E27FC236}">
-                <a16:creationId xmlns:a16="http://schemas.microsoft.com/office/drawing/2014/main" xmlns="" id="{247BDFCE-746E-45BF-A319-4733D58D1632}"/>
+                <a16:creationId xmlns="" xmlns:a16="http://schemas.microsoft.com/office/drawing/2014/main" id="{247BDFCE-746E-45BF-A319-4733D58D1632}"/>
               </a:ext>
             </a:extLst>
           </p:cNvPr>
@@ -6172,7 +6172,7 @@
           <p:cNvPr id="4" name="Espaço Reservado para Data 3">
             <a:extLst>
               <a:ext uri="{FF2B5EF4-FFF2-40B4-BE49-F238E27FC236}">
-                <a16:creationId xmlns:a16="http://schemas.microsoft.com/office/drawing/2014/main" xmlns="" id="{9EDE2778-5372-4104-B96D-968184DA8288}"/>
+                <a16:creationId xmlns="" xmlns:a16="http://schemas.microsoft.com/office/drawing/2014/main" id="{9EDE2778-5372-4104-B96D-968184DA8288}"/>
               </a:ext>
             </a:extLst>
           </p:cNvPr>
@@ -6201,7 +6201,7 @@
           <p:cNvPr id="5" name="Espaço Reservado para Rodapé 4">
             <a:extLst>
               <a:ext uri="{FF2B5EF4-FFF2-40B4-BE49-F238E27FC236}">
-                <a16:creationId xmlns:a16="http://schemas.microsoft.com/office/drawing/2014/main" xmlns="" id="{C1DD0F41-C861-4051-988D-3024A37A4B93}"/>
+                <a16:creationId xmlns="" xmlns:a16="http://schemas.microsoft.com/office/drawing/2014/main" id="{C1DD0F41-C861-4051-988D-3024A37A4B93}"/>
               </a:ext>
             </a:extLst>
           </p:cNvPr>
@@ -6226,7 +6226,7 @@
           <p:cNvPr id="6" name="Espaço Reservado para Número de Slide 5">
             <a:extLst>
               <a:ext uri="{FF2B5EF4-FFF2-40B4-BE49-F238E27FC236}">
-                <a16:creationId xmlns:a16="http://schemas.microsoft.com/office/drawing/2014/main" xmlns="" id="{07E5967E-D980-431A-A5DB-3F0C5030A81E}"/>
+                <a16:creationId xmlns="" xmlns:a16="http://schemas.microsoft.com/office/drawing/2014/main" id="{07E5967E-D980-431A-A5DB-3F0C5030A81E}"/>
               </a:ext>
             </a:extLst>
           </p:cNvPr>
@@ -6285,7 +6285,7 @@
           <p:cNvPr id="2" name="Título 1">
             <a:extLst>
               <a:ext uri="{FF2B5EF4-FFF2-40B4-BE49-F238E27FC236}">
-                <a16:creationId xmlns:a16="http://schemas.microsoft.com/office/drawing/2014/main" xmlns="" id="{9036C49F-3E68-4175-81BA-3C3FEE44308A}"/>
+                <a16:creationId xmlns="" xmlns:a16="http://schemas.microsoft.com/office/drawing/2014/main" id="{9036C49F-3E68-4175-81BA-3C3FEE44308A}"/>
               </a:ext>
             </a:extLst>
           </p:cNvPr>
@@ -6313,7 +6313,7 @@
           <p:cNvPr id="3" name="Espaço Reservado para Texto Vertical 2">
             <a:extLst>
               <a:ext uri="{FF2B5EF4-FFF2-40B4-BE49-F238E27FC236}">
-                <a16:creationId xmlns:a16="http://schemas.microsoft.com/office/drawing/2014/main" xmlns="" id="{426FA736-3DD3-4D4E-B57B-BBE1D8F7D424}"/>
+                <a16:creationId xmlns="" xmlns:a16="http://schemas.microsoft.com/office/drawing/2014/main" id="{426FA736-3DD3-4D4E-B57B-BBE1D8F7D424}"/>
               </a:ext>
             </a:extLst>
           </p:cNvPr>
@@ -6370,7 +6370,7 @@
           <p:cNvPr id="4" name="Espaço Reservado para Data 3">
             <a:extLst>
               <a:ext uri="{FF2B5EF4-FFF2-40B4-BE49-F238E27FC236}">
-                <a16:creationId xmlns:a16="http://schemas.microsoft.com/office/drawing/2014/main" xmlns="" id="{99E8855C-D8FD-48F6-B14E-861E0DE4D915}"/>
+                <a16:creationId xmlns="" xmlns:a16="http://schemas.microsoft.com/office/drawing/2014/main" id="{99E8855C-D8FD-48F6-B14E-861E0DE4D915}"/>
               </a:ext>
             </a:extLst>
           </p:cNvPr>
@@ -6399,7 +6399,7 @@
           <p:cNvPr id="5" name="Espaço Reservado para Rodapé 4">
             <a:extLst>
               <a:ext uri="{FF2B5EF4-FFF2-40B4-BE49-F238E27FC236}">
-                <a16:creationId xmlns:a16="http://schemas.microsoft.com/office/drawing/2014/main" xmlns="" id="{97C0BB88-2F21-42A5-ACFF-83DA47F2D340}"/>
+                <a16:creationId xmlns="" xmlns:a16="http://schemas.microsoft.com/office/drawing/2014/main" id="{97C0BB88-2F21-42A5-ACFF-83DA47F2D340}"/>
               </a:ext>
             </a:extLst>
           </p:cNvPr>
@@ -6424,7 +6424,7 @@
           <p:cNvPr id="6" name="Espaço Reservado para Número de Slide 5">
             <a:extLst>
               <a:ext uri="{FF2B5EF4-FFF2-40B4-BE49-F238E27FC236}">
-                <a16:creationId xmlns:a16="http://schemas.microsoft.com/office/drawing/2014/main" xmlns="" id="{6CB462B3-1F22-4C05-B4B8-7A279FB7D5E9}"/>
+                <a16:creationId xmlns="" xmlns:a16="http://schemas.microsoft.com/office/drawing/2014/main" id="{6CB462B3-1F22-4C05-B4B8-7A279FB7D5E9}"/>
               </a:ext>
             </a:extLst>
           </p:cNvPr>
@@ -6483,7 +6483,7 @@
           <p:cNvPr id="2" name="Título Vertical 1">
             <a:extLst>
               <a:ext uri="{FF2B5EF4-FFF2-40B4-BE49-F238E27FC236}">
-                <a16:creationId xmlns:a16="http://schemas.microsoft.com/office/drawing/2014/main" xmlns="" id="{EAEAB728-701C-4207-A9D5-23FF45C60502}"/>
+                <a16:creationId xmlns="" xmlns:a16="http://schemas.microsoft.com/office/drawing/2014/main" id="{EAEAB728-701C-4207-A9D5-23FF45C60502}"/>
               </a:ext>
             </a:extLst>
           </p:cNvPr>
@@ -6516,7 +6516,7 @@
           <p:cNvPr id="3" name="Espaço Reservado para Texto Vertical 2">
             <a:extLst>
               <a:ext uri="{FF2B5EF4-FFF2-40B4-BE49-F238E27FC236}">
-                <a16:creationId xmlns:a16="http://schemas.microsoft.com/office/drawing/2014/main" xmlns="" id="{BA8C8CCF-7823-480A-9A19-0F664DD17E3B}"/>
+                <a16:creationId xmlns="" xmlns:a16="http://schemas.microsoft.com/office/drawing/2014/main" id="{BA8C8CCF-7823-480A-9A19-0F664DD17E3B}"/>
               </a:ext>
             </a:extLst>
           </p:cNvPr>
@@ -6578,7 +6578,7 @@
           <p:cNvPr id="4" name="Espaço Reservado para Data 3">
             <a:extLst>
               <a:ext uri="{FF2B5EF4-FFF2-40B4-BE49-F238E27FC236}">
-                <a16:creationId xmlns:a16="http://schemas.microsoft.com/office/drawing/2014/main" xmlns="" id="{721D5734-7B1F-425D-942F-6EB73344027C}"/>
+                <a16:creationId xmlns="" xmlns:a16="http://schemas.microsoft.com/office/drawing/2014/main" id="{721D5734-7B1F-425D-942F-6EB73344027C}"/>
               </a:ext>
             </a:extLst>
           </p:cNvPr>
@@ -6607,7 +6607,7 @@
           <p:cNvPr id="5" name="Espaço Reservado para Rodapé 4">
             <a:extLst>
               <a:ext uri="{FF2B5EF4-FFF2-40B4-BE49-F238E27FC236}">
-                <a16:creationId xmlns:a16="http://schemas.microsoft.com/office/drawing/2014/main" xmlns="" id="{1E1AAEAC-F08D-45FE-89EC-B1B349A868C9}"/>
+                <a16:creationId xmlns="" xmlns:a16="http://schemas.microsoft.com/office/drawing/2014/main" id="{1E1AAEAC-F08D-45FE-89EC-B1B349A868C9}"/>
               </a:ext>
             </a:extLst>
           </p:cNvPr>
@@ -6632,7 +6632,7 @@
           <p:cNvPr id="6" name="Espaço Reservado para Número de Slide 5">
             <a:extLst>
               <a:ext uri="{FF2B5EF4-FFF2-40B4-BE49-F238E27FC236}">
-                <a16:creationId xmlns:a16="http://schemas.microsoft.com/office/drawing/2014/main" xmlns="" id="{BAA44493-9911-47B2-87A6-C2141A972BC8}"/>
+                <a16:creationId xmlns="" xmlns:a16="http://schemas.microsoft.com/office/drawing/2014/main" id="{BAA44493-9911-47B2-87A6-C2141A972BC8}"/>
               </a:ext>
             </a:extLst>
           </p:cNvPr>
@@ -6691,7 +6691,7 @@
           <p:cNvPr id="2" name="Título 1">
             <a:extLst>
               <a:ext uri="{FF2B5EF4-FFF2-40B4-BE49-F238E27FC236}">
-                <a16:creationId xmlns:a16="http://schemas.microsoft.com/office/drawing/2014/main" xmlns="" id="{71BD44A5-8F21-4626-A01D-48A1C874B1D5}"/>
+                <a16:creationId xmlns="" xmlns:a16="http://schemas.microsoft.com/office/drawing/2014/main" id="{71BD44A5-8F21-4626-A01D-48A1C874B1D5}"/>
               </a:ext>
             </a:extLst>
           </p:cNvPr>
@@ -6719,7 +6719,7 @@
           <p:cNvPr id="3" name="Espaço Reservado para Conteúdo 2">
             <a:extLst>
               <a:ext uri="{FF2B5EF4-FFF2-40B4-BE49-F238E27FC236}">
-                <a16:creationId xmlns:a16="http://schemas.microsoft.com/office/drawing/2014/main" xmlns="" id="{B79E8085-65A9-48AA-951D-71D978BFF4ED}"/>
+                <a16:creationId xmlns="" xmlns:a16="http://schemas.microsoft.com/office/drawing/2014/main" id="{B79E8085-65A9-48AA-951D-71D978BFF4ED}"/>
               </a:ext>
             </a:extLst>
           </p:cNvPr>
@@ -6776,7 +6776,7 @@
           <p:cNvPr id="4" name="Espaço Reservado para Data 3">
             <a:extLst>
               <a:ext uri="{FF2B5EF4-FFF2-40B4-BE49-F238E27FC236}">
-                <a16:creationId xmlns:a16="http://schemas.microsoft.com/office/drawing/2014/main" xmlns="" id="{F05BE1AF-51EA-425D-B188-DE7BD675009F}"/>
+                <a16:creationId xmlns="" xmlns:a16="http://schemas.microsoft.com/office/drawing/2014/main" id="{F05BE1AF-51EA-425D-B188-DE7BD675009F}"/>
               </a:ext>
             </a:extLst>
           </p:cNvPr>
@@ -6805,7 +6805,7 @@
           <p:cNvPr id="5" name="Espaço Reservado para Rodapé 4">
             <a:extLst>
               <a:ext uri="{FF2B5EF4-FFF2-40B4-BE49-F238E27FC236}">
-                <a16:creationId xmlns:a16="http://schemas.microsoft.com/office/drawing/2014/main" xmlns="" id="{121BE632-29CF-4CB9-B365-C9EF38F89BE6}"/>
+                <a16:creationId xmlns="" xmlns:a16="http://schemas.microsoft.com/office/drawing/2014/main" id="{121BE632-29CF-4CB9-B365-C9EF38F89BE6}"/>
               </a:ext>
             </a:extLst>
           </p:cNvPr>
@@ -6830,7 +6830,7 @@
           <p:cNvPr id="6" name="Espaço Reservado para Número de Slide 5">
             <a:extLst>
               <a:ext uri="{FF2B5EF4-FFF2-40B4-BE49-F238E27FC236}">
-                <a16:creationId xmlns:a16="http://schemas.microsoft.com/office/drawing/2014/main" xmlns="" id="{60CF3DD1-9AEC-4A57-B461-4E4DD86FAC18}"/>
+                <a16:creationId xmlns="" xmlns:a16="http://schemas.microsoft.com/office/drawing/2014/main" id="{60CF3DD1-9AEC-4A57-B461-4E4DD86FAC18}"/>
               </a:ext>
             </a:extLst>
           </p:cNvPr>
@@ -6889,7 +6889,7 @@
           <p:cNvPr id="2" name="Título 1">
             <a:extLst>
               <a:ext uri="{FF2B5EF4-FFF2-40B4-BE49-F238E27FC236}">
-                <a16:creationId xmlns:a16="http://schemas.microsoft.com/office/drawing/2014/main" xmlns="" id="{34AB2FF0-A4D7-4E28-991D-FF26140D5988}"/>
+                <a16:creationId xmlns="" xmlns:a16="http://schemas.microsoft.com/office/drawing/2014/main" id="{34AB2FF0-A4D7-4E28-991D-FF26140D5988}"/>
               </a:ext>
             </a:extLst>
           </p:cNvPr>
@@ -6926,7 +6926,7 @@
           <p:cNvPr id="3" name="Espaço Reservado para Texto 2">
             <a:extLst>
               <a:ext uri="{FF2B5EF4-FFF2-40B4-BE49-F238E27FC236}">
-                <a16:creationId xmlns:a16="http://schemas.microsoft.com/office/drawing/2014/main" xmlns="" id="{E2AC45B0-4145-40DB-8E61-105461170604}"/>
+                <a16:creationId xmlns="" xmlns:a16="http://schemas.microsoft.com/office/drawing/2014/main" id="{E2AC45B0-4145-40DB-8E61-105461170604}"/>
               </a:ext>
             </a:extLst>
           </p:cNvPr>
@@ -7051,7 +7051,7 @@
           <p:cNvPr id="4" name="Espaço Reservado para Data 3">
             <a:extLst>
               <a:ext uri="{FF2B5EF4-FFF2-40B4-BE49-F238E27FC236}">
-                <a16:creationId xmlns:a16="http://schemas.microsoft.com/office/drawing/2014/main" xmlns="" id="{50F1D3FB-740A-4EBA-A309-2CE71D12ECFB}"/>
+                <a16:creationId xmlns="" xmlns:a16="http://schemas.microsoft.com/office/drawing/2014/main" id="{50F1D3FB-740A-4EBA-A309-2CE71D12ECFB}"/>
               </a:ext>
             </a:extLst>
           </p:cNvPr>
@@ -7080,7 +7080,7 @@
           <p:cNvPr id="5" name="Espaço Reservado para Rodapé 4">
             <a:extLst>
               <a:ext uri="{FF2B5EF4-FFF2-40B4-BE49-F238E27FC236}">
-                <a16:creationId xmlns:a16="http://schemas.microsoft.com/office/drawing/2014/main" xmlns="" id="{BDCAB18F-8715-4465-A940-F9C193A2ACE9}"/>
+                <a16:creationId xmlns="" xmlns:a16="http://schemas.microsoft.com/office/drawing/2014/main" id="{BDCAB18F-8715-4465-A940-F9C193A2ACE9}"/>
               </a:ext>
             </a:extLst>
           </p:cNvPr>
@@ -7105,7 +7105,7 @@
           <p:cNvPr id="6" name="Espaço Reservado para Número de Slide 5">
             <a:extLst>
               <a:ext uri="{FF2B5EF4-FFF2-40B4-BE49-F238E27FC236}">
-                <a16:creationId xmlns:a16="http://schemas.microsoft.com/office/drawing/2014/main" xmlns="" id="{353466C6-8248-429F-8056-FF040BF509EB}"/>
+                <a16:creationId xmlns="" xmlns:a16="http://schemas.microsoft.com/office/drawing/2014/main" id="{353466C6-8248-429F-8056-FF040BF509EB}"/>
               </a:ext>
             </a:extLst>
           </p:cNvPr>
@@ -7164,7 +7164,7 @@
           <p:cNvPr id="2" name="Título 1">
             <a:extLst>
               <a:ext uri="{FF2B5EF4-FFF2-40B4-BE49-F238E27FC236}">
-                <a16:creationId xmlns:a16="http://schemas.microsoft.com/office/drawing/2014/main" xmlns="" id="{BC7BB9F0-F14B-4A91-B2B7-35BC47FE4DE7}"/>
+                <a16:creationId xmlns="" xmlns:a16="http://schemas.microsoft.com/office/drawing/2014/main" id="{BC7BB9F0-F14B-4A91-B2B7-35BC47FE4DE7}"/>
               </a:ext>
             </a:extLst>
           </p:cNvPr>
@@ -7192,7 +7192,7 @@
           <p:cNvPr id="3" name="Espaço Reservado para Conteúdo 2">
             <a:extLst>
               <a:ext uri="{FF2B5EF4-FFF2-40B4-BE49-F238E27FC236}">
-                <a16:creationId xmlns:a16="http://schemas.microsoft.com/office/drawing/2014/main" xmlns="" id="{EC1FC1C4-73DA-47A6-8496-B0B457F7D39A}"/>
+                <a16:creationId xmlns="" xmlns:a16="http://schemas.microsoft.com/office/drawing/2014/main" id="{EC1FC1C4-73DA-47A6-8496-B0B457F7D39A}"/>
               </a:ext>
             </a:extLst>
           </p:cNvPr>
@@ -7254,7 +7254,7 @@
           <p:cNvPr id="4" name="Espaço Reservado para Conteúdo 3">
             <a:extLst>
               <a:ext uri="{FF2B5EF4-FFF2-40B4-BE49-F238E27FC236}">
-                <a16:creationId xmlns:a16="http://schemas.microsoft.com/office/drawing/2014/main" xmlns="" id="{E92F06A8-A449-4D92-9912-76873E529B38}"/>
+                <a16:creationId xmlns="" xmlns:a16="http://schemas.microsoft.com/office/drawing/2014/main" id="{E92F06A8-A449-4D92-9912-76873E529B38}"/>
               </a:ext>
             </a:extLst>
           </p:cNvPr>
@@ -7316,7 +7316,7 @@
           <p:cNvPr id="5" name="Espaço Reservado para Data 4">
             <a:extLst>
               <a:ext uri="{FF2B5EF4-FFF2-40B4-BE49-F238E27FC236}">
-                <a16:creationId xmlns:a16="http://schemas.microsoft.com/office/drawing/2014/main" xmlns="" id="{938070A4-BC2F-4D55-BD8D-DEAF11BB9EE9}"/>
+                <a16:creationId xmlns="" xmlns:a16="http://schemas.microsoft.com/office/drawing/2014/main" id="{938070A4-BC2F-4D55-BD8D-DEAF11BB9EE9}"/>
               </a:ext>
             </a:extLst>
           </p:cNvPr>
@@ -7345,7 +7345,7 @@
           <p:cNvPr id="6" name="Espaço Reservado para Rodapé 5">
             <a:extLst>
               <a:ext uri="{FF2B5EF4-FFF2-40B4-BE49-F238E27FC236}">
-                <a16:creationId xmlns:a16="http://schemas.microsoft.com/office/drawing/2014/main" xmlns="" id="{45CC2DB8-844A-465F-BA9A-7734C80C7F43}"/>
+                <a16:creationId xmlns="" xmlns:a16="http://schemas.microsoft.com/office/drawing/2014/main" id="{45CC2DB8-844A-465F-BA9A-7734C80C7F43}"/>
               </a:ext>
             </a:extLst>
           </p:cNvPr>
@@ -7370,7 +7370,7 @@
           <p:cNvPr id="7" name="Espaço Reservado para Número de Slide 6">
             <a:extLst>
               <a:ext uri="{FF2B5EF4-FFF2-40B4-BE49-F238E27FC236}">
-                <a16:creationId xmlns:a16="http://schemas.microsoft.com/office/drawing/2014/main" xmlns="" id="{4CC606A8-097B-4040-94E0-CD8C88280D8F}"/>
+                <a16:creationId xmlns="" xmlns:a16="http://schemas.microsoft.com/office/drawing/2014/main" id="{4CC606A8-097B-4040-94E0-CD8C88280D8F}"/>
               </a:ext>
             </a:extLst>
           </p:cNvPr>
@@ -7429,7 +7429,7 @@
           <p:cNvPr id="2" name="Título 1">
             <a:extLst>
               <a:ext uri="{FF2B5EF4-FFF2-40B4-BE49-F238E27FC236}">
-                <a16:creationId xmlns:a16="http://schemas.microsoft.com/office/drawing/2014/main" xmlns="" id="{76D66686-0143-4CB6-8C09-BA326F1E7ACA}"/>
+                <a16:creationId xmlns="" xmlns:a16="http://schemas.microsoft.com/office/drawing/2014/main" id="{76D66686-0143-4CB6-8C09-BA326F1E7ACA}"/>
               </a:ext>
             </a:extLst>
           </p:cNvPr>
@@ -7462,7 +7462,7 @@
           <p:cNvPr id="3" name="Espaço Reservado para Texto 2">
             <a:extLst>
               <a:ext uri="{FF2B5EF4-FFF2-40B4-BE49-F238E27FC236}">
-                <a16:creationId xmlns:a16="http://schemas.microsoft.com/office/drawing/2014/main" xmlns="" id="{0227AB85-F59E-4BCE-B846-4FA0992C2F23}"/>
+                <a16:creationId xmlns="" xmlns:a16="http://schemas.microsoft.com/office/drawing/2014/main" id="{0227AB85-F59E-4BCE-B846-4FA0992C2F23}"/>
               </a:ext>
             </a:extLst>
           </p:cNvPr>
@@ -7533,7 +7533,7 @@
           <p:cNvPr id="4" name="Espaço Reservado para Conteúdo 3">
             <a:extLst>
               <a:ext uri="{FF2B5EF4-FFF2-40B4-BE49-F238E27FC236}">
-                <a16:creationId xmlns:a16="http://schemas.microsoft.com/office/drawing/2014/main" xmlns="" id="{3373456C-7319-4D0A-827D-D29F6B083F5D}"/>
+                <a16:creationId xmlns="" xmlns:a16="http://schemas.microsoft.com/office/drawing/2014/main" id="{3373456C-7319-4D0A-827D-D29F6B083F5D}"/>
               </a:ext>
             </a:extLst>
           </p:cNvPr>
@@ -7595,7 +7595,7 @@
           <p:cNvPr id="5" name="Espaço Reservado para Texto 4">
             <a:extLst>
               <a:ext uri="{FF2B5EF4-FFF2-40B4-BE49-F238E27FC236}">
-                <a16:creationId xmlns:a16="http://schemas.microsoft.com/office/drawing/2014/main" xmlns="" id="{4CD109D0-2E83-4262-8029-A871CEC47406}"/>
+                <a16:creationId xmlns="" xmlns:a16="http://schemas.microsoft.com/office/drawing/2014/main" id="{4CD109D0-2E83-4262-8029-A871CEC47406}"/>
               </a:ext>
             </a:extLst>
           </p:cNvPr>
@@ -7666,7 +7666,7 @@
           <p:cNvPr id="6" name="Espaço Reservado para Conteúdo 5">
             <a:extLst>
               <a:ext uri="{FF2B5EF4-FFF2-40B4-BE49-F238E27FC236}">
-                <a16:creationId xmlns:a16="http://schemas.microsoft.com/office/drawing/2014/main" xmlns="" id="{AD706E3A-CFBB-4A6C-A65F-D0360A9E74FE}"/>
+                <a16:creationId xmlns="" xmlns:a16="http://schemas.microsoft.com/office/drawing/2014/main" id="{AD706E3A-CFBB-4A6C-A65F-D0360A9E74FE}"/>
               </a:ext>
             </a:extLst>
           </p:cNvPr>
@@ -7728,7 +7728,7 @@
           <p:cNvPr id="7" name="Espaço Reservado para Data 6">
             <a:extLst>
               <a:ext uri="{FF2B5EF4-FFF2-40B4-BE49-F238E27FC236}">
-                <a16:creationId xmlns:a16="http://schemas.microsoft.com/office/drawing/2014/main" xmlns="" id="{4172C0E5-5AF0-4805-BB51-443733CD2BD5}"/>
+                <a16:creationId xmlns="" xmlns:a16="http://schemas.microsoft.com/office/drawing/2014/main" id="{4172C0E5-5AF0-4805-BB51-443733CD2BD5}"/>
               </a:ext>
             </a:extLst>
           </p:cNvPr>
@@ -7757,7 +7757,7 @@
           <p:cNvPr id="8" name="Espaço Reservado para Rodapé 7">
             <a:extLst>
               <a:ext uri="{FF2B5EF4-FFF2-40B4-BE49-F238E27FC236}">
-                <a16:creationId xmlns:a16="http://schemas.microsoft.com/office/drawing/2014/main" xmlns="" id="{0E801648-156F-497E-99CF-797DF48051E1}"/>
+                <a16:creationId xmlns="" xmlns:a16="http://schemas.microsoft.com/office/drawing/2014/main" id="{0E801648-156F-497E-99CF-797DF48051E1}"/>
               </a:ext>
             </a:extLst>
           </p:cNvPr>
@@ -7782,7 +7782,7 @@
           <p:cNvPr id="9" name="Espaço Reservado para Número de Slide 8">
             <a:extLst>
               <a:ext uri="{FF2B5EF4-FFF2-40B4-BE49-F238E27FC236}">
-                <a16:creationId xmlns:a16="http://schemas.microsoft.com/office/drawing/2014/main" xmlns="" id="{EEE23D32-80E7-4796-A137-66BF842E4B53}"/>
+                <a16:creationId xmlns="" xmlns:a16="http://schemas.microsoft.com/office/drawing/2014/main" id="{EEE23D32-80E7-4796-A137-66BF842E4B53}"/>
               </a:ext>
             </a:extLst>
           </p:cNvPr>
@@ -7841,7 +7841,7 @@
           <p:cNvPr id="2" name="Título 1">
             <a:extLst>
               <a:ext uri="{FF2B5EF4-FFF2-40B4-BE49-F238E27FC236}">
-                <a16:creationId xmlns:a16="http://schemas.microsoft.com/office/drawing/2014/main" xmlns="" id="{2BCE2379-C78F-47E1-8CFC-B846E7AF148D}"/>
+                <a16:creationId xmlns="" xmlns:a16="http://schemas.microsoft.com/office/drawing/2014/main" id="{2BCE2379-C78F-47E1-8CFC-B846E7AF148D}"/>
               </a:ext>
             </a:extLst>
           </p:cNvPr>
@@ -7869,7 +7869,7 @@
           <p:cNvPr id="3" name="Espaço Reservado para Data 2">
             <a:extLst>
               <a:ext uri="{FF2B5EF4-FFF2-40B4-BE49-F238E27FC236}">
-                <a16:creationId xmlns:a16="http://schemas.microsoft.com/office/drawing/2014/main" xmlns="" id="{342600A9-7F92-4E22-9D94-E4717252A817}"/>
+                <a16:creationId xmlns="" xmlns:a16="http://schemas.microsoft.com/office/drawing/2014/main" id="{342600A9-7F92-4E22-9D94-E4717252A817}"/>
               </a:ext>
             </a:extLst>
           </p:cNvPr>
@@ -7898,7 +7898,7 @@
           <p:cNvPr id="4" name="Espaço Reservado para Rodapé 3">
             <a:extLst>
               <a:ext uri="{FF2B5EF4-FFF2-40B4-BE49-F238E27FC236}">
-                <a16:creationId xmlns:a16="http://schemas.microsoft.com/office/drawing/2014/main" xmlns="" id="{192E6BED-F546-40CC-A2DF-99CBA853654E}"/>
+                <a16:creationId xmlns="" xmlns:a16="http://schemas.microsoft.com/office/drawing/2014/main" id="{192E6BED-F546-40CC-A2DF-99CBA853654E}"/>
               </a:ext>
             </a:extLst>
           </p:cNvPr>
@@ -7923,7 +7923,7 @@
           <p:cNvPr id="5" name="Espaço Reservado para Número de Slide 4">
             <a:extLst>
               <a:ext uri="{FF2B5EF4-FFF2-40B4-BE49-F238E27FC236}">
-                <a16:creationId xmlns:a16="http://schemas.microsoft.com/office/drawing/2014/main" xmlns="" id="{6091CC40-A8C4-4063-80EB-CC5099621678}"/>
+                <a16:creationId xmlns="" xmlns:a16="http://schemas.microsoft.com/office/drawing/2014/main" id="{6091CC40-A8C4-4063-80EB-CC5099621678}"/>
               </a:ext>
             </a:extLst>
           </p:cNvPr>
@@ -7982,7 +7982,7 @@
           <p:cNvPr id="2" name="Espaço Reservado para Data 1">
             <a:extLst>
               <a:ext uri="{FF2B5EF4-FFF2-40B4-BE49-F238E27FC236}">
-                <a16:creationId xmlns:a16="http://schemas.microsoft.com/office/drawing/2014/main" xmlns="" id="{DD19515C-212C-4EAE-84A3-8FF4BC844F1B}"/>
+                <a16:creationId xmlns="" xmlns:a16="http://schemas.microsoft.com/office/drawing/2014/main" id="{DD19515C-212C-4EAE-84A3-8FF4BC844F1B}"/>
               </a:ext>
             </a:extLst>
           </p:cNvPr>
@@ -8011,7 +8011,7 @@
           <p:cNvPr id="3" name="Espaço Reservado para Rodapé 2">
             <a:extLst>
               <a:ext uri="{FF2B5EF4-FFF2-40B4-BE49-F238E27FC236}">
-                <a16:creationId xmlns:a16="http://schemas.microsoft.com/office/drawing/2014/main" xmlns="" id="{94D3D120-B3E8-4C96-861D-7A4F12F49B3A}"/>
+                <a16:creationId xmlns="" xmlns:a16="http://schemas.microsoft.com/office/drawing/2014/main" id="{94D3D120-B3E8-4C96-861D-7A4F12F49B3A}"/>
               </a:ext>
             </a:extLst>
           </p:cNvPr>
@@ -8036,7 +8036,7 @@
           <p:cNvPr id="4" name="Espaço Reservado para Número de Slide 3">
             <a:extLst>
               <a:ext uri="{FF2B5EF4-FFF2-40B4-BE49-F238E27FC236}">
-                <a16:creationId xmlns:a16="http://schemas.microsoft.com/office/drawing/2014/main" xmlns="" id="{42E49B68-FA1B-468B-9F17-D5C09243D454}"/>
+                <a16:creationId xmlns="" xmlns:a16="http://schemas.microsoft.com/office/drawing/2014/main" id="{42E49B68-FA1B-468B-9F17-D5C09243D454}"/>
               </a:ext>
             </a:extLst>
           </p:cNvPr>
@@ -8095,7 +8095,7 @@
           <p:cNvPr id="2" name="Título 1">
             <a:extLst>
               <a:ext uri="{FF2B5EF4-FFF2-40B4-BE49-F238E27FC236}">
-                <a16:creationId xmlns:a16="http://schemas.microsoft.com/office/drawing/2014/main" xmlns="" id="{1C17BCBE-A897-4319-85EC-D87909C24980}"/>
+                <a16:creationId xmlns="" xmlns:a16="http://schemas.microsoft.com/office/drawing/2014/main" id="{1C17BCBE-A897-4319-85EC-D87909C24980}"/>
               </a:ext>
             </a:extLst>
           </p:cNvPr>
@@ -8132,7 +8132,7 @@
           <p:cNvPr id="3" name="Espaço Reservado para Conteúdo 2">
             <a:extLst>
               <a:ext uri="{FF2B5EF4-FFF2-40B4-BE49-F238E27FC236}">
-                <a16:creationId xmlns:a16="http://schemas.microsoft.com/office/drawing/2014/main" xmlns="" id="{4226F885-0204-4913-868B-4B8B82576F17}"/>
+                <a16:creationId xmlns="" xmlns:a16="http://schemas.microsoft.com/office/drawing/2014/main" id="{4226F885-0204-4913-868B-4B8B82576F17}"/>
               </a:ext>
             </a:extLst>
           </p:cNvPr>
@@ -8222,7 +8222,7 @@
           <p:cNvPr id="4" name="Espaço Reservado para Texto 3">
             <a:extLst>
               <a:ext uri="{FF2B5EF4-FFF2-40B4-BE49-F238E27FC236}">
-                <a16:creationId xmlns:a16="http://schemas.microsoft.com/office/drawing/2014/main" xmlns="" id="{00F9F784-A858-441B-8AB5-697098141751}"/>
+                <a16:creationId xmlns="" xmlns:a16="http://schemas.microsoft.com/office/drawing/2014/main" id="{00F9F784-A858-441B-8AB5-697098141751}"/>
               </a:ext>
             </a:extLst>
           </p:cNvPr>
@@ -8293,7 +8293,7 @@
           <p:cNvPr id="5" name="Espaço Reservado para Data 4">
             <a:extLst>
               <a:ext uri="{FF2B5EF4-FFF2-40B4-BE49-F238E27FC236}">
-                <a16:creationId xmlns:a16="http://schemas.microsoft.com/office/drawing/2014/main" xmlns="" id="{A4DC363A-5000-472E-8B17-02E7DCB8840A}"/>
+                <a16:creationId xmlns="" xmlns:a16="http://schemas.microsoft.com/office/drawing/2014/main" id="{A4DC363A-5000-472E-8B17-02E7DCB8840A}"/>
               </a:ext>
             </a:extLst>
           </p:cNvPr>
@@ -8322,7 +8322,7 @@
           <p:cNvPr id="6" name="Espaço Reservado para Rodapé 5">
             <a:extLst>
               <a:ext uri="{FF2B5EF4-FFF2-40B4-BE49-F238E27FC236}">
-                <a16:creationId xmlns:a16="http://schemas.microsoft.com/office/drawing/2014/main" xmlns="" id="{5548425D-2C21-4C56-BAD4-662978775C28}"/>
+                <a16:creationId xmlns="" xmlns:a16="http://schemas.microsoft.com/office/drawing/2014/main" id="{5548425D-2C21-4C56-BAD4-662978775C28}"/>
               </a:ext>
             </a:extLst>
           </p:cNvPr>
@@ -8347,7 +8347,7 @@
           <p:cNvPr id="7" name="Espaço Reservado para Número de Slide 6">
             <a:extLst>
               <a:ext uri="{FF2B5EF4-FFF2-40B4-BE49-F238E27FC236}">
-                <a16:creationId xmlns:a16="http://schemas.microsoft.com/office/drawing/2014/main" xmlns="" id="{C63E9726-E64C-42B2-AE8A-8C235A956B48}"/>
+                <a16:creationId xmlns="" xmlns:a16="http://schemas.microsoft.com/office/drawing/2014/main" id="{C63E9726-E64C-42B2-AE8A-8C235A956B48}"/>
               </a:ext>
             </a:extLst>
           </p:cNvPr>
@@ -8406,7 +8406,7 @@
           <p:cNvPr id="2" name="Título 1">
             <a:extLst>
               <a:ext uri="{FF2B5EF4-FFF2-40B4-BE49-F238E27FC236}">
-                <a16:creationId xmlns:a16="http://schemas.microsoft.com/office/drawing/2014/main" xmlns="" id="{11086A78-3E74-450C-96A6-CA8AC37AF772}"/>
+                <a16:creationId xmlns="" xmlns:a16="http://schemas.microsoft.com/office/drawing/2014/main" id="{11086A78-3E74-450C-96A6-CA8AC37AF772}"/>
               </a:ext>
             </a:extLst>
           </p:cNvPr>
@@ -8443,7 +8443,7 @@
           <p:cNvPr id="3" name="Espaço Reservado para Imagem 2">
             <a:extLst>
               <a:ext uri="{FF2B5EF4-FFF2-40B4-BE49-F238E27FC236}">
-                <a16:creationId xmlns:a16="http://schemas.microsoft.com/office/drawing/2014/main" xmlns="" id="{5F5B7312-975A-4DBC-9B2F-3652ADA006FD}"/>
+                <a16:creationId xmlns="" xmlns:a16="http://schemas.microsoft.com/office/drawing/2014/main" id="{5F5B7312-975A-4DBC-9B2F-3652ADA006FD}"/>
               </a:ext>
             </a:extLst>
           </p:cNvPr>
@@ -8510,7 +8510,7 @@
           <p:cNvPr id="4" name="Espaço Reservado para Texto 3">
             <a:extLst>
               <a:ext uri="{FF2B5EF4-FFF2-40B4-BE49-F238E27FC236}">
-                <a16:creationId xmlns:a16="http://schemas.microsoft.com/office/drawing/2014/main" xmlns="" id="{AAF805F5-1DFF-41C6-944C-7D79FE0D0963}"/>
+                <a16:creationId xmlns="" xmlns:a16="http://schemas.microsoft.com/office/drawing/2014/main" id="{AAF805F5-1DFF-41C6-944C-7D79FE0D0963}"/>
               </a:ext>
             </a:extLst>
           </p:cNvPr>
@@ -8581,7 +8581,7 @@
           <p:cNvPr id="5" name="Espaço Reservado para Data 4">
             <a:extLst>
               <a:ext uri="{FF2B5EF4-FFF2-40B4-BE49-F238E27FC236}">
-                <a16:creationId xmlns:a16="http://schemas.microsoft.com/office/drawing/2014/main" xmlns="" id="{02113D81-8665-4516-BD81-C6A1F254EECD}"/>
+                <a16:creationId xmlns="" xmlns:a16="http://schemas.microsoft.com/office/drawing/2014/main" id="{02113D81-8665-4516-BD81-C6A1F254EECD}"/>
               </a:ext>
             </a:extLst>
           </p:cNvPr>
@@ -8610,7 +8610,7 @@
           <p:cNvPr id="6" name="Espaço Reservado para Rodapé 5">
             <a:extLst>
               <a:ext uri="{FF2B5EF4-FFF2-40B4-BE49-F238E27FC236}">
-                <a16:creationId xmlns:a16="http://schemas.microsoft.com/office/drawing/2014/main" xmlns="" id="{2B00C88B-FF32-40AA-A187-727D96FD7862}"/>
+                <a16:creationId xmlns="" xmlns:a16="http://schemas.microsoft.com/office/drawing/2014/main" id="{2B00C88B-FF32-40AA-A187-727D96FD7862}"/>
               </a:ext>
             </a:extLst>
           </p:cNvPr>
@@ -8635,7 +8635,7 @@
           <p:cNvPr id="7" name="Espaço Reservado para Número de Slide 6">
             <a:extLst>
               <a:ext uri="{FF2B5EF4-FFF2-40B4-BE49-F238E27FC236}">
-                <a16:creationId xmlns:a16="http://schemas.microsoft.com/office/drawing/2014/main" xmlns="" id="{A04D1A2D-69F7-4B8F-A730-BC26DC340BA6}"/>
+                <a16:creationId xmlns="" xmlns:a16="http://schemas.microsoft.com/office/drawing/2014/main" id="{A04D1A2D-69F7-4B8F-A730-BC26DC340BA6}"/>
               </a:ext>
             </a:extLst>
           </p:cNvPr>
@@ -8699,7 +8699,7 @@
           <p:cNvPr id="2" name="Espaço Reservado para Título 1">
             <a:extLst>
               <a:ext uri="{FF2B5EF4-FFF2-40B4-BE49-F238E27FC236}">
-                <a16:creationId xmlns:a16="http://schemas.microsoft.com/office/drawing/2014/main" xmlns="" id="{E69A0273-1966-4A1B-9370-4C1CE5036371}"/>
+                <a16:creationId xmlns="" xmlns:a16="http://schemas.microsoft.com/office/drawing/2014/main" id="{E69A0273-1966-4A1B-9370-4C1CE5036371}"/>
               </a:ext>
             </a:extLst>
           </p:cNvPr>
@@ -8737,7 +8737,7 @@
           <p:cNvPr id="3" name="Espaço Reservado para Texto 2">
             <a:extLst>
               <a:ext uri="{FF2B5EF4-FFF2-40B4-BE49-F238E27FC236}">
-                <a16:creationId xmlns:a16="http://schemas.microsoft.com/office/drawing/2014/main" xmlns="" id="{3B9CF87A-0448-49A7-AB25-EBC1D56A40EF}"/>
+                <a16:creationId xmlns="" xmlns:a16="http://schemas.microsoft.com/office/drawing/2014/main" id="{3B9CF87A-0448-49A7-AB25-EBC1D56A40EF}"/>
               </a:ext>
             </a:extLst>
           </p:cNvPr>
@@ -8804,7 +8804,7 @@
           <p:cNvPr id="4" name="Espaço Reservado para Data 3">
             <a:extLst>
               <a:ext uri="{FF2B5EF4-FFF2-40B4-BE49-F238E27FC236}">
-                <a16:creationId xmlns:a16="http://schemas.microsoft.com/office/drawing/2014/main" xmlns="" id="{2EF7B1F2-BB5A-44D0-816D-16AD2C71430E}"/>
+                <a16:creationId xmlns="" xmlns:a16="http://schemas.microsoft.com/office/drawing/2014/main" id="{2EF7B1F2-BB5A-44D0-816D-16AD2C71430E}"/>
               </a:ext>
             </a:extLst>
           </p:cNvPr>
@@ -8851,7 +8851,7 @@
           <p:cNvPr id="5" name="Espaço Reservado para Rodapé 4">
             <a:extLst>
               <a:ext uri="{FF2B5EF4-FFF2-40B4-BE49-F238E27FC236}">
-                <a16:creationId xmlns:a16="http://schemas.microsoft.com/office/drawing/2014/main" xmlns="" id="{C703F94C-2CC8-4DAA-BC35-14FC3E841DCD}"/>
+                <a16:creationId xmlns="" xmlns:a16="http://schemas.microsoft.com/office/drawing/2014/main" id="{C703F94C-2CC8-4DAA-BC35-14FC3E841DCD}"/>
               </a:ext>
             </a:extLst>
           </p:cNvPr>
@@ -8894,7 +8894,7 @@
           <p:cNvPr id="6" name="Espaço Reservado para Número de Slide 5">
             <a:extLst>
               <a:ext uri="{FF2B5EF4-FFF2-40B4-BE49-F238E27FC236}">
-                <a16:creationId xmlns:a16="http://schemas.microsoft.com/office/drawing/2014/main" xmlns="" id="{64051336-7048-457A-8B61-D94291D71648}"/>
+                <a16:creationId xmlns="" xmlns:a16="http://schemas.microsoft.com/office/drawing/2014/main" id="{64051336-7048-457A-8B61-D94291D71648}"/>
               </a:ext>
             </a:extLst>
           </p:cNvPr>
@@ -9262,7 +9262,7 @@
           <p:cNvPr id="2" name="Título 1">
             <a:extLst>
               <a:ext uri="{FF2B5EF4-FFF2-40B4-BE49-F238E27FC236}">
-                <a16:creationId xmlns:a16="http://schemas.microsoft.com/office/drawing/2014/main" xmlns="" id="{32666AC8-2E17-4DB4-B0F5-60C640CCFD2E}"/>
+                <a16:creationId xmlns="" xmlns:a16="http://schemas.microsoft.com/office/drawing/2014/main" id="{32666AC8-2E17-4DB4-B0F5-60C640CCFD2E}"/>
               </a:ext>
             </a:extLst>
           </p:cNvPr>
@@ -9308,7 +9308,7 @@
           <p:cNvPr id="4" name="CaixaDeTexto 3">
             <a:extLst>
               <a:ext uri="{FF2B5EF4-FFF2-40B4-BE49-F238E27FC236}">
-                <a16:creationId xmlns:a16="http://schemas.microsoft.com/office/drawing/2014/main" xmlns="" id="{430EB894-B7D4-434C-9D1A-A14094D9BEEC}"/>
+                <a16:creationId xmlns="" xmlns:a16="http://schemas.microsoft.com/office/drawing/2014/main" id="{430EB894-B7D4-434C-9D1A-A14094D9BEEC}"/>
               </a:ext>
             </a:extLst>
           </p:cNvPr>
@@ -9349,7 +9349,7 @@
           <p:cNvPr id="1026" name="Picture 2" descr="Logo">
             <a:extLst>
               <a:ext uri="{FF2B5EF4-FFF2-40B4-BE49-F238E27FC236}">
-                <a16:creationId xmlns:a16="http://schemas.microsoft.com/office/drawing/2014/main" xmlns="" id="{3F2642E0-4F6A-4196-8F58-E77D36E9A33F}"/>
+                <a16:creationId xmlns="" xmlns:a16="http://schemas.microsoft.com/office/drawing/2014/main" id="{3F2642E0-4F6A-4196-8F58-E77D36E9A33F}"/>
               </a:ext>
             </a:extLst>
           </p:cNvPr>
@@ -9394,7 +9394,7 @@
           <p:cNvPr id="5122" name="Picture 2" descr="Image result for machine learning">
             <a:extLst>
               <a:ext uri="{FF2B5EF4-FFF2-40B4-BE49-F238E27FC236}">
-                <a16:creationId xmlns:a16="http://schemas.microsoft.com/office/drawing/2014/main" xmlns="" id="{810CE0A2-4102-44A6-A370-175E7896CDCB}"/>
+                <a16:creationId xmlns="" xmlns:a16="http://schemas.microsoft.com/office/drawing/2014/main" id="{810CE0A2-4102-44A6-A370-175E7896CDCB}"/>
               </a:ext>
             </a:extLst>
           </p:cNvPr>
@@ -10798,7 +10798,7 @@
           <p:cNvPr id="13" name="CaixaDeTexto 12">
             <a:extLst>
               <a:ext uri="{FF2B5EF4-FFF2-40B4-BE49-F238E27FC236}">
-                <a16:creationId xmlns:a16="http://schemas.microsoft.com/office/drawing/2014/main" xmlns="" id="{9989FE69-01F8-8C6A-4EA0-DA1C9792B919}"/>
+                <a16:creationId xmlns="" xmlns:a16="http://schemas.microsoft.com/office/drawing/2014/main" id="{9989FE69-01F8-8C6A-4EA0-DA1C9792B919}"/>
               </a:ext>
             </a:extLst>
           </p:cNvPr>
@@ -10880,7 +10880,7 @@
           <p:cNvPr id="2" name="Título 1">
             <a:extLst>
               <a:ext uri="{FF2B5EF4-FFF2-40B4-BE49-F238E27FC236}">
-                <a16:creationId xmlns="" xmlns:a16="http://schemas.microsoft.com/office/drawing/2014/main" id="{B022D379-CAA0-9DC9-CDBD-6E0EBE1BFF31}"/>
+                <a16:creationId xmlns:a16="http://schemas.microsoft.com/office/drawing/2014/main" xmlns="" id="{B022D379-CAA0-9DC9-CDBD-6E0EBE1BFF31}"/>
               </a:ext>
             </a:extLst>
           </p:cNvPr>
@@ -10914,7 +10914,7 @@
               <p:cNvPr id="3" name="Espaço Reservado para Conteúdo 2">
                 <a:extLst>
                   <a:ext uri="{FF2B5EF4-FFF2-40B4-BE49-F238E27FC236}">
-                    <a16:creationId xmlns="" xmlns:a16="http://schemas.microsoft.com/office/drawing/2014/main" id="{B68F0D74-8673-A432-A1D7-BDEF7725851A}"/>
+                    <a16:creationId xmlns:a16="http://schemas.microsoft.com/office/drawing/2014/main" xmlns="" id="{B68F0D74-8673-A432-A1D7-BDEF7725851A}"/>
                   </a:ext>
                 </a:extLst>
               </p:cNvPr>
@@ -11201,7 +11201,7 @@
           <p:cNvPr id="2" name="Título 1">
             <a:extLst>
               <a:ext uri="{FF2B5EF4-FFF2-40B4-BE49-F238E27FC236}">
-                <a16:creationId xmlns="" xmlns:a16="http://schemas.microsoft.com/office/drawing/2014/main" id="{519F0958-530D-D942-BA01-15C1583DD1E6}"/>
+                <a16:creationId xmlns:a16="http://schemas.microsoft.com/office/drawing/2014/main" xmlns="" id="{519F0958-530D-D942-BA01-15C1583DD1E6}"/>
               </a:ext>
             </a:extLst>
           </p:cNvPr>
@@ -11235,7 +11235,7 @@
               <p:cNvPr id="3" name="Espaço Reservado para Conteúdo 2">
                 <a:extLst>
                   <a:ext uri="{FF2B5EF4-FFF2-40B4-BE49-F238E27FC236}">
-                    <a16:creationId xmlns="" xmlns:a16="http://schemas.microsoft.com/office/drawing/2014/main" id="{21416F72-28FB-E27C-D129-16A944A87C67}"/>
+                    <a16:creationId xmlns:a16="http://schemas.microsoft.com/office/drawing/2014/main" xmlns="" id="{21416F72-28FB-E27C-D129-16A944A87C67}"/>
                   </a:ext>
                 </a:extLst>
               </p:cNvPr>
@@ -11712,7 +11712,7 @@
           <p:cNvPr id="2" name="Título 1">
             <a:extLst>
               <a:ext uri="{FF2B5EF4-FFF2-40B4-BE49-F238E27FC236}">
-                <a16:creationId xmlns="" xmlns:a16="http://schemas.microsoft.com/office/drawing/2014/main" id="{DCD47F25-5DD1-794E-8733-BFD771A2DE49}"/>
+                <a16:creationId xmlns:a16="http://schemas.microsoft.com/office/drawing/2014/main" xmlns="" id="{DCD47F25-5DD1-794E-8733-BFD771A2DE49}"/>
               </a:ext>
             </a:extLst>
           </p:cNvPr>
@@ -11739,14 +11739,14 @@
           </a:p>
         </p:txBody>
       </p:sp>
-      <mc:AlternateContent xmlns:mc="http://schemas.openxmlformats.org/markup-compatibility/2006">
-        <mc:Choice xmlns:a14="http://schemas.microsoft.com/office/drawing/2010/main" Requires="a14">
+      <mc:AlternateContent xmlns:mc="http://schemas.openxmlformats.org/markup-compatibility/2006" xmlns:a14="http://schemas.microsoft.com/office/drawing/2010/main">
+        <mc:Choice Requires="a14">
           <p:sp>
             <p:nvSpPr>
               <p:cNvPr id="3" name="Espaço Reservado para Conteúdo 2">
                 <a:extLst>
                   <a:ext uri="{FF2B5EF4-FFF2-40B4-BE49-F238E27FC236}">
-                    <a16:creationId xmlns="" xmlns:a16="http://schemas.microsoft.com/office/drawing/2014/main" id="{D79BB7DC-99E7-8958-EC77-566B7E3C2BBB}"/>
+                    <a16:creationId xmlns:a16="http://schemas.microsoft.com/office/drawing/2014/main" xmlns="" id="{D79BB7DC-99E7-8958-EC77-566B7E3C2BBB}"/>
                   </a:ext>
                 </a:extLst>
               </p:cNvPr>
@@ -12953,7 +12953,7 @@
             </p:txBody>
           </p:sp>
         </mc:Choice>
-        <mc:Fallback>
+        <mc:Fallback xmlns="">
           <p:sp>
             <p:nvSpPr>
               <p:cNvPr id="3" name="Espaço Reservado para Conteúdo 2">
@@ -13032,7 +13032,7 @@
           <p:cNvPr id="2" name="Título 1">
             <a:extLst>
               <a:ext uri="{FF2B5EF4-FFF2-40B4-BE49-F238E27FC236}">
-                <a16:creationId xmlns="" xmlns:a16="http://schemas.microsoft.com/office/drawing/2014/main" id="{52E3438D-F516-F1D3-A02F-51857586D07A}"/>
+                <a16:creationId xmlns:a16="http://schemas.microsoft.com/office/drawing/2014/main" xmlns="" id="{52E3438D-F516-F1D3-A02F-51857586D07A}"/>
               </a:ext>
             </a:extLst>
           </p:cNvPr>
@@ -13059,14 +13059,14 @@
           </a:p>
         </p:txBody>
       </p:sp>
-      <mc:AlternateContent xmlns:mc="http://schemas.openxmlformats.org/markup-compatibility/2006">
-        <mc:Choice xmlns:a14="http://schemas.microsoft.com/office/drawing/2010/main" Requires="a14">
+      <mc:AlternateContent xmlns:mc="http://schemas.openxmlformats.org/markup-compatibility/2006" xmlns:a14="http://schemas.microsoft.com/office/drawing/2010/main">
+        <mc:Choice Requires="a14">
           <p:sp>
             <p:nvSpPr>
               <p:cNvPr id="3" name="Espaço Reservado para Conteúdo 2">
                 <a:extLst>
                   <a:ext uri="{FF2B5EF4-FFF2-40B4-BE49-F238E27FC236}">
-                    <a16:creationId xmlns="" xmlns:a16="http://schemas.microsoft.com/office/drawing/2014/main" id="{BCAAD57B-65A0-9DAD-79FC-2AE2692EB84B}"/>
+                    <a16:creationId xmlns:a16="http://schemas.microsoft.com/office/drawing/2014/main" xmlns="" id="{BCAAD57B-65A0-9DAD-79FC-2AE2692EB84B}"/>
                   </a:ext>
                 </a:extLst>
               </p:cNvPr>
@@ -13647,21 +13647,12 @@
                       <a:srgbClr val="00B050"/>
                     </a:solidFill>
                   </a:rPr>
-                  <a:t> </a:t>
-                </a:r>
-                <a:r>
-                  <a:rPr lang="pt-BR" b="1" dirty="0">
-                    <a:solidFill>
-                      <a:srgbClr val="00B050"/>
-                    </a:solidFill>
-                  </a:rPr>
-                  <a:t>funções discriminantes em uma distribuição de probabilidades</a:t>
+                  <a:t> funções discriminantes em uma distribuição de probabilidades</a:t>
                 </a:r>
                 <a:r>
                   <a:rPr lang="pt-BR" dirty="0" smtClean="0"/>
                   <a:t>.</a:t>
                 </a:r>
-                <a:endParaRPr lang="pt-BR" dirty="0" smtClean="0"/>
               </a:p>
               <a:p>
                 <a:r>
@@ -13909,7 +13900,7 @@
             </p:txBody>
           </p:sp>
         </mc:Choice>
-        <mc:Fallback>
+        <mc:Fallback xmlns="">
           <p:sp>
             <p:nvSpPr>
               <p:cNvPr id="3" name="Espaço Reservado para Conteúdo 2">
@@ -13958,7 +13949,7 @@
           <p:cNvPr id="5" name="Rectangle 11">
             <a:extLst>
               <a:ext uri="{FF2B5EF4-FFF2-40B4-BE49-F238E27FC236}">
-                <a16:creationId xmlns="" xmlns:a16="http://schemas.microsoft.com/office/drawing/2014/main" id="{D1D7E603-A964-1188-9D09-B0C1E18592FA}"/>
+                <a16:creationId xmlns:a16="http://schemas.microsoft.com/office/drawing/2014/main" xmlns="" id="{D1D7E603-A964-1188-9D09-B0C1E18592FA}"/>
               </a:ext>
             </a:extLst>
           </p:cNvPr>
@@ -14040,7 +14031,7 @@
           <p:cNvPr id="2" name="Título 1">
             <a:extLst>
               <a:ext uri="{FF2B5EF4-FFF2-40B4-BE49-F238E27FC236}">
-                <a16:creationId xmlns="" xmlns:a16="http://schemas.microsoft.com/office/drawing/2014/main" id="{99DAA83A-B143-94BB-B48B-41A7423070CE}"/>
+                <a16:creationId xmlns:a16="http://schemas.microsoft.com/office/drawing/2014/main" xmlns="" id="{99DAA83A-B143-94BB-B48B-41A7423070CE}"/>
               </a:ext>
             </a:extLst>
           </p:cNvPr>
@@ -14068,14 +14059,14 @@
           </a:p>
         </p:txBody>
       </p:sp>
-      <mc:AlternateContent xmlns:mc="http://schemas.openxmlformats.org/markup-compatibility/2006">
-        <mc:Choice xmlns:a14="http://schemas.microsoft.com/office/drawing/2010/main" Requires="a14">
+      <mc:AlternateContent xmlns:mc="http://schemas.openxmlformats.org/markup-compatibility/2006" xmlns:a14="http://schemas.microsoft.com/office/drawing/2010/main">
+        <mc:Choice Requires="a14">
           <p:sp>
             <p:nvSpPr>
               <p:cNvPr id="3" name="Espaço Reservado para Conteúdo 2">
                 <a:extLst>
                   <a:ext uri="{FF2B5EF4-FFF2-40B4-BE49-F238E27FC236}">
-                    <a16:creationId xmlns="" xmlns:a16="http://schemas.microsoft.com/office/drawing/2014/main" id="{32DF54A1-52F5-C48C-7CD4-D6E451DF19D8}"/>
+                    <a16:creationId xmlns:a16="http://schemas.microsoft.com/office/drawing/2014/main" xmlns="" id="{32DF54A1-52F5-C48C-7CD4-D6E451DF19D8}"/>
                   </a:ext>
                 </a:extLst>
               </p:cNvPr>
@@ -14269,7 +14260,7 @@
             </p:txBody>
           </p:sp>
         </mc:Choice>
-        <mc:Fallback>
+        <mc:Fallback xmlns="">
           <p:sp>
             <p:nvSpPr>
               <p:cNvPr id="3" name="Espaço Reservado para Conteúdo 2">
@@ -14318,7 +14309,7 @@
           <p:cNvPr id="6" name="Imagem 5">
             <a:extLst>
               <a:ext uri="{FF2B5EF4-FFF2-40B4-BE49-F238E27FC236}">
-                <a16:creationId xmlns="" xmlns:a16="http://schemas.microsoft.com/office/drawing/2014/main" id="{ED5D1F5D-F195-0452-50D4-07E9F2B1C49D}"/>
+                <a16:creationId xmlns:a16="http://schemas.microsoft.com/office/drawing/2014/main" xmlns="" id="{ED5D1F5D-F195-0452-50D4-07E9F2B1C49D}"/>
               </a:ext>
             </a:extLst>
           </p:cNvPr>
@@ -14354,7 +14345,7 @@
           <p:cNvPr id="8" name="CaixaDeTexto 7">
             <a:extLst>
               <a:ext uri="{FF2B5EF4-FFF2-40B4-BE49-F238E27FC236}">
-                <a16:creationId xmlns="" xmlns:a16="http://schemas.microsoft.com/office/drawing/2014/main" id="{0DC5673F-9B77-2E9E-8317-E71CA8896FE0}"/>
+                <a16:creationId xmlns:a16="http://schemas.microsoft.com/office/drawing/2014/main" xmlns="" id="{0DC5673F-9B77-2E9E-8317-E71CA8896FE0}"/>
               </a:ext>
             </a:extLst>
           </p:cNvPr>
@@ -14406,7 +14397,7 @@
               <p:cNvPr id="4" name="CaixaDeTexto 3">
                 <a:extLst>
                   <a:ext uri="{FF2B5EF4-FFF2-40B4-BE49-F238E27FC236}">
-                    <a16:creationId xmlns="" xmlns:a16="http://schemas.microsoft.com/office/drawing/2014/main" id="{CBD55F82-56D5-32C8-C5AB-AF99477FBAAC}"/>
+                    <a16:creationId xmlns:a16="http://schemas.microsoft.com/office/drawing/2014/main" xmlns="" id="{CBD55F82-56D5-32C8-C5AB-AF99477FBAAC}"/>
                   </a:ext>
                 </a:extLst>
               </p:cNvPr>
@@ -14533,7 +14524,7 @@
           <p:cNvPr id="2" name="Título 1">
             <a:extLst>
               <a:ext uri="{FF2B5EF4-FFF2-40B4-BE49-F238E27FC236}">
-                <a16:creationId xmlns="" xmlns:a16="http://schemas.microsoft.com/office/drawing/2014/main" id="{99DAA83A-B143-94BB-B48B-41A7423070CE}"/>
+                <a16:creationId xmlns:a16="http://schemas.microsoft.com/office/drawing/2014/main" xmlns="" id="{99DAA83A-B143-94BB-B48B-41A7423070CE}"/>
               </a:ext>
             </a:extLst>
           </p:cNvPr>
@@ -14561,14 +14552,14 @@
           </a:p>
         </p:txBody>
       </p:sp>
-      <mc:AlternateContent xmlns:mc="http://schemas.openxmlformats.org/markup-compatibility/2006">
-        <mc:Choice xmlns:a14="http://schemas.microsoft.com/office/drawing/2010/main" Requires="a14">
+      <mc:AlternateContent xmlns:mc="http://schemas.openxmlformats.org/markup-compatibility/2006" xmlns:a14="http://schemas.microsoft.com/office/drawing/2010/main">
+        <mc:Choice Requires="a14">
           <p:sp>
             <p:nvSpPr>
               <p:cNvPr id="3" name="Espaço Reservado para Conteúdo 2">
                 <a:extLst>
                   <a:ext uri="{FF2B5EF4-FFF2-40B4-BE49-F238E27FC236}">
-                    <a16:creationId xmlns="" xmlns:a16="http://schemas.microsoft.com/office/drawing/2014/main" id="{32DF54A1-52F5-C48C-7CD4-D6E451DF19D8}"/>
+                    <a16:creationId xmlns:a16="http://schemas.microsoft.com/office/drawing/2014/main" xmlns="" id="{32DF54A1-52F5-C48C-7CD4-D6E451DF19D8}"/>
                   </a:ext>
                 </a:extLst>
               </p:cNvPr>
@@ -15080,7 +15071,7 @@
             </p:txBody>
           </p:sp>
         </mc:Choice>
-        <mc:Fallback>
+        <mc:Fallback xmlns="">
           <p:sp>
             <p:nvSpPr>
               <p:cNvPr id="3" name="Espaço Reservado para Conteúdo 2">
@@ -15129,7 +15120,7 @@
           <p:cNvPr id="6" name="Imagem 5">
             <a:extLst>
               <a:ext uri="{FF2B5EF4-FFF2-40B4-BE49-F238E27FC236}">
-                <a16:creationId xmlns="" xmlns:a16="http://schemas.microsoft.com/office/drawing/2014/main" id="{ED5D1F5D-F195-0452-50D4-07E9F2B1C49D}"/>
+                <a16:creationId xmlns:a16="http://schemas.microsoft.com/office/drawing/2014/main" xmlns="" id="{ED5D1F5D-F195-0452-50D4-07E9F2B1C49D}"/>
               </a:ext>
             </a:extLst>
           </p:cNvPr>
@@ -15160,14 +15151,14 @@
           </a:prstGeom>
         </p:spPr>
       </p:pic>
-      <mc:AlternateContent xmlns:mc="http://schemas.openxmlformats.org/markup-compatibility/2006">
-        <mc:Choice xmlns:a14="http://schemas.microsoft.com/office/drawing/2010/main" Requires="a14">
+      <mc:AlternateContent xmlns:mc="http://schemas.openxmlformats.org/markup-compatibility/2006" xmlns:a14="http://schemas.microsoft.com/office/drawing/2010/main">
+        <mc:Choice Requires="a14">
           <p:sp>
             <p:nvSpPr>
               <p:cNvPr id="4" name="CaixaDeTexto 3">
                 <a:extLst>
                   <a:ext uri="{FF2B5EF4-FFF2-40B4-BE49-F238E27FC236}">
-                    <a16:creationId xmlns="" xmlns:a16="http://schemas.microsoft.com/office/drawing/2014/main" id="{2B7728A0-505D-9DAE-23EC-8172E2EEEFA9}"/>
+                    <a16:creationId xmlns:a16="http://schemas.microsoft.com/office/drawing/2014/main" xmlns="" id="{2B7728A0-505D-9DAE-23EC-8172E2EEEFA9}"/>
                   </a:ext>
                 </a:extLst>
               </p:cNvPr>
@@ -15214,7 +15205,7 @@
             </p:txBody>
           </p:sp>
         </mc:Choice>
-        <mc:Fallback>
+        <mc:Fallback xmlns="">
           <p:sp>
             <p:nvSpPr>
               <p:cNvPr id="4" name="CaixaDeTexto 3">
@@ -15294,7 +15285,7 @@
           <p:cNvPr id="2" name="Título 1">
             <a:extLst>
               <a:ext uri="{FF2B5EF4-FFF2-40B4-BE49-F238E27FC236}">
-                <a16:creationId xmlns="" xmlns:a16="http://schemas.microsoft.com/office/drawing/2014/main" id="{028A152F-93D8-11FA-9B7A-B62AE5BB6486}"/>
+                <a16:creationId xmlns:a16="http://schemas.microsoft.com/office/drawing/2014/main" xmlns="" id="{028A152F-93D8-11FA-9B7A-B62AE5BB6486}"/>
               </a:ext>
             </a:extLst>
           </p:cNvPr>
@@ -15328,7 +15319,7 @@
               <p:cNvPr id="3" name="Espaço Reservado para Conteúdo 2">
                 <a:extLst>
                   <a:ext uri="{FF2B5EF4-FFF2-40B4-BE49-F238E27FC236}">
-                    <a16:creationId xmlns="" xmlns:a16="http://schemas.microsoft.com/office/drawing/2014/main" id="{B3535727-BB24-BB15-5C03-3DA9A3F9A09A}"/>
+                    <a16:creationId xmlns:a16="http://schemas.microsoft.com/office/drawing/2014/main" xmlns="" id="{B3535727-BB24-BB15-5C03-3DA9A3F9A09A}"/>
                   </a:ext>
                 </a:extLst>
               </p:cNvPr>
@@ -15506,7 +15497,7 @@
           <p:cNvPr id="4" name="Imagem 5">
             <a:extLst>
               <a:ext uri="{FF2B5EF4-FFF2-40B4-BE49-F238E27FC236}">
-                <a16:creationId xmlns="" xmlns:a16="http://schemas.microsoft.com/office/drawing/2014/main" id="{42A1713D-06B5-FB35-8488-833F7CAB7166}"/>
+                <a16:creationId xmlns:a16="http://schemas.microsoft.com/office/drawing/2014/main" xmlns="" id="{42A1713D-06B5-FB35-8488-833F7CAB7166}"/>
               </a:ext>
             </a:extLst>
           </p:cNvPr>
@@ -15572,7 +15563,7 @@
           <p:cNvPr id="2" name="Title 1">
             <a:extLst>
               <a:ext uri="{FF2B5EF4-FFF2-40B4-BE49-F238E27FC236}">
-                <a16:creationId xmlns="" xmlns:a16="http://schemas.microsoft.com/office/drawing/2014/main" id="{2DB9D242-5419-0FFB-7863-B3BB3BD80869}"/>
+                <a16:creationId xmlns:a16="http://schemas.microsoft.com/office/drawing/2014/main" xmlns="" id="{2DB9D242-5419-0FFB-7863-B3BB3BD80869}"/>
               </a:ext>
             </a:extLst>
           </p:cNvPr>
@@ -15596,14 +15587,14 @@
           </a:p>
         </p:txBody>
       </p:sp>
-      <mc:AlternateContent xmlns:mc="http://schemas.openxmlformats.org/markup-compatibility/2006">
-        <mc:Choice xmlns:a14="http://schemas.microsoft.com/office/drawing/2010/main" Requires="a14">
+      <mc:AlternateContent xmlns:mc="http://schemas.openxmlformats.org/markup-compatibility/2006" xmlns:a14="http://schemas.microsoft.com/office/drawing/2010/main">
+        <mc:Choice Requires="a14">
           <p:sp>
             <p:nvSpPr>
               <p:cNvPr id="3" name="Content Placeholder 2">
                 <a:extLst>
                   <a:ext uri="{FF2B5EF4-FFF2-40B4-BE49-F238E27FC236}">
-                    <a16:creationId xmlns="" xmlns:a16="http://schemas.microsoft.com/office/drawing/2014/main" id="{34B1DEA3-BAAD-D90C-CD9D-99A5A24F4544}"/>
+                    <a16:creationId xmlns:a16="http://schemas.microsoft.com/office/drawing/2014/main" xmlns="" id="{34B1DEA3-BAAD-D90C-CD9D-99A5A24F4544}"/>
                   </a:ext>
                 </a:extLst>
               </p:cNvPr>
@@ -16390,11 +16381,7 @@
                 </a:r>
                 <a:r>
                   <a:rPr lang="pt-BR" dirty="0" smtClean="0"/>
-                  <a:t>ele</a:t>
-                </a:r>
-                <a:r>
-                  <a:rPr lang="pt-BR" dirty="0" smtClean="0"/>
-                  <a:t> </a:t>
+                  <a:t>ele </a:t>
                 </a:r>
                 <a:r>
                   <a:rPr lang="pt-BR" dirty="0"/>
@@ -16404,7 +16391,7 @@
             </p:txBody>
           </p:sp>
         </mc:Choice>
-        <mc:Fallback>
+        <mc:Fallback xmlns="">
           <p:sp>
             <p:nvSpPr>
               <p:cNvPr id="3" name="Content Placeholder 2">
@@ -16483,7 +16470,7 @@
           <p:cNvPr id="2" name="Title 1">
             <a:extLst>
               <a:ext uri="{FF2B5EF4-FFF2-40B4-BE49-F238E27FC236}">
-                <a16:creationId xmlns="" xmlns:a16="http://schemas.microsoft.com/office/drawing/2014/main" id="{997538D5-DC01-EC48-38D2-99D754F1BB92}"/>
+                <a16:creationId xmlns:a16="http://schemas.microsoft.com/office/drawing/2014/main" xmlns="" id="{997538D5-DC01-EC48-38D2-99D754F1BB92}"/>
               </a:ext>
             </a:extLst>
           </p:cNvPr>
@@ -16507,14 +16494,14 @@
           </a:p>
         </p:txBody>
       </p:sp>
-      <mc:AlternateContent xmlns:mc="http://schemas.openxmlformats.org/markup-compatibility/2006">
-        <mc:Choice xmlns:a14="http://schemas.microsoft.com/office/drawing/2010/main" Requires="a14">
+      <mc:AlternateContent xmlns:mc="http://schemas.openxmlformats.org/markup-compatibility/2006" xmlns:a14="http://schemas.microsoft.com/office/drawing/2010/main">
+        <mc:Choice Requires="a14">
           <p:sp>
             <p:nvSpPr>
               <p:cNvPr id="3" name="Content Placeholder 2">
                 <a:extLst>
                   <a:ext uri="{FF2B5EF4-FFF2-40B4-BE49-F238E27FC236}">
-                    <a16:creationId xmlns="" xmlns:a16="http://schemas.microsoft.com/office/drawing/2014/main" id="{17D7928D-3A32-7330-5FDC-756155EF2F3D}"/>
+                    <a16:creationId xmlns:a16="http://schemas.microsoft.com/office/drawing/2014/main" xmlns="" id="{17D7928D-3A32-7330-5FDC-756155EF2F3D}"/>
                   </a:ext>
                 </a:extLst>
               </p:cNvPr>
@@ -16939,23 +16926,7 @@
                       <a:srgbClr val="7030A0"/>
                     </a:solidFill>
                   </a:rPr>
-                  <a:t>d</a:t>
-                </a:r>
-                <a:r>
-                  <a:rPr lang="pt-BR" b="1" dirty="0" smtClean="0">
-                    <a:solidFill>
-                      <a:srgbClr val="7030A0"/>
-                    </a:solidFill>
-                  </a:rPr>
-                  <a:t>a saída do</a:t>
-                </a:r>
-                <a:r>
-                  <a:rPr lang="pt-BR" b="1" dirty="0" smtClean="0">
-                    <a:solidFill>
-                      <a:srgbClr val="7030A0"/>
-                    </a:solidFill>
-                  </a:rPr>
-                  <a:t> modelo </a:t>
+                  <a:t>da saída do modelo </a:t>
                 </a:r>
                 <a:r>
                   <a:rPr lang="pt-BR" b="1" dirty="0">
@@ -16994,7 +16965,7 @@
             </p:txBody>
           </p:sp>
         </mc:Choice>
-        <mc:Fallback>
+        <mc:Fallback xmlns="">
           <p:sp>
             <p:nvSpPr>
               <p:cNvPr id="3" name="Content Placeholder 2">
@@ -17168,7 +17139,7 @@
           <p:cNvPr id="2" name="Título 1">
             <a:extLst>
               <a:ext uri="{FF2B5EF4-FFF2-40B4-BE49-F238E27FC236}">
-                <a16:creationId xmlns="" xmlns:a16="http://schemas.microsoft.com/office/drawing/2014/main" id="{1FE7CD05-66F2-8967-6154-CCED38E0F987}"/>
+                <a16:creationId xmlns:a16="http://schemas.microsoft.com/office/drawing/2014/main" xmlns="" id="{1FE7CD05-66F2-8967-6154-CCED38E0F987}"/>
               </a:ext>
             </a:extLst>
           </p:cNvPr>
@@ -17191,14 +17162,14 @@
           </a:p>
         </p:txBody>
       </p:sp>
-      <mc:AlternateContent xmlns:mc="http://schemas.openxmlformats.org/markup-compatibility/2006">
-        <mc:Choice xmlns:a14="http://schemas.microsoft.com/office/drawing/2010/main" Requires="a14">
+      <mc:AlternateContent xmlns:mc="http://schemas.openxmlformats.org/markup-compatibility/2006" xmlns:a14="http://schemas.microsoft.com/office/drawing/2010/main">
+        <mc:Choice Requires="a14">
           <p:sp>
             <p:nvSpPr>
               <p:cNvPr id="3" name="Espaço Reservado para Conteúdo 2">
                 <a:extLst>
                   <a:ext uri="{FF2B5EF4-FFF2-40B4-BE49-F238E27FC236}">
-                    <a16:creationId xmlns="" xmlns:a16="http://schemas.microsoft.com/office/drawing/2014/main" id="{21A86630-5D79-AD4B-79FC-6C8373E8DB39}"/>
+                    <a16:creationId xmlns:a16="http://schemas.microsoft.com/office/drawing/2014/main" xmlns="" id="{21A86630-5D79-AD4B-79FC-6C8373E8DB39}"/>
                   </a:ext>
                 </a:extLst>
               </p:cNvPr>
@@ -17742,11 +17713,7 @@
                 </a:r>
                 <a:r>
                   <a:rPr lang="pt-BR" dirty="0" smtClean="0"/>
-                  <a:t>o vetor </a:t>
-                </a:r>
-                <a:r>
-                  <a:rPr lang="pt-BR" dirty="0" smtClean="0"/>
-                  <a:t>do </a:t>
+                  <a:t>o vetor do </a:t>
                 </a:r>
                 <a14:m>
                   <m:oMath xmlns:m="http://schemas.openxmlformats.org/officeDocument/2006/math">
@@ -18150,7 +18117,7 @@
             </p:txBody>
           </p:sp>
         </mc:Choice>
-        <mc:Fallback>
+        <mc:Fallback xmlns="">
           <p:sp>
             <p:nvSpPr>
               <p:cNvPr id="3" name="Espaço Reservado para Conteúdo 2">
@@ -18229,7 +18196,7 @@
           <p:cNvPr id="2" name="Título 1">
             <a:extLst>
               <a:ext uri="{FF2B5EF4-FFF2-40B4-BE49-F238E27FC236}">
-                <a16:creationId xmlns="" xmlns:a16="http://schemas.microsoft.com/office/drawing/2014/main" id="{E4598F11-6F65-0753-89FE-F5ABED77B46A}"/>
+                <a16:creationId xmlns:a16="http://schemas.microsoft.com/office/drawing/2014/main" xmlns="" id="{E4598F11-6F65-0753-89FE-F5ABED77B46A}"/>
               </a:ext>
             </a:extLst>
           </p:cNvPr>
@@ -18253,14 +18220,14 @@
           </a:p>
         </p:txBody>
       </p:sp>
-      <mc:AlternateContent xmlns:mc="http://schemas.openxmlformats.org/markup-compatibility/2006">
-        <mc:Choice xmlns:a14="http://schemas.microsoft.com/office/drawing/2010/main" Requires="a14">
+      <mc:AlternateContent xmlns:mc="http://schemas.openxmlformats.org/markup-compatibility/2006" xmlns:a14="http://schemas.microsoft.com/office/drawing/2010/main">
+        <mc:Choice Requires="a14">
           <p:sp>
             <p:nvSpPr>
               <p:cNvPr id="3" name="Espaço Reservado para Conteúdo 2">
                 <a:extLst>
                   <a:ext uri="{FF2B5EF4-FFF2-40B4-BE49-F238E27FC236}">
-                    <a16:creationId xmlns="" xmlns:a16="http://schemas.microsoft.com/office/drawing/2014/main" id="{FEF4E6DC-E916-D97A-4D18-D469285C4F2C}"/>
+                    <a16:creationId xmlns:a16="http://schemas.microsoft.com/office/drawing/2014/main" xmlns="" id="{FEF4E6DC-E916-D97A-4D18-D469285C4F2C}"/>
                   </a:ext>
                 </a:extLst>
               </p:cNvPr>
@@ -18663,7 +18630,7 @@
             </p:txBody>
           </p:sp>
         </mc:Choice>
-        <mc:Fallback>
+        <mc:Fallback xmlns="">
           <p:sp>
             <p:nvSpPr>
               <p:cNvPr id="3" name="Espaço Reservado para Conteúdo 2">
@@ -18742,7 +18709,7 @@
           <p:cNvPr id="2" name="Título 1">
             <a:extLst>
               <a:ext uri="{FF2B5EF4-FFF2-40B4-BE49-F238E27FC236}">
-                <a16:creationId xmlns="" xmlns:a16="http://schemas.microsoft.com/office/drawing/2014/main" id="{D5807923-28D2-8150-E304-526DA460D220}"/>
+                <a16:creationId xmlns:a16="http://schemas.microsoft.com/office/drawing/2014/main" xmlns="" id="{D5807923-28D2-8150-E304-526DA460D220}"/>
               </a:ext>
             </a:extLst>
           </p:cNvPr>
@@ -18771,7 +18738,7 @@
           <p:cNvPr id="3" name="Espaço Reservado para Conteúdo 2">
             <a:extLst>
               <a:ext uri="{FF2B5EF4-FFF2-40B4-BE49-F238E27FC236}">
-                <a16:creationId xmlns="" xmlns:a16="http://schemas.microsoft.com/office/drawing/2014/main" id="{FFACD180-C529-EB91-BD2D-B5F491B1E35C}"/>
+                <a16:creationId xmlns:a16="http://schemas.microsoft.com/office/drawing/2014/main" xmlns="" id="{FFACD180-C529-EB91-BD2D-B5F491B1E35C}"/>
               </a:ext>
             </a:extLst>
           </p:cNvPr>
@@ -18903,7 +18870,7 @@
           <p:cNvPr id="1026" name="Picture 2">
             <a:extLst>
               <a:ext uri="{FF2B5EF4-FFF2-40B4-BE49-F238E27FC236}">
-                <a16:creationId xmlns="" xmlns:a16="http://schemas.microsoft.com/office/drawing/2014/main" id="{6FC2BDE8-91E0-6379-9BA3-76511C6153D5}"/>
+                <a16:creationId xmlns:a16="http://schemas.microsoft.com/office/drawing/2014/main" xmlns="" id="{6FC2BDE8-91E0-6379-9BA3-76511C6153D5}"/>
               </a:ext>
             </a:extLst>
           </p:cNvPr>
@@ -18948,7 +18915,7 @@
           <p:cNvPr id="5" name="Picture 2">
             <a:extLst>
               <a:ext uri="{FF2B5EF4-FFF2-40B4-BE49-F238E27FC236}">
-                <a16:creationId xmlns="" xmlns:a16="http://schemas.microsoft.com/office/drawing/2014/main" id="{2771BE1F-7B74-36A4-AA69-9171B025A4B6}"/>
+                <a16:creationId xmlns:a16="http://schemas.microsoft.com/office/drawing/2014/main" xmlns="" id="{2771BE1F-7B74-36A4-AA69-9171B025A4B6}"/>
               </a:ext>
             </a:extLst>
           </p:cNvPr>
@@ -19023,7 +18990,7 @@
           <p:cNvPr id="2" name="Título 1">
             <a:extLst>
               <a:ext uri="{FF2B5EF4-FFF2-40B4-BE49-F238E27FC236}">
-                <a16:creationId xmlns="" xmlns:a16="http://schemas.microsoft.com/office/drawing/2014/main" id="{5D929962-9BFC-4174-AB35-CC23FA013168}"/>
+                <a16:creationId xmlns:a16="http://schemas.microsoft.com/office/drawing/2014/main" xmlns="" id="{5D929962-9BFC-4174-AB35-CC23FA013168}"/>
               </a:ext>
             </a:extLst>
           </p:cNvPr>
@@ -19054,7 +19021,7 @@
               <p:cNvPr id="3" name="Espaço Reservado para Conteúdo 2">
                 <a:extLst>
                   <a:ext uri="{FF2B5EF4-FFF2-40B4-BE49-F238E27FC236}">
-                    <a16:creationId xmlns="" xmlns:a16="http://schemas.microsoft.com/office/drawing/2014/main" id="{1D38055D-E355-F780-9CA0-0337EA0BE4FD}"/>
+                    <a16:creationId xmlns:a16="http://schemas.microsoft.com/office/drawing/2014/main" xmlns="" id="{1D38055D-E355-F780-9CA0-0337EA0BE4FD}"/>
                   </a:ext>
                 </a:extLst>
               </p:cNvPr>
@@ -19068,7 +19035,7 @@
             <p:spPr>
               <a:xfrm>
                 <a:off x="838199" y="1825625"/>
-                <a:ext cx="11240729" cy="5032375"/>
+                <a:ext cx="11353801" cy="5032375"/>
               </a:xfrm>
             </p:spPr>
             <p:txBody>
@@ -19078,7 +19045,7 @@
               <a:lstStyle/>
               <a:p>
                 <a:r>
-                  <a:rPr lang="pt-BR" dirty="0"/>
+                  <a:rPr lang="pt-BR" dirty="0" smtClean="0"/>
                   <a:t>A atualização dos </a:t>
                 </a:r>
                 <a:r>
@@ -19975,6 +19942,48 @@
                         </m:e>
                       </m:d>
                       <m:r>
+                        <a:rPr lang="pt-BR" dirty="0">
+                          <a:latin typeface="Cambria Math" panose="02040503050406030204" pitchFamily="18" charset="0"/>
+                          <a:ea typeface="Cambria Math" panose="02040503050406030204" pitchFamily="18" charset="0"/>
+                        </a:rPr>
+                        <m:t>∈</m:t>
+                      </m:r>
+                      <m:sSup>
+                        <m:sSupPr>
+                          <m:ctrlPr>
+                            <a:rPr lang="pt-BR" i="1" dirty="0">
+                              <a:latin typeface="Cambria Math" panose="02040503050406030204" pitchFamily="18" charset="0"/>
+                              <a:ea typeface="Cambria Math" panose="02040503050406030204" pitchFamily="18" charset="0"/>
+                            </a:rPr>
+                          </m:ctrlPr>
+                        </m:sSupPr>
+                        <m:e>
+                          <m:r>
+                            <a:rPr lang="pt-BR" i="1" dirty="0">
+                              <a:latin typeface="Cambria Math" panose="02040503050406030204" pitchFamily="18" charset="0"/>
+                              <a:ea typeface="Cambria Math" panose="02040503050406030204" pitchFamily="18" charset="0"/>
+                            </a:rPr>
+                            <m:t>ℝ</m:t>
+                          </m:r>
+                        </m:e>
+                        <m:sup>
+                          <m:r>
+                            <a:rPr lang="pt-BR" i="1" dirty="0">
+                              <a:latin typeface="Cambria Math" panose="02040503050406030204" pitchFamily="18" charset="0"/>
+                              <a:ea typeface="Cambria Math" panose="02040503050406030204" pitchFamily="18" charset="0"/>
+                            </a:rPr>
+                            <m:t>𝐾</m:t>
+                          </m:r>
+                          <m:r>
+                            <a:rPr lang="pt-BR" i="1" dirty="0">
+                              <a:latin typeface="Cambria Math" panose="02040503050406030204" pitchFamily="18" charset="0"/>
+                              <a:ea typeface="Cambria Math" panose="02040503050406030204" pitchFamily="18" charset="0"/>
+                            </a:rPr>
+                            <m:t>+1×1</m:t>
+                          </m:r>
+                        </m:sup>
+                      </m:sSup>
+                      <m:r>
                         <a:rPr lang="pt-BR" sz="2400" b="0" i="1" smtClean="0">
                           <a:latin typeface="Cambria Math" panose="02040503050406030204" pitchFamily="18" charset="0"/>
                         </a:rPr>
@@ -19983,7 +19992,7 @@
                     </m:oMath>
                   </m:oMathPara>
                 </a14:m>
-                <a:endParaRPr lang="pt-BR" sz="2400" b="0" i="0" dirty="0">
+                <a:endParaRPr lang="pt-BR" b="0" i="0" dirty="0">
                   <a:latin typeface="Calibri" panose="020F0502020204030204" pitchFamily="34" charset="0"/>
                 </a:endParaRPr>
               </a:p>
@@ -20213,7 +20222,7 @@
               <p:cNvPr id="3" name="Espaço Reservado para Conteúdo 2">
                 <a:extLst>
                   <a:ext uri="{FF2B5EF4-FFF2-40B4-BE49-F238E27FC236}">
-                    <a16:creationId xmlns="" xmlns:a16="http://schemas.microsoft.com/office/drawing/2014/main" xmlns:a14="http://schemas.microsoft.com/office/drawing/2010/main" id="{1D38055D-E355-F780-9CA0-0337EA0BE4FD}"/>
+                    <a16:creationId xmlns:a16="http://schemas.microsoft.com/office/drawing/2014/main" xmlns="" xmlns:a14="http://schemas.microsoft.com/office/drawing/2010/main" id="{1D38055D-E355-F780-9CA0-0337EA0BE4FD}"/>
                   </a:ext>
                 </a:extLst>
               </p:cNvPr>
@@ -20227,12 +20236,12 @@
             <p:spPr>
               <a:xfrm>
                 <a:off x="838199" y="1825625"/>
-                <a:ext cx="11240729" cy="5032375"/>
+                <a:ext cx="11353801" cy="5032375"/>
               </a:xfrm>
               <a:blipFill rotWithShape="0">
                 <a:blip r:embed="rId3"/>
                 <a:stretch>
-                  <a:fillRect l="-1085" t="-1695"/>
+                  <a:fillRect l="-1074" t="-1695" r="-1396"/>
                 </a:stretch>
               </a:blipFill>
             </p:spPr>
@@ -20286,7 +20295,7 @@
           <p:cNvPr id="2" name="Título 1">
             <a:extLst>
               <a:ext uri="{FF2B5EF4-FFF2-40B4-BE49-F238E27FC236}">
-                <a16:creationId xmlns="" xmlns:a16="http://schemas.microsoft.com/office/drawing/2014/main" id="{01D0947A-594D-A8D5-95F3-38EB04C6BDB6}"/>
+                <a16:creationId xmlns:a16="http://schemas.microsoft.com/office/drawing/2014/main" xmlns="" id="{01D0947A-594D-A8D5-95F3-38EB04C6BDB6}"/>
               </a:ext>
             </a:extLst>
           </p:cNvPr>
@@ -20320,7 +20329,7 @@
               <p:cNvPr id="3" name="Espaço Reservado para Conteúdo 2">
                 <a:extLst>
                   <a:ext uri="{FF2B5EF4-FFF2-40B4-BE49-F238E27FC236}">
-                    <a16:creationId xmlns="" xmlns:a16="http://schemas.microsoft.com/office/drawing/2014/main" id="{DDBA288E-BBB8-E157-840C-AA685AD7D65C}"/>
+                    <a16:creationId xmlns:a16="http://schemas.microsoft.com/office/drawing/2014/main" xmlns="" id="{DDBA288E-BBB8-E157-840C-AA685AD7D65C}"/>
                   </a:ext>
                 </a:extLst>
               </p:cNvPr>
@@ -20857,6 +20866,55 @@
                         </m:e>
                       </m:d>
                       <m:r>
+                        <a:rPr lang="pt-BR" dirty="0">
+                          <a:latin typeface="Cambria Math" panose="02040503050406030204" pitchFamily="18" charset="0"/>
+                          <a:ea typeface="Cambria Math" panose="02040503050406030204" pitchFamily="18" charset="0"/>
+                        </a:rPr>
+                        <m:t>∈</m:t>
+                      </m:r>
+                      <m:sSup>
+                        <m:sSupPr>
+                          <m:ctrlPr>
+                            <a:rPr lang="pt-BR" i="1" dirty="0">
+                              <a:latin typeface="Cambria Math" panose="02040503050406030204" pitchFamily="18" charset="0"/>
+                              <a:ea typeface="Cambria Math" panose="02040503050406030204" pitchFamily="18" charset="0"/>
+                            </a:rPr>
+                          </m:ctrlPr>
+                        </m:sSupPr>
+                        <m:e>
+                          <m:r>
+                            <a:rPr lang="pt-BR" i="1" dirty="0">
+                              <a:latin typeface="Cambria Math" panose="02040503050406030204" pitchFamily="18" charset="0"/>
+                              <a:ea typeface="Cambria Math" panose="02040503050406030204" pitchFamily="18" charset="0"/>
+                            </a:rPr>
+                            <m:t>ℝ</m:t>
+                          </m:r>
+                        </m:e>
+                        <m:sup>
+                          <m:r>
+                            <a:rPr lang="pt-BR" i="1" dirty="0">
+                              <a:latin typeface="Cambria Math" panose="02040503050406030204" pitchFamily="18" charset="0"/>
+                              <a:ea typeface="Cambria Math" panose="02040503050406030204" pitchFamily="18" charset="0"/>
+                            </a:rPr>
+                            <m:t>𝐾</m:t>
+                          </m:r>
+                          <m:r>
+                            <a:rPr lang="pt-BR" i="1" dirty="0">
+                              <a:latin typeface="Cambria Math" panose="02040503050406030204" pitchFamily="18" charset="0"/>
+                              <a:ea typeface="Cambria Math" panose="02040503050406030204" pitchFamily="18" charset="0"/>
+                            </a:rPr>
+                            <m:t>+1×</m:t>
+                          </m:r>
+                          <m:r>
+                            <a:rPr lang="pt-BR" i="1" dirty="0">
+                              <a:latin typeface="Cambria Math" panose="02040503050406030204" pitchFamily="18" charset="0"/>
+                              <a:ea typeface="Cambria Math" panose="02040503050406030204" pitchFamily="18" charset="0"/>
+                            </a:rPr>
+                            <m:t>𝑄</m:t>
+                          </m:r>
+                        </m:sup>
+                      </m:sSup>
+                      <m:r>
                         <a:rPr lang="pt-BR" sz="2800" b="0" i="1" smtClean="0">
                           <a:latin typeface="Cambria Math" panose="02040503050406030204" pitchFamily="18" charset="0"/>
                         </a:rPr>
@@ -21117,7 +21175,7 @@
               <p:cNvPr id="3" name="Espaço Reservado para Conteúdo 2">
                 <a:extLst>
                   <a:ext uri="{FF2B5EF4-FFF2-40B4-BE49-F238E27FC236}">
-                    <a16:creationId xmlns="" xmlns:a16="http://schemas.microsoft.com/office/drawing/2014/main" xmlns:a14="http://schemas.microsoft.com/office/drawing/2010/main" id="{DDBA288E-BBB8-E157-840C-AA685AD7D65C}"/>
+                    <a16:creationId xmlns:a16="http://schemas.microsoft.com/office/drawing/2014/main" xmlns="" xmlns:a14="http://schemas.microsoft.com/office/drawing/2010/main" id="{DDBA288E-BBB8-E157-840C-AA685AD7D65C}"/>
                   </a:ext>
                 </a:extLst>
               </p:cNvPr>
@@ -21190,7 +21248,7 @@
           <p:cNvPr id="2" name="Título 1">
             <a:extLst>
               <a:ext uri="{FF2B5EF4-FFF2-40B4-BE49-F238E27FC236}">
-                <a16:creationId xmlns="" xmlns:a16="http://schemas.microsoft.com/office/drawing/2014/main" id="{E0F1FD81-6095-2AF0-8691-34E55B8A93B5}"/>
+                <a16:creationId xmlns:a16="http://schemas.microsoft.com/office/drawing/2014/main" xmlns="" id="{E0F1FD81-6095-2AF0-8691-34E55B8A93B5}"/>
               </a:ext>
             </a:extLst>
           </p:cNvPr>
@@ -21217,14 +21275,14 @@
           </a:p>
         </p:txBody>
       </p:sp>
-      <mc:AlternateContent xmlns:mc="http://schemas.openxmlformats.org/markup-compatibility/2006">
-        <mc:Choice xmlns:a14="http://schemas.microsoft.com/office/drawing/2010/main" Requires="a14">
+      <mc:AlternateContent xmlns:mc="http://schemas.openxmlformats.org/markup-compatibility/2006" xmlns:a14="http://schemas.microsoft.com/office/drawing/2010/main">
+        <mc:Choice Requires="a14">
           <p:sp>
             <p:nvSpPr>
               <p:cNvPr id="3" name="Espaço Reservado para Conteúdo 2">
                 <a:extLst>
                   <a:ext uri="{FF2B5EF4-FFF2-40B4-BE49-F238E27FC236}">
-                    <a16:creationId xmlns="" xmlns:a16="http://schemas.microsoft.com/office/drawing/2014/main" id="{BB734B24-DA50-860B-5D55-C33F6F451B6F}"/>
+                    <a16:creationId xmlns:a16="http://schemas.microsoft.com/office/drawing/2014/main" xmlns="" id="{BB734B24-DA50-860B-5D55-C33F6F451B6F}"/>
                   </a:ext>
                 </a:extLst>
               </p:cNvPr>
@@ -21755,7 +21813,7 @@
             </p:txBody>
           </p:sp>
         </mc:Choice>
-        <mc:Fallback>
+        <mc:Fallback xmlns="">
           <p:sp>
             <p:nvSpPr>
               <p:cNvPr id="3" name="Espaço Reservado para Conteúdo 2">
@@ -21804,7 +21862,7 @@
           <p:cNvPr id="4" name="Imagem 5">
             <a:extLst>
               <a:ext uri="{FF2B5EF4-FFF2-40B4-BE49-F238E27FC236}">
-                <a16:creationId xmlns="" xmlns:a16="http://schemas.microsoft.com/office/drawing/2014/main" id="{535159CB-11DC-74B8-5C5F-D571CD018327}"/>
+                <a16:creationId xmlns:a16="http://schemas.microsoft.com/office/drawing/2014/main" xmlns="" id="{535159CB-11DC-74B8-5C5F-D571CD018327}"/>
               </a:ext>
             </a:extLst>
           </p:cNvPr>
@@ -21870,7 +21928,7 @@
           <p:cNvPr id="2" name="Título 1">
             <a:extLst>
               <a:ext uri="{FF2B5EF4-FFF2-40B4-BE49-F238E27FC236}">
-                <a16:creationId xmlns="" xmlns:a16="http://schemas.microsoft.com/office/drawing/2014/main" id="{FC175046-E9DF-FCC8-C62B-B00332089713}"/>
+                <a16:creationId xmlns:a16="http://schemas.microsoft.com/office/drawing/2014/main" xmlns="" id="{FC175046-E9DF-FCC8-C62B-B00332089713}"/>
               </a:ext>
             </a:extLst>
           </p:cNvPr>
@@ -21904,7 +21962,7 @@
               <p:cNvPr id="3" name="Espaço Reservado para Conteúdo 2">
                 <a:extLst>
                   <a:ext uri="{FF2B5EF4-FFF2-40B4-BE49-F238E27FC236}">
-                    <a16:creationId xmlns="" xmlns:a16="http://schemas.microsoft.com/office/drawing/2014/main" id="{24721BB7-DBA3-D8BF-7F98-ED91BD59DAEC}"/>
+                    <a16:creationId xmlns:a16="http://schemas.microsoft.com/office/drawing/2014/main" xmlns="" id="{24721BB7-DBA3-D8BF-7F98-ED91BD59DAEC}"/>
                   </a:ext>
                 </a:extLst>
               </p:cNvPr>
@@ -22212,7 +22270,7 @@
           <p:cNvPr id="6" name="Imagem 5">
             <a:extLst>
               <a:ext uri="{FF2B5EF4-FFF2-40B4-BE49-F238E27FC236}">
-                <a16:creationId xmlns="" xmlns:a16="http://schemas.microsoft.com/office/drawing/2014/main" id="{FF78CF76-EB26-3FAE-0391-E452288FA28E}"/>
+                <a16:creationId xmlns:a16="http://schemas.microsoft.com/office/drawing/2014/main" xmlns="" id="{FF78CF76-EB26-3FAE-0391-E452288FA28E}"/>
               </a:ext>
             </a:extLst>
           </p:cNvPr>
@@ -22248,7 +22306,7 @@
           <p:cNvPr id="5" name="Rectangle 2">
             <a:extLst>
               <a:ext uri="{FF2B5EF4-FFF2-40B4-BE49-F238E27FC236}">
-                <a16:creationId xmlns:a16="http://schemas.microsoft.com/office/drawing/2014/main" xmlns="" id="{0357C04D-3666-45D0-A263-597819F48D09}"/>
+                <a16:creationId xmlns="" xmlns:a16="http://schemas.microsoft.com/office/drawing/2014/main" id="{0357C04D-3666-45D0-A263-597819F48D09}"/>
               </a:ext>
             </a:extLst>
           </p:cNvPr>
@@ -22476,7 +22534,7 @@
           <p:cNvPr id="4" name="Título 1">
             <a:extLst>
               <a:ext uri="{FF2B5EF4-FFF2-40B4-BE49-F238E27FC236}">
-                <a16:creationId xmlns:a16="http://schemas.microsoft.com/office/drawing/2014/main" xmlns="" id="{32666AC8-2E17-4DB4-B0F5-60C640CCFD2E}"/>
+                <a16:creationId xmlns="" xmlns:a16="http://schemas.microsoft.com/office/drawing/2014/main" id="{32666AC8-2E17-4DB4-B0F5-60C640CCFD2E}"/>
               </a:ext>
             </a:extLst>
           </p:cNvPr>
@@ -22750,7 +22808,7 @@
           <p:cNvPr id="4" name="Picture 2" descr="Ana Barros (@anathinker) | Twitter">
             <a:extLst>
               <a:ext uri="{FF2B5EF4-FFF2-40B4-BE49-F238E27FC236}">
-                <a16:creationId xmlns:a16="http://schemas.microsoft.com/office/drawing/2014/main" xmlns="" id="{AF3F0044-4F7D-98F6-34C1-8351487DFDAA}"/>
+                <a16:creationId xmlns="" xmlns:a16="http://schemas.microsoft.com/office/drawing/2014/main" id="{AF3F0044-4F7D-98F6-34C1-8351487DFDAA}"/>
               </a:ext>
             </a:extLst>
           </p:cNvPr>
@@ -22797,7 +22855,7 @@
           <p:cNvPr id="5" name="Picture 6" descr="Analyzing Text Classification Techniques on Youtube Data">
             <a:extLst>
               <a:ext uri="{FF2B5EF4-FFF2-40B4-BE49-F238E27FC236}">
-                <a16:creationId xmlns:a16="http://schemas.microsoft.com/office/drawing/2014/main" xmlns="" id="{0E6041F8-AB14-54C0-C790-0288A3AC8FBA}"/>
+                <a16:creationId xmlns="" xmlns:a16="http://schemas.microsoft.com/office/drawing/2014/main" id="{0E6041F8-AB14-54C0-C790-0288A3AC8FBA}"/>
               </a:ext>
             </a:extLst>
           </p:cNvPr>
@@ -22842,7 +22900,7 @@
           <p:cNvPr id="6" name="Picture 2" descr="Sentiment Fig 1">
             <a:extLst>
               <a:ext uri="{FF2B5EF4-FFF2-40B4-BE49-F238E27FC236}">
-                <a16:creationId xmlns:a16="http://schemas.microsoft.com/office/drawing/2014/main" xmlns="" id="{1E7CC96F-55AB-1482-92F6-240F8E2E0D1E}"/>
+                <a16:creationId xmlns="" xmlns:a16="http://schemas.microsoft.com/office/drawing/2014/main" id="{1E7CC96F-55AB-1482-92F6-240F8E2E0D1E}"/>
               </a:ext>
             </a:extLst>
           </p:cNvPr>
@@ -23129,7 +23187,7 @@
           <p:cNvPr id="7" name="Picture 2" descr="Ana Barros (@anathinker) | Twitter">
             <a:extLst>
               <a:ext uri="{FF2B5EF4-FFF2-40B4-BE49-F238E27FC236}">
-                <a16:creationId xmlns:a16="http://schemas.microsoft.com/office/drawing/2014/main" xmlns="" id="{A2D479C7-0684-420F-2CCD-64C3DB79FDAB}"/>
+                <a16:creationId xmlns="" xmlns:a16="http://schemas.microsoft.com/office/drawing/2014/main" id="{A2D479C7-0684-420F-2CCD-64C3DB79FDAB}"/>
               </a:ext>
             </a:extLst>
           </p:cNvPr>
@@ -23176,7 +23234,7 @@
           <p:cNvPr id="8" name="Picture 6" descr="Analyzing Text Classification Techniques on Youtube Data">
             <a:extLst>
               <a:ext uri="{FF2B5EF4-FFF2-40B4-BE49-F238E27FC236}">
-                <a16:creationId xmlns:a16="http://schemas.microsoft.com/office/drawing/2014/main" xmlns="" id="{A59F8A2C-ACDF-09C7-B528-9064CEF3B848}"/>
+                <a16:creationId xmlns="" xmlns:a16="http://schemas.microsoft.com/office/drawing/2014/main" id="{A59F8A2C-ACDF-09C7-B528-9064CEF3B848}"/>
               </a:ext>
             </a:extLst>
           </p:cNvPr>
@@ -23221,7 +23279,7 @@
           <p:cNvPr id="9" name="Picture 2" descr="Sentiment Fig 1">
             <a:extLst>
               <a:ext uri="{FF2B5EF4-FFF2-40B4-BE49-F238E27FC236}">
-                <a16:creationId xmlns:a16="http://schemas.microsoft.com/office/drawing/2014/main" xmlns="" id="{E178FF16-CC3F-C34B-6C8B-874BC4FA61A4}"/>
+                <a16:creationId xmlns="" xmlns:a16="http://schemas.microsoft.com/office/drawing/2014/main" id="{E178FF16-CC3F-C34B-6C8B-874BC4FA61A4}"/>
               </a:ext>
             </a:extLst>
           </p:cNvPr>
@@ -23298,7 +23356,7 @@
           <p:cNvPr id="2" name="Título 1">
             <a:extLst>
               <a:ext uri="{FF2B5EF4-FFF2-40B4-BE49-F238E27FC236}">
-                <a16:creationId xmlns:a16="http://schemas.microsoft.com/office/drawing/2014/main" xmlns="" id="{95206997-C98C-FF52-62A1-725EEA7A8A7E}"/>
+                <a16:creationId xmlns="" xmlns:a16="http://schemas.microsoft.com/office/drawing/2014/main" id="{95206997-C98C-FF52-62A1-725EEA7A8A7E}"/>
               </a:ext>
             </a:extLst>
           </p:cNvPr>
@@ -23328,7 +23386,7 @@
               <p:cNvPr id="3" name="Espaço Reservado para Conteúdo 2">
                 <a:extLst>
                   <a:ext uri="{FF2B5EF4-FFF2-40B4-BE49-F238E27FC236}">
-                    <a16:creationId xmlns:a16="http://schemas.microsoft.com/office/drawing/2014/main" xmlns="" id="{50B99F56-FF18-D044-7799-0502D4F6A5FB}"/>
+                    <a16:creationId xmlns="" xmlns:a16="http://schemas.microsoft.com/office/drawing/2014/main" id="{50B99F56-FF18-D044-7799-0502D4F6A5FB}"/>
                   </a:ext>
                 </a:extLst>
               </p:cNvPr>
@@ -23913,7 +23971,7 @@
           <p:cNvPr id="2" name="Título 1">
             <a:extLst>
               <a:ext uri="{FF2B5EF4-FFF2-40B4-BE49-F238E27FC236}">
-                <a16:creationId xmlns:a16="http://schemas.microsoft.com/office/drawing/2014/main" xmlns="" id="{40D4148F-5E93-6FF0-6B66-AC9E3B82640A}"/>
+                <a16:creationId xmlns="" xmlns:a16="http://schemas.microsoft.com/office/drawing/2014/main" id="{40D4148F-5E93-6FF0-6B66-AC9E3B82640A}"/>
               </a:ext>
             </a:extLst>
           </p:cNvPr>
@@ -23943,7 +24001,7 @@
               <p:cNvPr id="3" name="Espaço Reservado para Conteúdo 2">
                 <a:extLst>
                   <a:ext uri="{FF2B5EF4-FFF2-40B4-BE49-F238E27FC236}">
-                    <a16:creationId xmlns:a16="http://schemas.microsoft.com/office/drawing/2014/main" xmlns="" id="{A4787C4F-F235-6888-5AFF-2CB1361FF6FD}"/>
+                    <a16:creationId xmlns="" xmlns:a16="http://schemas.microsoft.com/office/drawing/2014/main" id="{A4787C4F-F235-6888-5AFF-2CB1361FF6FD}"/>
                   </a:ext>
                 </a:extLst>
               </p:cNvPr>
@@ -25700,7 +25758,7 @@
           <p:cNvPr id="21" name="Mais 7">
             <a:extLst>
               <a:ext uri="{FF2B5EF4-FFF2-40B4-BE49-F238E27FC236}">
-                <a16:creationId xmlns:a16="http://schemas.microsoft.com/office/drawing/2014/main" xmlns="" id="{7B31CAF2-5F3C-E55A-EC75-167BCE74F1F7}"/>
+                <a16:creationId xmlns="" xmlns:a16="http://schemas.microsoft.com/office/drawing/2014/main" id="{7B31CAF2-5F3C-E55A-EC75-167BCE74F1F7}"/>
               </a:ext>
             </a:extLst>
           </p:cNvPr>
@@ -25784,7 +25842,7 @@
           <p:cNvPr id="2" name="Título 1">
             <a:extLst>
               <a:ext uri="{FF2B5EF4-FFF2-40B4-BE49-F238E27FC236}">
-                <a16:creationId xmlns:a16="http://schemas.microsoft.com/office/drawing/2014/main" xmlns="" id="{F625D040-A3FE-41E3-3BD0-3C0548CFEAD3}"/>
+                <a16:creationId xmlns="" xmlns:a16="http://schemas.microsoft.com/office/drawing/2014/main" id="{F625D040-A3FE-41E3-3BD0-3C0548CFEAD3}"/>
               </a:ext>
             </a:extLst>
           </p:cNvPr>
@@ -25814,7 +25872,7 @@
               <p:cNvPr id="3" name="Espaço Reservado para Conteúdo 2">
                 <a:extLst>
                   <a:ext uri="{FF2B5EF4-FFF2-40B4-BE49-F238E27FC236}">
-                    <a16:creationId xmlns:a16="http://schemas.microsoft.com/office/drawing/2014/main" xmlns="" id="{3BAFA38F-B924-7049-765D-660ED8C4845B}"/>
+                    <a16:creationId xmlns="" xmlns:a16="http://schemas.microsoft.com/office/drawing/2014/main" id="{3BAFA38F-B924-7049-765D-660ED8C4845B}"/>
                   </a:ext>
                 </a:extLst>
               </p:cNvPr>
@@ -26579,7 +26637,7 @@
           <p:cNvPr id="2" name="Título 1">
             <a:extLst>
               <a:ext uri="{FF2B5EF4-FFF2-40B4-BE49-F238E27FC236}">
-                <a16:creationId xmlns:a16="http://schemas.microsoft.com/office/drawing/2014/main" xmlns="" id="{685EDE22-7739-3353-3DBC-8480197DC616}"/>
+                <a16:creationId xmlns="" xmlns:a16="http://schemas.microsoft.com/office/drawing/2014/main" id="{685EDE22-7739-3353-3DBC-8480197DC616}"/>
               </a:ext>
             </a:extLst>
           </p:cNvPr>
@@ -26609,7 +26667,7 @@
               <p:cNvPr id="3" name="Espaço Reservado para Conteúdo 2">
                 <a:extLst>
                   <a:ext uri="{FF2B5EF4-FFF2-40B4-BE49-F238E27FC236}">
-                    <a16:creationId xmlns:a16="http://schemas.microsoft.com/office/drawing/2014/main" xmlns="" id="{2145CEE8-2FB2-6EEA-841B-CC93323A97A6}"/>
+                    <a16:creationId xmlns="" xmlns:a16="http://schemas.microsoft.com/office/drawing/2014/main" id="{2145CEE8-2FB2-6EEA-841B-CC93323A97A6}"/>
                   </a:ext>
                 </a:extLst>
               </p:cNvPr>

--- a/slides/T320_Classificação (Parte IV).pptx
+++ b/slides/T320_Classificação (Parte IV).pptx
@@ -6065,7 +6065,7 @@
           <p:cNvPr id="2" name="Título 1">
             <a:extLst>
               <a:ext uri="{FF2B5EF4-FFF2-40B4-BE49-F238E27FC236}">
-                <a16:creationId xmlns="" xmlns:a16="http://schemas.microsoft.com/office/drawing/2014/main" id="{1DB9B4FF-B06E-403C-A326-BDC64D8FF94E}"/>
+                <a16:creationId xmlns:a16="http://schemas.microsoft.com/office/drawing/2014/main" xmlns="" id="{1DB9B4FF-B06E-403C-A326-BDC64D8FF94E}"/>
               </a:ext>
             </a:extLst>
           </p:cNvPr>
@@ -6102,7 +6102,7 @@
           <p:cNvPr id="3" name="Subtítulo 2">
             <a:extLst>
               <a:ext uri="{FF2B5EF4-FFF2-40B4-BE49-F238E27FC236}">
-                <a16:creationId xmlns="" xmlns:a16="http://schemas.microsoft.com/office/drawing/2014/main" id="{247BDFCE-746E-45BF-A319-4733D58D1632}"/>
+                <a16:creationId xmlns:a16="http://schemas.microsoft.com/office/drawing/2014/main" xmlns="" id="{247BDFCE-746E-45BF-A319-4733D58D1632}"/>
               </a:ext>
             </a:extLst>
           </p:cNvPr>
@@ -6172,7 +6172,7 @@
           <p:cNvPr id="4" name="Espaço Reservado para Data 3">
             <a:extLst>
               <a:ext uri="{FF2B5EF4-FFF2-40B4-BE49-F238E27FC236}">
-                <a16:creationId xmlns="" xmlns:a16="http://schemas.microsoft.com/office/drawing/2014/main" id="{9EDE2778-5372-4104-B96D-968184DA8288}"/>
+                <a16:creationId xmlns:a16="http://schemas.microsoft.com/office/drawing/2014/main" xmlns="" id="{9EDE2778-5372-4104-B96D-968184DA8288}"/>
               </a:ext>
             </a:extLst>
           </p:cNvPr>
@@ -6201,7 +6201,7 @@
           <p:cNvPr id="5" name="Espaço Reservado para Rodapé 4">
             <a:extLst>
               <a:ext uri="{FF2B5EF4-FFF2-40B4-BE49-F238E27FC236}">
-                <a16:creationId xmlns="" xmlns:a16="http://schemas.microsoft.com/office/drawing/2014/main" id="{C1DD0F41-C861-4051-988D-3024A37A4B93}"/>
+                <a16:creationId xmlns:a16="http://schemas.microsoft.com/office/drawing/2014/main" xmlns="" id="{C1DD0F41-C861-4051-988D-3024A37A4B93}"/>
               </a:ext>
             </a:extLst>
           </p:cNvPr>
@@ -6226,7 +6226,7 @@
           <p:cNvPr id="6" name="Espaço Reservado para Número de Slide 5">
             <a:extLst>
               <a:ext uri="{FF2B5EF4-FFF2-40B4-BE49-F238E27FC236}">
-                <a16:creationId xmlns="" xmlns:a16="http://schemas.microsoft.com/office/drawing/2014/main" id="{07E5967E-D980-431A-A5DB-3F0C5030A81E}"/>
+                <a16:creationId xmlns:a16="http://schemas.microsoft.com/office/drawing/2014/main" xmlns="" id="{07E5967E-D980-431A-A5DB-3F0C5030A81E}"/>
               </a:ext>
             </a:extLst>
           </p:cNvPr>
@@ -6285,7 +6285,7 @@
           <p:cNvPr id="2" name="Título 1">
             <a:extLst>
               <a:ext uri="{FF2B5EF4-FFF2-40B4-BE49-F238E27FC236}">
-                <a16:creationId xmlns="" xmlns:a16="http://schemas.microsoft.com/office/drawing/2014/main" id="{9036C49F-3E68-4175-81BA-3C3FEE44308A}"/>
+                <a16:creationId xmlns:a16="http://schemas.microsoft.com/office/drawing/2014/main" xmlns="" id="{9036C49F-3E68-4175-81BA-3C3FEE44308A}"/>
               </a:ext>
             </a:extLst>
           </p:cNvPr>
@@ -6313,7 +6313,7 @@
           <p:cNvPr id="3" name="Espaço Reservado para Texto Vertical 2">
             <a:extLst>
               <a:ext uri="{FF2B5EF4-FFF2-40B4-BE49-F238E27FC236}">
-                <a16:creationId xmlns="" xmlns:a16="http://schemas.microsoft.com/office/drawing/2014/main" id="{426FA736-3DD3-4D4E-B57B-BBE1D8F7D424}"/>
+                <a16:creationId xmlns:a16="http://schemas.microsoft.com/office/drawing/2014/main" xmlns="" id="{426FA736-3DD3-4D4E-B57B-BBE1D8F7D424}"/>
               </a:ext>
             </a:extLst>
           </p:cNvPr>
@@ -6370,7 +6370,7 @@
           <p:cNvPr id="4" name="Espaço Reservado para Data 3">
             <a:extLst>
               <a:ext uri="{FF2B5EF4-FFF2-40B4-BE49-F238E27FC236}">
-                <a16:creationId xmlns="" xmlns:a16="http://schemas.microsoft.com/office/drawing/2014/main" id="{99E8855C-D8FD-48F6-B14E-861E0DE4D915}"/>
+                <a16:creationId xmlns:a16="http://schemas.microsoft.com/office/drawing/2014/main" xmlns="" id="{99E8855C-D8FD-48F6-B14E-861E0DE4D915}"/>
               </a:ext>
             </a:extLst>
           </p:cNvPr>
@@ -6399,7 +6399,7 @@
           <p:cNvPr id="5" name="Espaço Reservado para Rodapé 4">
             <a:extLst>
               <a:ext uri="{FF2B5EF4-FFF2-40B4-BE49-F238E27FC236}">
-                <a16:creationId xmlns="" xmlns:a16="http://schemas.microsoft.com/office/drawing/2014/main" id="{97C0BB88-2F21-42A5-ACFF-83DA47F2D340}"/>
+                <a16:creationId xmlns:a16="http://schemas.microsoft.com/office/drawing/2014/main" xmlns="" id="{97C0BB88-2F21-42A5-ACFF-83DA47F2D340}"/>
               </a:ext>
             </a:extLst>
           </p:cNvPr>
@@ -6424,7 +6424,7 @@
           <p:cNvPr id="6" name="Espaço Reservado para Número de Slide 5">
             <a:extLst>
               <a:ext uri="{FF2B5EF4-FFF2-40B4-BE49-F238E27FC236}">
-                <a16:creationId xmlns="" xmlns:a16="http://schemas.microsoft.com/office/drawing/2014/main" id="{6CB462B3-1F22-4C05-B4B8-7A279FB7D5E9}"/>
+                <a16:creationId xmlns:a16="http://schemas.microsoft.com/office/drawing/2014/main" xmlns="" id="{6CB462B3-1F22-4C05-B4B8-7A279FB7D5E9}"/>
               </a:ext>
             </a:extLst>
           </p:cNvPr>
@@ -6483,7 +6483,7 @@
           <p:cNvPr id="2" name="Título Vertical 1">
             <a:extLst>
               <a:ext uri="{FF2B5EF4-FFF2-40B4-BE49-F238E27FC236}">
-                <a16:creationId xmlns="" xmlns:a16="http://schemas.microsoft.com/office/drawing/2014/main" id="{EAEAB728-701C-4207-A9D5-23FF45C60502}"/>
+                <a16:creationId xmlns:a16="http://schemas.microsoft.com/office/drawing/2014/main" xmlns="" id="{EAEAB728-701C-4207-A9D5-23FF45C60502}"/>
               </a:ext>
             </a:extLst>
           </p:cNvPr>
@@ -6516,7 +6516,7 @@
           <p:cNvPr id="3" name="Espaço Reservado para Texto Vertical 2">
             <a:extLst>
               <a:ext uri="{FF2B5EF4-FFF2-40B4-BE49-F238E27FC236}">
-                <a16:creationId xmlns="" xmlns:a16="http://schemas.microsoft.com/office/drawing/2014/main" id="{BA8C8CCF-7823-480A-9A19-0F664DD17E3B}"/>
+                <a16:creationId xmlns:a16="http://schemas.microsoft.com/office/drawing/2014/main" xmlns="" id="{BA8C8CCF-7823-480A-9A19-0F664DD17E3B}"/>
               </a:ext>
             </a:extLst>
           </p:cNvPr>
@@ -6578,7 +6578,7 @@
           <p:cNvPr id="4" name="Espaço Reservado para Data 3">
             <a:extLst>
               <a:ext uri="{FF2B5EF4-FFF2-40B4-BE49-F238E27FC236}">
-                <a16:creationId xmlns="" xmlns:a16="http://schemas.microsoft.com/office/drawing/2014/main" id="{721D5734-7B1F-425D-942F-6EB73344027C}"/>
+                <a16:creationId xmlns:a16="http://schemas.microsoft.com/office/drawing/2014/main" xmlns="" id="{721D5734-7B1F-425D-942F-6EB73344027C}"/>
               </a:ext>
             </a:extLst>
           </p:cNvPr>
@@ -6607,7 +6607,7 @@
           <p:cNvPr id="5" name="Espaço Reservado para Rodapé 4">
             <a:extLst>
               <a:ext uri="{FF2B5EF4-FFF2-40B4-BE49-F238E27FC236}">
-                <a16:creationId xmlns="" xmlns:a16="http://schemas.microsoft.com/office/drawing/2014/main" id="{1E1AAEAC-F08D-45FE-89EC-B1B349A868C9}"/>
+                <a16:creationId xmlns:a16="http://schemas.microsoft.com/office/drawing/2014/main" xmlns="" id="{1E1AAEAC-F08D-45FE-89EC-B1B349A868C9}"/>
               </a:ext>
             </a:extLst>
           </p:cNvPr>
@@ -6632,7 +6632,7 @@
           <p:cNvPr id="6" name="Espaço Reservado para Número de Slide 5">
             <a:extLst>
               <a:ext uri="{FF2B5EF4-FFF2-40B4-BE49-F238E27FC236}">
-                <a16:creationId xmlns="" xmlns:a16="http://schemas.microsoft.com/office/drawing/2014/main" id="{BAA44493-9911-47B2-87A6-C2141A972BC8}"/>
+                <a16:creationId xmlns:a16="http://schemas.microsoft.com/office/drawing/2014/main" xmlns="" id="{BAA44493-9911-47B2-87A6-C2141A972BC8}"/>
               </a:ext>
             </a:extLst>
           </p:cNvPr>
@@ -6691,7 +6691,7 @@
           <p:cNvPr id="2" name="Título 1">
             <a:extLst>
               <a:ext uri="{FF2B5EF4-FFF2-40B4-BE49-F238E27FC236}">
-                <a16:creationId xmlns="" xmlns:a16="http://schemas.microsoft.com/office/drawing/2014/main" id="{71BD44A5-8F21-4626-A01D-48A1C874B1D5}"/>
+                <a16:creationId xmlns:a16="http://schemas.microsoft.com/office/drawing/2014/main" xmlns="" id="{71BD44A5-8F21-4626-A01D-48A1C874B1D5}"/>
               </a:ext>
             </a:extLst>
           </p:cNvPr>
@@ -6719,7 +6719,7 @@
           <p:cNvPr id="3" name="Espaço Reservado para Conteúdo 2">
             <a:extLst>
               <a:ext uri="{FF2B5EF4-FFF2-40B4-BE49-F238E27FC236}">
-                <a16:creationId xmlns="" xmlns:a16="http://schemas.microsoft.com/office/drawing/2014/main" id="{B79E8085-65A9-48AA-951D-71D978BFF4ED}"/>
+                <a16:creationId xmlns:a16="http://schemas.microsoft.com/office/drawing/2014/main" xmlns="" id="{B79E8085-65A9-48AA-951D-71D978BFF4ED}"/>
               </a:ext>
             </a:extLst>
           </p:cNvPr>
@@ -6776,7 +6776,7 @@
           <p:cNvPr id="4" name="Espaço Reservado para Data 3">
             <a:extLst>
               <a:ext uri="{FF2B5EF4-FFF2-40B4-BE49-F238E27FC236}">
-                <a16:creationId xmlns="" xmlns:a16="http://schemas.microsoft.com/office/drawing/2014/main" id="{F05BE1AF-51EA-425D-B188-DE7BD675009F}"/>
+                <a16:creationId xmlns:a16="http://schemas.microsoft.com/office/drawing/2014/main" xmlns="" id="{F05BE1AF-51EA-425D-B188-DE7BD675009F}"/>
               </a:ext>
             </a:extLst>
           </p:cNvPr>
@@ -6805,7 +6805,7 @@
           <p:cNvPr id="5" name="Espaço Reservado para Rodapé 4">
             <a:extLst>
               <a:ext uri="{FF2B5EF4-FFF2-40B4-BE49-F238E27FC236}">
-                <a16:creationId xmlns="" xmlns:a16="http://schemas.microsoft.com/office/drawing/2014/main" id="{121BE632-29CF-4CB9-B365-C9EF38F89BE6}"/>
+                <a16:creationId xmlns:a16="http://schemas.microsoft.com/office/drawing/2014/main" xmlns="" id="{121BE632-29CF-4CB9-B365-C9EF38F89BE6}"/>
               </a:ext>
             </a:extLst>
           </p:cNvPr>
@@ -6830,7 +6830,7 @@
           <p:cNvPr id="6" name="Espaço Reservado para Número de Slide 5">
             <a:extLst>
               <a:ext uri="{FF2B5EF4-FFF2-40B4-BE49-F238E27FC236}">
-                <a16:creationId xmlns="" xmlns:a16="http://schemas.microsoft.com/office/drawing/2014/main" id="{60CF3DD1-9AEC-4A57-B461-4E4DD86FAC18}"/>
+                <a16:creationId xmlns:a16="http://schemas.microsoft.com/office/drawing/2014/main" xmlns="" id="{60CF3DD1-9AEC-4A57-B461-4E4DD86FAC18}"/>
               </a:ext>
             </a:extLst>
           </p:cNvPr>
@@ -6889,7 +6889,7 @@
           <p:cNvPr id="2" name="Título 1">
             <a:extLst>
               <a:ext uri="{FF2B5EF4-FFF2-40B4-BE49-F238E27FC236}">
-                <a16:creationId xmlns="" xmlns:a16="http://schemas.microsoft.com/office/drawing/2014/main" id="{34AB2FF0-A4D7-4E28-991D-FF26140D5988}"/>
+                <a16:creationId xmlns:a16="http://schemas.microsoft.com/office/drawing/2014/main" xmlns="" id="{34AB2FF0-A4D7-4E28-991D-FF26140D5988}"/>
               </a:ext>
             </a:extLst>
           </p:cNvPr>
@@ -6926,7 +6926,7 @@
           <p:cNvPr id="3" name="Espaço Reservado para Texto 2">
             <a:extLst>
               <a:ext uri="{FF2B5EF4-FFF2-40B4-BE49-F238E27FC236}">
-                <a16:creationId xmlns="" xmlns:a16="http://schemas.microsoft.com/office/drawing/2014/main" id="{E2AC45B0-4145-40DB-8E61-105461170604}"/>
+                <a16:creationId xmlns:a16="http://schemas.microsoft.com/office/drawing/2014/main" xmlns="" id="{E2AC45B0-4145-40DB-8E61-105461170604}"/>
               </a:ext>
             </a:extLst>
           </p:cNvPr>
@@ -7051,7 +7051,7 @@
           <p:cNvPr id="4" name="Espaço Reservado para Data 3">
             <a:extLst>
               <a:ext uri="{FF2B5EF4-FFF2-40B4-BE49-F238E27FC236}">
-                <a16:creationId xmlns="" xmlns:a16="http://schemas.microsoft.com/office/drawing/2014/main" id="{50F1D3FB-740A-4EBA-A309-2CE71D12ECFB}"/>
+                <a16:creationId xmlns:a16="http://schemas.microsoft.com/office/drawing/2014/main" xmlns="" id="{50F1D3FB-740A-4EBA-A309-2CE71D12ECFB}"/>
               </a:ext>
             </a:extLst>
           </p:cNvPr>
@@ -7080,7 +7080,7 @@
           <p:cNvPr id="5" name="Espaço Reservado para Rodapé 4">
             <a:extLst>
               <a:ext uri="{FF2B5EF4-FFF2-40B4-BE49-F238E27FC236}">
-                <a16:creationId xmlns="" xmlns:a16="http://schemas.microsoft.com/office/drawing/2014/main" id="{BDCAB18F-8715-4465-A940-F9C193A2ACE9}"/>
+                <a16:creationId xmlns:a16="http://schemas.microsoft.com/office/drawing/2014/main" xmlns="" id="{BDCAB18F-8715-4465-A940-F9C193A2ACE9}"/>
               </a:ext>
             </a:extLst>
           </p:cNvPr>
@@ -7105,7 +7105,7 @@
           <p:cNvPr id="6" name="Espaço Reservado para Número de Slide 5">
             <a:extLst>
               <a:ext uri="{FF2B5EF4-FFF2-40B4-BE49-F238E27FC236}">
-                <a16:creationId xmlns="" xmlns:a16="http://schemas.microsoft.com/office/drawing/2014/main" id="{353466C6-8248-429F-8056-FF040BF509EB}"/>
+                <a16:creationId xmlns:a16="http://schemas.microsoft.com/office/drawing/2014/main" xmlns="" id="{353466C6-8248-429F-8056-FF040BF509EB}"/>
               </a:ext>
             </a:extLst>
           </p:cNvPr>
@@ -7164,7 +7164,7 @@
           <p:cNvPr id="2" name="Título 1">
             <a:extLst>
               <a:ext uri="{FF2B5EF4-FFF2-40B4-BE49-F238E27FC236}">
-                <a16:creationId xmlns="" xmlns:a16="http://schemas.microsoft.com/office/drawing/2014/main" id="{BC7BB9F0-F14B-4A91-B2B7-35BC47FE4DE7}"/>
+                <a16:creationId xmlns:a16="http://schemas.microsoft.com/office/drawing/2014/main" xmlns="" id="{BC7BB9F0-F14B-4A91-B2B7-35BC47FE4DE7}"/>
               </a:ext>
             </a:extLst>
           </p:cNvPr>
@@ -7192,7 +7192,7 @@
           <p:cNvPr id="3" name="Espaço Reservado para Conteúdo 2">
             <a:extLst>
               <a:ext uri="{FF2B5EF4-FFF2-40B4-BE49-F238E27FC236}">
-                <a16:creationId xmlns="" xmlns:a16="http://schemas.microsoft.com/office/drawing/2014/main" id="{EC1FC1C4-73DA-47A6-8496-B0B457F7D39A}"/>
+                <a16:creationId xmlns:a16="http://schemas.microsoft.com/office/drawing/2014/main" xmlns="" id="{EC1FC1C4-73DA-47A6-8496-B0B457F7D39A}"/>
               </a:ext>
             </a:extLst>
           </p:cNvPr>
@@ -7254,7 +7254,7 @@
           <p:cNvPr id="4" name="Espaço Reservado para Conteúdo 3">
             <a:extLst>
               <a:ext uri="{FF2B5EF4-FFF2-40B4-BE49-F238E27FC236}">
-                <a16:creationId xmlns="" xmlns:a16="http://schemas.microsoft.com/office/drawing/2014/main" id="{E92F06A8-A449-4D92-9912-76873E529B38}"/>
+                <a16:creationId xmlns:a16="http://schemas.microsoft.com/office/drawing/2014/main" xmlns="" id="{E92F06A8-A449-4D92-9912-76873E529B38}"/>
               </a:ext>
             </a:extLst>
           </p:cNvPr>
@@ -7316,7 +7316,7 @@
           <p:cNvPr id="5" name="Espaço Reservado para Data 4">
             <a:extLst>
               <a:ext uri="{FF2B5EF4-FFF2-40B4-BE49-F238E27FC236}">
-                <a16:creationId xmlns="" xmlns:a16="http://schemas.microsoft.com/office/drawing/2014/main" id="{938070A4-BC2F-4D55-BD8D-DEAF11BB9EE9}"/>
+                <a16:creationId xmlns:a16="http://schemas.microsoft.com/office/drawing/2014/main" xmlns="" id="{938070A4-BC2F-4D55-BD8D-DEAF11BB9EE9}"/>
               </a:ext>
             </a:extLst>
           </p:cNvPr>
@@ -7345,7 +7345,7 @@
           <p:cNvPr id="6" name="Espaço Reservado para Rodapé 5">
             <a:extLst>
               <a:ext uri="{FF2B5EF4-FFF2-40B4-BE49-F238E27FC236}">
-                <a16:creationId xmlns="" xmlns:a16="http://schemas.microsoft.com/office/drawing/2014/main" id="{45CC2DB8-844A-465F-BA9A-7734C80C7F43}"/>
+                <a16:creationId xmlns:a16="http://schemas.microsoft.com/office/drawing/2014/main" xmlns="" id="{45CC2DB8-844A-465F-BA9A-7734C80C7F43}"/>
               </a:ext>
             </a:extLst>
           </p:cNvPr>
@@ -7370,7 +7370,7 @@
           <p:cNvPr id="7" name="Espaço Reservado para Número de Slide 6">
             <a:extLst>
               <a:ext uri="{FF2B5EF4-FFF2-40B4-BE49-F238E27FC236}">
-                <a16:creationId xmlns="" xmlns:a16="http://schemas.microsoft.com/office/drawing/2014/main" id="{4CC606A8-097B-4040-94E0-CD8C88280D8F}"/>
+                <a16:creationId xmlns:a16="http://schemas.microsoft.com/office/drawing/2014/main" xmlns="" id="{4CC606A8-097B-4040-94E0-CD8C88280D8F}"/>
               </a:ext>
             </a:extLst>
           </p:cNvPr>
@@ -7429,7 +7429,7 @@
           <p:cNvPr id="2" name="Título 1">
             <a:extLst>
               <a:ext uri="{FF2B5EF4-FFF2-40B4-BE49-F238E27FC236}">
-                <a16:creationId xmlns="" xmlns:a16="http://schemas.microsoft.com/office/drawing/2014/main" id="{76D66686-0143-4CB6-8C09-BA326F1E7ACA}"/>
+                <a16:creationId xmlns:a16="http://schemas.microsoft.com/office/drawing/2014/main" xmlns="" id="{76D66686-0143-4CB6-8C09-BA326F1E7ACA}"/>
               </a:ext>
             </a:extLst>
           </p:cNvPr>
@@ -7462,7 +7462,7 @@
           <p:cNvPr id="3" name="Espaço Reservado para Texto 2">
             <a:extLst>
               <a:ext uri="{FF2B5EF4-FFF2-40B4-BE49-F238E27FC236}">
-                <a16:creationId xmlns="" xmlns:a16="http://schemas.microsoft.com/office/drawing/2014/main" id="{0227AB85-F59E-4BCE-B846-4FA0992C2F23}"/>
+                <a16:creationId xmlns:a16="http://schemas.microsoft.com/office/drawing/2014/main" xmlns="" id="{0227AB85-F59E-4BCE-B846-4FA0992C2F23}"/>
               </a:ext>
             </a:extLst>
           </p:cNvPr>
@@ -7533,7 +7533,7 @@
           <p:cNvPr id="4" name="Espaço Reservado para Conteúdo 3">
             <a:extLst>
               <a:ext uri="{FF2B5EF4-FFF2-40B4-BE49-F238E27FC236}">
-                <a16:creationId xmlns="" xmlns:a16="http://schemas.microsoft.com/office/drawing/2014/main" id="{3373456C-7319-4D0A-827D-D29F6B083F5D}"/>
+                <a16:creationId xmlns:a16="http://schemas.microsoft.com/office/drawing/2014/main" xmlns="" id="{3373456C-7319-4D0A-827D-D29F6B083F5D}"/>
               </a:ext>
             </a:extLst>
           </p:cNvPr>
@@ -7595,7 +7595,7 @@
           <p:cNvPr id="5" name="Espaço Reservado para Texto 4">
             <a:extLst>
               <a:ext uri="{FF2B5EF4-FFF2-40B4-BE49-F238E27FC236}">
-                <a16:creationId xmlns="" xmlns:a16="http://schemas.microsoft.com/office/drawing/2014/main" id="{4CD109D0-2E83-4262-8029-A871CEC47406}"/>
+                <a16:creationId xmlns:a16="http://schemas.microsoft.com/office/drawing/2014/main" xmlns="" id="{4CD109D0-2E83-4262-8029-A871CEC47406}"/>
               </a:ext>
             </a:extLst>
           </p:cNvPr>
@@ -7666,7 +7666,7 @@
           <p:cNvPr id="6" name="Espaço Reservado para Conteúdo 5">
             <a:extLst>
               <a:ext uri="{FF2B5EF4-FFF2-40B4-BE49-F238E27FC236}">
-                <a16:creationId xmlns="" xmlns:a16="http://schemas.microsoft.com/office/drawing/2014/main" id="{AD706E3A-CFBB-4A6C-A65F-D0360A9E74FE}"/>
+                <a16:creationId xmlns:a16="http://schemas.microsoft.com/office/drawing/2014/main" xmlns="" id="{AD706E3A-CFBB-4A6C-A65F-D0360A9E74FE}"/>
               </a:ext>
             </a:extLst>
           </p:cNvPr>
@@ -7728,7 +7728,7 @@
           <p:cNvPr id="7" name="Espaço Reservado para Data 6">
             <a:extLst>
               <a:ext uri="{FF2B5EF4-FFF2-40B4-BE49-F238E27FC236}">
-                <a16:creationId xmlns="" xmlns:a16="http://schemas.microsoft.com/office/drawing/2014/main" id="{4172C0E5-5AF0-4805-BB51-443733CD2BD5}"/>
+                <a16:creationId xmlns:a16="http://schemas.microsoft.com/office/drawing/2014/main" xmlns="" id="{4172C0E5-5AF0-4805-BB51-443733CD2BD5}"/>
               </a:ext>
             </a:extLst>
           </p:cNvPr>
@@ -7757,7 +7757,7 @@
           <p:cNvPr id="8" name="Espaço Reservado para Rodapé 7">
             <a:extLst>
               <a:ext uri="{FF2B5EF4-FFF2-40B4-BE49-F238E27FC236}">
-                <a16:creationId xmlns="" xmlns:a16="http://schemas.microsoft.com/office/drawing/2014/main" id="{0E801648-156F-497E-99CF-797DF48051E1}"/>
+                <a16:creationId xmlns:a16="http://schemas.microsoft.com/office/drawing/2014/main" xmlns="" id="{0E801648-156F-497E-99CF-797DF48051E1}"/>
               </a:ext>
             </a:extLst>
           </p:cNvPr>
@@ -7782,7 +7782,7 @@
           <p:cNvPr id="9" name="Espaço Reservado para Número de Slide 8">
             <a:extLst>
               <a:ext uri="{FF2B5EF4-FFF2-40B4-BE49-F238E27FC236}">
-                <a16:creationId xmlns="" xmlns:a16="http://schemas.microsoft.com/office/drawing/2014/main" id="{EEE23D32-80E7-4796-A137-66BF842E4B53}"/>
+                <a16:creationId xmlns:a16="http://schemas.microsoft.com/office/drawing/2014/main" xmlns="" id="{EEE23D32-80E7-4796-A137-66BF842E4B53}"/>
               </a:ext>
             </a:extLst>
           </p:cNvPr>
@@ -7841,7 +7841,7 @@
           <p:cNvPr id="2" name="Título 1">
             <a:extLst>
               <a:ext uri="{FF2B5EF4-FFF2-40B4-BE49-F238E27FC236}">
-                <a16:creationId xmlns="" xmlns:a16="http://schemas.microsoft.com/office/drawing/2014/main" id="{2BCE2379-C78F-47E1-8CFC-B846E7AF148D}"/>
+                <a16:creationId xmlns:a16="http://schemas.microsoft.com/office/drawing/2014/main" xmlns="" id="{2BCE2379-C78F-47E1-8CFC-B846E7AF148D}"/>
               </a:ext>
             </a:extLst>
           </p:cNvPr>
@@ -7869,7 +7869,7 @@
           <p:cNvPr id="3" name="Espaço Reservado para Data 2">
             <a:extLst>
               <a:ext uri="{FF2B5EF4-FFF2-40B4-BE49-F238E27FC236}">
-                <a16:creationId xmlns="" xmlns:a16="http://schemas.microsoft.com/office/drawing/2014/main" id="{342600A9-7F92-4E22-9D94-E4717252A817}"/>
+                <a16:creationId xmlns:a16="http://schemas.microsoft.com/office/drawing/2014/main" xmlns="" id="{342600A9-7F92-4E22-9D94-E4717252A817}"/>
               </a:ext>
             </a:extLst>
           </p:cNvPr>
@@ -7898,7 +7898,7 @@
           <p:cNvPr id="4" name="Espaço Reservado para Rodapé 3">
             <a:extLst>
               <a:ext uri="{FF2B5EF4-FFF2-40B4-BE49-F238E27FC236}">
-                <a16:creationId xmlns="" xmlns:a16="http://schemas.microsoft.com/office/drawing/2014/main" id="{192E6BED-F546-40CC-A2DF-99CBA853654E}"/>
+                <a16:creationId xmlns:a16="http://schemas.microsoft.com/office/drawing/2014/main" xmlns="" id="{192E6BED-F546-40CC-A2DF-99CBA853654E}"/>
               </a:ext>
             </a:extLst>
           </p:cNvPr>
@@ -7923,7 +7923,7 @@
           <p:cNvPr id="5" name="Espaço Reservado para Número de Slide 4">
             <a:extLst>
               <a:ext uri="{FF2B5EF4-FFF2-40B4-BE49-F238E27FC236}">
-                <a16:creationId xmlns="" xmlns:a16="http://schemas.microsoft.com/office/drawing/2014/main" id="{6091CC40-A8C4-4063-80EB-CC5099621678}"/>
+                <a16:creationId xmlns:a16="http://schemas.microsoft.com/office/drawing/2014/main" xmlns="" id="{6091CC40-A8C4-4063-80EB-CC5099621678}"/>
               </a:ext>
             </a:extLst>
           </p:cNvPr>
@@ -7982,7 +7982,7 @@
           <p:cNvPr id="2" name="Espaço Reservado para Data 1">
             <a:extLst>
               <a:ext uri="{FF2B5EF4-FFF2-40B4-BE49-F238E27FC236}">
-                <a16:creationId xmlns="" xmlns:a16="http://schemas.microsoft.com/office/drawing/2014/main" id="{DD19515C-212C-4EAE-84A3-8FF4BC844F1B}"/>
+                <a16:creationId xmlns:a16="http://schemas.microsoft.com/office/drawing/2014/main" xmlns="" id="{DD19515C-212C-4EAE-84A3-8FF4BC844F1B}"/>
               </a:ext>
             </a:extLst>
           </p:cNvPr>
@@ -8011,7 +8011,7 @@
           <p:cNvPr id="3" name="Espaço Reservado para Rodapé 2">
             <a:extLst>
               <a:ext uri="{FF2B5EF4-FFF2-40B4-BE49-F238E27FC236}">
-                <a16:creationId xmlns="" xmlns:a16="http://schemas.microsoft.com/office/drawing/2014/main" id="{94D3D120-B3E8-4C96-861D-7A4F12F49B3A}"/>
+                <a16:creationId xmlns:a16="http://schemas.microsoft.com/office/drawing/2014/main" xmlns="" id="{94D3D120-B3E8-4C96-861D-7A4F12F49B3A}"/>
               </a:ext>
             </a:extLst>
           </p:cNvPr>
@@ -8036,7 +8036,7 @@
           <p:cNvPr id="4" name="Espaço Reservado para Número de Slide 3">
             <a:extLst>
               <a:ext uri="{FF2B5EF4-FFF2-40B4-BE49-F238E27FC236}">
-                <a16:creationId xmlns="" xmlns:a16="http://schemas.microsoft.com/office/drawing/2014/main" id="{42E49B68-FA1B-468B-9F17-D5C09243D454}"/>
+                <a16:creationId xmlns:a16="http://schemas.microsoft.com/office/drawing/2014/main" xmlns="" id="{42E49B68-FA1B-468B-9F17-D5C09243D454}"/>
               </a:ext>
             </a:extLst>
           </p:cNvPr>
@@ -8095,7 +8095,7 @@
           <p:cNvPr id="2" name="Título 1">
             <a:extLst>
               <a:ext uri="{FF2B5EF4-FFF2-40B4-BE49-F238E27FC236}">
-                <a16:creationId xmlns="" xmlns:a16="http://schemas.microsoft.com/office/drawing/2014/main" id="{1C17BCBE-A897-4319-85EC-D87909C24980}"/>
+                <a16:creationId xmlns:a16="http://schemas.microsoft.com/office/drawing/2014/main" xmlns="" id="{1C17BCBE-A897-4319-85EC-D87909C24980}"/>
               </a:ext>
             </a:extLst>
           </p:cNvPr>
@@ -8132,7 +8132,7 @@
           <p:cNvPr id="3" name="Espaço Reservado para Conteúdo 2">
             <a:extLst>
               <a:ext uri="{FF2B5EF4-FFF2-40B4-BE49-F238E27FC236}">
-                <a16:creationId xmlns="" xmlns:a16="http://schemas.microsoft.com/office/drawing/2014/main" id="{4226F885-0204-4913-868B-4B8B82576F17}"/>
+                <a16:creationId xmlns:a16="http://schemas.microsoft.com/office/drawing/2014/main" xmlns="" id="{4226F885-0204-4913-868B-4B8B82576F17}"/>
               </a:ext>
             </a:extLst>
           </p:cNvPr>
@@ -8222,7 +8222,7 @@
           <p:cNvPr id="4" name="Espaço Reservado para Texto 3">
             <a:extLst>
               <a:ext uri="{FF2B5EF4-FFF2-40B4-BE49-F238E27FC236}">
-                <a16:creationId xmlns="" xmlns:a16="http://schemas.microsoft.com/office/drawing/2014/main" id="{00F9F784-A858-441B-8AB5-697098141751}"/>
+                <a16:creationId xmlns:a16="http://schemas.microsoft.com/office/drawing/2014/main" xmlns="" id="{00F9F784-A858-441B-8AB5-697098141751}"/>
               </a:ext>
             </a:extLst>
           </p:cNvPr>
@@ -8293,7 +8293,7 @@
           <p:cNvPr id="5" name="Espaço Reservado para Data 4">
             <a:extLst>
               <a:ext uri="{FF2B5EF4-FFF2-40B4-BE49-F238E27FC236}">
-                <a16:creationId xmlns="" xmlns:a16="http://schemas.microsoft.com/office/drawing/2014/main" id="{A4DC363A-5000-472E-8B17-02E7DCB8840A}"/>
+                <a16:creationId xmlns:a16="http://schemas.microsoft.com/office/drawing/2014/main" xmlns="" id="{A4DC363A-5000-472E-8B17-02E7DCB8840A}"/>
               </a:ext>
             </a:extLst>
           </p:cNvPr>
@@ -8322,7 +8322,7 @@
           <p:cNvPr id="6" name="Espaço Reservado para Rodapé 5">
             <a:extLst>
               <a:ext uri="{FF2B5EF4-FFF2-40B4-BE49-F238E27FC236}">
-                <a16:creationId xmlns="" xmlns:a16="http://schemas.microsoft.com/office/drawing/2014/main" id="{5548425D-2C21-4C56-BAD4-662978775C28}"/>
+                <a16:creationId xmlns:a16="http://schemas.microsoft.com/office/drawing/2014/main" xmlns="" id="{5548425D-2C21-4C56-BAD4-662978775C28}"/>
               </a:ext>
             </a:extLst>
           </p:cNvPr>
@@ -8347,7 +8347,7 @@
           <p:cNvPr id="7" name="Espaço Reservado para Número de Slide 6">
             <a:extLst>
               <a:ext uri="{FF2B5EF4-FFF2-40B4-BE49-F238E27FC236}">
-                <a16:creationId xmlns="" xmlns:a16="http://schemas.microsoft.com/office/drawing/2014/main" id="{C63E9726-E64C-42B2-AE8A-8C235A956B48}"/>
+                <a16:creationId xmlns:a16="http://schemas.microsoft.com/office/drawing/2014/main" xmlns="" id="{C63E9726-E64C-42B2-AE8A-8C235A956B48}"/>
               </a:ext>
             </a:extLst>
           </p:cNvPr>
@@ -8406,7 +8406,7 @@
           <p:cNvPr id="2" name="Título 1">
             <a:extLst>
               <a:ext uri="{FF2B5EF4-FFF2-40B4-BE49-F238E27FC236}">
-                <a16:creationId xmlns="" xmlns:a16="http://schemas.microsoft.com/office/drawing/2014/main" id="{11086A78-3E74-450C-96A6-CA8AC37AF772}"/>
+                <a16:creationId xmlns:a16="http://schemas.microsoft.com/office/drawing/2014/main" xmlns="" id="{11086A78-3E74-450C-96A6-CA8AC37AF772}"/>
               </a:ext>
             </a:extLst>
           </p:cNvPr>
@@ -8443,7 +8443,7 @@
           <p:cNvPr id="3" name="Espaço Reservado para Imagem 2">
             <a:extLst>
               <a:ext uri="{FF2B5EF4-FFF2-40B4-BE49-F238E27FC236}">
-                <a16:creationId xmlns="" xmlns:a16="http://schemas.microsoft.com/office/drawing/2014/main" id="{5F5B7312-975A-4DBC-9B2F-3652ADA006FD}"/>
+                <a16:creationId xmlns:a16="http://schemas.microsoft.com/office/drawing/2014/main" xmlns="" id="{5F5B7312-975A-4DBC-9B2F-3652ADA006FD}"/>
               </a:ext>
             </a:extLst>
           </p:cNvPr>
@@ -8510,7 +8510,7 @@
           <p:cNvPr id="4" name="Espaço Reservado para Texto 3">
             <a:extLst>
               <a:ext uri="{FF2B5EF4-FFF2-40B4-BE49-F238E27FC236}">
-                <a16:creationId xmlns="" xmlns:a16="http://schemas.microsoft.com/office/drawing/2014/main" id="{AAF805F5-1DFF-41C6-944C-7D79FE0D0963}"/>
+                <a16:creationId xmlns:a16="http://schemas.microsoft.com/office/drawing/2014/main" xmlns="" id="{AAF805F5-1DFF-41C6-944C-7D79FE0D0963}"/>
               </a:ext>
             </a:extLst>
           </p:cNvPr>
@@ -8581,7 +8581,7 @@
           <p:cNvPr id="5" name="Espaço Reservado para Data 4">
             <a:extLst>
               <a:ext uri="{FF2B5EF4-FFF2-40B4-BE49-F238E27FC236}">
-                <a16:creationId xmlns="" xmlns:a16="http://schemas.microsoft.com/office/drawing/2014/main" id="{02113D81-8665-4516-BD81-C6A1F254EECD}"/>
+                <a16:creationId xmlns:a16="http://schemas.microsoft.com/office/drawing/2014/main" xmlns="" id="{02113D81-8665-4516-BD81-C6A1F254EECD}"/>
               </a:ext>
             </a:extLst>
           </p:cNvPr>
@@ -8610,7 +8610,7 @@
           <p:cNvPr id="6" name="Espaço Reservado para Rodapé 5">
             <a:extLst>
               <a:ext uri="{FF2B5EF4-FFF2-40B4-BE49-F238E27FC236}">
-                <a16:creationId xmlns="" xmlns:a16="http://schemas.microsoft.com/office/drawing/2014/main" id="{2B00C88B-FF32-40AA-A187-727D96FD7862}"/>
+                <a16:creationId xmlns:a16="http://schemas.microsoft.com/office/drawing/2014/main" xmlns="" id="{2B00C88B-FF32-40AA-A187-727D96FD7862}"/>
               </a:ext>
             </a:extLst>
           </p:cNvPr>
@@ -8635,7 +8635,7 @@
           <p:cNvPr id="7" name="Espaço Reservado para Número de Slide 6">
             <a:extLst>
               <a:ext uri="{FF2B5EF4-FFF2-40B4-BE49-F238E27FC236}">
-                <a16:creationId xmlns="" xmlns:a16="http://schemas.microsoft.com/office/drawing/2014/main" id="{A04D1A2D-69F7-4B8F-A730-BC26DC340BA6}"/>
+                <a16:creationId xmlns:a16="http://schemas.microsoft.com/office/drawing/2014/main" xmlns="" id="{A04D1A2D-69F7-4B8F-A730-BC26DC340BA6}"/>
               </a:ext>
             </a:extLst>
           </p:cNvPr>
@@ -8699,7 +8699,7 @@
           <p:cNvPr id="2" name="Espaço Reservado para Título 1">
             <a:extLst>
               <a:ext uri="{FF2B5EF4-FFF2-40B4-BE49-F238E27FC236}">
-                <a16:creationId xmlns="" xmlns:a16="http://schemas.microsoft.com/office/drawing/2014/main" id="{E69A0273-1966-4A1B-9370-4C1CE5036371}"/>
+                <a16:creationId xmlns:a16="http://schemas.microsoft.com/office/drawing/2014/main" xmlns="" id="{E69A0273-1966-4A1B-9370-4C1CE5036371}"/>
               </a:ext>
             </a:extLst>
           </p:cNvPr>
@@ -8737,7 +8737,7 @@
           <p:cNvPr id="3" name="Espaço Reservado para Texto 2">
             <a:extLst>
               <a:ext uri="{FF2B5EF4-FFF2-40B4-BE49-F238E27FC236}">
-                <a16:creationId xmlns="" xmlns:a16="http://schemas.microsoft.com/office/drawing/2014/main" id="{3B9CF87A-0448-49A7-AB25-EBC1D56A40EF}"/>
+                <a16:creationId xmlns:a16="http://schemas.microsoft.com/office/drawing/2014/main" xmlns="" id="{3B9CF87A-0448-49A7-AB25-EBC1D56A40EF}"/>
               </a:ext>
             </a:extLst>
           </p:cNvPr>
@@ -8804,7 +8804,7 @@
           <p:cNvPr id="4" name="Espaço Reservado para Data 3">
             <a:extLst>
               <a:ext uri="{FF2B5EF4-FFF2-40B4-BE49-F238E27FC236}">
-                <a16:creationId xmlns="" xmlns:a16="http://schemas.microsoft.com/office/drawing/2014/main" id="{2EF7B1F2-BB5A-44D0-816D-16AD2C71430E}"/>
+                <a16:creationId xmlns:a16="http://schemas.microsoft.com/office/drawing/2014/main" xmlns="" id="{2EF7B1F2-BB5A-44D0-816D-16AD2C71430E}"/>
               </a:ext>
             </a:extLst>
           </p:cNvPr>
@@ -8851,7 +8851,7 @@
           <p:cNvPr id="5" name="Espaço Reservado para Rodapé 4">
             <a:extLst>
               <a:ext uri="{FF2B5EF4-FFF2-40B4-BE49-F238E27FC236}">
-                <a16:creationId xmlns="" xmlns:a16="http://schemas.microsoft.com/office/drawing/2014/main" id="{C703F94C-2CC8-4DAA-BC35-14FC3E841DCD}"/>
+                <a16:creationId xmlns:a16="http://schemas.microsoft.com/office/drawing/2014/main" xmlns="" id="{C703F94C-2CC8-4DAA-BC35-14FC3E841DCD}"/>
               </a:ext>
             </a:extLst>
           </p:cNvPr>
@@ -8894,7 +8894,7 @@
           <p:cNvPr id="6" name="Espaço Reservado para Número de Slide 5">
             <a:extLst>
               <a:ext uri="{FF2B5EF4-FFF2-40B4-BE49-F238E27FC236}">
-                <a16:creationId xmlns="" xmlns:a16="http://schemas.microsoft.com/office/drawing/2014/main" id="{64051336-7048-457A-8B61-D94291D71648}"/>
+                <a16:creationId xmlns:a16="http://schemas.microsoft.com/office/drawing/2014/main" xmlns="" id="{64051336-7048-457A-8B61-D94291D71648}"/>
               </a:ext>
             </a:extLst>
           </p:cNvPr>
@@ -9262,7 +9262,7 @@
           <p:cNvPr id="2" name="Título 1">
             <a:extLst>
               <a:ext uri="{FF2B5EF4-FFF2-40B4-BE49-F238E27FC236}">
-                <a16:creationId xmlns="" xmlns:a16="http://schemas.microsoft.com/office/drawing/2014/main" id="{32666AC8-2E17-4DB4-B0F5-60C640CCFD2E}"/>
+                <a16:creationId xmlns:a16="http://schemas.microsoft.com/office/drawing/2014/main" xmlns="" id="{32666AC8-2E17-4DB4-B0F5-60C640CCFD2E}"/>
               </a:ext>
             </a:extLst>
           </p:cNvPr>
@@ -9308,7 +9308,7 @@
           <p:cNvPr id="4" name="CaixaDeTexto 3">
             <a:extLst>
               <a:ext uri="{FF2B5EF4-FFF2-40B4-BE49-F238E27FC236}">
-                <a16:creationId xmlns="" xmlns:a16="http://schemas.microsoft.com/office/drawing/2014/main" id="{430EB894-B7D4-434C-9D1A-A14094D9BEEC}"/>
+                <a16:creationId xmlns:a16="http://schemas.microsoft.com/office/drawing/2014/main" xmlns="" id="{430EB894-B7D4-434C-9D1A-A14094D9BEEC}"/>
               </a:ext>
             </a:extLst>
           </p:cNvPr>
@@ -9349,7 +9349,7 @@
           <p:cNvPr id="1026" name="Picture 2" descr="Logo">
             <a:extLst>
               <a:ext uri="{FF2B5EF4-FFF2-40B4-BE49-F238E27FC236}">
-                <a16:creationId xmlns="" xmlns:a16="http://schemas.microsoft.com/office/drawing/2014/main" id="{3F2642E0-4F6A-4196-8F58-E77D36E9A33F}"/>
+                <a16:creationId xmlns:a16="http://schemas.microsoft.com/office/drawing/2014/main" xmlns="" id="{3F2642E0-4F6A-4196-8F58-E77D36E9A33F}"/>
               </a:ext>
             </a:extLst>
           </p:cNvPr>
@@ -9394,7 +9394,7 @@
           <p:cNvPr id="5122" name="Picture 2" descr="Image result for machine learning">
             <a:extLst>
               <a:ext uri="{FF2B5EF4-FFF2-40B4-BE49-F238E27FC236}">
-                <a16:creationId xmlns="" xmlns:a16="http://schemas.microsoft.com/office/drawing/2014/main" id="{810CE0A2-4102-44A6-A370-175E7896CDCB}"/>
+                <a16:creationId xmlns:a16="http://schemas.microsoft.com/office/drawing/2014/main" xmlns="" id="{810CE0A2-4102-44A6-A370-175E7896CDCB}"/>
               </a:ext>
             </a:extLst>
           </p:cNvPr>
@@ -10798,7 +10798,7 @@
           <p:cNvPr id="13" name="CaixaDeTexto 12">
             <a:extLst>
               <a:ext uri="{FF2B5EF4-FFF2-40B4-BE49-F238E27FC236}">
-                <a16:creationId xmlns="" xmlns:a16="http://schemas.microsoft.com/office/drawing/2014/main" id="{9989FE69-01F8-8C6A-4EA0-DA1C9792B919}"/>
+                <a16:creationId xmlns:a16="http://schemas.microsoft.com/office/drawing/2014/main" xmlns="" id="{9989FE69-01F8-8C6A-4EA0-DA1C9792B919}"/>
               </a:ext>
             </a:extLst>
           </p:cNvPr>
@@ -10880,7 +10880,7 @@
           <p:cNvPr id="2" name="Título 1">
             <a:extLst>
               <a:ext uri="{FF2B5EF4-FFF2-40B4-BE49-F238E27FC236}">
-                <a16:creationId xmlns:a16="http://schemas.microsoft.com/office/drawing/2014/main" xmlns="" id="{B022D379-CAA0-9DC9-CDBD-6E0EBE1BFF31}"/>
+                <a16:creationId xmlns="" xmlns:a16="http://schemas.microsoft.com/office/drawing/2014/main" id="{B022D379-CAA0-9DC9-CDBD-6E0EBE1BFF31}"/>
               </a:ext>
             </a:extLst>
           </p:cNvPr>
@@ -10914,7 +10914,7 @@
               <p:cNvPr id="3" name="Espaço Reservado para Conteúdo 2">
                 <a:extLst>
                   <a:ext uri="{FF2B5EF4-FFF2-40B4-BE49-F238E27FC236}">
-                    <a16:creationId xmlns:a16="http://schemas.microsoft.com/office/drawing/2014/main" xmlns="" id="{B68F0D74-8673-A432-A1D7-BDEF7725851A}"/>
+                    <a16:creationId xmlns="" xmlns:a16="http://schemas.microsoft.com/office/drawing/2014/main" id="{B68F0D74-8673-A432-A1D7-BDEF7725851A}"/>
                   </a:ext>
                 </a:extLst>
               </p:cNvPr>
@@ -11201,7 +11201,7 @@
           <p:cNvPr id="2" name="Título 1">
             <a:extLst>
               <a:ext uri="{FF2B5EF4-FFF2-40B4-BE49-F238E27FC236}">
-                <a16:creationId xmlns:a16="http://schemas.microsoft.com/office/drawing/2014/main" xmlns="" id="{519F0958-530D-D942-BA01-15C1583DD1E6}"/>
+                <a16:creationId xmlns="" xmlns:a16="http://schemas.microsoft.com/office/drawing/2014/main" id="{519F0958-530D-D942-BA01-15C1583DD1E6}"/>
               </a:ext>
             </a:extLst>
           </p:cNvPr>
@@ -11228,14 +11228,14 @@
           </a:p>
         </p:txBody>
       </p:sp>
-      <mc:AlternateContent xmlns:mc="http://schemas.openxmlformats.org/markup-compatibility/2006" xmlns:a14="http://schemas.microsoft.com/office/drawing/2010/main">
-        <mc:Choice Requires="a14">
+      <mc:AlternateContent xmlns:mc="http://schemas.openxmlformats.org/markup-compatibility/2006">
+        <mc:Choice xmlns:a14="http://schemas.microsoft.com/office/drawing/2010/main" Requires="a14">
           <p:sp>
             <p:nvSpPr>
               <p:cNvPr id="3" name="Espaço Reservado para Conteúdo 2">
                 <a:extLst>
                   <a:ext uri="{FF2B5EF4-FFF2-40B4-BE49-F238E27FC236}">
-                    <a16:creationId xmlns:a16="http://schemas.microsoft.com/office/drawing/2014/main" xmlns="" id="{21416F72-28FB-E27C-D129-16A944A87C67}"/>
+                    <a16:creationId xmlns="" xmlns:a16="http://schemas.microsoft.com/office/drawing/2014/main" id="{21416F72-28FB-E27C-D129-16A944A87C67}"/>
                   </a:ext>
                 </a:extLst>
               </p:cNvPr>
@@ -11274,11 +11274,19 @@
                 </a:r>
                 <a:r>
                   <a:rPr lang="pt-BR" b="1" dirty="0"/>
-                  <a:t> classe por classificação</a:t>
-                </a:r>
-                <a:r>
-                  <a:rPr lang="pt-BR" dirty="0"/>
-                  <a:t>, portanto, ele deve ser usado apenas com </a:t>
+                  <a:t> classe por </a:t>
+                </a:r>
+                <a:r>
+                  <a:rPr lang="pt-BR" b="1" dirty="0" smtClean="0"/>
+                  <a:t>classificação</a:t>
+                </a:r>
+                <a:r>
+                  <a:rPr lang="pt-BR" dirty="0" smtClean="0"/>
+                  <a:t>, </a:t>
+                </a:r>
+                <a:r>
+                  <a:rPr lang="pt-BR" dirty="0"/>
+                  <a:t>portanto, ele deve ser usado apenas com </a:t>
                 </a:r>
                 <a:r>
                   <a:rPr lang="pt-BR" b="1" dirty="0"/>
@@ -11633,13 +11641,13 @@
             </p:txBody>
           </p:sp>
         </mc:Choice>
-        <mc:Fallback xmlns="">
+        <mc:Fallback>
           <p:sp>
             <p:nvSpPr>
               <p:cNvPr id="3" name="Espaço Reservado para Conteúdo 2">
                 <a:extLst>
                   <a:ext uri="{FF2B5EF4-FFF2-40B4-BE49-F238E27FC236}">
-                    <a16:creationId xmlns:a16="http://schemas.microsoft.com/office/drawing/2014/main" xmlns="" xmlns:a14="http://schemas.microsoft.com/office/drawing/2010/main" id="{21416F72-28FB-E27C-D129-16A944A87C67}"/>
+                    <a16:creationId xmlns="" xmlns:a16="http://schemas.microsoft.com/office/drawing/2014/main" xmlns:a14="http://schemas.microsoft.com/office/drawing/2010/main" id="{21416F72-28FB-E27C-D129-16A944A87C67}"/>
                   </a:ext>
                 </a:extLst>
               </p:cNvPr>
@@ -11712,7 +11720,7 @@
           <p:cNvPr id="2" name="Título 1">
             <a:extLst>
               <a:ext uri="{FF2B5EF4-FFF2-40B4-BE49-F238E27FC236}">
-                <a16:creationId xmlns:a16="http://schemas.microsoft.com/office/drawing/2014/main" xmlns="" id="{DCD47F25-5DD1-794E-8733-BFD771A2DE49}"/>
+                <a16:creationId xmlns="" xmlns:a16="http://schemas.microsoft.com/office/drawing/2014/main" id="{DCD47F25-5DD1-794E-8733-BFD771A2DE49}"/>
               </a:ext>
             </a:extLst>
           </p:cNvPr>
@@ -11739,14 +11747,14 @@
           </a:p>
         </p:txBody>
       </p:sp>
-      <mc:AlternateContent xmlns:mc="http://schemas.openxmlformats.org/markup-compatibility/2006" xmlns:a14="http://schemas.microsoft.com/office/drawing/2010/main">
-        <mc:Choice Requires="a14">
+      <mc:AlternateContent xmlns:mc="http://schemas.openxmlformats.org/markup-compatibility/2006">
+        <mc:Choice xmlns:a14="http://schemas.microsoft.com/office/drawing/2010/main" Requires="a14">
           <p:sp>
             <p:nvSpPr>
               <p:cNvPr id="3" name="Espaço Reservado para Conteúdo 2">
                 <a:extLst>
                   <a:ext uri="{FF2B5EF4-FFF2-40B4-BE49-F238E27FC236}">
-                    <a16:creationId xmlns:a16="http://schemas.microsoft.com/office/drawing/2014/main" xmlns="" id="{D79BB7DC-99E7-8958-EC77-566B7E3C2BBB}"/>
+                    <a16:creationId xmlns="" xmlns:a16="http://schemas.microsoft.com/office/drawing/2014/main" id="{D79BB7DC-99E7-8958-EC77-566B7E3C2BBB}"/>
                   </a:ext>
                 </a:extLst>
               </p:cNvPr>
@@ -11770,7 +11778,7 @@
               <a:lstStyle/>
               <a:p>
                 <a:r>
-                  <a:rPr lang="pt-BR" dirty="0"/>
+                  <a:rPr lang="pt-BR" dirty="0" smtClean="0"/>
                   <a:t>A </a:t>
                 </a:r>
                 <a:r>
@@ -12429,6 +12437,20 @@
                         </m:den>
                       </m:f>
                       <m:r>
+                        <a:rPr lang="pt-BR" b="0" i="1" smtClean="0">
+                          <a:latin typeface="Cambria Math" panose="02040503050406030204" pitchFamily="18" charset="0"/>
+                          <a:ea typeface="Cambria Math" panose="02040503050406030204" pitchFamily="18" charset="0"/>
+                        </a:rPr>
+                        <m:t>∀</m:t>
+                      </m:r>
+                      <m:r>
+                        <a:rPr lang="pt-BR" b="0" i="1" smtClean="0">
+                          <a:latin typeface="Cambria Math" panose="02040503050406030204" pitchFamily="18" charset="0"/>
+                          <a:ea typeface="Cambria Math" panose="02040503050406030204" pitchFamily="18" charset="0"/>
+                        </a:rPr>
+                        <m:t>𝑞</m:t>
+                      </m:r>
+                      <m:r>
                         <a:rPr lang="pt-BR" b="1" i="1" smtClean="0">
                           <a:latin typeface="Cambria Math" panose="02040503050406030204" pitchFamily="18" charset="0"/>
                         </a:rPr>
@@ -12953,7 +12975,7 @@
             </p:txBody>
           </p:sp>
         </mc:Choice>
-        <mc:Fallback xmlns="">
+        <mc:Fallback>
           <p:sp>
             <p:nvSpPr>
               <p:cNvPr id="3" name="Espaço Reservado para Conteúdo 2">
@@ -13032,7 +13054,7 @@
           <p:cNvPr id="2" name="Título 1">
             <a:extLst>
               <a:ext uri="{FF2B5EF4-FFF2-40B4-BE49-F238E27FC236}">
-                <a16:creationId xmlns:a16="http://schemas.microsoft.com/office/drawing/2014/main" xmlns="" id="{52E3438D-F516-F1D3-A02F-51857586D07A}"/>
+                <a16:creationId xmlns="" xmlns:a16="http://schemas.microsoft.com/office/drawing/2014/main" id="{52E3438D-F516-F1D3-A02F-51857586D07A}"/>
               </a:ext>
             </a:extLst>
           </p:cNvPr>
@@ -13066,7 +13088,7 @@
               <p:cNvPr id="3" name="Espaço Reservado para Conteúdo 2">
                 <a:extLst>
                   <a:ext uri="{FF2B5EF4-FFF2-40B4-BE49-F238E27FC236}">
-                    <a16:creationId xmlns:a16="http://schemas.microsoft.com/office/drawing/2014/main" xmlns="" id="{BCAAD57B-65A0-9DAD-79FC-2AE2692EB84B}"/>
+                    <a16:creationId xmlns="" xmlns:a16="http://schemas.microsoft.com/office/drawing/2014/main" id="{BCAAD57B-65A0-9DAD-79FC-2AE2692EB84B}"/>
                   </a:ext>
                 </a:extLst>
               </p:cNvPr>
@@ -13949,7 +13971,7 @@
           <p:cNvPr id="5" name="Rectangle 11">
             <a:extLst>
               <a:ext uri="{FF2B5EF4-FFF2-40B4-BE49-F238E27FC236}">
-                <a16:creationId xmlns:a16="http://schemas.microsoft.com/office/drawing/2014/main" xmlns="" id="{D1D7E603-A964-1188-9D09-B0C1E18592FA}"/>
+                <a16:creationId xmlns="" xmlns:a16="http://schemas.microsoft.com/office/drawing/2014/main" id="{D1D7E603-A964-1188-9D09-B0C1E18592FA}"/>
               </a:ext>
             </a:extLst>
           </p:cNvPr>
@@ -14031,7 +14053,7 @@
           <p:cNvPr id="2" name="Título 1">
             <a:extLst>
               <a:ext uri="{FF2B5EF4-FFF2-40B4-BE49-F238E27FC236}">
-                <a16:creationId xmlns:a16="http://schemas.microsoft.com/office/drawing/2014/main" xmlns="" id="{99DAA83A-B143-94BB-B48B-41A7423070CE}"/>
+                <a16:creationId xmlns="" xmlns:a16="http://schemas.microsoft.com/office/drawing/2014/main" id="{99DAA83A-B143-94BB-B48B-41A7423070CE}"/>
               </a:ext>
             </a:extLst>
           </p:cNvPr>
@@ -14066,7 +14088,7 @@
               <p:cNvPr id="3" name="Espaço Reservado para Conteúdo 2">
                 <a:extLst>
                   <a:ext uri="{FF2B5EF4-FFF2-40B4-BE49-F238E27FC236}">
-                    <a16:creationId xmlns:a16="http://schemas.microsoft.com/office/drawing/2014/main" xmlns="" id="{32DF54A1-52F5-C48C-7CD4-D6E451DF19D8}"/>
+                    <a16:creationId xmlns="" xmlns:a16="http://schemas.microsoft.com/office/drawing/2014/main" id="{32DF54A1-52F5-C48C-7CD4-D6E451DF19D8}"/>
                   </a:ext>
                 </a:extLst>
               </p:cNvPr>
@@ -14309,7 +14331,7 @@
           <p:cNvPr id="6" name="Imagem 5">
             <a:extLst>
               <a:ext uri="{FF2B5EF4-FFF2-40B4-BE49-F238E27FC236}">
-                <a16:creationId xmlns:a16="http://schemas.microsoft.com/office/drawing/2014/main" xmlns="" id="{ED5D1F5D-F195-0452-50D4-07E9F2B1C49D}"/>
+                <a16:creationId xmlns="" xmlns:a16="http://schemas.microsoft.com/office/drawing/2014/main" id="{ED5D1F5D-F195-0452-50D4-07E9F2B1C49D}"/>
               </a:ext>
             </a:extLst>
           </p:cNvPr>
@@ -14345,7 +14367,7 @@
           <p:cNvPr id="8" name="CaixaDeTexto 7">
             <a:extLst>
               <a:ext uri="{FF2B5EF4-FFF2-40B4-BE49-F238E27FC236}">
-                <a16:creationId xmlns:a16="http://schemas.microsoft.com/office/drawing/2014/main" xmlns="" id="{0DC5673F-9B77-2E9E-8317-E71CA8896FE0}"/>
+                <a16:creationId xmlns="" xmlns:a16="http://schemas.microsoft.com/office/drawing/2014/main" id="{0DC5673F-9B77-2E9E-8317-E71CA8896FE0}"/>
               </a:ext>
             </a:extLst>
           </p:cNvPr>
@@ -14397,7 +14419,7 @@
               <p:cNvPr id="4" name="CaixaDeTexto 3">
                 <a:extLst>
                   <a:ext uri="{FF2B5EF4-FFF2-40B4-BE49-F238E27FC236}">
-                    <a16:creationId xmlns:a16="http://schemas.microsoft.com/office/drawing/2014/main" xmlns="" id="{CBD55F82-56D5-32C8-C5AB-AF99477FBAAC}"/>
+                    <a16:creationId xmlns="" xmlns:a16="http://schemas.microsoft.com/office/drawing/2014/main" id="{CBD55F82-56D5-32C8-C5AB-AF99477FBAAC}"/>
                   </a:ext>
                 </a:extLst>
               </p:cNvPr>
@@ -14524,7 +14546,7 @@
           <p:cNvPr id="2" name="Título 1">
             <a:extLst>
               <a:ext uri="{FF2B5EF4-FFF2-40B4-BE49-F238E27FC236}">
-                <a16:creationId xmlns:a16="http://schemas.microsoft.com/office/drawing/2014/main" xmlns="" id="{99DAA83A-B143-94BB-B48B-41A7423070CE}"/>
+                <a16:creationId xmlns="" xmlns:a16="http://schemas.microsoft.com/office/drawing/2014/main" id="{99DAA83A-B143-94BB-B48B-41A7423070CE}"/>
               </a:ext>
             </a:extLst>
           </p:cNvPr>
@@ -14559,7 +14581,7 @@
               <p:cNvPr id="3" name="Espaço Reservado para Conteúdo 2">
                 <a:extLst>
                   <a:ext uri="{FF2B5EF4-FFF2-40B4-BE49-F238E27FC236}">
-                    <a16:creationId xmlns:a16="http://schemas.microsoft.com/office/drawing/2014/main" xmlns="" id="{32DF54A1-52F5-C48C-7CD4-D6E451DF19D8}"/>
+                    <a16:creationId xmlns="" xmlns:a16="http://schemas.microsoft.com/office/drawing/2014/main" id="{32DF54A1-52F5-C48C-7CD4-D6E451DF19D8}"/>
                   </a:ext>
                 </a:extLst>
               </p:cNvPr>
@@ -15120,7 +15142,7 @@
           <p:cNvPr id="6" name="Imagem 5">
             <a:extLst>
               <a:ext uri="{FF2B5EF4-FFF2-40B4-BE49-F238E27FC236}">
-                <a16:creationId xmlns:a16="http://schemas.microsoft.com/office/drawing/2014/main" xmlns="" id="{ED5D1F5D-F195-0452-50D4-07E9F2B1C49D}"/>
+                <a16:creationId xmlns="" xmlns:a16="http://schemas.microsoft.com/office/drawing/2014/main" id="{ED5D1F5D-F195-0452-50D4-07E9F2B1C49D}"/>
               </a:ext>
             </a:extLst>
           </p:cNvPr>
@@ -15158,7 +15180,7 @@
               <p:cNvPr id="4" name="CaixaDeTexto 3">
                 <a:extLst>
                   <a:ext uri="{FF2B5EF4-FFF2-40B4-BE49-F238E27FC236}">
-                    <a16:creationId xmlns:a16="http://schemas.microsoft.com/office/drawing/2014/main" xmlns="" id="{2B7728A0-505D-9DAE-23EC-8172E2EEEFA9}"/>
+                    <a16:creationId xmlns="" xmlns:a16="http://schemas.microsoft.com/office/drawing/2014/main" id="{2B7728A0-505D-9DAE-23EC-8172E2EEEFA9}"/>
                   </a:ext>
                 </a:extLst>
               </p:cNvPr>
@@ -15285,7 +15307,7 @@
           <p:cNvPr id="2" name="Título 1">
             <a:extLst>
               <a:ext uri="{FF2B5EF4-FFF2-40B4-BE49-F238E27FC236}">
-                <a16:creationId xmlns:a16="http://schemas.microsoft.com/office/drawing/2014/main" xmlns="" id="{028A152F-93D8-11FA-9B7A-B62AE5BB6486}"/>
+                <a16:creationId xmlns="" xmlns:a16="http://schemas.microsoft.com/office/drawing/2014/main" id="{028A152F-93D8-11FA-9B7A-B62AE5BB6486}"/>
               </a:ext>
             </a:extLst>
           </p:cNvPr>
@@ -15312,14 +15334,14 @@
           </a:p>
         </p:txBody>
       </p:sp>
-      <mc:AlternateContent xmlns:mc="http://schemas.openxmlformats.org/markup-compatibility/2006" xmlns:a14="http://schemas.microsoft.com/office/drawing/2010/main">
-        <mc:Choice Requires="a14">
+      <mc:AlternateContent xmlns:mc="http://schemas.openxmlformats.org/markup-compatibility/2006">
+        <mc:Choice xmlns:a14="http://schemas.microsoft.com/office/drawing/2010/main" Requires="a14">
           <p:sp>
             <p:nvSpPr>
               <p:cNvPr id="3" name="Espaço Reservado para Conteúdo 2">
                 <a:extLst>
                   <a:ext uri="{FF2B5EF4-FFF2-40B4-BE49-F238E27FC236}">
-                    <a16:creationId xmlns:a16="http://schemas.microsoft.com/office/drawing/2014/main" xmlns="" id="{B3535727-BB24-BB15-5C03-3DA9A3F9A09A}"/>
+                    <a16:creationId xmlns="" xmlns:a16="http://schemas.microsoft.com/office/drawing/2014/main" id="{B3535727-BB24-BB15-5C03-3DA9A3F9A09A}"/>
                   </a:ext>
                 </a:extLst>
               </p:cNvPr>
@@ -15382,7 +15404,11 @@
                 </a:r>
                 <a:r>
                   <a:rPr lang="pt-BR" dirty="0"/>
-                  <a:t> (i.e., </a:t>
+                  <a:t> (i.e</a:t>
+                </a:r>
+                <a:r>
+                  <a:rPr lang="pt-BR" dirty="0" smtClean="0"/>
+                  <a:t>., a </a:t>
                 </a:r>
                 <a:r>
                   <a:rPr lang="pt-BR" b="1" dirty="0"/>
@@ -15448,13 +15474,13 @@
             </p:txBody>
           </p:sp>
         </mc:Choice>
-        <mc:Fallback xmlns="">
+        <mc:Fallback>
           <p:sp>
             <p:nvSpPr>
               <p:cNvPr id="3" name="Espaço Reservado para Conteúdo 2">
                 <a:extLst>
                   <a:ext uri="{FF2B5EF4-FFF2-40B4-BE49-F238E27FC236}">
-                    <a16:creationId xmlns:a16="http://schemas.microsoft.com/office/drawing/2014/main" id="{B3535727-BB24-BB15-5C03-3DA9A3F9A09A}"/>
+                    <a16:creationId xmlns="" xmlns:a16="http://schemas.microsoft.com/office/drawing/2014/main" xmlns:a14="http://schemas.microsoft.com/office/drawing/2010/main" id="{B3535727-BB24-BB15-5C03-3DA9A3F9A09A}"/>
                   </a:ext>
                 </a:extLst>
               </p:cNvPr>
@@ -15470,10 +15496,10 @@
                 <a:off x="6096001" y="1825624"/>
                 <a:ext cx="5998028" cy="5032375"/>
               </a:xfrm>
-              <a:blipFill>
+              <a:blipFill rotWithShape="0">
                 <a:blip r:embed="rId3"/>
                 <a:stretch>
-                  <a:fillRect l="-1829" t="-1937" r="-2846"/>
+                  <a:fillRect l="-1829" t="-1937" r="-1728"/>
                 </a:stretch>
               </a:blipFill>
             </p:spPr>
@@ -15482,7 +15508,7 @@
               <a:lstStyle/>
               <a:p>
                 <a:r>
-                  <a:rPr lang="en-US">
+                  <a:rPr lang="pt-BR">
                     <a:noFill/>
                   </a:rPr>
                   <a:t> </a:t>
@@ -15497,7 +15523,7 @@
           <p:cNvPr id="4" name="Imagem 5">
             <a:extLst>
               <a:ext uri="{FF2B5EF4-FFF2-40B4-BE49-F238E27FC236}">
-                <a16:creationId xmlns:a16="http://schemas.microsoft.com/office/drawing/2014/main" xmlns="" id="{42A1713D-06B5-FB35-8488-833F7CAB7166}"/>
+                <a16:creationId xmlns="" xmlns:a16="http://schemas.microsoft.com/office/drawing/2014/main" id="{42A1713D-06B5-FB35-8488-833F7CAB7166}"/>
               </a:ext>
             </a:extLst>
           </p:cNvPr>
@@ -15563,7 +15589,7 @@
           <p:cNvPr id="2" name="Title 1">
             <a:extLst>
               <a:ext uri="{FF2B5EF4-FFF2-40B4-BE49-F238E27FC236}">
-                <a16:creationId xmlns:a16="http://schemas.microsoft.com/office/drawing/2014/main" xmlns="" id="{2DB9D242-5419-0FFB-7863-B3BB3BD80869}"/>
+                <a16:creationId xmlns="" xmlns:a16="http://schemas.microsoft.com/office/drawing/2014/main" id="{2DB9D242-5419-0FFB-7863-B3BB3BD80869}"/>
               </a:ext>
             </a:extLst>
           </p:cNvPr>
@@ -15587,14 +15613,14 @@
           </a:p>
         </p:txBody>
       </p:sp>
-      <mc:AlternateContent xmlns:mc="http://schemas.openxmlformats.org/markup-compatibility/2006" xmlns:a14="http://schemas.microsoft.com/office/drawing/2010/main">
-        <mc:Choice Requires="a14">
+      <mc:AlternateContent xmlns:mc="http://schemas.openxmlformats.org/markup-compatibility/2006">
+        <mc:Choice xmlns:a14="http://schemas.microsoft.com/office/drawing/2010/main" Requires="a14">
           <p:sp>
             <p:nvSpPr>
               <p:cNvPr id="3" name="Content Placeholder 2">
                 <a:extLst>
                   <a:ext uri="{FF2B5EF4-FFF2-40B4-BE49-F238E27FC236}">
-                    <a16:creationId xmlns:a16="http://schemas.microsoft.com/office/drawing/2014/main" xmlns="" id="{34B1DEA3-BAAD-D90C-CD9D-99A5A24F4544}"/>
+                    <a16:creationId xmlns="" xmlns:a16="http://schemas.microsoft.com/office/drawing/2014/main" id="{34B1DEA3-BAAD-D90C-CD9D-99A5A24F4544}"/>
                   </a:ext>
                 </a:extLst>
               </p:cNvPr>
@@ -15618,7 +15644,7 @@
               <a:lstStyle/>
               <a:p>
                 <a:r>
-                  <a:rPr lang="pt-BR" dirty="0"/>
+                  <a:rPr lang="pt-BR" dirty="0" smtClean="0"/>
                   <a:t>Para atingir o objetivo, devemos definir uma </a:t>
                 </a:r>
                 <a:r>
@@ -15913,30 +15939,43 @@
                                       </m:ctrlPr>
                                     </m:dPr>
                                     <m:e>
-                                      <m:acc>
-                                        <m:accPr>
-                                          <m:chr m:val="̂"/>
+                                      <m:sSub>
+                                        <m:sSubPr>
                                           <m:ctrlPr>
-                                            <a:rPr lang="pt-BR" i="1">
+                                            <a:rPr lang="pt-BR" i="1" smtClean="0">
                                               <a:latin typeface="Cambria Math" panose="02040503050406030204" pitchFamily="18" charset="0"/>
                                             </a:rPr>
                                           </m:ctrlPr>
-                                        </m:accPr>
+                                        </m:sSubPr>
                                         <m:e>
+                                          <m:acc>
+                                            <m:accPr>
+                                              <m:chr m:val="̂"/>
+                                              <m:ctrlPr>
+                                                <a:rPr lang="pt-BR" i="1">
+                                                  <a:latin typeface="Cambria Math" panose="02040503050406030204" pitchFamily="18" charset="0"/>
+                                                </a:rPr>
+                                              </m:ctrlPr>
+                                            </m:accPr>
+                                            <m:e>
+                                              <m:r>
+                                                <a:rPr lang="pt-BR" i="1">
+                                                  <a:latin typeface="Cambria Math" panose="02040503050406030204" pitchFamily="18" charset="0"/>
+                                                </a:rPr>
+                                                <m:t>𝑦</m:t>
+                                              </m:r>
+                                            </m:e>
+                                          </m:acc>
+                                        </m:e>
+                                        <m:sub>
                                           <m:r>
-                                            <a:rPr lang="pt-BR" i="1">
+                                            <a:rPr lang="pt-BR" b="0" i="1" smtClean="0">
                                               <a:latin typeface="Cambria Math" panose="02040503050406030204" pitchFamily="18" charset="0"/>
                                             </a:rPr>
-                                            <m:t>𝑦</m:t>
+                                            <m:t>𝑞</m:t>
                                           </m:r>
-                                        </m:e>
-                                      </m:acc>
-                                      <m:r>
-                                        <a:rPr lang="pt-BR" i="1">
-                                          <a:latin typeface="Cambria Math" panose="02040503050406030204" pitchFamily="18" charset="0"/>
-                                        </a:rPr>
-                                        <m:t> </m:t>
-                                      </m:r>
+                                        </m:sub>
+                                      </m:sSub>
                                       <m:d>
                                         <m:dPr>
                                           <m:ctrlPr>
@@ -16138,30 +16177,43 @@
                         </m:ctrlPr>
                       </m:sSubSupPr>
                       <m:e>
-                        <m:acc>
-                          <m:accPr>
-                            <m:chr m:val="̂"/>
+                        <m:sSub>
+                          <m:sSubPr>
                             <m:ctrlPr>
                               <a:rPr lang="pt-BR" i="1">
                                 <a:latin typeface="Cambria Math" panose="02040503050406030204" pitchFamily="18" charset="0"/>
                               </a:rPr>
                             </m:ctrlPr>
-                          </m:accPr>
+                          </m:sSubPr>
                           <m:e>
+                            <m:acc>
+                              <m:accPr>
+                                <m:chr m:val="̂"/>
+                                <m:ctrlPr>
+                                  <a:rPr lang="pt-BR" i="1">
+                                    <a:latin typeface="Cambria Math" panose="02040503050406030204" pitchFamily="18" charset="0"/>
+                                  </a:rPr>
+                                </m:ctrlPr>
+                              </m:accPr>
+                              <m:e>
+                                <m:r>
+                                  <a:rPr lang="pt-BR" i="1">
+                                    <a:latin typeface="Cambria Math" panose="02040503050406030204" pitchFamily="18" charset="0"/>
+                                  </a:rPr>
+                                  <m:t>𝑦</m:t>
+                                </m:r>
+                              </m:e>
+                            </m:acc>
+                          </m:e>
+                          <m:sub>
                             <m:r>
-                              <a:rPr lang="pt-BR" b="0" i="1">
+                              <a:rPr lang="pt-BR" i="1">
                                 <a:latin typeface="Cambria Math" panose="02040503050406030204" pitchFamily="18" charset="0"/>
                               </a:rPr>
-                              <m:t>𝑦</m:t>
+                              <m:t>𝑞</m:t>
                             </m:r>
-                          </m:e>
-                        </m:acc>
-                        <m:r>
-                          <a:rPr lang="pt-BR" b="0" i="1">
-                            <a:latin typeface="Cambria Math" panose="02040503050406030204" pitchFamily="18" charset="0"/>
-                          </a:rPr>
-                          <m:t> </m:t>
-                        </m:r>
+                          </m:sub>
+                        </m:sSub>
                         <m:d>
                           <m:dPr>
                             <m:ctrlPr>
@@ -16391,7 +16443,7 @@
             </p:txBody>
           </p:sp>
         </mc:Choice>
-        <mc:Fallback xmlns="">
+        <mc:Fallback>
           <p:sp>
             <p:nvSpPr>
               <p:cNvPr id="3" name="Content Placeholder 2">
@@ -16416,7 +16468,7 @@
               <a:blipFill rotWithShape="0">
                 <a:blip r:embed="rId2"/>
                 <a:stretch>
-                  <a:fillRect l="-1074" t="-1937" r="-376" b="-2179"/>
+                  <a:fillRect l="-1074" t="-1937" r="-913" b="-2300"/>
                 </a:stretch>
               </a:blipFill>
             </p:spPr>
@@ -16470,7 +16522,7 @@
           <p:cNvPr id="2" name="Title 1">
             <a:extLst>
               <a:ext uri="{FF2B5EF4-FFF2-40B4-BE49-F238E27FC236}">
-                <a16:creationId xmlns:a16="http://schemas.microsoft.com/office/drawing/2014/main" xmlns="" id="{997538D5-DC01-EC48-38D2-99D754F1BB92}"/>
+                <a16:creationId xmlns="" xmlns:a16="http://schemas.microsoft.com/office/drawing/2014/main" id="{997538D5-DC01-EC48-38D2-99D754F1BB92}"/>
               </a:ext>
             </a:extLst>
           </p:cNvPr>
@@ -16494,14 +16546,14 @@
           </a:p>
         </p:txBody>
       </p:sp>
-      <mc:AlternateContent xmlns:mc="http://schemas.openxmlformats.org/markup-compatibility/2006" xmlns:a14="http://schemas.microsoft.com/office/drawing/2010/main">
-        <mc:Choice Requires="a14">
+      <mc:AlternateContent xmlns:mc="http://schemas.openxmlformats.org/markup-compatibility/2006">
+        <mc:Choice xmlns:a14="http://schemas.microsoft.com/office/drawing/2010/main" Requires="a14">
           <p:sp>
             <p:nvSpPr>
               <p:cNvPr id="3" name="Content Placeholder 2">
                 <a:extLst>
                   <a:ext uri="{FF2B5EF4-FFF2-40B4-BE49-F238E27FC236}">
-                    <a16:creationId xmlns:a16="http://schemas.microsoft.com/office/drawing/2014/main" xmlns="" id="{17D7928D-3A32-7330-5FDC-756155EF2F3D}"/>
+                    <a16:creationId xmlns="" xmlns:a16="http://schemas.microsoft.com/office/drawing/2014/main" id="{17D7928D-3A32-7330-5FDC-756155EF2F3D}"/>
                   </a:ext>
                 </a:extLst>
               </p:cNvPr>
@@ -16766,30 +16818,43 @@
                                       </m:ctrlPr>
                                     </m:dPr>
                                     <m:e>
-                                      <m:acc>
-                                        <m:accPr>
-                                          <m:chr m:val="̂"/>
+                                      <m:sSub>
+                                        <m:sSubPr>
                                           <m:ctrlPr>
                                             <a:rPr lang="pt-BR" i="1">
                                               <a:latin typeface="Cambria Math" panose="02040503050406030204" pitchFamily="18" charset="0"/>
                                             </a:rPr>
                                           </m:ctrlPr>
-                                        </m:accPr>
+                                        </m:sSubPr>
                                         <m:e>
+                                          <m:acc>
+                                            <m:accPr>
+                                              <m:chr m:val="̂"/>
+                                              <m:ctrlPr>
+                                                <a:rPr lang="pt-BR" i="1">
+                                                  <a:latin typeface="Cambria Math" panose="02040503050406030204" pitchFamily="18" charset="0"/>
+                                                </a:rPr>
+                                              </m:ctrlPr>
+                                            </m:accPr>
+                                            <m:e>
+                                              <m:r>
+                                                <a:rPr lang="pt-BR" i="1">
+                                                  <a:latin typeface="Cambria Math" panose="02040503050406030204" pitchFamily="18" charset="0"/>
+                                                </a:rPr>
+                                                <m:t>𝑦</m:t>
+                                              </m:r>
+                                            </m:e>
+                                          </m:acc>
+                                        </m:e>
+                                        <m:sub>
                                           <m:r>
                                             <a:rPr lang="pt-BR" i="1">
                                               <a:latin typeface="Cambria Math" panose="02040503050406030204" pitchFamily="18" charset="0"/>
                                             </a:rPr>
-                                            <m:t>𝑦</m:t>
+                                            <m:t>𝑞</m:t>
                                           </m:r>
-                                        </m:e>
-                                      </m:acc>
-                                      <m:r>
-                                        <a:rPr lang="pt-BR" i="1">
-                                          <a:latin typeface="Cambria Math" panose="02040503050406030204" pitchFamily="18" charset="0"/>
-                                        </a:rPr>
-                                        <m:t> </m:t>
-                                      </m:r>
+                                        </m:sub>
+                                      </m:sSub>
                                       <m:d>
                                         <m:dPr>
                                           <m:ctrlPr>
@@ -16965,7 +17030,7 @@
             </p:txBody>
           </p:sp>
         </mc:Choice>
-        <mc:Fallback xmlns="">
+        <mc:Fallback>
           <p:sp>
             <p:nvSpPr>
               <p:cNvPr id="3" name="Content Placeholder 2">
@@ -17139,7 +17204,7 @@
           <p:cNvPr id="2" name="Título 1">
             <a:extLst>
               <a:ext uri="{FF2B5EF4-FFF2-40B4-BE49-F238E27FC236}">
-                <a16:creationId xmlns:a16="http://schemas.microsoft.com/office/drawing/2014/main" xmlns="" id="{1FE7CD05-66F2-8967-6154-CCED38E0F987}"/>
+                <a16:creationId xmlns="" xmlns:a16="http://schemas.microsoft.com/office/drawing/2014/main" id="{1FE7CD05-66F2-8967-6154-CCED38E0F987}"/>
               </a:ext>
             </a:extLst>
           </p:cNvPr>
@@ -17162,14 +17227,14 @@
           </a:p>
         </p:txBody>
       </p:sp>
-      <mc:AlternateContent xmlns:mc="http://schemas.openxmlformats.org/markup-compatibility/2006" xmlns:a14="http://schemas.microsoft.com/office/drawing/2010/main">
-        <mc:Choice Requires="a14">
+      <mc:AlternateContent xmlns:mc="http://schemas.openxmlformats.org/markup-compatibility/2006">
+        <mc:Choice xmlns:a14="http://schemas.microsoft.com/office/drawing/2010/main" Requires="a14">
           <p:sp>
             <p:nvSpPr>
               <p:cNvPr id="3" name="Espaço Reservado para Conteúdo 2">
                 <a:extLst>
                   <a:ext uri="{FF2B5EF4-FFF2-40B4-BE49-F238E27FC236}">
-                    <a16:creationId xmlns:a16="http://schemas.microsoft.com/office/drawing/2014/main" xmlns="" id="{21A86630-5D79-AD4B-79FC-6C8373E8DB39}"/>
+                    <a16:creationId xmlns="" xmlns:a16="http://schemas.microsoft.com/office/drawing/2014/main" id="{21A86630-5D79-AD4B-79FC-6C8373E8DB39}"/>
                   </a:ext>
                 </a:extLst>
               </p:cNvPr>
@@ -17415,12 +17480,6 @@
                                       </m:r>
                                     </m:e>
                                   </m:acc>
-                                  <m:r>
-                                    <a:rPr lang="pt-BR" b="0" i="1" smtClean="0">
-                                      <a:latin typeface="Cambria Math" panose="02040503050406030204" pitchFamily="18" charset="0"/>
-                                    </a:rPr>
-                                    <m:t> </m:t>
-                                  </m:r>
                                   <m:d>
                                     <m:dPr>
                                       <m:ctrlPr>
@@ -17773,12 +17832,6 @@
                         </m:r>
                       </m:e>
                     </m:acc>
-                    <m:r>
-                      <a:rPr lang="pt-BR" i="1">
-                        <a:latin typeface="Cambria Math" panose="02040503050406030204" pitchFamily="18" charset="0"/>
-                      </a:rPr>
-                      <m:t> </m:t>
-                    </m:r>
                     <m:d>
                       <m:dPr>
                         <m:ctrlPr>
@@ -18117,7 +18170,7 @@
             </p:txBody>
           </p:sp>
         </mc:Choice>
-        <mc:Fallback xmlns="">
+        <mc:Fallback>
           <p:sp>
             <p:nvSpPr>
               <p:cNvPr id="3" name="Espaço Reservado para Conteúdo 2">
@@ -18196,7 +18249,7 @@
           <p:cNvPr id="2" name="Título 1">
             <a:extLst>
               <a:ext uri="{FF2B5EF4-FFF2-40B4-BE49-F238E27FC236}">
-                <a16:creationId xmlns:a16="http://schemas.microsoft.com/office/drawing/2014/main" xmlns="" id="{E4598F11-6F65-0753-89FE-F5ABED77B46A}"/>
+                <a16:creationId xmlns="" xmlns:a16="http://schemas.microsoft.com/office/drawing/2014/main" id="{E4598F11-6F65-0753-89FE-F5ABED77B46A}"/>
               </a:ext>
             </a:extLst>
           </p:cNvPr>
@@ -18227,7 +18280,7 @@
               <p:cNvPr id="3" name="Espaço Reservado para Conteúdo 2">
                 <a:extLst>
                   <a:ext uri="{FF2B5EF4-FFF2-40B4-BE49-F238E27FC236}">
-                    <a16:creationId xmlns:a16="http://schemas.microsoft.com/office/drawing/2014/main" xmlns="" id="{FEF4E6DC-E916-D97A-4D18-D469285C4F2C}"/>
+                    <a16:creationId xmlns="" xmlns:a16="http://schemas.microsoft.com/office/drawing/2014/main" id="{FEF4E6DC-E916-D97A-4D18-D469285C4F2C}"/>
                   </a:ext>
                 </a:extLst>
               </p:cNvPr>
@@ -18709,7 +18762,7 @@
           <p:cNvPr id="2" name="Título 1">
             <a:extLst>
               <a:ext uri="{FF2B5EF4-FFF2-40B4-BE49-F238E27FC236}">
-                <a16:creationId xmlns:a16="http://schemas.microsoft.com/office/drawing/2014/main" xmlns="" id="{D5807923-28D2-8150-E304-526DA460D220}"/>
+                <a16:creationId xmlns="" xmlns:a16="http://schemas.microsoft.com/office/drawing/2014/main" id="{D5807923-28D2-8150-E304-526DA460D220}"/>
               </a:ext>
             </a:extLst>
           </p:cNvPr>
@@ -18738,7 +18791,7 @@
           <p:cNvPr id="3" name="Espaço Reservado para Conteúdo 2">
             <a:extLst>
               <a:ext uri="{FF2B5EF4-FFF2-40B4-BE49-F238E27FC236}">
-                <a16:creationId xmlns:a16="http://schemas.microsoft.com/office/drawing/2014/main" xmlns="" id="{FFACD180-C529-EB91-BD2D-B5F491B1E35C}"/>
+                <a16:creationId xmlns="" xmlns:a16="http://schemas.microsoft.com/office/drawing/2014/main" id="{FFACD180-C529-EB91-BD2D-B5F491B1E35C}"/>
               </a:ext>
             </a:extLst>
           </p:cNvPr>
@@ -18870,7 +18923,7 @@
           <p:cNvPr id="1026" name="Picture 2">
             <a:extLst>
               <a:ext uri="{FF2B5EF4-FFF2-40B4-BE49-F238E27FC236}">
-                <a16:creationId xmlns:a16="http://schemas.microsoft.com/office/drawing/2014/main" xmlns="" id="{6FC2BDE8-91E0-6379-9BA3-76511C6153D5}"/>
+                <a16:creationId xmlns="" xmlns:a16="http://schemas.microsoft.com/office/drawing/2014/main" id="{6FC2BDE8-91E0-6379-9BA3-76511C6153D5}"/>
               </a:ext>
             </a:extLst>
           </p:cNvPr>
@@ -18915,7 +18968,7 @@
           <p:cNvPr id="5" name="Picture 2">
             <a:extLst>
               <a:ext uri="{FF2B5EF4-FFF2-40B4-BE49-F238E27FC236}">
-                <a16:creationId xmlns:a16="http://schemas.microsoft.com/office/drawing/2014/main" xmlns="" id="{2771BE1F-7B74-36A4-AA69-9171B025A4B6}"/>
+                <a16:creationId xmlns="" xmlns:a16="http://schemas.microsoft.com/office/drawing/2014/main" id="{2771BE1F-7B74-36A4-AA69-9171B025A4B6}"/>
               </a:ext>
             </a:extLst>
           </p:cNvPr>
@@ -18990,7 +19043,7 @@
           <p:cNvPr id="2" name="Título 1">
             <a:extLst>
               <a:ext uri="{FF2B5EF4-FFF2-40B4-BE49-F238E27FC236}">
-                <a16:creationId xmlns:a16="http://schemas.microsoft.com/office/drawing/2014/main" xmlns="" id="{5D929962-9BFC-4174-AB35-CC23FA013168}"/>
+                <a16:creationId xmlns="" xmlns:a16="http://schemas.microsoft.com/office/drawing/2014/main" id="{5D929962-9BFC-4174-AB35-CC23FA013168}"/>
               </a:ext>
             </a:extLst>
           </p:cNvPr>
@@ -19014,14 +19067,14 @@
           </a:p>
         </p:txBody>
       </p:sp>
-      <mc:AlternateContent xmlns:mc="http://schemas.openxmlformats.org/markup-compatibility/2006">
-        <mc:Choice xmlns:a14="http://schemas.microsoft.com/office/drawing/2010/main" Requires="a14">
+      <mc:AlternateContent xmlns:mc="http://schemas.openxmlformats.org/markup-compatibility/2006" xmlns:a14="http://schemas.microsoft.com/office/drawing/2010/main">
+        <mc:Choice Requires="a14">
           <p:sp>
             <p:nvSpPr>
               <p:cNvPr id="3" name="Espaço Reservado para Conteúdo 2">
                 <a:extLst>
                   <a:ext uri="{FF2B5EF4-FFF2-40B4-BE49-F238E27FC236}">
-                    <a16:creationId xmlns:a16="http://schemas.microsoft.com/office/drawing/2014/main" xmlns="" id="{1D38055D-E355-F780-9CA0-0337EA0BE4FD}"/>
+                    <a16:creationId xmlns="" xmlns:a16="http://schemas.microsoft.com/office/drawing/2014/main" id="{1D38055D-E355-F780-9CA0-0337EA0BE4FD}"/>
                   </a:ext>
                 </a:extLst>
               </p:cNvPr>
@@ -20216,7 +20269,7 @@
             </p:txBody>
           </p:sp>
         </mc:Choice>
-        <mc:Fallback>
+        <mc:Fallback xmlns="">
           <p:sp>
             <p:nvSpPr>
               <p:cNvPr id="3" name="Espaço Reservado para Conteúdo 2">
@@ -20295,7 +20348,7 @@
           <p:cNvPr id="2" name="Título 1">
             <a:extLst>
               <a:ext uri="{FF2B5EF4-FFF2-40B4-BE49-F238E27FC236}">
-                <a16:creationId xmlns:a16="http://schemas.microsoft.com/office/drawing/2014/main" xmlns="" id="{01D0947A-594D-A8D5-95F3-38EB04C6BDB6}"/>
+                <a16:creationId xmlns="" xmlns:a16="http://schemas.microsoft.com/office/drawing/2014/main" id="{01D0947A-594D-A8D5-95F3-38EB04C6BDB6}"/>
               </a:ext>
             </a:extLst>
           </p:cNvPr>
@@ -20322,14 +20375,14 @@
           </a:p>
         </p:txBody>
       </p:sp>
-      <mc:AlternateContent xmlns:mc="http://schemas.openxmlformats.org/markup-compatibility/2006">
-        <mc:Choice xmlns:a14="http://schemas.microsoft.com/office/drawing/2010/main" Requires="a14">
+      <mc:AlternateContent xmlns:mc="http://schemas.openxmlformats.org/markup-compatibility/2006" xmlns:a14="http://schemas.microsoft.com/office/drawing/2010/main">
+        <mc:Choice Requires="a14">
           <p:sp>
             <p:nvSpPr>
               <p:cNvPr id="3" name="Espaço Reservado para Conteúdo 2">
                 <a:extLst>
                   <a:ext uri="{FF2B5EF4-FFF2-40B4-BE49-F238E27FC236}">
-                    <a16:creationId xmlns:a16="http://schemas.microsoft.com/office/drawing/2014/main" xmlns="" id="{DDBA288E-BBB8-E157-840C-AA685AD7D65C}"/>
+                    <a16:creationId xmlns="" xmlns:a16="http://schemas.microsoft.com/office/drawing/2014/main" id="{DDBA288E-BBB8-E157-840C-AA685AD7D65C}"/>
                   </a:ext>
                 </a:extLst>
               </p:cNvPr>
@@ -21169,7 +21222,7 @@
             </p:txBody>
           </p:sp>
         </mc:Choice>
-        <mc:Fallback>
+        <mc:Fallback xmlns="">
           <p:sp>
             <p:nvSpPr>
               <p:cNvPr id="3" name="Espaço Reservado para Conteúdo 2">
@@ -21248,7 +21301,7 @@
           <p:cNvPr id="2" name="Título 1">
             <a:extLst>
               <a:ext uri="{FF2B5EF4-FFF2-40B4-BE49-F238E27FC236}">
-                <a16:creationId xmlns:a16="http://schemas.microsoft.com/office/drawing/2014/main" xmlns="" id="{E0F1FD81-6095-2AF0-8691-34E55B8A93B5}"/>
+                <a16:creationId xmlns="" xmlns:a16="http://schemas.microsoft.com/office/drawing/2014/main" id="{E0F1FD81-6095-2AF0-8691-34E55B8A93B5}"/>
               </a:ext>
             </a:extLst>
           </p:cNvPr>
@@ -21282,7 +21335,7 @@
               <p:cNvPr id="3" name="Espaço Reservado para Conteúdo 2">
                 <a:extLst>
                   <a:ext uri="{FF2B5EF4-FFF2-40B4-BE49-F238E27FC236}">
-                    <a16:creationId xmlns:a16="http://schemas.microsoft.com/office/drawing/2014/main" xmlns="" id="{BB734B24-DA50-860B-5D55-C33F6F451B6F}"/>
+                    <a16:creationId xmlns="" xmlns:a16="http://schemas.microsoft.com/office/drawing/2014/main" id="{BB734B24-DA50-860B-5D55-C33F6F451B6F}"/>
                   </a:ext>
                 </a:extLst>
               </p:cNvPr>
@@ -21862,7 +21915,7 @@
           <p:cNvPr id="4" name="Imagem 5">
             <a:extLst>
               <a:ext uri="{FF2B5EF4-FFF2-40B4-BE49-F238E27FC236}">
-                <a16:creationId xmlns:a16="http://schemas.microsoft.com/office/drawing/2014/main" xmlns="" id="{535159CB-11DC-74B8-5C5F-D571CD018327}"/>
+                <a16:creationId xmlns="" xmlns:a16="http://schemas.microsoft.com/office/drawing/2014/main" id="{535159CB-11DC-74B8-5C5F-D571CD018327}"/>
               </a:ext>
             </a:extLst>
           </p:cNvPr>
@@ -21928,7 +21981,7 @@
           <p:cNvPr id="2" name="Título 1">
             <a:extLst>
               <a:ext uri="{FF2B5EF4-FFF2-40B4-BE49-F238E27FC236}">
-                <a16:creationId xmlns:a16="http://schemas.microsoft.com/office/drawing/2014/main" xmlns="" id="{FC175046-E9DF-FCC8-C62B-B00332089713}"/>
+                <a16:creationId xmlns="" xmlns:a16="http://schemas.microsoft.com/office/drawing/2014/main" id="{FC175046-E9DF-FCC8-C62B-B00332089713}"/>
               </a:ext>
             </a:extLst>
           </p:cNvPr>
@@ -21962,7 +22015,7 @@
               <p:cNvPr id="3" name="Espaço Reservado para Conteúdo 2">
                 <a:extLst>
                   <a:ext uri="{FF2B5EF4-FFF2-40B4-BE49-F238E27FC236}">
-                    <a16:creationId xmlns:a16="http://schemas.microsoft.com/office/drawing/2014/main" xmlns="" id="{24721BB7-DBA3-D8BF-7F98-ED91BD59DAEC}"/>
+                    <a16:creationId xmlns="" xmlns:a16="http://schemas.microsoft.com/office/drawing/2014/main" id="{24721BB7-DBA3-D8BF-7F98-ED91BD59DAEC}"/>
                   </a:ext>
                 </a:extLst>
               </p:cNvPr>
@@ -22270,7 +22323,7 @@
           <p:cNvPr id="6" name="Imagem 5">
             <a:extLst>
               <a:ext uri="{FF2B5EF4-FFF2-40B4-BE49-F238E27FC236}">
-                <a16:creationId xmlns:a16="http://schemas.microsoft.com/office/drawing/2014/main" xmlns="" id="{FF78CF76-EB26-3FAE-0391-E452288FA28E}"/>
+                <a16:creationId xmlns="" xmlns:a16="http://schemas.microsoft.com/office/drawing/2014/main" id="{FF78CF76-EB26-3FAE-0391-E452288FA28E}"/>
               </a:ext>
             </a:extLst>
           </p:cNvPr>
@@ -22306,7 +22359,7 @@
           <p:cNvPr id="5" name="Rectangle 2">
             <a:extLst>
               <a:ext uri="{FF2B5EF4-FFF2-40B4-BE49-F238E27FC236}">
-                <a16:creationId xmlns="" xmlns:a16="http://schemas.microsoft.com/office/drawing/2014/main" id="{0357C04D-3666-45D0-A263-597819F48D09}"/>
+                <a16:creationId xmlns:a16="http://schemas.microsoft.com/office/drawing/2014/main" xmlns="" id="{0357C04D-3666-45D0-A263-597819F48D09}"/>
               </a:ext>
             </a:extLst>
           </p:cNvPr>
@@ -22534,7 +22587,7 @@
           <p:cNvPr id="4" name="Título 1">
             <a:extLst>
               <a:ext uri="{FF2B5EF4-FFF2-40B4-BE49-F238E27FC236}">
-                <a16:creationId xmlns="" xmlns:a16="http://schemas.microsoft.com/office/drawing/2014/main" id="{32666AC8-2E17-4DB4-B0F5-60C640CCFD2E}"/>
+                <a16:creationId xmlns:a16="http://schemas.microsoft.com/office/drawing/2014/main" xmlns="" id="{32666AC8-2E17-4DB4-B0F5-60C640CCFD2E}"/>
               </a:ext>
             </a:extLst>
           </p:cNvPr>
@@ -22808,7 +22861,7 @@
           <p:cNvPr id="4" name="Picture 2" descr="Ana Barros (@anathinker) | Twitter">
             <a:extLst>
               <a:ext uri="{FF2B5EF4-FFF2-40B4-BE49-F238E27FC236}">
-                <a16:creationId xmlns="" xmlns:a16="http://schemas.microsoft.com/office/drawing/2014/main" id="{AF3F0044-4F7D-98F6-34C1-8351487DFDAA}"/>
+                <a16:creationId xmlns:a16="http://schemas.microsoft.com/office/drawing/2014/main" xmlns="" id="{AF3F0044-4F7D-98F6-34C1-8351487DFDAA}"/>
               </a:ext>
             </a:extLst>
           </p:cNvPr>
@@ -22855,7 +22908,7 @@
           <p:cNvPr id="5" name="Picture 6" descr="Analyzing Text Classification Techniques on Youtube Data">
             <a:extLst>
               <a:ext uri="{FF2B5EF4-FFF2-40B4-BE49-F238E27FC236}">
-                <a16:creationId xmlns="" xmlns:a16="http://schemas.microsoft.com/office/drawing/2014/main" id="{0E6041F8-AB14-54C0-C790-0288A3AC8FBA}"/>
+                <a16:creationId xmlns:a16="http://schemas.microsoft.com/office/drawing/2014/main" xmlns="" id="{0E6041F8-AB14-54C0-C790-0288A3AC8FBA}"/>
               </a:ext>
             </a:extLst>
           </p:cNvPr>
@@ -22900,7 +22953,7 @@
           <p:cNvPr id="6" name="Picture 2" descr="Sentiment Fig 1">
             <a:extLst>
               <a:ext uri="{FF2B5EF4-FFF2-40B4-BE49-F238E27FC236}">
-                <a16:creationId xmlns="" xmlns:a16="http://schemas.microsoft.com/office/drawing/2014/main" id="{1E7CC96F-55AB-1482-92F6-240F8E2E0D1E}"/>
+                <a16:creationId xmlns:a16="http://schemas.microsoft.com/office/drawing/2014/main" xmlns="" id="{1E7CC96F-55AB-1482-92F6-240F8E2E0D1E}"/>
               </a:ext>
             </a:extLst>
           </p:cNvPr>
@@ -23187,7 +23240,7 @@
           <p:cNvPr id="7" name="Picture 2" descr="Ana Barros (@anathinker) | Twitter">
             <a:extLst>
               <a:ext uri="{FF2B5EF4-FFF2-40B4-BE49-F238E27FC236}">
-                <a16:creationId xmlns="" xmlns:a16="http://schemas.microsoft.com/office/drawing/2014/main" id="{A2D479C7-0684-420F-2CCD-64C3DB79FDAB}"/>
+                <a16:creationId xmlns:a16="http://schemas.microsoft.com/office/drawing/2014/main" xmlns="" id="{A2D479C7-0684-420F-2CCD-64C3DB79FDAB}"/>
               </a:ext>
             </a:extLst>
           </p:cNvPr>
@@ -23234,7 +23287,7 @@
           <p:cNvPr id="8" name="Picture 6" descr="Analyzing Text Classification Techniques on Youtube Data">
             <a:extLst>
               <a:ext uri="{FF2B5EF4-FFF2-40B4-BE49-F238E27FC236}">
-                <a16:creationId xmlns="" xmlns:a16="http://schemas.microsoft.com/office/drawing/2014/main" id="{A59F8A2C-ACDF-09C7-B528-9064CEF3B848}"/>
+                <a16:creationId xmlns:a16="http://schemas.microsoft.com/office/drawing/2014/main" xmlns="" id="{A59F8A2C-ACDF-09C7-B528-9064CEF3B848}"/>
               </a:ext>
             </a:extLst>
           </p:cNvPr>
@@ -23279,7 +23332,7 @@
           <p:cNvPr id="9" name="Picture 2" descr="Sentiment Fig 1">
             <a:extLst>
               <a:ext uri="{FF2B5EF4-FFF2-40B4-BE49-F238E27FC236}">
-                <a16:creationId xmlns="" xmlns:a16="http://schemas.microsoft.com/office/drawing/2014/main" id="{E178FF16-CC3F-C34B-6C8B-874BC4FA61A4}"/>
+                <a16:creationId xmlns:a16="http://schemas.microsoft.com/office/drawing/2014/main" xmlns="" id="{E178FF16-CC3F-C34B-6C8B-874BC4FA61A4}"/>
               </a:ext>
             </a:extLst>
           </p:cNvPr>
@@ -23356,7 +23409,7 @@
           <p:cNvPr id="2" name="Título 1">
             <a:extLst>
               <a:ext uri="{FF2B5EF4-FFF2-40B4-BE49-F238E27FC236}">
-                <a16:creationId xmlns="" xmlns:a16="http://schemas.microsoft.com/office/drawing/2014/main" id="{95206997-C98C-FF52-62A1-725EEA7A8A7E}"/>
+                <a16:creationId xmlns:a16="http://schemas.microsoft.com/office/drawing/2014/main" xmlns="" id="{95206997-C98C-FF52-62A1-725EEA7A8A7E}"/>
               </a:ext>
             </a:extLst>
           </p:cNvPr>
@@ -23386,7 +23439,7 @@
               <p:cNvPr id="3" name="Espaço Reservado para Conteúdo 2">
                 <a:extLst>
                   <a:ext uri="{FF2B5EF4-FFF2-40B4-BE49-F238E27FC236}">
-                    <a16:creationId xmlns="" xmlns:a16="http://schemas.microsoft.com/office/drawing/2014/main" id="{50B99F56-FF18-D044-7799-0502D4F6A5FB}"/>
+                    <a16:creationId xmlns:a16="http://schemas.microsoft.com/office/drawing/2014/main" xmlns="" id="{50B99F56-FF18-D044-7799-0502D4F6A5FB}"/>
                   </a:ext>
                 </a:extLst>
               </p:cNvPr>
@@ -23971,7 +24024,7 @@
           <p:cNvPr id="2" name="Título 1">
             <a:extLst>
               <a:ext uri="{FF2B5EF4-FFF2-40B4-BE49-F238E27FC236}">
-                <a16:creationId xmlns="" xmlns:a16="http://schemas.microsoft.com/office/drawing/2014/main" id="{40D4148F-5E93-6FF0-6B66-AC9E3B82640A}"/>
+                <a16:creationId xmlns:a16="http://schemas.microsoft.com/office/drawing/2014/main" xmlns="" id="{40D4148F-5E93-6FF0-6B66-AC9E3B82640A}"/>
               </a:ext>
             </a:extLst>
           </p:cNvPr>
@@ -24001,7 +24054,7 @@
               <p:cNvPr id="3" name="Espaço Reservado para Conteúdo 2">
                 <a:extLst>
                   <a:ext uri="{FF2B5EF4-FFF2-40B4-BE49-F238E27FC236}">
-                    <a16:creationId xmlns="" xmlns:a16="http://schemas.microsoft.com/office/drawing/2014/main" id="{A4787C4F-F235-6888-5AFF-2CB1361FF6FD}"/>
+                    <a16:creationId xmlns:a16="http://schemas.microsoft.com/office/drawing/2014/main" xmlns="" id="{A4787C4F-F235-6888-5AFF-2CB1361FF6FD}"/>
                   </a:ext>
                 </a:extLst>
               </p:cNvPr>
@@ -25758,7 +25811,7 @@
           <p:cNvPr id="21" name="Mais 7">
             <a:extLst>
               <a:ext uri="{FF2B5EF4-FFF2-40B4-BE49-F238E27FC236}">
-                <a16:creationId xmlns="" xmlns:a16="http://schemas.microsoft.com/office/drawing/2014/main" id="{7B31CAF2-5F3C-E55A-EC75-167BCE74F1F7}"/>
+                <a16:creationId xmlns:a16="http://schemas.microsoft.com/office/drawing/2014/main" xmlns="" id="{7B31CAF2-5F3C-E55A-EC75-167BCE74F1F7}"/>
               </a:ext>
             </a:extLst>
           </p:cNvPr>
@@ -25842,7 +25895,7 @@
           <p:cNvPr id="2" name="Título 1">
             <a:extLst>
               <a:ext uri="{FF2B5EF4-FFF2-40B4-BE49-F238E27FC236}">
-                <a16:creationId xmlns="" xmlns:a16="http://schemas.microsoft.com/office/drawing/2014/main" id="{F625D040-A3FE-41E3-3BD0-3C0548CFEAD3}"/>
+                <a16:creationId xmlns:a16="http://schemas.microsoft.com/office/drawing/2014/main" xmlns="" id="{F625D040-A3FE-41E3-3BD0-3C0548CFEAD3}"/>
               </a:ext>
             </a:extLst>
           </p:cNvPr>
@@ -25872,7 +25925,7 @@
               <p:cNvPr id="3" name="Espaço Reservado para Conteúdo 2">
                 <a:extLst>
                   <a:ext uri="{FF2B5EF4-FFF2-40B4-BE49-F238E27FC236}">
-                    <a16:creationId xmlns="" xmlns:a16="http://schemas.microsoft.com/office/drawing/2014/main" id="{3BAFA38F-B924-7049-765D-660ED8C4845B}"/>
+                    <a16:creationId xmlns:a16="http://schemas.microsoft.com/office/drawing/2014/main" xmlns="" id="{3BAFA38F-B924-7049-765D-660ED8C4845B}"/>
                   </a:ext>
                 </a:extLst>
               </p:cNvPr>
@@ -26637,7 +26690,7 @@
           <p:cNvPr id="2" name="Título 1">
             <a:extLst>
               <a:ext uri="{FF2B5EF4-FFF2-40B4-BE49-F238E27FC236}">
-                <a16:creationId xmlns="" xmlns:a16="http://schemas.microsoft.com/office/drawing/2014/main" id="{685EDE22-7739-3353-3DBC-8480197DC616}"/>
+                <a16:creationId xmlns:a16="http://schemas.microsoft.com/office/drawing/2014/main" xmlns="" id="{685EDE22-7739-3353-3DBC-8480197DC616}"/>
               </a:ext>
             </a:extLst>
           </p:cNvPr>
@@ -26667,7 +26720,7 @@
               <p:cNvPr id="3" name="Espaço Reservado para Conteúdo 2">
                 <a:extLst>
                   <a:ext uri="{FF2B5EF4-FFF2-40B4-BE49-F238E27FC236}">
-                    <a16:creationId xmlns="" xmlns:a16="http://schemas.microsoft.com/office/drawing/2014/main" id="{2145CEE8-2FB2-6EEA-841B-CC93323A97A6}"/>
+                    <a16:creationId xmlns:a16="http://schemas.microsoft.com/office/drawing/2014/main" xmlns="" id="{2145CEE8-2FB2-6EEA-841B-CC93323A97A6}"/>
                   </a:ext>
                 </a:extLst>
               </p:cNvPr>

--- a/slides/T320_Classificação (Parte IV).pptx
+++ b/slides/T320_Classificação (Parte IV).pptx
@@ -302,7 +302,7 @@
           <a:p>
             <a:fld id="{144F1436-6906-4D93-B7A2-786C327BFA14}" type="datetimeFigureOut">
               <a:rPr lang="nl-BE" smtClean="0"/>
-              <a:t>21/03/2026</a:t>
+              <a:t>28/03/2026</a:t>
             </a:fld>
             <a:endParaRPr lang="nl-BE"/>
           </a:p>
@@ -467,7 +467,7 @@
           <a:p>
             <a:fld id="{AA8CD09E-2914-4F47-B6C1-51B2C31814C9}" type="datetimeFigureOut">
               <a:rPr lang="pt-BR" smtClean="0"/>
-              <a:t>21/03/2026</a:t>
+              <a:t>28/03/2026</a:t>
             </a:fld>
             <a:endParaRPr lang="pt-BR"/>
           </a:p>
@@ -847,546 +847,192 @@
         </p:nvSpPr>
         <p:spPr/>
       </p:sp>
-      <p:sp>
-        <p:nvSpPr>
-          <p:cNvPr id="3" name="Espaço Reservado para Anotações 2"/>
-          <p:cNvSpPr>
-            <a:spLocks noGrp="1"/>
-          </p:cNvSpPr>
-          <p:nvPr>
-            <p:ph type="body" idx="1"/>
-          </p:nvPr>
-        </p:nvSpPr>
-        <p:spPr/>
-        <p:txBody>
-          <a:bodyPr/>
-          <a:lstStyle/>
-          <a:p>
-            <a:pPr algn="l"/>
-            <a:r>
-              <a:rPr lang="pt-BR" b="0" i="0" dirty="0">
-                <a:solidFill>
-                  <a:srgbClr val="374151"/>
-                </a:solidFill>
-                <a:effectLst/>
-                <a:latin typeface="Söhne"/>
-              </a:rPr>
-              <a:t/>
-            </a:r>
-            <a:br>
-              <a:rPr lang="pt-BR" b="0" i="0" dirty="0">
-                <a:solidFill>
-                  <a:srgbClr val="374151"/>
-                </a:solidFill>
-                <a:effectLst/>
-                <a:latin typeface="Söhne"/>
-              </a:rPr>
-            </a:br>
-            <a:r>
-              <a:rPr lang="pt-BR" b="0" i="0" dirty="0">
-                <a:solidFill>
-                  <a:srgbClr val="374151"/>
-                </a:solidFill>
-                <a:effectLst/>
-                <a:latin typeface="Söhne"/>
-              </a:rPr>
-              <a:t>O problema da "</a:t>
-            </a:r>
-            <a:r>
-              <a:rPr lang="pt-BR" b="0" i="0" dirty="0" err="1">
-                <a:solidFill>
-                  <a:srgbClr val="374151"/>
-                </a:solidFill>
-                <a:effectLst/>
-                <a:latin typeface="Söhne"/>
-              </a:rPr>
-              <a:t>ReLU</a:t>
-            </a:r>
-            <a:r>
-              <a:rPr lang="pt-BR" b="0" i="0" dirty="0">
-                <a:solidFill>
-                  <a:srgbClr val="374151"/>
-                </a:solidFill>
-                <a:effectLst/>
-                <a:latin typeface="Söhne"/>
-              </a:rPr>
-              <a:t> agonizante", conhecido como "</a:t>
-            </a:r>
-            <a:r>
-              <a:rPr lang="pt-BR" b="0" i="0" dirty="0" err="1">
-                <a:solidFill>
-                  <a:srgbClr val="374151"/>
-                </a:solidFill>
-                <a:effectLst/>
-                <a:latin typeface="Söhne"/>
-              </a:rPr>
-              <a:t>dying</a:t>
-            </a:r>
-            <a:r>
-              <a:rPr lang="pt-BR" b="0" i="0" dirty="0">
-                <a:solidFill>
-                  <a:srgbClr val="374151"/>
-                </a:solidFill>
-                <a:effectLst/>
-                <a:latin typeface="Söhne"/>
-              </a:rPr>
-              <a:t> </a:t>
-            </a:r>
-            <a:r>
-              <a:rPr lang="pt-BR" b="0" i="0" dirty="0" err="1">
-                <a:solidFill>
-                  <a:srgbClr val="374151"/>
-                </a:solidFill>
-                <a:effectLst/>
-                <a:latin typeface="Söhne"/>
-              </a:rPr>
-              <a:t>ReLU</a:t>
-            </a:r>
-            <a:r>
-              <a:rPr lang="pt-BR" b="0" i="0" dirty="0">
-                <a:solidFill>
-                  <a:srgbClr val="374151"/>
-                </a:solidFill>
-                <a:effectLst/>
-                <a:latin typeface="Söhne"/>
-              </a:rPr>
-              <a:t> </a:t>
-            </a:r>
-            <a:r>
-              <a:rPr lang="pt-BR" b="0" i="0" dirty="0" err="1">
-                <a:solidFill>
-                  <a:srgbClr val="374151"/>
-                </a:solidFill>
-                <a:effectLst/>
-                <a:latin typeface="Söhne"/>
-              </a:rPr>
-              <a:t>problem</a:t>
-            </a:r>
-            <a:r>
-              <a:rPr lang="pt-BR" b="0" i="0" dirty="0">
-                <a:solidFill>
-                  <a:srgbClr val="374151"/>
-                </a:solidFill>
-                <a:effectLst/>
-                <a:latin typeface="Söhne"/>
-              </a:rPr>
-              <a:t>" em inglês, é uma desvantagem associada à função de ativação </a:t>
-            </a:r>
-            <a:r>
-              <a:rPr lang="pt-BR" b="0" i="0" dirty="0" err="1">
-                <a:solidFill>
-                  <a:srgbClr val="374151"/>
-                </a:solidFill>
-                <a:effectLst/>
-                <a:latin typeface="Söhne"/>
-              </a:rPr>
-              <a:t>ReLU</a:t>
-            </a:r>
-            <a:r>
-              <a:rPr lang="pt-BR" b="0" i="0" dirty="0">
-                <a:solidFill>
-                  <a:srgbClr val="374151"/>
-                </a:solidFill>
-                <a:effectLst/>
-                <a:latin typeface="Söhne"/>
-              </a:rPr>
-              <a:t> (</a:t>
-            </a:r>
-            <a:r>
-              <a:rPr lang="pt-BR" b="0" i="0" dirty="0" err="1">
-                <a:solidFill>
-                  <a:srgbClr val="374151"/>
-                </a:solidFill>
-                <a:effectLst/>
-                <a:latin typeface="Söhne"/>
-              </a:rPr>
-              <a:t>Rectified</a:t>
-            </a:r>
-            <a:r>
-              <a:rPr lang="pt-BR" b="0" i="0" dirty="0">
-                <a:solidFill>
-                  <a:srgbClr val="374151"/>
-                </a:solidFill>
-                <a:effectLst/>
-                <a:latin typeface="Söhne"/>
-              </a:rPr>
-              <a:t> Linear </a:t>
-            </a:r>
-            <a:r>
-              <a:rPr lang="pt-BR" b="0" i="0" dirty="0" err="1">
-                <a:solidFill>
-                  <a:srgbClr val="374151"/>
-                </a:solidFill>
-                <a:effectLst/>
-                <a:latin typeface="Söhne"/>
-              </a:rPr>
-              <a:t>Activation</a:t>
-            </a:r>
-            <a:r>
-              <a:rPr lang="pt-BR" b="0" i="0" dirty="0">
-                <a:solidFill>
-                  <a:srgbClr val="374151"/>
-                </a:solidFill>
-                <a:effectLst/>
-                <a:latin typeface="Söhne"/>
-              </a:rPr>
-              <a:t>) em redes neurais. Esse problema ocorre quando um grande número de neurônios em uma rede neural ativam para zero durante o treinamento e não conseguem atualizar seus pesos durante a retropropagação.</a:t>
-            </a:r>
-          </a:p>
-          <a:p>
-            <a:pPr algn="l"/>
-            <a:endParaRPr lang="pt-BR" b="0" i="0" dirty="0">
-              <a:solidFill>
-                <a:srgbClr val="374151"/>
-              </a:solidFill>
-              <a:effectLst/>
-              <a:latin typeface="Söhne"/>
-            </a:endParaRPr>
-          </a:p>
-          <a:p>
-            <a:pPr algn="l"/>
-            <a:r>
-              <a:rPr lang="pt-BR" b="0" i="0" dirty="0">
-                <a:solidFill>
-                  <a:srgbClr val="374151"/>
-                </a:solidFill>
-                <a:effectLst/>
-                <a:latin typeface="Söhne"/>
-              </a:rPr>
-              <a:t>Quando a saída de um neurônio </a:t>
-            </a:r>
-            <a:r>
-              <a:rPr lang="pt-BR" b="0" i="0" dirty="0" err="1">
-                <a:solidFill>
-                  <a:srgbClr val="374151"/>
-                </a:solidFill>
-                <a:effectLst/>
-                <a:latin typeface="Söhne"/>
-              </a:rPr>
-              <a:t>ReLU</a:t>
-            </a:r>
-            <a:r>
-              <a:rPr lang="pt-BR" b="0" i="0" dirty="0">
-                <a:solidFill>
-                  <a:srgbClr val="374151"/>
-                </a:solidFill>
-                <a:effectLst/>
-                <a:latin typeface="Söhne"/>
-              </a:rPr>
-              <a:t> é sempre zero (ou quase zero) para todos os exemplos do conjunto de dados, isso resulta em uma falta de atualização dos pesos desse neurônio durante o processo de otimização. Como resultado, o neurônio permanece inativo e não contribui para o aprendizado da rede.</a:t>
-            </a:r>
-          </a:p>
-          <a:p>
-            <a:pPr algn="l"/>
-            <a:endParaRPr lang="pt-BR" b="0" i="0" dirty="0">
-              <a:solidFill>
-                <a:srgbClr val="374151"/>
-              </a:solidFill>
-              <a:effectLst/>
-              <a:latin typeface="Söhne"/>
-            </a:endParaRPr>
-          </a:p>
-          <a:p>
-            <a:pPr algn="l"/>
-            <a:r>
-              <a:rPr lang="pt-BR" b="0" i="0" dirty="0">
-                <a:solidFill>
-                  <a:srgbClr val="374151"/>
-                </a:solidFill>
-                <a:effectLst/>
-                <a:latin typeface="Söhne"/>
-              </a:rPr>
-              <a:t>Isso pode levar a uma redução na capacidade da rede de aprender padrões complexos e representações úteis dos dados. A rede pode não ser capaz de modelar relações importantes nos dados e pode levar a um desempenho </a:t>
-            </a:r>
-            <a:r>
-              <a:rPr lang="pt-BR" b="0" i="0" dirty="0" err="1">
-                <a:solidFill>
-                  <a:srgbClr val="374151"/>
-                </a:solidFill>
-                <a:effectLst/>
-                <a:latin typeface="Söhne"/>
-              </a:rPr>
-              <a:t>subótimo</a:t>
-            </a:r>
-            <a:r>
-              <a:rPr lang="pt-BR" b="0" i="0" dirty="0">
-                <a:solidFill>
-                  <a:srgbClr val="374151"/>
-                </a:solidFill>
-                <a:effectLst/>
-                <a:latin typeface="Söhne"/>
-              </a:rPr>
-              <a:t>.</a:t>
-            </a:r>
-          </a:p>
-          <a:p>
-            <a:pPr algn="l"/>
-            <a:endParaRPr lang="pt-BR" b="0" i="0" dirty="0">
-              <a:solidFill>
-                <a:srgbClr val="374151"/>
-              </a:solidFill>
-              <a:effectLst/>
-              <a:latin typeface="Söhne"/>
-            </a:endParaRPr>
-          </a:p>
-          <a:p>
-            <a:pPr algn="l"/>
-            <a:r>
-              <a:rPr lang="pt-BR" b="0" i="0" dirty="0">
-                <a:solidFill>
-                  <a:srgbClr val="374151"/>
-                </a:solidFill>
-                <a:effectLst/>
-                <a:latin typeface="Söhne"/>
-              </a:rPr>
-              <a:t>Para mitigar o problema da </a:t>
-            </a:r>
-            <a:r>
-              <a:rPr lang="pt-BR" b="0" i="0" dirty="0" err="1">
-                <a:solidFill>
-                  <a:srgbClr val="374151"/>
-                </a:solidFill>
-                <a:effectLst/>
-                <a:latin typeface="Söhne"/>
-              </a:rPr>
-              <a:t>ReLU</a:t>
-            </a:r>
-            <a:r>
-              <a:rPr lang="pt-BR" b="0" i="0" dirty="0">
-                <a:solidFill>
-                  <a:srgbClr val="374151"/>
-                </a:solidFill>
-                <a:effectLst/>
-                <a:latin typeface="Söhne"/>
-              </a:rPr>
-              <a:t> agonizante, variantes da </a:t>
-            </a:r>
-            <a:r>
-              <a:rPr lang="pt-BR" b="0" i="0" dirty="0" err="1">
-                <a:solidFill>
-                  <a:srgbClr val="374151"/>
-                </a:solidFill>
-                <a:effectLst/>
-                <a:latin typeface="Söhne"/>
-              </a:rPr>
-              <a:t>ReLU</a:t>
-            </a:r>
-            <a:r>
-              <a:rPr lang="pt-BR" b="0" i="0" dirty="0">
-                <a:solidFill>
-                  <a:srgbClr val="374151"/>
-                </a:solidFill>
-                <a:effectLst/>
-                <a:latin typeface="Söhne"/>
-              </a:rPr>
-              <a:t>, como a </a:t>
-            </a:r>
-            <a:r>
-              <a:rPr lang="pt-BR" b="0" i="0" dirty="0" err="1">
-                <a:solidFill>
-                  <a:srgbClr val="374151"/>
-                </a:solidFill>
-                <a:effectLst/>
-                <a:latin typeface="Söhne"/>
-              </a:rPr>
-              <a:t>Leaky</a:t>
-            </a:r>
-            <a:r>
-              <a:rPr lang="pt-BR" b="0" i="0" dirty="0">
-                <a:solidFill>
-                  <a:srgbClr val="374151"/>
-                </a:solidFill>
-                <a:effectLst/>
-                <a:latin typeface="Söhne"/>
-              </a:rPr>
-              <a:t> </a:t>
-            </a:r>
-            <a:r>
-              <a:rPr lang="pt-BR" b="0" i="0" dirty="0" err="1">
-                <a:solidFill>
-                  <a:srgbClr val="374151"/>
-                </a:solidFill>
-                <a:effectLst/>
-                <a:latin typeface="Söhne"/>
-              </a:rPr>
-              <a:t>ReLU</a:t>
-            </a:r>
-            <a:r>
-              <a:rPr lang="pt-BR" b="0" i="0" dirty="0">
-                <a:solidFill>
-                  <a:srgbClr val="374151"/>
-                </a:solidFill>
-                <a:effectLst/>
-                <a:latin typeface="Söhne"/>
-              </a:rPr>
-              <a:t>, </a:t>
-            </a:r>
-            <a:r>
-              <a:rPr lang="pt-BR" b="0" i="0" dirty="0" err="1">
-                <a:solidFill>
-                  <a:srgbClr val="374151"/>
-                </a:solidFill>
-                <a:effectLst/>
-                <a:latin typeface="Söhne"/>
-              </a:rPr>
-              <a:t>Parametric</a:t>
-            </a:r>
-            <a:r>
-              <a:rPr lang="pt-BR" b="0" i="0" dirty="0">
-                <a:solidFill>
-                  <a:srgbClr val="374151"/>
-                </a:solidFill>
-                <a:effectLst/>
-                <a:latin typeface="Söhne"/>
-              </a:rPr>
-              <a:t> </a:t>
-            </a:r>
-            <a:r>
-              <a:rPr lang="pt-BR" b="0" i="0" dirty="0" err="1">
-                <a:solidFill>
-                  <a:srgbClr val="374151"/>
-                </a:solidFill>
-                <a:effectLst/>
-                <a:latin typeface="Söhne"/>
-              </a:rPr>
-              <a:t>ReLU</a:t>
-            </a:r>
-            <a:r>
-              <a:rPr lang="pt-BR" b="0" i="0" dirty="0">
-                <a:solidFill>
-                  <a:srgbClr val="374151"/>
-                </a:solidFill>
-                <a:effectLst/>
-                <a:latin typeface="Söhne"/>
-              </a:rPr>
-              <a:t> e </a:t>
-            </a:r>
-            <a:r>
-              <a:rPr lang="pt-BR" b="0" i="0" dirty="0" err="1">
-                <a:solidFill>
-                  <a:srgbClr val="374151"/>
-                </a:solidFill>
-                <a:effectLst/>
-                <a:latin typeface="Söhne"/>
-              </a:rPr>
-              <a:t>Exponential</a:t>
-            </a:r>
-            <a:r>
-              <a:rPr lang="pt-BR" b="0" i="0" dirty="0">
-                <a:solidFill>
-                  <a:srgbClr val="374151"/>
-                </a:solidFill>
-                <a:effectLst/>
-                <a:latin typeface="Söhne"/>
-              </a:rPr>
-              <a:t> Linear </a:t>
-            </a:r>
-            <a:r>
-              <a:rPr lang="pt-BR" b="0" i="0" dirty="0" err="1">
-                <a:solidFill>
-                  <a:srgbClr val="374151"/>
-                </a:solidFill>
-                <a:effectLst/>
-                <a:latin typeface="Söhne"/>
-              </a:rPr>
-              <a:t>Units</a:t>
-            </a:r>
-            <a:r>
-              <a:rPr lang="pt-BR" b="0" i="0" dirty="0">
-                <a:solidFill>
-                  <a:srgbClr val="374151"/>
-                </a:solidFill>
-                <a:effectLst/>
-                <a:latin typeface="Söhne"/>
-              </a:rPr>
-              <a:t> (ELU), foram propostas. Essas variantes buscam resolver o problema de ativação constante igual a zero, permitindo que os neurônios continuem aprendendo mesmo quando estão desativados para algumas entradas.</a:t>
-            </a:r>
-          </a:p>
-          <a:p>
-            <a:pPr algn="l"/>
-            <a:endParaRPr lang="pt-BR" b="0" i="0" dirty="0">
-              <a:solidFill>
-                <a:srgbClr val="374151"/>
-              </a:solidFill>
-              <a:effectLst/>
-              <a:latin typeface="Söhne"/>
-            </a:endParaRPr>
-          </a:p>
-          <a:p>
-            <a:pPr algn="l"/>
-            <a:r>
-              <a:rPr lang="pt-BR" b="0" i="0" dirty="0">
-                <a:solidFill>
-                  <a:srgbClr val="374151"/>
-                </a:solidFill>
-                <a:effectLst/>
-                <a:latin typeface="Söhne"/>
-              </a:rPr>
-              <a:t>Em resumo, o problema da </a:t>
-            </a:r>
-            <a:r>
-              <a:rPr lang="pt-BR" b="0" i="0" dirty="0" err="1">
-                <a:solidFill>
-                  <a:srgbClr val="374151"/>
-                </a:solidFill>
-                <a:effectLst/>
-                <a:latin typeface="Söhne"/>
-              </a:rPr>
-              <a:t>ReLU</a:t>
-            </a:r>
-            <a:r>
-              <a:rPr lang="pt-BR" b="0" i="0" dirty="0">
-                <a:solidFill>
-                  <a:srgbClr val="374151"/>
-                </a:solidFill>
-                <a:effectLst/>
-                <a:latin typeface="Söhne"/>
-              </a:rPr>
-              <a:t> agonizante refere-se à inatividade permanente de neurônios </a:t>
-            </a:r>
-            <a:r>
-              <a:rPr lang="pt-BR" b="0" i="0" dirty="0" err="1">
-                <a:solidFill>
-                  <a:srgbClr val="374151"/>
-                </a:solidFill>
-                <a:effectLst/>
-                <a:latin typeface="Söhne"/>
-              </a:rPr>
-              <a:t>ReLU</a:t>
-            </a:r>
-            <a:r>
-              <a:rPr lang="pt-BR" b="0" i="0" dirty="0">
-                <a:solidFill>
-                  <a:srgbClr val="374151"/>
-                </a:solidFill>
-                <a:effectLst/>
-                <a:latin typeface="Söhne"/>
-              </a:rPr>
-              <a:t> durante o treinamento, o que pode prejudicar o desempenho da rede neural. Variantes da </a:t>
-            </a:r>
-            <a:r>
-              <a:rPr lang="pt-BR" b="0" i="0" dirty="0" err="1">
-                <a:solidFill>
-                  <a:srgbClr val="374151"/>
-                </a:solidFill>
-                <a:effectLst/>
-                <a:latin typeface="Söhne"/>
-              </a:rPr>
-              <a:t>ReLU</a:t>
-            </a:r>
-            <a:r>
-              <a:rPr lang="pt-BR" b="0" i="0" dirty="0">
-                <a:solidFill>
-                  <a:srgbClr val="374151"/>
-                </a:solidFill>
-                <a:effectLst/>
-                <a:latin typeface="Söhne"/>
-              </a:rPr>
-              <a:t> foram desenvolvidas para contornar esse problema e permitir uma aprendizagem mais eficaz.</a:t>
-            </a:r>
-          </a:p>
-        </p:txBody>
-      </p:sp>
+      <mc:AlternateContent xmlns:mc="http://schemas.openxmlformats.org/markup-compatibility/2006" xmlns:a14="http://schemas.microsoft.com/office/drawing/2010/main">
+        <mc:Choice Requires="a14">
+          <p:sp>
+            <p:nvSpPr>
+              <p:cNvPr id="3" name="Espaço Reservado para Anotações 2"/>
+              <p:cNvSpPr>
+                <a:spLocks noGrp="1"/>
+              </p:cNvSpPr>
+              <p:nvPr>
+                <p:ph type="body" idx="1"/>
+              </p:nvPr>
+            </p:nvSpPr>
+            <p:spPr/>
+            <p:txBody>
+              <a:bodyPr/>
+              <a:lstStyle/>
+              <a:p>
+                <a:pPr marL="0" marR="0" lvl="0" indent="0" algn="l" defTabSz="914400" rtl="0" eaLnBrk="1" fontAlgn="auto" latinLnBrk="0" hangingPunct="1">
+                  <a:lnSpc>
+                    <a:spcPct val="100000"/>
+                  </a:lnSpc>
+                  <a:spcBef>
+                    <a:spcPts val="0"/>
+                  </a:spcBef>
+                  <a:spcAft>
+                    <a:spcPts val="0"/>
+                  </a:spcAft>
+                  <a:buClrTx/>
+                  <a:buSzTx/>
+                  <a:buFontTx/>
+                  <a:buNone/>
+                  <a:tabLst/>
+                  <a:defRPr/>
+                </a:pPr>
+                <a:r>
+                  <a:rPr lang="pt-BR" dirty="0" smtClean="0"/>
+                  <a:t>O </a:t>
+                </a:r>
+                <a:r>
+                  <a:rPr lang="pt-BR" dirty="0"/>
+                  <a:t>somatório de termos exponenciais no denominador </a:t>
+                </a:r>
+                <a:r>
+                  <a:rPr lang="pt-BR" b="1" dirty="0">
+                    <a:solidFill>
+                      <a:srgbClr val="00B050"/>
+                    </a:solidFill>
+                  </a:rPr>
+                  <a:t>normaliza</a:t>
+                </a:r>
+                <a:r>
+                  <a:rPr lang="pt-BR" dirty="0"/>
+                  <a:t> o valor da </a:t>
+                </a:r>
+                <a:r>
+                  <a:rPr lang="pt-BR" i="1" dirty="0"/>
+                  <a:t>q</a:t>
+                </a:r>
+                <a:r>
+                  <a:rPr lang="pt-BR" dirty="0"/>
+                  <a:t>-ésima saída de tal forma que o somatório das </a:t>
+                </a:r>
+                <a14:m>
+                  <m:oMath xmlns:m="http://schemas.openxmlformats.org/officeDocument/2006/math">
+                    <m:r>
+                      <a:rPr lang="pt-BR" i="1">
+                        <a:latin typeface="Cambria Math" panose="02040503050406030204" pitchFamily="18" charset="0"/>
+                      </a:rPr>
+                      <m:t>𝑄</m:t>
+                    </m:r>
+                  </m:oMath>
+                </a14:m>
+                <a:r>
+                  <a:rPr lang="pt-BR" dirty="0"/>
+                  <a:t> saídas seja igual a </a:t>
+                </a:r>
+                <a:r>
+                  <a:rPr lang="pt-BR" dirty="0" smtClean="0"/>
+                  <a:t>1.</a:t>
+                </a:r>
+                <a:endParaRPr lang="pt-BR" dirty="0"/>
+              </a:p>
+              <a:p>
+                <a:pPr algn="l"/>
+                <a:endParaRPr lang="pt-BR" b="0" i="0" dirty="0">
+                  <a:solidFill>
+                    <a:srgbClr val="374151"/>
+                  </a:solidFill>
+                  <a:effectLst/>
+                  <a:latin typeface="Söhne"/>
+                </a:endParaRPr>
+              </a:p>
+            </p:txBody>
+          </p:sp>
+        </mc:Choice>
+        <mc:Fallback xmlns="">
+          <p:sp>
+            <p:nvSpPr>
+              <p:cNvPr id="3" name="Espaço Reservado para Anotações 2"/>
+              <p:cNvSpPr>
+                <a:spLocks noGrp="1"/>
+              </p:cNvSpPr>
+              <p:nvPr>
+                <p:ph type="body" idx="1"/>
+              </p:nvPr>
+            </p:nvSpPr>
+            <p:spPr/>
+            <p:txBody>
+              <a:bodyPr/>
+              <a:lstStyle/>
+              <a:p>
+                <a:pPr marL="0" marR="0" lvl="0" indent="0" algn="l" defTabSz="914400" rtl="0" eaLnBrk="1" fontAlgn="auto" latinLnBrk="0" hangingPunct="1">
+                  <a:lnSpc>
+                    <a:spcPct val="100000"/>
+                  </a:lnSpc>
+                  <a:spcBef>
+                    <a:spcPts val="0"/>
+                  </a:spcBef>
+                  <a:spcAft>
+                    <a:spcPts val="0"/>
+                  </a:spcAft>
+                  <a:buClrTx/>
+                  <a:buSzTx/>
+                  <a:buFontTx/>
+                  <a:buNone/>
+                  <a:tabLst/>
+                  <a:defRPr/>
+                </a:pPr>
+                <a:r>
+                  <a:rPr lang="pt-BR" dirty="0" smtClean="0"/>
+                  <a:t>O </a:t>
+                </a:r>
+                <a:r>
+                  <a:rPr lang="pt-BR" dirty="0"/>
+                  <a:t>somatório de termos exponenciais no denominador </a:t>
+                </a:r>
+                <a:r>
+                  <a:rPr lang="pt-BR" b="1" dirty="0">
+                    <a:solidFill>
+                      <a:srgbClr val="00B050"/>
+                    </a:solidFill>
+                  </a:rPr>
+                  <a:t>normaliza</a:t>
+                </a:r>
+                <a:r>
+                  <a:rPr lang="pt-BR" dirty="0"/>
+                  <a:t> o valor da </a:t>
+                </a:r>
+                <a:r>
+                  <a:rPr lang="pt-BR" i="1" dirty="0"/>
+                  <a:t>q</a:t>
+                </a:r>
+                <a:r>
+                  <a:rPr lang="pt-BR" dirty="0"/>
+                  <a:t>-ésima saída de tal forma que o somatório das </a:t>
+                </a:r>
+                <a:r>
+                  <a:rPr lang="pt-BR" i="0">
+                    <a:latin typeface="Cambria Math" panose="02040503050406030204" pitchFamily="18" charset="0"/>
+                  </a:rPr>
+                  <a:t>𝑄</a:t>
+                </a:r>
+                <a:r>
+                  <a:rPr lang="pt-BR" dirty="0"/>
+                  <a:t> saídas seja igual a </a:t>
+                </a:r>
+                <a:r>
+                  <a:rPr lang="pt-BR" dirty="0" smtClean="0"/>
+                  <a:t>1.</a:t>
+                </a:r>
+                <a:endParaRPr lang="pt-BR" dirty="0"/>
+              </a:p>
+              <a:p>
+                <a:pPr algn="l"/>
+                <a:endParaRPr lang="pt-BR" b="0" i="0" dirty="0">
+                  <a:solidFill>
+                    <a:srgbClr val="374151"/>
+                  </a:solidFill>
+                  <a:effectLst/>
+                  <a:latin typeface="Söhne"/>
+                </a:endParaRPr>
+              </a:p>
+            </p:txBody>
+          </p:sp>
+        </mc:Fallback>
+      </mc:AlternateContent>
       <p:sp>
         <p:nvSpPr>
           <p:cNvPr id="4" name="Espaço Reservado para Número de Slide 3"/>
@@ -6419,7 +6065,7 @@
           <p:cNvPr id="2" name="Título 1">
             <a:extLst>
               <a:ext uri="{FF2B5EF4-FFF2-40B4-BE49-F238E27FC236}">
-                <a16:creationId xmlns="" xmlns:a16="http://schemas.microsoft.com/office/drawing/2014/main" id="{1DB9B4FF-B06E-403C-A326-BDC64D8FF94E}"/>
+                <a16:creationId xmlns:a16="http://schemas.microsoft.com/office/drawing/2014/main" xmlns="" id="{1DB9B4FF-B06E-403C-A326-BDC64D8FF94E}"/>
               </a:ext>
             </a:extLst>
           </p:cNvPr>
@@ -6456,7 +6102,7 @@
           <p:cNvPr id="3" name="Subtítulo 2">
             <a:extLst>
               <a:ext uri="{FF2B5EF4-FFF2-40B4-BE49-F238E27FC236}">
-                <a16:creationId xmlns="" xmlns:a16="http://schemas.microsoft.com/office/drawing/2014/main" id="{247BDFCE-746E-45BF-A319-4733D58D1632}"/>
+                <a16:creationId xmlns:a16="http://schemas.microsoft.com/office/drawing/2014/main" xmlns="" id="{247BDFCE-746E-45BF-A319-4733D58D1632}"/>
               </a:ext>
             </a:extLst>
           </p:cNvPr>
@@ -6526,7 +6172,7 @@
           <p:cNvPr id="4" name="Espaço Reservado para Data 3">
             <a:extLst>
               <a:ext uri="{FF2B5EF4-FFF2-40B4-BE49-F238E27FC236}">
-                <a16:creationId xmlns="" xmlns:a16="http://schemas.microsoft.com/office/drawing/2014/main" id="{9EDE2778-5372-4104-B96D-968184DA8288}"/>
+                <a16:creationId xmlns:a16="http://schemas.microsoft.com/office/drawing/2014/main" xmlns="" id="{9EDE2778-5372-4104-B96D-968184DA8288}"/>
               </a:ext>
             </a:extLst>
           </p:cNvPr>
@@ -6544,7 +6190,7 @@
           <a:p>
             <a:fld id="{63289F7E-B80B-496E-81B4-D396C37C9454}" type="datetimeFigureOut">
               <a:rPr lang="pt-BR" smtClean="0"/>
-              <a:t>21/03/2026</a:t>
+              <a:t>28/03/2026</a:t>
             </a:fld>
             <a:endParaRPr lang="pt-BR"/>
           </a:p>
@@ -6555,7 +6201,7 @@
           <p:cNvPr id="5" name="Espaço Reservado para Rodapé 4">
             <a:extLst>
               <a:ext uri="{FF2B5EF4-FFF2-40B4-BE49-F238E27FC236}">
-                <a16:creationId xmlns="" xmlns:a16="http://schemas.microsoft.com/office/drawing/2014/main" id="{C1DD0F41-C861-4051-988D-3024A37A4B93}"/>
+                <a16:creationId xmlns:a16="http://schemas.microsoft.com/office/drawing/2014/main" xmlns="" id="{C1DD0F41-C861-4051-988D-3024A37A4B93}"/>
               </a:ext>
             </a:extLst>
           </p:cNvPr>
@@ -6580,7 +6226,7 @@
           <p:cNvPr id="6" name="Espaço Reservado para Número de Slide 5">
             <a:extLst>
               <a:ext uri="{FF2B5EF4-FFF2-40B4-BE49-F238E27FC236}">
-                <a16:creationId xmlns="" xmlns:a16="http://schemas.microsoft.com/office/drawing/2014/main" id="{07E5967E-D980-431A-A5DB-3F0C5030A81E}"/>
+                <a16:creationId xmlns:a16="http://schemas.microsoft.com/office/drawing/2014/main" xmlns="" id="{07E5967E-D980-431A-A5DB-3F0C5030A81E}"/>
               </a:ext>
             </a:extLst>
           </p:cNvPr>
@@ -6639,7 +6285,7 @@
           <p:cNvPr id="2" name="Título 1">
             <a:extLst>
               <a:ext uri="{FF2B5EF4-FFF2-40B4-BE49-F238E27FC236}">
-                <a16:creationId xmlns="" xmlns:a16="http://schemas.microsoft.com/office/drawing/2014/main" id="{9036C49F-3E68-4175-81BA-3C3FEE44308A}"/>
+                <a16:creationId xmlns:a16="http://schemas.microsoft.com/office/drawing/2014/main" xmlns="" id="{9036C49F-3E68-4175-81BA-3C3FEE44308A}"/>
               </a:ext>
             </a:extLst>
           </p:cNvPr>
@@ -6667,7 +6313,7 @@
           <p:cNvPr id="3" name="Espaço Reservado para Texto Vertical 2">
             <a:extLst>
               <a:ext uri="{FF2B5EF4-FFF2-40B4-BE49-F238E27FC236}">
-                <a16:creationId xmlns="" xmlns:a16="http://schemas.microsoft.com/office/drawing/2014/main" id="{426FA736-3DD3-4D4E-B57B-BBE1D8F7D424}"/>
+                <a16:creationId xmlns:a16="http://schemas.microsoft.com/office/drawing/2014/main" xmlns="" id="{426FA736-3DD3-4D4E-B57B-BBE1D8F7D424}"/>
               </a:ext>
             </a:extLst>
           </p:cNvPr>
@@ -6724,7 +6370,7 @@
           <p:cNvPr id="4" name="Espaço Reservado para Data 3">
             <a:extLst>
               <a:ext uri="{FF2B5EF4-FFF2-40B4-BE49-F238E27FC236}">
-                <a16:creationId xmlns="" xmlns:a16="http://schemas.microsoft.com/office/drawing/2014/main" id="{99E8855C-D8FD-48F6-B14E-861E0DE4D915}"/>
+                <a16:creationId xmlns:a16="http://schemas.microsoft.com/office/drawing/2014/main" xmlns="" id="{99E8855C-D8FD-48F6-B14E-861E0DE4D915}"/>
               </a:ext>
             </a:extLst>
           </p:cNvPr>
@@ -6742,7 +6388,7 @@
           <a:p>
             <a:fld id="{63289F7E-B80B-496E-81B4-D396C37C9454}" type="datetimeFigureOut">
               <a:rPr lang="pt-BR" smtClean="0"/>
-              <a:t>21/03/2026</a:t>
+              <a:t>28/03/2026</a:t>
             </a:fld>
             <a:endParaRPr lang="pt-BR"/>
           </a:p>
@@ -6753,7 +6399,7 @@
           <p:cNvPr id="5" name="Espaço Reservado para Rodapé 4">
             <a:extLst>
               <a:ext uri="{FF2B5EF4-FFF2-40B4-BE49-F238E27FC236}">
-                <a16:creationId xmlns="" xmlns:a16="http://schemas.microsoft.com/office/drawing/2014/main" id="{97C0BB88-2F21-42A5-ACFF-83DA47F2D340}"/>
+                <a16:creationId xmlns:a16="http://schemas.microsoft.com/office/drawing/2014/main" xmlns="" id="{97C0BB88-2F21-42A5-ACFF-83DA47F2D340}"/>
               </a:ext>
             </a:extLst>
           </p:cNvPr>
@@ -6778,7 +6424,7 @@
           <p:cNvPr id="6" name="Espaço Reservado para Número de Slide 5">
             <a:extLst>
               <a:ext uri="{FF2B5EF4-FFF2-40B4-BE49-F238E27FC236}">
-                <a16:creationId xmlns="" xmlns:a16="http://schemas.microsoft.com/office/drawing/2014/main" id="{6CB462B3-1F22-4C05-B4B8-7A279FB7D5E9}"/>
+                <a16:creationId xmlns:a16="http://schemas.microsoft.com/office/drawing/2014/main" xmlns="" id="{6CB462B3-1F22-4C05-B4B8-7A279FB7D5E9}"/>
               </a:ext>
             </a:extLst>
           </p:cNvPr>
@@ -6837,7 +6483,7 @@
           <p:cNvPr id="2" name="Título Vertical 1">
             <a:extLst>
               <a:ext uri="{FF2B5EF4-FFF2-40B4-BE49-F238E27FC236}">
-                <a16:creationId xmlns="" xmlns:a16="http://schemas.microsoft.com/office/drawing/2014/main" id="{EAEAB728-701C-4207-A9D5-23FF45C60502}"/>
+                <a16:creationId xmlns:a16="http://schemas.microsoft.com/office/drawing/2014/main" xmlns="" id="{EAEAB728-701C-4207-A9D5-23FF45C60502}"/>
               </a:ext>
             </a:extLst>
           </p:cNvPr>
@@ -6870,7 +6516,7 @@
           <p:cNvPr id="3" name="Espaço Reservado para Texto Vertical 2">
             <a:extLst>
               <a:ext uri="{FF2B5EF4-FFF2-40B4-BE49-F238E27FC236}">
-                <a16:creationId xmlns="" xmlns:a16="http://schemas.microsoft.com/office/drawing/2014/main" id="{BA8C8CCF-7823-480A-9A19-0F664DD17E3B}"/>
+                <a16:creationId xmlns:a16="http://schemas.microsoft.com/office/drawing/2014/main" xmlns="" id="{BA8C8CCF-7823-480A-9A19-0F664DD17E3B}"/>
               </a:ext>
             </a:extLst>
           </p:cNvPr>
@@ -6932,7 +6578,7 @@
           <p:cNvPr id="4" name="Espaço Reservado para Data 3">
             <a:extLst>
               <a:ext uri="{FF2B5EF4-FFF2-40B4-BE49-F238E27FC236}">
-                <a16:creationId xmlns="" xmlns:a16="http://schemas.microsoft.com/office/drawing/2014/main" id="{721D5734-7B1F-425D-942F-6EB73344027C}"/>
+                <a16:creationId xmlns:a16="http://schemas.microsoft.com/office/drawing/2014/main" xmlns="" id="{721D5734-7B1F-425D-942F-6EB73344027C}"/>
               </a:ext>
             </a:extLst>
           </p:cNvPr>
@@ -6950,7 +6596,7 @@
           <a:p>
             <a:fld id="{63289F7E-B80B-496E-81B4-D396C37C9454}" type="datetimeFigureOut">
               <a:rPr lang="pt-BR" smtClean="0"/>
-              <a:t>21/03/2026</a:t>
+              <a:t>28/03/2026</a:t>
             </a:fld>
             <a:endParaRPr lang="pt-BR"/>
           </a:p>
@@ -6961,7 +6607,7 @@
           <p:cNvPr id="5" name="Espaço Reservado para Rodapé 4">
             <a:extLst>
               <a:ext uri="{FF2B5EF4-FFF2-40B4-BE49-F238E27FC236}">
-                <a16:creationId xmlns="" xmlns:a16="http://schemas.microsoft.com/office/drawing/2014/main" id="{1E1AAEAC-F08D-45FE-89EC-B1B349A868C9}"/>
+                <a16:creationId xmlns:a16="http://schemas.microsoft.com/office/drawing/2014/main" xmlns="" id="{1E1AAEAC-F08D-45FE-89EC-B1B349A868C9}"/>
               </a:ext>
             </a:extLst>
           </p:cNvPr>
@@ -6986,7 +6632,7 @@
           <p:cNvPr id="6" name="Espaço Reservado para Número de Slide 5">
             <a:extLst>
               <a:ext uri="{FF2B5EF4-FFF2-40B4-BE49-F238E27FC236}">
-                <a16:creationId xmlns="" xmlns:a16="http://schemas.microsoft.com/office/drawing/2014/main" id="{BAA44493-9911-47B2-87A6-C2141A972BC8}"/>
+                <a16:creationId xmlns:a16="http://schemas.microsoft.com/office/drawing/2014/main" xmlns="" id="{BAA44493-9911-47B2-87A6-C2141A972BC8}"/>
               </a:ext>
             </a:extLst>
           </p:cNvPr>
@@ -7045,7 +6691,7 @@
           <p:cNvPr id="2" name="Título 1">
             <a:extLst>
               <a:ext uri="{FF2B5EF4-FFF2-40B4-BE49-F238E27FC236}">
-                <a16:creationId xmlns="" xmlns:a16="http://schemas.microsoft.com/office/drawing/2014/main" id="{71BD44A5-8F21-4626-A01D-48A1C874B1D5}"/>
+                <a16:creationId xmlns:a16="http://schemas.microsoft.com/office/drawing/2014/main" xmlns="" id="{71BD44A5-8F21-4626-A01D-48A1C874B1D5}"/>
               </a:ext>
             </a:extLst>
           </p:cNvPr>
@@ -7073,7 +6719,7 @@
           <p:cNvPr id="3" name="Espaço Reservado para Conteúdo 2">
             <a:extLst>
               <a:ext uri="{FF2B5EF4-FFF2-40B4-BE49-F238E27FC236}">
-                <a16:creationId xmlns="" xmlns:a16="http://schemas.microsoft.com/office/drawing/2014/main" id="{B79E8085-65A9-48AA-951D-71D978BFF4ED}"/>
+                <a16:creationId xmlns:a16="http://schemas.microsoft.com/office/drawing/2014/main" xmlns="" id="{B79E8085-65A9-48AA-951D-71D978BFF4ED}"/>
               </a:ext>
             </a:extLst>
           </p:cNvPr>
@@ -7130,7 +6776,7 @@
           <p:cNvPr id="4" name="Espaço Reservado para Data 3">
             <a:extLst>
               <a:ext uri="{FF2B5EF4-FFF2-40B4-BE49-F238E27FC236}">
-                <a16:creationId xmlns="" xmlns:a16="http://schemas.microsoft.com/office/drawing/2014/main" id="{F05BE1AF-51EA-425D-B188-DE7BD675009F}"/>
+                <a16:creationId xmlns:a16="http://schemas.microsoft.com/office/drawing/2014/main" xmlns="" id="{F05BE1AF-51EA-425D-B188-DE7BD675009F}"/>
               </a:ext>
             </a:extLst>
           </p:cNvPr>
@@ -7148,7 +6794,7 @@
           <a:p>
             <a:fld id="{63289F7E-B80B-496E-81B4-D396C37C9454}" type="datetimeFigureOut">
               <a:rPr lang="pt-BR" smtClean="0"/>
-              <a:t>21/03/2026</a:t>
+              <a:t>28/03/2026</a:t>
             </a:fld>
             <a:endParaRPr lang="pt-BR"/>
           </a:p>
@@ -7159,7 +6805,7 @@
           <p:cNvPr id="5" name="Espaço Reservado para Rodapé 4">
             <a:extLst>
               <a:ext uri="{FF2B5EF4-FFF2-40B4-BE49-F238E27FC236}">
-                <a16:creationId xmlns="" xmlns:a16="http://schemas.microsoft.com/office/drawing/2014/main" id="{121BE632-29CF-4CB9-B365-C9EF38F89BE6}"/>
+                <a16:creationId xmlns:a16="http://schemas.microsoft.com/office/drawing/2014/main" xmlns="" id="{121BE632-29CF-4CB9-B365-C9EF38F89BE6}"/>
               </a:ext>
             </a:extLst>
           </p:cNvPr>
@@ -7184,7 +6830,7 @@
           <p:cNvPr id="6" name="Espaço Reservado para Número de Slide 5">
             <a:extLst>
               <a:ext uri="{FF2B5EF4-FFF2-40B4-BE49-F238E27FC236}">
-                <a16:creationId xmlns="" xmlns:a16="http://schemas.microsoft.com/office/drawing/2014/main" id="{60CF3DD1-9AEC-4A57-B461-4E4DD86FAC18}"/>
+                <a16:creationId xmlns:a16="http://schemas.microsoft.com/office/drawing/2014/main" xmlns="" id="{60CF3DD1-9AEC-4A57-B461-4E4DD86FAC18}"/>
               </a:ext>
             </a:extLst>
           </p:cNvPr>
@@ -7243,7 +6889,7 @@
           <p:cNvPr id="2" name="Título 1">
             <a:extLst>
               <a:ext uri="{FF2B5EF4-FFF2-40B4-BE49-F238E27FC236}">
-                <a16:creationId xmlns="" xmlns:a16="http://schemas.microsoft.com/office/drawing/2014/main" id="{34AB2FF0-A4D7-4E28-991D-FF26140D5988}"/>
+                <a16:creationId xmlns:a16="http://schemas.microsoft.com/office/drawing/2014/main" xmlns="" id="{34AB2FF0-A4D7-4E28-991D-FF26140D5988}"/>
               </a:ext>
             </a:extLst>
           </p:cNvPr>
@@ -7280,7 +6926,7 @@
           <p:cNvPr id="3" name="Espaço Reservado para Texto 2">
             <a:extLst>
               <a:ext uri="{FF2B5EF4-FFF2-40B4-BE49-F238E27FC236}">
-                <a16:creationId xmlns="" xmlns:a16="http://schemas.microsoft.com/office/drawing/2014/main" id="{E2AC45B0-4145-40DB-8E61-105461170604}"/>
+                <a16:creationId xmlns:a16="http://schemas.microsoft.com/office/drawing/2014/main" xmlns="" id="{E2AC45B0-4145-40DB-8E61-105461170604}"/>
               </a:ext>
             </a:extLst>
           </p:cNvPr>
@@ -7405,7 +7051,7 @@
           <p:cNvPr id="4" name="Espaço Reservado para Data 3">
             <a:extLst>
               <a:ext uri="{FF2B5EF4-FFF2-40B4-BE49-F238E27FC236}">
-                <a16:creationId xmlns="" xmlns:a16="http://schemas.microsoft.com/office/drawing/2014/main" id="{50F1D3FB-740A-4EBA-A309-2CE71D12ECFB}"/>
+                <a16:creationId xmlns:a16="http://schemas.microsoft.com/office/drawing/2014/main" xmlns="" id="{50F1D3FB-740A-4EBA-A309-2CE71D12ECFB}"/>
               </a:ext>
             </a:extLst>
           </p:cNvPr>
@@ -7423,7 +7069,7 @@
           <a:p>
             <a:fld id="{63289F7E-B80B-496E-81B4-D396C37C9454}" type="datetimeFigureOut">
               <a:rPr lang="pt-BR" smtClean="0"/>
-              <a:t>21/03/2026</a:t>
+              <a:t>28/03/2026</a:t>
             </a:fld>
             <a:endParaRPr lang="pt-BR"/>
           </a:p>
@@ -7434,7 +7080,7 @@
           <p:cNvPr id="5" name="Espaço Reservado para Rodapé 4">
             <a:extLst>
               <a:ext uri="{FF2B5EF4-FFF2-40B4-BE49-F238E27FC236}">
-                <a16:creationId xmlns="" xmlns:a16="http://schemas.microsoft.com/office/drawing/2014/main" id="{BDCAB18F-8715-4465-A940-F9C193A2ACE9}"/>
+                <a16:creationId xmlns:a16="http://schemas.microsoft.com/office/drawing/2014/main" xmlns="" id="{BDCAB18F-8715-4465-A940-F9C193A2ACE9}"/>
               </a:ext>
             </a:extLst>
           </p:cNvPr>
@@ -7459,7 +7105,7 @@
           <p:cNvPr id="6" name="Espaço Reservado para Número de Slide 5">
             <a:extLst>
               <a:ext uri="{FF2B5EF4-FFF2-40B4-BE49-F238E27FC236}">
-                <a16:creationId xmlns="" xmlns:a16="http://schemas.microsoft.com/office/drawing/2014/main" id="{353466C6-8248-429F-8056-FF040BF509EB}"/>
+                <a16:creationId xmlns:a16="http://schemas.microsoft.com/office/drawing/2014/main" xmlns="" id="{353466C6-8248-429F-8056-FF040BF509EB}"/>
               </a:ext>
             </a:extLst>
           </p:cNvPr>
@@ -7518,7 +7164,7 @@
           <p:cNvPr id="2" name="Título 1">
             <a:extLst>
               <a:ext uri="{FF2B5EF4-FFF2-40B4-BE49-F238E27FC236}">
-                <a16:creationId xmlns="" xmlns:a16="http://schemas.microsoft.com/office/drawing/2014/main" id="{BC7BB9F0-F14B-4A91-B2B7-35BC47FE4DE7}"/>
+                <a16:creationId xmlns:a16="http://schemas.microsoft.com/office/drawing/2014/main" xmlns="" id="{BC7BB9F0-F14B-4A91-B2B7-35BC47FE4DE7}"/>
               </a:ext>
             </a:extLst>
           </p:cNvPr>
@@ -7546,7 +7192,7 @@
           <p:cNvPr id="3" name="Espaço Reservado para Conteúdo 2">
             <a:extLst>
               <a:ext uri="{FF2B5EF4-FFF2-40B4-BE49-F238E27FC236}">
-                <a16:creationId xmlns="" xmlns:a16="http://schemas.microsoft.com/office/drawing/2014/main" id="{EC1FC1C4-73DA-47A6-8496-B0B457F7D39A}"/>
+                <a16:creationId xmlns:a16="http://schemas.microsoft.com/office/drawing/2014/main" xmlns="" id="{EC1FC1C4-73DA-47A6-8496-B0B457F7D39A}"/>
               </a:ext>
             </a:extLst>
           </p:cNvPr>
@@ -7608,7 +7254,7 @@
           <p:cNvPr id="4" name="Espaço Reservado para Conteúdo 3">
             <a:extLst>
               <a:ext uri="{FF2B5EF4-FFF2-40B4-BE49-F238E27FC236}">
-                <a16:creationId xmlns="" xmlns:a16="http://schemas.microsoft.com/office/drawing/2014/main" id="{E92F06A8-A449-4D92-9912-76873E529B38}"/>
+                <a16:creationId xmlns:a16="http://schemas.microsoft.com/office/drawing/2014/main" xmlns="" id="{E92F06A8-A449-4D92-9912-76873E529B38}"/>
               </a:ext>
             </a:extLst>
           </p:cNvPr>
@@ -7670,7 +7316,7 @@
           <p:cNvPr id="5" name="Espaço Reservado para Data 4">
             <a:extLst>
               <a:ext uri="{FF2B5EF4-FFF2-40B4-BE49-F238E27FC236}">
-                <a16:creationId xmlns="" xmlns:a16="http://schemas.microsoft.com/office/drawing/2014/main" id="{938070A4-BC2F-4D55-BD8D-DEAF11BB9EE9}"/>
+                <a16:creationId xmlns:a16="http://schemas.microsoft.com/office/drawing/2014/main" xmlns="" id="{938070A4-BC2F-4D55-BD8D-DEAF11BB9EE9}"/>
               </a:ext>
             </a:extLst>
           </p:cNvPr>
@@ -7688,7 +7334,7 @@
           <a:p>
             <a:fld id="{63289F7E-B80B-496E-81B4-D396C37C9454}" type="datetimeFigureOut">
               <a:rPr lang="pt-BR" smtClean="0"/>
-              <a:t>21/03/2026</a:t>
+              <a:t>28/03/2026</a:t>
             </a:fld>
             <a:endParaRPr lang="pt-BR"/>
           </a:p>
@@ -7699,7 +7345,7 @@
           <p:cNvPr id="6" name="Espaço Reservado para Rodapé 5">
             <a:extLst>
               <a:ext uri="{FF2B5EF4-FFF2-40B4-BE49-F238E27FC236}">
-                <a16:creationId xmlns="" xmlns:a16="http://schemas.microsoft.com/office/drawing/2014/main" id="{45CC2DB8-844A-465F-BA9A-7734C80C7F43}"/>
+                <a16:creationId xmlns:a16="http://schemas.microsoft.com/office/drawing/2014/main" xmlns="" id="{45CC2DB8-844A-465F-BA9A-7734C80C7F43}"/>
               </a:ext>
             </a:extLst>
           </p:cNvPr>
@@ -7724,7 +7370,7 @@
           <p:cNvPr id="7" name="Espaço Reservado para Número de Slide 6">
             <a:extLst>
               <a:ext uri="{FF2B5EF4-FFF2-40B4-BE49-F238E27FC236}">
-                <a16:creationId xmlns="" xmlns:a16="http://schemas.microsoft.com/office/drawing/2014/main" id="{4CC606A8-097B-4040-94E0-CD8C88280D8F}"/>
+                <a16:creationId xmlns:a16="http://schemas.microsoft.com/office/drawing/2014/main" xmlns="" id="{4CC606A8-097B-4040-94E0-CD8C88280D8F}"/>
               </a:ext>
             </a:extLst>
           </p:cNvPr>
@@ -7783,7 +7429,7 @@
           <p:cNvPr id="2" name="Título 1">
             <a:extLst>
               <a:ext uri="{FF2B5EF4-FFF2-40B4-BE49-F238E27FC236}">
-                <a16:creationId xmlns="" xmlns:a16="http://schemas.microsoft.com/office/drawing/2014/main" id="{76D66686-0143-4CB6-8C09-BA326F1E7ACA}"/>
+                <a16:creationId xmlns:a16="http://schemas.microsoft.com/office/drawing/2014/main" xmlns="" id="{76D66686-0143-4CB6-8C09-BA326F1E7ACA}"/>
               </a:ext>
             </a:extLst>
           </p:cNvPr>
@@ -7816,7 +7462,7 @@
           <p:cNvPr id="3" name="Espaço Reservado para Texto 2">
             <a:extLst>
               <a:ext uri="{FF2B5EF4-FFF2-40B4-BE49-F238E27FC236}">
-                <a16:creationId xmlns="" xmlns:a16="http://schemas.microsoft.com/office/drawing/2014/main" id="{0227AB85-F59E-4BCE-B846-4FA0992C2F23}"/>
+                <a16:creationId xmlns:a16="http://schemas.microsoft.com/office/drawing/2014/main" xmlns="" id="{0227AB85-F59E-4BCE-B846-4FA0992C2F23}"/>
               </a:ext>
             </a:extLst>
           </p:cNvPr>
@@ -7887,7 +7533,7 @@
           <p:cNvPr id="4" name="Espaço Reservado para Conteúdo 3">
             <a:extLst>
               <a:ext uri="{FF2B5EF4-FFF2-40B4-BE49-F238E27FC236}">
-                <a16:creationId xmlns="" xmlns:a16="http://schemas.microsoft.com/office/drawing/2014/main" id="{3373456C-7319-4D0A-827D-D29F6B083F5D}"/>
+                <a16:creationId xmlns:a16="http://schemas.microsoft.com/office/drawing/2014/main" xmlns="" id="{3373456C-7319-4D0A-827D-D29F6B083F5D}"/>
               </a:ext>
             </a:extLst>
           </p:cNvPr>
@@ -7949,7 +7595,7 @@
           <p:cNvPr id="5" name="Espaço Reservado para Texto 4">
             <a:extLst>
               <a:ext uri="{FF2B5EF4-FFF2-40B4-BE49-F238E27FC236}">
-                <a16:creationId xmlns="" xmlns:a16="http://schemas.microsoft.com/office/drawing/2014/main" id="{4CD109D0-2E83-4262-8029-A871CEC47406}"/>
+                <a16:creationId xmlns:a16="http://schemas.microsoft.com/office/drawing/2014/main" xmlns="" id="{4CD109D0-2E83-4262-8029-A871CEC47406}"/>
               </a:ext>
             </a:extLst>
           </p:cNvPr>
@@ -8020,7 +7666,7 @@
           <p:cNvPr id="6" name="Espaço Reservado para Conteúdo 5">
             <a:extLst>
               <a:ext uri="{FF2B5EF4-FFF2-40B4-BE49-F238E27FC236}">
-                <a16:creationId xmlns="" xmlns:a16="http://schemas.microsoft.com/office/drawing/2014/main" id="{AD706E3A-CFBB-4A6C-A65F-D0360A9E74FE}"/>
+                <a16:creationId xmlns:a16="http://schemas.microsoft.com/office/drawing/2014/main" xmlns="" id="{AD706E3A-CFBB-4A6C-A65F-D0360A9E74FE}"/>
               </a:ext>
             </a:extLst>
           </p:cNvPr>
@@ -8082,7 +7728,7 @@
           <p:cNvPr id="7" name="Espaço Reservado para Data 6">
             <a:extLst>
               <a:ext uri="{FF2B5EF4-FFF2-40B4-BE49-F238E27FC236}">
-                <a16:creationId xmlns="" xmlns:a16="http://schemas.microsoft.com/office/drawing/2014/main" id="{4172C0E5-5AF0-4805-BB51-443733CD2BD5}"/>
+                <a16:creationId xmlns:a16="http://schemas.microsoft.com/office/drawing/2014/main" xmlns="" id="{4172C0E5-5AF0-4805-BB51-443733CD2BD5}"/>
               </a:ext>
             </a:extLst>
           </p:cNvPr>
@@ -8100,7 +7746,7 @@
           <a:p>
             <a:fld id="{63289F7E-B80B-496E-81B4-D396C37C9454}" type="datetimeFigureOut">
               <a:rPr lang="pt-BR" smtClean="0"/>
-              <a:t>21/03/2026</a:t>
+              <a:t>28/03/2026</a:t>
             </a:fld>
             <a:endParaRPr lang="pt-BR"/>
           </a:p>
@@ -8111,7 +7757,7 @@
           <p:cNvPr id="8" name="Espaço Reservado para Rodapé 7">
             <a:extLst>
               <a:ext uri="{FF2B5EF4-FFF2-40B4-BE49-F238E27FC236}">
-                <a16:creationId xmlns="" xmlns:a16="http://schemas.microsoft.com/office/drawing/2014/main" id="{0E801648-156F-497E-99CF-797DF48051E1}"/>
+                <a16:creationId xmlns:a16="http://schemas.microsoft.com/office/drawing/2014/main" xmlns="" id="{0E801648-156F-497E-99CF-797DF48051E1}"/>
               </a:ext>
             </a:extLst>
           </p:cNvPr>
@@ -8136,7 +7782,7 @@
           <p:cNvPr id="9" name="Espaço Reservado para Número de Slide 8">
             <a:extLst>
               <a:ext uri="{FF2B5EF4-FFF2-40B4-BE49-F238E27FC236}">
-                <a16:creationId xmlns="" xmlns:a16="http://schemas.microsoft.com/office/drawing/2014/main" id="{EEE23D32-80E7-4796-A137-66BF842E4B53}"/>
+                <a16:creationId xmlns:a16="http://schemas.microsoft.com/office/drawing/2014/main" xmlns="" id="{EEE23D32-80E7-4796-A137-66BF842E4B53}"/>
               </a:ext>
             </a:extLst>
           </p:cNvPr>
@@ -8195,7 +7841,7 @@
           <p:cNvPr id="2" name="Título 1">
             <a:extLst>
               <a:ext uri="{FF2B5EF4-FFF2-40B4-BE49-F238E27FC236}">
-                <a16:creationId xmlns="" xmlns:a16="http://schemas.microsoft.com/office/drawing/2014/main" id="{2BCE2379-C78F-47E1-8CFC-B846E7AF148D}"/>
+                <a16:creationId xmlns:a16="http://schemas.microsoft.com/office/drawing/2014/main" xmlns="" id="{2BCE2379-C78F-47E1-8CFC-B846E7AF148D}"/>
               </a:ext>
             </a:extLst>
           </p:cNvPr>
@@ -8223,7 +7869,7 @@
           <p:cNvPr id="3" name="Espaço Reservado para Data 2">
             <a:extLst>
               <a:ext uri="{FF2B5EF4-FFF2-40B4-BE49-F238E27FC236}">
-                <a16:creationId xmlns="" xmlns:a16="http://schemas.microsoft.com/office/drawing/2014/main" id="{342600A9-7F92-4E22-9D94-E4717252A817}"/>
+                <a16:creationId xmlns:a16="http://schemas.microsoft.com/office/drawing/2014/main" xmlns="" id="{342600A9-7F92-4E22-9D94-E4717252A817}"/>
               </a:ext>
             </a:extLst>
           </p:cNvPr>
@@ -8241,7 +7887,7 @@
           <a:p>
             <a:fld id="{63289F7E-B80B-496E-81B4-D396C37C9454}" type="datetimeFigureOut">
               <a:rPr lang="pt-BR" smtClean="0"/>
-              <a:t>21/03/2026</a:t>
+              <a:t>28/03/2026</a:t>
             </a:fld>
             <a:endParaRPr lang="pt-BR"/>
           </a:p>
@@ -8252,7 +7898,7 @@
           <p:cNvPr id="4" name="Espaço Reservado para Rodapé 3">
             <a:extLst>
               <a:ext uri="{FF2B5EF4-FFF2-40B4-BE49-F238E27FC236}">
-                <a16:creationId xmlns="" xmlns:a16="http://schemas.microsoft.com/office/drawing/2014/main" id="{192E6BED-F546-40CC-A2DF-99CBA853654E}"/>
+                <a16:creationId xmlns:a16="http://schemas.microsoft.com/office/drawing/2014/main" xmlns="" id="{192E6BED-F546-40CC-A2DF-99CBA853654E}"/>
               </a:ext>
             </a:extLst>
           </p:cNvPr>
@@ -8277,7 +7923,7 @@
           <p:cNvPr id="5" name="Espaço Reservado para Número de Slide 4">
             <a:extLst>
               <a:ext uri="{FF2B5EF4-FFF2-40B4-BE49-F238E27FC236}">
-                <a16:creationId xmlns="" xmlns:a16="http://schemas.microsoft.com/office/drawing/2014/main" id="{6091CC40-A8C4-4063-80EB-CC5099621678}"/>
+                <a16:creationId xmlns:a16="http://schemas.microsoft.com/office/drawing/2014/main" xmlns="" id="{6091CC40-A8C4-4063-80EB-CC5099621678}"/>
               </a:ext>
             </a:extLst>
           </p:cNvPr>
@@ -8336,7 +7982,7 @@
           <p:cNvPr id="2" name="Espaço Reservado para Data 1">
             <a:extLst>
               <a:ext uri="{FF2B5EF4-FFF2-40B4-BE49-F238E27FC236}">
-                <a16:creationId xmlns="" xmlns:a16="http://schemas.microsoft.com/office/drawing/2014/main" id="{DD19515C-212C-4EAE-84A3-8FF4BC844F1B}"/>
+                <a16:creationId xmlns:a16="http://schemas.microsoft.com/office/drawing/2014/main" xmlns="" id="{DD19515C-212C-4EAE-84A3-8FF4BC844F1B}"/>
               </a:ext>
             </a:extLst>
           </p:cNvPr>
@@ -8354,7 +8000,7 @@
           <a:p>
             <a:fld id="{63289F7E-B80B-496E-81B4-D396C37C9454}" type="datetimeFigureOut">
               <a:rPr lang="pt-BR" smtClean="0"/>
-              <a:t>21/03/2026</a:t>
+              <a:t>28/03/2026</a:t>
             </a:fld>
             <a:endParaRPr lang="pt-BR"/>
           </a:p>
@@ -8365,7 +8011,7 @@
           <p:cNvPr id="3" name="Espaço Reservado para Rodapé 2">
             <a:extLst>
               <a:ext uri="{FF2B5EF4-FFF2-40B4-BE49-F238E27FC236}">
-                <a16:creationId xmlns="" xmlns:a16="http://schemas.microsoft.com/office/drawing/2014/main" id="{94D3D120-B3E8-4C96-861D-7A4F12F49B3A}"/>
+                <a16:creationId xmlns:a16="http://schemas.microsoft.com/office/drawing/2014/main" xmlns="" id="{94D3D120-B3E8-4C96-861D-7A4F12F49B3A}"/>
               </a:ext>
             </a:extLst>
           </p:cNvPr>
@@ -8390,7 +8036,7 @@
           <p:cNvPr id="4" name="Espaço Reservado para Número de Slide 3">
             <a:extLst>
               <a:ext uri="{FF2B5EF4-FFF2-40B4-BE49-F238E27FC236}">
-                <a16:creationId xmlns="" xmlns:a16="http://schemas.microsoft.com/office/drawing/2014/main" id="{42E49B68-FA1B-468B-9F17-D5C09243D454}"/>
+                <a16:creationId xmlns:a16="http://schemas.microsoft.com/office/drawing/2014/main" xmlns="" id="{42E49B68-FA1B-468B-9F17-D5C09243D454}"/>
               </a:ext>
             </a:extLst>
           </p:cNvPr>
@@ -8449,7 +8095,7 @@
           <p:cNvPr id="2" name="Título 1">
             <a:extLst>
               <a:ext uri="{FF2B5EF4-FFF2-40B4-BE49-F238E27FC236}">
-                <a16:creationId xmlns="" xmlns:a16="http://schemas.microsoft.com/office/drawing/2014/main" id="{1C17BCBE-A897-4319-85EC-D87909C24980}"/>
+                <a16:creationId xmlns:a16="http://schemas.microsoft.com/office/drawing/2014/main" xmlns="" id="{1C17BCBE-A897-4319-85EC-D87909C24980}"/>
               </a:ext>
             </a:extLst>
           </p:cNvPr>
@@ -8486,7 +8132,7 @@
           <p:cNvPr id="3" name="Espaço Reservado para Conteúdo 2">
             <a:extLst>
               <a:ext uri="{FF2B5EF4-FFF2-40B4-BE49-F238E27FC236}">
-                <a16:creationId xmlns="" xmlns:a16="http://schemas.microsoft.com/office/drawing/2014/main" id="{4226F885-0204-4913-868B-4B8B82576F17}"/>
+                <a16:creationId xmlns:a16="http://schemas.microsoft.com/office/drawing/2014/main" xmlns="" id="{4226F885-0204-4913-868B-4B8B82576F17}"/>
               </a:ext>
             </a:extLst>
           </p:cNvPr>
@@ -8576,7 +8222,7 @@
           <p:cNvPr id="4" name="Espaço Reservado para Texto 3">
             <a:extLst>
               <a:ext uri="{FF2B5EF4-FFF2-40B4-BE49-F238E27FC236}">
-                <a16:creationId xmlns="" xmlns:a16="http://schemas.microsoft.com/office/drawing/2014/main" id="{00F9F784-A858-441B-8AB5-697098141751}"/>
+                <a16:creationId xmlns:a16="http://schemas.microsoft.com/office/drawing/2014/main" xmlns="" id="{00F9F784-A858-441B-8AB5-697098141751}"/>
               </a:ext>
             </a:extLst>
           </p:cNvPr>
@@ -8647,7 +8293,7 @@
           <p:cNvPr id="5" name="Espaço Reservado para Data 4">
             <a:extLst>
               <a:ext uri="{FF2B5EF4-FFF2-40B4-BE49-F238E27FC236}">
-                <a16:creationId xmlns="" xmlns:a16="http://schemas.microsoft.com/office/drawing/2014/main" id="{A4DC363A-5000-472E-8B17-02E7DCB8840A}"/>
+                <a16:creationId xmlns:a16="http://schemas.microsoft.com/office/drawing/2014/main" xmlns="" id="{A4DC363A-5000-472E-8B17-02E7DCB8840A}"/>
               </a:ext>
             </a:extLst>
           </p:cNvPr>
@@ -8665,7 +8311,7 @@
           <a:p>
             <a:fld id="{63289F7E-B80B-496E-81B4-D396C37C9454}" type="datetimeFigureOut">
               <a:rPr lang="pt-BR" smtClean="0"/>
-              <a:t>21/03/2026</a:t>
+              <a:t>28/03/2026</a:t>
             </a:fld>
             <a:endParaRPr lang="pt-BR"/>
           </a:p>
@@ -8676,7 +8322,7 @@
           <p:cNvPr id="6" name="Espaço Reservado para Rodapé 5">
             <a:extLst>
               <a:ext uri="{FF2B5EF4-FFF2-40B4-BE49-F238E27FC236}">
-                <a16:creationId xmlns="" xmlns:a16="http://schemas.microsoft.com/office/drawing/2014/main" id="{5548425D-2C21-4C56-BAD4-662978775C28}"/>
+                <a16:creationId xmlns:a16="http://schemas.microsoft.com/office/drawing/2014/main" xmlns="" id="{5548425D-2C21-4C56-BAD4-662978775C28}"/>
               </a:ext>
             </a:extLst>
           </p:cNvPr>
@@ -8701,7 +8347,7 @@
           <p:cNvPr id="7" name="Espaço Reservado para Número de Slide 6">
             <a:extLst>
               <a:ext uri="{FF2B5EF4-FFF2-40B4-BE49-F238E27FC236}">
-                <a16:creationId xmlns="" xmlns:a16="http://schemas.microsoft.com/office/drawing/2014/main" id="{C63E9726-E64C-42B2-AE8A-8C235A956B48}"/>
+                <a16:creationId xmlns:a16="http://schemas.microsoft.com/office/drawing/2014/main" xmlns="" id="{C63E9726-E64C-42B2-AE8A-8C235A956B48}"/>
               </a:ext>
             </a:extLst>
           </p:cNvPr>
@@ -8760,7 +8406,7 @@
           <p:cNvPr id="2" name="Título 1">
             <a:extLst>
               <a:ext uri="{FF2B5EF4-FFF2-40B4-BE49-F238E27FC236}">
-                <a16:creationId xmlns="" xmlns:a16="http://schemas.microsoft.com/office/drawing/2014/main" id="{11086A78-3E74-450C-96A6-CA8AC37AF772}"/>
+                <a16:creationId xmlns:a16="http://schemas.microsoft.com/office/drawing/2014/main" xmlns="" id="{11086A78-3E74-450C-96A6-CA8AC37AF772}"/>
               </a:ext>
             </a:extLst>
           </p:cNvPr>
@@ -8797,7 +8443,7 @@
           <p:cNvPr id="3" name="Espaço Reservado para Imagem 2">
             <a:extLst>
               <a:ext uri="{FF2B5EF4-FFF2-40B4-BE49-F238E27FC236}">
-                <a16:creationId xmlns="" xmlns:a16="http://schemas.microsoft.com/office/drawing/2014/main" id="{5F5B7312-975A-4DBC-9B2F-3652ADA006FD}"/>
+                <a16:creationId xmlns:a16="http://schemas.microsoft.com/office/drawing/2014/main" xmlns="" id="{5F5B7312-975A-4DBC-9B2F-3652ADA006FD}"/>
               </a:ext>
             </a:extLst>
           </p:cNvPr>
@@ -8864,7 +8510,7 @@
           <p:cNvPr id="4" name="Espaço Reservado para Texto 3">
             <a:extLst>
               <a:ext uri="{FF2B5EF4-FFF2-40B4-BE49-F238E27FC236}">
-                <a16:creationId xmlns="" xmlns:a16="http://schemas.microsoft.com/office/drawing/2014/main" id="{AAF805F5-1DFF-41C6-944C-7D79FE0D0963}"/>
+                <a16:creationId xmlns:a16="http://schemas.microsoft.com/office/drawing/2014/main" xmlns="" id="{AAF805F5-1DFF-41C6-944C-7D79FE0D0963}"/>
               </a:ext>
             </a:extLst>
           </p:cNvPr>
@@ -8935,7 +8581,7 @@
           <p:cNvPr id="5" name="Espaço Reservado para Data 4">
             <a:extLst>
               <a:ext uri="{FF2B5EF4-FFF2-40B4-BE49-F238E27FC236}">
-                <a16:creationId xmlns="" xmlns:a16="http://schemas.microsoft.com/office/drawing/2014/main" id="{02113D81-8665-4516-BD81-C6A1F254EECD}"/>
+                <a16:creationId xmlns:a16="http://schemas.microsoft.com/office/drawing/2014/main" xmlns="" id="{02113D81-8665-4516-BD81-C6A1F254EECD}"/>
               </a:ext>
             </a:extLst>
           </p:cNvPr>
@@ -8953,7 +8599,7 @@
           <a:p>
             <a:fld id="{63289F7E-B80B-496E-81B4-D396C37C9454}" type="datetimeFigureOut">
               <a:rPr lang="pt-BR" smtClean="0"/>
-              <a:t>21/03/2026</a:t>
+              <a:t>28/03/2026</a:t>
             </a:fld>
             <a:endParaRPr lang="pt-BR"/>
           </a:p>
@@ -8964,7 +8610,7 @@
           <p:cNvPr id="6" name="Espaço Reservado para Rodapé 5">
             <a:extLst>
               <a:ext uri="{FF2B5EF4-FFF2-40B4-BE49-F238E27FC236}">
-                <a16:creationId xmlns="" xmlns:a16="http://schemas.microsoft.com/office/drawing/2014/main" id="{2B00C88B-FF32-40AA-A187-727D96FD7862}"/>
+                <a16:creationId xmlns:a16="http://schemas.microsoft.com/office/drawing/2014/main" xmlns="" id="{2B00C88B-FF32-40AA-A187-727D96FD7862}"/>
               </a:ext>
             </a:extLst>
           </p:cNvPr>
@@ -8989,7 +8635,7 @@
           <p:cNvPr id="7" name="Espaço Reservado para Número de Slide 6">
             <a:extLst>
               <a:ext uri="{FF2B5EF4-FFF2-40B4-BE49-F238E27FC236}">
-                <a16:creationId xmlns="" xmlns:a16="http://schemas.microsoft.com/office/drawing/2014/main" id="{A04D1A2D-69F7-4B8F-A730-BC26DC340BA6}"/>
+                <a16:creationId xmlns:a16="http://schemas.microsoft.com/office/drawing/2014/main" xmlns="" id="{A04D1A2D-69F7-4B8F-A730-BC26DC340BA6}"/>
               </a:ext>
             </a:extLst>
           </p:cNvPr>
@@ -9053,7 +8699,7 @@
           <p:cNvPr id="2" name="Espaço Reservado para Título 1">
             <a:extLst>
               <a:ext uri="{FF2B5EF4-FFF2-40B4-BE49-F238E27FC236}">
-                <a16:creationId xmlns="" xmlns:a16="http://schemas.microsoft.com/office/drawing/2014/main" id="{E69A0273-1966-4A1B-9370-4C1CE5036371}"/>
+                <a16:creationId xmlns:a16="http://schemas.microsoft.com/office/drawing/2014/main" xmlns="" id="{E69A0273-1966-4A1B-9370-4C1CE5036371}"/>
               </a:ext>
             </a:extLst>
           </p:cNvPr>
@@ -9091,7 +8737,7 @@
           <p:cNvPr id="3" name="Espaço Reservado para Texto 2">
             <a:extLst>
               <a:ext uri="{FF2B5EF4-FFF2-40B4-BE49-F238E27FC236}">
-                <a16:creationId xmlns="" xmlns:a16="http://schemas.microsoft.com/office/drawing/2014/main" id="{3B9CF87A-0448-49A7-AB25-EBC1D56A40EF}"/>
+                <a16:creationId xmlns:a16="http://schemas.microsoft.com/office/drawing/2014/main" xmlns="" id="{3B9CF87A-0448-49A7-AB25-EBC1D56A40EF}"/>
               </a:ext>
             </a:extLst>
           </p:cNvPr>
@@ -9158,7 +8804,7 @@
           <p:cNvPr id="4" name="Espaço Reservado para Data 3">
             <a:extLst>
               <a:ext uri="{FF2B5EF4-FFF2-40B4-BE49-F238E27FC236}">
-                <a16:creationId xmlns="" xmlns:a16="http://schemas.microsoft.com/office/drawing/2014/main" id="{2EF7B1F2-BB5A-44D0-816D-16AD2C71430E}"/>
+                <a16:creationId xmlns:a16="http://schemas.microsoft.com/office/drawing/2014/main" xmlns="" id="{2EF7B1F2-BB5A-44D0-816D-16AD2C71430E}"/>
               </a:ext>
             </a:extLst>
           </p:cNvPr>
@@ -9194,7 +8840,7 @@
           <a:p>
             <a:fld id="{63289F7E-B80B-496E-81B4-D396C37C9454}" type="datetimeFigureOut">
               <a:rPr lang="pt-BR" smtClean="0"/>
-              <a:t>21/03/2026</a:t>
+              <a:t>28/03/2026</a:t>
             </a:fld>
             <a:endParaRPr lang="pt-BR"/>
           </a:p>
@@ -9205,7 +8851,7 @@
           <p:cNvPr id="5" name="Espaço Reservado para Rodapé 4">
             <a:extLst>
               <a:ext uri="{FF2B5EF4-FFF2-40B4-BE49-F238E27FC236}">
-                <a16:creationId xmlns="" xmlns:a16="http://schemas.microsoft.com/office/drawing/2014/main" id="{C703F94C-2CC8-4DAA-BC35-14FC3E841DCD}"/>
+                <a16:creationId xmlns:a16="http://schemas.microsoft.com/office/drawing/2014/main" xmlns="" id="{C703F94C-2CC8-4DAA-BC35-14FC3E841DCD}"/>
               </a:ext>
             </a:extLst>
           </p:cNvPr>
@@ -9248,7 +8894,7 @@
           <p:cNvPr id="6" name="Espaço Reservado para Número de Slide 5">
             <a:extLst>
               <a:ext uri="{FF2B5EF4-FFF2-40B4-BE49-F238E27FC236}">
-                <a16:creationId xmlns="" xmlns:a16="http://schemas.microsoft.com/office/drawing/2014/main" id="{64051336-7048-457A-8B61-D94291D71648}"/>
+                <a16:creationId xmlns:a16="http://schemas.microsoft.com/office/drawing/2014/main" xmlns="" id="{64051336-7048-457A-8B61-D94291D71648}"/>
               </a:ext>
             </a:extLst>
           </p:cNvPr>
@@ -9616,7 +9262,7 @@
           <p:cNvPr id="2" name="Título 1">
             <a:extLst>
               <a:ext uri="{FF2B5EF4-FFF2-40B4-BE49-F238E27FC236}">
-                <a16:creationId xmlns="" xmlns:a16="http://schemas.microsoft.com/office/drawing/2014/main" id="{32666AC8-2E17-4DB4-B0F5-60C640CCFD2E}"/>
+                <a16:creationId xmlns:a16="http://schemas.microsoft.com/office/drawing/2014/main" xmlns="" id="{32666AC8-2E17-4DB4-B0F5-60C640CCFD2E}"/>
               </a:ext>
             </a:extLst>
           </p:cNvPr>
@@ -9662,7 +9308,7 @@
           <p:cNvPr id="4" name="CaixaDeTexto 3">
             <a:extLst>
               <a:ext uri="{FF2B5EF4-FFF2-40B4-BE49-F238E27FC236}">
-                <a16:creationId xmlns="" xmlns:a16="http://schemas.microsoft.com/office/drawing/2014/main" id="{430EB894-B7D4-434C-9D1A-A14094D9BEEC}"/>
+                <a16:creationId xmlns:a16="http://schemas.microsoft.com/office/drawing/2014/main" xmlns="" id="{430EB894-B7D4-434C-9D1A-A14094D9BEEC}"/>
               </a:ext>
             </a:extLst>
           </p:cNvPr>
@@ -9703,7 +9349,7 @@
           <p:cNvPr id="1026" name="Picture 2" descr="Logo">
             <a:extLst>
               <a:ext uri="{FF2B5EF4-FFF2-40B4-BE49-F238E27FC236}">
-                <a16:creationId xmlns="" xmlns:a16="http://schemas.microsoft.com/office/drawing/2014/main" id="{3F2642E0-4F6A-4196-8F58-E77D36E9A33F}"/>
+                <a16:creationId xmlns:a16="http://schemas.microsoft.com/office/drawing/2014/main" xmlns="" id="{3F2642E0-4F6A-4196-8F58-E77D36E9A33F}"/>
               </a:ext>
             </a:extLst>
           </p:cNvPr>
@@ -9748,7 +9394,7 @@
           <p:cNvPr id="5122" name="Picture 2" descr="Image result for machine learning">
             <a:extLst>
               <a:ext uri="{FF2B5EF4-FFF2-40B4-BE49-F238E27FC236}">
-                <a16:creationId xmlns="" xmlns:a16="http://schemas.microsoft.com/office/drawing/2014/main" id="{810CE0A2-4102-44A6-A370-175E7896CDCB}"/>
+                <a16:creationId xmlns:a16="http://schemas.microsoft.com/office/drawing/2014/main" xmlns="" id="{810CE0A2-4102-44A6-A370-175E7896CDCB}"/>
               </a:ext>
             </a:extLst>
           </p:cNvPr>
@@ -11152,7 +10798,7 @@
           <p:cNvPr id="13" name="CaixaDeTexto 12">
             <a:extLst>
               <a:ext uri="{FF2B5EF4-FFF2-40B4-BE49-F238E27FC236}">
-                <a16:creationId xmlns="" xmlns:a16="http://schemas.microsoft.com/office/drawing/2014/main" id="{9989FE69-01F8-8C6A-4EA0-DA1C9792B919}"/>
+                <a16:creationId xmlns:a16="http://schemas.microsoft.com/office/drawing/2014/main" xmlns="" id="{9989FE69-01F8-8C6A-4EA0-DA1C9792B919}"/>
               </a:ext>
             </a:extLst>
           </p:cNvPr>
@@ -11234,7 +10880,7 @@
           <p:cNvPr id="2" name="Título 1">
             <a:extLst>
               <a:ext uri="{FF2B5EF4-FFF2-40B4-BE49-F238E27FC236}">
-                <a16:creationId xmlns:a16="http://schemas.microsoft.com/office/drawing/2014/main" xmlns="" id="{B022D379-CAA0-9DC9-CDBD-6E0EBE1BFF31}"/>
+                <a16:creationId xmlns="" xmlns:a16="http://schemas.microsoft.com/office/drawing/2014/main" id="{B022D379-CAA0-9DC9-CDBD-6E0EBE1BFF31}"/>
               </a:ext>
             </a:extLst>
           </p:cNvPr>
@@ -11268,7 +10914,7 @@
               <p:cNvPr id="3" name="Espaço Reservado para Conteúdo 2">
                 <a:extLst>
                   <a:ext uri="{FF2B5EF4-FFF2-40B4-BE49-F238E27FC236}">
-                    <a16:creationId xmlns:a16="http://schemas.microsoft.com/office/drawing/2014/main" xmlns="" id="{B68F0D74-8673-A432-A1D7-BDEF7725851A}"/>
+                    <a16:creationId xmlns="" xmlns:a16="http://schemas.microsoft.com/office/drawing/2014/main" id="{B68F0D74-8673-A432-A1D7-BDEF7725851A}"/>
                   </a:ext>
                 </a:extLst>
               </p:cNvPr>
@@ -11555,7 +11201,7 @@
           <p:cNvPr id="2" name="Título 1">
             <a:extLst>
               <a:ext uri="{FF2B5EF4-FFF2-40B4-BE49-F238E27FC236}">
-                <a16:creationId xmlns:a16="http://schemas.microsoft.com/office/drawing/2014/main" xmlns="" id="{519F0958-530D-D942-BA01-15C1583DD1E6}"/>
+                <a16:creationId xmlns="" xmlns:a16="http://schemas.microsoft.com/office/drawing/2014/main" id="{519F0958-530D-D942-BA01-15C1583DD1E6}"/>
               </a:ext>
             </a:extLst>
           </p:cNvPr>
@@ -11589,7 +11235,7 @@
               <p:cNvPr id="3" name="Espaço Reservado para Conteúdo 2">
                 <a:extLst>
                   <a:ext uri="{FF2B5EF4-FFF2-40B4-BE49-F238E27FC236}">
-                    <a16:creationId xmlns:a16="http://schemas.microsoft.com/office/drawing/2014/main" xmlns="" id="{21416F72-28FB-E27C-D129-16A944A87C67}"/>
+                    <a16:creationId xmlns="" xmlns:a16="http://schemas.microsoft.com/office/drawing/2014/main" id="{21416F72-28FB-E27C-D129-16A944A87C67}"/>
                   </a:ext>
                 </a:extLst>
               </p:cNvPr>
@@ -11628,11 +11274,19 @@
                 </a:r>
                 <a:r>
                   <a:rPr lang="pt-BR" b="1" dirty="0"/>
-                  <a:t> classe por classificação</a:t>
-                </a:r>
-                <a:r>
-                  <a:rPr lang="pt-BR" dirty="0"/>
-                  <a:t>, portanto, ele deve ser usado apenas com </a:t>
+                  <a:t> classe por </a:t>
+                </a:r>
+                <a:r>
+                  <a:rPr lang="pt-BR" b="1" dirty="0" smtClean="0"/>
+                  <a:t>classificação</a:t>
+                </a:r>
+                <a:r>
+                  <a:rPr lang="pt-BR" dirty="0" smtClean="0"/>
+                  <a:t>, </a:t>
+                </a:r>
+                <a:r>
+                  <a:rPr lang="pt-BR" dirty="0"/>
+                  <a:t>portanto, ele deve ser usado apenas com </a:t>
                 </a:r>
                 <a:r>
                   <a:rPr lang="pt-BR" b="1" dirty="0"/>
@@ -11993,7 +11647,7 @@
               <p:cNvPr id="3" name="Espaço Reservado para Conteúdo 2">
                 <a:extLst>
                   <a:ext uri="{FF2B5EF4-FFF2-40B4-BE49-F238E27FC236}">
-                    <a16:creationId xmlns:a16="http://schemas.microsoft.com/office/drawing/2014/main" xmlns="" xmlns:a14="http://schemas.microsoft.com/office/drawing/2010/main" id="{21416F72-28FB-E27C-D129-16A944A87C67}"/>
+                    <a16:creationId xmlns="" xmlns:a16="http://schemas.microsoft.com/office/drawing/2014/main" xmlns:a14="http://schemas.microsoft.com/office/drawing/2010/main" id="{21416F72-28FB-E27C-D129-16A944A87C67}"/>
                   </a:ext>
                 </a:extLst>
               </p:cNvPr>
@@ -12066,7 +11720,7 @@
           <p:cNvPr id="2" name="Título 1">
             <a:extLst>
               <a:ext uri="{FF2B5EF4-FFF2-40B4-BE49-F238E27FC236}">
-                <a16:creationId xmlns:a16="http://schemas.microsoft.com/office/drawing/2014/main" xmlns="" id="{DCD47F25-5DD1-794E-8733-BFD771A2DE49}"/>
+                <a16:creationId xmlns="" xmlns:a16="http://schemas.microsoft.com/office/drawing/2014/main" id="{DCD47F25-5DD1-794E-8733-BFD771A2DE49}"/>
               </a:ext>
             </a:extLst>
           </p:cNvPr>
@@ -12093,14 +11747,14 @@
           </a:p>
         </p:txBody>
       </p:sp>
-      <mc:AlternateContent xmlns:mc="http://schemas.openxmlformats.org/markup-compatibility/2006" xmlns:a14="http://schemas.microsoft.com/office/drawing/2010/main">
-        <mc:Choice Requires="a14">
+      <mc:AlternateContent xmlns:mc="http://schemas.openxmlformats.org/markup-compatibility/2006">
+        <mc:Choice xmlns:a14="http://schemas.microsoft.com/office/drawing/2010/main" Requires="a14">
           <p:sp>
             <p:nvSpPr>
               <p:cNvPr id="3" name="Espaço Reservado para Conteúdo 2">
                 <a:extLst>
                   <a:ext uri="{FF2B5EF4-FFF2-40B4-BE49-F238E27FC236}">
-                    <a16:creationId xmlns:a16="http://schemas.microsoft.com/office/drawing/2014/main" xmlns="" id="{D79BB7DC-99E7-8958-EC77-566B7E3C2BBB}"/>
+                    <a16:creationId xmlns="" xmlns:a16="http://schemas.microsoft.com/office/drawing/2014/main" id="{D79BB7DC-99E7-8958-EC77-566B7E3C2BBB}"/>
                   </a:ext>
                 </a:extLst>
               </p:cNvPr>
@@ -12124,7 +11778,7 @@
               <a:lstStyle/>
               <a:p>
                 <a:r>
-                  <a:rPr lang="pt-BR" dirty="0"/>
+                  <a:rPr lang="pt-BR" dirty="0" smtClean="0"/>
                   <a:t>A </a:t>
                 </a:r>
                 <a:r>
@@ -12377,7 +12031,7 @@
                     </m:oMathParaPr>
                     <m:oMath xmlns:m="http://schemas.openxmlformats.org/officeDocument/2006/math">
                       <m:r>
-                        <a:rPr lang="pt-BR" sz="2400" i="1">
+                        <a:rPr lang="pt-BR" i="1">
                           <a:latin typeface="Cambria Math" panose="02040503050406030204" pitchFamily="18" charset="0"/>
                         </a:rPr>
                         <m:t>𝑃</m:t>
@@ -12385,7 +12039,7 @@
                       <m:d>
                         <m:dPr>
                           <m:ctrlPr>
-                            <a:rPr lang="pt-BR" sz="2400" i="1">
+                            <a:rPr lang="pt-BR" i="1">
                               <a:latin typeface="Cambria Math" panose="02040503050406030204" pitchFamily="18" charset="0"/>
                             </a:rPr>
                           </m:ctrlPr>
@@ -12394,14 +12048,14 @@
                           <m:sSub>
                             <m:sSubPr>
                               <m:ctrlPr>
-                                <a:rPr lang="pt-BR" sz="2400" i="1">
+                                <a:rPr lang="pt-BR" i="1">
                                   <a:latin typeface="Cambria Math" panose="02040503050406030204" pitchFamily="18" charset="0"/>
                                 </a:rPr>
                               </m:ctrlPr>
                             </m:sSubPr>
                             <m:e>
                               <m:r>
-                                <a:rPr lang="pt-BR" sz="2400" i="1">
+                                <a:rPr lang="pt-BR" i="1">
                                   <a:latin typeface="Cambria Math" panose="02040503050406030204" pitchFamily="18" charset="0"/>
                                 </a:rPr>
                                 <m:t>𝐶</m:t>
@@ -12409,7 +12063,7 @@
                             </m:e>
                             <m:sub>
                               <m:r>
-                                <a:rPr lang="pt-BR" sz="2400" i="1">
+                                <a:rPr lang="pt-BR" i="1">
                                   <a:latin typeface="Cambria Math" panose="02040503050406030204" pitchFamily="18" charset="0"/>
                                 </a:rPr>
                                 <m:t>𝑞</m:t>
@@ -12417,25 +12071,25 @@
                             </m:sub>
                           </m:sSub>
                           <m:r>
-                            <a:rPr lang="pt-BR" sz="2400" b="0" i="1" smtClean="0">
+                            <a:rPr lang="pt-BR" b="0" i="1" smtClean="0">
                               <a:latin typeface="Cambria Math" panose="02040503050406030204" pitchFamily="18" charset="0"/>
                             </a:rPr>
                             <m:t> </m:t>
                           </m:r>
                           <m:r>
-                            <a:rPr lang="pt-BR" sz="2400" i="1">
+                            <a:rPr lang="pt-BR" i="1">
                               <a:latin typeface="Cambria Math" panose="02040503050406030204" pitchFamily="18" charset="0"/>
                             </a:rPr>
                             <m:t>|</m:t>
                           </m:r>
                           <m:r>
-                            <a:rPr lang="pt-BR" sz="2400" b="0" i="1" smtClean="0">
+                            <a:rPr lang="pt-BR" b="0" i="1" smtClean="0">
                               <a:latin typeface="Cambria Math" panose="02040503050406030204" pitchFamily="18" charset="0"/>
                             </a:rPr>
                             <m:t> </m:t>
                           </m:r>
                           <m:r>
-                            <a:rPr lang="pt-BR" sz="2400" b="1" i="1">
+                            <a:rPr lang="pt-BR" b="1" i="1">
                               <a:latin typeface="Cambria Math" panose="02040503050406030204" pitchFamily="18" charset="0"/>
                             </a:rPr>
                             <m:t>𝒙</m:t>
@@ -12443,14 +12097,14 @@
                           <m:d>
                             <m:dPr>
                               <m:ctrlPr>
-                                <a:rPr lang="pt-BR" sz="2400" b="1" i="1">
+                                <a:rPr lang="pt-BR" b="1" i="1">
                                   <a:latin typeface="Cambria Math" panose="02040503050406030204" pitchFamily="18" charset="0"/>
                                 </a:rPr>
                               </m:ctrlPr>
                             </m:dPr>
                             <m:e>
                               <m:r>
-                                <a:rPr lang="pt-BR" sz="2400" b="0" i="1" smtClean="0">
+                                <a:rPr lang="pt-BR" b="0" i="1" smtClean="0">
                                   <a:latin typeface="Cambria Math" panose="02040503050406030204" pitchFamily="18" charset="0"/>
                                 </a:rPr>
                                 <m:t>𝑛</m:t>
@@ -12458,7 +12112,7 @@
                             </m:e>
                           </m:d>
                           <m:r>
-                            <a:rPr lang="pt-BR" sz="2400" b="0" i="1" smtClean="0">
+                            <a:rPr lang="pt-BR" b="0" i="1" smtClean="0">
                               <a:latin typeface="Cambria Math" panose="02040503050406030204" pitchFamily="18" charset="0"/>
                             </a:rPr>
                             <m:t>,</m:t>
@@ -12466,14 +12120,14 @@
                           <m:sSub>
                             <m:sSubPr>
                               <m:ctrlPr>
-                                <a:rPr lang="pt-BR" sz="2400" i="1">
+                                <a:rPr lang="pt-BR" i="1">
                                   <a:latin typeface="Cambria Math" panose="02040503050406030204" pitchFamily="18" charset="0"/>
                                 </a:rPr>
                               </m:ctrlPr>
                             </m:sSubPr>
                             <m:e>
                               <m:r>
-                                <a:rPr lang="pt-BR" sz="2400" b="1" i="1">
+                                <a:rPr lang="pt-BR" b="1" i="1">
                                   <a:latin typeface="Cambria Math" panose="02040503050406030204" pitchFamily="18" charset="0"/>
                                 </a:rPr>
                                 <m:t>𝒂</m:t>
@@ -12481,7 +12135,7 @@
                             </m:e>
                             <m:sub>
                               <m:r>
-                                <a:rPr lang="pt-BR" sz="2400" b="0" i="1" smtClean="0">
+                                <a:rPr lang="pt-BR" b="0" i="1" smtClean="0">
                                   <a:latin typeface="Cambria Math" panose="02040503050406030204" pitchFamily="18" charset="0"/>
                                 </a:rPr>
                                 <m:t>𝑞</m:t>
@@ -12491,7 +12145,7 @@
                         </m:e>
                       </m:d>
                       <m:r>
-                        <a:rPr lang="pt-BR" sz="2400" i="1">
+                        <a:rPr lang="pt-BR" i="1">
                           <a:latin typeface="Cambria Math" panose="02040503050406030204" pitchFamily="18" charset="0"/>
                         </a:rPr>
                         <m:t>=</m:t>
@@ -12499,14 +12153,14 @@
                       <m:sSubSup>
                         <m:sSubSupPr>
                           <m:ctrlPr>
-                            <a:rPr lang="pt-BR" sz="2400" b="1" i="1">
+                            <a:rPr lang="pt-BR" b="1" i="1">
                               <a:latin typeface="Cambria Math" panose="02040503050406030204" pitchFamily="18" charset="0"/>
                             </a:rPr>
                           </m:ctrlPr>
                         </m:sSubSupPr>
                         <m:e>
                           <m:r>
-                            <a:rPr lang="pt-BR" sz="2400" i="1">
+                            <a:rPr lang="pt-BR" i="1">
                               <a:latin typeface="Cambria Math" panose="02040503050406030204" pitchFamily="18" charset="0"/>
                             </a:rPr>
                             <m:t>h</m:t>
@@ -12514,7 +12168,7 @@
                         </m:e>
                         <m:sub>
                           <m:r>
-                            <a:rPr lang="pt-BR" sz="2400" b="1" i="1">
+                            <a:rPr lang="pt-BR" b="1" i="1">
                               <a:latin typeface="Cambria Math" panose="02040503050406030204" pitchFamily="18" charset="0"/>
                             </a:rPr>
                             <m:t>𝒂</m:t>
@@ -12522,7 +12176,7 @@
                         </m:sub>
                         <m:sup>
                           <m:r>
-                            <a:rPr lang="pt-BR" sz="2400" i="1">
+                            <a:rPr lang="pt-BR" i="1">
                               <a:latin typeface="Cambria Math" panose="02040503050406030204" pitchFamily="18" charset="0"/>
                             </a:rPr>
                             <m:t>𝑞</m:t>
@@ -12532,14 +12186,14 @@
                       <m:d>
                         <m:dPr>
                           <m:ctrlPr>
-                            <a:rPr lang="pt-BR" sz="2400" i="1">
+                            <a:rPr lang="pt-BR" i="1">
                               <a:latin typeface="Cambria Math" panose="02040503050406030204" pitchFamily="18" charset="0"/>
                             </a:rPr>
                           </m:ctrlPr>
                         </m:dPr>
                         <m:e>
                           <m:r>
-                            <a:rPr lang="pt-BR" sz="2400" b="1" i="1">
+                            <a:rPr lang="pt-BR" b="1" i="1">
                               <a:latin typeface="Cambria Math" panose="02040503050406030204" pitchFamily="18" charset="0"/>
                             </a:rPr>
                             <m:t>𝒙</m:t>
@@ -12547,14 +12201,14 @@
                           <m:d>
                             <m:dPr>
                               <m:ctrlPr>
-                                <a:rPr lang="pt-BR" sz="2400" b="1" i="1">
+                                <a:rPr lang="pt-BR" b="1" i="1">
                                   <a:latin typeface="Cambria Math" panose="02040503050406030204" pitchFamily="18" charset="0"/>
                                 </a:rPr>
                               </m:ctrlPr>
                             </m:dPr>
                             <m:e>
                               <m:r>
-                                <a:rPr lang="pt-BR" sz="2400" b="0" i="1" smtClean="0">
+                                <a:rPr lang="pt-BR" b="0" i="1" smtClean="0">
                                   <a:latin typeface="Cambria Math" panose="02040503050406030204" pitchFamily="18" charset="0"/>
                                 </a:rPr>
                                 <m:t>𝑛</m:t>
@@ -12564,7 +12218,7 @@
                         </m:e>
                       </m:d>
                       <m:r>
-                        <a:rPr lang="pt-BR" sz="2400" b="1" i="1">
+                        <a:rPr lang="pt-BR" b="1" i="1">
                           <a:latin typeface="Cambria Math" panose="02040503050406030204" pitchFamily="18" charset="0"/>
                         </a:rPr>
                         <m:t>=</m:t>
@@ -12572,7 +12226,7 @@
                       <m:f>
                         <m:fPr>
                           <m:ctrlPr>
-                            <a:rPr lang="pt-BR" sz="2400" b="1" i="1">
+                            <a:rPr lang="pt-BR" b="1" i="1">
                               <a:latin typeface="Cambria Math" panose="02040503050406030204" pitchFamily="18" charset="0"/>
                             </a:rPr>
                           </m:ctrlPr>
@@ -12581,14 +12235,14 @@
                           <m:sSup>
                             <m:sSupPr>
                               <m:ctrlPr>
-                                <a:rPr lang="pt-BR" sz="2400" b="1" i="1">
+                                <a:rPr lang="pt-BR" b="1" i="1">
                                   <a:latin typeface="Cambria Math" panose="02040503050406030204" pitchFamily="18" charset="0"/>
                                 </a:rPr>
                               </m:ctrlPr>
                             </m:sSupPr>
                             <m:e>
                               <m:r>
-                                <a:rPr lang="pt-BR" sz="2400" i="1">
+                                <a:rPr lang="pt-BR" i="1">
                                   <a:latin typeface="Cambria Math" panose="02040503050406030204" pitchFamily="18" charset="0"/>
                                 </a:rPr>
                                 <m:t>𝑒</m:t>
@@ -12598,14 +12252,14 @@
                               <m:sSub>
                                 <m:sSubPr>
                                   <m:ctrlPr>
-                                    <a:rPr lang="pt-BR" sz="2400" i="1">
+                                    <a:rPr lang="pt-BR" i="1">
                                       <a:latin typeface="Cambria Math" panose="02040503050406030204" pitchFamily="18" charset="0"/>
                                     </a:rPr>
                                   </m:ctrlPr>
                                 </m:sSubPr>
                                 <m:e>
                                   <m:r>
-                                    <a:rPr lang="pt-BR" sz="2400" i="1">
+                                    <a:rPr lang="pt-BR" i="1">
                                       <a:latin typeface="Cambria Math" panose="02040503050406030204" pitchFamily="18" charset="0"/>
                                     </a:rPr>
                                     <m:t>𝑔</m:t>
@@ -12613,7 +12267,7 @@
                                 </m:e>
                                 <m:sub>
                                   <m:r>
-                                    <a:rPr lang="pt-BR" sz="2400" i="1">
+                                    <a:rPr lang="pt-BR" i="1">
                                       <a:latin typeface="Cambria Math" panose="02040503050406030204" pitchFamily="18" charset="0"/>
                                     </a:rPr>
                                     <m:t>𝑞</m:t>
@@ -12621,37 +12275,37 @@
                                 </m:sub>
                               </m:sSub>
                               <m:r>
-                                <a:rPr lang="pt-BR" sz="2400" b="1" i="1">
+                                <a:rPr lang="pt-BR" b="1" i="1">
                                   <a:latin typeface="Cambria Math" panose="02040503050406030204" pitchFamily="18" charset="0"/>
                                 </a:rPr>
                                 <m:t>(</m:t>
                               </m:r>
                               <m:r>
-                                <a:rPr lang="pt-BR" sz="2400" b="1" i="1">
+                                <a:rPr lang="pt-BR" b="1" i="1">
                                   <a:latin typeface="Cambria Math" panose="02040503050406030204" pitchFamily="18" charset="0"/>
                                 </a:rPr>
                                 <m:t>𝒙</m:t>
                               </m:r>
                               <m:r>
-                                <a:rPr lang="pt-BR" sz="2400" i="1">
+                                <a:rPr lang="pt-BR" i="1">
                                   <a:latin typeface="Cambria Math" panose="02040503050406030204" pitchFamily="18" charset="0"/>
                                 </a:rPr>
                                 <m:t>(</m:t>
                               </m:r>
                               <m:r>
-                                <a:rPr lang="pt-BR" sz="2400" b="0" i="1" smtClean="0">
+                                <a:rPr lang="pt-BR" b="0" i="1" smtClean="0">
                                   <a:latin typeface="Cambria Math" panose="02040503050406030204" pitchFamily="18" charset="0"/>
                                 </a:rPr>
                                 <m:t>𝑛</m:t>
                               </m:r>
                               <m:r>
-                                <a:rPr lang="pt-BR" sz="2400" i="1">
+                                <a:rPr lang="pt-BR" i="1">
                                   <a:latin typeface="Cambria Math" panose="02040503050406030204" pitchFamily="18" charset="0"/>
                                 </a:rPr>
                                 <m:t>)</m:t>
                               </m:r>
                               <m:r>
-                                <a:rPr lang="pt-BR" sz="2400" b="1" i="1">
+                                <a:rPr lang="pt-BR" b="1" i="1">
                                   <a:latin typeface="Cambria Math" panose="02040503050406030204" pitchFamily="18" charset="0"/>
                                 </a:rPr>
                                 <m:t>)</m:t>
@@ -12664,20 +12318,20 @@
                             <m:naryPr>
                               <m:chr m:val="∑"/>
                               <m:ctrlPr>
-                                <a:rPr lang="pt-BR" sz="2400" b="1" i="1">
+                                <a:rPr lang="pt-BR" b="1" i="1">
                                   <a:latin typeface="Cambria Math" panose="02040503050406030204" pitchFamily="18" charset="0"/>
                                 </a:rPr>
                               </m:ctrlPr>
                             </m:naryPr>
                             <m:sub>
                               <m:r>
-                                <a:rPr lang="pt-BR" sz="2400" i="1">
+                                <a:rPr lang="pt-BR" i="1">
                                   <a:latin typeface="Cambria Math" panose="02040503050406030204" pitchFamily="18" charset="0"/>
                                 </a:rPr>
                                 <m:t>𝑗</m:t>
                               </m:r>
                               <m:r>
-                                <a:rPr lang="pt-BR" sz="2400" i="1">
+                                <a:rPr lang="pt-BR" i="1">
                                   <a:latin typeface="Cambria Math" panose="02040503050406030204" pitchFamily="18" charset="0"/>
                                 </a:rPr>
                                 <m:t>=0</m:t>
@@ -12685,13 +12339,13 @@
                             </m:sub>
                             <m:sup>
                               <m:r>
-                                <a:rPr lang="pt-BR" sz="2400" i="1">
+                                <a:rPr lang="pt-BR" i="1">
                                   <a:latin typeface="Cambria Math" panose="02040503050406030204" pitchFamily="18" charset="0"/>
                                 </a:rPr>
                                 <m:t>𝑄</m:t>
                               </m:r>
                               <m:r>
-                                <a:rPr lang="pt-BR" sz="2400" b="0" i="1" smtClean="0">
+                                <a:rPr lang="pt-BR" b="0" i="1" smtClean="0">
                                   <a:latin typeface="Cambria Math" panose="02040503050406030204" pitchFamily="18" charset="0"/>
                                 </a:rPr>
                                 <m:t>−1</m:t>
@@ -12701,14 +12355,14 @@
                               <m:sSup>
                                 <m:sSupPr>
                                   <m:ctrlPr>
-                                    <a:rPr lang="pt-BR" sz="2400" b="1" i="1">
+                                    <a:rPr lang="pt-BR" b="1" i="1">
                                       <a:latin typeface="Cambria Math" panose="02040503050406030204" pitchFamily="18" charset="0"/>
                                     </a:rPr>
                                   </m:ctrlPr>
                                 </m:sSupPr>
                                 <m:e>
                                   <m:r>
-                                    <a:rPr lang="pt-BR" sz="2400" i="1">
+                                    <a:rPr lang="pt-BR" i="1">
                                       <a:latin typeface="Cambria Math" panose="02040503050406030204" pitchFamily="18" charset="0"/>
                                     </a:rPr>
                                     <m:t>𝑒</m:t>
@@ -12718,14 +12372,14 @@
                                   <m:sSub>
                                     <m:sSubPr>
                                       <m:ctrlPr>
-                                        <a:rPr lang="pt-BR" sz="2400" i="1">
+                                        <a:rPr lang="pt-BR" i="1">
                                           <a:latin typeface="Cambria Math" panose="02040503050406030204" pitchFamily="18" charset="0"/>
                                         </a:rPr>
                                       </m:ctrlPr>
                                     </m:sSubPr>
                                     <m:e>
                                       <m:r>
-                                        <a:rPr lang="pt-BR" sz="2400" i="1">
+                                        <a:rPr lang="pt-BR" i="1">
                                           <a:latin typeface="Cambria Math" panose="02040503050406030204" pitchFamily="18" charset="0"/>
                                         </a:rPr>
                                         <m:t>𝑔</m:t>
@@ -12733,7 +12387,7 @@
                                     </m:e>
                                     <m:sub>
                                       <m:r>
-                                        <a:rPr lang="pt-BR" sz="2400" i="1">
+                                        <a:rPr lang="pt-BR" i="1">
                                           <a:latin typeface="Cambria Math" panose="02040503050406030204" pitchFamily="18" charset="0"/>
                                         </a:rPr>
                                         <m:t>𝑗</m:t>
@@ -12741,37 +12395,37 @@
                                     </m:sub>
                                   </m:sSub>
                                   <m:r>
-                                    <a:rPr lang="pt-BR" sz="2400" b="1" i="1">
+                                    <a:rPr lang="pt-BR" b="1" i="1">
                                       <a:latin typeface="Cambria Math" panose="02040503050406030204" pitchFamily="18" charset="0"/>
                                     </a:rPr>
                                     <m:t>(</m:t>
                                   </m:r>
                                   <m:r>
-                                    <a:rPr lang="pt-BR" sz="2400" b="1" i="1">
+                                    <a:rPr lang="pt-BR" b="1" i="1">
                                       <a:latin typeface="Cambria Math" panose="02040503050406030204" pitchFamily="18" charset="0"/>
                                     </a:rPr>
                                     <m:t>𝒙</m:t>
                                   </m:r>
                                   <m:r>
-                                    <a:rPr lang="pt-BR" sz="2400" i="1">
+                                    <a:rPr lang="pt-BR" i="1">
                                       <a:latin typeface="Cambria Math" panose="02040503050406030204" pitchFamily="18" charset="0"/>
                                     </a:rPr>
                                     <m:t>(</m:t>
                                   </m:r>
                                   <m:r>
-                                    <a:rPr lang="pt-BR" sz="2400" b="0" i="1" smtClean="0">
+                                    <a:rPr lang="pt-BR" b="0" i="1" smtClean="0">
                                       <a:latin typeface="Cambria Math" panose="02040503050406030204" pitchFamily="18" charset="0"/>
                                     </a:rPr>
                                     <m:t>𝑛</m:t>
                                   </m:r>
                                   <m:r>
-                                    <a:rPr lang="pt-BR" sz="2400" i="1">
+                                    <a:rPr lang="pt-BR" i="1">
                                       <a:latin typeface="Cambria Math" panose="02040503050406030204" pitchFamily="18" charset="0"/>
                                     </a:rPr>
                                     <m:t>)</m:t>
                                   </m:r>
                                   <m:r>
-                                    <a:rPr lang="pt-BR" sz="2400" b="1" i="1">
+                                    <a:rPr lang="pt-BR" b="1" i="1">
                                       <a:latin typeface="Cambria Math" panose="02040503050406030204" pitchFamily="18" charset="0"/>
                                     </a:rPr>
                                     <m:t>)</m:t>
@@ -12783,60 +12437,21 @@
                         </m:den>
                       </m:f>
                       <m:r>
-                        <a:rPr lang="pt-BR" sz="2400" b="1" i="1">
+                        <a:rPr lang="pt-BR" b="0" i="1" smtClean="0">
                           <a:latin typeface="Cambria Math" panose="02040503050406030204" pitchFamily="18" charset="0"/>
                           <a:ea typeface="Cambria Math" panose="02040503050406030204" pitchFamily="18" charset="0"/>
                         </a:rPr>
-                        <m:t>∈</m:t>
+                        <m:t>∀</m:t>
                       </m:r>
                       <m:r>
-                        <a:rPr lang="pt-BR" sz="2400" b="1" i="1">
+                        <a:rPr lang="pt-BR" b="0" i="1" smtClean="0">
                           <a:latin typeface="Cambria Math" panose="02040503050406030204" pitchFamily="18" charset="0"/>
                           <a:ea typeface="Cambria Math" panose="02040503050406030204" pitchFamily="18" charset="0"/>
                         </a:rPr>
-                        <m:t>ℝ</m:t>
+                        <m:t>𝑞</m:t>
                       </m:r>
                       <m:r>
-                        <a:rPr lang="pt-BR" sz="2400" b="1" i="1">
-                          <a:latin typeface="Cambria Math" panose="02040503050406030204" pitchFamily="18" charset="0"/>
-                          <a:ea typeface="Cambria Math" panose="02040503050406030204" pitchFamily="18" charset="0"/>
-                        </a:rPr>
-                        <m:t> </m:t>
-                      </m:r>
-                      <m:d>
-                        <m:dPr>
-                          <m:begChr m:val="["/>
-                          <m:endChr m:val="]"/>
-                          <m:ctrlPr>
-                            <a:rPr lang="pt-BR" sz="2400" b="1" i="1">
-                              <a:latin typeface="Cambria Math" panose="02040503050406030204" pitchFamily="18" charset="0"/>
-                              <a:ea typeface="Cambria Math" panose="02040503050406030204" pitchFamily="18" charset="0"/>
-                            </a:rPr>
-                          </m:ctrlPr>
-                        </m:dPr>
-                        <m:e>
-                          <m:r>
-                            <a:rPr lang="pt-BR" sz="2400">
-                              <a:latin typeface="Cambria Math" panose="02040503050406030204" pitchFamily="18" charset="0"/>
-                            </a:rPr>
-                            <m:t>0,</m:t>
-                          </m:r>
-                          <m:r>
-                            <a:rPr lang="pt-BR" sz="2400" b="0" i="0" smtClean="0">
-                              <a:latin typeface="Cambria Math" panose="02040503050406030204" pitchFamily="18" charset="0"/>
-                            </a:rPr>
-                            <m:t> </m:t>
-                          </m:r>
-                          <m:r>
-                            <a:rPr lang="pt-BR" sz="2400">
-                              <a:latin typeface="Cambria Math" panose="02040503050406030204" pitchFamily="18" charset="0"/>
-                            </a:rPr>
-                            <m:t>1</m:t>
-                          </m:r>
-                        </m:e>
-                      </m:d>
-                      <m:r>
-                        <a:rPr lang="pt-BR" sz="2400" b="1" i="1" smtClean="0">
+                        <a:rPr lang="pt-BR" b="1" i="1" smtClean="0">
                           <a:latin typeface="Cambria Math" panose="02040503050406030204" pitchFamily="18" charset="0"/>
                         </a:rPr>
                         <m:t>,</m:t>
@@ -12844,7 +12459,7 @@
                     </m:oMath>
                   </m:oMathPara>
                 </a14:m>
-                <a:endParaRPr lang="pt-BR" sz="2400" i="1" dirty="0"/>
+                <a:endParaRPr lang="pt-BR" i="1" dirty="0"/>
               </a:p>
               <a:p>
                 <a:pPr marL="0" indent="0">
@@ -13360,13 +12975,13 @@
             </p:txBody>
           </p:sp>
         </mc:Choice>
-        <mc:Fallback xmlns="">
+        <mc:Fallback>
           <p:sp>
             <p:nvSpPr>
               <p:cNvPr id="3" name="Espaço Reservado para Conteúdo 2">
                 <a:extLst>
                   <a:ext uri="{FF2B5EF4-FFF2-40B4-BE49-F238E27FC236}">
-                    <a16:creationId xmlns:a16="http://schemas.microsoft.com/office/drawing/2014/main" id="{D79BB7DC-99E7-8958-EC77-566B7E3C2BBB}"/>
+                    <a16:creationId xmlns="" xmlns:a16="http://schemas.microsoft.com/office/drawing/2014/main" xmlns:a14="http://schemas.microsoft.com/office/drawing/2010/main" id="{D79BB7DC-99E7-8958-EC77-566B7E3C2BBB}"/>
                   </a:ext>
                 </a:extLst>
               </p:cNvPr>
@@ -13382,7 +12997,7 @@
                 <a:off x="838200" y="1825624"/>
                 <a:ext cx="11080174" cy="5032375"/>
               </a:xfrm>
-              <a:blipFill>
+              <a:blipFill rotWithShape="0">
                 <a:blip r:embed="rId3"/>
                 <a:stretch>
                   <a:fillRect l="-1156" t="-1332"/>
@@ -13394,7 +13009,7 @@
               <a:lstStyle/>
               <a:p>
                 <a:r>
-                  <a:rPr lang="en-US">
+                  <a:rPr lang="pt-BR">
                     <a:noFill/>
                   </a:rPr>
                   <a:t> </a:t>
@@ -13439,7 +13054,7 @@
           <p:cNvPr id="2" name="Título 1">
             <a:extLst>
               <a:ext uri="{FF2B5EF4-FFF2-40B4-BE49-F238E27FC236}">
-                <a16:creationId xmlns:a16="http://schemas.microsoft.com/office/drawing/2014/main" xmlns="" id="{52E3438D-F516-F1D3-A02F-51857586D07A}"/>
+                <a16:creationId xmlns="" xmlns:a16="http://schemas.microsoft.com/office/drawing/2014/main" id="{52E3438D-F516-F1D3-A02F-51857586D07A}"/>
               </a:ext>
             </a:extLst>
           </p:cNvPr>
@@ -13466,14 +13081,14 @@
           </a:p>
         </p:txBody>
       </p:sp>
-      <mc:AlternateContent xmlns:mc="http://schemas.openxmlformats.org/markup-compatibility/2006">
-        <mc:Choice xmlns:a14="http://schemas.microsoft.com/office/drawing/2010/main" Requires="a14">
+      <mc:AlternateContent xmlns:mc="http://schemas.openxmlformats.org/markup-compatibility/2006" xmlns:a14="http://schemas.microsoft.com/office/drawing/2010/main">
+        <mc:Choice Requires="a14">
           <p:sp>
             <p:nvSpPr>
               <p:cNvPr id="3" name="Espaço Reservado para Conteúdo 2">
                 <a:extLst>
                   <a:ext uri="{FF2B5EF4-FFF2-40B4-BE49-F238E27FC236}">
-                    <a16:creationId xmlns:a16="http://schemas.microsoft.com/office/drawing/2014/main" xmlns="" id="{BCAAD57B-65A0-9DAD-79FC-2AE2692EB84B}"/>
+                    <a16:creationId xmlns="" xmlns:a16="http://schemas.microsoft.com/office/drawing/2014/main" id="{BCAAD57B-65A0-9DAD-79FC-2AE2692EB84B}"/>
                   </a:ext>
                 </a:extLst>
               </p:cNvPr>
@@ -13487,7 +13102,7 @@
             <p:spPr>
               <a:xfrm>
                 <a:off x="838200" y="1825624"/>
-                <a:ext cx="11232473" cy="5032375"/>
+                <a:ext cx="11353800" cy="5032375"/>
               </a:xfrm>
             </p:spPr>
             <p:txBody>
@@ -13497,73 +13112,19 @@
               <a:lstStyle/>
               <a:p>
                 <a:r>
-                  <a:rPr lang="pt-BR" b="0" dirty="0" smtClean="0">
-                    <a:effectLst/>
-                  </a:rPr>
-                  <a:t>Ela transforma os </a:t>
-                </a:r>
-                <a:r>
-                  <a:rPr lang="pt-BR" b="1" dirty="0" smtClean="0">
-                    <a:solidFill>
-                      <a:srgbClr val="00B050"/>
-                    </a:solidFill>
-                    <a:effectLst/>
-                  </a:rPr>
-                  <a:t>valores</a:t>
-                </a:r>
-                <a:r>
-                  <a:rPr lang="pt-BR" b="1" dirty="0" smtClean="0">
-                    <a:solidFill>
-                      <a:srgbClr val="00B050"/>
-                    </a:solidFill>
-                  </a:rPr>
-                  <a:t> das </a:t>
-                </a:r>
-                <a14:m>
-                  <m:oMath xmlns:m="http://schemas.openxmlformats.org/officeDocument/2006/math">
-                    <m:r>
-                      <a:rPr lang="pt-BR" b="1" i="1" smtClean="0">
-                        <a:solidFill>
-                          <a:srgbClr val="00B050"/>
-                        </a:solidFill>
-                        <a:latin typeface="Cambria Math" panose="02040503050406030204" pitchFamily="18" charset="0"/>
-                      </a:rPr>
-                      <m:t>𝑸</m:t>
-                    </m:r>
-                  </m:oMath>
-                </a14:m>
-                <a:r>
-                  <a:rPr lang="pt-BR" b="1" dirty="0" smtClean="0">
-                    <a:solidFill>
-                      <a:srgbClr val="00B050"/>
-                    </a:solidFill>
-                  </a:rPr>
-                  <a:t> </a:t>
-                </a:r>
-                <a:r>
-                  <a:rPr lang="pt-BR" b="1" dirty="0">
-                    <a:solidFill>
-                      <a:srgbClr val="00B050"/>
-                    </a:solidFill>
-                    <a:effectLst/>
-                  </a:rPr>
-                  <a:t>funções discriminantes em uma distribuição de probabilidades</a:t>
-                </a:r>
-                <a:r>
-                  <a:rPr lang="pt-BR" b="0" dirty="0">
-                    <a:effectLst/>
-                  </a:rPr>
-                  <a:t>.</a:t>
-                </a:r>
+                  <a:rPr lang="pt-BR" dirty="0" smtClean="0"/>
+                  <a:t>É uma generalização da função sigmoide.</a:t>
+                </a:r>
+                <a:endParaRPr lang="pt-BR" dirty="0"/>
               </a:p>
               <a:p>
-                <a:pPr lvl="1">
-                  <a:buFont typeface="Wingdings" panose="05000000000000000000" pitchFamily="2" charset="2"/>
-                  <a:buChar char="§"/>
-                </a:pPr>
-                <a:r>
-                  <a:rPr lang="pt-BR" dirty="0"/>
-                  <a:t>O somatório de termos exponenciais no denominador </a:t>
+                <a:r>
+                  <a:rPr lang="pt-BR" dirty="0" smtClean="0"/>
+                  <a:t>O </a:t>
+                </a:r>
+                <a:r>
+                  <a:rPr lang="pt-BR" dirty="0"/>
+                  <a:t>somatório de termos exponenciais no denominador </a:t>
                 </a:r>
                 <a:r>
                   <a:rPr lang="pt-BR" b="1" dirty="0">
@@ -13575,20 +13136,16 @@
                 </a:r>
                 <a:r>
                   <a:rPr lang="pt-BR" dirty="0"/>
-                  <a:t> o valor da </a:t>
-                </a:r>
-                <a:r>
-                  <a:rPr lang="pt-BR" i="1" dirty="0"/>
-                  <a:t>q</a:t>
-                </a:r>
-                <a:r>
-                  <a:rPr lang="pt-BR" dirty="0"/>
-                  <a:t>-ésima saída de tal forma que o somatório das </a:t>
+                  <a:t> o valor </a:t>
+                </a:r>
+                <a:r>
+                  <a:rPr lang="pt-BR" dirty="0" smtClean="0"/>
+                  <a:t>de cada uma das </a:t>
                 </a:r>
                 <a14:m>
                   <m:oMath xmlns:m="http://schemas.openxmlformats.org/officeDocument/2006/math">
                     <m:r>
-                      <a:rPr lang="pt-BR" i="1">
+                      <a:rPr lang="pt-BR" b="0" i="1" smtClean="0">
                         <a:latin typeface="Cambria Math" panose="02040503050406030204" pitchFamily="18" charset="0"/>
                       </a:rPr>
                       <m:t>𝑄</m:t>
@@ -13596,12 +13153,8 @@
                   </m:oMath>
                 </a14:m>
                 <a:r>
-                  <a:rPr lang="pt-BR" dirty="0"/>
-                  <a:t> saídas seja igual a </a:t>
-                </a:r>
-                <a:r>
                   <a:rPr lang="pt-BR" dirty="0" smtClean="0"/>
-                  <a:t>1.</a:t>
+                  <a:t> saídas, fazendo com que elas fiquem no intervalo [0, 1].</a:t>
                 </a:r>
                 <a:endParaRPr lang="pt-BR" dirty="0"/>
               </a:p>
@@ -14087,7 +13640,50 @@
               <a:p>
                 <a:r>
                   <a:rPr lang="pt-BR" dirty="0"/>
-                  <a:t>Dado um exemplo de entrada, ela </a:t>
+                  <a:t>Ela transforma os </a:t>
+                </a:r>
+                <a:r>
+                  <a:rPr lang="pt-BR" b="1" dirty="0">
+                    <a:solidFill>
+                      <a:srgbClr val="00B050"/>
+                    </a:solidFill>
+                  </a:rPr>
+                  <a:t>valores das </a:t>
+                </a:r>
+                <a14:m>
+                  <m:oMath xmlns:m="http://schemas.openxmlformats.org/officeDocument/2006/math">
+                    <m:r>
+                      <a:rPr lang="pt-BR" b="1" i="1">
+                        <a:solidFill>
+                          <a:srgbClr val="00B050"/>
+                        </a:solidFill>
+                        <a:latin typeface="Cambria Math" panose="02040503050406030204" pitchFamily="18" charset="0"/>
+                      </a:rPr>
+                      <m:t>𝑸</m:t>
+                    </m:r>
+                  </m:oMath>
+                </a14:m>
+                <a:r>
+                  <a:rPr lang="pt-BR" b="1" dirty="0">
+                    <a:solidFill>
+                      <a:srgbClr val="00B050"/>
+                    </a:solidFill>
+                  </a:rPr>
+                  <a:t> funções discriminantes em uma distribuição de probabilidades</a:t>
+                </a:r>
+                <a:r>
+                  <a:rPr lang="pt-BR" dirty="0" smtClean="0"/>
+                  <a:t>.</a:t>
+                </a:r>
+              </a:p>
+              <a:p>
+                <a:r>
+                  <a:rPr lang="pt-BR" dirty="0" smtClean="0"/>
+                  <a:t>Assim, dado </a:t>
+                </a:r>
+                <a:r>
+                  <a:rPr lang="pt-BR" dirty="0"/>
+                  <a:t>um exemplo de entrada, ela </a:t>
                 </a:r>
                 <a:r>
                   <a:rPr lang="pt-BR" b="1" dirty="0">
@@ -14118,861 +13714,19 @@
                   <a:t> </a:t>
                 </a:r>
                 <a:r>
-                  <a:rPr lang="pt-BR" b="1" dirty="0">
+                  <a:rPr lang="pt-BR" b="1" dirty="0" smtClean="0">
                     <a:solidFill>
                       <a:srgbClr val="00B050"/>
                     </a:solidFill>
                   </a:rPr>
-                  <a:t>para cada classe </a:t>
-                </a:r>
-                <a:r>
-                  <a:rPr lang="pt-BR" dirty="0"/>
-                  <a:t>possível.</a:t>
-                </a:r>
-              </a:p>
-              <a:p>
-                <a:r>
-                  <a:rPr lang="pt-BR" dirty="0"/>
-                  <a:t>É uma generalização da função sigmoide.</a:t>
-                </a:r>
-              </a:p>
-            </p:txBody>
-          </p:sp>
-        </mc:Choice>
-        <mc:Fallback>
-          <p:sp>
-            <p:nvSpPr>
-              <p:cNvPr id="3" name="Espaço Reservado para Conteúdo 2">
-                <a:extLst>
-                  <a:ext uri="{FF2B5EF4-FFF2-40B4-BE49-F238E27FC236}">
-                    <a16:creationId xmlns:a16="http://schemas.microsoft.com/office/drawing/2014/main" xmlns="" xmlns:a14="http://schemas.microsoft.com/office/drawing/2010/main" id="{BCAAD57B-65A0-9DAD-79FC-2AE2692EB84B}"/>
-                  </a:ext>
-                </a:extLst>
-              </p:cNvPr>
-              <p:cNvSpPr>
-                <a:spLocks noGrp="1" noRot="1" noChangeAspect="1" noMove="1" noResize="1" noEditPoints="1" noAdjustHandles="1" noChangeArrowheads="1" noChangeShapeType="1" noTextEdit="1"/>
-              </p:cNvSpPr>
-              <p:nvPr>
-                <p:ph idx="1"/>
-              </p:nvPr>
-            </p:nvSpPr>
-            <p:spPr>
-              <a:xfrm>
-                <a:off x="838200" y="1825624"/>
-                <a:ext cx="11232473" cy="5032375"/>
-              </a:xfrm>
-              <a:blipFill rotWithShape="0">
-                <a:blip r:embed="rId3"/>
-                <a:stretch>
-                  <a:fillRect l="-977" t="-1937" r="-1140"/>
-                </a:stretch>
-              </a:blipFill>
-            </p:spPr>
-            <p:txBody>
-              <a:bodyPr/>
-              <a:lstStyle/>
-              <a:p>
-                <a:r>
-                  <a:rPr lang="pt-BR">
-                    <a:noFill/>
-                  </a:rPr>
-                  <a:t> </a:t>
-                </a:r>
-              </a:p>
-            </p:txBody>
-          </p:sp>
-        </mc:Fallback>
-      </mc:AlternateContent>
-      <p:sp>
-        <p:nvSpPr>
-          <p:cNvPr id="5" name="Rectangle 11">
-            <a:extLst>
-              <a:ext uri="{FF2B5EF4-FFF2-40B4-BE49-F238E27FC236}">
-                <a16:creationId xmlns:a16="http://schemas.microsoft.com/office/drawing/2014/main" xmlns="" id="{D1D7E603-A964-1188-9D09-B0C1E18592FA}"/>
-              </a:ext>
-            </a:extLst>
-          </p:cNvPr>
-          <p:cNvSpPr/>
-          <p:nvPr/>
-        </p:nvSpPr>
-        <p:spPr>
-          <a:xfrm>
-            <a:off x="6677025" y="3843791"/>
-            <a:ext cx="2143124" cy="575809"/>
-          </a:xfrm>
-          <a:prstGeom prst="rect">
-            <a:avLst/>
-          </a:prstGeom>
-          <a:noFill/>
-          <a:ln w="28575">
-            <a:solidFill>
-              <a:srgbClr val="FF0000"/>
-            </a:solidFill>
-          </a:ln>
-        </p:spPr>
-        <p:style>
-          <a:lnRef idx="2">
-            <a:schemeClr val="accent1">
-              <a:shade val="50000"/>
-            </a:schemeClr>
-          </a:lnRef>
-          <a:fillRef idx="1">
-            <a:schemeClr val="accent1"/>
-          </a:fillRef>
-          <a:effectRef idx="0">
-            <a:schemeClr val="accent1"/>
-          </a:effectRef>
-          <a:fontRef idx="minor">
-            <a:schemeClr val="lt1"/>
-          </a:fontRef>
-        </p:style>
-        <p:txBody>
-          <a:bodyPr rtlCol="0" anchor="ctr"/>
-          <a:lstStyle/>
-          <a:p>
-            <a:pPr algn="ctr"/>
-            <a:endParaRPr lang="pt-BR"/>
-          </a:p>
-        </p:txBody>
-      </p:sp>
-    </p:spTree>
-    <p:extLst>
-      <p:ext uri="{BB962C8B-B14F-4D97-AF65-F5344CB8AC3E}">
-        <p14:creationId xmlns:p14="http://schemas.microsoft.com/office/powerpoint/2010/main" val="2375032691"/>
-      </p:ext>
-    </p:extLst>
-  </p:cSld>
-  <p:clrMapOvr>
-    <a:masterClrMapping/>
-  </p:clrMapOvr>
-</p:sld>
-</file>
-
-<file path=ppt/slides/slide15.xml><?xml version="1.0" encoding="utf-8"?>
-<p:sld xmlns:a="http://schemas.openxmlformats.org/drawingml/2006/main" xmlns:r="http://schemas.openxmlformats.org/officeDocument/2006/relationships" xmlns:p="http://schemas.openxmlformats.org/presentationml/2006/main">
-  <p:cSld>
-    <p:spTree>
-      <p:nvGrpSpPr>
-        <p:cNvPr id="1" name=""/>
-        <p:cNvGrpSpPr/>
-        <p:nvPr/>
-      </p:nvGrpSpPr>
-      <p:grpSpPr>
-        <a:xfrm>
-          <a:off x="0" y="0"/>
-          <a:ext cx="0" cy="0"/>
-          <a:chOff x="0" y="0"/>
-          <a:chExt cx="0" cy="0"/>
-        </a:xfrm>
-      </p:grpSpPr>
-      <p:sp>
-        <p:nvSpPr>
-          <p:cNvPr id="2" name="Título 1">
-            <a:extLst>
-              <a:ext uri="{FF2B5EF4-FFF2-40B4-BE49-F238E27FC236}">
-                <a16:creationId xmlns:a16="http://schemas.microsoft.com/office/drawing/2014/main" xmlns="" id="{99DAA83A-B143-94BB-B48B-41A7423070CE}"/>
-              </a:ext>
-            </a:extLst>
-          </p:cNvPr>
-          <p:cNvSpPr>
-            <a:spLocks noGrp="1"/>
-          </p:cNvSpPr>
-          <p:nvPr>
-            <p:ph type="title"/>
-          </p:nvPr>
-        </p:nvSpPr>
-        <p:spPr/>
-        <p:txBody>
-          <a:bodyPr/>
-          <a:lstStyle/>
-          <a:p>
-            <a:r>
-              <a:rPr lang="pt-BR" dirty="0"/>
-              <a:t>Função de ativação </a:t>
-            </a:r>
-            <a:r>
-              <a:rPr lang="pt-BR" i="1" dirty="0"/>
-              <a:t>softmax</a:t>
-            </a:r>
-            <a:endParaRPr lang="pt-BR" dirty="0"/>
-          </a:p>
-        </p:txBody>
-      </p:sp>
-      <mc:AlternateContent xmlns:mc="http://schemas.openxmlformats.org/markup-compatibility/2006" xmlns:a14="http://schemas.microsoft.com/office/drawing/2010/main">
-        <mc:Choice Requires="a14">
-          <p:sp>
-            <p:nvSpPr>
-              <p:cNvPr id="3" name="Espaço Reservado para Conteúdo 2">
-                <a:extLst>
-                  <a:ext uri="{FF2B5EF4-FFF2-40B4-BE49-F238E27FC236}">
-                    <a16:creationId xmlns:a16="http://schemas.microsoft.com/office/drawing/2014/main" xmlns="" id="{32DF54A1-52F5-C48C-7CD4-D6E451DF19D8}"/>
-                  </a:ext>
-                </a:extLst>
-              </p:cNvPr>
-              <p:cNvSpPr>
-                <a:spLocks noGrp="1"/>
-              </p:cNvSpPr>
-              <p:nvPr>
-                <p:ph idx="1"/>
-              </p:nvPr>
-            </p:nvSpPr>
-            <p:spPr>
-              <a:xfrm>
-                <a:off x="6646606" y="1825624"/>
-                <a:ext cx="5417575" cy="5032375"/>
-              </a:xfrm>
-            </p:spPr>
-            <p:txBody>
-              <a:bodyPr>
-                <a:normAutofit/>
-              </a:bodyPr>
-              <a:lstStyle/>
-              <a:p>
-                <a:r>
-                  <a:rPr lang="pt-BR" dirty="0"/>
-                  <a:t>A função </a:t>
-                </a:r>
-                <a:r>
-                  <a:rPr lang="pt-BR" i="1" dirty="0"/>
-                  <a:t>softmax</a:t>
-                </a:r>
-                <a:r>
-                  <a:rPr lang="pt-BR" dirty="0"/>
-                  <a:t> </a:t>
-                </a:r>
-                <a:r>
-                  <a:rPr lang="pt-BR" dirty="0">
-                    <a:solidFill>
-                      <a:schemeClr val="tx1"/>
-                    </a:solidFill>
-                  </a:rPr>
-                  <a:t>o</a:t>
-                </a:r>
-                <a:r>
-                  <a:rPr lang="pt-BR" b="0" i="0" dirty="0">
-                    <a:solidFill>
-                      <a:schemeClr val="tx1"/>
-                    </a:solidFill>
-                    <a:effectLst/>
-                  </a:rPr>
-                  <a:t>pera da seguinte maneira.</a:t>
-                </a:r>
-              </a:p>
-              <a:p>
-                <a:r>
-                  <a:rPr lang="pt-BR" b="0" i="0" dirty="0">
-                    <a:solidFill>
-                      <a:schemeClr val="tx1"/>
-                    </a:solidFill>
-                    <a:effectLst/>
-                  </a:rPr>
-                  <a:t>Dado um </a:t>
-                </a:r>
-                <a:r>
-                  <a:rPr lang="pt-BR" b="1" dirty="0">
-                    <a:solidFill>
-                      <a:srgbClr val="00B050"/>
-                    </a:solidFill>
-                    <a:effectLst/>
-                  </a:rPr>
-                  <a:t>vetor </a:t>
-                </a:r>
-                <a:r>
-                  <a:rPr lang="pt-BR" b="1" dirty="0">
+                  <a:t>condicional</a:t>
+                </a:r>
+                <a:r>
+                  <a:rPr lang="pt-BR" dirty="0" smtClean="0">
                     <a:solidFill>
                       <a:srgbClr val="00B050"/>
                     </a:solidFill>
                   </a:rPr>
-                  <a:t>com</a:t>
-                </a:r>
-                <a:r>
-                  <a:rPr lang="pt-BR" b="1" dirty="0">
-                    <a:solidFill>
-                      <a:srgbClr val="00B050"/>
-                    </a:solidFill>
-                    <a:effectLst/>
-                  </a:rPr>
-                  <a:t> valores de funções discriminantes</a:t>
-                </a:r>
-                <a:r>
-                  <a:rPr lang="pt-BR" b="0" i="0" dirty="0">
-                    <a:solidFill>
-                      <a:schemeClr val="tx1"/>
-                    </a:solidFill>
-                    <a:effectLst/>
-                  </a:rPr>
-                  <a:t>, </a:t>
-                </a:r>
-                <a14:m>
-                  <m:oMath xmlns:m="http://schemas.openxmlformats.org/officeDocument/2006/math">
-                    <m:sSub>
-                      <m:sSubPr>
-                        <m:ctrlPr>
-                          <a:rPr lang="pt-BR" sz="2800" i="1" smtClean="0">
-                            <a:solidFill>
-                              <a:schemeClr val="tx1"/>
-                            </a:solidFill>
-                            <a:latin typeface="Cambria Math" panose="02040503050406030204" pitchFamily="18" charset="0"/>
-                          </a:rPr>
-                        </m:ctrlPr>
-                      </m:sSubPr>
-                      <m:e>
-                        <m:r>
-                          <a:rPr lang="pt-BR" sz="2800" i="1">
-                            <a:solidFill>
-                              <a:schemeClr val="tx1"/>
-                            </a:solidFill>
-                            <a:latin typeface="Cambria Math" panose="02040503050406030204" pitchFamily="18" charset="0"/>
-                          </a:rPr>
-                          <m:t>𝑔</m:t>
-                        </m:r>
-                      </m:e>
-                      <m:sub>
-                        <m:r>
-                          <a:rPr lang="pt-BR" sz="2800" b="0" i="1" smtClean="0">
-                            <a:solidFill>
-                              <a:schemeClr val="tx1"/>
-                            </a:solidFill>
-                            <a:latin typeface="Cambria Math" panose="02040503050406030204" pitchFamily="18" charset="0"/>
-                          </a:rPr>
-                          <m:t>𝑞</m:t>
-                        </m:r>
-                      </m:sub>
-                    </m:sSub>
-                    <m:d>
-                      <m:dPr>
-                        <m:ctrlPr>
-                          <a:rPr lang="pt-BR" sz="2800" i="1">
-                            <a:solidFill>
-                              <a:schemeClr val="tx1"/>
-                            </a:solidFill>
-                            <a:latin typeface="Cambria Math" panose="02040503050406030204" pitchFamily="18" charset="0"/>
-                          </a:rPr>
-                        </m:ctrlPr>
-                      </m:dPr>
-                      <m:e>
-                        <m:r>
-                          <a:rPr lang="pt-BR" sz="2800" b="1" i="1">
-                            <a:solidFill>
-                              <a:schemeClr val="tx1"/>
-                            </a:solidFill>
-                            <a:latin typeface="Cambria Math" panose="02040503050406030204" pitchFamily="18" charset="0"/>
-                          </a:rPr>
-                          <m:t>𝒙</m:t>
-                        </m:r>
-                        <m:r>
-                          <a:rPr lang="pt-BR" sz="2800" b="0" i="1" smtClean="0">
-                            <a:solidFill>
-                              <a:schemeClr val="tx1"/>
-                            </a:solidFill>
-                            <a:latin typeface="Cambria Math" panose="02040503050406030204" pitchFamily="18" charset="0"/>
-                          </a:rPr>
-                          <m:t>(</m:t>
-                        </m:r>
-                        <m:r>
-                          <a:rPr lang="pt-BR" sz="2800" b="0" i="1" smtClean="0">
-                            <a:solidFill>
-                              <a:schemeClr val="tx1"/>
-                            </a:solidFill>
-                            <a:latin typeface="Cambria Math" panose="02040503050406030204" pitchFamily="18" charset="0"/>
-                          </a:rPr>
-                          <m:t>𝑛</m:t>
-                        </m:r>
-                        <m:r>
-                          <a:rPr lang="pt-BR" sz="2800" b="0" i="1" smtClean="0">
-                            <a:solidFill>
-                              <a:schemeClr val="tx1"/>
-                            </a:solidFill>
-                            <a:latin typeface="Cambria Math" panose="02040503050406030204" pitchFamily="18" charset="0"/>
-                          </a:rPr>
-                          <m:t>)</m:t>
-                        </m:r>
-                      </m:e>
-                    </m:d>
-                    <m:r>
-                      <a:rPr lang="pt-BR" sz="2800" b="0" i="1" smtClean="0">
-                        <a:solidFill>
-                          <a:schemeClr val="tx1"/>
-                        </a:solidFill>
-                        <a:latin typeface="Cambria Math" panose="02040503050406030204" pitchFamily="18" charset="0"/>
-                      </a:rPr>
-                      <m:t>,</m:t>
-                    </m:r>
-                    <m:r>
-                      <a:rPr lang="pt-BR" sz="2800" i="1" smtClean="0">
-                        <a:solidFill>
-                          <a:schemeClr val="tx1"/>
-                        </a:solidFill>
-                        <a:latin typeface="Cambria Math" panose="02040503050406030204" pitchFamily="18" charset="0"/>
-                        <a:ea typeface="Cambria Math" panose="02040503050406030204" pitchFamily="18" charset="0"/>
-                      </a:rPr>
-                      <m:t>∀</m:t>
-                    </m:r>
-                    <m:r>
-                      <a:rPr lang="pt-BR" sz="2800" b="0" i="1" smtClean="0">
-                        <a:solidFill>
-                          <a:schemeClr val="tx1"/>
-                        </a:solidFill>
-                        <a:latin typeface="Cambria Math" panose="02040503050406030204" pitchFamily="18" charset="0"/>
-                        <a:ea typeface="Cambria Math" panose="02040503050406030204" pitchFamily="18" charset="0"/>
-                      </a:rPr>
-                      <m:t>𝑞</m:t>
-                    </m:r>
-                  </m:oMath>
-                </a14:m>
-                <a:r>
-                  <a:rPr lang="pt-BR" b="0" i="0" dirty="0">
-                    <a:solidFill>
-                      <a:schemeClr val="tx1"/>
-                    </a:solidFill>
-                    <a:effectLst/>
-                  </a:rPr>
-                  <a:t>, ela</a:t>
-                </a:r>
-                <a:endParaRPr lang="pt-BR" dirty="0"/>
-              </a:p>
-              <a:p>
-                <a:pPr lvl="1">
-                  <a:buFont typeface="Wingdings" panose="05000000000000000000" pitchFamily="2" charset="2"/>
-                  <a:buChar char="§"/>
-                </a:pPr>
-                <a:r>
-                  <a:rPr lang="pt-BR" b="0" i="0" dirty="0">
-                    <a:solidFill>
-                      <a:schemeClr val="tx1"/>
-                    </a:solidFill>
-                    <a:effectLst/>
-                  </a:rPr>
-                  <a:t>calcula a exponencial de cada função discriminante, </a:t>
-                </a:r>
-              </a:p>
-              <a:p>
-                <a:pPr lvl="1">
-                  <a:buFont typeface="Wingdings" panose="05000000000000000000" pitchFamily="2" charset="2"/>
-                  <a:buChar char="§"/>
-                </a:pPr>
-                <a:r>
-                  <a:rPr lang="pt-BR" b="0" i="0" dirty="0">
-                    <a:solidFill>
-                      <a:schemeClr val="tx1"/>
-                    </a:solidFill>
-                    <a:effectLst/>
-                  </a:rPr>
-                  <a:t>normaliza essas exponenciais dividindo-as pela soma de todas as exponenciais, gerando uma distribuição de probabilidades das classes.</a:t>
-                </a:r>
-              </a:p>
-            </p:txBody>
-          </p:sp>
-        </mc:Choice>
-        <mc:Fallback xmlns="">
-          <p:sp>
-            <p:nvSpPr>
-              <p:cNvPr id="3" name="Espaço Reservado para Conteúdo 2">
-                <a:extLst>
-                  <a:ext uri="{FF2B5EF4-FFF2-40B4-BE49-F238E27FC236}">
-                    <a16:creationId xmlns:a16="http://schemas.microsoft.com/office/drawing/2014/main" id="{32DF54A1-52F5-C48C-7CD4-D6E451DF19D8}"/>
-                  </a:ext>
-                </a:extLst>
-              </p:cNvPr>
-              <p:cNvSpPr>
-                <a:spLocks noGrp="1" noRot="1" noChangeAspect="1" noMove="1" noResize="1" noEditPoints="1" noAdjustHandles="1" noChangeArrowheads="1" noChangeShapeType="1" noTextEdit="1"/>
-              </p:cNvSpPr>
-              <p:nvPr>
-                <p:ph idx="1"/>
-              </p:nvPr>
-            </p:nvSpPr>
-            <p:spPr>
-              <a:xfrm>
-                <a:off x="6646606" y="1825624"/>
-                <a:ext cx="5417575" cy="5032375"/>
-              </a:xfrm>
-              <a:blipFill>
-                <a:blip r:embed="rId2"/>
-                <a:stretch>
-                  <a:fillRect l="-2025" t="-1937"/>
-                </a:stretch>
-              </a:blipFill>
-            </p:spPr>
-            <p:txBody>
-              <a:bodyPr/>
-              <a:lstStyle/>
-              <a:p>
-                <a:r>
-                  <a:rPr lang="en-US">
-                    <a:noFill/>
-                  </a:rPr>
-                  <a:t> </a:t>
-                </a:r>
-              </a:p>
-            </p:txBody>
-          </p:sp>
-        </mc:Fallback>
-      </mc:AlternateContent>
-      <p:pic>
-        <p:nvPicPr>
-          <p:cNvPr id="6" name="Imagem 5">
-            <a:extLst>
-              <a:ext uri="{FF2B5EF4-FFF2-40B4-BE49-F238E27FC236}">
-                <a16:creationId xmlns:a16="http://schemas.microsoft.com/office/drawing/2014/main" xmlns="" id="{ED5D1F5D-F195-0452-50D4-07E9F2B1C49D}"/>
-              </a:ext>
-            </a:extLst>
-          </p:cNvPr>
-          <p:cNvPicPr>
-            <a:picLocks noChangeAspect="1"/>
-          </p:cNvPicPr>
-          <p:nvPr/>
-        </p:nvPicPr>
-        <p:blipFill>
-          <a:blip r:embed="rId3" cstate="print">
-            <a:extLst>
-              <a:ext uri="{28A0092B-C50C-407E-A947-70E740481C1C}">
-                <a14:useLocalDpi xmlns:a14="http://schemas.microsoft.com/office/drawing/2010/main" val="0"/>
-              </a:ext>
-            </a:extLst>
-          </a:blip>
-          <a:stretch>
-            <a:fillRect/>
-          </a:stretch>
-        </p:blipFill>
-        <p:spPr>
-          <a:xfrm>
-            <a:off x="275559" y="2536723"/>
-            <a:ext cx="6066351" cy="2487561"/>
-          </a:xfrm>
-          <a:prstGeom prst="rect">
-            <a:avLst/>
-          </a:prstGeom>
-        </p:spPr>
-      </p:pic>
-      <p:sp>
-        <p:nvSpPr>
-          <p:cNvPr id="8" name="CaixaDeTexto 7">
-            <a:extLst>
-              <a:ext uri="{FF2B5EF4-FFF2-40B4-BE49-F238E27FC236}">
-                <a16:creationId xmlns:a16="http://schemas.microsoft.com/office/drawing/2014/main" xmlns="" id="{0DC5673F-9B77-2E9E-8317-E71CA8896FE0}"/>
-              </a:ext>
-            </a:extLst>
-          </p:cNvPr>
-          <p:cNvSpPr txBox="1"/>
-          <p:nvPr/>
-        </p:nvSpPr>
-        <p:spPr>
-          <a:xfrm>
-            <a:off x="127819" y="6492875"/>
-            <a:ext cx="2792362" cy="276999"/>
-          </a:xfrm>
-          <a:prstGeom prst="rect">
-            <a:avLst/>
-          </a:prstGeom>
-          <a:noFill/>
-        </p:spPr>
-        <p:txBody>
-          <a:bodyPr wrap="square">
-            <a:spAutoFit/>
-          </a:bodyPr>
-          <a:lstStyle/>
-          <a:p>
-            <a:r>
-              <a:rPr lang="pt-BR" sz="1200" b="0" dirty="0">
-                <a:effectLst/>
-              </a:rPr>
-              <a:t>OBS.:</a:t>
-            </a:r>
-            <a:r>
-              <a:rPr lang="pt-BR" sz="1200" b="0" i="1" dirty="0">
-                <a:effectLst/>
-              </a:rPr>
-              <a:t> e</a:t>
-            </a:r>
-            <a:r>
-              <a:rPr lang="pt-BR" sz="1200" b="0" i="0" dirty="0">
-                <a:effectLst/>
-              </a:rPr>
-              <a:t> é a base do logaritmo natural. </a:t>
-            </a:r>
-            <a:endParaRPr lang="pt-BR" sz="1200" dirty="0"/>
-          </a:p>
-        </p:txBody>
-      </p:sp>
-      <mc:AlternateContent xmlns:mc="http://schemas.openxmlformats.org/markup-compatibility/2006" xmlns:a14="http://schemas.microsoft.com/office/drawing/2010/main">
-        <mc:Choice Requires="a14">
-          <p:sp>
-            <p:nvSpPr>
-              <p:cNvPr id="4" name="CaixaDeTexto 3">
-                <a:extLst>
-                  <a:ext uri="{FF2B5EF4-FFF2-40B4-BE49-F238E27FC236}">
-                    <a16:creationId xmlns:a16="http://schemas.microsoft.com/office/drawing/2014/main" xmlns="" id="{CBD55F82-56D5-32C8-C5AB-AF99477FBAAC}"/>
-                  </a:ext>
-                </a:extLst>
-              </p:cNvPr>
-              <p:cNvSpPr txBox="1"/>
-              <p:nvPr/>
-            </p:nvSpPr>
-            <p:spPr>
-              <a:xfrm>
-                <a:off x="1543507" y="5639486"/>
-                <a:ext cx="3530454" cy="461665"/>
-              </a:xfrm>
-              <a:prstGeom prst="rect">
-                <a:avLst/>
-              </a:prstGeom>
-              <a:noFill/>
-            </p:spPr>
-            <p:txBody>
-              <a:bodyPr wrap="none" rtlCol="0">
-                <a:spAutoFit/>
-              </a:bodyPr>
-              <a:lstStyle/>
-              <a:p>
-                <a14:m>
-                  <m:oMath xmlns:m="http://schemas.openxmlformats.org/officeDocument/2006/math">
-                    <m:r>
-                      <a:rPr lang="pt-BR" sz="2400" b="0" i="1" smtClean="0">
-                        <a:latin typeface="Cambria Math" panose="02040503050406030204" pitchFamily="18" charset="0"/>
-                      </a:rPr>
-                      <m:t>𝑄</m:t>
-                    </m:r>
-                    <m:r>
-                      <a:rPr lang="pt-BR" sz="2400" b="0" i="1" smtClean="0">
-                        <a:latin typeface="Cambria Math" panose="02040503050406030204" pitchFamily="18" charset="0"/>
-                      </a:rPr>
-                      <m:t>=5</m:t>
-                    </m:r>
-                  </m:oMath>
-                </a14:m>
-                <a:r>
-                  <a:rPr lang="pt-BR" sz="2400" dirty="0"/>
-                  <a:t> (número de classes)</a:t>
-                </a:r>
-              </a:p>
-            </p:txBody>
-          </p:sp>
-        </mc:Choice>
-        <mc:Fallback xmlns="">
-          <p:sp>
-            <p:nvSpPr>
-              <p:cNvPr id="4" name="CaixaDeTexto 3">
-                <a:extLst>
-                  <a:ext uri="{FF2B5EF4-FFF2-40B4-BE49-F238E27FC236}">
-                    <a16:creationId xmlns:a16="http://schemas.microsoft.com/office/drawing/2014/main" id="{CBD55F82-56D5-32C8-C5AB-AF99477FBAAC}"/>
-                  </a:ext>
-                </a:extLst>
-              </p:cNvPr>
-              <p:cNvSpPr txBox="1">
-                <a:spLocks noRot="1" noChangeAspect="1" noMove="1" noResize="1" noEditPoints="1" noAdjustHandles="1" noChangeArrowheads="1" noChangeShapeType="1" noTextEdit="1"/>
-              </p:cNvSpPr>
-              <p:nvPr/>
-            </p:nvSpPr>
-            <p:spPr>
-              <a:xfrm>
-                <a:off x="1543507" y="5639486"/>
-                <a:ext cx="3530454" cy="461665"/>
-              </a:xfrm>
-              <a:prstGeom prst="rect">
-                <a:avLst/>
-              </a:prstGeom>
-              <a:blipFill>
-                <a:blip r:embed="rId4"/>
-                <a:stretch>
-                  <a:fillRect l="-1209" t="-10526" r="-1900" b="-28947"/>
-                </a:stretch>
-              </a:blipFill>
-            </p:spPr>
-            <p:txBody>
-              <a:bodyPr/>
-              <a:lstStyle/>
-              <a:p>
-                <a:r>
-                  <a:rPr lang="en-US">
-                    <a:noFill/>
-                  </a:rPr>
-                  <a:t> </a:t>
-                </a:r>
-              </a:p>
-            </p:txBody>
-          </p:sp>
-        </mc:Fallback>
-      </mc:AlternateContent>
-    </p:spTree>
-    <p:extLst>
-      <p:ext uri="{BB962C8B-B14F-4D97-AF65-F5344CB8AC3E}">
-        <p14:creationId xmlns:p14="http://schemas.microsoft.com/office/powerpoint/2010/main" val="2357809270"/>
-      </p:ext>
-    </p:extLst>
-  </p:cSld>
-  <p:clrMapOvr>
-    <a:masterClrMapping/>
-  </p:clrMapOvr>
-</p:sld>
-</file>
-
-<file path=ppt/slides/slide16.xml><?xml version="1.0" encoding="utf-8"?>
-<p:sld xmlns:a="http://schemas.openxmlformats.org/drawingml/2006/main" xmlns:r="http://schemas.openxmlformats.org/officeDocument/2006/relationships" xmlns:p="http://schemas.openxmlformats.org/presentationml/2006/main">
-  <p:cSld>
-    <p:spTree>
-      <p:nvGrpSpPr>
-        <p:cNvPr id="1" name=""/>
-        <p:cNvGrpSpPr/>
-        <p:nvPr/>
-      </p:nvGrpSpPr>
-      <p:grpSpPr>
-        <a:xfrm>
-          <a:off x="0" y="0"/>
-          <a:ext cx="0" cy="0"/>
-          <a:chOff x="0" y="0"/>
-          <a:chExt cx="0" cy="0"/>
-        </a:xfrm>
-      </p:grpSpPr>
-      <p:sp>
-        <p:nvSpPr>
-          <p:cNvPr id="2" name="Título 1">
-            <a:extLst>
-              <a:ext uri="{FF2B5EF4-FFF2-40B4-BE49-F238E27FC236}">
-                <a16:creationId xmlns:a16="http://schemas.microsoft.com/office/drawing/2014/main" xmlns="" id="{99DAA83A-B143-94BB-B48B-41A7423070CE}"/>
-              </a:ext>
-            </a:extLst>
-          </p:cNvPr>
-          <p:cNvSpPr>
-            <a:spLocks noGrp="1"/>
-          </p:cNvSpPr>
-          <p:nvPr>
-            <p:ph type="title"/>
-          </p:nvPr>
-        </p:nvSpPr>
-        <p:spPr/>
-        <p:txBody>
-          <a:bodyPr/>
-          <a:lstStyle/>
-          <a:p>
-            <a:r>
-              <a:rPr lang="pt-BR" dirty="0"/>
-              <a:t>Função de ativação </a:t>
-            </a:r>
-            <a:r>
-              <a:rPr lang="pt-BR" i="1" dirty="0"/>
-              <a:t>softmax</a:t>
-            </a:r>
-            <a:endParaRPr lang="pt-BR" dirty="0"/>
-          </a:p>
-        </p:txBody>
-      </p:sp>
-      <mc:AlternateContent xmlns:mc="http://schemas.openxmlformats.org/markup-compatibility/2006">
-        <mc:Choice xmlns:a14="http://schemas.microsoft.com/office/drawing/2010/main" Requires="a14">
-          <p:sp>
-            <p:nvSpPr>
-              <p:cNvPr id="3" name="Espaço Reservado para Conteúdo 2">
-                <a:extLst>
-                  <a:ext uri="{FF2B5EF4-FFF2-40B4-BE49-F238E27FC236}">
-                    <a16:creationId xmlns:a16="http://schemas.microsoft.com/office/drawing/2014/main" xmlns="" id="{32DF54A1-52F5-C48C-7CD4-D6E451DF19D8}"/>
-                  </a:ext>
-                </a:extLst>
-              </p:cNvPr>
-              <p:cNvSpPr>
-                <a:spLocks noGrp="1"/>
-              </p:cNvSpPr>
-              <p:nvPr>
-                <p:ph idx="1"/>
-              </p:nvPr>
-            </p:nvSpPr>
-            <p:spPr>
-              <a:xfrm>
-                <a:off x="838200" y="1825624"/>
-                <a:ext cx="11225981" cy="5032375"/>
-              </a:xfrm>
-            </p:spPr>
-            <p:txBody>
-              <a:bodyPr>
-                <a:normAutofit/>
-              </a:bodyPr>
-              <a:lstStyle/>
-              <a:p>
-                <a:r>
-                  <a:rPr lang="pt-BR" b="0" dirty="0">
-                    <a:effectLst/>
-                  </a:rPr>
-                  <a:t>Ela </a:t>
-                </a:r>
-                <a:r>
-                  <a:rPr lang="pt-BR" b="1" dirty="0">
-                    <a:solidFill>
-                      <a:srgbClr val="00B050"/>
-                    </a:solidFill>
-                    <a:effectLst/>
-                  </a:rPr>
-                  <a:t>garante que as saídas estejam no intervalo entre 0 e </a:t>
-                </a:r>
-                <a:r>
-                  <a:rPr lang="pt-BR" b="1" dirty="0" smtClean="0">
-                    <a:solidFill>
-                      <a:srgbClr val="00B050"/>
-                    </a:solidFill>
-                    <a:effectLst/>
-                  </a:rPr>
-                  <a:t>1 </a:t>
-                </a:r>
-                <a:r>
-                  <a:rPr lang="pt-BR" b="1" dirty="0">
-                    <a:solidFill>
-                      <a:srgbClr val="00B050"/>
-                    </a:solidFill>
-                    <a:effectLst/>
-                  </a:rPr>
-                  <a:t>e a soma de todas as saídas seja igual a 1</a:t>
-                </a:r>
-                <a:r>
-                  <a:rPr lang="pt-BR" b="0" dirty="0">
-                    <a:effectLst/>
-                  </a:rPr>
-                  <a:t>, tornando-as interpretáveis como uma </a:t>
-                </a:r>
-                <a:r>
-                  <a:rPr lang="pt-BR" b="1" dirty="0">
-                    <a:solidFill>
-                      <a:schemeClr val="accent2"/>
-                    </a:solidFill>
-                    <a:effectLst/>
-                  </a:rPr>
-                  <a:t>função massa de probabilidade </a:t>
-                </a:r>
-                <a:r>
-                  <a:rPr lang="pt-BR" b="1" dirty="0" err="1">
-                    <a:solidFill>
-                      <a:schemeClr val="accent2"/>
-                    </a:solidFill>
-                    <a:effectLst/>
-                  </a:rPr>
-                  <a:t>multinomial</a:t>
-                </a:r>
-                <a:r>
-                  <a:rPr lang="pt-BR" b="0" dirty="0">
-                    <a:effectLst/>
-                  </a:rPr>
-                  <a:t>.</a:t>
-                </a:r>
-              </a:p>
-              <a:p>
-                <a:r>
-                  <a:rPr lang="pt-BR" dirty="0"/>
-                  <a:t>Ela</a:t>
-                </a:r>
-                <a:r>
-                  <a:rPr lang="pt-BR" b="1" i="1" dirty="0"/>
-                  <a:t> </a:t>
-                </a:r>
-                <a:r>
-                  <a:rPr lang="pt-BR" dirty="0"/>
-                  <a:t>atribui uma </a:t>
-                </a:r>
-                <a:r>
-                  <a:rPr lang="pt-BR" b="1" dirty="0"/>
-                  <a:t>probabilidade condicional</a:t>
-                </a:r>
-                <a:r>
-                  <a:rPr lang="pt-BR" dirty="0"/>
-                  <a:t>,</a:t>
-                </a:r>
-                <a:r>
-                  <a:rPr lang="pt-BR" b="1" i="1" dirty="0"/>
                   <a:t> </a:t>
                 </a:r>
                 <a14:m>
@@ -15045,7 +13799,7 @@
                           </m:dPr>
                           <m:e>
                             <m:r>
-                              <a:rPr lang="pt-BR" b="0" i="1" smtClean="0">
+                              <a:rPr lang="pt-BR" i="1">
                                 <a:latin typeface="Cambria Math" panose="02040503050406030204" pitchFamily="18" charset="0"/>
                               </a:rPr>
                               <m:t>𝑛</m:t>
@@ -15086,7 +13840,7 @@
                       </m:e>
                     </m:d>
                     <m:r>
-                      <a:rPr lang="pt-BR" i="1" smtClean="0">
+                      <a:rPr lang="pt-BR" i="1">
                         <a:latin typeface="Cambria Math" panose="02040503050406030204" pitchFamily="18" charset="0"/>
                         <a:ea typeface="Cambria Math" panose="02040503050406030204" pitchFamily="18" charset="0"/>
                       </a:rPr>
@@ -15097,7 +13851,7 @@
                         <m:begChr m:val="["/>
                         <m:endChr m:val="]"/>
                         <m:ctrlPr>
-                          <a:rPr lang="pt-BR" i="1" smtClean="0">
+                          <a:rPr lang="pt-BR" i="1">
                             <a:latin typeface="Cambria Math" panose="02040503050406030204" pitchFamily="18" charset="0"/>
                             <a:ea typeface="Cambria Math" panose="02040503050406030204" pitchFamily="18" charset="0"/>
                           </a:rPr>
@@ -15105,7 +13859,7 @@
                       </m:dPr>
                       <m:e>
                         <m:r>
-                          <a:rPr lang="pt-BR" b="0" i="1" smtClean="0">
+                          <a:rPr lang="pt-BR" i="1">
                             <a:latin typeface="Cambria Math" panose="02040503050406030204" pitchFamily="18" charset="0"/>
                             <a:ea typeface="Cambria Math" panose="02040503050406030204" pitchFamily="18" charset="0"/>
                           </a:rPr>
@@ -15117,7 +13871,27 @@
                 </a14:m>
                 <a:r>
                   <a:rPr lang="pt-BR" dirty="0"/>
-                  <a:t>, a cada classe, </a:t>
+                  <a:t> </a:t>
+                </a:r>
+                <a:r>
+                  <a:rPr lang="pt-BR" b="1" dirty="0">
+                    <a:solidFill>
+                      <a:srgbClr val="00B050"/>
+                    </a:solidFill>
+                  </a:rPr>
+                  <a:t>a cada </a:t>
+                </a:r>
+                <a:r>
+                  <a:rPr lang="pt-BR" b="1" dirty="0" smtClean="0">
+                    <a:solidFill>
+                      <a:srgbClr val="00B050"/>
+                    </a:solidFill>
+                  </a:rPr>
+                  <a:t>uma </a:t>
+                </a:r>
+                <a:r>
+                  <a:rPr lang="pt-BR" dirty="0" smtClean="0"/>
+                  <a:t>das </a:t>
                 </a:r>
                 <a14:m>
                   <m:oMath xmlns:m="http://schemas.openxmlformats.org/officeDocument/2006/math">
@@ -15125,13 +13899,266 @@
                       <a:rPr lang="pt-BR" i="1">
                         <a:latin typeface="Cambria Math" panose="02040503050406030204" pitchFamily="18" charset="0"/>
                       </a:rPr>
-                      <m:t>𝑞</m:t>
+                      <m:t>𝑄</m:t>
+                    </m:r>
+                    <m:r>
+                      <a:rPr lang="pt-BR" i="1">
+                        <a:latin typeface="Cambria Math" panose="02040503050406030204" pitchFamily="18" charset="0"/>
+                      </a:rPr>
+                      <m:t> </m:t>
                     </m:r>
                   </m:oMath>
                 </a14:m>
                 <a:r>
-                  <a:rPr lang="pt-BR" dirty="0"/>
-                  <a:t>, onde </a:t>
+                  <a:rPr lang="pt-BR" dirty="0" smtClean="0"/>
+                  <a:t>classes.</a:t>
+                </a:r>
+                <a:endParaRPr lang="pt-BR" b="1" dirty="0">
+                  <a:solidFill>
+                    <a:srgbClr val="00B050"/>
+                  </a:solidFill>
+                </a:endParaRPr>
+              </a:p>
+            </p:txBody>
+          </p:sp>
+        </mc:Choice>
+        <mc:Fallback xmlns="">
+          <p:sp>
+            <p:nvSpPr>
+              <p:cNvPr id="3" name="Espaço Reservado para Conteúdo 2">
+                <a:extLst>
+                  <a:ext uri="{FF2B5EF4-FFF2-40B4-BE49-F238E27FC236}">
+                    <a16:creationId xmlns="" xmlns:a16="http://schemas.microsoft.com/office/drawing/2014/main" xmlns:a14="http://schemas.microsoft.com/office/drawing/2010/main" id="{BCAAD57B-65A0-9DAD-79FC-2AE2692EB84B}"/>
+                  </a:ext>
+                </a:extLst>
+              </p:cNvPr>
+              <p:cNvSpPr>
+                <a:spLocks noGrp="1" noRot="1" noChangeAspect="1" noMove="1" noResize="1" noEditPoints="1" noAdjustHandles="1" noChangeArrowheads="1" noChangeShapeType="1" noTextEdit="1"/>
+              </p:cNvSpPr>
+              <p:nvPr>
+                <p:ph idx="1"/>
+              </p:nvPr>
+            </p:nvSpPr>
+            <p:spPr>
+              <a:xfrm>
+                <a:off x="838200" y="1825624"/>
+                <a:ext cx="11353800" cy="5032375"/>
+              </a:xfrm>
+              <a:blipFill rotWithShape="0">
+                <a:blip r:embed="rId3"/>
+                <a:stretch>
+                  <a:fillRect l="-967" t="-1937" r="-967"/>
+                </a:stretch>
+              </a:blipFill>
+            </p:spPr>
+            <p:txBody>
+              <a:bodyPr/>
+              <a:lstStyle/>
+              <a:p>
+                <a:r>
+                  <a:rPr lang="pt-BR">
+                    <a:noFill/>
+                  </a:rPr>
+                  <a:t> </a:t>
+                </a:r>
+              </a:p>
+            </p:txBody>
+          </p:sp>
+        </mc:Fallback>
+      </mc:AlternateContent>
+      <p:sp>
+        <p:nvSpPr>
+          <p:cNvPr id="5" name="Rectangle 11">
+            <a:extLst>
+              <a:ext uri="{FF2B5EF4-FFF2-40B4-BE49-F238E27FC236}">
+                <a16:creationId xmlns="" xmlns:a16="http://schemas.microsoft.com/office/drawing/2014/main" id="{D1D7E603-A964-1188-9D09-B0C1E18592FA}"/>
+              </a:ext>
+            </a:extLst>
+          </p:cNvPr>
+          <p:cNvSpPr/>
+          <p:nvPr/>
+        </p:nvSpPr>
+        <p:spPr>
+          <a:xfrm>
+            <a:off x="6765514" y="3622566"/>
+            <a:ext cx="2143124" cy="610221"/>
+          </a:xfrm>
+          <a:prstGeom prst="rect">
+            <a:avLst/>
+          </a:prstGeom>
+          <a:noFill/>
+          <a:ln w="28575">
+            <a:solidFill>
+              <a:srgbClr val="FF0000"/>
+            </a:solidFill>
+          </a:ln>
+        </p:spPr>
+        <p:style>
+          <a:lnRef idx="2">
+            <a:schemeClr val="accent1">
+              <a:shade val="50000"/>
+            </a:schemeClr>
+          </a:lnRef>
+          <a:fillRef idx="1">
+            <a:schemeClr val="accent1"/>
+          </a:fillRef>
+          <a:effectRef idx="0">
+            <a:schemeClr val="accent1"/>
+          </a:effectRef>
+          <a:fontRef idx="minor">
+            <a:schemeClr val="lt1"/>
+          </a:fontRef>
+        </p:style>
+        <p:txBody>
+          <a:bodyPr rtlCol="0" anchor="ctr"/>
+          <a:lstStyle/>
+          <a:p>
+            <a:pPr algn="ctr"/>
+            <a:endParaRPr lang="pt-BR"/>
+          </a:p>
+        </p:txBody>
+      </p:sp>
+    </p:spTree>
+    <p:extLst>
+      <p:ext uri="{BB962C8B-B14F-4D97-AF65-F5344CB8AC3E}">
+        <p14:creationId xmlns:p14="http://schemas.microsoft.com/office/powerpoint/2010/main" val="2375032691"/>
+      </p:ext>
+    </p:extLst>
+  </p:cSld>
+  <p:clrMapOvr>
+    <a:masterClrMapping/>
+  </p:clrMapOvr>
+</p:sld>
+</file>
+
+<file path=ppt/slides/slide15.xml><?xml version="1.0" encoding="utf-8"?>
+<p:sld xmlns:a="http://schemas.openxmlformats.org/drawingml/2006/main" xmlns:r="http://schemas.openxmlformats.org/officeDocument/2006/relationships" xmlns:p="http://schemas.openxmlformats.org/presentationml/2006/main">
+  <p:cSld>
+    <p:spTree>
+      <p:nvGrpSpPr>
+        <p:cNvPr id="1" name=""/>
+        <p:cNvGrpSpPr/>
+        <p:nvPr/>
+      </p:nvGrpSpPr>
+      <p:grpSpPr>
+        <a:xfrm>
+          <a:off x="0" y="0"/>
+          <a:ext cx="0" cy="0"/>
+          <a:chOff x="0" y="0"/>
+          <a:chExt cx="0" cy="0"/>
+        </a:xfrm>
+      </p:grpSpPr>
+      <p:sp>
+        <p:nvSpPr>
+          <p:cNvPr id="2" name="Título 1">
+            <a:extLst>
+              <a:ext uri="{FF2B5EF4-FFF2-40B4-BE49-F238E27FC236}">
+                <a16:creationId xmlns="" xmlns:a16="http://schemas.microsoft.com/office/drawing/2014/main" id="{99DAA83A-B143-94BB-B48B-41A7423070CE}"/>
+              </a:ext>
+            </a:extLst>
+          </p:cNvPr>
+          <p:cNvSpPr>
+            <a:spLocks noGrp="1"/>
+          </p:cNvSpPr>
+          <p:nvPr>
+            <p:ph type="title"/>
+          </p:nvPr>
+        </p:nvSpPr>
+        <p:spPr/>
+        <p:txBody>
+          <a:bodyPr/>
+          <a:lstStyle/>
+          <a:p>
+            <a:r>
+              <a:rPr lang="pt-BR" dirty="0"/>
+              <a:t>Função de ativação </a:t>
+            </a:r>
+            <a:r>
+              <a:rPr lang="pt-BR" i="1" dirty="0"/>
+              <a:t>softmax</a:t>
+            </a:r>
+            <a:endParaRPr lang="pt-BR" dirty="0"/>
+          </a:p>
+        </p:txBody>
+      </p:sp>
+      <mc:AlternateContent xmlns:mc="http://schemas.openxmlformats.org/markup-compatibility/2006" xmlns:a14="http://schemas.microsoft.com/office/drawing/2010/main">
+        <mc:Choice Requires="a14">
+          <p:sp>
+            <p:nvSpPr>
+              <p:cNvPr id="3" name="Espaço Reservado para Conteúdo 2">
+                <a:extLst>
+                  <a:ext uri="{FF2B5EF4-FFF2-40B4-BE49-F238E27FC236}">
+                    <a16:creationId xmlns="" xmlns:a16="http://schemas.microsoft.com/office/drawing/2014/main" id="{32DF54A1-52F5-C48C-7CD4-D6E451DF19D8}"/>
+                  </a:ext>
+                </a:extLst>
+              </p:cNvPr>
+              <p:cNvSpPr>
+                <a:spLocks noGrp="1"/>
+              </p:cNvSpPr>
+              <p:nvPr>
+                <p:ph idx="1"/>
+              </p:nvPr>
+            </p:nvSpPr>
+            <p:spPr>
+              <a:xfrm>
+                <a:off x="6646606" y="1825624"/>
+                <a:ext cx="5545394" cy="5032375"/>
+              </a:xfrm>
+            </p:spPr>
+            <p:txBody>
+              <a:bodyPr>
+                <a:normAutofit/>
+              </a:bodyPr>
+              <a:lstStyle/>
+              <a:p>
+                <a:r>
+                  <a:rPr lang="pt-BR" dirty="0"/>
+                  <a:t>A função </a:t>
+                </a:r>
+                <a:r>
+                  <a:rPr lang="pt-BR" i="1" dirty="0"/>
+                  <a:t>softmax</a:t>
+                </a:r>
+                <a:r>
+                  <a:rPr lang="pt-BR" dirty="0"/>
+                  <a:t> </a:t>
+                </a:r>
+                <a:r>
+                  <a:rPr lang="pt-BR" dirty="0">
+                    <a:solidFill>
+                      <a:schemeClr val="tx1"/>
+                    </a:solidFill>
+                  </a:rPr>
+                  <a:t>o</a:t>
+                </a:r>
+                <a:r>
+                  <a:rPr lang="pt-BR" b="0" i="0" dirty="0">
+                    <a:solidFill>
+                      <a:schemeClr val="tx1"/>
+                    </a:solidFill>
+                    <a:effectLst/>
+                  </a:rPr>
+                  <a:t>pera da seguinte maneira.</a:t>
+                </a:r>
+              </a:p>
+              <a:p>
+                <a:r>
+                  <a:rPr lang="pt-BR" b="0" i="0" dirty="0">
+                    <a:solidFill>
+                      <a:schemeClr val="tx1"/>
+                    </a:solidFill>
+                    <a:effectLst/>
+                  </a:rPr>
+                  <a:t>Dado um </a:t>
+                </a:r>
+                <a:r>
+                  <a:rPr lang="pt-BR" b="1" dirty="0">
+                    <a:solidFill>
+                      <a:srgbClr val="00B050"/>
+                    </a:solidFill>
+                    <a:effectLst/>
+                  </a:rPr>
+                  <a:t>vetor </a:t>
                 </a:r>
                 <a:r>
                   <a:rPr lang="pt-BR" b="1" dirty="0">
@@ -15139,18 +14166,40 @@
                       <a:srgbClr val="00B050"/>
                     </a:solidFill>
                   </a:rPr>
-                  <a:t>a soma das </a:t>
+                  <a:t>com</a:t>
+                </a:r>
+                <a:r>
+                  <a:rPr lang="pt-BR" b="1" dirty="0">
+                    <a:solidFill>
+                      <a:srgbClr val="00B050"/>
+                    </a:solidFill>
+                    <a:effectLst/>
+                  </a:rPr>
+                  <a:t> </a:t>
+                </a:r>
+                <a:r>
+                  <a:rPr lang="pt-BR" b="1" dirty="0" smtClean="0">
+                    <a:solidFill>
+                      <a:srgbClr val="00B050"/>
+                    </a:solidFill>
+                    <a:effectLst/>
+                  </a:rPr>
+                  <a:t>os valores das </a:t>
+                </a:r>
+                <a:r>
+                  <a:rPr lang="pt-BR" dirty="0"/>
+                  <a:t> </a:t>
                 </a:r>
                 <a14:m>
                   <m:oMath xmlns:m="http://schemas.openxmlformats.org/officeDocument/2006/math">
                     <m:r>
-                      <a:rPr lang="pt-BR" b="1" i="0">
+                      <a:rPr lang="pt-BR" b="1" i="1" smtClean="0">
                         <a:solidFill>
                           <a:srgbClr val="00B050"/>
                         </a:solidFill>
                         <a:latin typeface="Cambria Math" panose="02040503050406030204" pitchFamily="18" charset="0"/>
                       </a:rPr>
-                      <m:t>𝐐</m:t>
+                      <m:t>𝑸</m:t>
                     </m:r>
                   </m:oMath>
                 </a14:m>
@@ -15160,7 +14209,513 @@
                       <a:srgbClr val="00B050"/>
                     </a:solidFill>
                   </a:rPr>
-                  <a:t> probabilidades deve ser igual a 1</a:t>
+                  <a:t> </a:t>
+                </a:r>
+                <a:r>
+                  <a:rPr lang="pt-BR" b="1" dirty="0">
+                    <a:solidFill>
+                      <a:srgbClr val="00B050"/>
+                    </a:solidFill>
+                    <a:effectLst/>
+                  </a:rPr>
+                  <a:t>funções </a:t>
+                </a:r>
+                <a:r>
+                  <a:rPr lang="pt-BR" b="1" dirty="0" smtClean="0">
+                    <a:solidFill>
+                      <a:srgbClr val="00B050"/>
+                    </a:solidFill>
+                    <a:effectLst/>
+                  </a:rPr>
+                  <a:t>discriminantes</a:t>
+                </a:r>
+                <a:r>
+                  <a:rPr lang="pt-BR" b="0" i="0" dirty="0" smtClean="0">
+                    <a:solidFill>
+                      <a:schemeClr val="tx1"/>
+                    </a:solidFill>
+                    <a:effectLst/>
+                  </a:rPr>
+                  <a:t>, </a:t>
+                </a:r>
+                <a:r>
+                  <a:rPr lang="pt-BR" b="0" i="0" dirty="0">
+                    <a:solidFill>
+                      <a:schemeClr val="tx1"/>
+                    </a:solidFill>
+                    <a:effectLst/>
+                  </a:rPr>
+                  <a:t>ela</a:t>
+                </a:r>
+                <a:endParaRPr lang="pt-BR" dirty="0"/>
+              </a:p>
+              <a:p>
+                <a:pPr lvl="1">
+                  <a:buFont typeface="Wingdings" panose="05000000000000000000" pitchFamily="2" charset="2"/>
+                  <a:buChar char="§"/>
+                </a:pPr>
+                <a:r>
+                  <a:rPr lang="pt-BR" b="0" i="0" dirty="0">
+                    <a:solidFill>
+                      <a:schemeClr val="tx1"/>
+                    </a:solidFill>
+                    <a:effectLst/>
+                  </a:rPr>
+                  <a:t>calcula a exponencial de cada função discriminante, </a:t>
+                </a:r>
+              </a:p>
+              <a:p>
+                <a:pPr lvl="1">
+                  <a:buFont typeface="Wingdings" panose="05000000000000000000" pitchFamily="2" charset="2"/>
+                  <a:buChar char="§"/>
+                </a:pPr>
+                <a:r>
+                  <a:rPr lang="pt-BR" b="0" i="0" dirty="0">
+                    <a:solidFill>
+                      <a:schemeClr val="tx1"/>
+                    </a:solidFill>
+                    <a:effectLst/>
+                  </a:rPr>
+                  <a:t>normaliza essas exponenciais dividindo-as pela soma de todas as exponenciais, gerando uma distribuição de probabilidades das classes.</a:t>
+                </a:r>
+              </a:p>
+            </p:txBody>
+          </p:sp>
+        </mc:Choice>
+        <mc:Fallback xmlns="">
+          <p:sp>
+            <p:nvSpPr>
+              <p:cNvPr id="3" name="Espaço Reservado para Conteúdo 2">
+                <a:extLst>
+                  <a:ext uri="{FF2B5EF4-FFF2-40B4-BE49-F238E27FC236}">
+                    <a16:creationId xmlns="" xmlns:a16="http://schemas.microsoft.com/office/drawing/2014/main" xmlns:a14="http://schemas.microsoft.com/office/drawing/2010/main" id="{32DF54A1-52F5-C48C-7CD4-D6E451DF19D8}"/>
+                  </a:ext>
+                </a:extLst>
+              </p:cNvPr>
+              <p:cNvSpPr>
+                <a:spLocks noGrp="1" noRot="1" noChangeAspect="1" noMove="1" noResize="1" noEditPoints="1" noAdjustHandles="1" noChangeArrowheads="1" noChangeShapeType="1" noTextEdit="1"/>
+              </p:cNvSpPr>
+              <p:nvPr>
+                <p:ph idx="1"/>
+              </p:nvPr>
+            </p:nvSpPr>
+            <p:spPr>
+              <a:xfrm>
+                <a:off x="6646606" y="1825624"/>
+                <a:ext cx="5545394" cy="5032375"/>
+              </a:xfrm>
+              <a:blipFill rotWithShape="0">
+                <a:blip r:embed="rId2"/>
+                <a:stretch>
+                  <a:fillRect l="-1978" t="-1937" r="-1868"/>
+                </a:stretch>
+              </a:blipFill>
+            </p:spPr>
+            <p:txBody>
+              <a:bodyPr/>
+              <a:lstStyle/>
+              <a:p>
+                <a:r>
+                  <a:rPr lang="pt-BR">
+                    <a:noFill/>
+                  </a:rPr>
+                  <a:t> </a:t>
+                </a:r>
+              </a:p>
+            </p:txBody>
+          </p:sp>
+        </mc:Fallback>
+      </mc:AlternateContent>
+      <p:pic>
+        <p:nvPicPr>
+          <p:cNvPr id="6" name="Imagem 5">
+            <a:extLst>
+              <a:ext uri="{FF2B5EF4-FFF2-40B4-BE49-F238E27FC236}">
+                <a16:creationId xmlns="" xmlns:a16="http://schemas.microsoft.com/office/drawing/2014/main" id="{ED5D1F5D-F195-0452-50D4-07E9F2B1C49D}"/>
+              </a:ext>
+            </a:extLst>
+          </p:cNvPr>
+          <p:cNvPicPr>
+            <a:picLocks noChangeAspect="1"/>
+          </p:cNvPicPr>
+          <p:nvPr/>
+        </p:nvPicPr>
+        <p:blipFill>
+          <a:blip r:embed="rId3" cstate="print">
+            <a:extLst>
+              <a:ext uri="{28A0092B-C50C-407E-A947-70E740481C1C}">
+                <a14:useLocalDpi xmlns:a14="http://schemas.microsoft.com/office/drawing/2010/main" val="0"/>
+              </a:ext>
+            </a:extLst>
+          </a:blip>
+          <a:stretch>
+            <a:fillRect/>
+          </a:stretch>
+        </p:blipFill>
+        <p:spPr>
+          <a:xfrm>
+            <a:off x="275559" y="2536723"/>
+            <a:ext cx="6066351" cy="2487561"/>
+          </a:xfrm>
+          <a:prstGeom prst="rect">
+            <a:avLst/>
+          </a:prstGeom>
+        </p:spPr>
+      </p:pic>
+      <p:sp>
+        <p:nvSpPr>
+          <p:cNvPr id="8" name="CaixaDeTexto 7">
+            <a:extLst>
+              <a:ext uri="{FF2B5EF4-FFF2-40B4-BE49-F238E27FC236}">
+                <a16:creationId xmlns="" xmlns:a16="http://schemas.microsoft.com/office/drawing/2014/main" id="{0DC5673F-9B77-2E9E-8317-E71CA8896FE0}"/>
+              </a:ext>
+            </a:extLst>
+          </p:cNvPr>
+          <p:cNvSpPr txBox="1"/>
+          <p:nvPr/>
+        </p:nvSpPr>
+        <p:spPr>
+          <a:xfrm>
+            <a:off x="127819" y="6492875"/>
+            <a:ext cx="2792362" cy="276999"/>
+          </a:xfrm>
+          <a:prstGeom prst="rect">
+            <a:avLst/>
+          </a:prstGeom>
+          <a:noFill/>
+        </p:spPr>
+        <p:txBody>
+          <a:bodyPr wrap="square">
+            <a:spAutoFit/>
+          </a:bodyPr>
+          <a:lstStyle/>
+          <a:p>
+            <a:r>
+              <a:rPr lang="pt-BR" sz="1200" b="0" dirty="0">
+                <a:effectLst/>
+              </a:rPr>
+              <a:t>OBS.:</a:t>
+            </a:r>
+            <a:r>
+              <a:rPr lang="pt-BR" sz="1200" b="0" i="1" dirty="0">
+                <a:effectLst/>
+              </a:rPr>
+              <a:t> e</a:t>
+            </a:r>
+            <a:r>
+              <a:rPr lang="pt-BR" sz="1200" b="0" i="0" dirty="0">
+                <a:effectLst/>
+              </a:rPr>
+              <a:t> é a base do logaritmo natural. </a:t>
+            </a:r>
+            <a:endParaRPr lang="pt-BR" sz="1200" dirty="0"/>
+          </a:p>
+        </p:txBody>
+      </p:sp>
+      <mc:AlternateContent xmlns:mc="http://schemas.openxmlformats.org/markup-compatibility/2006" xmlns:a14="http://schemas.microsoft.com/office/drawing/2010/main">
+        <mc:Choice Requires="a14">
+          <p:sp>
+            <p:nvSpPr>
+              <p:cNvPr id="4" name="CaixaDeTexto 3">
+                <a:extLst>
+                  <a:ext uri="{FF2B5EF4-FFF2-40B4-BE49-F238E27FC236}">
+                    <a16:creationId xmlns="" xmlns:a16="http://schemas.microsoft.com/office/drawing/2014/main" id="{CBD55F82-56D5-32C8-C5AB-AF99477FBAAC}"/>
+                  </a:ext>
+                </a:extLst>
+              </p:cNvPr>
+              <p:cNvSpPr txBox="1"/>
+              <p:nvPr/>
+            </p:nvSpPr>
+            <p:spPr>
+              <a:xfrm>
+                <a:off x="1543507" y="5639486"/>
+                <a:ext cx="3530454" cy="461665"/>
+              </a:xfrm>
+              <a:prstGeom prst="rect">
+                <a:avLst/>
+              </a:prstGeom>
+              <a:noFill/>
+            </p:spPr>
+            <p:txBody>
+              <a:bodyPr wrap="none" rtlCol="0">
+                <a:spAutoFit/>
+              </a:bodyPr>
+              <a:lstStyle/>
+              <a:p>
+                <a14:m>
+                  <m:oMath xmlns:m="http://schemas.openxmlformats.org/officeDocument/2006/math">
+                    <m:r>
+                      <a:rPr lang="pt-BR" sz="2400" b="0" i="1" smtClean="0">
+                        <a:latin typeface="Cambria Math" panose="02040503050406030204" pitchFamily="18" charset="0"/>
+                      </a:rPr>
+                      <m:t>𝑄</m:t>
+                    </m:r>
+                    <m:r>
+                      <a:rPr lang="pt-BR" sz="2400" b="0" i="1" smtClean="0">
+                        <a:latin typeface="Cambria Math" panose="02040503050406030204" pitchFamily="18" charset="0"/>
+                      </a:rPr>
+                      <m:t>=5</m:t>
+                    </m:r>
+                  </m:oMath>
+                </a14:m>
+                <a:r>
+                  <a:rPr lang="pt-BR" sz="2400" dirty="0"/>
+                  <a:t> (número de classes)</a:t>
+                </a:r>
+              </a:p>
+            </p:txBody>
+          </p:sp>
+        </mc:Choice>
+        <mc:Fallback xmlns="">
+          <p:sp>
+            <p:nvSpPr>
+              <p:cNvPr id="4" name="CaixaDeTexto 3">
+                <a:extLst>
+                  <a:ext uri="{FF2B5EF4-FFF2-40B4-BE49-F238E27FC236}">
+                    <a16:creationId xmlns:a16="http://schemas.microsoft.com/office/drawing/2014/main" id="{CBD55F82-56D5-32C8-C5AB-AF99477FBAAC}"/>
+                  </a:ext>
+                </a:extLst>
+              </p:cNvPr>
+              <p:cNvSpPr txBox="1">
+                <a:spLocks noRot="1" noChangeAspect="1" noMove="1" noResize="1" noEditPoints="1" noAdjustHandles="1" noChangeArrowheads="1" noChangeShapeType="1" noTextEdit="1"/>
+              </p:cNvSpPr>
+              <p:nvPr/>
+            </p:nvSpPr>
+            <p:spPr>
+              <a:xfrm>
+                <a:off x="1543507" y="5639486"/>
+                <a:ext cx="3530454" cy="461665"/>
+              </a:xfrm>
+              <a:prstGeom prst="rect">
+                <a:avLst/>
+              </a:prstGeom>
+              <a:blipFill>
+                <a:blip r:embed="rId4"/>
+                <a:stretch>
+                  <a:fillRect l="-1209" t="-10526" r="-1900" b="-28947"/>
+                </a:stretch>
+              </a:blipFill>
+            </p:spPr>
+            <p:txBody>
+              <a:bodyPr/>
+              <a:lstStyle/>
+              <a:p>
+                <a:r>
+                  <a:rPr lang="en-US">
+                    <a:noFill/>
+                  </a:rPr>
+                  <a:t> </a:t>
+                </a:r>
+              </a:p>
+            </p:txBody>
+          </p:sp>
+        </mc:Fallback>
+      </mc:AlternateContent>
+    </p:spTree>
+    <p:extLst>
+      <p:ext uri="{BB962C8B-B14F-4D97-AF65-F5344CB8AC3E}">
+        <p14:creationId xmlns:p14="http://schemas.microsoft.com/office/powerpoint/2010/main" val="2357809270"/>
+      </p:ext>
+    </p:extLst>
+  </p:cSld>
+  <p:clrMapOvr>
+    <a:masterClrMapping/>
+  </p:clrMapOvr>
+</p:sld>
+</file>
+
+<file path=ppt/slides/slide16.xml><?xml version="1.0" encoding="utf-8"?>
+<p:sld xmlns:a="http://schemas.openxmlformats.org/drawingml/2006/main" xmlns:r="http://schemas.openxmlformats.org/officeDocument/2006/relationships" xmlns:p="http://schemas.openxmlformats.org/presentationml/2006/main">
+  <p:cSld>
+    <p:spTree>
+      <p:nvGrpSpPr>
+        <p:cNvPr id="1" name=""/>
+        <p:cNvGrpSpPr/>
+        <p:nvPr/>
+      </p:nvGrpSpPr>
+      <p:grpSpPr>
+        <a:xfrm>
+          <a:off x="0" y="0"/>
+          <a:ext cx="0" cy="0"/>
+          <a:chOff x="0" y="0"/>
+          <a:chExt cx="0" cy="0"/>
+        </a:xfrm>
+      </p:grpSpPr>
+      <p:sp>
+        <p:nvSpPr>
+          <p:cNvPr id="2" name="Título 1">
+            <a:extLst>
+              <a:ext uri="{FF2B5EF4-FFF2-40B4-BE49-F238E27FC236}">
+                <a16:creationId xmlns="" xmlns:a16="http://schemas.microsoft.com/office/drawing/2014/main" id="{99DAA83A-B143-94BB-B48B-41A7423070CE}"/>
+              </a:ext>
+            </a:extLst>
+          </p:cNvPr>
+          <p:cNvSpPr>
+            <a:spLocks noGrp="1"/>
+          </p:cNvSpPr>
+          <p:nvPr>
+            <p:ph type="title"/>
+          </p:nvPr>
+        </p:nvSpPr>
+        <p:spPr/>
+        <p:txBody>
+          <a:bodyPr/>
+          <a:lstStyle/>
+          <a:p>
+            <a:r>
+              <a:rPr lang="pt-BR" dirty="0"/>
+              <a:t>Função de ativação </a:t>
+            </a:r>
+            <a:r>
+              <a:rPr lang="pt-BR" i="1" dirty="0"/>
+              <a:t>softmax</a:t>
+            </a:r>
+            <a:endParaRPr lang="pt-BR" dirty="0"/>
+          </a:p>
+        </p:txBody>
+      </p:sp>
+      <mc:AlternateContent xmlns:mc="http://schemas.openxmlformats.org/markup-compatibility/2006" xmlns:a14="http://schemas.microsoft.com/office/drawing/2010/main">
+        <mc:Choice Requires="a14">
+          <p:sp>
+            <p:nvSpPr>
+              <p:cNvPr id="3" name="Espaço Reservado para Conteúdo 2">
+                <a:extLst>
+                  <a:ext uri="{FF2B5EF4-FFF2-40B4-BE49-F238E27FC236}">
+                    <a16:creationId xmlns="" xmlns:a16="http://schemas.microsoft.com/office/drawing/2014/main" id="{32DF54A1-52F5-C48C-7CD4-D6E451DF19D8}"/>
+                  </a:ext>
+                </a:extLst>
+              </p:cNvPr>
+              <p:cNvSpPr>
+                <a:spLocks noGrp="1"/>
+              </p:cNvSpPr>
+              <p:nvPr>
+                <p:ph idx="1"/>
+              </p:nvPr>
+            </p:nvSpPr>
+            <p:spPr>
+              <a:xfrm>
+                <a:off x="838200" y="1825624"/>
+                <a:ext cx="11353800" cy="5032375"/>
+              </a:xfrm>
+            </p:spPr>
+            <p:txBody>
+              <a:bodyPr>
+                <a:normAutofit/>
+              </a:bodyPr>
+              <a:lstStyle/>
+              <a:p>
+                <a:r>
+                  <a:rPr lang="pt-BR" b="0" dirty="0" smtClean="0">
+                    <a:effectLst/>
+                  </a:rPr>
+                  <a:t>Além de fazer c</a:t>
+                </a:r>
+                <a:r>
+                  <a:rPr lang="pt-BR" dirty="0" smtClean="0"/>
+                  <a:t>om </a:t>
+                </a:r>
+                <a:r>
+                  <a:rPr lang="pt-BR" dirty="0" smtClean="0">
+                    <a:effectLst/>
+                  </a:rPr>
+                  <a:t>que </a:t>
+                </a:r>
+                <a:r>
+                  <a:rPr lang="pt-BR" dirty="0">
+                    <a:effectLst/>
+                  </a:rPr>
+                  <a:t>as </a:t>
+                </a:r>
+                <a:r>
+                  <a:rPr lang="pt-BR" b="1" dirty="0">
+                    <a:solidFill>
+                      <a:srgbClr val="00B050"/>
+                    </a:solidFill>
+                    <a:effectLst/>
+                  </a:rPr>
+                  <a:t>saídas estejam no intervalo entre 0 e </a:t>
+                </a:r>
+                <a:r>
+                  <a:rPr lang="pt-BR" b="1" dirty="0" smtClean="0">
+                    <a:solidFill>
+                      <a:srgbClr val="00B050"/>
+                    </a:solidFill>
+                    <a:effectLst/>
+                  </a:rPr>
+                  <a:t>1, </a:t>
+                </a:r>
+                <a:r>
+                  <a:rPr lang="pt-BR" b="1" dirty="0">
+                    <a:solidFill>
+                      <a:srgbClr val="00B050"/>
+                    </a:solidFill>
+                  </a:rPr>
+                  <a:t>ela </a:t>
+                </a:r>
+                <a:r>
+                  <a:rPr lang="pt-BR" b="1" dirty="0" smtClean="0">
+                    <a:solidFill>
+                      <a:srgbClr val="00B050"/>
+                    </a:solidFill>
+                  </a:rPr>
+                  <a:t>garante que </a:t>
+                </a:r>
+                <a:r>
+                  <a:rPr lang="pt-BR" b="1" dirty="0">
+                    <a:solidFill>
+                      <a:srgbClr val="00B050"/>
+                    </a:solidFill>
+                    <a:effectLst/>
+                  </a:rPr>
+                  <a:t>soma de todas as saídas </a:t>
+                </a:r>
+                <a:r>
+                  <a:rPr lang="pt-BR" b="1" dirty="0" smtClean="0">
+                    <a:solidFill>
+                      <a:srgbClr val="00B050"/>
+                    </a:solidFill>
+                    <a:effectLst/>
+                  </a:rPr>
+                  <a:t>sempre seja </a:t>
+                </a:r>
+                <a:r>
+                  <a:rPr lang="pt-BR" b="1" dirty="0">
+                    <a:solidFill>
+                      <a:srgbClr val="00B050"/>
+                    </a:solidFill>
+                    <a:effectLst/>
+                  </a:rPr>
+                  <a:t>igual a 1</a:t>
+                </a:r>
+                <a:r>
+                  <a:rPr lang="pt-BR" b="0" dirty="0">
+                    <a:effectLst/>
+                  </a:rPr>
+                  <a:t>, tornando-as interpretáveis como uma </a:t>
+                </a:r>
+                <a:r>
+                  <a:rPr lang="pt-BR" b="1" dirty="0">
+                    <a:solidFill>
+                      <a:schemeClr val="accent2"/>
+                    </a:solidFill>
+                    <a:effectLst/>
+                  </a:rPr>
+                  <a:t>função massa de probabilidade </a:t>
+                </a:r>
+                <a:r>
+                  <a:rPr lang="pt-BR" b="1" dirty="0" err="1">
+                    <a:solidFill>
+                      <a:schemeClr val="accent2"/>
+                    </a:solidFill>
+                    <a:effectLst/>
+                  </a:rPr>
+                  <a:t>multinomial</a:t>
+                </a:r>
+                <a:r>
+                  <a:rPr lang="pt-BR" b="0" dirty="0" smtClean="0">
+                    <a:effectLst/>
+                  </a:rPr>
+                  <a:t>.</a:t>
                 </a:r>
               </a:p>
               <a:p>
@@ -15237,7 +14792,7 @@
                           </m:dPr>
                           <m:e>
                             <m:r>
-                              <a:rPr lang="pt-BR" b="0" i="1" smtClean="0">
+                              <a:rPr lang="pt-BR" i="1">
                                 <a:latin typeface="Cambria Math" panose="02040503050406030204" pitchFamily="18" charset="0"/>
                               </a:rPr>
                               <m:t>𝑛</m:t>
@@ -15348,7 +14903,7 @@
                           <m:t>(</m:t>
                         </m:r>
                         <m:r>
-                          <a:rPr lang="pt-BR" b="0" i="1" smtClean="0">
+                          <a:rPr lang="pt-BR" i="1">
                             <a:latin typeface="Cambria Math" panose="02040503050406030204" pitchFamily="18" charset="0"/>
                           </a:rPr>
                           <m:t>𝑛</m:t>
@@ -15473,7 +15028,7 @@
                           </m:dPr>
                           <m:e>
                             <m:r>
-                              <a:rPr lang="pt-BR" b="0" i="1" smtClean="0">
+                              <a:rPr lang="pt-BR" i="1">
                                 <a:latin typeface="Cambria Math" panose="02040503050406030204" pitchFamily="18" charset="0"/>
                               </a:rPr>
                               <m:t>𝑛</m:t>
@@ -15528,20 +15083,23 @@
                   </m:oMath>
                 </a14:m>
                 <a:r>
-                  <a:rPr lang="pt-BR" dirty="0"/>
+                  <a:rPr lang="pt-BR" dirty="0" smtClean="0"/>
                   <a:t>.</a:t>
                 </a:r>
+                <a:endParaRPr lang="pt-BR" b="0" dirty="0">
+                  <a:effectLst/>
+                </a:endParaRPr>
               </a:p>
             </p:txBody>
           </p:sp>
         </mc:Choice>
-        <mc:Fallback>
+        <mc:Fallback xmlns="">
           <p:sp>
             <p:nvSpPr>
               <p:cNvPr id="3" name="Espaço Reservado para Conteúdo 2">
                 <a:extLst>
                   <a:ext uri="{FF2B5EF4-FFF2-40B4-BE49-F238E27FC236}">
-                    <a16:creationId xmlns:a16="http://schemas.microsoft.com/office/drawing/2014/main" xmlns="" xmlns:a14="http://schemas.microsoft.com/office/drawing/2010/main" id="{32DF54A1-52F5-C48C-7CD4-D6E451DF19D8}"/>
+                    <a16:creationId xmlns="" xmlns:a16="http://schemas.microsoft.com/office/drawing/2014/main" xmlns:a14="http://schemas.microsoft.com/office/drawing/2010/main" id="{32DF54A1-52F5-C48C-7CD4-D6E451DF19D8}"/>
                   </a:ext>
                 </a:extLst>
               </p:cNvPr>
@@ -15555,12 +15113,12 @@
             <p:spPr>
               <a:xfrm>
                 <a:off x="838200" y="1825624"/>
-                <a:ext cx="11225981" cy="5032375"/>
+                <a:ext cx="11353800" cy="5032375"/>
               </a:xfrm>
               <a:blipFill rotWithShape="0">
                 <a:blip r:embed="rId3"/>
                 <a:stretch>
-                  <a:fillRect l="-978" t="-1937"/>
+                  <a:fillRect l="-967" t="-1937"/>
                 </a:stretch>
               </a:blipFill>
             </p:spPr>
@@ -15584,7 +15142,7 @@
           <p:cNvPr id="6" name="Imagem 5">
             <a:extLst>
               <a:ext uri="{FF2B5EF4-FFF2-40B4-BE49-F238E27FC236}">
-                <a16:creationId xmlns:a16="http://schemas.microsoft.com/office/drawing/2014/main" xmlns="" id="{ED5D1F5D-F195-0452-50D4-07E9F2B1C49D}"/>
+                <a16:creationId xmlns="" xmlns:a16="http://schemas.microsoft.com/office/drawing/2014/main" id="{ED5D1F5D-F195-0452-50D4-07E9F2B1C49D}"/>
               </a:ext>
             </a:extLst>
           </p:cNvPr>
@@ -15607,8 +15165,8 @@
         </p:blipFill>
         <p:spPr>
           <a:xfrm>
-            <a:off x="3590832" y="4709525"/>
-            <a:ext cx="5010336" cy="2054533"/>
+            <a:off x="2778470" y="3952568"/>
+            <a:ext cx="6635059" cy="2720765"/>
           </a:xfrm>
           <a:prstGeom prst="rect">
             <a:avLst/>
@@ -15622,7 +15180,7 @@
               <p:cNvPr id="4" name="CaixaDeTexto 3">
                 <a:extLst>
                   <a:ext uri="{FF2B5EF4-FFF2-40B4-BE49-F238E27FC236}">
-                    <a16:creationId xmlns:a16="http://schemas.microsoft.com/office/drawing/2014/main" xmlns="" id="{2B7728A0-505D-9DAE-23EC-8172E2EEEFA9}"/>
+                    <a16:creationId xmlns="" xmlns:a16="http://schemas.microsoft.com/office/drawing/2014/main" id="{2B7728A0-505D-9DAE-23EC-8172E2EEEFA9}"/>
                   </a:ext>
                 </a:extLst>
               </p:cNvPr>
@@ -15631,7 +15189,7 @@
             </p:nvSpPr>
             <p:spPr>
               <a:xfrm>
-                <a:off x="8601168" y="6488667"/>
+                <a:off x="9468912" y="6488667"/>
                 <a:ext cx="2701189" cy="369332"/>
               </a:xfrm>
               <a:prstGeom prst="rect">
@@ -15675,7 +15233,7 @@
               <p:cNvPr id="4" name="CaixaDeTexto 3">
                 <a:extLst>
                   <a:ext uri="{FF2B5EF4-FFF2-40B4-BE49-F238E27FC236}">
-                    <a16:creationId xmlns:a16="http://schemas.microsoft.com/office/drawing/2014/main" id="{2B7728A0-505D-9DAE-23EC-8172E2EEEFA9}"/>
+                    <a16:creationId xmlns="" xmlns:a16="http://schemas.microsoft.com/office/drawing/2014/main" xmlns:a14="http://schemas.microsoft.com/office/drawing/2010/main" id="{2B7728A0-505D-9DAE-23EC-8172E2EEEFA9}"/>
                   </a:ext>
                 </a:extLst>
               </p:cNvPr>
@@ -15686,16 +15244,16 @@
             </p:nvSpPr>
             <p:spPr>
               <a:xfrm>
-                <a:off x="8601168" y="6488667"/>
+                <a:off x="9468912" y="6488667"/>
                 <a:ext cx="2701189" cy="369332"/>
               </a:xfrm>
               <a:prstGeom prst="rect">
                 <a:avLst/>
               </a:prstGeom>
-              <a:blipFill>
+              <a:blipFill rotWithShape="0">
                 <a:blip r:embed="rId5"/>
                 <a:stretch>
-                  <a:fillRect l="-451" t="-8197" r="-1354" b="-24590"/>
+                  <a:fillRect l="-451" t="-8197" r="-1580" b="-24590"/>
                 </a:stretch>
               </a:blipFill>
             </p:spPr>
@@ -15704,7 +15262,7 @@
               <a:lstStyle/>
               <a:p>
                 <a:r>
-                  <a:rPr lang="en-US">
+                  <a:rPr lang="pt-BR">
                     <a:noFill/>
                   </a:rPr>
                   <a:t> </a:t>
@@ -15749,7 +15307,7 @@
           <p:cNvPr id="2" name="Título 1">
             <a:extLst>
               <a:ext uri="{FF2B5EF4-FFF2-40B4-BE49-F238E27FC236}">
-                <a16:creationId xmlns:a16="http://schemas.microsoft.com/office/drawing/2014/main" xmlns="" id="{028A152F-93D8-11FA-9B7A-B62AE5BB6486}"/>
+                <a16:creationId xmlns="" xmlns:a16="http://schemas.microsoft.com/office/drawing/2014/main" id="{028A152F-93D8-11FA-9B7A-B62AE5BB6486}"/>
               </a:ext>
             </a:extLst>
           </p:cNvPr>
@@ -15776,14 +15334,14 @@
           </a:p>
         </p:txBody>
       </p:sp>
-      <mc:AlternateContent xmlns:mc="http://schemas.openxmlformats.org/markup-compatibility/2006" xmlns:a14="http://schemas.microsoft.com/office/drawing/2010/main">
-        <mc:Choice Requires="a14">
+      <mc:AlternateContent xmlns:mc="http://schemas.openxmlformats.org/markup-compatibility/2006">
+        <mc:Choice xmlns:a14="http://schemas.microsoft.com/office/drawing/2010/main" Requires="a14">
           <p:sp>
             <p:nvSpPr>
               <p:cNvPr id="3" name="Espaço Reservado para Conteúdo 2">
                 <a:extLst>
                   <a:ext uri="{FF2B5EF4-FFF2-40B4-BE49-F238E27FC236}">
-                    <a16:creationId xmlns:a16="http://schemas.microsoft.com/office/drawing/2014/main" xmlns="" id="{B3535727-BB24-BB15-5C03-3DA9A3F9A09A}"/>
+                    <a16:creationId xmlns="" xmlns:a16="http://schemas.microsoft.com/office/drawing/2014/main" id="{B3535727-BB24-BB15-5C03-3DA9A3F9A09A}"/>
                   </a:ext>
                 </a:extLst>
               </p:cNvPr>
@@ -15846,7 +15404,11 @@
                 </a:r>
                 <a:r>
                   <a:rPr lang="pt-BR" dirty="0"/>
-                  <a:t> (i.e., </a:t>
+                  <a:t> (i.e</a:t>
+                </a:r>
+                <a:r>
+                  <a:rPr lang="pt-BR" dirty="0" smtClean="0"/>
+                  <a:t>., a </a:t>
                 </a:r>
                 <a:r>
                   <a:rPr lang="pt-BR" b="1" dirty="0"/>
@@ -15912,13 +15474,13 @@
             </p:txBody>
           </p:sp>
         </mc:Choice>
-        <mc:Fallback xmlns="">
+        <mc:Fallback>
           <p:sp>
             <p:nvSpPr>
               <p:cNvPr id="3" name="Espaço Reservado para Conteúdo 2">
                 <a:extLst>
                   <a:ext uri="{FF2B5EF4-FFF2-40B4-BE49-F238E27FC236}">
-                    <a16:creationId xmlns:a16="http://schemas.microsoft.com/office/drawing/2014/main" id="{B3535727-BB24-BB15-5C03-3DA9A3F9A09A}"/>
+                    <a16:creationId xmlns="" xmlns:a16="http://schemas.microsoft.com/office/drawing/2014/main" xmlns:a14="http://schemas.microsoft.com/office/drawing/2010/main" id="{B3535727-BB24-BB15-5C03-3DA9A3F9A09A}"/>
                   </a:ext>
                 </a:extLst>
               </p:cNvPr>
@@ -15934,10 +15496,10 @@
                 <a:off x="6096001" y="1825624"/>
                 <a:ext cx="5998028" cy="5032375"/>
               </a:xfrm>
-              <a:blipFill>
+              <a:blipFill rotWithShape="0">
                 <a:blip r:embed="rId3"/>
                 <a:stretch>
-                  <a:fillRect l="-1829" t="-1937" r="-2846"/>
+                  <a:fillRect l="-1829" t="-1937" r="-1728"/>
                 </a:stretch>
               </a:blipFill>
             </p:spPr>
@@ -15946,7 +15508,7 @@
               <a:lstStyle/>
               <a:p>
                 <a:r>
-                  <a:rPr lang="en-US">
+                  <a:rPr lang="pt-BR">
                     <a:noFill/>
                   </a:rPr>
                   <a:t> </a:t>
@@ -15961,7 +15523,7 @@
           <p:cNvPr id="4" name="Imagem 5">
             <a:extLst>
               <a:ext uri="{FF2B5EF4-FFF2-40B4-BE49-F238E27FC236}">
-                <a16:creationId xmlns:a16="http://schemas.microsoft.com/office/drawing/2014/main" xmlns="" id="{42A1713D-06B5-FB35-8488-833F7CAB7166}"/>
+                <a16:creationId xmlns="" xmlns:a16="http://schemas.microsoft.com/office/drawing/2014/main" id="{42A1713D-06B5-FB35-8488-833F7CAB7166}"/>
               </a:ext>
             </a:extLst>
           </p:cNvPr>
@@ -16027,7 +15589,7 @@
           <p:cNvPr id="2" name="Title 1">
             <a:extLst>
               <a:ext uri="{FF2B5EF4-FFF2-40B4-BE49-F238E27FC236}">
-                <a16:creationId xmlns:a16="http://schemas.microsoft.com/office/drawing/2014/main" xmlns="" id="{2DB9D242-5419-0FFB-7863-B3BB3BD80869}"/>
+                <a16:creationId xmlns="" xmlns:a16="http://schemas.microsoft.com/office/drawing/2014/main" id="{2DB9D242-5419-0FFB-7863-B3BB3BD80869}"/>
               </a:ext>
             </a:extLst>
           </p:cNvPr>
@@ -16051,14 +15613,14 @@
           </a:p>
         </p:txBody>
       </p:sp>
-      <mc:AlternateContent xmlns:mc="http://schemas.openxmlformats.org/markup-compatibility/2006" xmlns:a14="http://schemas.microsoft.com/office/drawing/2010/main">
-        <mc:Choice Requires="a14">
+      <mc:AlternateContent xmlns:mc="http://schemas.openxmlformats.org/markup-compatibility/2006">
+        <mc:Choice xmlns:a14="http://schemas.microsoft.com/office/drawing/2010/main" Requires="a14">
           <p:sp>
             <p:nvSpPr>
               <p:cNvPr id="3" name="Content Placeholder 2">
                 <a:extLst>
                   <a:ext uri="{FF2B5EF4-FFF2-40B4-BE49-F238E27FC236}">
-                    <a16:creationId xmlns:a16="http://schemas.microsoft.com/office/drawing/2014/main" xmlns="" id="{34B1DEA3-BAAD-D90C-CD9D-99A5A24F4544}"/>
+                    <a16:creationId xmlns="" xmlns:a16="http://schemas.microsoft.com/office/drawing/2014/main" id="{34B1DEA3-BAAD-D90C-CD9D-99A5A24F4544}"/>
                   </a:ext>
                 </a:extLst>
               </p:cNvPr>
@@ -16082,7 +15644,7 @@
               <a:lstStyle/>
               <a:p>
                 <a:r>
-                  <a:rPr lang="pt-BR" dirty="0"/>
+                  <a:rPr lang="pt-BR" dirty="0" smtClean="0"/>
                   <a:t>Para atingir o objetivo, devemos definir uma </a:t>
                 </a:r>
                 <a:r>
@@ -16377,30 +15939,43 @@
                                       </m:ctrlPr>
                                     </m:dPr>
                                     <m:e>
-                                      <m:acc>
-                                        <m:accPr>
-                                          <m:chr m:val="̂"/>
+                                      <m:sSub>
+                                        <m:sSubPr>
                                           <m:ctrlPr>
-                                            <a:rPr lang="pt-BR" i="1">
+                                            <a:rPr lang="pt-BR" i="1" smtClean="0">
                                               <a:latin typeface="Cambria Math" panose="02040503050406030204" pitchFamily="18" charset="0"/>
                                             </a:rPr>
                                           </m:ctrlPr>
-                                        </m:accPr>
+                                        </m:sSubPr>
                                         <m:e>
+                                          <m:acc>
+                                            <m:accPr>
+                                              <m:chr m:val="̂"/>
+                                              <m:ctrlPr>
+                                                <a:rPr lang="pt-BR" i="1">
+                                                  <a:latin typeface="Cambria Math" panose="02040503050406030204" pitchFamily="18" charset="0"/>
+                                                </a:rPr>
+                                              </m:ctrlPr>
+                                            </m:accPr>
+                                            <m:e>
+                                              <m:r>
+                                                <a:rPr lang="pt-BR" i="1">
+                                                  <a:latin typeface="Cambria Math" panose="02040503050406030204" pitchFamily="18" charset="0"/>
+                                                </a:rPr>
+                                                <m:t>𝑦</m:t>
+                                              </m:r>
+                                            </m:e>
+                                          </m:acc>
+                                        </m:e>
+                                        <m:sub>
                                           <m:r>
-                                            <a:rPr lang="pt-BR" i="1">
+                                            <a:rPr lang="pt-BR" b="0" i="1" smtClean="0">
                                               <a:latin typeface="Cambria Math" panose="02040503050406030204" pitchFamily="18" charset="0"/>
                                             </a:rPr>
-                                            <m:t>𝑦</m:t>
+                                            <m:t>𝑞</m:t>
                                           </m:r>
-                                        </m:e>
-                                      </m:acc>
-                                      <m:r>
-                                        <a:rPr lang="pt-BR" i="1">
-                                          <a:latin typeface="Cambria Math" panose="02040503050406030204" pitchFamily="18" charset="0"/>
-                                        </a:rPr>
-                                        <m:t> </m:t>
-                                      </m:r>
+                                        </m:sub>
+                                      </m:sSub>
                                       <m:d>
                                         <m:dPr>
                                           <m:ctrlPr>
@@ -16602,30 +16177,43 @@
                         </m:ctrlPr>
                       </m:sSubSupPr>
                       <m:e>
-                        <m:acc>
-                          <m:accPr>
-                            <m:chr m:val="̂"/>
+                        <m:sSub>
+                          <m:sSubPr>
                             <m:ctrlPr>
                               <a:rPr lang="pt-BR" i="1">
                                 <a:latin typeface="Cambria Math" panose="02040503050406030204" pitchFamily="18" charset="0"/>
                               </a:rPr>
                             </m:ctrlPr>
-                          </m:accPr>
+                          </m:sSubPr>
                           <m:e>
+                            <m:acc>
+                              <m:accPr>
+                                <m:chr m:val="̂"/>
+                                <m:ctrlPr>
+                                  <a:rPr lang="pt-BR" i="1">
+                                    <a:latin typeface="Cambria Math" panose="02040503050406030204" pitchFamily="18" charset="0"/>
+                                  </a:rPr>
+                                </m:ctrlPr>
+                              </m:accPr>
+                              <m:e>
+                                <m:r>
+                                  <a:rPr lang="pt-BR" i="1">
+                                    <a:latin typeface="Cambria Math" panose="02040503050406030204" pitchFamily="18" charset="0"/>
+                                  </a:rPr>
+                                  <m:t>𝑦</m:t>
+                                </m:r>
+                              </m:e>
+                            </m:acc>
+                          </m:e>
+                          <m:sub>
                             <m:r>
-                              <a:rPr lang="pt-BR" b="0" i="1">
+                              <a:rPr lang="pt-BR" i="1">
                                 <a:latin typeface="Cambria Math" panose="02040503050406030204" pitchFamily="18" charset="0"/>
                               </a:rPr>
-                              <m:t>𝑦</m:t>
+                              <m:t>𝑞</m:t>
                             </m:r>
-                          </m:e>
-                        </m:acc>
-                        <m:r>
-                          <a:rPr lang="pt-BR" b="0" i="1">
-                            <a:latin typeface="Cambria Math" panose="02040503050406030204" pitchFamily="18" charset="0"/>
-                          </a:rPr>
-                          <m:t> </m:t>
-                        </m:r>
+                          </m:sub>
+                        </m:sSub>
                         <m:d>
                           <m:dPr>
                             <m:ctrlPr>
@@ -16841,13 +16429,21 @@
                 </a14:m>
                 <a:r>
                   <a:rPr lang="pt-BR" dirty="0"/>
-                  <a:t> tende a 1, caso contrário, o erro aumenta.</a:t>
+                  <a:t> tende a 1, caso contrário, </a:t>
+                </a:r>
+                <a:r>
+                  <a:rPr lang="pt-BR" dirty="0" smtClean="0"/>
+                  <a:t>ele </a:t>
+                </a:r>
+                <a:r>
+                  <a:rPr lang="pt-BR" dirty="0"/>
+                  <a:t>aumenta.</a:t>
                 </a:r>
               </a:p>
             </p:txBody>
           </p:sp>
         </mc:Choice>
-        <mc:Fallback xmlns="">
+        <mc:Fallback>
           <p:sp>
             <p:nvSpPr>
               <p:cNvPr id="3" name="Content Placeholder 2">
@@ -16872,7 +16468,7 @@
               <a:blipFill rotWithShape="0">
                 <a:blip r:embed="rId2"/>
                 <a:stretch>
-                  <a:fillRect l="-1074" t="-1937" r="-376" b="-2179"/>
+                  <a:fillRect l="-1074" t="-1937" r="-913" b="-2300"/>
                 </a:stretch>
               </a:blipFill>
             </p:spPr>
@@ -16926,7 +16522,7 @@
           <p:cNvPr id="2" name="Title 1">
             <a:extLst>
               <a:ext uri="{FF2B5EF4-FFF2-40B4-BE49-F238E27FC236}">
-                <a16:creationId xmlns:a16="http://schemas.microsoft.com/office/drawing/2014/main" xmlns="" id="{997538D5-DC01-EC48-38D2-99D754F1BB92}"/>
+                <a16:creationId xmlns="" xmlns:a16="http://schemas.microsoft.com/office/drawing/2014/main" id="{997538D5-DC01-EC48-38D2-99D754F1BB92}"/>
               </a:ext>
             </a:extLst>
           </p:cNvPr>
@@ -16950,14 +16546,14 @@
           </a:p>
         </p:txBody>
       </p:sp>
-      <mc:AlternateContent xmlns:mc="http://schemas.openxmlformats.org/markup-compatibility/2006" xmlns:a14="http://schemas.microsoft.com/office/drawing/2010/main">
-        <mc:Choice Requires="a14">
+      <mc:AlternateContent xmlns:mc="http://schemas.openxmlformats.org/markup-compatibility/2006">
+        <mc:Choice xmlns:a14="http://schemas.microsoft.com/office/drawing/2010/main" Requires="a14">
           <p:sp>
             <p:nvSpPr>
               <p:cNvPr id="3" name="Content Placeholder 2">
                 <a:extLst>
                   <a:ext uri="{FF2B5EF4-FFF2-40B4-BE49-F238E27FC236}">
-                    <a16:creationId xmlns:a16="http://schemas.microsoft.com/office/drawing/2014/main" xmlns="" id="{17D7928D-3A32-7330-5FDC-756155EF2F3D}"/>
+                    <a16:creationId xmlns="" xmlns:a16="http://schemas.microsoft.com/office/drawing/2014/main" id="{17D7928D-3A32-7330-5FDC-756155EF2F3D}"/>
                   </a:ext>
                 </a:extLst>
               </p:cNvPr>
@@ -16968,7 +16564,12 @@
                 <p:ph idx="1"/>
               </p:nvPr>
             </p:nvSpPr>
-            <p:spPr/>
+            <p:spPr>
+              <a:xfrm>
+                <a:off x="838199" y="1840373"/>
+                <a:ext cx="11152239" cy="4351338"/>
+              </a:xfrm>
+            </p:spPr>
             <p:txBody>
               <a:bodyPr/>
               <a:lstStyle/>
@@ -17217,30 +16818,43 @@
                                       </m:ctrlPr>
                                     </m:dPr>
                                     <m:e>
-                                      <m:acc>
-                                        <m:accPr>
-                                          <m:chr m:val="̂"/>
+                                      <m:sSub>
+                                        <m:sSubPr>
                                           <m:ctrlPr>
                                             <a:rPr lang="pt-BR" i="1">
                                               <a:latin typeface="Cambria Math" panose="02040503050406030204" pitchFamily="18" charset="0"/>
                                             </a:rPr>
                                           </m:ctrlPr>
-                                        </m:accPr>
+                                        </m:sSubPr>
                                         <m:e>
+                                          <m:acc>
+                                            <m:accPr>
+                                              <m:chr m:val="̂"/>
+                                              <m:ctrlPr>
+                                                <a:rPr lang="pt-BR" i="1">
+                                                  <a:latin typeface="Cambria Math" panose="02040503050406030204" pitchFamily="18" charset="0"/>
+                                                </a:rPr>
+                                              </m:ctrlPr>
+                                            </m:accPr>
+                                            <m:e>
+                                              <m:r>
+                                                <a:rPr lang="pt-BR" i="1">
+                                                  <a:latin typeface="Cambria Math" panose="02040503050406030204" pitchFamily="18" charset="0"/>
+                                                </a:rPr>
+                                                <m:t>𝑦</m:t>
+                                              </m:r>
+                                            </m:e>
+                                          </m:acc>
+                                        </m:e>
+                                        <m:sub>
                                           <m:r>
                                             <a:rPr lang="pt-BR" i="1">
                                               <a:latin typeface="Cambria Math" panose="02040503050406030204" pitchFamily="18" charset="0"/>
                                             </a:rPr>
-                                            <m:t>𝑦</m:t>
+                                            <m:t>𝑞</m:t>
                                           </m:r>
-                                        </m:e>
-                                      </m:acc>
-                                      <m:r>
-                                        <a:rPr lang="pt-BR" i="1">
-                                          <a:latin typeface="Cambria Math" panose="02040503050406030204" pitchFamily="18" charset="0"/>
-                                        </a:rPr>
-                                        <m:t> </m:t>
-                                      </m:r>
+                                        </m:sub>
+                                      </m:sSub>
                                       <m:d>
                                         <m:dPr>
                                           <m:ctrlPr>
@@ -17369,23 +16983,54 @@
                       <a:srgbClr val="7030A0"/>
                     </a:solidFill>
                   </a:rPr>
-                  <a:t>entre as distribuições de probabilidade preditas pelo modelo e as distribuições dos rótulos </a:t>
-                </a:r>
-                <a:r>
-                  <a:rPr lang="pt-BR" dirty="0"/>
-                  <a:t>das classes.</a:t>
-                </a:r>
-              </a:p>
-              <a:p>
+                  <a:t>entre as distribuições de probabilidade </a:t>
+                </a:r>
+                <a:r>
+                  <a:rPr lang="pt-BR" b="1" dirty="0" smtClean="0">
+                    <a:solidFill>
+                      <a:srgbClr val="7030A0"/>
+                    </a:solidFill>
+                  </a:rPr>
+                  <a:t>da saída do modelo </a:t>
+                </a:r>
+                <a:r>
+                  <a:rPr lang="pt-BR" b="1" dirty="0">
+                    <a:solidFill>
+                      <a:srgbClr val="7030A0"/>
+                    </a:solidFill>
+                  </a:rPr>
+                  <a:t>e </a:t>
+                </a:r>
+                <a:r>
+                  <a:rPr lang="pt-BR" b="1" dirty="0" smtClean="0">
+                    <a:solidFill>
+                      <a:srgbClr val="7030A0"/>
+                    </a:solidFill>
+                  </a:rPr>
+                  <a:t>a dos </a:t>
+                </a:r>
+                <a:r>
+                  <a:rPr lang="pt-BR" b="1" dirty="0">
+                    <a:solidFill>
+                      <a:srgbClr val="7030A0"/>
+                    </a:solidFill>
+                  </a:rPr>
+                  <a:t>rótulos </a:t>
+                </a:r>
+                <a:r>
+                  <a:rPr lang="pt-BR" dirty="0"/>
+                  <a:t>das classes</a:t>
+                </a:r>
+                <a:r>
+                  <a:rPr lang="pt-BR" dirty="0" smtClean="0"/>
+                  <a:t>.</a:t>
+                </a:r>
                 <a:endParaRPr lang="pt-BR" dirty="0"/>
-              </a:p>
-              <a:p>
-                <a:endParaRPr lang="en-US" dirty="0"/>
               </a:p>
             </p:txBody>
           </p:sp>
         </mc:Choice>
-        <mc:Fallback xmlns="">
+        <mc:Fallback>
           <p:sp>
             <p:nvSpPr>
               <p:cNvPr id="3" name="Content Placeholder 2">
@@ -17403,10 +17048,14 @@
               </p:nvPr>
             </p:nvSpPr>
             <p:spPr>
+              <a:xfrm>
+                <a:off x="838199" y="1840373"/>
+                <a:ext cx="11152239" cy="4351338"/>
+              </a:xfrm>
               <a:blipFill rotWithShape="0">
                 <a:blip r:embed="rId2"/>
                 <a:stretch>
-                  <a:fillRect l="-1043" r="-58"/>
+                  <a:fillRect l="-929" r="-874"/>
                 </a:stretch>
               </a:blipFill>
             </p:spPr>
@@ -17555,7 +17204,7 @@
           <p:cNvPr id="2" name="Título 1">
             <a:extLst>
               <a:ext uri="{FF2B5EF4-FFF2-40B4-BE49-F238E27FC236}">
-                <a16:creationId xmlns:a16="http://schemas.microsoft.com/office/drawing/2014/main" xmlns="" id="{1FE7CD05-66F2-8967-6154-CCED38E0F987}"/>
+                <a16:creationId xmlns="" xmlns:a16="http://schemas.microsoft.com/office/drawing/2014/main" id="{1FE7CD05-66F2-8967-6154-CCED38E0F987}"/>
               </a:ext>
             </a:extLst>
           </p:cNvPr>
@@ -17578,14 +17227,14 @@
           </a:p>
         </p:txBody>
       </p:sp>
-      <mc:AlternateContent xmlns:mc="http://schemas.openxmlformats.org/markup-compatibility/2006" xmlns:a14="http://schemas.microsoft.com/office/drawing/2010/main">
-        <mc:Choice Requires="a14">
+      <mc:AlternateContent xmlns:mc="http://schemas.openxmlformats.org/markup-compatibility/2006">
+        <mc:Choice xmlns:a14="http://schemas.microsoft.com/office/drawing/2010/main" Requires="a14">
           <p:sp>
             <p:nvSpPr>
               <p:cNvPr id="3" name="Espaço Reservado para Conteúdo 2">
                 <a:extLst>
                   <a:ext uri="{FF2B5EF4-FFF2-40B4-BE49-F238E27FC236}">
-                    <a16:creationId xmlns:a16="http://schemas.microsoft.com/office/drawing/2014/main" xmlns="" id="{21A86630-5D79-AD4B-79FC-6C8373E8DB39}"/>
+                    <a16:creationId xmlns="" xmlns:a16="http://schemas.microsoft.com/office/drawing/2014/main" id="{21A86630-5D79-AD4B-79FC-6C8373E8DB39}"/>
                   </a:ext>
                 </a:extLst>
               </p:cNvPr>
@@ -17598,8 +17247,8 @@
             </p:nvSpPr>
             <p:spPr>
               <a:xfrm>
-                <a:off x="838199" y="1825624"/>
-                <a:ext cx="11144693" cy="5032375"/>
+                <a:off x="838200" y="1825624"/>
+                <a:ext cx="11240730" cy="5032375"/>
               </a:xfrm>
             </p:spPr>
             <p:txBody>
@@ -17831,12 +17480,6 @@
                                       </m:r>
                                     </m:e>
                                   </m:acc>
-                                  <m:r>
-                                    <a:rPr lang="pt-BR" b="0" i="1" smtClean="0">
-                                      <a:latin typeface="Cambria Math" panose="02040503050406030204" pitchFamily="18" charset="0"/>
-                                    </a:rPr>
-                                    <m:t> </m:t>
-                                  </m:r>
                                   <m:d>
                                     <m:dPr>
                                       <m:ctrlPr>
@@ -18125,7 +17768,41 @@
                 </a14:m>
                 <a:r>
                   <a:rPr lang="pt-BR" dirty="0"/>
-                  <a:t> é um vetor com os rótulos usando a codificação </a:t>
+                  <a:t> é </a:t>
+                </a:r>
+                <a:r>
+                  <a:rPr lang="pt-BR" dirty="0" smtClean="0"/>
+                  <a:t>o vetor do </a:t>
+                </a:r>
+                <a14:m>
+                  <m:oMath xmlns:m="http://schemas.openxmlformats.org/officeDocument/2006/math">
+                    <m:r>
+                      <a:rPr lang="pt-BR" i="1">
+                        <a:latin typeface="Cambria Math" panose="02040503050406030204" pitchFamily="18" charset="0"/>
+                      </a:rPr>
+                      <m:t>𝑛</m:t>
+                    </m:r>
+                  </m:oMath>
+                </a14:m>
+                <a:r>
+                  <a:rPr lang="pt-BR" dirty="0"/>
+                  <a:t>-</a:t>
+                </a:r>
+                <a:r>
+                  <a:rPr lang="pt-BR" dirty="0" err="1"/>
+                  <a:t>ésimo</a:t>
+                </a:r>
+                <a:r>
+                  <a:rPr lang="pt-BR" dirty="0"/>
+                  <a:t> </a:t>
+                </a:r>
+                <a:r>
+                  <a:rPr lang="pt-BR" dirty="0" smtClean="0"/>
+                  <a:t>rótulo </a:t>
+                </a:r>
+                <a:r>
+                  <a:rPr lang="pt-BR" dirty="0"/>
+                  <a:t>usando a codificação </a:t>
                 </a:r>
                 <a:r>
                   <a:rPr lang="pt-BR" b="1" i="1" dirty="0"/>
@@ -18155,12 +17832,6 @@
                         </m:r>
                       </m:e>
                     </m:acc>
-                    <m:r>
-                      <a:rPr lang="pt-BR" i="1">
-                        <a:latin typeface="Cambria Math" panose="02040503050406030204" pitchFamily="18" charset="0"/>
-                      </a:rPr>
-                      <m:t> </m:t>
-                    </m:r>
                     <m:d>
                       <m:dPr>
                         <m:ctrlPr>
@@ -18402,7 +18073,15 @@
                 </a14:m>
                 <a:r>
                   <a:rPr lang="pt-BR" dirty="0"/>
-                  <a:t>é um vetor com as </a:t>
+                  <a:t>é </a:t>
+                </a:r>
+                <a:r>
+                  <a:rPr lang="pt-BR" dirty="0" smtClean="0"/>
+                  <a:t>o vetor </a:t>
+                </a:r>
+                <a:r>
+                  <a:rPr lang="pt-BR" dirty="0"/>
+                  <a:t>com as </a:t>
                 </a:r>
                 <a14:m>
                   <m:oMath xmlns:m="http://schemas.openxmlformats.org/officeDocument/2006/math">
@@ -18491,13 +18170,13 @@
             </p:txBody>
           </p:sp>
         </mc:Choice>
-        <mc:Fallback xmlns="">
+        <mc:Fallback>
           <p:sp>
             <p:nvSpPr>
               <p:cNvPr id="3" name="Espaço Reservado para Conteúdo 2">
                 <a:extLst>
                   <a:ext uri="{FF2B5EF4-FFF2-40B4-BE49-F238E27FC236}">
-                    <a16:creationId xmlns:a16="http://schemas.microsoft.com/office/drawing/2014/main" id="{21A86630-5D79-AD4B-79FC-6C8373E8DB39}"/>
+                    <a16:creationId xmlns="" xmlns:a16="http://schemas.microsoft.com/office/drawing/2014/main" xmlns:a14="http://schemas.microsoft.com/office/drawing/2010/main" id="{21A86630-5D79-AD4B-79FC-6C8373E8DB39}"/>
                   </a:ext>
                 </a:extLst>
               </p:cNvPr>
@@ -18510,13 +18189,13 @@
             </p:nvSpPr>
             <p:spPr>
               <a:xfrm>
-                <a:off x="838199" y="1825624"/>
-                <a:ext cx="11144693" cy="5032375"/>
+                <a:off x="838200" y="1825624"/>
+                <a:ext cx="11240730" cy="5032375"/>
               </a:xfrm>
-              <a:blipFill>
+              <a:blipFill rotWithShape="0">
                 <a:blip r:embed="rId2"/>
                 <a:stretch>
-                  <a:fillRect l="-1093" t="-1937" r="-547"/>
+                  <a:fillRect l="-1139" t="-1937" r="-1248"/>
                 </a:stretch>
               </a:blipFill>
             </p:spPr>
@@ -18525,7 +18204,7 @@
               <a:lstStyle/>
               <a:p>
                 <a:r>
-                  <a:rPr lang="en-US">
+                  <a:rPr lang="pt-BR">
                     <a:noFill/>
                   </a:rPr>
                   <a:t> </a:t>
@@ -18570,7 +18249,7 @@
           <p:cNvPr id="2" name="Título 1">
             <a:extLst>
               <a:ext uri="{FF2B5EF4-FFF2-40B4-BE49-F238E27FC236}">
-                <a16:creationId xmlns:a16="http://schemas.microsoft.com/office/drawing/2014/main" xmlns="" id="{E4598F11-6F65-0753-89FE-F5ABED77B46A}"/>
+                <a16:creationId xmlns="" xmlns:a16="http://schemas.microsoft.com/office/drawing/2014/main" id="{E4598F11-6F65-0753-89FE-F5ABED77B46A}"/>
               </a:ext>
             </a:extLst>
           </p:cNvPr>
@@ -18601,7 +18280,7 @@
               <p:cNvPr id="3" name="Espaço Reservado para Conteúdo 2">
                 <a:extLst>
                   <a:ext uri="{FF2B5EF4-FFF2-40B4-BE49-F238E27FC236}">
-                    <a16:creationId xmlns:a16="http://schemas.microsoft.com/office/drawing/2014/main" xmlns="" id="{FEF4E6DC-E916-D97A-4D18-D469285C4F2C}"/>
+                    <a16:creationId xmlns="" xmlns:a16="http://schemas.microsoft.com/office/drawing/2014/main" id="{FEF4E6DC-E916-D97A-4D18-D469285C4F2C}"/>
                   </a:ext>
                 </a:extLst>
               </p:cNvPr>
@@ -18900,18 +18579,30 @@
                 </a:r>
                 <a:r>
                   <a:rPr lang="pt-BR" b="1" dirty="0"/>
-                  <a:t>função de erro médio </a:t>
-                </a:r>
-                <a:r>
-                  <a:rPr lang="pt-BR" dirty="0"/>
-                  <a:t>é equivalente à </a:t>
+                  <a:t>função </a:t>
+                </a:r>
+                <a:r>
+                  <a:rPr lang="pt-BR" b="1" dirty="0" smtClean="0"/>
+                  <a:t>da entropia cruzada categórica </a:t>
+                </a:r>
+                <a:r>
+                  <a:rPr lang="pt-BR" dirty="0" smtClean="0"/>
+                  <a:t>é </a:t>
+                </a:r>
+                <a:r>
+                  <a:rPr lang="pt-BR" dirty="0"/>
+                  <a:t>equivalente à </a:t>
                 </a:r>
                 <a:r>
                   <a:rPr lang="pt-BR" b="1" dirty="0"/>
-                  <a:t>função de erro médio </a:t>
-                </a:r>
-                <a:r>
-                  <a:rPr lang="pt-BR" dirty="0"/>
+                  <a:t>função da entropia </a:t>
+                </a:r>
+                <a:r>
+                  <a:rPr lang="pt-BR" b="1" dirty="0" smtClean="0"/>
+                  <a:t>cruzada </a:t>
+                </a:r>
+                <a:r>
+                  <a:rPr lang="pt-BR" dirty="0" smtClean="0"/>
                   <a:t>do </a:t>
                 </a:r>
                 <a:r>
@@ -18998,7 +18689,7 @@
               <p:cNvPr id="3" name="Espaço Reservado para Conteúdo 2">
                 <a:extLst>
                   <a:ext uri="{FF2B5EF4-FFF2-40B4-BE49-F238E27FC236}">
-                    <a16:creationId xmlns:a16="http://schemas.microsoft.com/office/drawing/2014/main" id="{FEF4E6DC-E916-D97A-4D18-D469285C4F2C}"/>
+                    <a16:creationId xmlns="" xmlns:a16="http://schemas.microsoft.com/office/drawing/2014/main" xmlns:a14="http://schemas.microsoft.com/office/drawing/2010/main" id="{FEF4E6DC-E916-D97A-4D18-D469285C4F2C}"/>
                   </a:ext>
                 </a:extLst>
               </p:cNvPr>
@@ -19014,10 +18705,10 @@
                 <a:off x="838200" y="1825624"/>
                 <a:ext cx="11201400" cy="5032375"/>
               </a:xfrm>
-              <a:blipFill>
+              <a:blipFill rotWithShape="0">
                 <a:blip r:embed="rId3"/>
                 <a:stretch>
-                  <a:fillRect l="-980" r="-1524"/>
+                  <a:fillRect l="-980"/>
                 </a:stretch>
               </a:blipFill>
             </p:spPr>
@@ -19026,7 +18717,7 @@
               <a:lstStyle/>
               <a:p>
                 <a:r>
-                  <a:rPr lang="en-US">
+                  <a:rPr lang="pt-BR">
                     <a:noFill/>
                   </a:rPr>
                   <a:t> </a:t>
@@ -19071,7 +18762,7 @@
           <p:cNvPr id="2" name="Título 1">
             <a:extLst>
               <a:ext uri="{FF2B5EF4-FFF2-40B4-BE49-F238E27FC236}">
-                <a16:creationId xmlns:a16="http://schemas.microsoft.com/office/drawing/2014/main" xmlns="" id="{D5807923-28D2-8150-E304-526DA460D220}"/>
+                <a16:creationId xmlns="" xmlns:a16="http://schemas.microsoft.com/office/drawing/2014/main" id="{D5807923-28D2-8150-E304-526DA460D220}"/>
               </a:ext>
             </a:extLst>
           </p:cNvPr>
@@ -19100,7 +18791,7 @@
           <p:cNvPr id="3" name="Espaço Reservado para Conteúdo 2">
             <a:extLst>
               <a:ext uri="{FF2B5EF4-FFF2-40B4-BE49-F238E27FC236}">
-                <a16:creationId xmlns:a16="http://schemas.microsoft.com/office/drawing/2014/main" xmlns="" id="{FFACD180-C529-EB91-BD2D-B5F491B1E35C}"/>
+                <a16:creationId xmlns="" xmlns:a16="http://schemas.microsoft.com/office/drawing/2014/main" id="{FFACD180-C529-EB91-BD2D-B5F491B1E35C}"/>
               </a:ext>
             </a:extLst>
           </p:cNvPr>
@@ -19232,7 +18923,7 @@
           <p:cNvPr id="1026" name="Picture 2">
             <a:extLst>
               <a:ext uri="{FF2B5EF4-FFF2-40B4-BE49-F238E27FC236}">
-                <a16:creationId xmlns:a16="http://schemas.microsoft.com/office/drawing/2014/main" xmlns="" id="{6FC2BDE8-91E0-6379-9BA3-76511C6153D5}"/>
+                <a16:creationId xmlns="" xmlns:a16="http://schemas.microsoft.com/office/drawing/2014/main" id="{6FC2BDE8-91E0-6379-9BA3-76511C6153D5}"/>
               </a:ext>
             </a:extLst>
           </p:cNvPr>
@@ -19277,7 +18968,7 @@
           <p:cNvPr id="5" name="Picture 2">
             <a:extLst>
               <a:ext uri="{FF2B5EF4-FFF2-40B4-BE49-F238E27FC236}">
-                <a16:creationId xmlns:a16="http://schemas.microsoft.com/office/drawing/2014/main" xmlns="" id="{2771BE1F-7B74-36A4-AA69-9171B025A4B6}"/>
+                <a16:creationId xmlns="" xmlns:a16="http://schemas.microsoft.com/office/drawing/2014/main" id="{2771BE1F-7B74-36A4-AA69-9171B025A4B6}"/>
               </a:ext>
             </a:extLst>
           </p:cNvPr>
@@ -19352,7 +19043,7 @@
           <p:cNvPr id="2" name="Título 1">
             <a:extLst>
               <a:ext uri="{FF2B5EF4-FFF2-40B4-BE49-F238E27FC236}">
-                <a16:creationId xmlns:a16="http://schemas.microsoft.com/office/drawing/2014/main" xmlns="" id="{5D929962-9BFC-4174-AB35-CC23FA013168}"/>
+                <a16:creationId xmlns="" xmlns:a16="http://schemas.microsoft.com/office/drawing/2014/main" id="{5D929962-9BFC-4174-AB35-CC23FA013168}"/>
               </a:ext>
             </a:extLst>
           </p:cNvPr>
@@ -19383,7 +19074,7 @@
               <p:cNvPr id="3" name="Espaço Reservado para Conteúdo 2">
                 <a:extLst>
                   <a:ext uri="{FF2B5EF4-FFF2-40B4-BE49-F238E27FC236}">
-                    <a16:creationId xmlns:a16="http://schemas.microsoft.com/office/drawing/2014/main" xmlns="" id="{1D38055D-E355-F780-9CA0-0337EA0BE4FD}"/>
+                    <a16:creationId xmlns="" xmlns:a16="http://schemas.microsoft.com/office/drawing/2014/main" id="{1D38055D-E355-F780-9CA0-0337EA0BE4FD}"/>
                   </a:ext>
                 </a:extLst>
               </p:cNvPr>
@@ -19396,8 +19087,8 @@
             </p:nvSpPr>
             <p:spPr>
               <a:xfrm>
-                <a:off x="838200" y="1825625"/>
-                <a:ext cx="11163300" cy="5032375"/>
+                <a:off x="838199" y="1825625"/>
+                <a:ext cx="11353801" cy="5032375"/>
               </a:xfrm>
             </p:spPr>
             <p:txBody>
@@ -19407,7 +19098,7 @@
               <a:lstStyle/>
               <a:p>
                 <a:r>
-                  <a:rPr lang="pt-BR" dirty="0"/>
+                  <a:rPr lang="pt-BR" dirty="0" smtClean="0"/>
                   <a:t>A atualização dos </a:t>
                 </a:r>
                 <a:r>
@@ -20304,6 +19995,48 @@
                         </m:e>
                       </m:d>
                       <m:r>
+                        <a:rPr lang="pt-BR" dirty="0">
+                          <a:latin typeface="Cambria Math" panose="02040503050406030204" pitchFamily="18" charset="0"/>
+                          <a:ea typeface="Cambria Math" panose="02040503050406030204" pitchFamily="18" charset="0"/>
+                        </a:rPr>
+                        <m:t>∈</m:t>
+                      </m:r>
+                      <m:sSup>
+                        <m:sSupPr>
+                          <m:ctrlPr>
+                            <a:rPr lang="pt-BR" i="1" dirty="0">
+                              <a:latin typeface="Cambria Math" panose="02040503050406030204" pitchFamily="18" charset="0"/>
+                              <a:ea typeface="Cambria Math" panose="02040503050406030204" pitchFamily="18" charset="0"/>
+                            </a:rPr>
+                          </m:ctrlPr>
+                        </m:sSupPr>
+                        <m:e>
+                          <m:r>
+                            <a:rPr lang="pt-BR" i="1" dirty="0">
+                              <a:latin typeface="Cambria Math" panose="02040503050406030204" pitchFamily="18" charset="0"/>
+                              <a:ea typeface="Cambria Math" panose="02040503050406030204" pitchFamily="18" charset="0"/>
+                            </a:rPr>
+                            <m:t>ℝ</m:t>
+                          </m:r>
+                        </m:e>
+                        <m:sup>
+                          <m:r>
+                            <a:rPr lang="pt-BR" i="1" dirty="0">
+                              <a:latin typeface="Cambria Math" panose="02040503050406030204" pitchFamily="18" charset="0"/>
+                              <a:ea typeface="Cambria Math" panose="02040503050406030204" pitchFamily="18" charset="0"/>
+                            </a:rPr>
+                            <m:t>𝐾</m:t>
+                          </m:r>
+                          <m:r>
+                            <a:rPr lang="pt-BR" i="1" dirty="0">
+                              <a:latin typeface="Cambria Math" panose="02040503050406030204" pitchFamily="18" charset="0"/>
+                              <a:ea typeface="Cambria Math" panose="02040503050406030204" pitchFamily="18" charset="0"/>
+                            </a:rPr>
+                            <m:t>+1×1</m:t>
+                          </m:r>
+                        </m:sup>
+                      </m:sSup>
+                      <m:r>
                         <a:rPr lang="pt-BR" sz="2400" b="0" i="1" smtClean="0">
                           <a:latin typeface="Cambria Math" panose="02040503050406030204" pitchFamily="18" charset="0"/>
                         </a:rPr>
@@ -20312,7 +20045,7 @@
                     </m:oMath>
                   </m:oMathPara>
                 </a14:m>
-                <a:endParaRPr lang="pt-BR" sz="2400" b="0" i="0" dirty="0">
+                <a:endParaRPr lang="pt-BR" b="0" i="0" dirty="0">
                   <a:latin typeface="Calibri" panose="020F0502020204030204" pitchFamily="34" charset="0"/>
                 </a:endParaRPr>
               </a:p>
@@ -20542,7 +20275,7 @@
               <p:cNvPr id="3" name="Espaço Reservado para Conteúdo 2">
                 <a:extLst>
                   <a:ext uri="{FF2B5EF4-FFF2-40B4-BE49-F238E27FC236}">
-                    <a16:creationId xmlns:a16="http://schemas.microsoft.com/office/drawing/2014/main" id="{1D38055D-E355-F780-9CA0-0337EA0BE4FD}"/>
+                    <a16:creationId xmlns:a16="http://schemas.microsoft.com/office/drawing/2014/main" xmlns="" xmlns:a14="http://schemas.microsoft.com/office/drawing/2010/main" id="{1D38055D-E355-F780-9CA0-0337EA0BE4FD}"/>
                   </a:ext>
                 </a:extLst>
               </p:cNvPr>
@@ -20555,13 +20288,13 @@
             </p:nvSpPr>
             <p:spPr>
               <a:xfrm>
-                <a:off x="838200" y="1825625"/>
-                <a:ext cx="11163300" cy="5032375"/>
+                <a:off x="838199" y="1825625"/>
+                <a:ext cx="11353801" cy="5032375"/>
               </a:xfrm>
-              <a:blipFill>
+              <a:blipFill rotWithShape="0">
                 <a:blip r:embed="rId3"/>
                 <a:stretch>
-                  <a:fillRect l="-1147" t="-1695"/>
+                  <a:fillRect l="-1074" t="-1695" r="-1396"/>
                 </a:stretch>
               </a:blipFill>
             </p:spPr>
@@ -20570,7 +20303,7 @@
               <a:lstStyle/>
               <a:p>
                 <a:r>
-                  <a:rPr lang="en-US">
+                  <a:rPr lang="pt-BR">
                     <a:noFill/>
                   </a:rPr>
                   <a:t> </a:t>
@@ -20615,7 +20348,7 @@
           <p:cNvPr id="2" name="Título 1">
             <a:extLst>
               <a:ext uri="{FF2B5EF4-FFF2-40B4-BE49-F238E27FC236}">
-                <a16:creationId xmlns:a16="http://schemas.microsoft.com/office/drawing/2014/main" xmlns="" id="{01D0947A-594D-A8D5-95F3-38EB04C6BDB6}"/>
+                <a16:creationId xmlns="" xmlns:a16="http://schemas.microsoft.com/office/drawing/2014/main" id="{01D0947A-594D-A8D5-95F3-38EB04C6BDB6}"/>
               </a:ext>
             </a:extLst>
           </p:cNvPr>
@@ -20649,7 +20382,7 @@
               <p:cNvPr id="3" name="Espaço Reservado para Conteúdo 2">
                 <a:extLst>
                   <a:ext uri="{FF2B5EF4-FFF2-40B4-BE49-F238E27FC236}">
-                    <a16:creationId xmlns:a16="http://schemas.microsoft.com/office/drawing/2014/main" xmlns="" id="{DDBA288E-BBB8-E157-840C-AA685AD7D65C}"/>
+                    <a16:creationId xmlns="" xmlns:a16="http://schemas.microsoft.com/office/drawing/2014/main" id="{DDBA288E-BBB8-E157-840C-AA685AD7D65C}"/>
                   </a:ext>
                 </a:extLst>
               </p:cNvPr>
@@ -20663,7 +20396,7 @@
             <p:spPr>
               <a:xfrm>
                 <a:off x="838200" y="1840864"/>
-                <a:ext cx="11353800" cy="5032375"/>
+                <a:ext cx="11240729" cy="5032375"/>
               </a:xfrm>
             </p:spPr>
             <p:txBody>
@@ -21186,6 +20919,55 @@
                         </m:e>
                       </m:d>
                       <m:r>
+                        <a:rPr lang="pt-BR" dirty="0">
+                          <a:latin typeface="Cambria Math" panose="02040503050406030204" pitchFamily="18" charset="0"/>
+                          <a:ea typeface="Cambria Math" panose="02040503050406030204" pitchFamily="18" charset="0"/>
+                        </a:rPr>
+                        <m:t>∈</m:t>
+                      </m:r>
+                      <m:sSup>
+                        <m:sSupPr>
+                          <m:ctrlPr>
+                            <a:rPr lang="pt-BR" i="1" dirty="0">
+                              <a:latin typeface="Cambria Math" panose="02040503050406030204" pitchFamily="18" charset="0"/>
+                              <a:ea typeface="Cambria Math" panose="02040503050406030204" pitchFamily="18" charset="0"/>
+                            </a:rPr>
+                          </m:ctrlPr>
+                        </m:sSupPr>
+                        <m:e>
+                          <m:r>
+                            <a:rPr lang="pt-BR" i="1" dirty="0">
+                              <a:latin typeface="Cambria Math" panose="02040503050406030204" pitchFamily="18" charset="0"/>
+                              <a:ea typeface="Cambria Math" panose="02040503050406030204" pitchFamily="18" charset="0"/>
+                            </a:rPr>
+                            <m:t>ℝ</m:t>
+                          </m:r>
+                        </m:e>
+                        <m:sup>
+                          <m:r>
+                            <a:rPr lang="pt-BR" i="1" dirty="0">
+                              <a:latin typeface="Cambria Math" panose="02040503050406030204" pitchFamily="18" charset="0"/>
+                              <a:ea typeface="Cambria Math" panose="02040503050406030204" pitchFamily="18" charset="0"/>
+                            </a:rPr>
+                            <m:t>𝐾</m:t>
+                          </m:r>
+                          <m:r>
+                            <a:rPr lang="pt-BR" i="1" dirty="0">
+                              <a:latin typeface="Cambria Math" panose="02040503050406030204" pitchFamily="18" charset="0"/>
+                              <a:ea typeface="Cambria Math" panose="02040503050406030204" pitchFamily="18" charset="0"/>
+                            </a:rPr>
+                            <m:t>+1×</m:t>
+                          </m:r>
+                          <m:r>
+                            <a:rPr lang="pt-BR" i="1" dirty="0">
+                              <a:latin typeface="Cambria Math" panose="02040503050406030204" pitchFamily="18" charset="0"/>
+                              <a:ea typeface="Cambria Math" panose="02040503050406030204" pitchFamily="18" charset="0"/>
+                            </a:rPr>
+                            <m:t>𝑄</m:t>
+                          </m:r>
+                        </m:sup>
+                      </m:sSup>
+                      <m:r>
                         <a:rPr lang="pt-BR" sz="2800" b="0" i="1" smtClean="0">
                           <a:latin typeface="Cambria Math" panose="02040503050406030204" pitchFamily="18" charset="0"/>
                         </a:rPr>
@@ -21291,7 +21073,15 @@
                 </a14:m>
                 <a:r>
                   <a:rPr lang="pt-BR" dirty="0"/>
-                  <a:t> são matrizes contendendo em cada linha os vetores </a:t>
+                  <a:t> são matrizes </a:t>
+                </a:r>
+                <a:r>
+                  <a:rPr lang="pt-BR" dirty="0" smtClean="0"/>
+                  <a:t>contendo </a:t>
+                </a:r>
+                <a:r>
+                  <a:rPr lang="pt-BR" dirty="0"/>
+                  <a:t>em cada linha os vetores </a:t>
                 </a:r>
                 <a14:m>
                   <m:oMath xmlns:m="http://schemas.openxmlformats.org/officeDocument/2006/math">
@@ -21438,7 +21228,7 @@
               <p:cNvPr id="3" name="Espaço Reservado para Conteúdo 2">
                 <a:extLst>
                   <a:ext uri="{FF2B5EF4-FFF2-40B4-BE49-F238E27FC236}">
-                    <a16:creationId xmlns="" xmlns:a16="http://schemas.microsoft.com/office/drawing/2014/main" xmlns:a14="http://schemas.microsoft.com/office/drawing/2010/main" id="{DDBA288E-BBB8-E157-840C-AA685AD7D65C}"/>
+                    <a16:creationId xmlns:a16="http://schemas.microsoft.com/office/drawing/2014/main" xmlns="" xmlns:a14="http://schemas.microsoft.com/office/drawing/2010/main" id="{DDBA288E-BBB8-E157-840C-AA685AD7D65C}"/>
                   </a:ext>
                 </a:extLst>
               </p:cNvPr>
@@ -21452,12 +21242,12 @@
             <p:spPr>
               <a:xfrm>
                 <a:off x="838200" y="1840864"/>
-                <a:ext cx="11353800" cy="5032375"/>
+                <a:ext cx="11240729" cy="5032375"/>
               </a:xfrm>
               <a:blipFill rotWithShape="0">
                 <a:blip r:embed="rId3"/>
                 <a:stretch>
-                  <a:fillRect l="-1128" r="-1557" b="-848"/>
+                  <a:fillRect l="-1139" r="-1628" b="-848"/>
                 </a:stretch>
               </a:blipFill>
             </p:spPr>
@@ -21511,7 +21301,7 @@
           <p:cNvPr id="2" name="Título 1">
             <a:extLst>
               <a:ext uri="{FF2B5EF4-FFF2-40B4-BE49-F238E27FC236}">
-                <a16:creationId xmlns:a16="http://schemas.microsoft.com/office/drawing/2014/main" xmlns="" id="{E0F1FD81-6095-2AF0-8691-34E55B8A93B5}"/>
+                <a16:creationId xmlns="" xmlns:a16="http://schemas.microsoft.com/office/drawing/2014/main" id="{E0F1FD81-6095-2AF0-8691-34E55B8A93B5}"/>
               </a:ext>
             </a:extLst>
           </p:cNvPr>
@@ -21545,7 +21335,7 @@
               <p:cNvPr id="3" name="Espaço Reservado para Conteúdo 2">
                 <a:extLst>
                   <a:ext uri="{FF2B5EF4-FFF2-40B4-BE49-F238E27FC236}">
-                    <a16:creationId xmlns:a16="http://schemas.microsoft.com/office/drawing/2014/main" xmlns="" id="{BB734B24-DA50-860B-5D55-C33F6F451B6F}"/>
+                    <a16:creationId xmlns="" xmlns:a16="http://schemas.microsoft.com/office/drawing/2014/main" id="{BB734B24-DA50-860B-5D55-C33F6F451B6F}"/>
                   </a:ext>
                 </a:extLst>
               </p:cNvPr>
@@ -21590,7 +21380,31 @@
                       <a:schemeClr val="tx1"/>
                     </a:solidFill>
                   </a:rPr>
-                  <a:t>, o classificador atribui ao exemplo de entrada, </a:t>
+                  <a:t>, o </a:t>
+                </a:r>
+                <a:r>
+                  <a:rPr lang="pt-BR" dirty="0" err="1" smtClean="0">
+                    <a:solidFill>
+                      <a:schemeClr val="tx1"/>
+                    </a:solidFill>
+                  </a:rPr>
+                  <a:t>regressor</a:t>
+                </a:r>
+                <a:r>
+                  <a:rPr lang="pt-BR" dirty="0" smtClean="0">
+                    <a:solidFill>
+                      <a:schemeClr val="tx1"/>
+                    </a:solidFill>
+                  </a:rPr>
+                  <a:t> atribui </a:t>
+                </a:r>
+                <a:r>
+                  <a:rPr lang="pt-BR" dirty="0">
+                    <a:solidFill>
+                      <a:schemeClr val="tx1"/>
+                    </a:solidFill>
+                  </a:rPr>
+                  <a:t>ao exemplo de entrada, </a:t>
                 </a:r>
                 <a14:m>
                   <m:oMath xmlns:m="http://schemas.openxmlformats.org/officeDocument/2006/math">
@@ -21692,7 +21506,15 @@
                       <a:schemeClr val="tx1"/>
                     </a:solidFill>
                   </a:rPr>
-                  <a:t>, da função hipótese com maior valor:</a:t>
+                  <a:t>, da função hipótese com maior </a:t>
+                </a:r>
+                <a:r>
+                  <a:rPr lang="pt-BR" dirty="0" smtClean="0">
+                    <a:solidFill>
+                      <a:schemeClr val="tx1"/>
+                    </a:solidFill>
+                  </a:rPr>
+                  <a:t>valor</a:t>
                 </a:r>
                 <a:endParaRPr lang="pt-BR" sz="1600" dirty="0">
                   <a:solidFill>
@@ -22050,7 +21872,7 @@
               <p:cNvPr id="3" name="Espaço Reservado para Conteúdo 2">
                 <a:extLst>
                   <a:ext uri="{FF2B5EF4-FFF2-40B4-BE49-F238E27FC236}">
-                    <a16:creationId xmlns:a16="http://schemas.microsoft.com/office/drawing/2014/main" id="{BB734B24-DA50-860B-5D55-C33F6F451B6F}"/>
+                    <a16:creationId xmlns="" xmlns:a16="http://schemas.microsoft.com/office/drawing/2014/main" xmlns:a14="http://schemas.microsoft.com/office/drawing/2010/main" id="{BB734B24-DA50-860B-5D55-C33F6F451B6F}"/>
                   </a:ext>
                 </a:extLst>
               </p:cNvPr>
@@ -22066,10 +21888,10 @@
                 <a:off x="6096000" y="1825624"/>
                 <a:ext cx="5930899" cy="5032375"/>
               </a:xfrm>
-              <a:blipFill>
+              <a:blipFill rotWithShape="0">
                 <a:blip r:embed="rId3"/>
                 <a:stretch>
-                  <a:fillRect l="-1850" t="-1937" r="-719"/>
+                  <a:fillRect l="-1850" t="-1937" r="-3186"/>
                 </a:stretch>
               </a:blipFill>
             </p:spPr>
@@ -22078,7 +21900,7 @@
               <a:lstStyle/>
               <a:p>
                 <a:r>
-                  <a:rPr lang="en-US">
+                  <a:rPr lang="pt-BR">
                     <a:noFill/>
                   </a:rPr>
                   <a:t> </a:t>
@@ -22093,7 +21915,7 @@
           <p:cNvPr id="4" name="Imagem 5">
             <a:extLst>
               <a:ext uri="{FF2B5EF4-FFF2-40B4-BE49-F238E27FC236}">
-                <a16:creationId xmlns:a16="http://schemas.microsoft.com/office/drawing/2014/main" xmlns="" id="{535159CB-11DC-74B8-5C5F-D571CD018327}"/>
+                <a16:creationId xmlns="" xmlns:a16="http://schemas.microsoft.com/office/drawing/2014/main" id="{535159CB-11DC-74B8-5C5F-D571CD018327}"/>
               </a:ext>
             </a:extLst>
           </p:cNvPr>
@@ -22159,7 +21981,7 @@
           <p:cNvPr id="2" name="Título 1">
             <a:extLst>
               <a:ext uri="{FF2B5EF4-FFF2-40B4-BE49-F238E27FC236}">
-                <a16:creationId xmlns:a16="http://schemas.microsoft.com/office/drawing/2014/main" xmlns="" id="{FC175046-E9DF-FCC8-C62B-B00332089713}"/>
+                <a16:creationId xmlns="" xmlns:a16="http://schemas.microsoft.com/office/drawing/2014/main" id="{FC175046-E9DF-FCC8-C62B-B00332089713}"/>
               </a:ext>
             </a:extLst>
           </p:cNvPr>
@@ -22193,7 +22015,7 @@
               <p:cNvPr id="3" name="Espaço Reservado para Conteúdo 2">
                 <a:extLst>
                   <a:ext uri="{FF2B5EF4-FFF2-40B4-BE49-F238E27FC236}">
-                    <a16:creationId xmlns:a16="http://schemas.microsoft.com/office/drawing/2014/main" xmlns="" id="{24721BB7-DBA3-D8BF-7F98-ED91BD59DAEC}"/>
+                    <a16:creationId xmlns="" xmlns:a16="http://schemas.microsoft.com/office/drawing/2014/main" id="{24721BB7-DBA3-D8BF-7F98-ED91BD59DAEC}"/>
                   </a:ext>
                 </a:extLst>
               </p:cNvPr>
@@ -22501,7 +22323,7 @@
           <p:cNvPr id="6" name="Imagem 5">
             <a:extLst>
               <a:ext uri="{FF2B5EF4-FFF2-40B4-BE49-F238E27FC236}">
-                <a16:creationId xmlns:a16="http://schemas.microsoft.com/office/drawing/2014/main" xmlns="" id="{FF78CF76-EB26-3FAE-0391-E452288FA28E}"/>
+                <a16:creationId xmlns="" xmlns:a16="http://schemas.microsoft.com/office/drawing/2014/main" id="{FF78CF76-EB26-3FAE-0391-E452288FA28E}"/>
               </a:ext>
             </a:extLst>
           </p:cNvPr>
@@ -22537,7 +22359,7 @@
           <p:cNvPr id="5" name="Rectangle 2">
             <a:extLst>
               <a:ext uri="{FF2B5EF4-FFF2-40B4-BE49-F238E27FC236}">
-                <a16:creationId xmlns="" xmlns:a16="http://schemas.microsoft.com/office/drawing/2014/main" id="{0357C04D-3666-45D0-A263-597819F48D09}"/>
+                <a16:creationId xmlns:a16="http://schemas.microsoft.com/office/drawing/2014/main" xmlns="" id="{0357C04D-3666-45D0-A263-597819F48D09}"/>
               </a:ext>
             </a:extLst>
           </p:cNvPr>
@@ -22765,7 +22587,7 @@
           <p:cNvPr id="4" name="Título 1">
             <a:extLst>
               <a:ext uri="{FF2B5EF4-FFF2-40B4-BE49-F238E27FC236}">
-                <a16:creationId xmlns="" xmlns:a16="http://schemas.microsoft.com/office/drawing/2014/main" id="{32666AC8-2E17-4DB4-B0F5-60C640CCFD2E}"/>
+                <a16:creationId xmlns:a16="http://schemas.microsoft.com/office/drawing/2014/main" xmlns="" id="{32666AC8-2E17-4DB4-B0F5-60C640CCFD2E}"/>
               </a:ext>
             </a:extLst>
           </p:cNvPr>
@@ -23039,7 +22861,7 @@
           <p:cNvPr id="4" name="Picture 2" descr="Ana Barros (@anathinker) | Twitter">
             <a:extLst>
               <a:ext uri="{FF2B5EF4-FFF2-40B4-BE49-F238E27FC236}">
-                <a16:creationId xmlns="" xmlns:a16="http://schemas.microsoft.com/office/drawing/2014/main" id="{AF3F0044-4F7D-98F6-34C1-8351487DFDAA}"/>
+                <a16:creationId xmlns:a16="http://schemas.microsoft.com/office/drawing/2014/main" xmlns="" id="{AF3F0044-4F7D-98F6-34C1-8351487DFDAA}"/>
               </a:ext>
             </a:extLst>
           </p:cNvPr>
@@ -23086,7 +22908,7 @@
           <p:cNvPr id="5" name="Picture 6" descr="Analyzing Text Classification Techniques on Youtube Data">
             <a:extLst>
               <a:ext uri="{FF2B5EF4-FFF2-40B4-BE49-F238E27FC236}">
-                <a16:creationId xmlns="" xmlns:a16="http://schemas.microsoft.com/office/drawing/2014/main" id="{0E6041F8-AB14-54C0-C790-0288A3AC8FBA}"/>
+                <a16:creationId xmlns:a16="http://schemas.microsoft.com/office/drawing/2014/main" xmlns="" id="{0E6041F8-AB14-54C0-C790-0288A3AC8FBA}"/>
               </a:ext>
             </a:extLst>
           </p:cNvPr>
@@ -23131,7 +22953,7 @@
           <p:cNvPr id="6" name="Picture 2" descr="Sentiment Fig 1">
             <a:extLst>
               <a:ext uri="{FF2B5EF4-FFF2-40B4-BE49-F238E27FC236}">
-                <a16:creationId xmlns="" xmlns:a16="http://schemas.microsoft.com/office/drawing/2014/main" id="{1E7CC96F-55AB-1482-92F6-240F8E2E0D1E}"/>
+                <a16:creationId xmlns:a16="http://schemas.microsoft.com/office/drawing/2014/main" xmlns="" id="{1E7CC96F-55AB-1482-92F6-240F8E2E0D1E}"/>
               </a:ext>
             </a:extLst>
           </p:cNvPr>
@@ -23418,7 +23240,7 @@
           <p:cNvPr id="7" name="Picture 2" descr="Ana Barros (@anathinker) | Twitter">
             <a:extLst>
               <a:ext uri="{FF2B5EF4-FFF2-40B4-BE49-F238E27FC236}">
-                <a16:creationId xmlns="" xmlns:a16="http://schemas.microsoft.com/office/drawing/2014/main" id="{A2D479C7-0684-420F-2CCD-64C3DB79FDAB}"/>
+                <a16:creationId xmlns:a16="http://schemas.microsoft.com/office/drawing/2014/main" xmlns="" id="{A2D479C7-0684-420F-2CCD-64C3DB79FDAB}"/>
               </a:ext>
             </a:extLst>
           </p:cNvPr>
@@ -23465,7 +23287,7 @@
           <p:cNvPr id="8" name="Picture 6" descr="Analyzing Text Classification Techniques on Youtube Data">
             <a:extLst>
               <a:ext uri="{FF2B5EF4-FFF2-40B4-BE49-F238E27FC236}">
-                <a16:creationId xmlns="" xmlns:a16="http://schemas.microsoft.com/office/drawing/2014/main" id="{A59F8A2C-ACDF-09C7-B528-9064CEF3B848}"/>
+                <a16:creationId xmlns:a16="http://schemas.microsoft.com/office/drawing/2014/main" xmlns="" id="{A59F8A2C-ACDF-09C7-B528-9064CEF3B848}"/>
               </a:ext>
             </a:extLst>
           </p:cNvPr>
@@ -23510,7 +23332,7 @@
           <p:cNvPr id="9" name="Picture 2" descr="Sentiment Fig 1">
             <a:extLst>
               <a:ext uri="{FF2B5EF4-FFF2-40B4-BE49-F238E27FC236}">
-                <a16:creationId xmlns="" xmlns:a16="http://schemas.microsoft.com/office/drawing/2014/main" id="{E178FF16-CC3F-C34B-6C8B-874BC4FA61A4}"/>
+                <a16:creationId xmlns:a16="http://schemas.microsoft.com/office/drawing/2014/main" xmlns="" id="{E178FF16-CC3F-C34B-6C8B-874BC4FA61A4}"/>
               </a:ext>
             </a:extLst>
           </p:cNvPr>
@@ -23587,7 +23409,7 @@
           <p:cNvPr id="2" name="Título 1">
             <a:extLst>
               <a:ext uri="{FF2B5EF4-FFF2-40B4-BE49-F238E27FC236}">
-                <a16:creationId xmlns="" xmlns:a16="http://schemas.microsoft.com/office/drawing/2014/main" id="{95206997-C98C-FF52-62A1-725EEA7A8A7E}"/>
+                <a16:creationId xmlns:a16="http://schemas.microsoft.com/office/drawing/2014/main" xmlns="" id="{95206997-C98C-FF52-62A1-725EEA7A8A7E}"/>
               </a:ext>
             </a:extLst>
           </p:cNvPr>
@@ -23617,7 +23439,7 @@
               <p:cNvPr id="3" name="Espaço Reservado para Conteúdo 2">
                 <a:extLst>
                   <a:ext uri="{FF2B5EF4-FFF2-40B4-BE49-F238E27FC236}">
-                    <a16:creationId xmlns="" xmlns:a16="http://schemas.microsoft.com/office/drawing/2014/main" id="{50B99F56-FF18-D044-7799-0502D4F6A5FB}"/>
+                    <a16:creationId xmlns:a16="http://schemas.microsoft.com/office/drawing/2014/main" xmlns="" id="{50B99F56-FF18-D044-7799-0502D4F6A5FB}"/>
                   </a:ext>
                 </a:extLst>
               </p:cNvPr>
@@ -24202,7 +24024,7 @@
           <p:cNvPr id="2" name="Título 1">
             <a:extLst>
               <a:ext uri="{FF2B5EF4-FFF2-40B4-BE49-F238E27FC236}">
-                <a16:creationId xmlns="" xmlns:a16="http://schemas.microsoft.com/office/drawing/2014/main" id="{40D4148F-5E93-6FF0-6B66-AC9E3B82640A}"/>
+                <a16:creationId xmlns:a16="http://schemas.microsoft.com/office/drawing/2014/main" xmlns="" id="{40D4148F-5E93-6FF0-6B66-AC9E3B82640A}"/>
               </a:ext>
             </a:extLst>
           </p:cNvPr>
@@ -24232,7 +24054,7 @@
               <p:cNvPr id="3" name="Espaço Reservado para Conteúdo 2">
                 <a:extLst>
                   <a:ext uri="{FF2B5EF4-FFF2-40B4-BE49-F238E27FC236}">
-                    <a16:creationId xmlns="" xmlns:a16="http://schemas.microsoft.com/office/drawing/2014/main" id="{A4787C4F-F235-6888-5AFF-2CB1361FF6FD}"/>
+                    <a16:creationId xmlns:a16="http://schemas.microsoft.com/office/drawing/2014/main" xmlns="" id="{A4787C4F-F235-6888-5AFF-2CB1361FF6FD}"/>
                   </a:ext>
                 </a:extLst>
               </p:cNvPr>
@@ -25989,7 +25811,7 @@
           <p:cNvPr id="21" name="Mais 7">
             <a:extLst>
               <a:ext uri="{FF2B5EF4-FFF2-40B4-BE49-F238E27FC236}">
-                <a16:creationId xmlns="" xmlns:a16="http://schemas.microsoft.com/office/drawing/2014/main" id="{7B31CAF2-5F3C-E55A-EC75-167BCE74F1F7}"/>
+                <a16:creationId xmlns:a16="http://schemas.microsoft.com/office/drawing/2014/main" xmlns="" id="{7B31CAF2-5F3C-E55A-EC75-167BCE74F1F7}"/>
               </a:ext>
             </a:extLst>
           </p:cNvPr>
@@ -26073,7 +25895,7 @@
           <p:cNvPr id="2" name="Título 1">
             <a:extLst>
               <a:ext uri="{FF2B5EF4-FFF2-40B4-BE49-F238E27FC236}">
-                <a16:creationId xmlns="" xmlns:a16="http://schemas.microsoft.com/office/drawing/2014/main" id="{F625D040-A3FE-41E3-3BD0-3C0548CFEAD3}"/>
+                <a16:creationId xmlns:a16="http://schemas.microsoft.com/office/drawing/2014/main" xmlns="" id="{F625D040-A3FE-41E3-3BD0-3C0548CFEAD3}"/>
               </a:ext>
             </a:extLst>
           </p:cNvPr>
@@ -26103,7 +25925,7 @@
               <p:cNvPr id="3" name="Espaço Reservado para Conteúdo 2">
                 <a:extLst>
                   <a:ext uri="{FF2B5EF4-FFF2-40B4-BE49-F238E27FC236}">
-                    <a16:creationId xmlns="" xmlns:a16="http://schemas.microsoft.com/office/drawing/2014/main" id="{3BAFA38F-B924-7049-765D-660ED8C4845B}"/>
+                    <a16:creationId xmlns:a16="http://schemas.microsoft.com/office/drawing/2014/main" xmlns="" id="{3BAFA38F-B924-7049-765D-660ED8C4845B}"/>
                   </a:ext>
                 </a:extLst>
               </p:cNvPr>
@@ -26868,7 +26690,7 @@
           <p:cNvPr id="2" name="Título 1">
             <a:extLst>
               <a:ext uri="{FF2B5EF4-FFF2-40B4-BE49-F238E27FC236}">
-                <a16:creationId xmlns="" xmlns:a16="http://schemas.microsoft.com/office/drawing/2014/main" id="{685EDE22-7739-3353-3DBC-8480197DC616}"/>
+                <a16:creationId xmlns:a16="http://schemas.microsoft.com/office/drawing/2014/main" xmlns="" id="{685EDE22-7739-3353-3DBC-8480197DC616}"/>
               </a:ext>
             </a:extLst>
           </p:cNvPr>
@@ -26898,7 +26720,7 @@
               <p:cNvPr id="3" name="Espaço Reservado para Conteúdo 2">
                 <a:extLst>
                   <a:ext uri="{FF2B5EF4-FFF2-40B4-BE49-F238E27FC236}">
-                    <a16:creationId xmlns="" xmlns:a16="http://schemas.microsoft.com/office/drawing/2014/main" id="{2145CEE8-2FB2-6EEA-841B-CC93323A97A6}"/>
+                    <a16:creationId xmlns:a16="http://schemas.microsoft.com/office/drawing/2014/main" xmlns="" id="{2145CEE8-2FB2-6EEA-841B-CC93323A97A6}"/>
                   </a:ext>
                 </a:extLst>
               </p:cNvPr>

--- a/slides/T320_Classificação (Parte IV).pptx
+++ b/slides/T320_Classificação (Parte IV).pptx
@@ -368,7 +368,7 @@
           <a:p>
             <a:fld id="{F7E56D9B-79AD-444A-AFED-DEC23408F8B4}" type="slidenum">
               <a:rPr lang="nl-BE" smtClean="0"/>
-              <a:t>‹nº›</a:t>
+              <a:t>‹#›</a:t>
             </a:fld>
             <a:endParaRPr lang="nl-BE"/>
           </a:p>
@@ -625,7 +625,7 @@
           <a:p>
             <a:fld id="{6FC8D850-966F-45A6-8DE7-15B891E7D40D}" type="slidenum">
               <a:rPr lang="pt-BR" smtClean="0"/>
-              <a:t>‹nº›</a:t>
+              <a:t>‹#›</a:t>
             </a:fld>
             <a:endParaRPr lang="pt-BR"/>
           </a:p>
@@ -882,12 +882,8 @@
                   <a:defRPr/>
                 </a:pPr>
                 <a:r>
-                  <a:rPr lang="pt-BR" dirty="0" smtClean="0"/>
-                  <a:t>O </a:t>
-                </a:r>
-                <a:r>
-                  <a:rPr lang="pt-BR" dirty="0"/>
-                  <a:t>somatório de termos exponenciais no denominador </a:t>
+                  <a:rPr lang="pt-BR" dirty="0"/>
+                  <a:t>O somatório de termos exponenciais no denominador </a:t>
                 </a:r>
                 <a:r>
                   <a:rPr lang="pt-BR" b="1" dirty="0">
@@ -921,13 +917,8 @@
                 </a14:m>
                 <a:r>
                   <a:rPr lang="pt-BR" dirty="0"/>
-                  <a:t> saídas seja igual a </a:t>
-                </a:r>
-                <a:r>
-                  <a:rPr lang="pt-BR" dirty="0" smtClean="0"/>
-                  <a:t>1.</a:t>
-                </a:r>
-                <a:endParaRPr lang="pt-BR" dirty="0"/>
+                  <a:t> saídas seja igual a 1.</a:t>
+                </a:r>
               </a:p>
               <a:p>
                 <a:pPr algn="l"/>
@@ -4670,13 +4661,8 @@
           <a:p>
             <a:r>
               <a:rPr lang="pt-BR" dirty="0"/>
-              <a:t>Exemplo: </a:t>
-            </a:r>
-            <a:r>
-              <a:rPr lang="pt-BR" dirty="0" smtClean="0"/>
-              <a:t>https://colab.research.google.com/github/zz4fap/t320_aprendizado_de_maquina/blob/main/notebooks/classificação/ClassificationOfFourClassesWithOvAandOvO_SciKitLearn.ipynb</a:t>
-            </a:r>
-            <a:endParaRPr lang="pt-BR" dirty="0"/>
+              <a:t>Exemplo: https://colab.research.google.com/github/zz4fap/t320_aprendizado_de_maquina/blob/main/notebooks/classificação/ClassificationOfFourClassesWithOvAandOvO_SciKitLearn.ipynb</a:t>
+            </a:r>
           </a:p>
           <a:p>
             <a:endParaRPr lang="pt-BR" dirty="0"/>
@@ -5212,18 +5198,6 @@
               </a:rPr>
               <a:t>Classificação de documentos por tópicos</a:t>
             </a:r>
-            <a:r>
-              <a:rPr lang="pt-BR" sz="1200" b="0" i="0" kern="1200" dirty="0">
-                <a:solidFill>
-                  <a:schemeClr val="tx1"/>
-                </a:solidFill>
-                <a:effectLst/>
-                <a:latin typeface="+mn-lt"/>
-                <a:ea typeface="+mn-ea"/>
-                <a:cs typeface="+mn-cs"/>
-              </a:rPr>
-              <a:t/>
-            </a:r>
             <a:br>
               <a:rPr lang="pt-BR" sz="1200" b="0" i="0" kern="1200" dirty="0">
                 <a:solidFill>
@@ -5261,18 +5235,6 @@
               </a:rPr>
               <a:t>Reconhecimento de objetos em imagens</a:t>
             </a:r>
-            <a:r>
-              <a:rPr lang="pt-BR" sz="1200" b="0" i="0" kern="1200" dirty="0">
-                <a:solidFill>
-                  <a:schemeClr val="tx1"/>
-                </a:solidFill>
-                <a:effectLst/>
-                <a:latin typeface="+mn-lt"/>
-                <a:ea typeface="+mn-ea"/>
-                <a:cs typeface="+mn-cs"/>
-              </a:rPr>
-              <a:t/>
-            </a:r>
             <a:br>
               <a:rPr lang="pt-BR" sz="1200" b="0" i="0" kern="1200" dirty="0">
                 <a:solidFill>
@@ -5310,18 +5272,6 @@
               </a:rPr>
               <a:t>Sistema de recomendação de filmes por gêneros</a:t>
             </a:r>
-            <a:r>
-              <a:rPr lang="pt-BR" sz="1200" b="0" i="0" kern="1200" dirty="0">
-                <a:solidFill>
-                  <a:schemeClr val="tx1"/>
-                </a:solidFill>
-                <a:effectLst/>
-                <a:latin typeface="+mn-lt"/>
-                <a:ea typeface="+mn-ea"/>
-                <a:cs typeface="+mn-cs"/>
-              </a:rPr>
-              <a:t/>
-            </a:r>
             <a:br>
               <a:rPr lang="pt-BR" sz="1200" b="0" i="0" kern="1200" dirty="0">
                 <a:solidFill>
@@ -5359,18 +5309,6 @@
               </a:rPr>
               <a:t>Diagnóstico médico</a:t>
             </a:r>
-            <a:r>
-              <a:rPr lang="pt-BR" sz="1200" b="0" i="0" kern="1200" dirty="0">
-                <a:solidFill>
-                  <a:schemeClr val="tx1"/>
-                </a:solidFill>
-                <a:effectLst/>
-                <a:latin typeface="+mn-lt"/>
-                <a:ea typeface="+mn-ea"/>
-                <a:cs typeface="+mn-cs"/>
-              </a:rPr>
-              <a:t/>
-            </a:r>
             <a:br>
               <a:rPr lang="pt-BR" sz="1200" b="0" i="0" kern="1200" dirty="0">
                 <a:solidFill>
@@ -5408,18 +5346,6 @@
               </a:rPr>
               <a:t>Análise de sentimentos em texto</a:t>
             </a:r>
-            <a:r>
-              <a:rPr lang="pt-BR" sz="1200" b="0" i="0" kern="1200" dirty="0">
-                <a:solidFill>
-                  <a:schemeClr val="tx1"/>
-                </a:solidFill>
-                <a:effectLst/>
-                <a:latin typeface="+mn-lt"/>
-                <a:ea typeface="+mn-ea"/>
-                <a:cs typeface="+mn-cs"/>
-              </a:rPr>
-              <a:t/>
-            </a:r>
             <a:br>
               <a:rPr lang="pt-BR" sz="1200" b="0" i="0" kern="1200" dirty="0">
                 <a:solidFill>
@@ -5469,18 +5395,6 @@
               </a:rPr>
               <a:t> em produtos de e-commerce</a:t>
             </a:r>
-            <a:r>
-              <a:rPr lang="pt-BR" sz="1200" b="0" i="0" kern="1200" dirty="0">
-                <a:solidFill>
-                  <a:schemeClr val="tx1"/>
-                </a:solidFill>
-                <a:effectLst/>
-                <a:latin typeface="+mn-lt"/>
-                <a:ea typeface="+mn-ea"/>
-                <a:cs typeface="+mn-cs"/>
-              </a:rPr>
-              <a:t/>
-            </a:r>
             <a:br>
               <a:rPr lang="pt-BR" sz="1200" b="0" i="0" kern="1200" dirty="0">
                 <a:solidFill>
@@ -5542,18 +5456,6 @@
               </a:rPr>
               <a:t>Classificação de músicas por gênero</a:t>
             </a:r>
-            <a:r>
-              <a:rPr lang="pt-BR" sz="1200" b="0" i="0" kern="1200" dirty="0">
-                <a:solidFill>
-                  <a:schemeClr val="tx1"/>
-                </a:solidFill>
-                <a:effectLst/>
-                <a:latin typeface="+mn-lt"/>
-                <a:ea typeface="+mn-ea"/>
-                <a:cs typeface="+mn-cs"/>
-              </a:rPr>
-              <a:t/>
-            </a:r>
             <a:br>
               <a:rPr lang="pt-BR" sz="1200" b="0" i="0" kern="1200" dirty="0">
                 <a:solidFill>
@@ -5579,17 +5481,9 @@
             </a:r>
           </a:p>
           <a:p>
-            <a:r>
-              <a:rPr lang="pt-BR" dirty="0"/>
-              <a:t/>
-            </a:r>
             <a:br>
               <a:rPr lang="pt-BR" dirty="0"/>
             </a:br>
-            <a:r>
-              <a:rPr lang="pt-BR" dirty="0"/>
-              <a:t/>
-            </a:r>
             <a:br>
               <a:rPr lang="pt-BR" dirty="0"/>
             </a:br>
@@ -6065,7 +5959,7 @@
           <p:cNvPr id="2" name="Título 1">
             <a:extLst>
               <a:ext uri="{FF2B5EF4-FFF2-40B4-BE49-F238E27FC236}">
-                <a16:creationId xmlns:a16="http://schemas.microsoft.com/office/drawing/2014/main" xmlns="" id="{1DB9B4FF-B06E-403C-A326-BDC64D8FF94E}"/>
+                <a16:creationId xmlns:a16="http://schemas.microsoft.com/office/drawing/2014/main" id="{1DB9B4FF-B06E-403C-A326-BDC64D8FF94E}"/>
               </a:ext>
             </a:extLst>
           </p:cNvPr>
@@ -6102,7 +5996,7 @@
           <p:cNvPr id="3" name="Subtítulo 2">
             <a:extLst>
               <a:ext uri="{FF2B5EF4-FFF2-40B4-BE49-F238E27FC236}">
-                <a16:creationId xmlns:a16="http://schemas.microsoft.com/office/drawing/2014/main" xmlns="" id="{247BDFCE-746E-45BF-A319-4733D58D1632}"/>
+                <a16:creationId xmlns:a16="http://schemas.microsoft.com/office/drawing/2014/main" id="{247BDFCE-746E-45BF-A319-4733D58D1632}"/>
               </a:ext>
             </a:extLst>
           </p:cNvPr>
@@ -6172,7 +6066,7 @@
           <p:cNvPr id="4" name="Espaço Reservado para Data 3">
             <a:extLst>
               <a:ext uri="{FF2B5EF4-FFF2-40B4-BE49-F238E27FC236}">
-                <a16:creationId xmlns:a16="http://schemas.microsoft.com/office/drawing/2014/main" xmlns="" id="{9EDE2778-5372-4104-B96D-968184DA8288}"/>
+                <a16:creationId xmlns:a16="http://schemas.microsoft.com/office/drawing/2014/main" id="{9EDE2778-5372-4104-B96D-968184DA8288}"/>
               </a:ext>
             </a:extLst>
           </p:cNvPr>
@@ -6201,7 +6095,7 @@
           <p:cNvPr id="5" name="Espaço Reservado para Rodapé 4">
             <a:extLst>
               <a:ext uri="{FF2B5EF4-FFF2-40B4-BE49-F238E27FC236}">
-                <a16:creationId xmlns:a16="http://schemas.microsoft.com/office/drawing/2014/main" xmlns="" id="{C1DD0F41-C861-4051-988D-3024A37A4B93}"/>
+                <a16:creationId xmlns:a16="http://schemas.microsoft.com/office/drawing/2014/main" id="{C1DD0F41-C861-4051-988D-3024A37A4B93}"/>
               </a:ext>
             </a:extLst>
           </p:cNvPr>
@@ -6226,7 +6120,7 @@
           <p:cNvPr id="6" name="Espaço Reservado para Número de Slide 5">
             <a:extLst>
               <a:ext uri="{FF2B5EF4-FFF2-40B4-BE49-F238E27FC236}">
-                <a16:creationId xmlns:a16="http://schemas.microsoft.com/office/drawing/2014/main" xmlns="" id="{07E5967E-D980-431A-A5DB-3F0C5030A81E}"/>
+                <a16:creationId xmlns:a16="http://schemas.microsoft.com/office/drawing/2014/main" id="{07E5967E-D980-431A-A5DB-3F0C5030A81E}"/>
               </a:ext>
             </a:extLst>
           </p:cNvPr>
@@ -6244,7 +6138,7 @@
           <a:p>
             <a:fld id="{1A7E88B7-70CE-4035-AE73-13FA6FB985D4}" type="slidenum">
               <a:rPr lang="pt-BR" smtClean="0"/>
-              <a:t>‹nº›</a:t>
+              <a:t>‹#›</a:t>
             </a:fld>
             <a:endParaRPr lang="pt-BR"/>
           </a:p>
@@ -6285,7 +6179,7 @@
           <p:cNvPr id="2" name="Título 1">
             <a:extLst>
               <a:ext uri="{FF2B5EF4-FFF2-40B4-BE49-F238E27FC236}">
-                <a16:creationId xmlns:a16="http://schemas.microsoft.com/office/drawing/2014/main" xmlns="" id="{9036C49F-3E68-4175-81BA-3C3FEE44308A}"/>
+                <a16:creationId xmlns:a16="http://schemas.microsoft.com/office/drawing/2014/main" id="{9036C49F-3E68-4175-81BA-3C3FEE44308A}"/>
               </a:ext>
             </a:extLst>
           </p:cNvPr>
@@ -6313,7 +6207,7 @@
           <p:cNvPr id="3" name="Espaço Reservado para Texto Vertical 2">
             <a:extLst>
               <a:ext uri="{FF2B5EF4-FFF2-40B4-BE49-F238E27FC236}">
-                <a16:creationId xmlns:a16="http://schemas.microsoft.com/office/drawing/2014/main" xmlns="" id="{426FA736-3DD3-4D4E-B57B-BBE1D8F7D424}"/>
+                <a16:creationId xmlns:a16="http://schemas.microsoft.com/office/drawing/2014/main" id="{426FA736-3DD3-4D4E-B57B-BBE1D8F7D424}"/>
               </a:ext>
             </a:extLst>
           </p:cNvPr>
@@ -6370,7 +6264,7 @@
           <p:cNvPr id="4" name="Espaço Reservado para Data 3">
             <a:extLst>
               <a:ext uri="{FF2B5EF4-FFF2-40B4-BE49-F238E27FC236}">
-                <a16:creationId xmlns:a16="http://schemas.microsoft.com/office/drawing/2014/main" xmlns="" id="{99E8855C-D8FD-48F6-B14E-861E0DE4D915}"/>
+                <a16:creationId xmlns:a16="http://schemas.microsoft.com/office/drawing/2014/main" id="{99E8855C-D8FD-48F6-B14E-861E0DE4D915}"/>
               </a:ext>
             </a:extLst>
           </p:cNvPr>
@@ -6399,7 +6293,7 @@
           <p:cNvPr id="5" name="Espaço Reservado para Rodapé 4">
             <a:extLst>
               <a:ext uri="{FF2B5EF4-FFF2-40B4-BE49-F238E27FC236}">
-                <a16:creationId xmlns:a16="http://schemas.microsoft.com/office/drawing/2014/main" xmlns="" id="{97C0BB88-2F21-42A5-ACFF-83DA47F2D340}"/>
+                <a16:creationId xmlns:a16="http://schemas.microsoft.com/office/drawing/2014/main" id="{97C0BB88-2F21-42A5-ACFF-83DA47F2D340}"/>
               </a:ext>
             </a:extLst>
           </p:cNvPr>
@@ -6424,7 +6318,7 @@
           <p:cNvPr id="6" name="Espaço Reservado para Número de Slide 5">
             <a:extLst>
               <a:ext uri="{FF2B5EF4-FFF2-40B4-BE49-F238E27FC236}">
-                <a16:creationId xmlns:a16="http://schemas.microsoft.com/office/drawing/2014/main" xmlns="" id="{6CB462B3-1F22-4C05-B4B8-7A279FB7D5E9}"/>
+                <a16:creationId xmlns:a16="http://schemas.microsoft.com/office/drawing/2014/main" id="{6CB462B3-1F22-4C05-B4B8-7A279FB7D5E9}"/>
               </a:ext>
             </a:extLst>
           </p:cNvPr>
@@ -6442,7 +6336,7 @@
           <a:p>
             <a:fld id="{1A7E88B7-70CE-4035-AE73-13FA6FB985D4}" type="slidenum">
               <a:rPr lang="pt-BR" smtClean="0"/>
-              <a:t>‹nº›</a:t>
+              <a:t>‹#›</a:t>
             </a:fld>
             <a:endParaRPr lang="pt-BR"/>
           </a:p>
@@ -6483,7 +6377,7 @@
           <p:cNvPr id="2" name="Título Vertical 1">
             <a:extLst>
               <a:ext uri="{FF2B5EF4-FFF2-40B4-BE49-F238E27FC236}">
-                <a16:creationId xmlns:a16="http://schemas.microsoft.com/office/drawing/2014/main" xmlns="" id="{EAEAB728-701C-4207-A9D5-23FF45C60502}"/>
+                <a16:creationId xmlns:a16="http://schemas.microsoft.com/office/drawing/2014/main" id="{EAEAB728-701C-4207-A9D5-23FF45C60502}"/>
               </a:ext>
             </a:extLst>
           </p:cNvPr>
@@ -6516,7 +6410,7 @@
           <p:cNvPr id="3" name="Espaço Reservado para Texto Vertical 2">
             <a:extLst>
               <a:ext uri="{FF2B5EF4-FFF2-40B4-BE49-F238E27FC236}">
-                <a16:creationId xmlns:a16="http://schemas.microsoft.com/office/drawing/2014/main" xmlns="" id="{BA8C8CCF-7823-480A-9A19-0F664DD17E3B}"/>
+                <a16:creationId xmlns:a16="http://schemas.microsoft.com/office/drawing/2014/main" id="{BA8C8CCF-7823-480A-9A19-0F664DD17E3B}"/>
               </a:ext>
             </a:extLst>
           </p:cNvPr>
@@ -6578,7 +6472,7 @@
           <p:cNvPr id="4" name="Espaço Reservado para Data 3">
             <a:extLst>
               <a:ext uri="{FF2B5EF4-FFF2-40B4-BE49-F238E27FC236}">
-                <a16:creationId xmlns:a16="http://schemas.microsoft.com/office/drawing/2014/main" xmlns="" id="{721D5734-7B1F-425D-942F-6EB73344027C}"/>
+                <a16:creationId xmlns:a16="http://schemas.microsoft.com/office/drawing/2014/main" id="{721D5734-7B1F-425D-942F-6EB73344027C}"/>
               </a:ext>
             </a:extLst>
           </p:cNvPr>
@@ -6607,7 +6501,7 @@
           <p:cNvPr id="5" name="Espaço Reservado para Rodapé 4">
             <a:extLst>
               <a:ext uri="{FF2B5EF4-FFF2-40B4-BE49-F238E27FC236}">
-                <a16:creationId xmlns:a16="http://schemas.microsoft.com/office/drawing/2014/main" xmlns="" id="{1E1AAEAC-F08D-45FE-89EC-B1B349A868C9}"/>
+                <a16:creationId xmlns:a16="http://schemas.microsoft.com/office/drawing/2014/main" id="{1E1AAEAC-F08D-45FE-89EC-B1B349A868C9}"/>
               </a:ext>
             </a:extLst>
           </p:cNvPr>
@@ -6632,7 +6526,7 @@
           <p:cNvPr id="6" name="Espaço Reservado para Número de Slide 5">
             <a:extLst>
               <a:ext uri="{FF2B5EF4-FFF2-40B4-BE49-F238E27FC236}">
-                <a16:creationId xmlns:a16="http://schemas.microsoft.com/office/drawing/2014/main" xmlns="" id="{BAA44493-9911-47B2-87A6-C2141A972BC8}"/>
+                <a16:creationId xmlns:a16="http://schemas.microsoft.com/office/drawing/2014/main" id="{BAA44493-9911-47B2-87A6-C2141A972BC8}"/>
               </a:ext>
             </a:extLst>
           </p:cNvPr>
@@ -6650,7 +6544,7 @@
           <a:p>
             <a:fld id="{1A7E88B7-70CE-4035-AE73-13FA6FB985D4}" type="slidenum">
               <a:rPr lang="pt-BR" smtClean="0"/>
-              <a:t>‹nº›</a:t>
+              <a:t>‹#›</a:t>
             </a:fld>
             <a:endParaRPr lang="pt-BR"/>
           </a:p>
@@ -6691,7 +6585,7 @@
           <p:cNvPr id="2" name="Título 1">
             <a:extLst>
               <a:ext uri="{FF2B5EF4-FFF2-40B4-BE49-F238E27FC236}">
-                <a16:creationId xmlns:a16="http://schemas.microsoft.com/office/drawing/2014/main" xmlns="" id="{71BD44A5-8F21-4626-A01D-48A1C874B1D5}"/>
+                <a16:creationId xmlns:a16="http://schemas.microsoft.com/office/drawing/2014/main" id="{71BD44A5-8F21-4626-A01D-48A1C874B1D5}"/>
               </a:ext>
             </a:extLst>
           </p:cNvPr>
@@ -6719,7 +6613,7 @@
           <p:cNvPr id="3" name="Espaço Reservado para Conteúdo 2">
             <a:extLst>
               <a:ext uri="{FF2B5EF4-FFF2-40B4-BE49-F238E27FC236}">
-                <a16:creationId xmlns:a16="http://schemas.microsoft.com/office/drawing/2014/main" xmlns="" id="{B79E8085-65A9-48AA-951D-71D978BFF4ED}"/>
+                <a16:creationId xmlns:a16="http://schemas.microsoft.com/office/drawing/2014/main" id="{B79E8085-65A9-48AA-951D-71D978BFF4ED}"/>
               </a:ext>
             </a:extLst>
           </p:cNvPr>
@@ -6776,7 +6670,7 @@
           <p:cNvPr id="4" name="Espaço Reservado para Data 3">
             <a:extLst>
               <a:ext uri="{FF2B5EF4-FFF2-40B4-BE49-F238E27FC236}">
-                <a16:creationId xmlns:a16="http://schemas.microsoft.com/office/drawing/2014/main" xmlns="" id="{F05BE1AF-51EA-425D-B188-DE7BD675009F}"/>
+                <a16:creationId xmlns:a16="http://schemas.microsoft.com/office/drawing/2014/main" id="{F05BE1AF-51EA-425D-B188-DE7BD675009F}"/>
               </a:ext>
             </a:extLst>
           </p:cNvPr>
@@ -6805,7 +6699,7 @@
           <p:cNvPr id="5" name="Espaço Reservado para Rodapé 4">
             <a:extLst>
               <a:ext uri="{FF2B5EF4-FFF2-40B4-BE49-F238E27FC236}">
-                <a16:creationId xmlns:a16="http://schemas.microsoft.com/office/drawing/2014/main" xmlns="" id="{121BE632-29CF-4CB9-B365-C9EF38F89BE6}"/>
+                <a16:creationId xmlns:a16="http://schemas.microsoft.com/office/drawing/2014/main" id="{121BE632-29CF-4CB9-B365-C9EF38F89BE6}"/>
               </a:ext>
             </a:extLst>
           </p:cNvPr>
@@ -6830,7 +6724,7 @@
           <p:cNvPr id="6" name="Espaço Reservado para Número de Slide 5">
             <a:extLst>
               <a:ext uri="{FF2B5EF4-FFF2-40B4-BE49-F238E27FC236}">
-                <a16:creationId xmlns:a16="http://schemas.microsoft.com/office/drawing/2014/main" xmlns="" id="{60CF3DD1-9AEC-4A57-B461-4E4DD86FAC18}"/>
+                <a16:creationId xmlns:a16="http://schemas.microsoft.com/office/drawing/2014/main" id="{60CF3DD1-9AEC-4A57-B461-4E4DD86FAC18}"/>
               </a:ext>
             </a:extLst>
           </p:cNvPr>
@@ -6848,7 +6742,7 @@
           <a:p>
             <a:fld id="{1A7E88B7-70CE-4035-AE73-13FA6FB985D4}" type="slidenum">
               <a:rPr lang="pt-BR" smtClean="0"/>
-              <a:t>‹nº›</a:t>
+              <a:t>‹#›</a:t>
             </a:fld>
             <a:endParaRPr lang="pt-BR"/>
           </a:p>
@@ -6889,7 +6783,7 @@
           <p:cNvPr id="2" name="Título 1">
             <a:extLst>
               <a:ext uri="{FF2B5EF4-FFF2-40B4-BE49-F238E27FC236}">
-                <a16:creationId xmlns:a16="http://schemas.microsoft.com/office/drawing/2014/main" xmlns="" id="{34AB2FF0-A4D7-4E28-991D-FF26140D5988}"/>
+                <a16:creationId xmlns:a16="http://schemas.microsoft.com/office/drawing/2014/main" id="{34AB2FF0-A4D7-4E28-991D-FF26140D5988}"/>
               </a:ext>
             </a:extLst>
           </p:cNvPr>
@@ -6926,7 +6820,7 @@
           <p:cNvPr id="3" name="Espaço Reservado para Texto 2">
             <a:extLst>
               <a:ext uri="{FF2B5EF4-FFF2-40B4-BE49-F238E27FC236}">
-                <a16:creationId xmlns:a16="http://schemas.microsoft.com/office/drawing/2014/main" xmlns="" id="{E2AC45B0-4145-40DB-8E61-105461170604}"/>
+                <a16:creationId xmlns:a16="http://schemas.microsoft.com/office/drawing/2014/main" id="{E2AC45B0-4145-40DB-8E61-105461170604}"/>
               </a:ext>
             </a:extLst>
           </p:cNvPr>
@@ -7051,7 +6945,7 @@
           <p:cNvPr id="4" name="Espaço Reservado para Data 3">
             <a:extLst>
               <a:ext uri="{FF2B5EF4-FFF2-40B4-BE49-F238E27FC236}">
-                <a16:creationId xmlns:a16="http://schemas.microsoft.com/office/drawing/2014/main" xmlns="" id="{50F1D3FB-740A-4EBA-A309-2CE71D12ECFB}"/>
+                <a16:creationId xmlns:a16="http://schemas.microsoft.com/office/drawing/2014/main" id="{50F1D3FB-740A-4EBA-A309-2CE71D12ECFB}"/>
               </a:ext>
             </a:extLst>
           </p:cNvPr>
@@ -7080,7 +6974,7 @@
           <p:cNvPr id="5" name="Espaço Reservado para Rodapé 4">
             <a:extLst>
               <a:ext uri="{FF2B5EF4-FFF2-40B4-BE49-F238E27FC236}">
-                <a16:creationId xmlns:a16="http://schemas.microsoft.com/office/drawing/2014/main" xmlns="" id="{BDCAB18F-8715-4465-A940-F9C193A2ACE9}"/>
+                <a16:creationId xmlns:a16="http://schemas.microsoft.com/office/drawing/2014/main" id="{BDCAB18F-8715-4465-A940-F9C193A2ACE9}"/>
               </a:ext>
             </a:extLst>
           </p:cNvPr>
@@ -7105,7 +6999,7 @@
           <p:cNvPr id="6" name="Espaço Reservado para Número de Slide 5">
             <a:extLst>
               <a:ext uri="{FF2B5EF4-FFF2-40B4-BE49-F238E27FC236}">
-                <a16:creationId xmlns:a16="http://schemas.microsoft.com/office/drawing/2014/main" xmlns="" id="{353466C6-8248-429F-8056-FF040BF509EB}"/>
+                <a16:creationId xmlns:a16="http://schemas.microsoft.com/office/drawing/2014/main" id="{353466C6-8248-429F-8056-FF040BF509EB}"/>
               </a:ext>
             </a:extLst>
           </p:cNvPr>
@@ -7123,7 +7017,7 @@
           <a:p>
             <a:fld id="{1A7E88B7-70CE-4035-AE73-13FA6FB985D4}" type="slidenum">
               <a:rPr lang="pt-BR" smtClean="0"/>
-              <a:t>‹nº›</a:t>
+              <a:t>‹#›</a:t>
             </a:fld>
             <a:endParaRPr lang="pt-BR"/>
           </a:p>
@@ -7164,7 +7058,7 @@
           <p:cNvPr id="2" name="Título 1">
             <a:extLst>
               <a:ext uri="{FF2B5EF4-FFF2-40B4-BE49-F238E27FC236}">
-                <a16:creationId xmlns:a16="http://schemas.microsoft.com/office/drawing/2014/main" xmlns="" id="{BC7BB9F0-F14B-4A91-B2B7-35BC47FE4DE7}"/>
+                <a16:creationId xmlns:a16="http://schemas.microsoft.com/office/drawing/2014/main" id="{BC7BB9F0-F14B-4A91-B2B7-35BC47FE4DE7}"/>
               </a:ext>
             </a:extLst>
           </p:cNvPr>
@@ -7192,7 +7086,7 @@
           <p:cNvPr id="3" name="Espaço Reservado para Conteúdo 2">
             <a:extLst>
               <a:ext uri="{FF2B5EF4-FFF2-40B4-BE49-F238E27FC236}">
-                <a16:creationId xmlns:a16="http://schemas.microsoft.com/office/drawing/2014/main" xmlns="" id="{EC1FC1C4-73DA-47A6-8496-B0B457F7D39A}"/>
+                <a16:creationId xmlns:a16="http://schemas.microsoft.com/office/drawing/2014/main" id="{EC1FC1C4-73DA-47A6-8496-B0B457F7D39A}"/>
               </a:ext>
             </a:extLst>
           </p:cNvPr>
@@ -7254,7 +7148,7 @@
           <p:cNvPr id="4" name="Espaço Reservado para Conteúdo 3">
             <a:extLst>
               <a:ext uri="{FF2B5EF4-FFF2-40B4-BE49-F238E27FC236}">
-                <a16:creationId xmlns:a16="http://schemas.microsoft.com/office/drawing/2014/main" xmlns="" id="{E92F06A8-A449-4D92-9912-76873E529B38}"/>
+                <a16:creationId xmlns:a16="http://schemas.microsoft.com/office/drawing/2014/main" id="{E92F06A8-A449-4D92-9912-76873E529B38}"/>
               </a:ext>
             </a:extLst>
           </p:cNvPr>
@@ -7316,7 +7210,7 @@
           <p:cNvPr id="5" name="Espaço Reservado para Data 4">
             <a:extLst>
               <a:ext uri="{FF2B5EF4-FFF2-40B4-BE49-F238E27FC236}">
-                <a16:creationId xmlns:a16="http://schemas.microsoft.com/office/drawing/2014/main" xmlns="" id="{938070A4-BC2F-4D55-BD8D-DEAF11BB9EE9}"/>
+                <a16:creationId xmlns:a16="http://schemas.microsoft.com/office/drawing/2014/main" id="{938070A4-BC2F-4D55-BD8D-DEAF11BB9EE9}"/>
               </a:ext>
             </a:extLst>
           </p:cNvPr>
@@ -7345,7 +7239,7 @@
           <p:cNvPr id="6" name="Espaço Reservado para Rodapé 5">
             <a:extLst>
               <a:ext uri="{FF2B5EF4-FFF2-40B4-BE49-F238E27FC236}">
-                <a16:creationId xmlns:a16="http://schemas.microsoft.com/office/drawing/2014/main" xmlns="" id="{45CC2DB8-844A-465F-BA9A-7734C80C7F43}"/>
+                <a16:creationId xmlns:a16="http://schemas.microsoft.com/office/drawing/2014/main" id="{45CC2DB8-844A-465F-BA9A-7734C80C7F43}"/>
               </a:ext>
             </a:extLst>
           </p:cNvPr>
@@ -7370,7 +7264,7 @@
           <p:cNvPr id="7" name="Espaço Reservado para Número de Slide 6">
             <a:extLst>
               <a:ext uri="{FF2B5EF4-FFF2-40B4-BE49-F238E27FC236}">
-                <a16:creationId xmlns:a16="http://schemas.microsoft.com/office/drawing/2014/main" xmlns="" id="{4CC606A8-097B-4040-94E0-CD8C88280D8F}"/>
+                <a16:creationId xmlns:a16="http://schemas.microsoft.com/office/drawing/2014/main" id="{4CC606A8-097B-4040-94E0-CD8C88280D8F}"/>
               </a:ext>
             </a:extLst>
           </p:cNvPr>
@@ -7388,7 +7282,7 @@
           <a:p>
             <a:fld id="{1A7E88B7-70CE-4035-AE73-13FA6FB985D4}" type="slidenum">
               <a:rPr lang="pt-BR" smtClean="0"/>
-              <a:t>‹nº›</a:t>
+              <a:t>‹#›</a:t>
             </a:fld>
             <a:endParaRPr lang="pt-BR"/>
           </a:p>
@@ -7429,7 +7323,7 @@
           <p:cNvPr id="2" name="Título 1">
             <a:extLst>
               <a:ext uri="{FF2B5EF4-FFF2-40B4-BE49-F238E27FC236}">
-                <a16:creationId xmlns:a16="http://schemas.microsoft.com/office/drawing/2014/main" xmlns="" id="{76D66686-0143-4CB6-8C09-BA326F1E7ACA}"/>
+                <a16:creationId xmlns:a16="http://schemas.microsoft.com/office/drawing/2014/main" id="{76D66686-0143-4CB6-8C09-BA326F1E7ACA}"/>
               </a:ext>
             </a:extLst>
           </p:cNvPr>
@@ -7462,7 +7356,7 @@
           <p:cNvPr id="3" name="Espaço Reservado para Texto 2">
             <a:extLst>
               <a:ext uri="{FF2B5EF4-FFF2-40B4-BE49-F238E27FC236}">
-                <a16:creationId xmlns:a16="http://schemas.microsoft.com/office/drawing/2014/main" xmlns="" id="{0227AB85-F59E-4BCE-B846-4FA0992C2F23}"/>
+                <a16:creationId xmlns:a16="http://schemas.microsoft.com/office/drawing/2014/main" id="{0227AB85-F59E-4BCE-B846-4FA0992C2F23}"/>
               </a:ext>
             </a:extLst>
           </p:cNvPr>
@@ -7533,7 +7427,7 @@
           <p:cNvPr id="4" name="Espaço Reservado para Conteúdo 3">
             <a:extLst>
               <a:ext uri="{FF2B5EF4-FFF2-40B4-BE49-F238E27FC236}">
-                <a16:creationId xmlns:a16="http://schemas.microsoft.com/office/drawing/2014/main" xmlns="" id="{3373456C-7319-4D0A-827D-D29F6B083F5D}"/>
+                <a16:creationId xmlns:a16="http://schemas.microsoft.com/office/drawing/2014/main" id="{3373456C-7319-4D0A-827D-D29F6B083F5D}"/>
               </a:ext>
             </a:extLst>
           </p:cNvPr>
@@ -7595,7 +7489,7 @@
           <p:cNvPr id="5" name="Espaço Reservado para Texto 4">
             <a:extLst>
               <a:ext uri="{FF2B5EF4-FFF2-40B4-BE49-F238E27FC236}">
-                <a16:creationId xmlns:a16="http://schemas.microsoft.com/office/drawing/2014/main" xmlns="" id="{4CD109D0-2E83-4262-8029-A871CEC47406}"/>
+                <a16:creationId xmlns:a16="http://schemas.microsoft.com/office/drawing/2014/main" id="{4CD109D0-2E83-4262-8029-A871CEC47406}"/>
               </a:ext>
             </a:extLst>
           </p:cNvPr>
@@ -7666,7 +7560,7 @@
           <p:cNvPr id="6" name="Espaço Reservado para Conteúdo 5">
             <a:extLst>
               <a:ext uri="{FF2B5EF4-FFF2-40B4-BE49-F238E27FC236}">
-                <a16:creationId xmlns:a16="http://schemas.microsoft.com/office/drawing/2014/main" xmlns="" id="{AD706E3A-CFBB-4A6C-A65F-D0360A9E74FE}"/>
+                <a16:creationId xmlns:a16="http://schemas.microsoft.com/office/drawing/2014/main" id="{AD706E3A-CFBB-4A6C-A65F-D0360A9E74FE}"/>
               </a:ext>
             </a:extLst>
           </p:cNvPr>
@@ -7728,7 +7622,7 @@
           <p:cNvPr id="7" name="Espaço Reservado para Data 6">
             <a:extLst>
               <a:ext uri="{FF2B5EF4-FFF2-40B4-BE49-F238E27FC236}">
-                <a16:creationId xmlns:a16="http://schemas.microsoft.com/office/drawing/2014/main" xmlns="" id="{4172C0E5-5AF0-4805-BB51-443733CD2BD5}"/>
+                <a16:creationId xmlns:a16="http://schemas.microsoft.com/office/drawing/2014/main" id="{4172C0E5-5AF0-4805-BB51-443733CD2BD5}"/>
               </a:ext>
             </a:extLst>
           </p:cNvPr>
@@ -7757,7 +7651,7 @@
           <p:cNvPr id="8" name="Espaço Reservado para Rodapé 7">
             <a:extLst>
               <a:ext uri="{FF2B5EF4-FFF2-40B4-BE49-F238E27FC236}">
-                <a16:creationId xmlns:a16="http://schemas.microsoft.com/office/drawing/2014/main" xmlns="" id="{0E801648-156F-497E-99CF-797DF48051E1}"/>
+                <a16:creationId xmlns:a16="http://schemas.microsoft.com/office/drawing/2014/main" id="{0E801648-156F-497E-99CF-797DF48051E1}"/>
               </a:ext>
             </a:extLst>
           </p:cNvPr>
@@ -7782,7 +7676,7 @@
           <p:cNvPr id="9" name="Espaço Reservado para Número de Slide 8">
             <a:extLst>
               <a:ext uri="{FF2B5EF4-FFF2-40B4-BE49-F238E27FC236}">
-                <a16:creationId xmlns:a16="http://schemas.microsoft.com/office/drawing/2014/main" xmlns="" id="{EEE23D32-80E7-4796-A137-66BF842E4B53}"/>
+                <a16:creationId xmlns:a16="http://schemas.microsoft.com/office/drawing/2014/main" id="{EEE23D32-80E7-4796-A137-66BF842E4B53}"/>
               </a:ext>
             </a:extLst>
           </p:cNvPr>
@@ -7800,7 +7694,7 @@
           <a:p>
             <a:fld id="{1A7E88B7-70CE-4035-AE73-13FA6FB985D4}" type="slidenum">
               <a:rPr lang="pt-BR" smtClean="0"/>
-              <a:t>‹nº›</a:t>
+              <a:t>‹#›</a:t>
             </a:fld>
             <a:endParaRPr lang="pt-BR"/>
           </a:p>
@@ -7841,7 +7735,7 @@
           <p:cNvPr id="2" name="Título 1">
             <a:extLst>
               <a:ext uri="{FF2B5EF4-FFF2-40B4-BE49-F238E27FC236}">
-                <a16:creationId xmlns:a16="http://schemas.microsoft.com/office/drawing/2014/main" xmlns="" id="{2BCE2379-C78F-47E1-8CFC-B846E7AF148D}"/>
+                <a16:creationId xmlns:a16="http://schemas.microsoft.com/office/drawing/2014/main" id="{2BCE2379-C78F-47E1-8CFC-B846E7AF148D}"/>
               </a:ext>
             </a:extLst>
           </p:cNvPr>
@@ -7869,7 +7763,7 @@
           <p:cNvPr id="3" name="Espaço Reservado para Data 2">
             <a:extLst>
               <a:ext uri="{FF2B5EF4-FFF2-40B4-BE49-F238E27FC236}">
-                <a16:creationId xmlns:a16="http://schemas.microsoft.com/office/drawing/2014/main" xmlns="" id="{342600A9-7F92-4E22-9D94-E4717252A817}"/>
+                <a16:creationId xmlns:a16="http://schemas.microsoft.com/office/drawing/2014/main" id="{342600A9-7F92-4E22-9D94-E4717252A817}"/>
               </a:ext>
             </a:extLst>
           </p:cNvPr>
@@ -7898,7 +7792,7 @@
           <p:cNvPr id="4" name="Espaço Reservado para Rodapé 3">
             <a:extLst>
               <a:ext uri="{FF2B5EF4-FFF2-40B4-BE49-F238E27FC236}">
-                <a16:creationId xmlns:a16="http://schemas.microsoft.com/office/drawing/2014/main" xmlns="" id="{192E6BED-F546-40CC-A2DF-99CBA853654E}"/>
+                <a16:creationId xmlns:a16="http://schemas.microsoft.com/office/drawing/2014/main" id="{192E6BED-F546-40CC-A2DF-99CBA853654E}"/>
               </a:ext>
             </a:extLst>
           </p:cNvPr>
@@ -7923,7 +7817,7 @@
           <p:cNvPr id="5" name="Espaço Reservado para Número de Slide 4">
             <a:extLst>
               <a:ext uri="{FF2B5EF4-FFF2-40B4-BE49-F238E27FC236}">
-                <a16:creationId xmlns:a16="http://schemas.microsoft.com/office/drawing/2014/main" xmlns="" id="{6091CC40-A8C4-4063-80EB-CC5099621678}"/>
+                <a16:creationId xmlns:a16="http://schemas.microsoft.com/office/drawing/2014/main" id="{6091CC40-A8C4-4063-80EB-CC5099621678}"/>
               </a:ext>
             </a:extLst>
           </p:cNvPr>
@@ -7941,7 +7835,7 @@
           <a:p>
             <a:fld id="{1A7E88B7-70CE-4035-AE73-13FA6FB985D4}" type="slidenum">
               <a:rPr lang="pt-BR" smtClean="0"/>
-              <a:t>‹nº›</a:t>
+              <a:t>‹#›</a:t>
             </a:fld>
             <a:endParaRPr lang="pt-BR"/>
           </a:p>
@@ -7982,7 +7876,7 @@
           <p:cNvPr id="2" name="Espaço Reservado para Data 1">
             <a:extLst>
               <a:ext uri="{FF2B5EF4-FFF2-40B4-BE49-F238E27FC236}">
-                <a16:creationId xmlns:a16="http://schemas.microsoft.com/office/drawing/2014/main" xmlns="" id="{DD19515C-212C-4EAE-84A3-8FF4BC844F1B}"/>
+                <a16:creationId xmlns:a16="http://schemas.microsoft.com/office/drawing/2014/main" id="{DD19515C-212C-4EAE-84A3-8FF4BC844F1B}"/>
               </a:ext>
             </a:extLst>
           </p:cNvPr>
@@ -8011,7 +7905,7 @@
           <p:cNvPr id="3" name="Espaço Reservado para Rodapé 2">
             <a:extLst>
               <a:ext uri="{FF2B5EF4-FFF2-40B4-BE49-F238E27FC236}">
-                <a16:creationId xmlns:a16="http://schemas.microsoft.com/office/drawing/2014/main" xmlns="" id="{94D3D120-B3E8-4C96-861D-7A4F12F49B3A}"/>
+                <a16:creationId xmlns:a16="http://schemas.microsoft.com/office/drawing/2014/main" id="{94D3D120-B3E8-4C96-861D-7A4F12F49B3A}"/>
               </a:ext>
             </a:extLst>
           </p:cNvPr>
@@ -8036,7 +7930,7 @@
           <p:cNvPr id="4" name="Espaço Reservado para Número de Slide 3">
             <a:extLst>
               <a:ext uri="{FF2B5EF4-FFF2-40B4-BE49-F238E27FC236}">
-                <a16:creationId xmlns:a16="http://schemas.microsoft.com/office/drawing/2014/main" xmlns="" id="{42E49B68-FA1B-468B-9F17-D5C09243D454}"/>
+                <a16:creationId xmlns:a16="http://schemas.microsoft.com/office/drawing/2014/main" id="{42E49B68-FA1B-468B-9F17-D5C09243D454}"/>
               </a:ext>
             </a:extLst>
           </p:cNvPr>
@@ -8054,7 +7948,7 @@
           <a:p>
             <a:fld id="{1A7E88B7-70CE-4035-AE73-13FA6FB985D4}" type="slidenum">
               <a:rPr lang="pt-BR" smtClean="0"/>
-              <a:t>‹nº›</a:t>
+              <a:t>‹#›</a:t>
             </a:fld>
             <a:endParaRPr lang="pt-BR"/>
           </a:p>
@@ -8095,7 +7989,7 @@
           <p:cNvPr id="2" name="Título 1">
             <a:extLst>
               <a:ext uri="{FF2B5EF4-FFF2-40B4-BE49-F238E27FC236}">
-                <a16:creationId xmlns:a16="http://schemas.microsoft.com/office/drawing/2014/main" xmlns="" id="{1C17BCBE-A897-4319-85EC-D87909C24980}"/>
+                <a16:creationId xmlns:a16="http://schemas.microsoft.com/office/drawing/2014/main" id="{1C17BCBE-A897-4319-85EC-D87909C24980}"/>
               </a:ext>
             </a:extLst>
           </p:cNvPr>
@@ -8132,7 +8026,7 @@
           <p:cNvPr id="3" name="Espaço Reservado para Conteúdo 2">
             <a:extLst>
               <a:ext uri="{FF2B5EF4-FFF2-40B4-BE49-F238E27FC236}">
-                <a16:creationId xmlns:a16="http://schemas.microsoft.com/office/drawing/2014/main" xmlns="" id="{4226F885-0204-4913-868B-4B8B82576F17}"/>
+                <a16:creationId xmlns:a16="http://schemas.microsoft.com/office/drawing/2014/main" id="{4226F885-0204-4913-868B-4B8B82576F17}"/>
               </a:ext>
             </a:extLst>
           </p:cNvPr>
@@ -8222,7 +8116,7 @@
           <p:cNvPr id="4" name="Espaço Reservado para Texto 3">
             <a:extLst>
               <a:ext uri="{FF2B5EF4-FFF2-40B4-BE49-F238E27FC236}">
-                <a16:creationId xmlns:a16="http://schemas.microsoft.com/office/drawing/2014/main" xmlns="" id="{00F9F784-A858-441B-8AB5-697098141751}"/>
+                <a16:creationId xmlns:a16="http://schemas.microsoft.com/office/drawing/2014/main" id="{00F9F784-A858-441B-8AB5-697098141751}"/>
               </a:ext>
             </a:extLst>
           </p:cNvPr>
@@ -8293,7 +8187,7 @@
           <p:cNvPr id="5" name="Espaço Reservado para Data 4">
             <a:extLst>
               <a:ext uri="{FF2B5EF4-FFF2-40B4-BE49-F238E27FC236}">
-                <a16:creationId xmlns:a16="http://schemas.microsoft.com/office/drawing/2014/main" xmlns="" id="{A4DC363A-5000-472E-8B17-02E7DCB8840A}"/>
+                <a16:creationId xmlns:a16="http://schemas.microsoft.com/office/drawing/2014/main" id="{A4DC363A-5000-472E-8B17-02E7DCB8840A}"/>
               </a:ext>
             </a:extLst>
           </p:cNvPr>
@@ -8322,7 +8216,7 @@
           <p:cNvPr id="6" name="Espaço Reservado para Rodapé 5">
             <a:extLst>
               <a:ext uri="{FF2B5EF4-FFF2-40B4-BE49-F238E27FC236}">
-                <a16:creationId xmlns:a16="http://schemas.microsoft.com/office/drawing/2014/main" xmlns="" id="{5548425D-2C21-4C56-BAD4-662978775C28}"/>
+                <a16:creationId xmlns:a16="http://schemas.microsoft.com/office/drawing/2014/main" id="{5548425D-2C21-4C56-BAD4-662978775C28}"/>
               </a:ext>
             </a:extLst>
           </p:cNvPr>
@@ -8347,7 +8241,7 @@
           <p:cNvPr id="7" name="Espaço Reservado para Número de Slide 6">
             <a:extLst>
               <a:ext uri="{FF2B5EF4-FFF2-40B4-BE49-F238E27FC236}">
-                <a16:creationId xmlns:a16="http://schemas.microsoft.com/office/drawing/2014/main" xmlns="" id="{C63E9726-E64C-42B2-AE8A-8C235A956B48}"/>
+                <a16:creationId xmlns:a16="http://schemas.microsoft.com/office/drawing/2014/main" id="{C63E9726-E64C-42B2-AE8A-8C235A956B48}"/>
               </a:ext>
             </a:extLst>
           </p:cNvPr>
@@ -8365,7 +8259,7 @@
           <a:p>
             <a:fld id="{1A7E88B7-70CE-4035-AE73-13FA6FB985D4}" type="slidenum">
               <a:rPr lang="pt-BR" smtClean="0"/>
-              <a:t>‹nº›</a:t>
+              <a:t>‹#›</a:t>
             </a:fld>
             <a:endParaRPr lang="pt-BR"/>
           </a:p>
@@ -8406,7 +8300,7 @@
           <p:cNvPr id="2" name="Título 1">
             <a:extLst>
               <a:ext uri="{FF2B5EF4-FFF2-40B4-BE49-F238E27FC236}">
-                <a16:creationId xmlns:a16="http://schemas.microsoft.com/office/drawing/2014/main" xmlns="" id="{11086A78-3E74-450C-96A6-CA8AC37AF772}"/>
+                <a16:creationId xmlns:a16="http://schemas.microsoft.com/office/drawing/2014/main" id="{11086A78-3E74-450C-96A6-CA8AC37AF772}"/>
               </a:ext>
             </a:extLst>
           </p:cNvPr>
@@ -8443,7 +8337,7 @@
           <p:cNvPr id="3" name="Espaço Reservado para Imagem 2">
             <a:extLst>
               <a:ext uri="{FF2B5EF4-FFF2-40B4-BE49-F238E27FC236}">
-                <a16:creationId xmlns:a16="http://schemas.microsoft.com/office/drawing/2014/main" xmlns="" id="{5F5B7312-975A-4DBC-9B2F-3652ADA006FD}"/>
+                <a16:creationId xmlns:a16="http://schemas.microsoft.com/office/drawing/2014/main" id="{5F5B7312-975A-4DBC-9B2F-3652ADA006FD}"/>
               </a:ext>
             </a:extLst>
           </p:cNvPr>
@@ -8510,7 +8404,7 @@
           <p:cNvPr id="4" name="Espaço Reservado para Texto 3">
             <a:extLst>
               <a:ext uri="{FF2B5EF4-FFF2-40B4-BE49-F238E27FC236}">
-                <a16:creationId xmlns:a16="http://schemas.microsoft.com/office/drawing/2014/main" xmlns="" id="{AAF805F5-1DFF-41C6-944C-7D79FE0D0963}"/>
+                <a16:creationId xmlns:a16="http://schemas.microsoft.com/office/drawing/2014/main" id="{AAF805F5-1DFF-41C6-944C-7D79FE0D0963}"/>
               </a:ext>
             </a:extLst>
           </p:cNvPr>
@@ -8581,7 +8475,7 @@
           <p:cNvPr id="5" name="Espaço Reservado para Data 4">
             <a:extLst>
               <a:ext uri="{FF2B5EF4-FFF2-40B4-BE49-F238E27FC236}">
-                <a16:creationId xmlns:a16="http://schemas.microsoft.com/office/drawing/2014/main" xmlns="" id="{02113D81-8665-4516-BD81-C6A1F254EECD}"/>
+                <a16:creationId xmlns:a16="http://schemas.microsoft.com/office/drawing/2014/main" id="{02113D81-8665-4516-BD81-C6A1F254EECD}"/>
               </a:ext>
             </a:extLst>
           </p:cNvPr>
@@ -8610,7 +8504,7 @@
           <p:cNvPr id="6" name="Espaço Reservado para Rodapé 5">
             <a:extLst>
               <a:ext uri="{FF2B5EF4-FFF2-40B4-BE49-F238E27FC236}">
-                <a16:creationId xmlns:a16="http://schemas.microsoft.com/office/drawing/2014/main" xmlns="" id="{2B00C88B-FF32-40AA-A187-727D96FD7862}"/>
+                <a16:creationId xmlns:a16="http://schemas.microsoft.com/office/drawing/2014/main" id="{2B00C88B-FF32-40AA-A187-727D96FD7862}"/>
               </a:ext>
             </a:extLst>
           </p:cNvPr>
@@ -8635,7 +8529,7 @@
           <p:cNvPr id="7" name="Espaço Reservado para Número de Slide 6">
             <a:extLst>
               <a:ext uri="{FF2B5EF4-FFF2-40B4-BE49-F238E27FC236}">
-                <a16:creationId xmlns:a16="http://schemas.microsoft.com/office/drawing/2014/main" xmlns="" id="{A04D1A2D-69F7-4B8F-A730-BC26DC340BA6}"/>
+                <a16:creationId xmlns:a16="http://schemas.microsoft.com/office/drawing/2014/main" id="{A04D1A2D-69F7-4B8F-A730-BC26DC340BA6}"/>
               </a:ext>
             </a:extLst>
           </p:cNvPr>
@@ -8653,7 +8547,7 @@
           <a:p>
             <a:fld id="{1A7E88B7-70CE-4035-AE73-13FA6FB985D4}" type="slidenum">
               <a:rPr lang="pt-BR" smtClean="0"/>
-              <a:t>‹nº›</a:t>
+              <a:t>‹#›</a:t>
             </a:fld>
             <a:endParaRPr lang="pt-BR"/>
           </a:p>
@@ -8699,7 +8593,7 @@
           <p:cNvPr id="2" name="Espaço Reservado para Título 1">
             <a:extLst>
               <a:ext uri="{FF2B5EF4-FFF2-40B4-BE49-F238E27FC236}">
-                <a16:creationId xmlns:a16="http://schemas.microsoft.com/office/drawing/2014/main" xmlns="" id="{E69A0273-1966-4A1B-9370-4C1CE5036371}"/>
+                <a16:creationId xmlns:a16="http://schemas.microsoft.com/office/drawing/2014/main" id="{E69A0273-1966-4A1B-9370-4C1CE5036371}"/>
               </a:ext>
             </a:extLst>
           </p:cNvPr>
@@ -8737,7 +8631,7 @@
           <p:cNvPr id="3" name="Espaço Reservado para Texto 2">
             <a:extLst>
               <a:ext uri="{FF2B5EF4-FFF2-40B4-BE49-F238E27FC236}">
-                <a16:creationId xmlns:a16="http://schemas.microsoft.com/office/drawing/2014/main" xmlns="" id="{3B9CF87A-0448-49A7-AB25-EBC1D56A40EF}"/>
+                <a16:creationId xmlns:a16="http://schemas.microsoft.com/office/drawing/2014/main" id="{3B9CF87A-0448-49A7-AB25-EBC1D56A40EF}"/>
               </a:ext>
             </a:extLst>
           </p:cNvPr>
@@ -8804,7 +8698,7 @@
           <p:cNvPr id="4" name="Espaço Reservado para Data 3">
             <a:extLst>
               <a:ext uri="{FF2B5EF4-FFF2-40B4-BE49-F238E27FC236}">
-                <a16:creationId xmlns:a16="http://schemas.microsoft.com/office/drawing/2014/main" xmlns="" id="{2EF7B1F2-BB5A-44D0-816D-16AD2C71430E}"/>
+                <a16:creationId xmlns:a16="http://schemas.microsoft.com/office/drawing/2014/main" id="{2EF7B1F2-BB5A-44D0-816D-16AD2C71430E}"/>
               </a:ext>
             </a:extLst>
           </p:cNvPr>
@@ -8851,7 +8745,7 @@
           <p:cNvPr id="5" name="Espaço Reservado para Rodapé 4">
             <a:extLst>
               <a:ext uri="{FF2B5EF4-FFF2-40B4-BE49-F238E27FC236}">
-                <a16:creationId xmlns:a16="http://schemas.microsoft.com/office/drawing/2014/main" xmlns="" id="{C703F94C-2CC8-4DAA-BC35-14FC3E841DCD}"/>
+                <a16:creationId xmlns:a16="http://schemas.microsoft.com/office/drawing/2014/main" id="{C703F94C-2CC8-4DAA-BC35-14FC3E841DCD}"/>
               </a:ext>
             </a:extLst>
           </p:cNvPr>
@@ -8894,7 +8788,7 @@
           <p:cNvPr id="6" name="Espaço Reservado para Número de Slide 5">
             <a:extLst>
               <a:ext uri="{FF2B5EF4-FFF2-40B4-BE49-F238E27FC236}">
-                <a16:creationId xmlns:a16="http://schemas.microsoft.com/office/drawing/2014/main" xmlns="" id="{64051336-7048-457A-8B61-D94291D71648}"/>
+                <a16:creationId xmlns:a16="http://schemas.microsoft.com/office/drawing/2014/main" id="{64051336-7048-457A-8B61-D94291D71648}"/>
               </a:ext>
             </a:extLst>
           </p:cNvPr>
@@ -8930,7 +8824,7 @@
           <a:p>
             <a:fld id="{1A7E88B7-70CE-4035-AE73-13FA6FB985D4}" type="slidenum">
               <a:rPr lang="pt-BR" smtClean="0"/>
-              <a:t>‹nº›</a:t>
+              <a:t>‹#›</a:t>
             </a:fld>
             <a:endParaRPr lang="pt-BR"/>
           </a:p>
@@ -9262,7 +9156,7 @@
           <p:cNvPr id="2" name="Título 1">
             <a:extLst>
               <a:ext uri="{FF2B5EF4-FFF2-40B4-BE49-F238E27FC236}">
-                <a16:creationId xmlns:a16="http://schemas.microsoft.com/office/drawing/2014/main" xmlns="" id="{32666AC8-2E17-4DB4-B0F5-60C640CCFD2E}"/>
+                <a16:creationId xmlns:a16="http://schemas.microsoft.com/office/drawing/2014/main" id="{32666AC8-2E17-4DB4-B0F5-60C640CCFD2E}"/>
               </a:ext>
             </a:extLst>
           </p:cNvPr>
@@ -9289,10 +9183,6 @@
               <a:rPr lang="pt-BR" sz="5400" dirty="0"/>
               <a:t>T320 - Introdução ao Aprendizado de Máquina II:</a:t>
             </a:r>
-            <a:r>
-              <a:rPr lang="pt-BR" dirty="0"/>
-              <a:t/>
-            </a:r>
             <a:br>
               <a:rPr lang="pt-BR" dirty="0"/>
             </a:br>
@@ -9308,7 +9198,7 @@
           <p:cNvPr id="4" name="CaixaDeTexto 3">
             <a:extLst>
               <a:ext uri="{FF2B5EF4-FFF2-40B4-BE49-F238E27FC236}">
-                <a16:creationId xmlns:a16="http://schemas.microsoft.com/office/drawing/2014/main" xmlns="" id="{430EB894-B7D4-434C-9D1A-A14094D9BEEC}"/>
+                <a16:creationId xmlns:a16="http://schemas.microsoft.com/office/drawing/2014/main" id="{430EB894-B7D4-434C-9D1A-A14094D9BEEC}"/>
               </a:ext>
             </a:extLst>
           </p:cNvPr>
@@ -9349,7 +9239,7 @@
           <p:cNvPr id="1026" name="Picture 2" descr="Logo">
             <a:extLst>
               <a:ext uri="{FF2B5EF4-FFF2-40B4-BE49-F238E27FC236}">
-                <a16:creationId xmlns:a16="http://schemas.microsoft.com/office/drawing/2014/main" xmlns="" id="{3F2642E0-4F6A-4196-8F58-E77D36E9A33F}"/>
+                <a16:creationId xmlns:a16="http://schemas.microsoft.com/office/drawing/2014/main" id="{3F2642E0-4F6A-4196-8F58-E77D36E9A33F}"/>
               </a:ext>
             </a:extLst>
           </p:cNvPr>
@@ -9394,7 +9284,7 @@
           <p:cNvPr id="5122" name="Picture 2" descr="Image result for machine learning">
             <a:extLst>
               <a:ext uri="{FF2B5EF4-FFF2-40B4-BE49-F238E27FC236}">
-                <a16:creationId xmlns:a16="http://schemas.microsoft.com/office/drawing/2014/main" xmlns="" id="{810CE0A2-4102-44A6-A370-175E7896CDCB}"/>
+                <a16:creationId xmlns:a16="http://schemas.microsoft.com/office/drawing/2014/main" id="{810CE0A2-4102-44A6-A370-175E7896CDCB}"/>
               </a:ext>
             </a:extLst>
           </p:cNvPr>
@@ -10798,7 +10688,7 @@
           <p:cNvPr id="13" name="CaixaDeTexto 12">
             <a:extLst>
               <a:ext uri="{FF2B5EF4-FFF2-40B4-BE49-F238E27FC236}">
-                <a16:creationId xmlns:a16="http://schemas.microsoft.com/office/drawing/2014/main" xmlns="" id="{9989FE69-01F8-8C6A-4EA0-DA1C9792B919}"/>
+                <a16:creationId xmlns:a16="http://schemas.microsoft.com/office/drawing/2014/main" id="{9989FE69-01F8-8C6A-4EA0-DA1C9792B919}"/>
               </a:ext>
             </a:extLst>
           </p:cNvPr>
@@ -10848,13 +10738,6 @@
   <p:clrMapOvr>
     <a:masterClrMapping/>
   </p:clrMapOvr>
-  <p:timing>
-    <p:tnLst>
-      <p:par>
-        <p:cTn id="1" dur="indefinite" restart="never" nodeType="tmRoot"/>
-      </p:par>
-    </p:tnLst>
-  </p:timing>
 </p:sld>
 </file>
 
@@ -10880,7 +10763,7 @@
           <p:cNvPr id="2" name="Título 1">
             <a:extLst>
               <a:ext uri="{FF2B5EF4-FFF2-40B4-BE49-F238E27FC236}">
-                <a16:creationId xmlns="" xmlns:a16="http://schemas.microsoft.com/office/drawing/2014/main" id="{B022D379-CAA0-9DC9-CDBD-6E0EBE1BFF31}"/>
+                <a16:creationId xmlns:a16="http://schemas.microsoft.com/office/drawing/2014/main" id="{B022D379-CAA0-9DC9-CDBD-6E0EBE1BFF31}"/>
               </a:ext>
             </a:extLst>
           </p:cNvPr>
@@ -10914,7 +10797,7 @@
               <p:cNvPr id="3" name="Espaço Reservado para Conteúdo 2">
                 <a:extLst>
                   <a:ext uri="{FF2B5EF4-FFF2-40B4-BE49-F238E27FC236}">
-                    <a16:creationId xmlns="" xmlns:a16="http://schemas.microsoft.com/office/drawing/2014/main" id="{B68F0D74-8673-A432-A1D7-BDEF7725851A}"/>
+                    <a16:creationId xmlns:a16="http://schemas.microsoft.com/office/drawing/2014/main" id="{B68F0D74-8673-A432-A1D7-BDEF7725851A}"/>
                   </a:ext>
                 </a:extLst>
               </p:cNvPr>
@@ -10977,23 +10860,7 @@
                       <a:srgbClr val="00B050"/>
                     </a:solidFill>
                   </a:rPr>
-                  <a:t>dado os atributos e </a:t>
-                </a:r>
-                <a:r>
-                  <a:rPr lang="pt-BR" b="1" dirty="0" smtClean="0">
-                    <a:solidFill>
-                      <a:srgbClr val="00B050"/>
-                    </a:solidFill>
-                  </a:rPr>
-                  <a:t>os pesos</a:t>
-                </a:r>
-                <a:r>
-                  <a:rPr lang="pt-BR" b="1" dirty="0">
-                    <a:solidFill>
-                      <a:srgbClr val="00B050"/>
-                    </a:solidFill>
-                  </a:rPr>
-                  <a:t>.</a:t>
+                  <a:t>dado os atributos e os pesos.</a:t>
                 </a:r>
               </a:p>
               <a:p>
@@ -11061,11 +10928,11 @@
                   <a:t> </a:t>
                 </a:r>
                 <a:r>
-                  <a:rPr lang="pt-BR" i="1" dirty="0" err="1" smtClean="0"/>
+                  <a:rPr lang="pt-BR" i="1" dirty="0" err="1"/>
                   <a:t>softmax</a:t>
                 </a:r>
                 <a:r>
-                  <a:rPr lang="pt-BR" dirty="0" smtClean="0"/>
+                  <a:rPr lang="pt-BR" dirty="0"/>
                   <a:t> tem </a:t>
                 </a:r>
                 <a14:m>
@@ -11201,7 +11068,7 @@
           <p:cNvPr id="2" name="Título 1">
             <a:extLst>
               <a:ext uri="{FF2B5EF4-FFF2-40B4-BE49-F238E27FC236}">
-                <a16:creationId xmlns="" xmlns:a16="http://schemas.microsoft.com/office/drawing/2014/main" id="{519F0958-530D-D942-BA01-15C1583DD1E6}"/>
+                <a16:creationId xmlns:a16="http://schemas.microsoft.com/office/drawing/2014/main" id="{519F0958-530D-D942-BA01-15C1583DD1E6}"/>
               </a:ext>
             </a:extLst>
           </p:cNvPr>
@@ -11228,14 +11095,14 @@
           </a:p>
         </p:txBody>
       </p:sp>
-      <mc:AlternateContent xmlns:mc="http://schemas.openxmlformats.org/markup-compatibility/2006">
-        <mc:Choice xmlns:a14="http://schemas.microsoft.com/office/drawing/2010/main" Requires="a14">
+      <mc:AlternateContent xmlns:mc="http://schemas.openxmlformats.org/markup-compatibility/2006" xmlns:a14="http://schemas.microsoft.com/office/drawing/2010/main">
+        <mc:Choice Requires="a14">
           <p:sp>
             <p:nvSpPr>
               <p:cNvPr id="3" name="Espaço Reservado para Conteúdo 2">
                 <a:extLst>
                   <a:ext uri="{FF2B5EF4-FFF2-40B4-BE49-F238E27FC236}">
-                    <a16:creationId xmlns="" xmlns:a16="http://schemas.microsoft.com/office/drawing/2014/main" id="{21416F72-28FB-E27C-D129-16A944A87C67}"/>
+                    <a16:creationId xmlns:a16="http://schemas.microsoft.com/office/drawing/2014/main" id="{21416F72-28FB-E27C-D129-16A944A87C67}"/>
                   </a:ext>
                 </a:extLst>
               </p:cNvPr>
@@ -11274,19 +11141,11 @@
                 </a:r>
                 <a:r>
                   <a:rPr lang="pt-BR" b="1" dirty="0"/>
-                  <a:t> classe por </a:t>
-                </a:r>
-                <a:r>
-                  <a:rPr lang="pt-BR" b="1" dirty="0" smtClean="0"/>
-                  <a:t>classificação</a:t>
-                </a:r>
-                <a:r>
-                  <a:rPr lang="pt-BR" dirty="0" smtClean="0"/>
-                  <a:t>, </a:t>
-                </a:r>
-                <a:r>
-                  <a:rPr lang="pt-BR" dirty="0"/>
-                  <a:t>portanto, ele deve ser usado apenas com </a:t>
+                  <a:t> classe por classificação</a:t>
+                </a:r>
+                <a:r>
+                  <a:rPr lang="pt-BR" dirty="0"/>
+                  <a:t>, portanto, ele deve ser usado apenas com </a:t>
                 </a:r>
                 <a:r>
                   <a:rPr lang="pt-BR" b="1" dirty="0"/>
@@ -11331,20 +11190,8 @@
                   <a:buChar char="§"/>
                 </a:pPr>
                 <a:r>
-                  <a:rPr lang="pt-BR" dirty="0" smtClean="0"/>
-                  <a:t>Por exemplo, </a:t>
-                </a:r>
-                <a:r>
-                  <a:rPr lang="pt-BR" dirty="0"/>
-                  <a:t>notícias, músicas e imagens, por exemplo, podem pertencer a </a:t>
-                </a:r>
-                <a:r>
-                  <a:rPr lang="pt-BR" dirty="0" smtClean="0"/>
-                  <a:t>várias classes </a:t>
-                </a:r>
-                <a:r>
-                  <a:rPr lang="pt-BR" dirty="0"/>
-                  <a:t>ao mesmo tempo.</a:t>
+                  <a:rPr lang="pt-BR" dirty="0"/>
+                  <a:t>Por exemplo, notícias, músicas e imagens, por exemplo, podem pertencer a várias classes ao mesmo tempo.</a:t>
                 </a:r>
               </a:p>
               <a:p>
@@ -11561,12 +11408,8 @@
                   <a:buChar char="§"/>
                 </a:pPr>
                 <a:r>
-                  <a:rPr lang="pt-BR" dirty="0" smtClean="0"/>
-                  <a:t>Por exemplo, se </a:t>
-                </a:r>
-                <a:r>
-                  <a:rPr lang="pt-BR" dirty="0"/>
-                  <a:t>temos 3 classes, teremos 3 funções discriminantes, </a:t>
+                  <a:rPr lang="pt-BR" dirty="0"/>
+                  <a:t>Por exemplo, se temos 3 classes, teremos 3 funções discriminantes, </a:t>
                 </a:r>
                 <a14:m>
                   <m:oMath xmlns:m="http://schemas.openxmlformats.org/officeDocument/2006/math">
@@ -11641,7 +11484,7 @@
             </p:txBody>
           </p:sp>
         </mc:Choice>
-        <mc:Fallback>
+        <mc:Fallback xmlns="">
           <p:sp>
             <p:nvSpPr>
               <p:cNvPr id="3" name="Espaço Reservado para Conteúdo 2">
@@ -11720,7 +11563,7 @@
           <p:cNvPr id="2" name="Título 1">
             <a:extLst>
               <a:ext uri="{FF2B5EF4-FFF2-40B4-BE49-F238E27FC236}">
-                <a16:creationId xmlns="" xmlns:a16="http://schemas.microsoft.com/office/drawing/2014/main" id="{DCD47F25-5DD1-794E-8733-BFD771A2DE49}"/>
+                <a16:creationId xmlns:a16="http://schemas.microsoft.com/office/drawing/2014/main" id="{DCD47F25-5DD1-794E-8733-BFD771A2DE49}"/>
               </a:ext>
             </a:extLst>
           </p:cNvPr>
@@ -11747,14 +11590,14 @@
           </a:p>
         </p:txBody>
       </p:sp>
-      <mc:AlternateContent xmlns:mc="http://schemas.openxmlformats.org/markup-compatibility/2006">
-        <mc:Choice xmlns:a14="http://schemas.microsoft.com/office/drawing/2010/main" Requires="a14">
+      <mc:AlternateContent xmlns:mc="http://schemas.openxmlformats.org/markup-compatibility/2006" xmlns:a14="http://schemas.microsoft.com/office/drawing/2010/main">
+        <mc:Choice Requires="a14">
           <p:sp>
             <p:nvSpPr>
               <p:cNvPr id="3" name="Espaço Reservado para Conteúdo 2">
                 <a:extLst>
                   <a:ext uri="{FF2B5EF4-FFF2-40B4-BE49-F238E27FC236}">
-                    <a16:creationId xmlns="" xmlns:a16="http://schemas.microsoft.com/office/drawing/2014/main" id="{D79BB7DC-99E7-8958-EC77-566B7E3C2BBB}"/>
+                    <a16:creationId xmlns:a16="http://schemas.microsoft.com/office/drawing/2014/main" id="{D79BB7DC-99E7-8958-EC77-566B7E3C2BBB}"/>
                   </a:ext>
                 </a:extLst>
               </p:cNvPr>
@@ -11778,7 +11621,7 @@
               <a:lstStyle/>
               <a:p>
                 <a:r>
-                  <a:rPr lang="pt-BR" dirty="0" smtClean="0"/>
+                  <a:rPr lang="pt-BR" dirty="0"/>
                   <a:t>A </a:t>
                 </a:r>
                 <a:r>
@@ -12975,7 +12818,7 @@
             </p:txBody>
           </p:sp>
         </mc:Choice>
-        <mc:Fallback>
+        <mc:Fallback xmlns="">
           <p:sp>
             <p:nvSpPr>
               <p:cNvPr id="3" name="Espaço Reservado para Conteúdo 2">
@@ -13054,7 +12897,7 @@
           <p:cNvPr id="2" name="Título 1">
             <a:extLst>
               <a:ext uri="{FF2B5EF4-FFF2-40B4-BE49-F238E27FC236}">
-                <a16:creationId xmlns="" xmlns:a16="http://schemas.microsoft.com/office/drawing/2014/main" id="{52E3438D-F516-F1D3-A02F-51857586D07A}"/>
+                <a16:creationId xmlns:a16="http://schemas.microsoft.com/office/drawing/2014/main" id="{52E3438D-F516-F1D3-A02F-51857586D07A}"/>
               </a:ext>
             </a:extLst>
           </p:cNvPr>
@@ -13088,7 +12931,7 @@
               <p:cNvPr id="3" name="Espaço Reservado para Conteúdo 2">
                 <a:extLst>
                   <a:ext uri="{FF2B5EF4-FFF2-40B4-BE49-F238E27FC236}">
-                    <a16:creationId xmlns="" xmlns:a16="http://schemas.microsoft.com/office/drawing/2014/main" id="{BCAAD57B-65A0-9DAD-79FC-2AE2692EB84B}"/>
+                    <a16:creationId xmlns:a16="http://schemas.microsoft.com/office/drawing/2014/main" id="{BCAAD57B-65A0-9DAD-79FC-2AE2692EB84B}"/>
                   </a:ext>
                 </a:extLst>
               </p:cNvPr>
@@ -13112,19 +12955,14 @@
               <a:lstStyle/>
               <a:p>
                 <a:r>
-                  <a:rPr lang="pt-BR" dirty="0" smtClean="0"/>
+                  <a:rPr lang="pt-BR" dirty="0"/>
                   <a:t>É uma generalização da função sigmoide.</a:t>
                 </a:r>
-                <a:endParaRPr lang="pt-BR" dirty="0"/>
               </a:p>
               <a:p>
                 <a:r>
-                  <a:rPr lang="pt-BR" dirty="0" smtClean="0"/>
-                  <a:t>O </a:t>
-                </a:r>
-                <a:r>
-                  <a:rPr lang="pt-BR" dirty="0"/>
-                  <a:t>somatório de termos exponenciais no denominador </a:t>
+                  <a:rPr lang="pt-BR" dirty="0"/>
+                  <a:t>O somatório de termos exponenciais no denominador </a:t>
                 </a:r>
                 <a:r>
                   <a:rPr lang="pt-BR" b="1" dirty="0">
@@ -13136,11 +12974,7 @@
                 </a:r>
                 <a:r>
                   <a:rPr lang="pt-BR" dirty="0"/>
-                  <a:t> o valor </a:t>
-                </a:r>
-                <a:r>
-                  <a:rPr lang="pt-BR" dirty="0" smtClean="0"/>
-                  <a:t>de cada uma das </a:t>
+                  <a:t> o valor de cada uma das </a:t>
                 </a:r>
                 <a14:m>
                   <m:oMath xmlns:m="http://schemas.openxmlformats.org/officeDocument/2006/math">
@@ -13153,10 +12987,9 @@
                   </m:oMath>
                 </a14:m>
                 <a:r>
-                  <a:rPr lang="pt-BR" dirty="0" smtClean="0"/>
+                  <a:rPr lang="pt-BR" dirty="0"/>
                   <a:t> saídas, fazendo com que elas fiquem no intervalo [0, 1].</a:t>
                 </a:r>
-                <a:endParaRPr lang="pt-BR" dirty="0"/>
               </a:p>
               <a:p>
                 <a:pPr marL="0" indent="0">
@@ -13672,18 +13505,14 @@
                   <a:t> funções discriminantes em uma distribuição de probabilidades</a:t>
                 </a:r>
                 <a:r>
-                  <a:rPr lang="pt-BR" dirty="0" smtClean="0"/>
+                  <a:rPr lang="pt-BR" dirty="0"/>
                   <a:t>.</a:t>
                 </a:r>
               </a:p>
               <a:p>
                 <a:r>
-                  <a:rPr lang="pt-BR" dirty="0" smtClean="0"/>
-                  <a:t>Assim, dado </a:t>
-                </a:r>
-                <a:r>
-                  <a:rPr lang="pt-BR" dirty="0"/>
-                  <a:t>um exemplo de entrada, ela </a:t>
+                  <a:rPr lang="pt-BR" dirty="0"/>
+                  <a:t>Assim, dado um exemplo de entrada, ela </a:t>
                 </a:r>
                 <a:r>
                   <a:rPr lang="pt-BR" b="1" dirty="0">
@@ -13714,7 +13543,7 @@
                   <a:t> </a:t>
                 </a:r>
                 <a:r>
-                  <a:rPr lang="pt-BR" b="1" dirty="0" smtClean="0">
+                  <a:rPr lang="pt-BR" b="1" dirty="0">
                     <a:solidFill>
                       <a:srgbClr val="00B050"/>
                     </a:solidFill>
@@ -13722,7 +13551,7 @@
                   <a:t>condicional</a:t>
                 </a:r>
                 <a:r>
-                  <a:rPr lang="pt-BR" dirty="0" smtClean="0">
+                  <a:rPr lang="pt-BR" dirty="0">
                     <a:solidFill>
                       <a:srgbClr val="00B050"/>
                     </a:solidFill>
@@ -13879,18 +13708,10 @@
                       <a:srgbClr val="00B050"/>
                     </a:solidFill>
                   </a:rPr>
-                  <a:t>a cada </a:t>
-                </a:r>
-                <a:r>
-                  <a:rPr lang="pt-BR" b="1" dirty="0" smtClean="0">
-                    <a:solidFill>
-                      <a:srgbClr val="00B050"/>
-                    </a:solidFill>
-                  </a:rPr>
-                  <a:t>uma </a:t>
-                </a:r>
-                <a:r>
-                  <a:rPr lang="pt-BR" dirty="0" smtClean="0"/>
+                  <a:t>a cada uma </a:t>
+                </a:r>
+                <a:r>
+                  <a:rPr lang="pt-BR" dirty="0"/>
                   <a:t>das </a:t>
                 </a:r>
                 <a14:m>
@@ -13910,7 +13731,7 @@
                   </m:oMath>
                 </a14:m>
                 <a:r>
-                  <a:rPr lang="pt-BR" dirty="0" smtClean="0"/>
+                  <a:rPr lang="pt-BR" dirty="0"/>
                   <a:t>classes.</a:t>
                 </a:r>
                 <a:endParaRPr lang="pt-BR" b="1" dirty="0">
@@ -13971,7 +13792,7 @@
           <p:cNvPr id="5" name="Rectangle 11">
             <a:extLst>
               <a:ext uri="{FF2B5EF4-FFF2-40B4-BE49-F238E27FC236}">
-                <a16:creationId xmlns="" xmlns:a16="http://schemas.microsoft.com/office/drawing/2014/main" id="{D1D7E603-A964-1188-9D09-B0C1E18592FA}"/>
+                <a16:creationId xmlns:a16="http://schemas.microsoft.com/office/drawing/2014/main" id="{D1D7E603-A964-1188-9D09-B0C1E18592FA}"/>
               </a:ext>
             </a:extLst>
           </p:cNvPr>
@@ -14053,7 +13874,7 @@
           <p:cNvPr id="2" name="Título 1">
             <a:extLst>
               <a:ext uri="{FF2B5EF4-FFF2-40B4-BE49-F238E27FC236}">
-                <a16:creationId xmlns="" xmlns:a16="http://schemas.microsoft.com/office/drawing/2014/main" id="{99DAA83A-B143-94BB-B48B-41A7423070CE}"/>
+                <a16:creationId xmlns:a16="http://schemas.microsoft.com/office/drawing/2014/main" id="{99DAA83A-B143-94BB-B48B-41A7423070CE}"/>
               </a:ext>
             </a:extLst>
           </p:cNvPr>
@@ -14088,7 +13909,7 @@
               <p:cNvPr id="3" name="Espaço Reservado para Conteúdo 2">
                 <a:extLst>
                   <a:ext uri="{FF2B5EF4-FFF2-40B4-BE49-F238E27FC236}">
-                    <a16:creationId xmlns="" xmlns:a16="http://schemas.microsoft.com/office/drawing/2014/main" id="{32DF54A1-52F5-C48C-7CD4-D6E451DF19D8}"/>
+                    <a16:creationId xmlns:a16="http://schemas.microsoft.com/office/drawing/2014/main" id="{32DF54A1-52F5-C48C-7CD4-D6E451DF19D8}"/>
                   </a:ext>
                 </a:extLst>
               </p:cNvPr>
@@ -14175,16 +13996,7 @@
                     </a:solidFill>
                     <a:effectLst/>
                   </a:rPr>
-                  <a:t> </a:t>
-                </a:r>
-                <a:r>
-                  <a:rPr lang="pt-BR" b="1" dirty="0" smtClean="0">
-                    <a:solidFill>
-                      <a:srgbClr val="00B050"/>
-                    </a:solidFill>
-                    <a:effectLst/>
-                  </a:rPr>
-                  <a:t>os valores das </a:t>
+                  <a:t> os valores das </a:t>
                 </a:r>
                 <a:r>
                   <a:rPr lang="pt-BR" dirty="0"/>
@@ -14218,25 +14030,7 @@
                     </a:solidFill>
                     <a:effectLst/>
                   </a:rPr>
-                  <a:t>funções </a:t>
-                </a:r>
-                <a:r>
-                  <a:rPr lang="pt-BR" b="1" dirty="0" smtClean="0">
-                    <a:solidFill>
-                      <a:srgbClr val="00B050"/>
-                    </a:solidFill>
-                    <a:effectLst/>
-                  </a:rPr>
-                  <a:t>discriminantes</a:t>
-                </a:r>
-                <a:r>
-                  <a:rPr lang="pt-BR" b="0" i="0" dirty="0" smtClean="0">
-                    <a:solidFill>
-                      <a:schemeClr val="tx1"/>
-                    </a:solidFill>
-                    <a:effectLst/>
-                  </a:rPr>
-                  <a:t>, </a:t>
+                  <a:t>funções discriminantes</a:t>
                 </a:r>
                 <a:r>
                   <a:rPr lang="pt-BR" b="0" i="0" dirty="0">
@@ -14245,7 +14039,7 @@
                     </a:solidFill>
                     <a:effectLst/>
                   </a:rPr>
-                  <a:t>ela</a:t>
+                  <a:t>, ela</a:t>
                 </a:r>
                 <a:endParaRPr lang="pt-BR" dirty="0"/>
               </a:p>
@@ -14331,7 +14125,7 @@
           <p:cNvPr id="6" name="Imagem 5">
             <a:extLst>
               <a:ext uri="{FF2B5EF4-FFF2-40B4-BE49-F238E27FC236}">
-                <a16:creationId xmlns="" xmlns:a16="http://schemas.microsoft.com/office/drawing/2014/main" id="{ED5D1F5D-F195-0452-50D4-07E9F2B1C49D}"/>
+                <a16:creationId xmlns:a16="http://schemas.microsoft.com/office/drawing/2014/main" id="{ED5D1F5D-F195-0452-50D4-07E9F2B1C49D}"/>
               </a:ext>
             </a:extLst>
           </p:cNvPr>
@@ -14367,7 +14161,7 @@
           <p:cNvPr id="8" name="CaixaDeTexto 7">
             <a:extLst>
               <a:ext uri="{FF2B5EF4-FFF2-40B4-BE49-F238E27FC236}">
-                <a16:creationId xmlns="" xmlns:a16="http://schemas.microsoft.com/office/drawing/2014/main" id="{0DC5673F-9B77-2E9E-8317-E71CA8896FE0}"/>
+                <a16:creationId xmlns:a16="http://schemas.microsoft.com/office/drawing/2014/main" id="{0DC5673F-9B77-2E9E-8317-E71CA8896FE0}"/>
               </a:ext>
             </a:extLst>
           </p:cNvPr>
@@ -14419,7 +14213,7 @@
               <p:cNvPr id="4" name="CaixaDeTexto 3">
                 <a:extLst>
                   <a:ext uri="{FF2B5EF4-FFF2-40B4-BE49-F238E27FC236}">
-                    <a16:creationId xmlns="" xmlns:a16="http://schemas.microsoft.com/office/drawing/2014/main" id="{CBD55F82-56D5-32C8-C5AB-AF99477FBAAC}"/>
+                    <a16:creationId xmlns:a16="http://schemas.microsoft.com/office/drawing/2014/main" id="{CBD55F82-56D5-32C8-C5AB-AF99477FBAAC}"/>
                   </a:ext>
                 </a:extLst>
               </p:cNvPr>
@@ -14546,7 +14340,7 @@
           <p:cNvPr id="2" name="Título 1">
             <a:extLst>
               <a:ext uri="{FF2B5EF4-FFF2-40B4-BE49-F238E27FC236}">
-                <a16:creationId xmlns="" xmlns:a16="http://schemas.microsoft.com/office/drawing/2014/main" id="{99DAA83A-B143-94BB-B48B-41A7423070CE}"/>
+                <a16:creationId xmlns:a16="http://schemas.microsoft.com/office/drawing/2014/main" id="{99DAA83A-B143-94BB-B48B-41A7423070CE}"/>
               </a:ext>
             </a:extLst>
           </p:cNvPr>
@@ -14581,7 +14375,7 @@
               <p:cNvPr id="3" name="Espaço Reservado para Conteúdo 2">
                 <a:extLst>
                   <a:ext uri="{FF2B5EF4-FFF2-40B4-BE49-F238E27FC236}">
-                    <a16:creationId xmlns="" xmlns:a16="http://schemas.microsoft.com/office/drawing/2014/main" id="{32DF54A1-52F5-C48C-7CD4-D6E451DF19D8}"/>
+                    <a16:creationId xmlns:a16="http://schemas.microsoft.com/office/drawing/2014/main" id="{32DF54A1-52F5-C48C-7CD4-D6E451DF19D8}"/>
                   </a:ext>
                 </a:extLst>
               </p:cNvPr>
@@ -14605,26 +14399,20 @@
               <a:lstStyle/>
               <a:p>
                 <a:r>
-                  <a:rPr lang="pt-BR" b="0" dirty="0" smtClean="0">
+                  <a:rPr lang="pt-BR" b="0" dirty="0">
                     <a:effectLst/>
                   </a:rPr>
                   <a:t>Além de fazer c</a:t>
                 </a:r>
                 <a:r>
-                  <a:rPr lang="pt-BR" dirty="0" smtClean="0"/>
+                  <a:rPr lang="pt-BR" dirty="0"/>
                   <a:t>om </a:t>
-                </a:r>
-                <a:r>
-                  <a:rPr lang="pt-BR" dirty="0" smtClean="0">
-                    <a:effectLst/>
-                  </a:rPr>
-                  <a:t>que </a:t>
                 </a:r>
                 <a:r>
                   <a:rPr lang="pt-BR" dirty="0">
                     <a:effectLst/>
                   </a:rPr>
-                  <a:t>as </a:t>
+                  <a:t>que as </a:t>
                 </a:r>
                 <a:r>
                   <a:rPr lang="pt-BR" b="1" dirty="0">
@@ -14633,16 +14421,7 @@
                     </a:solidFill>
                     <a:effectLst/>
                   </a:rPr>
-                  <a:t>saídas estejam no intervalo entre 0 e </a:t>
-                </a:r>
-                <a:r>
-                  <a:rPr lang="pt-BR" b="1" dirty="0" smtClean="0">
-                    <a:solidFill>
-                      <a:srgbClr val="00B050"/>
-                    </a:solidFill>
-                    <a:effectLst/>
-                  </a:rPr>
-                  <a:t>1, </a:t>
+                  <a:t>saídas estejam no intervalo entre 0 e 1, </a:t>
                 </a:r>
                 <a:r>
                   <a:rPr lang="pt-BR" b="1" dirty="0">
@@ -14650,15 +14429,7 @@
                       <a:srgbClr val="00B050"/>
                     </a:solidFill>
                   </a:rPr>
-                  <a:t>ela </a:t>
-                </a:r>
-                <a:r>
-                  <a:rPr lang="pt-BR" b="1" dirty="0" smtClean="0">
-                    <a:solidFill>
-                      <a:srgbClr val="00B050"/>
-                    </a:solidFill>
-                  </a:rPr>
-                  <a:t>garante que </a:t>
+                  <a:t>ela garante que </a:t>
                 </a:r>
                 <a:r>
                   <a:rPr lang="pt-BR" b="1" dirty="0">
@@ -14667,25 +14438,7 @@
                     </a:solidFill>
                     <a:effectLst/>
                   </a:rPr>
-                  <a:t>soma de todas as saídas </a:t>
-                </a:r>
-                <a:r>
-                  <a:rPr lang="pt-BR" b="1" dirty="0" smtClean="0">
-                    <a:solidFill>
-                      <a:srgbClr val="00B050"/>
-                    </a:solidFill>
-                    <a:effectLst/>
-                  </a:rPr>
-                  <a:t>sempre seja </a:t>
-                </a:r>
-                <a:r>
-                  <a:rPr lang="pt-BR" b="1" dirty="0">
-                    <a:solidFill>
-                      <a:srgbClr val="00B050"/>
-                    </a:solidFill>
-                    <a:effectLst/>
-                  </a:rPr>
-                  <a:t>igual a 1</a:t>
+                  <a:t>soma de todas as saídas sempre seja igual a 1</a:t>
                 </a:r>
                 <a:r>
                   <a:rPr lang="pt-BR" b="0" dirty="0">
@@ -14712,7 +14465,7 @@
                   <a:t>multinomial</a:t>
                 </a:r>
                 <a:r>
-                  <a:rPr lang="pt-BR" b="0" dirty="0" smtClean="0">
+                  <a:rPr lang="pt-BR" b="0" dirty="0">
                     <a:effectLst/>
                   </a:rPr>
                   <a:t>.</a:t>
@@ -15083,7 +14836,7 @@
                   </m:oMath>
                 </a14:m>
                 <a:r>
-                  <a:rPr lang="pt-BR" dirty="0" smtClean="0"/>
+                  <a:rPr lang="pt-BR" dirty="0"/>
                   <a:t>.</a:t>
                 </a:r>
                 <a:endParaRPr lang="pt-BR" b="0" dirty="0">
@@ -15142,7 +14895,7 @@
           <p:cNvPr id="6" name="Imagem 5">
             <a:extLst>
               <a:ext uri="{FF2B5EF4-FFF2-40B4-BE49-F238E27FC236}">
-                <a16:creationId xmlns="" xmlns:a16="http://schemas.microsoft.com/office/drawing/2014/main" id="{ED5D1F5D-F195-0452-50D4-07E9F2B1C49D}"/>
+                <a16:creationId xmlns:a16="http://schemas.microsoft.com/office/drawing/2014/main" id="{ED5D1F5D-F195-0452-50D4-07E9F2B1C49D}"/>
               </a:ext>
             </a:extLst>
           </p:cNvPr>
@@ -15180,7 +14933,7 @@
               <p:cNvPr id="4" name="CaixaDeTexto 3">
                 <a:extLst>
                   <a:ext uri="{FF2B5EF4-FFF2-40B4-BE49-F238E27FC236}">
-                    <a16:creationId xmlns="" xmlns:a16="http://schemas.microsoft.com/office/drawing/2014/main" id="{2B7728A0-505D-9DAE-23EC-8172E2EEEFA9}"/>
+                    <a16:creationId xmlns:a16="http://schemas.microsoft.com/office/drawing/2014/main" id="{2B7728A0-505D-9DAE-23EC-8172E2EEEFA9}"/>
                   </a:ext>
                 </a:extLst>
               </p:cNvPr>
@@ -15307,7 +15060,7 @@
           <p:cNvPr id="2" name="Título 1">
             <a:extLst>
               <a:ext uri="{FF2B5EF4-FFF2-40B4-BE49-F238E27FC236}">
-                <a16:creationId xmlns="" xmlns:a16="http://schemas.microsoft.com/office/drawing/2014/main" id="{028A152F-93D8-11FA-9B7A-B62AE5BB6486}"/>
+                <a16:creationId xmlns:a16="http://schemas.microsoft.com/office/drawing/2014/main" id="{028A152F-93D8-11FA-9B7A-B62AE5BB6486}"/>
               </a:ext>
             </a:extLst>
           </p:cNvPr>
@@ -15334,14 +15087,14 @@
           </a:p>
         </p:txBody>
       </p:sp>
-      <mc:AlternateContent xmlns:mc="http://schemas.openxmlformats.org/markup-compatibility/2006">
-        <mc:Choice xmlns:a14="http://schemas.microsoft.com/office/drawing/2010/main" Requires="a14">
+      <mc:AlternateContent xmlns:mc="http://schemas.openxmlformats.org/markup-compatibility/2006" xmlns:a14="http://schemas.microsoft.com/office/drawing/2010/main">
+        <mc:Choice Requires="a14">
           <p:sp>
             <p:nvSpPr>
               <p:cNvPr id="3" name="Espaço Reservado para Conteúdo 2">
                 <a:extLst>
                   <a:ext uri="{FF2B5EF4-FFF2-40B4-BE49-F238E27FC236}">
-                    <a16:creationId xmlns="" xmlns:a16="http://schemas.microsoft.com/office/drawing/2014/main" id="{B3535727-BB24-BB15-5C03-3DA9A3F9A09A}"/>
+                    <a16:creationId xmlns:a16="http://schemas.microsoft.com/office/drawing/2014/main" id="{B3535727-BB24-BB15-5C03-3DA9A3F9A09A}"/>
                   </a:ext>
                 </a:extLst>
               </p:cNvPr>
@@ -15404,11 +15157,7 @@
                 </a:r>
                 <a:r>
                   <a:rPr lang="pt-BR" dirty="0"/>
-                  <a:t> (i.e</a:t>
-                </a:r>
-                <a:r>
-                  <a:rPr lang="pt-BR" dirty="0" smtClean="0"/>
-                  <a:t>., a </a:t>
+                  <a:t> (i.e., a </a:t>
                 </a:r>
                 <a:r>
                   <a:rPr lang="pt-BR" b="1" dirty="0"/>
@@ -15474,7 +15223,7 @@
             </p:txBody>
           </p:sp>
         </mc:Choice>
-        <mc:Fallback>
+        <mc:Fallback xmlns="">
           <p:sp>
             <p:nvSpPr>
               <p:cNvPr id="3" name="Espaço Reservado para Conteúdo 2">
@@ -15523,7 +15272,7 @@
           <p:cNvPr id="4" name="Imagem 5">
             <a:extLst>
               <a:ext uri="{FF2B5EF4-FFF2-40B4-BE49-F238E27FC236}">
-                <a16:creationId xmlns="" xmlns:a16="http://schemas.microsoft.com/office/drawing/2014/main" id="{42A1713D-06B5-FB35-8488-833F7CAB7166}"/>
+                <a16:creationId xmlns:a16="http://schemas.microsoft.com/office/drawing/2014/main" id="{42A1713D-06B5-FB35-8488-833F7CAB7166}"/>
               </a:ext>
             </a:extLst>
           </p:cNvPr>
@@ -15589,7 +15338,7 @@
           <p:cNvPr id="2" name="Title 1">
             <a:extLst>
               <a:ext uri="{FF2B5EF4-FFF2-40B4-BE49-F238E27FC236}">
-                <a16:creationId xmlns="" xmlns:a16="http://schemas.microsoft.com/office/drawing/2014/main" id="{2DB9D242-5419-0FFB-7863-B3BB3BD80869}"/>
+                <a16:creationId xmlns:a16="http://schemas.microsoft.com/office/drawing/2014/main" id="{2DB9D242-5419-0FFB-7863-B3BB3BD80869}"/>
               </a:ext>
             </a:extLst>
           </p:cNvPr>
@@ -15613,14 +15362,14 @@
           </a:p>
         </p:txBody>
       </p:sp>
-      <mc:AlternateContent xmlns:mc="http://schemas.openxmlformats.org/markup-compatibility/2006">
-        <mc:Choice xmlns:a14="http://schemas.microsoft.com/office/drawing/2010/main" Requires="a14">
+      <mc:AlternateContent xmlns:mc="http://schemas.openxmlformats.org/markup-compatibility/2006" xmlns:a14="http://schemas.microsoft.com/office/drawing/2010/main">
+        <mc:Choice Requires="a14">
           <p:sp>
             <p:nvSpPr>
               <p:cNvPr id="3" name="Content Placeholder 2">
                 <a:extLst>
                   <a:ext uri="{FF2B5EF4-FFF2-40B4-BE49-F238E27FC236}">
-                    <a16:creationId xmlns="" xmlns:a16="http://schemas.microsoft.com/office/drawing/2014/main" id="{34B1DEA3-BAAD-D90C-CD9D-99A5A24F4544}"/>
+                    <a16:creationId xmlns:a16="http://schemas.microsoft.com/office/drawing/2014/main" id="{34B1DEA3-BAAD-D90C-CD9D-99A5A24F4544}"/>
                   </a:ext>
                 </a:extLst>
               </p:cNvPr>
@@ -15644,7 +15393,7 @@
               <a:lstStyle/>
               <a:p>
                 <a:r>
-                  <a:rPr lang="pt-BR" dirty="0" smtClean="0"/>
+                  <a:rPr lang="pt-BR" dirty="0"/>
                   <a:t>Para atingir o objetivo, devemos definir uma </a:t>
                 </a:r>
                 <a:r>
@@ -16344,16 +16093,12 @@
                   <a:buChar char="§"/>
                 </a:pPr>
                 <a:r>
-                  <a:rPr lang="pt-BR" b="1" dirty="0" smtClean="0"/>
+                  <a:rPr lang="pt-BR" b="1" dirty="0"/>
                   <a:t>OBS</a:t>
                 </a:r>
                 <a:r>
-                  <a:rPr lang="pt-BR" dirty="0" smtClean="0"/>
-                  <a:t>.: O </a:t>
-                </a:r>
-                <a:r>
-                  <a:rPr lang="pt-BR" dirty="0"/>
-                  <a:t>erro tende a 0 quando </a:t>
+                  <a:rPr lang="pt-BR" dirty="0"/>
+                  <a:t>.: O erro tende a 0 quando </a:t>
                 </a:r>
                 <a14:m>
                   <m:oMath xmlns:m="http://schemas.openxmlformats.org/officeDocument/2006/math">
@@ -16429,21 +16174,13 @@
                 </a14:m>
                 <a:r>
                   <a:rPr lang="pt-BR" dirty="0"/>
-                  <a:t> tende a 1, caso contrário, </a:t>
-                </a:r>
-                <a:r>
-                  <a:rPr lang="pt-BR" dirty="0" smtClean="0"/>
-                  <a:t>ele </a:t>
-                </a:r>
-                <a:r>
-                  <a:rPr lang="pt-BR" dirty="0"/>
-                  <a:t>aumenta.</a:t>
+                  <a:t> tende a 1, caso contrário, ele aumenta.</a:t>
                 </a:r>
               </a:p>
             </p:txBody>
           </p:sp>
         </mc:Choice>
-        <mc:Fallback>
+        <mc:Fallback xmlns="">
           <p:sp>
             <p:nvSpPr>
               <p:cNvPr id="3" name="Content Placeholder 2">
@@ -16522,7 +16259,7 @@
           <p:cNvPr id="2" name="Title 1">
             <a:extLst>
               <a:ext uri="{FF2B5EF4-FFF2-40B4-BE49-F238E27FC236}">
-                <a16:creationId xmlns="" xmlns:a16="http://schemas.microsoft.com/office/drawing/2014/main" id="{997538D5-DC01-EC48-38D2-99D754F1BB92}"/>
+                <a16:creationId xmlns:a16="http://schemas.microsoft.com/office/drawing/2014/main" id="{997538D5-DC01-EC48-38D2-99D754F1BB92}"/>
               </a:ext>
             </a:extLst>
           </p:cNvPr>
@@ -16546,14 +16283,14 @@
           </a:p>
         </p:txBody>
       </p:sp>
-      <mc:AlternateContent xmlns:mc="http://schemas.openxmlformats.org/markup-compatibility/2006">
-        <mc:Choice xmlns:a14="http://schemas.microsoft.com/office/drawing/2010/main" Requires="a14">
+      <mc:AlternateContent xmlns:mc="http://schemas.openxmlformats.org/markup-compatibility/2006" xmlns:a14="http://schemas.microsoft.com/office/drawing/2010/main">
+        <mc:Choice Requires="a14">
           <p:sp>
             <p:nvSpPr>
               <p:cNvPr id="3" name="Content Placeholder 2">
                 <a:extLst>
                   <a:ext uri="{FF2B5EF4-FFF2-40B4-BE49-F238E27FC236}">
-                    <a16:creationId xmlns="" xmlns:a16="http://schemas.microsoft.com/office/drawing/2014/main" id="{17D7928D-3A32-7330-5FDC-756155EF2F3D}"/>
+                    <a16:creationId xmlns:a16="http://schemas.microsoft.com/office/drawing/2014/main" id="{17D7928D-3A32-7330-5FDC-756155EF2F3D}"/>
                   </a:ext>
                 </a:extLst>
               </p:cNvPr>
@@ -16962,12 +16699,8 @@
               </a:p>
               <a:p>
                 <a:r>
-                  <a:rPr lang="pt-BR" dirty="0" smtClean="0"/>
-                  <a:t>Essa </a:t>
-                </a:r>
-                <a:r>
-                  <a:rPr lang="pt-BR" dirty="0"/>
-                  <a:t>função mede a </a:t>
+                  <a:rPr lang="pt-BR" dirty="0"/>
+                  <a:t>Essa função mede a </a:t>
                 </a:r>
                 <a:r>
                   <a:rPr lang="pt-BR" b="1" dirty="0">
@@ -16983,54 +16716,17 @@
                       <a:srgbClr val="7030A0"/>
                     </a:solidFill>
                   </a:rPr>
-                  <a:t>entre as distribuições de probabilidade </a:t>
-                </a:r>
-                <a:r>
-                  <a:rPr lang="pt-BR" b="1" dirty="0" smtClean="0">
-                    <a:solidFill>
-                      <a:srgbClr val="7030A0"/>
-                    </a:solidFill>
-                  </a:rPr>
-                  <a:t>da saída do modelo </a:t>
-                </a:r>
-                <a:r>
-                  <a:rPr lang="pt-BR" b="1" dirty="0">
-                    <a:solidFill>
-                      <a:srgbClr val="7030A0"/>
-                    </a:solidFill>
-                  </a:rPr>
-                  <a:t>e </a:t>
-                </a:r>
-                <a:r>
-                  <a:rPr lang="pt-BR" b="1" dirty="0" smtClean="0">
-                    <a:solidFill>
-                      <a:srgbClr val="7030A0"/>
-                    </a:solidFill>
-                  </a:rPr>
-                  <a:t>a dos </a:t>
-                </a:r>
-                <a:r>
-                  <a:rPr lang="pt-BR" b="1" dirty="0">
-                    <a:solidFill>
-                      <a:srgbClr val="7030A0"/>
-                    </a:solidFill>
-                  </a:rPr>
-                  <a:t>rótulos </a:t>
-                </a:r>
-                <a:r>
-                  <a:rPr lang="pt-BR" dirty="0"/>
-                  <a:t>das classes</a:t>
-                </a:r>
-                <a:r>
-                  <a:rPr lang="pt-BR" dirty="0" smtClean="0"/>
-                  <a:t>.</a:t>
-                </a:r>
-                <a:endParaRPr lang="pt-BR" dirty="0"/>
+                  <a:t>entre as distribuições de probabilidade da saída do modelo e a dos rótulos </a:t>
+                </a:r>
+                <a:r>
+                  <a:rPr lang="pt-BR" dirty="0"/>
+                  <a:t>das classes.</a:t>
+                </a:r>
               </a:p>
             </p:txBody>
           </p:sp>
         </mc:Choice>
-        <mc:Fallback>
+        <mc:Fallback xmlns="">
           <p:sp>
             <p:nvSpPr>
               <p:cNvPr id="3" name="Content Placeholder 2">
@@ -17204,7 +16900,7 @@
           <p:cNvPr id="2" name="Título 1">
             <a:extLst>
               <a:ext uri="{FF2B5EF4-FFF2-40B4-BE49-F238E27FC236}">
-                <a16:creationId xmlns="" xmlns:a16="http://schemas.microsoft.com/office/drawing/2014/main" id="{1FE7CD05-66F2-8967-6154-CCED38E0F987}"/>
+                <a16:creationId xmlns:a16="http://schemas.microsoft.com/office/drawing/2014/main" id="{1FE7CD05-66F2-8967-6154-CCED38E0F987}"/>
               </a:ext>
             </a:extLst>
           </p:cNvPr>
@@ -17227,14 +16923,14 @@
           </a:p>
         </p:txBody>
       </p:sp>
-      <mc:AlternateContent xmlns:mc="http://schemas.openxmlformats.org/markup-compatibility/2006">
-        <mc:Choice xmlns:a14="http://schemas.microsoft.com/office/drawing/2010/main" Requires="a14">
+      <mc:AlternateContent xmlns:mc="http://schemas.openxmlformats.org/markup-compatibility/2006" xmlns:a14="http://schemas.microsoft.com/office/drawing/2010/main">
+        <mc:Choice Requires="a14">
           <p:sp>
             <p:nvSpPr>
               <p:cNvPr id="3" name="Espaço Reservado para Conteúdo 2">
                 <a:extLst>
                   <a:ext uri="{FF2B5EF4-FFF2-40B4-BE49-F238E27FC236}">
-                    <a16:creationId xmlns="" xmlns:a16="http://schemas.microsoft.com/office/drawing/2014/main" id="{21A86630-5D79-AD4B-79FC-6C8373E8DB39}"/>
+                    <a16:creationId xmlns:a16="http://schemas.microsoft.com/office/drawing/2014/main" id="{21A86630-5D79-AD4B-79FC-6C8373E8DB39}"/>
                   </a:ext>
                 </a:extLst>
               </p:cNvPr>
@@ -17768,11 +17464,7 @@
                 </a14:m>
                 <a:r>
                   <a:rPr lang="pt-BR" dirty="0"/>
-                  <a:t> é </a:t>
-                </a:r>
-                <a:r>
-                  <a:rPr lang="pt-BR" dirty="0" smtClean="0"/>
-                  <a:t>o vetor do </a:t>
+                  <a:t> é o vetor do </a:t>
                 </a:r>
                 <a14:m>
                   <m:oMath xmlns:m="http://schemas.openxmlformats.org/officeDocument/2006/math">
@@ -17794,15 +17486,7 @@
                 </a:r>
                 <a:r>
                   <a:rPr lang="pt-BR" dirty="0"/>
-                  <a:t> </a:t>
-                </a:r>
-                <a:r>
-                  <a:rPr lang="pt-BR" dirty="0" smtClean="0"/>
-                  <a:t>rótulo </a:t>
-                </a:r>
-                <a:r>
-                  <a:rPr lang="pt-BR" dirty="0"/>
-                  <a:t>usando a codificação </a:t>
+                  <a:t> rótulo usando a codificação </a:t>
                 </a:r>
                 <a:r>
                   <a:rPr lang="pt-BR" b="1" i="1" dirty="0"/>
@@ -18073,15 +17757,7 @@
                 </a14:m>
                 <a:r>
                   <a:rPr lang="pt-BR" dirty="0"/>
-                  <a:t>é </a:t>
-                </a:r>
-                <a:r>
-                  <a:rPr lang="pt-BR" dirty="0" smtClean="0"/>
-                  <a:t>o vetor </a:t>
-                </a:r>
-                <a:r>
-                  <a:rPr lang="pt-BR" dirty="0"/>
-                  <a:t>com as </a:t>
+                  <a:t>é o vetor com as </a:t>
                 </a:r>
                 <a14:m>
                   <m:oMath xmlns:m="http://schemas.openxmlformats.org/officeDocument/2006/math">
@@ -18170,7 +17846,7 @@
             </p:txBody>
           </p:sp>
         </mc:Choice>
-        <mc:Fallback>
+        <mc:Fallback xmlns="">
           <p:sp>
             <p:nvSpPr>
               <p:cNvPr id="3" name="Espaço Reservado para Conteúdo 2">
@@ -18249,7 +17925,7 @@
           <p:cNvPr id="2" name="Título 1">
             <a:extLst>
               <a:ext uri="{FF2B5EF4-FFF2-40B4-BE49-F238E27FC236}">
-                <a16:creationId xmlns="" xmlns:a16="http://schemas.microsoft.com/office/drawing/2014/main" id="{E4598F11-6F65-0753-89FE-F5ABED77B46A}"/>
+                <a16:creationId xmlns:a16="http://schemas.microsoft.com/office/drawing/2014/main" id="{E4598F11-6F65-0753-89FE-F5ABED77B46A}"/>
               </a:ext>
             </a:extLst>
           </p:cNvPr>
@@ -18280,7 +17956,7 @@
               <p:cNvPr id="3" name="Espaço Reservado para Conteúdo 2">
                 <a:extLst>
                   <a:ext uri="{FF2B5EF4-FFF2-40B4-BE49-F238E27FC236}">
-                    <a16:creationId xmlns="" xmlns:a16="http://schemas.microsoft.com/office/drawing/2014/main" id="{FEF4E6DC-E916-D97A-4D18-D469285C4F2C}"/>
+                    <a16:creationId xmlns:a16="http://schemas.microsoft.com/office/drawing/2014/main" id="{FEF4E6DC-E916-D97A-4D18-D469285C4F2C}"/>
                   </a:ext>
                 </a:extLst>
               </p:cNvPr>
@@ -18579,30 +18255,18 @@
                 </a:r>
                 <a:r>
                   <a:rPr lang="pt-BR" b="1" dirty="0"/>
-                  <a:t>função </a:t>
-                </a:r>
-                <a:r>
-                  <a:rPr lang="pt-BR" b="1" dirty="0" smtClean="0"/>
-                  <a:t>da entropia cruzada categórica </a:t>
-                </a:r>
-                <a:r>
-                  <a:rPr lang="pt-BR" dirty="0" smtClean="0"/>
-                  <a:t>é </a:t>
-                </a:r>
-                <a:r>
-                  <a:rPr lang="pt-BR" dirty="0"/>
-                  <a:t>equivalente à </a:t>
+                  <a:t>função da entropia cruzada categórica </a:t>
+                </a:r>
+                <a:r>
+                  <a:rPr lang="pt-BR" dirty="0"/>
+                  <a:t>é equivalente à </a:t>
                 </a:r>
                 <a:r>
                   <a:rPr lang="pt-BR" b="1" dirty="0"/>
-                  <a:t>função da entropia </a:t>
-                </a:r>
-                <a:r>
-                  <a:rPr lang="pt-BR" b="1" dirty="0" smtClean="0"/>
-                  <a:t>cruzada </a:t>
-                </a:r>
-                <a:r>
-                  <a:rPr lang="pt-BR" dirty="0" smtClean="0"/>
+                  <a:t>função da entropia cruzada </a:t>
+                </a:r>
+                <a:r>
+                  <a:rPr lang="pt-BR" dirty="0"/>
                   <a:t>do </a:t>
                 </a:r>
                 <a:r>
@@ -18762,7 +18426,7 @@
           <p:cNvPr id="2" name="Título 1">
             <a:extLst>
               <a:ext uri="{FF2B5EF4-FFF2-40B4-BE49-F238E27FC236}">
-                <a16:creationId xmlns="" xmlns:a16="http://schemas.microsoft.com/office/drawing/2014/main" id="{D5807923-28D2-8150-E304-526DA460D220}"/>
+                <a16:creationId xmlns:a16="http://schemas.microsoft.com/office/drawing/2014/main" id="{D5807923-28D2-8150-E304-526DA460D220}"/>
               </a:ext>
             </a:extLst>
           </p:cNvPr>
@@ -18791,7 +18455,7 @@
           <p:cNvPr id="3" name="Espaço Reservado para Conteúdo 2">
             <a:extLst>
               <a:ext uri="{FF2B5EF4-FFF2-40B4-BE49-F238E27FC236}">
-                <a16:creationId xmlns="" xmlns:a16="http://schemas.microsoft.com/office/drawing/2014/main" id="{FFACD180-C529-EB91-BD2D-B5F491B1E35C}"/>
+                <a16:creationId xmlns:a16="http://schemas.microsoft.com/office/drawing/2014/main" id="{FFACD180-C529-EB91-BD2D-B5F491B1E35C}"/>
               </a:ext>
             </a:extLst>
           </p:cNvPr>
@@ -18923,7 +18587,7 @@
           <p:cNvPr id="1026" name="Picture 2">
             <a:extLst>
               <a:ext uri="{FF2B5EF4-FFF2-40B4-BE49-F238E27FC236}">
-                <a16:creationId xmlns="" xmlns:a16="http://schemas.microsoft.com/office/drawing/2014/main" id="{6FC2BDE8-91E0-6379-9BA3-76511C6153D5}"/>
+                <a16:creationId xmlns:a16="http://schemas.microsoft.com/office/drawing/2014/main" id="{6FC2BDE8-91E0-6379-9BA3-76511C6153D5}"/>
               </a:ext>
             </a:extLst>
           </p:cNvPr>
@@ -18968,7 +18632,7 @@
           <p:cNvPr id="5" name="Picture 2">
             <a:extLst>
               <a:ext uri="{FF2B5EF4-FFF2-40B4-BE49-F238E27FC236}">
-                <a16:creationId xmlns="" xmlns:a16="http://schemas.microsoft.com/office/drawing/2014/main" id="{2771BE1F-7B74-36A4-AA69-9171B025A4B6}"/>
+                <a16:creationId xmlns:a16="http://schemas.microsoft.com/office/drawing/2014/main" id="{2771BE1F-7B74-36A4-AA69-9171B025A4B6}"/>
               </a:ext>
             </a:extLst>
           </p:cNvPr>
@@ -19043,7 +18707,7 @@
           <p:cNvPr id="2" name="Título 1">
             <a:extLst>
               <a:ext uri="{FF2B5EF4-FFF2-40B4-BE49-F238E27FC236}">
-                <a16:creationId xmlns="" xmlns:a16="http://schemas.microsoft.com/office/drawing/2014/main" id="{5D929962-9BFC-4174-AB35-CC23FA013168}"/>
+                <a16:creationId xmlns:a16="http://schemas.microsoft.com/office/drawing/2014/main" id="{5D929962-9BFC-4174-AB35-CC23FA013168}"/>
               </a:ext>
             </a:extLst>
           </p:cNvPr>
@@ -19074,7 +18738,7 @@
               <p:cNvPr id="3" name="Espaço Reservado para Conteúdo 2">
                 <a:extLst>
                   <a:ext uri="{FF2B5EF4-FFF2-40B4-BE49-F238E27FC236}">
-                    <a16:creationId xmlns="" xmlns:a16="http://schemas.microsoft.com/office/drawing/2014/main" id="{1D38055D-E355-F780-9CA0-0337EA0BE4FD}"/>
+                    <a16:creationId xmlns:a16="http://schemas.microsoft.com/office/drawing/2014/main" id="{1D38055D-E355-F780-9CA0-0337EA0BE4FD}"/>
                   </a:ext>
                 </a:extLst>
               </p:cNvPr>
@@ -19098,7 +18762,7 @@
               <a:lstStyle/>
               <a:p>
                 <a:r>
-                  <a:rPr lang="pt-BR" dirty="0" smtClean="0"/>
+                  <a:rPr lang="pt-BR" dirty="0"/>
                   <a:t>A atualização dos </a:t>
                 </a:r>
                 <a:r>
@@ -20348,7 +20012,7 @@
           <p:cNvPr id="2" name="Título 1">
             <a:extLst>
               <a:ext uri="{FF2B5EF4-FFF2-40B4-BE49-F238E27FC236}">
-                <a16:creationId xmlns="" xmlns:a16="http://schemas.microsoft.com/office/drawing/2014/main" id="{01D0947A-594D-A8D5-95F3-38EB04C6BDB6}"/>
+                <a16:creationId xmlns:a16="http://schemas.microsoft.com/office/drawing/2014/main" id="{01D0947A-594D-A8D5-95F3-38EB04C6BDB6}"/>
               </a:ext>
             </a:extLst>
           </p:cNvPr>
@@ -20382,7 +20046,7 @@
               <p:cNvPr id="3" name="Espaço Reservado para Conteúdo 2">
                 <a:extLst>
                   <a:ext uri="{FF2B5EF4-FFF2-40B4-BE49-F238E27FC236}">
-                    <a16:creationId xmlns="" xmlns:a16="http://schemas.microsoft.com/office/drawing/2014/main" id="{DDBA288E-BBB8-E157-840C-AA685AD7D65C}"/>
+                    <a16:creationId xmlns:a16="http://schemas.microsoft.com/office/drawing/2014/main" id="{DDBA288E-BBB8-E157-840C-AA685AD7D65C}"/>
                   </a:ext>
                 </a:extLst>
               </p:cNvPr>
@@ -20694,7 +20358,7 @@
                   <a:t>O vetor gradiente pode ser reescrito </a:t>
                 </a:r>
                 <a:r>
-                  <a:rPr lang="pt-BR" b="1" dirty="0" smtClean="0">
+                  <a:rPr lang="pt-BR" b="1" dirty="0">
                     <a:solidFill>
                       <a:schemeClr val="accent2"/>
                     </a:solidFill>
@@ -21073,15 +20737,7 @@
                 </a14:m>
                 <a:r>
                   <a:rPr lang="pt-BR" dirty="0"/>
-                  <a:t> são matrizes </a:t>
-                </a:r>
-                <a:r>
-                  <a:rPr lang="pt-BR" dirty="0" smtClean="0"/>
-                  <a:t>contendo </a:t>
-                </a:r>
-                <a:r>
-                  <a:rPr lang="pt-BR" dirty="0"/>
-                  <a:t>em cada linha os vetores </a:t>
+                  <a:t> são matrizes contendo em cada linha os vetores </a:t>
                 </a:r>
                 <a14:m>
                   <m:oMath xmlns:m="http://schemas.openxmlformats.org/officeDocument/2006/math">
@@ -21301,7 +20957,7 @@
           <p:cNvPr id="2" name="Título 1">
             <a:extLst>
               <a:ext uri="{FF2B5EF4-FFF2-40B4-BE49-F238E27FC236}">
-                <a16:creationId xmlns="" xmlns:a16="http://schemas.microsoft.com/office/drawing/2014/main" id="{E0F1FD81-6095-2AF0-8691-34E55B8A93B5}"/>
+                <a16:creationId xmlns:a16="http://schemas.microsoft.com/office/drawing/2014/main" id="{E0F1FD81-6095-2AF0-8691-34E55B8A93B5}"/>
               </a:ext>
             </a:extLst>
           </p:cNvPr>
@@ -21335,7 +20991,7 @@
               <p:cNvPr id="3" name="Espaço Reservado para Conteúdo 2">
                 <a:extLst>
                   <a:ext uri="{FF2B5EF4-FFF2-40B4-BE49-F238E27FC236}">
-                    <a16:creationId xmlns="" xmlns:a16="http://schemas.microsoft.com/office/drawing/2014/main" id="{BB734B24-DA50-860B-5D55-C33F6F451B6F}"/>
+                    <a16:creationId xmlns:a16="http://schemas.microsoft.com/office/drawing/2014/main" id="{BB734B24-DA50-860B-5D55-C33F6F451B6F}"/>
                   </a:ext>
                 </a:extLst>
               </p:cNvPr>
@@ -21383,7 +21039,7 @@
                   <a:t>, o </a:t>
                 </a:r>
                 <a:r>
-                  <a:rPr lang="pt-BR" dirty="0" err="1" smtClean="0">
+                  <a:rPr lang="pt-BR" dirty="0" err="1">
                     <a:solidFill>
                       <a:schemeClr val="tx1"/>
                     </a:solidFill>
@@ -21391,20 +21047,12 @@
                   <a:t>regressor</a:t>
                 </a:r>
                 <a:r>
-                  <a:rPr lang="pt-BR" dirty="0" smtClean="0">
-                    <a:solidFill>
-                      <a:schemeClr val="tx1"/>
-                    </a:solidFill>
-                  </a:rPr>
-                  <a:t> atribui </a:t>
-                </a:r>
-                <a:r>
                   <a:rPr lang="pt-BR" dirty="0">
                     <a:solidFill>
                       <a:schemeClr val="tx1"/>
                     </a:solidFill>
                   </a:rPr>
-                  <a:t>ao exemplo de entrada, </a:t>
+                  <a:t> atribui ao exemplo de entrada, </a:t>
                 </a:r>
                 <a14:m>
                   <m:oMath xmlns:m="http://schemas.openxmlformats.org/officeDocument/2006/math">
@@ -21506,15 +21154,7 @@
                       <a:schemeClr val="tx1"/>
                     </a:solidFill>
                   </a:rPr>
-                  <a:t>, da função hipótese com maior </a:t>
-                </a:r>
-                <a:r>
-                  <a:rPr lang="pt-BR" dirty="0" smtClean="0">
-                    <a:solidFill>
-                      <a:schemeClr val="tx1"/>
-                    </a:solidFill>
-                  </a:rPr>
-                  <a:t>valor</a:t>
+                  <a:t>, da função hipótese com maior valor</a:t>
                 </a:r>
                 <a:endParaRPr lang="pt-BR" sz="1600" dirty="0">
                   <a:solidFill>
@@ -21915,7 +21555,7 @@
           <p:cNvPr id="4" name="Imagem 5">
             <a:extLst>
               <a:ext uri="{FF2B5EF4-FFF2-40B4-BE49-F238E27FC236}">
-                <a16:creationId xmlns="" xmlns:a16="http://schemas.microsoft.com/office/drawing/2014/main" id="{535159CB-11DC-74B8-5C5F-D571CD018327}"/>
+                <a16:creationId xmlns:a16="http://schemas.microsoft.com/office/drawing/2014/main" id="{535159CB-11DC-74B8-5C5F-D571CD018327}"/>
               </a:ext>
             </a:extLst>
           </p:cNvPr>
@@ -21981,7 +21621,7 @@
           <p:cNvPr id="2" name="Título 1">
             <a:extLst>
               <a:ext uri="{FF2B5EF4-FFF2-40B4-BE49-F238E27FC236}">
-                <a16:creationId xmlns="" xmlns:a16="http://schemas.microsoft.com/office/drawing/2014/main" id="{FC175046-E9DF-FCC8-C62B-B00332089713}"/>
+                <a16:creationId xmlns:a16="http://schemas.microsoft.com/office/drawing/2014/main" id="{FC175046-E9DF-FCC8-C62B-B00332089713}"/>
               </a:ext>
             </a:extLst>
           </p:cNvPr>
@@ -22015,7 +21655,7 @@
               <p:cNvPr id="3" name="Espaço Reservado para Conteúdo 2">
                 <a:extLst>
                   <a:ext uri="{FF2B5EF4-FFF2-40B4-BE49-F238E27FC236}">
-                    <a16:creationId xmlns="" xmlns:a16="http://schemas.microsoft.com/office/drawing/2014/main" id="{24721BB7-DBA3-D8BF-7F98-ED91BD59DAEC}"/>
+                    <a16:creationId xmlns:a16="http://schemas.microsoft.com/office/drawing/2014/main" id="{24721BB7-DBA3-D8BF-7F98-ED91BD59DAEC}"/>
                   </a:ext>
                 </a:extLst>
               </p:cNvPr>
@@ -22323,7 +21963,7 @@
           <p:cNvPr id="6" name="Imagem 5">
             <a:extLst>
               <a:ext uri="{FF2B5EF4-FFF2-40B4-BE49-F238E27FC236}">
-                <a16:creationId xmlns="" xmlns:a16="http://schemas.microsoft.com/office/drawing/2014/main" id="{FF78CF76-EB26-3FAE-0391-E452288FA28E}"/>
+                <a16:creationId xmlns:a16="http://schemas.microsoft.com/office/drawing/2014/main" id="{FF78CF76-EB26-3FAE-0391-E452288FA28E}"/>
               </a:ext>
             </a:extLst>
           </p:cNvPr>
@@ -22359,7 +21999,7 @@
           <p:cNvPr id="5" name="Rectangle 2">
             <a:extLst>
               <a:ext uri="{FF2B5EF4-FFF2-40B4-BE49-F238E27FC236}">
-                <a16:creationId xmlns:a16="http://schemas.microsoft.com/office/drawing/2014/main" xmlns="" id="{0357C04D-3666-45D0-A263-597819F48D09}"/>
+                <a16:creationId xmlns:a16="http://schemas.microsoft.com/office/drawing/2014/main" id="{0357C04D-3666-45D0-A263-597819F48D09}"/>
               </a:ext>
             </a:extLst>
           </p:cNvPr>
@@ -22587,7 +22227,7 @@
           <p:cNvPr id="4" name="Título 1">
             <a:extLst>
               <a:ext uri="{FF2B5EF4-FFF2-40B4-BE49-F238E27FC236}">
-                <a16:creationId xmlns:a16="http://schemas.microsoft.com/office/drawing/2014/main" xmlns="" id="{32666AC8-2E17-4DB4-B0F5-60C640CCFD2E}"/>
+                <a16:creationId xmlns:a16="http://schemas.microsoft.com/office/drawing/2014/main" id="{32666AC8-2E17-4DB4-B0F5-60C640CCFD2E}"/>
               </a:ext>
             </a:extLst>
           </p:cNvPr>
@@ -22861,7 +22501,7 @@
           <p:cNvPr id="4" name="Picture 2" descr="Ana Barros (@anathinker) | Twitter">
             <a:extLst>
               <a:ext uri="{FF2B5EF4-FFF2-40B4-BE49-F238E27FC236}">
-                <a16:creationId xmlns:a16="http://schemas.microsoft.com/office/drawing/2014/main" xmlns="" id="{AF3F0044-4F7D-98F6-34C1-8351487DFDAA}"/>
+                <a16:creationId xmlns:a16="http://schemas.microsoft.com/office/drawing/2014/main" id="{AF3F0044-4F7D-98F6-34C1-8351487DFDAA}"/>
               </a:ext>
             </a:extLst>
           </p:cNvPr>
@@ -22908,7 +22548,7 @@
           <p:cNvPr id="5" name="Picture 6" descr="Analyzing Text Classification Techniques on Youtube Data">
             <a:extLst>
               <a:ext uri="{FF2B5EF4-FFF2-40B4-BE49-F238E27FC236}">
-                <a16:creationId xmlns:a16="http://schemas.microsoft.com/office/drawing/2014/main" xmlns="" id="{0E6041F8-AB14-54C0-C790-0288A3AC8FBA}"/>
+                <a16:creationId xmlns:a16="http://schemas.microsoft.com/office/drawing/2014/main" id="{0E6041F8-AB14-54C0-C790-0288A3AC8FBA}"/>
               </a:ext>
             </a:extLst>
           </p:cNvPr>
@@ -22953,7 +22593,7 @@
           <p:cNvPr id="6" name="Picture 2" descr="Sentiment Fig 1">
             <a:extLst>
               <a:ext uri="{FF2B5EF4-FFF2-40B4-BE49-F238E27FC236}">
-                <a16:creationId xmlns:a16="http://schemas.microsoft.com/office/drawing/2014/main" xmlns="" id="{1E7CC96F-55AB-1482-92F6-240F8E2E0D1E}"/>
+                <a16:creationId xmlns:a16="http://schemas.microsoft.com/office/drawing/2014/main" id="{1E7CC96F-55AB-1482-92F6-240F8E2E0D1E}"/>
               </a:ext>
             </a:extLst>
           </p:cNvPr>
@@ -23240,7 +22880,7 @@
           <p:cNvPr id="7" name="Picture 2" descr="Ana Barros (@anathinker) | Twitter">
             <a:extLst>
               <a:ext uri="{FF2B5EF4-FFF2-40B4-BE49-F238E27FC236}">
-                <a16:creationId xmlns:a16="http://schemas.microsoft.com/office/drawing/2014/main" xmlns="" id="{A2D479C7-0684-420F-2CCD-64C3DB79FDAB}"/>
+                <a16:creationId xmlns:a16="http://schemas.microsoft.com/office/drawing/2014/main" id="{A2D479C7-0684-420F-2CCD-64C3DB79FDAB}"/>
               </a:ext>
             </a:extLst>
           </p:cNvPr>
@@ -23287,7 +22927,7 @@
           <p:cNvPr id="8" name="Picture 6" descr="Analyzing Text Classification Techniques on Youtube Data">
             <a:extLst>
               <a:ext uri="{FF2B5EF4-FFF2-40B4-BE49-F238E27FC236}">
-                <a16:creationId xmlns:a16="http://schemas.microsoft.com/office/drawing/2014/main" xmlns="" id="{A59F8A2C-ACDF-09C7-B528-9064CEF3B848}"/>
+                <a16:creationId xmlns:a16="http://schemas.microsoft.com/office/drawing/2014/main" id="{A59F8A2C-ACDF-09C7-B528-9064CEF3B848}"/>
               </a:ext>
             </a:extLst>
           </p:cNvPr>
@@ -23332,7 +22972,7 @@
           <p:cNvPr id="9" name="Picture 2" descr="Sentiment Fig 1">
             <a:extLst>
               <a:ext uri="{FF2B5EF4-FFF2-40B4-BE49-F238E27FC236}">
-                <a16:creationId xmlns:a16="http://schemas.microsoft.com/office/drawing/2014/main" xmlns="" id="{E178FF16-CC3F-C34B-6C8B-874BC4FA61A4}"/>
+                <a16:creationId xmlns:a16="http://schemas.microsoft.com/office/drawing/2014/main" id="{E178FF16-CC3F-C34B-6C8B-874BC4FA61A4}"/>
               </a:ext>
             </a:extLst>
           </p:cNvPr>
@@ -23409,7 +23049,7 @@
           <p:cNvPr id="2" name="Título 1">
             <a:extLst>
               <a:ext uri="{FF2B5EF4-FFF2-40B4-BE49-F238E27FC236}">
-                <a16:creationId xmlns:a16="http://schemas.microsoft.com/office/drawing/2014/main" xmlns="" id="{95206997-C98C-FF52-62A1-725EEA7A8A7E}"/>
+                <a16:creationId xmlns:a16="http://schemas.microsoft.com/office/drawing/2014/main" id="{95206997-C98C-FF52-62A1-725EEA7A8A7E}"/>
               </a:ext>
             </a:extLst>
           </p:cNvPr>
@@ -23439,7 +23079,7 @@
               <p:cNvPr id="3" name="Espaço Reservado para Conteúdo 2">
                 <a:extLst>
                   <a:ext uri="{FF2B5EF4-FFF2-40B4-BE49-F238E27FC236}">
-                    <a16:creationId xmlns:a16="http://schemas.microsoft.com/office/drawing/2014/main" xmlns="" id="{50B99F56-FF18-D044-7799-0502D4F6A5FB}"/>
+                    <a16:creationId xmlns:a16="http://schemas.microsoft.com/office/drawing/2014/main" id="{50B99F56-FF18-D044-7799-0502D4F6A5FB}"/>
                   </a:ext>
                 </a:extLst>
               </p:cNvPr>
@@ -24024,7 +23664,7 @@
           <p:cNvPr id="2" name="Título 1">
             <a:extLst>
               <a:ext uri="{FF2B5EF4-FFF2-40B4-BE49-F238E27FC236}">
-                <a16:creationId xmlns:a16="http://schemas.microsoft.com/office/drawing/2014/main" xmlns="" id="{40D4148F-5E93-6FF0-6B66-AC9E3B82640A}"/>
+                <a16:creationId xmlns:a16="http://schemas.microsoft.com/office/drawing/2014/main" id="{40D4148F-5E93-6FF0-6B66-AC9E3B82640A}"/>
               </a:ext>
             </a:extLst>
           </p:cNvPr>
@@ -24054,7 +23694,7 @@
               <p:cNvPr id="3" name="Espaço Reservado para Conteúdo 2">
                 <a:extLst>
                   <a:ext uri="{FF2B5EF4-FFF2-40B4-BE49-F238E27FC236}">
-                    <a16:creationId xmlns:a16="http://schemas.microsoft.com/office/drawing/2014/main" xmlns="" id="{A4787C4F-F235-6888-5AFF-2CB1361FF6FD}"/>
+                    <a16:creationId xmlns:a16="http://schemas.microsoft.com/office/drawing/2014/main" id="{A4787C4F-F235-6888-5AFF-2CB1361FF6FD}"/>
                   </a:ext>
                 </a:extLst>
               </p:cNvPr>
@@ -24131,15 +23771,7 @@
                 </a:r>
                 <a:r>
                   <a:rPr lang="pt-BR" dirty="0"/>
-                  <a:t> </a:t>
-                </a:r>
-                <a:r>
-                  <a:rPr lang="pt-BR" dirty="0" smtClean="0"/>
-                  <a:t>classe ou indicar a </a:t>
-                </a:r>
-                <a:r>
-                  <a:rPr lang="pt-BR" dirty="0"/>
-                  <a:t>classe negativa caso o exemplo pertença a qualquer uma das outras </a:t>
+                  <a:t> classe ou indicar a classe negativa caso o exemplo pertença a qualquer uma das outras </a:t>
                 </a:r>
                 <a14:m>
                   <m:oMath xmlns:m="http://schemas.openxmlformats.org/officeDocument/2006/math">
@@ -25811,7 +25443,7 @@
           <p:cNvPr id="21" name="Mais 7">
             <a:extLst>
               <a:ext uri="{FF2B5EF4-FFF2-40B4-BE49-F238E27FC236}">
-                <a16:creationId xmlns:a16="http://schemas.microsoft.com/office/drawing/2014/main" xmlns="" id="{7B31CAF2-5F3C-E55A-EC75-167BCE74F1F7}"/>
+                <a16:creationId xmlns:a16="http://schemas.microsoft.com/office/drawing/2014/main" id="{7B31CAF2-5F3C-E55A-EC75-167BCE74F1F7}"/>
               </a:ext>
             </a:extLst>
           </p:cNvPr>
@@ -25895,7 +25527,7 @@
           <p:cNvPr id="2" name="Título 1">
             <a:extLst>
               <a:ext uri="{FF2B5EF4-FFF2-40B4-BE49-F238E27FC236}">
-                <a16:creationId xmlns:a16="http://schemas.microsoft.com/office/drawing/2014/main" xmlns="" id="{F625D040-A3FE-41E3-3BD0-3C0548CFEAD3}"/>
+                <a16:creationId xmlns:a16="http://schemas.microsoft.com/office/drawing/2014/main" id="{F625D040-A3FE-41E3-3BD0-3C0548CFEAD3}"/>
               </a:ext>
             </a:extLst>
           </p:cNvPr>
@@ -25925,7 +25557,7 @@
               <p:cNvPr id="3" name="Espaço Reservado para Conteúdo 2">
                 <a:extLst>
                   <a:ext uri="{FF2B5EF4-FFF2-40B4-BE49-F238E27FC236}">
-                    <a16:creationId xmlns:a16="http://schemas.microsoft.com/office/drawing/2014/main" xmlns="" id="{3BAFA38F-B924-7049-765D-660ED8C4845B}"/>
+                    <a16:creationId xmlns:a16="http://schemas.microsoft.com/office/drawing/2014/main" id="{3BAFA38F-B924-7049-765D-660ED8C4845B}"/>
                   </a:ext>
                 </a:extLst>
               </p:cNvPr>
@@ -25950,14 +25582,10 @@
               <a:p>
                 <a:r>
                   <a:rPr lang="pt-BR" dirty="0"/>
-                  <a:t>Nesta abordagem, </a:t>
-                </a:r>
-                <a:r>
-                  <a:rPr lang="pt-BR" dirty="0" smtClean="0"/>
-                  <a:t>treina-se um classificador binário para </a:t>
-                </a:r>
-                <a:r>
-                  <a:rPr lang="pt-BR" b="1" dirty="0" smtClean="0">
+                  <a:t>Nesta abordagem, treina-se um classificador binário para </a:t>
+                </a:r>
+                <a:r>
+                  <a:rPr lang="pt-BR" b="1" dirty="0">
                     <a:solidFill>
                       <a:schemeClr val="accent2"/>
                     </a:solidFill>
@@ -25965,7 +25593,7 @@
                   <a:t>cada um dos possíveis </a:t>
                 </a:r>
                 <a:r>
-                  <a:rPr lang="pt-BR" b="1" dirty="0" smtClean="0">
+                  <a:rPr lang="pt-BR" b="1" dirty="0">
                     <a:solidFill>
                       <a:srgbClr val="7030A0"/>
                     </a:solidFill>
@@ -25973,7 +25601,7 @@
                   <a:t>pares</a:t>
                 </a:r>
                 <a:r>
-                  <a:rPr lang="pt-BR" b="1" dirty="0" smtClean="0">
+                  <a:rPr lang="pt-BR" b="1" dirty="0">
                     <a:solidFill>
                       <a:schemeClr val="accent2"/>
                     </a:solidFill>
@@ -25981,13 +25609,13 @@
                   <a:t> de classes (sem repetição)</a:t>
                 </a:r>
                 <a:r>
-                  <a:rPr lang="pt-BR" dirty="0" smtClean="0"/>
+                  <a:rPr lang="pt-BR" dirty="0"/>
                   <a:t>.</a:t>
                 </a:r>
               </a:p>
               <a:p>
                 <a:r>
-                  <a:rPr lang="pt-BR" dirty="0" smtClean="0"/>
+                  <a:rPr lang="pt-BR" dirty="0"/>
                   <a:t>Ao todo, treina-se </a:t>
                 </a:r>
                 <a14:m>
@@ -26037,12 +25665,8 @@
                   <a:buChar char="§"/>
                 </a:pPr>
                 <a:r>
-                  <a:rPr lang="pt-BR" dirty="0" smtClean="0"/>
-                  <a:t>Por </a:t>
-                </a:r>
-                <a:r>
-                  <a:rPr lang="pt-BR" dirty="0"/>
-                  <a:t>exemplo, se </a:t>
+                  <a:rPr lang="pt-BR" dirty="0"/>
+                  <a:t>Por exemplo, se </a:t>
                 </a:r>
                 <a14:m>
                   <m:oMath xmlns:m="http://schemas.openxmlformats.org/officeDocument/2006/math">
@@ -26690,7 +26314,7 @@
           <p:cNvPr id="2" name="Título 1">
             <a:extLst>
               <a:ext uri="{FF2B5EF4-FFF2-40B4-BE49-F238E27FC236}">
-                <a16:creationId xmlns:a16="http://schemas.microsoft.com/office/drawing/2014/main" xmlns="" id="{685EDE22-7739-3353-3DBC-8480197DC616}"/>
+                <a16:creationId xmlns:a16="http://schemas.microsoft.com/office/drawing/2014/main" id="{685EDE22-7739-3353-3DBC-8480197DC616}"/>
               </a:ext>
             </a:extLst>
           </p:cNvPr>
@@ -26720,7 +26344,7 @@
               <p:cNvPr id="3" name="Espaço Reservado para Conteúdo 2">
                 <a:extLst>
                   <a:ext uri="{FF2B5EF4-FFF2-40B4-BE49-F238E27FC236}">
-                    <a16:creationId xmlns:a16="http://schemas.microsoft.com/office/drawing/2014/main" xmlns="" id="{2145CEE8-2FB2-6EEA-841B-CC93323A97A6}"/>
+                    <a16:creationId xmlns:a16="http://schemas.microsoft.com/office/drawing/2014/main" id="{2145CEE8-2FB2-6EEA-841B-CC93323A97A6}"/>
                   </a:ext>
                 </a:extLst>
               </p:cNvPr>
@@ -26763,23 +26387,15 @@
                 </a:r>
                 <a:r>
                   <a:rPr lang="pt-BR" dirty="0"/>
-                  <a:t>é que cada classificador </a:t>
-                </a:r>
-                <a:r>
-                  <a:rPr lang="pt-BR" dirty="0" smtClean="0"/>
-                  <a:t>binário</a:t>
-                </a:r>
-                <a:r>
-                  <a:rPr lang="pt-BR" b="1" i="1" dirty="0" smtClean="0"/>
+                  <a:t>é que cada classificador binário</a:t>
+                </a:r>
+                <a:r>
+                  <a:rPr lang="pt-BR" b="1" i="1" dirty="0"/>
                   <a:t> </a:t>
                 </a:r>
                 <a:r>
-                  <a:rPr lang="pt-BR" dirty="0" smtClean="0"/>
-                  <a:t>precisa </a:t>
-                </a:r>
-                <a:r>
-                  <a:rPr lang="pt-BR" dirty="0"/>
-                  <a:t>ser </a:t>
+                  <a:rPr lang="pt-BR" dirty="0"/>
+                  <a:t>precisa ser </a:t>
                 </a:r>
                 <a:r>
                   <a:rPr lang="pt-BR" b="1" i="1" dirty="0">
@@ -26817,23 +26433,7 @@
                       <a:srgbClr val="00B050"/>
                     </a:solidFill>
                   </a:rPr>
-                  <a:t>tempo de treinamento de cada classificador </a:t>
-                </a:r>
-                <a:r>
-                  <a:rPr lang="pt-BR" b="1" i="1" dirty="0" smtClean="0">
-                    <a:solidFill>
-                      <a:srgbClr val="00B050"/>
-                    </a:solidFill>
-                  </a:rPr>
-                  <a:t>também </a:t>
-                </a:r>
-                <a:r>
-                  <a:rPr lang="pt-BR" b="1" i="1" dirty="0">
-                    <a:solidFill>
-                      <a:srgbClr val="00B050"/>
-                    </a:solidFill>
-                  </a:rPr>
-                  <a:t>é menor</a:t>
+                  <a:t>tempo de treinamento de cada classificador também é menor</a:t>
                 </a:r>
                 <a:r>
                   <a:rPr lang="pt-BR" dirty="0"/>
@@ -26855,11 +26455,7 @@
                 </a:r>
                 <a:r>
                   <a:rPr lang="pt-BR" dirty="0"/>
-                  <a:t> é que, </a:t>
-                </a:r>
-                <a:r>
-                  <a:rPr lang="pt-BR" dirty="0" smtClean="0"/>
-                  <a:t>quanto maior o número de classes </a:t>
+                  <a:t> é que, quanto maior o número de classes </a:t>
                 </a:r>
                 <a14:m>
                   <m:oMath xmlns:m="http://schemas.openxmlformats.org/officeDocument/2006/math">
@@ -26872,16 +26468,8 @@
                   </m:oMath>
                 </a14:m>
                 <a:r>
-                  <a:rPr lang="pt-BR" dirty="0" smtClean="0"/>
-                  <a:t>, </a:t>
-                </a:r>
-                <a:r>
-                  <a:rPr lang="pt-BR" dirty="0"/>
-                  <a:t>maior </a:t>
-                </a:r>
-                <a:r>
-                  <a:rPr lang="pt-BR" dirty="0" smtClean="0"/>
-                  <a:t>pode ser o </a:t>
+                  <a:rPr lang="pt-BR" dirty="0"/>
+                  <a:t>, maior pode ser o </a:t>
                 </a:r>
                 <a:r>
                   <a:rPr lang="pt-BR" b="1" i="1" dirty="0">
@@ -26889,21 +26477,12 @@
                       <a:srgbClr val="FF0000"/>
                     </a:solidFill>
                   </a:rPr>
-                  <a:t>tempo total de </a:t>
-                </a:r>
-                <a:r>
-                  <a:rPr lang="pt-BR" b="1" i="1" dirty="0" smtClean="0">
-                    <a:solidFill>
-                      <a:srgbClr val="FF0000"/>
-                    </a:solidFill>
-                  </a:rPr>
-                  <a:t>treinamento</a:t>
-                </a:r>
-                <a:r>
-                  <a:rPr lang="pt-BR" dirty="0" smtClean="0"/>
+                  <a:t>tempo total de treinamento</a:t>
+                </a:r>
+                <a:r>
+                  <a:rPr lang="pt-BR" dirty="0"/>
                   <a:t>.</a:t>
                 </a:r>
-                <a:endParaRPr lang="pt-BR" dirty="0"/>
               </a:p>
               <a:p>
                 <a:pPr lvl="1">
@@ -26911,12 +26490,8 @@
                   <a:buChar char="§"/>
                 </a:pPr>
                 <a:r>
-                  <a:rPr lang="pt-BR" dirty="0" smtClean="0"/>
-                  <a:t>Por </a:t>
-                </a:r>
-                <a:r>
-                  <a:rPr lang="pt-BR" dirty="0"/>
-                  <a:t>exemplo, se </a:t>
+                  <a:rPr lang="pt-BR" dirty="0"/>
+                  <a:t>Por exemplo, se </a:t>
                 </a:r>
                 <a14:m>
                   <m:oMath xmlns:m="http://schemas.openxmlformats.org/officeDocument/2006/math">
@@ -26936,13 +26511,8 @@
                 </a14:m>
                 <a:r>
                   <a:rPr lang="pt-BR" dirty="0"/>
-                  <a:t>, temos que treinar 45 classificadores</a:t>
-                </a:r>
-                <a:r>
-                  <a:rPr lang="pt-BR" dirty="0" smtClean="0"/>
-                  <a:t>.</a:t>
-                </a:r>
-                <a:endParaRPr lang="pt-BR" dirty="0"/>
+                  <a:t>, temos que treinar 45 classificadores.</a:t>
+                </a:r>
               </a:p>
             </p:txBody>
           </p:sp>
@@ -27001,13 +26571,6 @@
   <p:clrMapOvr>
     <a:masterClrMapping/>
   </p:clrMapOvr>
-  <p:timing>
-    <p:tnLst>
-      <p:par>
-        <p:cTn id="1" dur="indefinite" restart="never" nodeType="tmRoot"/>
-      </p:par>
-    </p:tnLst>
-  </p:timing>
 </p:sld>
 </file>
 

--- a/slides/T320_Classificação (Parte IV).pptx
+++ b/slides/T320_Classificação (Parte IV).pptx
@@ -302,7 +302,7 @@
           <a:p>
             <a:fld id="{144F1436-6906-4D93-B7A2-786C327BFA14}" type="datetimeFigureOut">
               <a:rPr lang="nl-BE" smtClean="0"/>
-              <a:t>28/03/2026</a:t>
+              <a:t>5/09/2026</a:t>
             </a:fld>
             <a:endParaRPr lang="nl-BE"/>
           </a:p>
@@ -368,7 +368,7 @@
           <a:p>
             <a:fld id="{F7E56D9B-79AD-444A-AFED-DEC23408F8B4}" type="slidenum">
               <a:rPr lang="nl-BE" smtClean="0"/>
-              <a:t>‹#›</a:t>
+              <a:t>‹nº›</a:t>
             </a:fld>
             <a:endParaRPr lang="nl-BE"/>
           </a:p>
@@ -467,7 +467,7 @@
           <a:p>
             <a:fld id="{AA8CD09E-2914-4F47-B6C1-51B2C31814C9}" type="datetimeFigureOut">
               <a:rPr lang="pt-BR" smtClean="0"/>
-              <a:t>28/03/2026</a:t>
+              <a:t>05/09/2026</a:t>
             </a:fld>
             <a:endParaRPr lang="pt-BR"/>
           </a:p>
@@ -625,7 +625,7 @@
           <a:p>
             <a:fld id="{6FC8D850-966F-45A6-8DE7-15B891E7D40D}" type="slidenum">
               <a:rPr lang="pt-BR" smtClean="0"/>
-              <a:t>‹#›</a:t>
+              <a:t>‹nº›</a:t>
             </a:fld>
             <a:endParaRPr lang="pt-BR"/>
           </a:p>
@@ -5198,6 +5198,18 @@
               </a:rPr>
               <a:t>Classificação de documentos por tópicos</a:t>
             </a:r>
+            <a:r>
+              <a:rPr lang="pt-BR" sz="1200" b="0" i="0" kern="1200" dirty="0">
+                <a:solidFill>
+                  <a:schemeClr val="tx1"/>
+                </a:solidFill>
+                <a:effectLst/>
+                <a:latin typeface="+mn-lt"/>
+                <a:ea typeface="+mn-ea"/>
+                <a:cs typeface="+mn-cs"/>
+              </a:rPr>
+              <a:t/>
+            </a:r>
             <a:br>
               <a:rPr lang="pt-BR" sz="1200" b="0" i="0" kern="1200" dirty="0">
                 <a:solidFill>
@@ -5235,6 +5247,18 @@
               </a:rPr>
               <a:t>Reconhecimento de objetos em imagens</a:t>
             </a:r>
+            <a:r>
+              <a:rPr lang="pt-BR" sz="1200" b="0" i="0" kern="1200" dirty="0">
+                <a:solidFill>
+                  <a:schemeClr val="tx1"/>
+                </a:solidFill>
+                <a:effectLst/>
+                <a:latin typeface="+mn-lt"/>
+                <a:ea typeface="+mn-ea"/>
+                <a:cs typeface="+mn-cs"/>
+              </a:rPr>
+              <a:t/>
+            </a:r>
             <a:br>
               <a:rPr lang="pt-BR" sz="1200" b="0" i="0" kern="1200" dirty="0">
                 <a:solidFill>
@@ -5272,6 +5296,18 @@
               </a:rPr>
               <a:t>Sistema de recomendação de filmes por gêneros</a:t>
             </a:r>
+            <a:r>
+              <a:rPr lang="pt-BR" sz="1200" b="0" i="0" kern="1200" dirty="0">
+                <a:solidFill>
+                  <a:schemeClr val="tx1"/>
+                </a:solidFill>
+                <a:effectLst/>
+                <a:latin typeface="+mn-lt"/>
+                <a:ea typeface="+mn-ea"/>
+                <a:cs typeface="+mn-cs"/>
+              </a:rPr>
+              <a:t/>
+            </a:r>
             <a:br>
               <a:rPr lang="pt-BR" sz="1200" b="0" i="0" kern="1200" dirty="0">
                 <a:solidFill>
@@ -5309,6 +5345,18 @@
               </a:rPr>
               <a:t>Diagnóstico médico</a:t>
             </a:r>
+            <a:r>
+              <a:rPr lang="pt-BR" sz="1200" b="0" i="0" kern="1200" dirty="0">
+                <a:solidFill>
+                  <a:schemeClr val="tx1"/>
+                </a:solidFill>
+                <a:effectLst/>
+                <a:latin typeface="+mn-lt"/>
+                <a:ea typeface="+mn-ea"/>
+                <a:cs typeface="+mn-cs"/>
+              </a:rPr>
+              <a:t/>
+            </a:r>
             <a:br>
               <a:rPr lang="pt-BR" sz="1200" b="0" i="0" kern="1200" dirty="0">
                 <a:solidFill>
@@ -5346,6 +5394,18 @@
               </a:rPr>
               <a:t>Análise de sentimentos em texto</a:t>
             </a:r>
+            <a:r>
+              <a:rPr lang="pt-BR" sz="1200" b="0" i="0" kern="1200" dirty="0">
+                <a:solidFill>
+                  <a:schemeClr val="tx1"/>
+                </a:solidFill>
+                <a:effectLst/>
+                <a:latin typeface="+mn-lt"/>
+                <a:ea typeface="+mn-ea"/>
+                <a:cs typeface="+mn-cs"/>
+              </a:rPr>
+              <a:t/>
+            </a:r>
             <a:br>
               <a:rPr lang="pt-BR" sz="1200" b="0" i="0" kern="1200" dirty="0">
                 <a:solidFill>
@@ -5395,6 +5455,18 @@
               </a:rPr>
               <a:t> em produtos de e-commerce</a:t>
             </a:r>
+            <a:r>
+              <a:rPr lang="pt-BR" sz="1200" b="0" i="0" kern="1200" dirty="0">
+                <a:solidFill>
+                  <a:schemeClr val="tx1"/>
+                </a:solidFill>
+                <a:effectLst/>
+                <a:latin typeface="+mn-lt"/>
+                <a:ea typeface="+mn-ea"/>
+                <a:cs typeface="+mn-cs"/>
+              </a:rPr>
+              <a:t/>
+            </a:r>
             <a:br>
               <a:rPr lang="pt-BR" sz="1200" b="0" i="0" kern="1200" dirty="0">
                 <a:solidFill>
@@ -5456,6 +5528,18 @@
               </a:rPr>
               <a:t>Classificação de músicas por gênero</a:t>
             </a:r>
+            <a:r>
+              <a:rPr lang="pt-BR" sz="1200" b="0" i="0" kern="1200" dirty="0">
+                <a:solidFill>
+                  <a:schemeClr val="tx1"/>
+                </a:solidFill>
+                <a:effectLst/>
+                <a:latin typeface="+mn-lt"/>
+                <a:ea typeface="+mn-ea"/>
+                <a:cs typeface="+mn-cs"/>
+              </a:rPr>
+              <a:t/>
+            </a:r>
             <a:br>
               <a:rPr lang="pt-BR" sz="1200" b="0" i="0" kern="1200" dirty="0">
                 <a:solidFill>
@@ -5481,9 +5565,17 @@
             </a:r>
           </a:p>
           <a:p>
+            <a:r>
+              <a:rPr lang="pt-BR" dirty="0"/>
+              <a:t/>
+            </a:r>
             <a:br>
               <a:rPr lang="pt-BR" dirty="0"/>
             </a:br>
+            <a:r>
+              <a:rPr lang="pt-BR" dirty="0"/>
+              <a:t/>
+            </a:r>
             <a:br>
               <a:rPr lang="pt-BR" dirty="0"/>
             </a:br>
@@ -5959,7 +6051,7 @@
           <p:cNvPr id="2" name="Título 1">
             <a:extLst>
               <a:ext uri="{FF2B5EF4-FFF2-40B4-BE49-F238E27FC236}">
-                <a16:creationId xmlns:a16="http://schemas.microsoft.com/office/drawing/2014/main" id="{1DB9B4FF-B06E-403C-A326-BDC64D8FF94E}"/>
+                <a16:creationId xmlns:a16="http://schemas.microsoft.com/office/drawing/2014/main" xmlns="" id="{1DB9B4FF-B06E-403C-A326-BDC64D8FF94E}"/>
               </a:ext>
             </a:extLst>
           </p:cNvPr>
@@ -5996,7 +6088,7 @@
           <p:cNvPr id="3" name="Subtítulo 2">
             <a:extLst>
               <a:ext uri="{FF2B5EF4-FFF2-40B4-BE49-F238E27FC236}">
-                <a16:creationId xmlns:a16="http://schemas.microsoft.com/office/drawing/2014/main" id="{247BDFCE-746E-45BF-A319-4733D58D1632}"/>
+                <a16:creationId xmlns:a16="http://schemas.microsoft.com/office/drawing/2014/main" xmlns="" id="{247BDFCE-746E-45BF-A319-4733D58D1632}"/>
               </a:ext>
             </a:extLst>
           </p:cNvPr>
@@ -6066,7 +6158,7 @@
           <p:cNvPr id="4" name="Espaço Reservado para Data 3">
             <a:extLst>
               <a:ext uri="{FF2B5EF4-FFF2-40B4-BE49-F238E27FC236}">
-                <a16:creationId xmlns:a16="http://schemas.microsoft.com/office/drawing/2014/main" id="{9EDE2778-5372-4104-B96D-968184DA8288}"/>
+                <a16:creationId xmlns:a16="http://schemas.microsoft.com/office/drawing/2014/main" xmlns="" id="{9EDE2778-5372-4104-B96D-968184DA8288}"/>
               </a:ext>
             </a:extLst>
           </p:cNvPr>
@@ -6084,7 +6176,7 @@
           <a:p>
             <a:fld id="{63289F7E-B80B-496E-81B4-D396C37C9454}" type="datetimeFigureOut">
               <a:rPr lang="pt-BR" smtClean="0"/>
-              <a:t>28/03/2026</a:t>
+              <a:t>05/09/2026</a:t>
             </a:fld>
             <a:endParaRPr lang="pt-BR"/>
           </a:p>
@@ -6095,7 +6187,7 @@
           <p:cNvPr id="5" name="Espaço Reservado para Rodapé 4">
             <a:extLst>
               <a:ext uri="{FF2B5EF4-FFF2-40B4-BE49-F238E27FC236}">
-                <a16:creationId xmlns:a16="http://schemas.microsoft.com/office/drawing/2014/main" id="{C1DD0F41-C861-4051-988D-3024A37A4B93}"/>
+                <a16:creationId xmlns:a16="http://schemas.microsoft.com/office/drawing/2014/main" xmlns="" id="{C1DD0F41-C861-4051-988D-3024A37A4B93}"/>
               </a:ext>
             </a:extLst>
           </p:cNvPr>
@@ -6120,7 +6212,7 @@
           <p:cNvPr id="6" name="Espaço Reservado para Número de Slide 5">
             <a:extLst>
               <a:ext uri="{FF2B5EF4-FFF2-40B4-BE49-F238E27FC236}">
-                <a16:creationId xmlns:a16="http://schemas.microsoft.com/office/drawing/2014/main" id="{07E5967E-D980-431A-A5DB-3F0C5030A81E}"/>
+                <a16:creationId xmlns:a16="http://schemas.microsoft.com/office/drawing/2014/main" xmlns="" id="{07E5967E-D980-431A-A5DB-3F0C5030A81E}"/>
               </a:ext>
             </a:extLst>
           </p:cNvPr>
@@ -6138,7 +6230,7 @@
           <a:p>
             <a:fld id="{1A7E88B7-70CE-4035-AE73-13FA6FB985D4}" type="slidenum">
               <a:rPr lang="pt-BR" smtClean="0"/>
-              <a:t>‹#›</a:t>
+              <a:t>‹nº›</a:t>
             </a:fld>
             <a:endParaRPr lang="pt-BR"/>
           </a:p>
@@ -6179,7 +6271,7 @@
           <p:cNvPr id="2" name="Título 1">
             <a:extLst>
               <a:ext uri="{FF2B5EF4-FFF2-40B4-BE49-F238E27FC236}">
-                <a16:creationId xmlns:a16="http://schemas.microsoft.com/office/drawing/2014/main" id="{9036C49F-3E68-4175-81BA-3C3FEE44308A}"/>
+                <a16:creationId xmlns:a16="http://schemas.microsoft.com/office/drawing/2014/main" xmlns="" id="{9036C49F-3E68-4175-81BA-3C3FEE44308A}"/>
               </a:ext>
             </a:extLst>
           </p:cNvPr>
@@ -6207,7 +6299,7 @@
           <p:cNvPr id="3" name="Espaço Reservado para Texto Vertical 2">
             <a:extLst>
               <a:ext uri="{FF2B5EF4-FFF2-40B4-BE49-F238E27FC236}">
-                <a16:creationId xmlns:a16="http://schemas.microsoft.com/office/drawing/2014/main" id="{426FA736-3DD3-4D4E-B57B-BBE1D8F7D424}"/>
+                <a16:creationId xmlns:a16="http://schemas.microsoft.com/office/drawing/2014/main" xmlns="" id="{426FA736-3DD3-4D4E-B57B-BBE1D8F7D424}"/>
               </a:ext>
             </a:extLst>
           </p:cNvPr>
@@ -6264,7 +6356,7 @@
           <p:cNvPr id="4" name="Espaço Reservado para Data 3">
             <a:extLst>
               <a:ext uri="{FF2B5EF4-FFF2-40B4-BE49-F238E27FC236}">
-                <a16:creationId xmlns:a16="http://schemas.microsoft.com/office/drawing/2014/main" id="{99E8855C-D8FD-48F6-B14E-861E0DE4D915}"/>
+                <a16:creationId xmlns:a16="http://schemas.microsoft.com/office/drawing/2014/main" xmlns="" id="{99E8855C-D8FD-48F6-B14E-861E0DE4D915}"/>
               </a:ext>
             </a:extLst>
           </p:cNvPr>
@@ -6282,7 +6374,7 @@
           <a:p>
             <a:fld id="{63289F7E-B80B-496E-81B4-D396C37C9454}" type="datetimeFigureOut">
               <a:rPr lang="pt-BR" smtClean="0"/>
-              <a:t>28/03/2026</a:t>
+              <a:t>05/09/2026</a:t>
             </a:fld>
             <a:endParaRPr lang="pt-BR"/>
           </a:p>
@@ -6293,7 +6385,7 @@
           <p:cNvPr id="5" name="Espaço Reservado para Rodapé 4">
             <a:extLst>
               <a:ext uri="{FF2B5EF4-FFF2-40B4-BE49-F238E27FC236}">
-                <a16:creationId xmlns:a16="http://schemas.microsoft.com/office/drawing/2014/main" id="{97C0BB88-2F21-42A5-ACFF-83DA47F2D340}"/>
+                <a16:creationId xmlns:a16="http://schemas.microsoft.com/office/drawing/2014/main" xmlns="" id="{97C0BB88-2F21-42A5-ACFF-83DA47F2D340}"/>
               </a:ext>
             </a:extLst>
           </p:cNvPr>
@@ -6318,7 +6410,7 @@
           <p:cNvPr id="6" name="Espaço Reservado para Número de Slide 5">
             <a:extLst>
               <a:ext uri="{FF2B5EF4-FFF2-40B4-BE49-F238E27FC236}">
-                <a16:creationId xmlns:a16="http://schemas.microsoft.com/office/drawing/2014/main" id="{6CB462B3-1F22-4C05-B4B8-7A279FB7D5E9}"/>
+                <a16:creationId xmlns:a16="http://schemas.microsoft.com/office/drawing/2014/main" xmlns="" id="{6CB462B3-1F22-4C05-B4B8-7A279FB7D5E9}"/>
               </a:ext>
             </a:extLst>
           </p:cNvPr>
@@ -6336,7 +6428,7 @@
           <a:p>
             <a:fld id="{1A7E88B7-70CE-4035-AE73-13FA6FB985D4}" type="slidenum">
               <a:rPr lang="pt-BR" smtClean="0"/>
-              <a:t>‹#›</a:t>
+              <a:t>‹nº›</a:t>
             </a:fld>
             <a:endParaRPr lang="pt-BR"/>
           </a:p>
@@ -6377,7 +6469,7 @@
           <p:cNvPr id="2" name="Título Vertical 1">
             <a:extLst>
               <a:ext uri="{FF2B5EF4-FFF2-40B4-BE49-F238E27FC236}">
-                <a16:creationId xmlns:a16="http://schemas.microsoft.com/office/drawing/2014/main" id="{EAEAB728-701C-4207-A9D5-23FF45C60502}"/>
+                <a16:creationId xmlns:a16="http://schemas.microsoft.com/office/drawing/2014/main" xmlns="" id="{EAEAB728-701C-4207-A9D5-23FF45C60502}"/>
               </a:ext>
             </a:extLst>
           </p:cNvPr>
@@ -6410,7 +6502,7 @@
           <p:cNvPr id="3" name="Espaço Reservado para Texto Vertical 2">
             <a:extLst>
               <a:ext uri="{FF2B5EF4-FFF2-40B4-BE49-F238E27FC236}">
-                <a16:creationId xmlns:a16="http://schemas.microsoft.com/office/drawing/2014/main" id="{BA8C8CCF-7823-480A-9A19-0F664DD17E3B}"/>
+                <a16:creationId xmlns:a16="http://schemas.microsoft.com/office/drawing/2014/main" xmlns="" id="{BA8C8CCF-7823-480A-9A19-0F664DD17E3B}"/>
               </a:ext>
             </a:extLst>
           </p:cNvPr>
@@ -6472,7 +6564,7 @@
           <p:cNvPr id="4" name="Espaço Reservado para Data 3">
             <a:extLst>
               <a:ext uri="{FF2B5EF4-FFF2-40B4-BE49-F238E27FC236}">
-                <a16:creationId xmlns:a16="http://schemas.microsoft.com/office/drawing/2014/main" id="{721D5734-7B1F-425D-942F-6EB73344027C}"/>
+                <a16:creationId xmlns:a16="http://schemas.microsoft.com/office/drawing/2014/main" xmlns="" id="{721D5734-7B1F-425D-942F-6EB73344027C}"/>
               </a:ext>
             </a:extLst>
           </p:cNvPr>
@@ -6490,7 +6582,7 @@
           <a:p>
             <a:fld id="{63289F7E-B80B-496E-81B4-D396C37C9454}" type="datetimeFigureOut">
               <a:rPr lang="pt-BR" smtClean="0"/>
-              <a:t>28/03/2026</a:t>
+              <a:t>05/09/2026</a:t>
             </a:fld>
             <a:endParaRPr lang="pt-BR"/>
           </a:p>
@@ -6501,7 +6593,7 @@
           <p:cNvPr id="5" name="Espaço Reservado para Rodapé 4">
             <a:extLst>
               <a:ext uri="{FF2B5EF4-FFF2-40B4-BE49-F238E27FC236}">
-                <a16:creationId xmlns:a16="http://schemas.microsoft.com/office/drawing/2014/main" id="{1E1AAEAC-F08D-45FE-89EC-B1B349A868C9}"/>
+                <a16:creationId xmlns:a16="http://schemas.microsoft.com/office/drawing/2014/main" xmlns="" id="{1E1AAEAC-F08D-45FE-89EC-B1B349A868C9}"/>
               </a:ext>
             </a:extLst>
           </p:cNvPr>
@@ -6526,7 +6618,7 @@
           <p:cNvPr id="6" name="Espaço Reservado para Número de Slide 5">
             <a:extLst>
               <a:ext uri="{FF2B5EF4-FFF2-40B4-BE49-F238E27FC236}">
-                <a16:creationId xmlns:a16="http://schemas.microsoft.com/office/drawing/2014/main" id="{BAA44493-9911-47B2-87A6-C2141A972BC8}"/>
+                <a16:creationId xmlns:a16="http://schemas.microsoft.com/office/drawing/2014/main" xmlns="" id="{BAA44493-9911-47B2-87A6-C2141A972BC8}"/>
               </a:ext>
             </a:extLst>
           </p:cNvPr>
@@ -6544,7 +6636,7 @@
           <a:p>
             <a:fld id="{1A7E88B7-70CE-4035-AE73-13FA6FB985D4}" type="slidenum">
               <a:rPr lang="pt-BR" smtClean="0"/>
-              <a:t>‹#›</a:t>
+              <a:t>‹nº›</a:t>
             </a:fld>
             <a:endParaRPr lang="pt-BR"/>
           </a:p>
@@ -6585,7 +6677,7 @@
           <p:cNvPr id="2" name="Título 1">
             <a:extLst>
               <a:ext uri="{FF2B5EF4-FFF2-40B4-BE49-F238E27FC236}">
-                <a16:creationId xmlns:a16="http://schemas.microsoft.com/office/drawing/2014/main" id="{71BD44A5-8F21-4626-A01D-48A1C874B1D5}"/>
+                <a16:creationId xmlns:a16="http://schemas.microsoft.com/office/drawing/2014/main" xmlns="" id="{71BD44A5-8F21-4626-A01D-48A1C874B1D5}"/>
               </a:ext>
             </a:extLst>
           </p:cNvPr>
@@ -6613,7 +6705,7 @@
           <p:cNvPr id="3" name="Espaço Reservado para Conteúdo 2">
             <a:extLst>
               <a:ext uri="{FF2B5EF4-FFF2-40B4-BE49-F238E27FC236}">
-                <a16:creationId xmlns:a16="http://schemas.microsoft.com/office/drawing/2014/main" id="{B79E8085-65A9-48AA-951D-71D978BFF4ED}"/>
+                <a16:creationId xmlns:a16="http://schemas.microsoft.com/office/drawing/2014/main" xmlns="" id="{B79E8085-65A9-48AA-951D-71D978BFF4ED}"/>
               </a:ext>
             </a:extLst>
           </p:cNvPr>
@@ -6670,7 +6762,7 @@
           <p:cNvPr id="4" name="Espaço Reservado para Data 3">
             <a:extLst>
               <a:ext uri="{FF2B5EF4-FFF2-40B4-BE49-F238E27FC236}">
-                <a16:creationId xmlns:a16="http://schemas.microsoft.com/office/drawing/2014/main" id="{F05BE1AF-51EA-425D-B188-DE7BD675009F}"/>
+                <a16:creationId xmlns:a16="http://schemas.microsoft.com/office/drawing/2014/main" xmlns="" id="{F05BE1AF-51EA-425D-B188-DE7BD675009F}"/>
               </a:ext>
             </a:extLst>
           </p:cNvPr>
@@ -6688,7 +6780,7 @@
           <a:p>
             <a:fld id="{63289F7E-B80B-496E-81B4-D396C37C9454}" type="datetimeFigureOut">
               <a:rPr lang="pt-BR" smtClean="0"/>
-              <a:t>28/03/2026</a:t>
+              <a:t>05/09/2026</a:t>
             </a:fld>
             <a:endParaRPr lang="pt-BR"/>
           </a:p>
@@ -6699,7 +6791,7 @@
           <p:cNvPr id="5" name="Espaço Reservado para Rodapé 4">
             <a:extLst>
               <a:ext uri="{FF2B5EF4-FFF2-40B4-BE49-F238E27FC236}">
-                <a16:creationId xmlns:a16="http://schemas.microsoft.com/office/drawing/2014/main" id="{121BE632-29CF-4CB9-B365-C9EF38F89BE6}"/>
+                <a16:creationId xmlns:a16="http://schemas.microsoft.com/office/drawing/2014/main" xmlns="" id="{121BE632-29CF-4CB9-B365-C9EF38F89BE6}"/>
               </a:ext>
             </a:extLst>
           </p:cNvPr>
@@ -6724,7 +6816,7 @@
           <p:cNvPr id="6" name="Espaço Reservado para Número de Slide 5">
             <a:extLst>
               <a:ext uri="{FF2B5EF4-FFF2-40B4-BE49-F238E27FC236}">
-                <a16:creationId xmlns:a16="http://schemas.microsoft.com/office/drawing/2014/main" id="{60CF3DD1-9AEC-4A57-B461-4E4DD86FAC18}"/>
+                <a16:creationId xmlns:a16="http://schemas.microsoft.com/office/drawing/2014/main" xmlns="" id="{60CF3DD1-9AEC-4A57-B461-4E4DD86FAC18}"/>
               </a:ext>
             </a:extLst>
           </p:cNvPr>
@@ -6742,7 +6834,7 @@
           <a:p>
             <a:fld id="{1A7E88B7-70CE-4035-AE73-13FA6FB985D4}" type="slidenum">
               <a:rPr lang="pt-BR" smtClean="0"/>
-              <a:t>‹#›</a:t>
+              <a:t>‹nº›</a:t>
             </a:fld>
             <a:endParaRPr lang="pt-BR"/>
           </a:p>
@@ -6783,7 +6875,7 @@
           <p:cNvPr id="2" name="Título 1">
             <a:extLst>
               <a:ext uri="{FF2B5EF4-FFF2-40B4-BE49-F238E27FC236}">
-                <a16:creationId xmlns:a16="http://schemas.microsoft.com/office/drawing/2014/main" id="{34AB2FF0-A4D7-4E28-991D-FF26140D5988}"/>
+                <a16:creationId xmlns:a16="http://schemas.microsoft.com/office/drawing/2014/main" xmlns="" id="{34AB2FF0-A4D7-4E28-991D-FF26140D5988}"/>
               </a:ext>
             </a:extLst>
           </p:cNvPr>
@@ -6820,7 +6912,7 @@
           <p:cNvPr id="3" name="Espaço Reservado para Texto 2">
             <a:extLst>
               <a:ext uri="{FF2B5EF4-FFF2-40B4-BE49-F238E27FC236}">
-                <a16:creationId xmlns:a16="http://schemas.microsoft.com/office/drawing/2014/main" id="{E2AC45B0-4145-40DB-8E61-105461170604}"/>
+                <a16:creationId xmlns:a16="http://schemas.microsoft.com/office/drawing/2014/main" xmlns="" id="{E2AC45B0-4145-40DB-8E61-105461170604}"/>
               </a:ext>
             </a:extLst>
           </p:cNvPr>
@@ -6945,7 +7037,7 @@
           <p:cNvPr id="4" name="Espaço Reservado para Data 3">
             <a:extLst>
               <a:ext uri="{FF2B5EF4-FFF2-40B4-BE49-F238E27FC236}">
-                <a16:creationId xmlns:a16="http://schemas.microsoft.com/office/drawing/2014/main" id="{50F1D3FB-740A-4EBA-A309-2CE71D12ECFB}"/>
+                <a16:creationId xmlns:a16="http://schemas.microsoft.com/office/drawing/2014/main" xmlns="" id="{50F1D3FB-740A-4EBA-A309-2CE71D12ECFB}"/>
               </a:ext>
             </a:extLst>
           </p:cNvPr>
@@ -6963,7 +7055,7 @@
           <a:p>
             <a:fld id="{63289F7E-B80B-496E-81B4-D396C37C9454}" type="datetimeFigureOut">
               <a:rPr lang="pt-BR" smtClean="0"/>
-              <a:t>28/03/2026</a:t>
+              <a:t>05/09/2026</a:t>
             </a:fld>
             <a:endParaRPr lang="pt-BR"/>
           </a:p>
@@ -6974,7 +7066,7 @@
           <p:cNvPr id="5" name="Espaço Reservado para Rodapé 4">
             <a:extLst>
               <a:ext uri="{FF2B5EF4-FFF2-40B4-BE49-F238E27FC236}">
-                <a16:creationId xmlns:a16="http://schemas.microsoft.com/office/drawing/2014/main" id="{BDCAB18F-8715-4465-A940-F9C193A2ACE9}"/>
+                <a16:creationId xmlns:a16="http://schemas.microsoft.com/office/drawing/2014/main" xmlns="" id="{BDCAB18F-8715-4465-A940-F9C193A2ACE9}"/>
               </a:ext>
             </a:extLst>
           </p:cNvPr>
@@ -6999,7 +7091,7 @@
           <p:cNvPr id="6" name="Espaço Reservado para Número de Slide 5">
             <a:extLst>
               <a:ext uri="{FF2B5EF4-FFF2-40B4-BE49-F238E27FC236}">
-                <a16:creationId xmlns:a16="http://schemas.microsoft.com/office/drawing/2014/main" id="{353466C6-8248-429F-8056-FF040BF509EB}"/>
+                <a16:creationId xmlns:a16="http://schemas.microsoft.com/office/drawing/2014/main" xmlns="" id="{353466C6-8248-429F-8056-FF040BF509EB}"/>
               </a:ext>
             </a:extLst>
           </p:cNvPr>
@@ -7017,7 +7109,7 @@
           <a:p>
             <a:fld id="{1A7E88B7-70CE-4035-AE73-13FA6FB985D4}" type="slidenum">
               <a:rPr lang="pt-BR" smtClean="0"/>
-              <a:t>‹#›</a:t>
+              <a:t>‹nº›</a:t>
             </a:fld>
             <a:endParaRPr lang="pt-BR"/>
           </a:p>
@@ -7058,7 +7150,7 @@
           <p:cNvPr id="2" name="Título 1">
             <a:extLst>
               <a:ext uri="{FF2B5EF4-FFF2-40B4-BE49-F238E27FC236}">
-                <a16:creationId xmlns:a16="http://schemas.microsoft.com/office/drawing/2014/main" id="{BC7BB9F0-F14B-4A91-B2B7-35BC47FE4DE7}"/>
+                <a16:creationId xmlns:a16="http://schemas.microsoft.com/office/drawing/2014/main" xmlns="" id="{BC7BB9F0-F14B-4A91-B2B7-35BC47FE4DE7}"/>
               </a:ext>
             </a:extLst>
           </p:cNvPr>
@@ -7086,7 +7178,7 @@
           <p:cNvPr id="3" name="Espaço Reservado para Conteúdo 2">
             <a:extLst>
               <a:ext uri="{FF2B5EF4-FFF2-40B4-BE49-F238E27FC236}">
-                <a16:creationId xmlns:a16="http://schemas.microsoft.com/office/drawing/2014/main" id="{EC1FC1C4-73DA-47A6-8496-B0B457F7D39A}"/>
+                <a16:creationId xmlns:a16="http://schemas.microsoft.com/office/drawing/2014/main" xmlns="" id="{EC1FC1C4-73DA-47A6-8496-B0B457F7D39A}"/>
               </a:ext>
             </a:extLst>
           </p:cNvPr>
@@ -7148,7 +7240,7 @@
           <p:cNvPr id="4" name="Espaço Reservado para Conteúdo 3">
             <a:extLst>
               <a:ext uri="{FF2B5EF4-FFF2-40B4-BE49-F238E27FC236}">
-                <a16:creationId xmlns:a16="http://schemas.microsoft.com/office/drawing/2014/main" id="{E92F06A8-A449-4D92-9912-76873E529B38}"/>
+                <a16:creationId xmlns:a16="http://schemas.microsoft.com/office/drawing/2014/main" xmlns="" id="{E92F06A8-A449-4D92-9912-76873E529B38}"/>
               </a:ext>
             </a:extLst>
           </p:cNvPr>
@@ -7210,7 +7302,7 @@
           <p:cNvPr id="5" name="Espaço Reservado para Data 4">
             <a:extLst>
               <a:ext uri="{FF2B5EF4-FFF2-40B4-BE49-F238E27FC236}">
-                <a16:creationId xmlns:a16="http://schemas.microsoft.com/office/drawing/2014/main" id="{938070A4-BC2F-4D55-BD8D-DEAF11BB9EE9}"/>
+                <a16:creationId xmlns:a16="http://schemas.microsoft.com/office/drawing/2014/main" xmlns="" id="{938070A4-BC2F-4D55-BD8D-DEAF11BB9EE9}"/>
               </a:ext>
             </a:extLst>
           </p:cNvPr>
@@ -7228,7 +7320,7 @@
           <a:p>
             <a:fld id="{63289F7E-B80B-496E-81B4-D396C37C9454}" type="datetimeFigureOut">
               <a:rPr lang="pt-BR" smtClean="0"/>
-              <a:t>28/03/2026</a:t>
+              <a:t>05/09/2026</a:t>
             </a:fld>
             <a:endParaRPr lang="pt-BR"/>
           </a:p>
@@ -7239,7 +7331,7 @@
           <p:cNvPr id="6" name="Espaço Reservado para Rodapé 5">
             <a:extLst>
               <a:ext uri="{FF2B5EF4-FFF2-40B4-BE49-F238E27FC236}">
-                <a16:creationId xmlns:a16="http://schemas.microsoft.com/office/drawing/2014/main" id="{45CC2DB8-844A-465F-BA9A-7734C80C7F43}"/>
+                <a16:creationId xmlns:a16="http://schemas.microsoft.com/office/drawing/2014/main" xmlns="" id="{45CC2DB8-844A-465F-BA9A-7734C80C7F43}"/>
               </a:ext>
             </a:extLst>
           </p:cNvPr>
@@ -7264,7 +7356,7 @@
           <p:cNvPr id="7" name="Espaço Reservado para Número de Slide 6">
             <a:extLst>
               <a:ext uri="{FF2B5EF4-FFF2-40B4-BE49-F238E27FC236}">
-                <a16:creationId xmlns:a16="http://schemas.microsoft.com/office/drawing/2014/main" id="{4CC606A8-097B-4040-94E0-CD8C88280D8F}"/>
+                <a16:creationId xmlns:a16="http://schemas.microsoft.com/office/drawing/2014/main" xmlns="" id="{4CC606A8-097B-4040-94E0-CD8C88280D8F}"/>
               </a:ext>
             </a:extLst>
           </p:cNvPr>
@@ -7282,7 +7374,7 @@
           <a:p>
             <a:fld id="{1A7E88B7-70CE-4035-AE73-13FA6FB985D4}" type="slidenum">
               <a:rPr lang="pt-BR" smtClean="0"/>
-              <a:t>‹#›</a:t>
+              <a:t>‹nº›</a:t>
             </a:fld>
             <a:endParaRPr lang="pt-BR"/>
           </a:p>
@@ -7323,7 +7415,7 @@
           <p:cNvPr id="2" name="Título 1">
             <a:extLst>
               <a:ext uri="{FF2B5EF4-FFF2-40B4-BE49-F238E27FC236}">
-                <a16:creationId xmlns:a16="http://schemas.microsoft.com/office/drawing/2014/main" id="{76D66686-0143-4CB6-8C09-BA326F1E7ACA}"/>
+                <a16:creationId xmlns:a16="http://schemas.microsoft.com/office/drawing/2014/main" xmlns="" id="{76D66686-0143-4CB6-8C09-BA326F1E7ACA}"/>
               </a:ext>
             </a:extLst>
           </p:cNvPr>
@@ -7356,7 +7448,7 @@
           <p:cNvPr id="3" name="Espaço Reservado para Texto 2">
             <a:extLst>
               <a:ext uri="{FF2B5EF4-FFF2-40B4-BE49-F238E27FC236}">
-                <a16:creationId xmlns:a16="http://schemas.microsoft.com/office/drawing/2014/main" id="{0227AB85-F59E-4BCE-B846-4FA0992C2F23}"/>
+                <a16:creationId xmlns:a16="http://schemas.microsoft.com/office/drawing/2014/main" xmlns="" id="{0227AB85-F59E-4BCE-B846-4FA0992C2F23}"/>
               </a:ext>
             </a:extLst>
           </p:cNvPr>
@@ -7427,7 +7519,7 @@
           <p:cNvPr id="4" name="Espaço Reservado para Conteúdo 3">
             <a:extLst>
               <a:ext uri="{FF2B5EF4-FFF2-40B4-BE49-F238E27FC236}">
-                <a16:creationId xmlns:a16="http://schemas.microsoft.com/office/drawing/2014/main" id="{3373456C-7319-4D0A-827D-D29F6B083F5D}"/>
+                <a16:creationId xmlns:a16="http://schemas.microsoft.com/office/drawing/2014/main" xmlns="" id="{3373456C-7319-4D0A-827D-D29F6B083F5D}"/>
               </a:ext>
             </a:extLst>
           </p:cNvPr>
@@ -7489,7 +7581,7 @@
           <p:cNvPr id="5" name="Espaço Reservado para Texto 4">
             <a:extLst>
               <a:ext uri="{FF2B5EF4-FFF2-40B4-BE49-F238E27FC236}">
-                <a16:creationId xmlns:a16="http://schemas.microsoft.com/office/drawing/2014/main" id="{4CD109D0-2E83-4262-8029-A871CEC47406}"/>
+                <a16:creationId xmlns:a16="http://schemas.microsoft.com/office/drawing/2014/main" xmlns="" id="{4CD109D0-2E83-4262-8029-A871CEC47406}"/>
               </a:ext>
             </a:extLst>
           </p:cNvPr>
@@ -7560,7 +7652,7 @@
           <p:cNvPr id="6" name="Espaço Reservado para Conteúdo 5">
             <a:extLst>
               <a:ext uri="{FF2B5EF4-FFF2-40B4-BE49-F238E27FC236}">
-                <a16:creationId xmlns:a16="http://schemas.microsoft.com/office/drawing/2014/main" id="{AD706E3A-CFBB-4A6C-A65F-D0360A9E74FE}"/>
+                <a16:creationId xmlns:a16="http://schemas.microsoft.com/office/drawing/2014/main" xmlns="" id="{AD706E3A-CFBB-4A6C-A65F-D0360A9E74FE}"/>
               </a:ext>
             </a:extLst>
           </p:cNvPr>
@@ -7622,7 +7714,7 @@
           <p:cNvPr id="7" name="Espaço Reservado para Data 6">
             <a:extLst>
               <a:ext uri="{FF2B5EF4-FFF2-40B4-BE49-F238E27FC236}">
-                <a16:creationId xmlns:a16="http://schemas.microsoft.com/office/drawing/2014/main" id="{4172C0E5-5AF0-4805-BB51-443733CD2BD5}"/>
+                <a16:creationId xmlns:a16="http://schemas.microsoft.com/office/drawing/2014/main" xmlns="" id="{4172C0E5-5AF0-4805-BB51-443733CD2BD5}"/>
               </a:ext>
             </a:extLst>
           </p:cNvPr>
@@ -7640,7 +7732,7 @@
           <a:p>
             <a:fld id="{63289F7E-B80B-496E-81B4-D396C37C9454}" type="datetimeFigureOut">
               <a:rPr lang="pt-BR" smtClean="0"/>
-              <a:t>28/03/2026</a:t>
+              <a:t>05/09/2026</a:t>
             </a:fld>
             <a:endParaRPr lang="pt-BR"/>
           </a:p>
@@ -7651,7 +7743,7 @@
           <p:cNvPr id="8" name="Espaço Reservado para Rodapé 7">
             <a:extLst>
               <a:ext uri="{FF2B5EF4-FFF2-40B4-BE49-F238E27FC236}">
-                <a16:creationId xmlns:a16="http://schemas.microsoft.com/office/drawing/2014/main" id="{0E801648-156F-497E-99CF-797DF48051E1}"/>
+                <a16:creationId xmlns:a16="http://schemas.microsoft.com/office/drawing/2014/main" xmlns="" id="{0E801648-156F-497E-99CF-797DF48051E1}"/>
               </a:ext>
             </a:extLst>
           </p:cNvPr>
@@ -7676,7 +7768,7 @@
           <p:cNvPr id="9" name="Espaço Reservado para Número de Slide 8">
             <a:extLst>
               <a:ext uri="{FF2B5EF4-FFF2-40B4-BE49-F238E27FC236}">
-                <a16:creationId xmlns:a16="http://schemas.microsoft.com/office/drawing/2014/main" id="{EEE23D32-80E7-4796-A137-66BF842E4B53}"/>
+                <a16:creationId xmlns:a16="http://schemas.microsoft.com/office/drawing/2014/main" xmlns="" id="{EEE23D32-80E7-4796-A137-66BF842E4B53}"/>
               </a:ext>
             </a:extLst>
           </p:cNvPr>
@@ -7694,7 +7786,7 @@
           <a:p>
             <a:fld id="{1A7E88B7-70CE-4035-AE73-13FA6FB985D4}" type="slidenum">
               <a:rPr lang="pt-BR" smtClean="0"/>
-              <a:t>‹#›</a:t>
+              <a:t>‹nº›</a:t>
             </a:fld>
             <a:endParaRPr lang="pt-BR"/>
           </a:p>
@@ -7735,7 +7827,7 @@
           <p:cNvPr id="2" name="Título 1">
             <a:extLst>
               <a:ext uri="{FF2B5EF4-FFF2-40B4-BE49-F238E27FC236}">
-                <a16:creationId xmlns:a16="http://schemas.microsoft.com/office/drawing/2014/main" id="{2BCE2379-C78F-47E1-8CFC-B846E7AF148D}"/>
+                <a16:creationId xmlns:a16="http://schemas.microsoft.com/office/drawing/2014/main" xmlns="" id="{2BCE2379-C78F-47E1-8CFC-B846E7AF148D}"/>
               </a:ext>
             </a:extLst>
           </p:cNvPr>
@@ -7763,7 +7855,7 @@
           <p:cNvPr id="3" name="Espaço Reservado para Data 2">
             <a:extLst>
               <a:ext uri="{FF2B5EF4-FFF2-40B4-BE49-F238E27FC236}">
-                <a16:creationId xmlns:a16="http://schemas.microsoft.com/office/drawing/2014/main" id="{342600A9-7F92-4E22-9D94-E4717252A817}"/>
+                <a16:creationId xmlns:a16="http://schemas.microsoft.com/office/drawing/2014/main" xmlns="" id="{342600A9-7F92-4E22-9D94-E4717252A817}"/>
               </a:ext>
             </a:extLst>
           </p:cNvPr>
@@ -7781,7 +7873,7 @@
           <a:p>
             <a:fld id="{63289F7E-B80B-496E-81B4-D396C37C9454}" type="datetimeFigureOut">
               <a:rPr lang="pt-BR" smtClean="0"/>
-              <a:t>28/03/2026</a:t>
+              <a:t>05/09/2026</a:t>
             </a:fld>
             <a:endParaRPr lang="pt-BR"/>
           </a:p>
@@ -7792,7 +7884,7 @@
           <p:cNvPr id="4" name="Espaço Reservado para Rodapé 3">
             <a:extLst>
               <a:ext uri="{FF2B5EF4-FFF2-40B4-BE49-F238E27FC236}">
-                <a16:creationId xmlns:a16="http://schemas.microsoft.com/office/drawing/2014/main" id="{192E6BED-F546-40CC-A2DF-99CBA853654E}"/>
+                <a16:creationId xmlns:a16="http://schemas.microsoft.com/office/drawing/2014/main" xmlns="" id="{192E6BED-F546-40CC-A2DF-99CBA853654E}"/>
               </a:ext>
             </a:extLst>
           </p:cNvPr>
@@ -7817,7 +7909,7 @@
           <p:cNvPr id="5" name="Espaço Reservado para Número de Slide 4">
             <a:extLst>
               <a:ext uri="{FF2B5EF4-FFF2-40B4-BE49-F238E27FC236}">
-                <a16:creationId xmlns:a16="http://schemas.microsoft.com/office/drawing/2014/main" id="{6091CC40-A8C4-4063-80EB-CC5099621678}"/>
+                <a16:creationId xmlns:a16="http://schemas.microsoft.com/office/drawing/2014/main" xmlns="" id="{6091CC40-A8C4-4063-80EB-CC5099621678}"/>
               </a:ext>
             </a:extLst>
           </p:cNvPr>
@@ -7835,7 +7927,7 @@
           <a:p>
             <a:fld id="{1A7E88B7-70CE-4035-AE73-13FA6FB985D4}" type="slidenum">
               <a:rPr lang="pt-BR" smtClean="0"/>
-              <a:t>‹#›</a:t>
+              <a:t>‹nº›</a:t>
             </a:fld>
             <a:endParaRPr lang="pt-BR"/>
           </a:p>
@@ -7876,7 +7968,7 @@
           <p:cNvPr id="2" name="Espaço Reservado para Data 1">
             <a:extLst>
               <a:ext uri="{FF2B5EF4-FFF2-40B4-BE49-F238E27FC236}">
-                <a16:creationId xmlns:a16="http://schemas.microsoft.com/office/drawing/2014/main" id="{DD19515C-212C-4EAE-84A3-8FF4BC844F1B}"/>
+                <a16:creationId xmlns:a16="http://schemas.microsoft.com/office/drawing/2014/main" xmlns="" id="{DD19515C-212C-4EAE-84A3-8FF4BC844F1B}"/>
               </a:ext>
             </a:extLst>
           </p:cNvPr>
@@ -7894,7 +7986,7 @@
           <a:p>
             <a:fld id="{63289F7E-B80B-496E-81B4-D396C37C9454}" type="datetimeFigureOut">
               <a:rPr lang="pt-BR" smtClean="0"/>
-              <a:t>28/03/2026</a:t>
+              <a:t>05/09/2026</a:t>
             </a:fld>
             <a:endParaRPr lang="pt-BR"/>
           </a:p>
@@ -7905,7 +7997,7 @@
           <p:cNvPr id="3" name="Espaço Reservado para Rodapé 2">
             <a:extLst>
               <a:ext uri="{FF2B5EF4-FFF2-40B4-BE49-F238E27FC236}">
-                <a16:creationId xmlns:a16="http://schemas.microsoft.com/office/drawing/2014/main" id="{94D3D120-B3E8-4C96-861D-7A4F12F49B3A}"/>
+                <a16:creationId xmlns:a16="http://schemas.microsoft.com/office/drawing/2014/main" xmlns="" id="{94D3D120-B3E8-4C96-861D-7A4F12F49B3A}"/>
               </a:ext>
             </a:extLst>
           </p:cNvPr>
@@ -7930,7 +8022,7 @@
           <p:cNvPr id="4" name="Espaço Reservado para Número de Slide 3">
             <a:extLst>
               <a:ext uri="{FF2B5EF4-FFF2-40B4-BE49-F238E27FC236}">
-                <a16:creationId xmlns:a16="http://schemas.microsoft.com/office/drawing/2014/main" id="{42E49B68-FA1B-468B-9F17-D5C09243D454}"/>
+                <a16:creationId xmlns:a16="http://schemas.microsoft.com/office/drawing/2014/main" xmlns="" id="{42E49B68-FA1B-468B-9F17-D5C09243D454}"/>
               </a:ext>
             </a:extLst>
           </p:cNvPr>
@@ -7948,7 +8040,7 @@
           <a:p>
             <a:fld id="{1A7E88B7-70CE-4035-AE73-13FA6FB985D4}" type="slidenum">
               <a:rPr lang="pt-BR" smtClean="0"/>
-              <a:t>‹#›</a:t>
+              <a:t>‹nº›</a:t>
             </a:fld>
             <a:endParaRPr lang="pt-BR"/>
           </a:p>
@@ -7989,7 +8081,7 @@
           <p:cNvPr id="2" name="Título 1">
             <a:extLst>
               <a:ext uri="{FF2B5EF4-FFF2-40B4-BE49-F238E27FC236}">
-                <a16:creationId xmlns:a16="http://schemas.microsoft.com/office/drawing/2014/main" id="{1C17BCBE-A897-4319-85EC-D87909C24980}"/>
+                <a16:creationId xmlns:a16="http://schemas.microsoft.com/office/drawing/2014/main" xmlns="" id="{1C17BCBE-A897-4319-85EC-D87909C24980}"/>
               </a:ext>
             </a:extLst>
           </p:cNvPr>
@@ -8026,7 +8118,7 @@
           <p:cNvPr id="3" name="Espaço Reservado para Conteúdo 2">
             <a:extLst>
               <a:ext uri="{FF2B5EF4-FFF2-40B4-BE49-F238E27FC236}">
-                <a16:creationId xmlns:a16="http://schemas.microsoft.com/office/drawing/2014/main" id="{4226F885-0204-4913-868B-4B8B82576F17}"/>
+                <a16:creationId xmlns:a16="http://schemas.microsoft.com/office/drawing/2014/main" xmlns="" id="{4226F885-0204-4913-868B-4B8B82576F17}"/>
               </a:ext>
             </a:extLst>
           </p:cNvPr>
@@ -8116,7 +8208,7 @@
           <p:cNvPr id="4" name="Espaço Reservado para Texto 3">
             <a:extLst>
               <a:ext uri="{FF2B5EF4-FFF2-40B4-BE49-F238E27FC236}">
-                <a16:creationId xmlns:a16="http://schemas.microsoft.com/office/drawing/2014/main" id="{00F9F784-A858-441B-8AB5-697098141751}"/>
+                <a16:creationId xmlns:a16="http://schemas.microsoft.com/office/drawing/2014/main" xmlns="" id="{00F9F784-A858-441B-8AB5-697098141751}"/>
               </a:ext>
             </a:extLst>
           </p:cNvPr>
@@ -8187,7 +8279,7 @@
           <p:cNvPr id="5" name="Espaço Reservado para Data 4">
             <a:extLst>
               <a:ext uri="{FF2B5EF4-FFF2-40B4-BE49-F238E27FC236}">
-                <a16:creationId xmlns:a16="http://schemas.microsoft.com/office/drawing/2014/main" id="{A4DC363A-5000-472E-8B17-02E7DCB8840A}"/>
+                <a16:creationId xmlns:a16="http://schemas.microsoft.com/office/drawing/2014/main" xmlns="" id="{A4DC363A-5000-472E-8B17-02E7DCB8840A}"/>
               </a:ext>
             </a:extLst>
           </p:cNvPr>
@@ -8205,7 +8297,7 @@
           <a:p>
             <a:fld id="{63289F7E-B80B-496E-81B4-D396C37C9454}" type="datetimeFigureOut">
               <a:rPr lang="pt-BR" smtClean="0"/>
-              <a:t>28/03/2026</a:t>
+              <a:t>05/09/2026</a:t>
             </a:fld>
             <a:endParaRPr lang="pt-BR"/>
           </a:p>
@@ -8216,7 +8308,7 @@
           <p:cNvPr id="6" name="Espaço Reservado para Rodapé 5">
             <a:extLst>
               <a:ext uri="{FF2B5EF4-FFF2-40B4-BE49-F238E27FC236}">
-                <a16:creationId xmlns:a16="http://schemas.microsoft.com/office/drawing/2014/main" id="{5548425D-2C21-4C56-BAD4-662978775C28}"/>
+                <a16:creationId xmlns:a16="http://schemas.microsoft.com/office/drawing/2014/main" xmlns="" id="{5548425D-2C21-4C56-BAD4-662978775C28}"/>
               </a:ext>
             </a:extLst>
           </p:cNvPr>
@@ -8241,7 +8333,7 @@
           <p:cNvPr id="7" name="Espaço Reservado para Número de Slide 6">
             <a:extLst>
               <a:ext uri="{FF2B5EF4-FFF2-40B4-BE49-F238E27FC236}">
-                <a16:creationId xmlns:a16="http://schemas.microsoft.com/office/drawing/2014/main" id="{C63E9726-E64C-42B2-AE8A-8C235A956B48}"/>
+                <a16:creationId xmlns:a16="http://schemas.microsoft.com/office/drawing/2014/main" xmlns="" id="{C63E9726-E64C-42B2-AE8A-8C235A956B48}"/>
               </a:ext>
             </a:extLst>
           </p:cNvPr>
@@ -8259,7 +8351,7 @@
           <a:p>
             <a:fld id="{1A7E88B7-70CE-4035-AE73-13FA6FB985D4}" type="slidenum">
               <a:rPr lang="pt-BR" smtClean="0"/>
-              <a:t>‹#›</a:t>
+              <a:t>‹nº›</a:t>
             </a:fld>
             <a:endParaRPr lang="pt-BR"/>
           </a:p>
@@ -8300,7 +8392,7 @@
           <p:cNvPr id="2" name="Título 1">
             <a:extLst>
               <a:ext uri="{FF2B5EF4-FFF2-40B4-BE49-F238E27FC236}">
-                <a16:creationId xmlns:a16="http://schemas.microsoft.com/office/drawing/2014/main" id="{11086A78-3E74-450C-96A6-CA8AC37AF772}"/>
+                <a16:creationId xmlns:a16="http://schemas.microsoft.com/office/drawing/2014/main" xmlns="" id="{11086A78-3E74-450C-96A6-CA8AC37AF772}"/>
               </a:ext>
             </a:extLst>
           </p:cNvPr>
@@ -8337,7 +8429,7 @@
           <p:cNvPr id="3" name="Espaço Reservado para Imagem 2">
             <a:extLst>
               <a:ext uri="{FF2B5EF4-FFF2-40B4-BE49-F238E27FC236}">
-                <a16:creationId xmlns:a16="http://schemas.microsoft.com/office/drawing/2014/main" id="{5F5B7312-975A-4DBC-9B2F-3652ADA006FD}"/>
+                <a16:creationId xmlns:a16="http://schemas.microsoft.com/office/drawing/2014/main" xmlns="" id="{5F5B7312-975A-4DBC-9B2F-3652ADA006FD}"/>
               </a:ext>
             </a:extLst>
           </p:cNvPr>
@@ -8404,7 +8496,7 @@
           <p:cNvPr id="4" name="Espaço Reservado para Texto 3">
             <a:extLst>
               <a:ext uri="{FF2B5EF4-FFF2-40B4-BE49-F238E27FC236}">
-                <a16:creationId xmlns:a16="http://schemas.microsoft.com/office/drawing/2014/main" id="{AAF805F5-1DFF-41C6-944C-7D79FE0D0963}"/>
+                <a16:creationId xmlns:a16="http://schemas.microsoft.com/office/drawing/2014/main" xmlns="" id="{AAF805F5-1DFF-41C6-944C-7D79FE0D0963}"/>
               </a:ext>
             </a:extLst>
           </p:cNvPr>
@@ -8475,7 +8567,7 @@
           <p:cNvPr id="5" name="Espaço Reservado para Data 4">
             <a:extLst>
               <a:ext uri="{FF2B5EF4-FFF2-40B4-BE49-F238E27FC236}">
-                <a16:creationId xmlns:a16="http://schemas.microsoft.com/office/drawing/2014/main" id="{02113D81-8665-4516-BD81-C6A1F254EECD}"/>
+                <a16:creationId xmlns:a16="http://schemas.microsoft.com/office/drawing/2014/main" xmlns="" id="{02113D81-8665-4516-BD81-C6A1F254EECD}"/>
               </a:ext>
             </a:extLst>
           </p:cNvPr>
@@ -8493,7 +8585,7 @@
           <a:p>
             <a:fld id="{63289F7E-B80B-496E-81B4-D396C37C9454}" type="datetimeFigureOut">
               <a:rPr lang="pt-BR" smtClean="0"/>
-              <a:t>28/03/2026</a:t>
+              <a:t>05/09/2026</a:t>
             </a:fld>
             <a:endParaRPr lang="pt-BR"/>
           </a:p>
@@ -8504,7 +8596,7 @@
           <p:cNvPr id="6" name="Espaço Reservado para Rodapé 5">
             <a:extLst>
               <a:ext uri="{FF2B5EF4-FFF2-40B4-BE49-F238E27FC236}">
-                <a16:creationId xmlns:a16="http://schemas.microsoft.com/office/drawing/2014/main" id="{2B00C88B-FF32-40AA-A187-727D96FD7862}"/>
+                <a16:creationId xmlns:a16="http://schemas.microsoft.com/office/drawing/2014/main" xmlns="" id="{2B00C88B-FF32-40AA-A187-727D96FD7862}"/>
               </a:ext>
             </a:extLst>
           </p:cNvPr>
@@ -8529,7 +8621,7 @@
           <p:cNvPr id="7" name="Espaço Reservado para Número de Slide 6">
             <a:extLst>
               <a:ext uri="{FF2B5EF4-FFF2-40B4-BE49-F238E27FC236}">
-                <a16:creationId xmlns:a16="http://schemas.microsoft.com/office/drawing/2014/main" id="{A04D1A2D-69F7-4B8F-A730-BC26DC340BA6}"/>
+                <a16:creationId xmlns:a16="http://schemas.microsoft.com/office/drawing/2014/main" xmlns="" id="{A04D1A2D-69F7-4B8F-A730-BC26DC340BA6}"/>
               </a:ext>
             </a:extLst>
           </p:cNvPr>
@@ -8547,7 +8639,7 @@
           <a:p>
             <a:fld id="{1A7E88B7-70CE-4035-AE73-13FA6FB985D4}" type="slidenum">
               <a:rPr lang="pt-BR" smtClean="0"/>
-              <a:t>‹#›</a:t>
+              <a:t>‹nº›</a:t>
             </a:fld>
             <a:endParaRPr lang="pt-BR"/>
           </a:p>
@@ -8593,7 +8685,7 @@
           <p:cNvPr id="2" name="Espaço Reservado para Título 1">
             <a:extLst>
               <a:ext uri="{FF2B5EF4-FFF2-40B4-BE49-F238E27FC236}">
-                <a16:creationId xmlns:a16="http://schemas.microsoft.com/office/drawing/2014/main" id="{E69A0273-1966-4A1B-9370-4C1CE5036371}"/>
+                <a16:creationId xmlns:a16="http://schemas.microsoft.com/office/drawing/2014/main" xmlns="" id="{E69A0273-1966-4A1B-9370-4C1CE5036371}"/>
               </a:ext>
             </a:extLst>
           </p:cNvPr>
@@ -8631,7 +8723,7 @@
           <p:cNvPr id="3" name="Espaço Reservado para Texto 2">
             <a:extLst>
               <a:ext uri="{FF2B5EF4-FFF2-40B4-BE49-F238E27FC236}">
-                <a16:creationId xmlns:a16="http://schemas.microsoft.com/office/drawing/2014/main" id="{3B9CF87A-0448-49A7-AB25-EBC1D56A40EF}"/>
+                <a16:creationId xmlns:a16="http://schemas.microsoft.com/office/drawing/2014/main" xmlns="" id="{3B9CF87A-0448-49A7-AB25-EBC1D56A40EF}"/>
               </a:ext>
             </a:extLst>
           </p:cNvPr>
@@ -8698,7 +8790,7 @@
           <p:cNvPr id="4" name="Espaço Reservado para Data 3">
             <a:extLst>
               <a:ext uri="{FF2B5EF4-FFF2-40B4-BE49-F238E27FC236}">
-                <a16:creationId xmlns:a16="http://schemas.microsoft.com/office/drawing/2014/main" id="{2EF7B1F2-BB5A-44D0-816D-16AD2C71430E}"/>
+                <a16:creationId xmlns:a16="http://schemas.microsoft.com/office/drawing/2014/main" xmlns="" id="{2EF7B1F2-BB5A-44D0-816D-16AD2C71430E}"/>
               </a:ext>
             </a:extLst>
           </p:cNvPr>
@@ -8734,7 +8826,7 @@
           <a:p>
             <a:fld id="{63289F7E-B80B-496E-81B4-D396C37C9454}" type="datetimeFigureOut">
               <a:rPr lang="pt-BR" smtClean="0"/>
-              <a:t>28/03/2026</a:t>
+              <a:t>05/09/2026</a:t>
             </a:fld>
             <a:endParaRPr lang="pt-BR"/>
           </a:p>
@@ -8745,7 +8837,7 @@
           <p:cNvPr id="5" name="Espaço Reservado para Rodapé 4">
             <a:extLst>
               <a:ext uri="{FF2B5EF4-FFF2-40B4-BE49-F238E27FC236}">
-                <a16:creationId xmlns:a16="http://schemas.microsoft.com/office/drawing/2014/main" id="{C703F94C-2CC8-4DAA-BC35-14FC3E841DCD}"/>
+                <a16:creationId xmlns:a16="http://schemas.microsoft.com/office/drawing/2014/main" xmlns="" id="{C703F94C-2CC8-4DAA-BC35-14FC3E841DCD}"/>
               </a:ext>
             </a:extLst>
           </p:cNvPr>
@@ -8788,7 +8880,7 @@
           <p:cNvPr id="6" name="Espaço Reservado para Número de Slide 5">
             <a:extLst>
               <a:ext uri="{FF2B5EF4-FFF2-40B4-BE49-F238E27FC236}">
-                <a16:creationId xmlns:a16="http://schemas.microsoft.com/office/drawing/2014/main" id="{64051336-7048-457A-8B61-D94291D71648}"/>
+                <a16:creationId xmlns:a16="http://schemas.microsoft.com/office/drawing/2014/main" xmlns="" id="{64051336-7048-457A-8B61-D94291D71648}"/>
               </a:ext>
             </a:extLst>
           </p:cNvPr>
@@ -8824,7 +8916,7 @@
           <a:p>
             <a:fld id="{1A7E88B7-70CE-4035-AE73-13FA6FB985D4}" type="slidenum">
               <a:rPr lang="pt-BR" smtClean="0"/>
-              <a:t>‹#›</a:t>
+              <a:t>‹nº›</a:t>
             </a:fld>
             <a:endParaRPr lang="pt-BR"/>
           </a:p>
@@ -9156,7 +9248,7 @@
           <p:cNvPr id="2" name="Título 1">
             <a:extLst>
               <a:ext uri="{FF2B5EF4-FFF2-40B4-BE49-F238E27FC236}">
-                <a16:creationId xmlns:a16="http://schemas.microsoft.com/office/drawing/2014/main" id="{32666AC8-2E17-4DB4-B0F5-60C640CCFD2E}"/>
+                <a16:creationId xmlns:a16="http://schemas.microsoft.com/office/drawing/2014/main" xmlns="" id="{32666AC8-2E17-4DB4-B0F5-60C640CCFD2E}"/>
               </a:ext>
             </a:extLst>
           </p:cNvPr>
@@ -9183,6 +9275,10 @@
               <a:rPr lang="pt-BR" sz="5400" dirty="0"/>
               <a:t>T320 - Introdução ao Aprendizado de Máquina II:</a:t>
             </a:r>
+            <a:r>
+              <a:rPr lang="pt-BR" dirty="0"/>
+              <a:t/>
+            </a:r>
             <a:br>
               <a:rPr lang="pt-BR" dirty="0"/>
             </a:br>
@@ -9198,7 +9294,7 @@
           <p:cNvPr id="4" name="CaixaDeTexto 3">
             <a:extLst>
               <a:ext uri="{FF2B5EF4-FFF2-40B4-BE49-F238E27FC236}">
-                <a16:creationId xmlns:a16="http://schemas.microsoft.com/office/drawing/2014/main" id="{430EB894-B7D4-434C-9D1A-A14094D9BEEC}"/>
+                <a16:creationId xmlns:a16="http://schemas.microsoft.com/office/drawing/2014/main" xmlns="" id="{430EB894-B7D4-434C-9D1A-A14094D9BEEC}"/>
               </a:ext>
             </a:extLst>
           </p:cNvPr>
@@ -9239,7 +9335,7 @@
           <p:cNvPr id="1026" name="Picture 2" descr="Logo">
             <a:extLst>
               <a:ext uri="{FF2B5EF4-FFF2-40B4-BE49-F238E27FC236}">
-                <a16:creationId xmlns:a16="http://schemas.microsoft.com/office/drawing/2014/main" id="{3F2642E0-4F6A-4196-8F58-E77D36E9A33F}"/>
+                <a16:creationId xmlns:a16="http://schemas.microsoft.com/office/drawing/2014/main" xmlns="" id="{3F2642E0-4F6A-4196-8F58-E77D36E9A33F}"/>
               </a:ext>
             </a:extLst>
           </p:cNvPr>
@@ -9284,7 +9380,7 @@
           <p:cNvPr id="5122" name="Picture 2" descr="Image result for machine learning">
             <a:extLst>
               <a:ext uri="{FF2B5EF4-FFF2-40B4-BE49-F238E27FC236}">
-                <a16:creationId xmlns:a16="http://schemas.microsoft.com/office/drawing/2014/main" id="{810CE0A2-4102-44A6-A370-175E7896CDCB}"/>
+                <a16:creationId xmlns:a16="http://schemas.microsoft.com/office/drawing/2014/main" xmlns="" id="{810CE0A2-4102-44A6-A370-175E7896CDCB}"/>
               </a:ext>
             </a:extLst>
           </p:cNvPr>
@@ -10688,7 +10784,7 @@
           <p:cNvPr id="13" name="CaixaDeTexto 12">
             <a:extLst>
               <a:ext uri="{FF2B5EF4-FFF2-40B4-BE49-F238E27FC236}">
-                <a16:creationId xmlns:a16="http://schemas.microsoft.com/office/drawing/2014/main" id="{9989FE69-01F8-8C6A-4EA0-DA1C9792B919}"/>
+                <a16:creationId xmlns:a16="http://schemas.microsoft.com/office/drawing/2014/main" xmlns="" id="{9989FE69-01F8-8C6A-4EA0-DA1C9792B919}"/>
               </a:ext>
             </a:extLst>
           </p:cNvPr>
@@ -10763,7 +10859,7 @@
           <p:cNvPr id="2" name="Título 1">
             <a:extLst>
               <a:ext uri="{FF2B5EF4-FFF2-40B4-BE49-F238E27FC236}">
-                <a16:creationId xmlns:a16="http://schemas.microsoft.com/office/drawing/2014/main" id="{B022D379-CAA0-9DC9-CDBD-6E0EBE1BFF31}"/>
+                <a16:creationId xmlns:a16="http://schemas.microsoft.com/office/drawing/2014/main" xmlns="" id="{B022D379-CAA0-9DC9-CDBD-6E0EBE1BFF31}"/>
               </a:ext>
             </a:extLst>
           </p:cNvPr>
@@ -10797,7 +10893,7 @@
               <p:cNvPr id="3" name="Espaço Reservado para Conteúdo 2">
                 <a:extLst>
                   <a:ext uri="{FF2B5EF4-FFF2-40B4-BE49-F238E27FC236}">
-                    <a16:creationId xmlns:a16="http://schemas.microsoft.com/office/drawing/2014/main" id="{B68F0D74-8673-A432-A1D7-BDEF7725851A}"/>
+                    <a16:creationId xmlns:a16="http://schemas.microsoft.com/office/drawing/2014/main" xmlns="" id="{B68F0D74-8673-A432-A1D7-BDEF7725851A}"/>
                   </a:ext>
                 </a:extLst>
               </p:cNvPr>
@@ -11068,7 +11164,7 @@
           <p:cNvPr id="2" name="Título 1">
             <a:extLst>
               <a:ext uri="{FF2B5EF4-FFF2-40B4-BE49-F238E27FC236}">
-                <a16:creationId xmlns:a16="http://schemas.microsoft.com/office/drawing/2014/main" id="{519F0958-530D-D942-BA01-15C1583DD1E6}"/>
+                <a16:creationId xmlns:a16="http://schemas.microsoft.com/office/drawing/2014/main" xmlns="" id="{519F0958-530D-D942-BA01-15C1583DD1E6}"/>
               </a:ext>
             </a:extLst>
           </p:cNvPr>
@@ -11102,7 +11198,7 @@
               <p:cNvPr id="3" name="Espaço Reservado para Conteúdo 2">
                 <a:extLst>
                   <a:ext uri="{FF2B5EF4-FFF2-40B4-BE49-F238E27FC236}">
-                    <a16:creationId xmlns:a16="http://schemas.microsoft.com/office/drawing/2014/main" id="{21416F72-28FB-E27C-D129-16A944A87C67}"/>
+                    <a16:creationId xmlns:a16="http://schemas.microsoft.com/office/drawing/2014/main" xmlns="" id="{21416F72-28FB-E27C-D129-16A944A87C67}"/>
                   </a:ext>
                 </a:extLst>
               </p:cNvPr>
@@ -11563,7 +11659,7 @@
           <p:cNvPr id="2" name="Título 1">
             <a:extLst>
               <a:ext uri="{FF2B5EF4-FFF2-40B4-BE49-F238E27FC236}">
-                <a16:creationId xmlns:a16="http://schemas.microsoft.com/office/drawing/2014/main" id="{DCD47F25-5DD1-794E-8733-BFD771A2DE49}"/>
+                <a16:creationId xmlns:a16="http://schemas.microsoft.com/office/drawing/2014/main" xmlns="" id="{DCD47F25-5DD1-794E-8733-BFD771A2DE49}"/>
               </a:ext>
             </a:extLst>
           </p:cNvPr>
@@ -11597,7 +11693,7 @@
               <p:cNvPr id="3" name="Espaço Reservado para Conteúdo 2">
                 <a:extLst>
                   <a:ext uri="{FF2B5EF4-FFF2-40B4-BE49-F238E27FC236}">
-                    <a16:creationId xmlns:a16="http://schemas.microsoft.com/office/drawing/2014/main" id="{D79BB7DC-99E7-8958-EC77-566B7E3C2BBB}"/>
+                    <a16:creationId xmlns:a16="http://schemas.microsoft.com/office/drawing/2014/main" xmlns="" id="{D79BB7DC-99E7-8958-EC77-566B7E3C2BBB}"/>
                   </a:ext>
                 </a:extLst>
               </p:cNvPr>
@@ -12897,7 +12993,7 @@
           <p:cNvPr id="2" name="Título 1">
             <a:extLst>
               <a:ext uri="{FF2B5EF4-FFF2-40B4-BE49-F238E27FC236}">
-                <a16:creationId xmlns:a16="http://schemas.microsoft.com/office/drawing/2014/main" id="{52E3438D-F516-F1D3-A02F-51857586D07A}"/>
+                <a16:creationId xmlns:a16="http://schemas.microsoft.com/office/drawing/2014/main" xmlns="" id="{52E3438D-F516-F1D3-A02F-51857586D07A}"/>
               </a:ext>
             </a:extLst>
           </p:cNvPr>
@@ -12931,7 +13027,7 @@
               <p:cNvPr id="3" name="Espaço Reservado para Conteúdo 2">
                 <a:extLst>
                   <a:ext uri="{FF2B5EF4-FFF2-40B4-BE49-F238E27FC236}">
-                    <a16:creationId xmlns:a16="http://schemas.microsoft.com/office/drawing/2014/main" id="{BCAAD57B-65A0-9DAD-79FC-2AE2692EB84B}"/>
+                    <a16:creationId xmlns:a16="http://schemas.microsoft.com/office/drawing/2014/main" xmlns="" id="{BCAAD57B-65A0-9DAD-79FC-2AE2692EB84B}"/>
                   </a:ext>
                 </a:extLst>
               </p:cNvPr>
@@ -13792,7 +13888,7 @@
           <p:cNvPr id="5" name="Rectangle 11">
             <a:extLst>
               <a:ext uri="{FF2B5EF4-FFF2-40B4-BE49-F238E27FC236}">
-                <a16:creationId xmlns:a16="http://schemas.microsoft.com/office/drawing/2014/main" id="{D1D7E603-A964-1188-9D09-B0C1E18592FA}"/>
+                <a16:creationId xmlns:a16="http://schemas.microsoft.com/office/drawing/2014/main" xmlns="" id="{D1D7E603-A964-1188-9D09-B0C1E18592FA}"/>
               </a:ext>
             </a:extLst>
           </p:cNvPr>
@@ -13874,7 +13970,7 @@
           <p:cNvPr id="2" name="Título 1">
             <a:extLst>
               <a:ext uri="{FF2B5EF4-FFF2-40B4-BE49-F238E27FC236}">
-                <a16:creationId xmlns:a16="http://schemas.microsoft.com/office/drawing/2014/main" id="{99DAA83A-B143-94BB-B48B-41A7423070CE}"/>
+                <a16:creationId xmlns:a16="http://schemas.microsoft.com/office/drawing/2014/main" xmlns="" id="{99DAA83A-B143-94BB-B48B-41A7423070CE}"/>
               </a:ext>
             </a:extLst>
           </p:cNvPr>
@@ -13909,7 +14005,7 @@
               <p:cNvPr id="3" name="Espaço Reservado para Conteúdo 2">
                 <a:extLst>
                   <a:ext uri="{FF2B5EF4-FFF2-40B4-BE49-F238E27FC236}">
-                    <a16:creationId xmlns:a16="http://schemas.microsoft.com/office/drawing/2014/main" id="{32DF54A1-52F5-C48C-7CD4-D6E451DF19D8}"/>
+                    <a16:creationId xmlns:a16="http://schemas.microsoft.com/office/drawing/2014/main" xmlns="" id="{32DF54A1-52F5-C48C-7CD4-D6E451DF19D8}"/>
                   </a:ext>
                 </a:extLst>
               </p:cNvPr>
@@ -14125,7 +14221,7 @@
           <p:cNvPr id="6" name="Imagem 5">
             <a:extLst>
               <a:ext uri="{FF2B5EF4-FFF2-40B4-BE49-F238E27FC236}">
-                <a16:creationId xmlns:a16="http://schemas.microsoft.com/office/drawing/2014/main" id="{ED5D1F5D-F195-0452-50D4-07E9F2B1C49D}"/>
+                <a16:creationId xmlns:a16="http://schemas.microsoft.com/office/drawing/2014/main" xmlns="" id="{ED5D1F5D-F195-0452-50D4-07E9F2B1C49D}"/>
               </a:ext>
             </a:extLst>
           </p:cNvPr>
@@ -14161,7 +14257,7 @@
           <p:cNvPr id="8" name="CaixaDeTexto 7">
             <a:extLst>
               <a:ext uri="{FF2B5EF4-FFF2-40B4-BE49-F238E27FC236}">
-                <a16:creationId xmlns:a16="http://schemas.microsoft.com/office/drawing/2014/main" id="{0DC5673F-9B77-2E9E-8317-E71CA8896FE0}"/>
+                <a16:creationId xmlns:a16="http://schemas.microsoft.com/office/drawing/2014/main" xmlns="" id="{0DC5673F-9B77-2E9E-8317-E71CA8896FE0}"/>
               </a:ext>
             </a:extLst>
           </p:cNvPr>
@@ -14213,7 +14309,7 @@
               <p:cNvPr id="4" name="CaixaDeTexto 3">
                 <a:extLst>
                   <a:ext uri="{FF2B5EF4-FFF2-40B4-BE49-F238E27FC236}">
-                    <a16:creationId xmlns:a16="http://schemas.microsoft.com/office/drawing/2014/main" id="{CBD55F82-56D5-32C8-C5AB-AF99477FBAAC}"/>
+                    <a16:creationId xmlns:a16="http://schemas.microsoft.com/office/drawing/2014/main" xmlns="" id="{CBD55F82-56D5-32C8-C5AB-AF99477FBAAC}"/>
                   </a:ext>
                 </a:extLst>
               </p:cNvPr>
@@ -14340,7 +14436,7 @@
           <p:cNvPr id="2" name="Título 1">
             <a:extLst>
               <a:ext uri="{FF2B5EF4-FFF2-40B4-BE49-F238E27FC236}">
-                <a16:creationId xmlns:a16="http://schemas.microsoft.com/office/drawing/2014/main" id="{99DAA83A-B143-94BB-B48B-41A7423070CE}"/>
+                <a16:creationId xmlns:a16="http://schemas.microsoft.com/office/drawing/2014/main" xmlns="" id="{99DAA83A-B143-94BB-B48B-41A7423070CE}"/>
               </a:ext>
             </a:extLst>
           </p:cNvPr>
@@ -14375,7 +14471,7 @@
               <p:cNvPr id="3" name="Espaço Reservado para Conteúdo 2">
                 <a:extLst>
                   <a:ext uri="{FF2B5EF4-FFF2-40B4-BE49-F238E27FC236}">
-                    <a16:creationId xmlns:a16="http://schemas.microsoft.com/office/drawing/2014/main" id="{32DF54A1-52F5-C48C-7CD4-D6E451DF19D8}"/>
+                    <a16:creationId xmlns:a16="http://schemas.microsoft.com/office/drawing/2014/main" xmlns="" id="{32DF54A1-52F5-C48C-7CD4-D6E451DF19D8}"/>
                   </a:ext>
                 </a:extLst>
               </p:cNvPr>
@@ -14895,7 +14991,7 @@
           <p:cNvPr id="6" name="Imagem 5">
             <a:extLst>
               <a:ext uri="{FF2B5EF4-FFF2-40B4-BE49-F238E27FC236}">
-                <a16:creationId xmlns:a16="http://schemas.microsoft.com/office/drawing/2014/main" id="{ED5D1F5D-F195-0452-50D4-07E9F2B1C49D}"/>
+                <a16:creationId xmlns:a16="http://schemas.microsoft.com/office/drawing/2014/main" xmlns="" id="{ED5D1F5D-F195-0452-50D4-07E9F2B1C49D}"/>
               </a:ext>
             </a:extLst>
           </p:cNvPr>
@@ -14933,7 +15029,7 @@
               <p:cNvPr id="4" name="CaixaDeTexto 3">
                 <a:extLst>
                   <a:ext uri="{FF2B5EF4-FFF2-40B4-BE49-F238E27FC236}">
-                    <a16:creationId xmlns:a16="http://schemas.microsoft.com/office/drawing/2014/main" id="{2B7728A0-505D-9DAE-23EC-8172E2EEEFA9}"/>
+                    <a16:creationId xmlns:a16="http://schemas.microsoft.com/office/drawing/2014/main" xmlns="" id="{2B7728A0-505D-9DAE-23EC-8172E2EEEFA9}"/>
                   </a:ext>
                 </a:extLst>
               </p:cNvPr>
@@ -15060,7 +15156,7 @@
           <p:cNvPr id="2" name="Título 1">
             <a:extLst>
               <a:ext uri="{FF2B5EF4-FFF2-40B4-BE49-F238E27FC236}">
-                <a16:creationId xmlns:a16="http://schemas.microsoft.com/office/drawing/2014/main" id="{028A152F-93D8-11FA-9B7A-B62AE5BB6486}"/>
+                <a16:creationId xmlns:a16="http://schemas.microsoft.com/office/drawing/2014/main" xmlns="" id="{028A152F-93D8-11FA-9B7A-B62AE5BB6486}"/>
               </a:ext>
             </a:extLst>
           </p:cNvPr>
@@ -15094,7 +15190,7 @@
               <p:cNvPr id="3" name="Espaço Reservado para Conteúdo 2">
                 <a:extLst>
                   <a:ext uri="{FF2B5EF4-FFF2-40B4-BE49-F238E27FC236}">
-                    <a16:creationId xmlns:a16="http://schemas.microsoft.com/office/drawing/2014/main" id="{B3535727-BB24-BB15-5C03-3DA9A3F9A09A}"/>
+                    <a16:creationId xmlns:a16="http://schemas.microsoft.com/office/drawing/2014/main" xmlns="" id="{B3535727-BB24-BB15-5C03-3DA9A3F9A09A}"/>
                   </a:ext>
                 </a:extLst>
               </p:cNvPr>
@@ -15272,7 +15368,7 @@
           <p:cNvPr id="4" name="Imagem 5">
             <a:extLst>
               <a:ext uri="{FF2B5EF4-FFF2-40B4-BE49-F238E27FC236}">
-                <a16:creationId xmlns:a16="http://schemas.microsoft.com/office/drawing/2014/main" id="{42A1713D-06B5-FB35-8488-833F7CAB7166}"/>
+                <a16:creationId xmlns:a16="http://schemas.microsoft.com/office/drawing/2014/main" xmlns="" id="{42A1713D-06B5-FB35-8488-833F7CAB7166}"/>
               </a:ext>
             </a:extLst>
           </p:cNvPr>
@@ -15338,7 +15434,7 @@
           <p:cNvPr id="2" name="Title 1">
             <a:extLst>
               <a:ext uri="{FF2B5EF4-FFF2-40B4-BE49-F238E27FC236}">
-                <a16:creationId xmlns:a16="http://schemas.microsoft.com/office/drawing/2014/main" id="{2DB9D242-5419-0FFB-7863-B3BB3BD80869}"/>
+                <a16:creationId xmlns:a16="http://schemas.microsoft.com/office/drawing/2014/main" xmlns="" id="{2DB9D242-5419-0FFB-7863-B3BB3BD80869}"/>
               </a:ext>
             </a:extLst>
           </p:cNvPr>
@@ -15369,7 +15465,7 @@
               <p:cNvPr id="3" name="Content Placeholder 2">
                 <a:extLst>
                   <a:ext uri="{FF2B5EF4-FFF2-40B4-BE49-F238E27FC236}">
-                    <a16:creationId xmlns:a16="http://schemas.microsoft.com/office/drawing/2014/main" id="{34B1DEA3-BAAD-D90C-CD9D-99A5A24F4544}"/>
+                    <a16:creationId xmlns:a16="http://schemas.microsoft.com/office/drawing/2014/main" xmlns="" id="{34B1DEA3-BAAD-D90C-CD9D-99A5A24F4544}"/>
                   </a:ext>
                 </a:extLst>
               </p:cNvPr>
@@ -16259,7 +16355,7 @@
           <p:cNvPr id="2" name="Title 1">
             <a:extLst>
               <a:ext uri="{FF2B5EF4-FFF2-40B4-BE49-F238E27FC236}">
-                <a16:creationId xmlns:a16="http://schemas.microsoft.com/office/drawing/2014/main" id="{997538D5-DC01-EC48-38D2-99D754F1BB92}"/>
+                <a16:creationId xmlns:a16="http://schemas.microsoft.com/office/drawing/2014/main" xmlns="" id="{997538D5-DC01-EC48-38D2-99D754F1BB92}"/>
               </a:ext>
             </a:extLst>
           </p:cNvPr>
@@ -16290,7 +16386,7 @@
               <p:cNvPr id="3" name="Content Placeholder 2">
                 <a:extLst>
                   <a:ext uri="{FF2B5EF4-FFF2-40B4-BE49-F238E27FC236}">
-                    <a16:creationId xmlns:a16="http://schemas.microsoft.com/office/drawing/2014/main" id="{17D7928D-3A32-7330-5FDC-756155EF2F3D}"/>
+                    <a16:creationId xmlns:a16="http://schemas.microsoft.com/office/drawing/2014/main" xmlns="" id="{17D7928D-3A32-7330-5FDC-756155EF2F3D}"/>
                   </a:ext>
                 </a:extLst>
               </p:cNvPr>
@@ -16854,7 +16950,23 @@
             </a:r>
             <a:r>
               <a:rPr lang="pt-BR" dirty="0"/>
-              <a:t> funciona e pode ser usado em problemas de classificação binária, após a discretização do valor de saída.</a:t>
+              <a:t> funciona e pode ser usado em problemas de classificação binária, após a </a:t>
+            </a:r>
+            <a:r>
+              <a:rPr lang="pt-BR" dirty="0" err="1"/>
+              <a:t>discretização</a:t>
+            </a:r>
+            <a:r>
+              <a:rPr lang="pt-BR" dirty="0"/>
+              <a:t> </a:t>
+            </a:r>
+            <a:r>
+              <a:rPr lang="pt-BR" dirty="0" smtClean="0"/>
+              <a:t>do seu </a:t>
+            </a:r>
+            <a:r>
+              <a:rPr lang="pt-BR" dirty="0"/>
+              <a:t>valor de saída.</a:t>
             </a:r>
           </a:p>
           <a:p>
@@ -16900,7 +17012,7 @@
           <p:cNvPr id="2" name="Título 1">
             <a:extLst>
               <a:ext uri="{FF2B5EF4-FFF2-40B4-BE49-F238E27FC236}">
-                <a16:creationId xmlns:a16="http://schemas.microsoft.com/office/drawing/2014/main" id="{1FE7CD05-66F2-8967-6154-CCED38E0F987}"/>
+                <a16:creationId xmlns:a16="http://schemas.microsoft.com/office/drawing/2014/main" xmlns="" id="{1FE7CD05-66F2-8967-6154-CCED38E0F987}"/>
               </a:ext>
             </a:extLst>
           </p:cNvPr>
@@ -16930,7 +17042,7 @@
               <p:cNvPr id="3" name="Espaço Reservado para Conteúdo 2">
                 <a:extLst>
                   <a:ext uri="{FF2B5EF4-FFF2-40B4-BE49-F238E27FC236}">
-                    <a16:creationId xmlns:a16="http://schemas.microsoft.com/office/drawing/2014/main" id="{21A86630-5D79-AD4B-79FC-6C8373E8DB39}"/>
+                    <a16:creationId xmlns:a16="http://schemas.microsoft.com/office/drawing/2014/main" xmlns="" id="{21A86630-5D79-AD4B-79FC-6C8373E8DB39}"/>
                   </a:ext>
                 </a:extLst>
               </p:cNvPr>
@@ -17925,7 +18037,7 @@
           <p:cNvPr id="2" name="Título 1">
             <a:extLst>
               <a:ext uri="{FF2B5EF4-FFF2-40B4-BE49-F238E27FC236}">
-                <a16:creationId xmlns:a16="http://schemas.microsoft.com/office/drawing/2014/main" id="{E4598F11-6F65-0753-89FE-F5ABED77B46A}"/>
+                <a16:creationId xmlns:a16="http://schemas.microsoft.com/office/drawing/2014/main" xmlns="" id="{E4598F11-6F65-0753-89FE-F5ABED77B46A}"/>
               </a:ext>
             </a:extLst>
           </p:cNvPr>
@@ -17956,7 +18068,7 @@
               <p:cNvPr id="3" name="Espaço Reservado para Conteúdo 2">
                 <a:extLst>
                   <a:ext uri="{FF2B5EF4-FFF2-40B4-BE49-F238E27FC236}">
-                    <a16:creationId xmlns:a16="http://schemas.microsoft.com/office/drawing/2014/main" id="{FEF4E6DC-E916-D97A-4D18-D469285C4F2C}"/>
+                    <a16:creationId xmlns:a16="http://schemas.microsoft.com/office/drawing/2014/main" xmlns="" id="{FEF4E6DC-E916-D97A-4D18-D469285C4F2C}"/>
                   </a:ext>
                 </a:extLst>
               </p:cNvPr>
@@ -18426,7 +18538,7 @@
           <p:cNvPr id="2" name="Título 1">
             <a:extLst>
               <a:ext uri="{FF2B5EF4-FFF2-40B4-BE49-F238E27FC236}">
-                <a16:creationId xmlns:a16="http://schemas.microsoft.com/office/drawing/2014/main" id="{D5807923-28D2-8150-E304-526DA460D220}"/>
+                <a16:creationId xmlns:a16="http://schemas.microsoft.com/office/drawing/2014/main" xmlns="" id="{D5807923-28D2-8150-E304-526DA460D220}"/>
               </a:ext>
             </a:extLst>
           </p:cNvPr>
@@ -18455,7 +18567,7 @@
           <p:cNvPr id="3" name="Espaço Reservado para Conteúdo 2">
             <a:extLst>
               <a:ext uri="{FF2B5EF4-FFF2-40B4-BE49-F238E27FC236}">
-                <a16:creationId xmlns:a16="http://schemas.microsoft.com/office/drawing/2014/main" id="{FFACD180-C529-EB91-BD2D-B5F491B1E35C}"/>
+                <a16:creationId xmlns:a16="http://schemas.microsoft.com/office/drawing/2014/main" xmlns="" id="{FFACD180-C529-EB91-BD2D-B5F491B1E35C}"/>
               </a:ext>
             </a:extLst>
           </p:cNvPr>
@@ -18587,7 +18699,7 @@
           <p:cNvPr id="1026" name="Picture 2">
             <a:extLst>
               <a:ext uri="{FF2B5EF4-FFF2-40B4-BE49-F238E27FC236}">
-                <a16:creationId xmlns:a16="http://schemas.microsoft.com/office/drawing/2014/main" id="{6FC2BDE8-91E0-6379-9BA3-76511C6153D5}"/>
+                <a16:creationId xmlns:a16="http://schemas.microsoft.com/office/drawing/2014/main" xmlns="" id="{6FC2BDE8-91E0-6379-9BA3-76511C6153D5}"/>
               </a:ext>
             </a:extLst>
           </p:cNvPr>
@@ -18632,7 +18744,7 @@
           <p:cNvPr id="5" name="Picture 2">
             <a:extLst>
               <a:ext uri="{FF2B5EF4-FFF2-40B4-BE49-F238E27FC236}">
-                <a16:creationId xmlns:a16="http://schemas.microsoft.com/office/drawing/2014/main" id="{2771BE1F-7B74-36A4-AA69-9171B025A4B6}"/>
+                <a16:creationId xmlns:a16="http://schemas.microsoft.com/office/drawing/2014/main" xmlns="" id="{2771BE1F-7B74-36A4-AA69-9171B025A4B6}"/>
               </a:ext>
             </a:extLst>
           </p:cNvPr>
@@ -18707,7 +18819,7 @@
           <p:cNvPr id="2" name="Título 1">
             <a:extLst>
               <a:ext uri="{FF2B5EF4-FFF2-40B4-BE49-F238E27FC236}">
-                <a16:creationId xmlns:a16="http://schemas.microsoft.com/office/drawing/2014/main" id="{5D929962-9BFC-4174-AB35-CC23FA013168}"/>
+                <a16:creationId xmlns:a16="http://schemas.microsoft.com/office/drawing/2014/main" xmlns="" id="{5D929962-9BFC-4174-AB35-CC23FA013168}"/>
               </a:ext>
             </a:extLst>
           </p:cNvPr>
@@ -18738,7 +18850,7 @@
               <p:cNvPr id="3" name="Espaço Reservado para Conteúdo 2">
                 <a:extLst>
                   <a:ext uri="{FF2B5EF4-FFF2-40B4-BE49-F238E27FC236}">
-                    <a16:creationId xmlns:a16="http://schemas.microsoft.com/office/drawing/2014/main" id="{1D38055D-E355-F780-9CA0-0337EA0BE4FD}"/>
+                    <a16:creationId xmlns:a16="http://schemas.microsoft.com/office/drawing/2014/main" xmlns="" id="{1D38055D-E355-F780-9CA0-0337EA0BE4FD}"/>
                   </a:ext>
                 </a:extLst>
               </p:cNvPr>
@@ -20012,7 +20124,7 @@
           <p:cNvPr id="2" name="Título 1">
             <a:extLst>
               <a:ext uri="{FF2B5EF4-FFF2-40B4-BE49-F238E27FC236}">
-                <a16:creationId xmlns:a16="http://schemas.microsoft.com/office/drawing/2014/main" id="{01D0947A-594D-A8D5-95F3-38EB04C6BDB6}"/>
+                <a16:creationId xmlns:a16="http://schemas.microsoft.com/office/drawing/2014/main" xmlns="" id="{01D0947A-594D-A8D5-95F3-38EB04C6BDB6}"/>
               </a:ext>
             </a:extLst>
           </p:cNvPr>
@@ -20046,7 +20158,7 @@
               <p:cNvPr id="3" name="Espaço Reservado para Conteúdo 2">
                 <a:extLst>
                   <a:ext uri="{FF2B5EF4-FFF2-40B4-BE49-F238E27FC236}">
-                    <a16:creationId xmlns:a16="http://schemas.microsoft.com/office/drawing/2014/main" id="{DDBA288E-BBB8-E157-840C-AA685AD7D65C}"/>
+                    <a16:creationId xmlns:a16="http://schemas.microsoft.com/office/drawing/2014/main" xmlns="" id="{DDBA288E-BBB8-E157-840C-AA685AD7D65C}"/>
                   </a:ext>
                 </a:extLst>
               </p:cNvPr>
@@ -20957,7 +21069,7 @@
           <p:cNvPr id="2" name="Título 1">
             <a:extLst>
               <a:ext uri="{FF2B5EF4-FFF2-40B4-BE49-F238E27FC236}">
-                <a16:creationId xmlns:a16="http://schemas.microsoft.com/office/drawing/2014/main" id="{E0F1FD81-6095-2AF0-8691-34E55B8A93B5}"/>
+                <a16:creationId xmlns:a16="http://schemas.microsoft.com/office/drawing/2014/main" xmlns="" id="{E0F1FD81-6095-2AF0-8691-34E55B8A93B5}"/>
               </a:ext>
             </a:extLst>
           </p:cNvPr>
@@ -20991,7 +21103,7 @@
               <p:cNvPr id="3" name="Espaço Reservado para Conteúdo 2">
                 <a:extLst>
                   <a:ext uri="{FF2B5EF4-FFF2-40B4-BE49-F238E27FC236}">
-                    <a16:creationId xmlns:a16="http://schemas.microsoft.com/office/drawing/2014/main" id="{BB734B24-DA50-860B-5D55-C33F6F451B6F}"/>
+                    <a16:creationId xmlns:a16="http://schemas.microsoft.com/office/drawing/2014/main" xmlns="" id="{BB734B24-DA50-860B-5D55-C33F6F451B6F}"/>
                   </a:ext>
                 </a:extLst>
               </p:cNvPr>
@@ -21555,7 +21667,7 @@
           <p:cNvPr id="4" name="Imagem 5">
             <a:extLst>
               <a:ext uri="{FF2B5EF4-FFF2-40B4-BE49-F238E27FC236}">
-                <a16:creationId xmlns:a16="http://schemas.microsoft.com/office/drawing/2014/main" id="{535159CB-11DC-74B8-5C5F-D571CD018327}"/>
+                <a16:creationId xmlns:a16="http://schemas.microsoft.com/office/drawing/2014/main" xmlns="" id="{535159CB-11DC-74B8-5C5F-D571CD018327}"/>
               </a:ext>
             </a:extLst>
           </p:cNvPr>
@@ -21621,7 +21733,7 @@
           <p:cNvPr id="2" name="Título 1">
             <a:extLst>
               <a:ext uri="{FF2B5EF4-FFF2-40B4-BE49-F238E27FC236}">
-                <a16:creationId xmlns:a16="http://schemas.microsoft.com/office/drawing/2014/main" id="{FC175046-E9DF-FCC8-C62B-B00332089713}"/>
+                <a16:creationId xmlns:a16="http://schemas.microsoft.com/office/drawing/2014/main" xmlns="" id="{FC175046-E9DF-FCC8-C62B-B00332089713}"/>
               </a:ext>
             </a:extLst>
           </p:cNvPr>
@@ -21655,7 +21767,7 @@
               <p:cNvPr id="3" name="Espaço Reservado para Conteúdo 2">
                 <a:extLst>
                   <a:ext uri="{FF2B5EF4-FFF2-40B4-BE49-F238E27FC236}">
-                    <a16:creationId xmlns:a16="http://schemas.microsoft.com/office/drawing/2014/main" id="{24721BB7-DBA3-D8BF-7F98-ED91BD59DAEC}"/>
+                    <a16:creationId xmlns:a16="http://schemas.microsoft.com/office/drawing/2014/main" xmlns="" id="{24721BB7-DBA3-D8BF-7F98-ED91BD59DAEC}"/>
                   </a:ext>
                 </a:extLst>
               </p:cNvPr>
@@ -21963,7 +22075,7 @@
           <p:cNvPr id="6" name="Imagem 5">
             <a:extLst>
               <a:ext uri="{FF2B5EF4-FFF2-40B4-BE49-F238E27FC236}">
-                <a16:creationId xmlns:a16="http://schemas.microsoft.com/office/drawing/2014/main" id="{FF78CF76-EB26-3FAE-0391-E452288FA28E}"/>
+                <a16:creationId xmlns:a16="http://schemas.microsoft.com/office/drawing/2014/main" xmlns="" id="{FF78CF76-EB26-3FAE-0391-E452288FA28E}"/>
               </a:ext>
             </a:extLst>
           </p:cNvPr>
@@ -21999,7 +22111,7 @@
           <p:cNvPr id="5" name="Rectangle 2">
             <a:extLst>
               <a:ext uri="{FF2B5EF4-FFF2-40B4-BE49-F238E27FC236}">
-                <a16:creationId xmlns:a16="http://schemas.microsoft.com/office/drawing/2014/main" id="{0357C04D-3666-45D0-A263-597819F48D09}"/>
+                <a16:creationId xmlns:a16="http://schemas.microsoft.com/office/drawing/2014/main" xmlns="" id="{0357C04D-3666-45D0-A263-597819F48D09}"/>
               </a:ext>
             </a:extLst>
           </p:cNvPr>
@@ -22227,7 +22339,7 @@
           <p:cNvPr id="4" name="Título 1">
             <a:extLst>
               <a:ext uri="{FF2B5EF4-FFF2-40B4-BE49-F238E27FC236}">
-                <a16:creationId xmlns:a16="http://schemas.microsoft.com/office/drawing/2014/main" id="{32666AC8-2E17-4DB4-B0F5-60C640CCFD2E}"/>
+                <a16:creationId xmlns:a16="http://schemas.microsoft.com/office/drawing/2014/main" xmlns="" id="{32666AC8-2E17-4DB4-B0F5-60C640CCFD2E}"/>
               </a:ext>
             </a:extLst>
           </p:cNvPr>
@@ -22501,7 +22613,7 @@
           <p:cNvPr id="4" name="Picture 2" descr="Ana Barros (@anathinker) | Twitter">
             <a:extLst>
               <a:ext uri="{FF2B5EF4-FFF2-40B4-BE49-F238E27FC236}">
-                <a16:creationId xmlns:a16="http://schemas.microsoft.com/office/drawing/2014/main" id="{AF3F0044-4F7D-98F6-34C1-8351487DFDAA}"/>
+                <a16:creationId xmlns:a16="http://schemas.microsoft.com/office/drawing/2014/main" xmlns="" id="{AF3F0044-4F7D-98F6-34C1-8351487DFDAA}"/>
               </a:ext>
             </a:extLst>
           </p:cNvPr>
@@ -22548,7 +22660,7 @@
           <p:cNvPr id="5" name="Picture 6" descr="Analyzing Text Classification Techniques on Youtube Data">
             <a:extLst>
               <a:ext uri="{FF2B5EF4-FFF2-40B4-BE49-F238E27FC236}">
-                <a16:creationId xmlns:a16="http://schemas.microsoft.com/office/drawing/2014/main" id="{0E6041F8-AB14-54C0-C790-0288A3AC8FBA}"/>
+                <a16:creationId xmlns:a16="http://schemas.microsoft.com/office/drawing/2014/main" xmlns="" id="{0E6041F8-AB14-54C0-C790-0288A3AC8FBA}"/>
               </a:ext>
             </a:extLst>
           </p:cNvPr>
@@ -22593,7 +22705,7 @@
           <p:cNvPr id="6" name="Picture 2" descr="Sentiment Fig 1">
             <a:extLst>
               <a:ext uri="{FF2B5EF4-FFF2-40B4-BE49-F238E27FC236}">
-                <a16:creationId xmlns:a16="http://schemas.microsoft.com/office/drawing/2014/main" id="{1E7CC96F-55AB-1482-92F6-240F8E2E0D1E}"/>
+                <a16:creationId xmlns:a16="http://schemas.microsoft.com/office/drawing/2014/main" xmlns="" id="{1E7CC96F-55AB-1482-92F6-240F8E2E0D1E}"/>
               </a:ext>
             </a:extLst>
           </p:cNvPr>
@@ -22880,7 +22992,7 @@
           <p:cNvPr id="7" name="Picture 2" descr="Ana Barros (@anathinker) | Twitter">
             <a:extLst>
               <a:ext uri="{FF2B5EF4-FFF2-40B4-BE49-F238E27FC236}">
-                <a16:creationId xmlns:a16="http://schemas.microsoft.com/office/drawing/2014/main" id="{A2D479C7-0684-420F-2CCD-64C3DB79FDAB}"/>
+                <a16:creationId xmlns:a16="http://schemas.microsoft.com/office/drawing/2014/main" xmlns="" id="{A2D479C7-0684-420F-2CCD-64C3DB79FDAB}"/>
               </a:ext>
             </a:extLst>
           </p:cNvPr>
@@ -22927,7 +23039,7 @@
           <p:cNvPr id="8" name="Picture 6" descr="Analyzing Text Classification Techniques on Youtube Data">
             <a:extLst>
               <a:ext uri="{FF2B5EF4-FFF2-40B4-BE49-F238E27FC236}">
-                <a16:creationId xmlns:a16="http://schemas.microsoft.com/office/drawing/2014/main" id="{A59F8A2C-ACDF-09C7-B528-9064CEF3B848}"/>
+                <a16:creationId xmlns:a16="http://schemas.microsoft.com/office/drawing/2014/main" xmlns="" id="{A59F8A2C-ACDF-09C7-B528-9064CEF3B848}"/>
               </a:ext>
             </a:extLst>
           </p:cNvPr>
@@ -22972,7 +23084,7 @@
           <p:cNvPr id="9" name="Picture 2" descr="Sentiment Fig 1">
             <a:extLst>
               <a:ext uri="{FF2B5EF4-FFF2-40B4-BE49-F238E27FC236}">
-                <a16:creationId xmlns:a16="http://schemas.microsoft.com/office/drawing/2014/main" id="{E178FF16-CC3F-C34B-6C8B-874BC4FA61A4}"/>
+                <a16:creationId xmlns:a16="http://schemas.microsoft.com/office/drawing/2014/main" xmlns="" id="{E178FF16-CC3F-C34B-6C8B-874BC4FA61A4}"/>
               </a:ext>
             </a:extLst>
           </p:cNvPr>
@@ -23049,7 +23161,7 @@
           <p:cNvPr id="2" name="Título 1">
             <a:extLst>
               <a:ext uri="{FF2B5EF4-FFF2-40B4-BE49-F238E27FC236}">
-                <a16:creationId xmlns:a16="http://schemas.microsoft.com/office/drawing/2014/main" id="{95206997-C98C-FF52-62A1-725EEA7A8A7E}"/>
+                <a16:creationId xmlns:a16="http://schemas.microsoft.com/office/drawing/2014/main" xmlns="" id="{95206997-C98C-FF52-62A1-725EEA7A8A7E}"/>
               </a:ext>
             </a:extLst>
           </p:cNvPr>
@@ -23072,14 +23184,14 @@
           </a:p>
         </p:txBody>
       </p:sp>
-      <mc:AlternateContent xmlns:mc="http://schemas.openxmlformats.org/markup-compatibility/2006" xmlns:a14="http://schemas.microsoft.com/office/drawing/2010/main">
-        <mc:Choice Requires="a14">
+      <mc:AlternateContent xmlns:mc="http://schemas.openxmlformats.org/markup-compatibility/2006">
+        <mc:Choice xmlns:a14="http://schemas.microsoft.com/office/drawing/2010/main" Requires="a14">
           <p:sp>
             <p:nvSpPr>
               <p:cNvPr id="3" name="Espaço Reservado para Conteúdo 2">
                 <a:extLst>
                   <a:ext uri="{FF2B5EF4-FFF2-40B4-BE49-F238E27FC236}">
-                    <a16:creationId xmlns:a16="http://schemas.microsoft.com/office/drawing/2014/main" id="{50B99F56-FF18-D044-7799-0502D4F6A5FB}"/>
+                    <a16:creationId xmlns:a16="http://schemas.microsoft.com/office/drawing/2014/main" xmlns="" id="{50B99F56-FF18-D044-7799-0502D4F6A5FB}"/>
                   </a:ext>
                 </a:extLst>
               </p:cNvPr>
@@ -23585,7 +23697,7 @@
             </p:txBody>
           </p:sp>
         </mc:Choice>
-        <mc:Fallback xmlns="">
+        <mc:Fallback>
           <p:sp>
             <p:nvSpPr>
               <p:cNvPr id="3" name="Espaço Reservado para Conteúdo 2">
@@ -23664,7 +23776,7 @@
           <p:cNvPr id="2" name="Título 1">
             <a:extLst>
               <a:ext uri="{FF2B5EF4-FFF2-40B4-BE49-F238E27FC236}">
-                <a16:creationId xmlns:a16="http://schemas.microsoft.com/office/drawing/2014/main" id="{40D4148F-5E93-6FF0-6B66-AC9E3B82640A}"/>
+                <a16:creationId xmlns:a16="http://schemas.microsoft.com/office/drawing/2014/main" xmlns="" id="{40D4148F-5E93-6FF0-6B66-AC9E3B82640A}"/>
               </a:ext>
             </a:extLst>
           </p:cNvPr>
@@ -23694,7 +23806,7 @@
               <p:cNvPr id="3" name="Espaço Reservado para Conteúdo 2">
                 <a:extLst>
                   <a:ext uri="{FF2B5EF4-FFF2-40B4-BE49-F238E27FC236}">
-                    <a16:creationId xmlns:a16="http://schemas.microsoft.com/office/drawing/2014/main" id="{A4787C4F-F235-6888-5AFF-2CB1361FF6FD}"/>
+                    <a16:creationId xmlns:a16="http://schemas.microsoft.com/office/drawing/2014/main" xmlns="" id="{A4787C4F-F235-6888-5AFF-2CB1361FF6FD}"/>
                   </a:ext>
                 </a:extLst>
               </p:cNvPr>
@@ -25443,7 +25555,7 @@
           <p:cNvPr id="21" name="Mais 7">
             <a:extLst>
               <a:ext uri="{FF2B5EF4-FFF2-40B4-BE49-F238E27FC236}">
-                <a16:creationId xmlns:a16="http://schemas.microsoft.com/office/drawing/2014/main" id="{7B31CAF2-5F3C-E55A-EC75-167BCE74F1F7}"/>
+                <a16:creationId xmlns:a16="http://schemas.microsoft.com/office/drawing/2014/main" xmlns="" id="{7B31CAF2-5F3C-E55A-EC75-167BCE74F1F7}"/>
               </a:ext>
             </a:extLst>
           </p:cNvPr>
@@ -25527,7 +25639,7 @@
           <p:cNvPr id="2" name="Título 1">
             <a:extLst>
               <a:ext uri="{FF2B5EF4-FFF2-40B4-BE49-F238E27FC236}">
-                <a16:creationId xmlns:a16="http://schemas.microsoft.com/office/drawing/2014/main" id="{F625D040-A3FE-41E3-3BD0-3C0548CFEAD3}"/>
+                <a16:creationId xmlns:a16="http://schemas.microsoft.com/office/drawing/2014/main" xmlns="" id="{F625D040-A3FE-41E3-3BD0-3C0548CFEAD3}"/>
               </a:ext>
             </a:extLst>
           </p:cNvPr>
@@ -25557,7 +25669,7 @@
               <p:cNvPr id="3" name="Espaço Reservado para Conteúdo 2">
                 <a:extLst>
                   <a:ext uri="{FF2B5EF4-FFF2-40B4-BE49-F238E27FC236}">
-                    <a16:creationId xmlns:a16="http://schemas.microsoft.com/office/drawing/2014/main" id="{3BAFA38F-B924-7049-765D-660ED8C4845B}"/>
+                    <a16:creationId xmlns:a16="http://schemas.microsoft.com/office/drawing/2014/main" xmlns="" id="{3BAFA38F-B924-7049-765D-660ED8C4845B}"/>
                   </a:ext>
                 </a:extLst>
               </p:cNvPr>
@@ -26314,7 +26426,7 @@
           <p:cNvPr id="2" name="Título 1">
             <a:extLst>
               <a:ext uri="{FF2B5EF4-FFF2-40B4-BE49-F238E27FC236}">
-                <a16:creationId xmlns:a16="http://schemas.microsoft.com/office/drawing/2014/main" id="{685EDE22-7739-3353-3DBC-8480197DC616}"/>
+                <a16:creationId xmlns:a16="http://schemas.microsoft.com/office/drawing/2014/main" xmlns="" id="{685EDE22-7739-3353-3DBC-8480197DC616}"/>
               </a:ext>
             </a:extLst>
           </p:cNvPr>
@@ -26344,7 +26456,7 @@
               <p:cNvPr id="3" name="Espaço Reservado para Conteúdo 2">
                 <a:extLst>
                   <a:ext uri="{FF2B5EF4-FFF2-40B4-BE49-F238E27FC236}">
-                    <a16:creationId xmlns:a16="http://schemas.microsoft.com/office/drawing/2014/main" id="{2145CEE8-2FB2-6EEA-841B-CC93323A97A6}"/>
+                    <a16:creationId xmlns:a16="http://schemas.microsoft.com/office/drawing/2014/main" xmlns="" id="{2145CEE8-2FB2-6EEA-841B-CC93323A97A6}"/>
                   </a:ext>
                 </a:extLst>
               </p:cNvPr>
